--- a/PADB_Simple_and_Interactive.pptx
+++ b/PADB_Simple_and_Interactive.pptx
@@ -7738,7 +7738,7 @@
               </a:defRPr>
             </a:pPr>
             <a:r>
-              <a:t>Step 1 — Generate the job.json</a:t>
+              <a:t>Step 1 — Drop the Pod, Generate the Job</a:t>
             </a:r>
           </a:p>
         </p:txBody>
@@ -7849,116 +7849,45 @@
           </a:p>
         </p:txBody>
       </p:sp>
-      <p:sp>
-        <p:nvSpPr>
-          <p:cNvPr id="8" name="TextBox 7"/>
-          <p:cNvSpPr txBox="1"/>
-          <p:nvPr/>
-        </p:nvSpPr>
-        <p:spPr>
-          <a:xfrm>
-            <a:off x="548640" y="1691640"/>
-            <a:ext cx="11064240" cy="365760"/>
-          </a:xfrm>
-          <a:prstGeom prst="rect">
-            <a:avLst/>
-          </a:prstGeom>
-          <a:noFill/>
-        </p:spPr>
-        <p:txBody>
-          <a:bodyPr wrap="square">
-            <a:spAutoFit/>
-          </a:bodyPr>
-          <a:lstStyle/>
-          <a:p>
-            <a:pPr>
-              <a:spcAft>
-                <a:spcPts val="1000"/>
-              </a:spcAft>
-            </a:pPr>
-            <a:r>
-              <a:rPr sz="1900">
-                <a:solidFill>
-                  <a:srgbClr val="1B2A4A"/>
-                </a:solidFill>
-                <a:latin typeface="Segoe UI"/>
-              </a:rPr>
-              <a:t>•  From the Data folder, one command:</a:t>
-            </a:r>
-          </a:p>
-        </p:txBody>
-      </p:sp>
-      <p:sp>
-        <p:nvSpPr>
-          <p:cNvPr id="9" name="Rounded Rectangle 8"/>
-          <p:cNvSpPr/>
-          <p:nvPr/>
-        </p:nvSpPr>
-        <p:spPr>
-          <a:xfrm>
-            <a:off x="548640" y="2103120"/>
-            <a:ext cx="11064240" cy="502920"/>
-          </a:xfrm>
-          <a:prstGeom prst="roundRect">
-            <a:avLst>
-              <a:gd name="adj" fmla="val 4000"/>
-            </a:avLst>
-          </a:prstGeom>
-          <a:solidFill>
-            <a:srgbClr val="282C34"/>
-          </a:solidFill>
-          <a:ln>
+      <p:pic>
+        <p:nvPicPr>
+          <p:cNvPr id="8" name="Picture 7" descr="t1_step1.png"/>
+          <p:cNvPicPr>
+            <a:picLocks noChangeAspect="1"/>
+          </p:cNvPicPr>
+          <p:nvPr/>
+        </p:nvPicPr>
+        <p:blipFill>
+          <a:blip r:embed="rId2"/>
+          <a:stretch>
+            <a:fillRect/>
+          </a:stretch>
+        </p:blipFill>
+        <p:spPr>
+          <a:xfrm>
+            <a:off x="548640" y="1554480"/>
+            <a:ext cx="6949440" cy="4467497"/>
+          </a:xfrm>
+          <a:prstGeom prst="rect">
+            <a:avLst/>
+          </a:prstGeom>
+          <a:ln w="9525">
             <a:solidFill>
-              <a:srgbClr val="111318"/>
+              <a:srgbClr val="CCCCCC"/>
             </a:solidFill>
           </a:ln>
-          <a:effectLst/>
-        </p:spPr>
-        <p:style>
-          <a:lnRef idx="1">
-            <a:schemeClr val="accent1"/>
-          </a:lnRef>
-          <a:fillRef idx="3">
-            <a:schemeClr val="accent1"/>
-          </a:fillRef>
-          <a:effectRef idx="2">
-            <a:schemeClr val="accent1"/>
-          </a:effectRef>
-          <a:fontRef idx="minor">
-            <a:schemeClr val="lt1"/>
-          </a:fontRef>
-        </p:style>
-        <p:txBody>
-          <a:bodyPr rtlCol="0" anchor="t" wrap="square" lIns="228600" rIns="228600" tIns="164592" bIns="164592"/>
-          <a:lstStyle/>
-          <a:p>
-            <a:pPr algn="l">
-              <a:spcAft>
-                <a:spcPts val="200"/>
-              </a:spcAft>
-            </a:pPr>
-            <a:r>
-              <a:rPr sz="1500">
-                <a:solidFill>
-                  <a:srgbClr val="E6E6E6"/>
-                </a:solidFill>
-                <a:latin typeface="Consolas"/>
-              </a:rPr>
-              <a:t>py padb_make_job.py MaxPowerTutorial1.pod --module Tutorial --mode simple</a:t>
-            </a:r>
-          </a:p>
-        </p:txBody>
-      </p:sp>
-      <p:sp>
-        <p:nvSpPr>
-          <p:cNvPr id="10" name="TextBox 9"/>
-          <p:cNvSpPr txBox="1"/>
-          <p:nvPr/>
-        </p:nvSpPr>
-        <p:spPr>
-          <a:xfrm>
-            <a:off x="548640" y="2788920"/>
-            <a:ext cx="11064240" cy="365760"/>
+        </p:spPr>
+      </p:pic>
+      <p:sp>
+        <p:nvSpPr>
+          <p:cNvPr id="9" name="TextBox 8"/>
+          <p:cNvSpPr txBox="1"/>
+          <p:nvPr/>
+        </p:nvSpPr>
+        <p:spPr>
+          <a:xfrm>
+            <a:off x="7772400" y="1828800"/>
+            <a:ext cx="3931920" cy="4114800"/>
           </a:xfrm>
           <a:prstGeom prst="rect">
             <a:avLst/>
@@ -7977,186 +7906,72 @@
               </a:spcAft>
             </a:pPr>
             <a:r>
-              <a:rPr sz="1800">
+              <a:rPr sz="1400" b="1">
                 <a:solidFill>
                   <a:srgbClr val="1B2A4A"/>
                 </a:solidFill>
-                <a:latin typeface="Segoe UI"/>
-              </a:rPr>
-              <a:t>•  Writes MaxPowerTutorial1_job.json next to the pod:</a:t>
-            </a:r>
-          </a:p>
-        </p:txBody>
-      </p:sp>
-      <p:sp>
-        <p:nvSpPr>
-          <p:cNvPr id="11" name="Rounded Rectangle 10"/>
-          <p:cNvSpPr/>
-          <p:nvPr/>
-        </p:nvSpPr>
-        <p:spPr>
-          <a:xfrm>
-            <a:off x="548640" y="3200400"/>
-            <a:ext cx="11064240" cy="2286000"/>
-          </a:xfrm>
-          <a:prstGeom prst="roundRect">
-            <a:avLst>
-              <a:gd name="adj" fmla="val 4000"/>
-            </a:avLst>
-          </a:prstGeom>
-          <a:solidFill>
-            <a:srgbClr val="282C34"/>
-          </a:solidFill>
-          <a:ln>
-            <a:solidFill>
-              <a:srgbClr val="111318"/>
-            </a:solidFill>
-          </a:ln>
-          <a:effectLst/>
-        </p:spPr>
-        <p:style>
-          <a:lnRef idx="1">
-            <a:schemeClr val="accent1"/>
-          </a:lnRef>
-          <a:fillRef idx="3">
-            <a:schemeClr val="accent1"/>
-          </a:fillRef>
-          <a:effectRef idx="2">
-            <a:schemeClr val="accent1"/>
-          </a:effectRef>
-          <a:fontRef idx="minor">
-            <a:schemeClr val="lt1"/>
-          </a:fontRef>
-        </p:style>
-        <p:txBody>
-          <a:bodyPr rtlCol="0" anchor="t" wrap="square" lIns="228600" rIns="228600" tIns="164592" bIns="164592"/>
-          <a:lstStyle/>
-          <a:p>
-            <a:pPr algn="l">
-              <a:spcAft>
-                <a:spcPts val="200"/>
-              </a:spcAft>
-            </a:pPr>
-            <a:r>
-              <a:rPr sz="1350">
-                <a:solidFill>
-                  <a:srgbClr val="E6E6E6"/>
-                </a:solidFill>
-                <a:latin typeface="Consolas"/>
-              </a:rPr>
-              <a:t>{</a:t>
-            </a:r>
-          </a:p>
-          <a:p>
-            <a:pPr algn="l">
-              <a:spcAft>
-                <a:spcPts val="200"/>
-              </a:spcAft>
-            </a:pPr>
-            <a:r>
-              <a:rPr sz="1350">
-                <a:solidFill>
-                  <a:srgbClr val="E6E6E6"/>
-                </a:solidFill>
-                <a:latin typeface="Consolas"/>
-              </a:rPr>
-              <a:t>  "description": "SG6311A MaxPowerTutorial1 — Simple mode",</a:t>
-            </a:r>
-          </a:p>
-          <a:p>
-            <a:pPr algn="l">
-              <a:spcAft>
-                <a:spcPts val="200"/>
-              </a:spcAft>
-            </a:pPr>
-            <a:r>
-              <a:rPr sz="1350">
-                <a:solidFill>
-                  <a:srgbClr val="E6E6E6"/>
-                </a:solidFill>
-                <a:latin typeface="Consolas"/>
-              </a:rPr>
-              <a:t>  "pod": "MaxPowerTutorial1.pod",</a:t>
-            </a:r>
-          </a:p>
-          <a:p>
-            <a:pPr algn="l">
-              <a:spcAft>
-                <a:spcPts val="200"/>
-              </a:spcAft>
-            </a:pPr>
-            <a:r>
-              <a:rPr sz="1350">
-                <a:solidFill>
-                  <a:srgbClr val="E6E6E6"/>
-                </a:solidFill>
-                <a:latin typeface="Consolas"/>
-              </a:rPr>
-              <a:t>  "mode": "simple",</a:t>
-            </a:r>
-          </a:p>
-          <a:p>
-            <a:pPr algn="l">
-              <a:spcAft>
-                <a:spcPts val="200"/>
-              </a:spcAft>
-            </a:pPr>
-            <a:r>
-              <a:rPr sz="1350">
-                <a:solidFill>
-                  <a:srgbClr val="E6E6E6"/>
-                </a:solidFill>
-                <a:latin typeface="Consolas"/>
-              </a:rPr>
-              <a:t>  "results_dir": "MaxPowerTutorial1_simple_results",</a:t>
-            </a:r>
-          </a:p>
-          <a:p>
-            <a:pPr algn="l">
-              <a:spcAft>
-                <a:spcPts val="200"/>
-              </a:spcAft>
-            </a:pPr>
-            <a:r>
-              <a:rPr sz="1350">
-                <a:solidFill>
-                  <a:srgbClr val="E6E6E6"/>
-                </a:solidFill>
-                <a:latin typeface="Consolas"/>
-              </a:rPr>
-              <a:t>  "publish": { "destination":</a:t>
-            </a:r>
-          </a:p>
-          <a:p>
-            <a:pPr algn="l">
-              <a:spcAft>
-                <a:spcPts val="200"/>
-              </a:spcAft>
-            </a:pPr>
-            <a:r>
-              <a:rPr sz="1350">
-                <a:solidFill>
-                  <a:srgbClr val="E6E6E6"/>
-                </a:solidFill>
-                <a:latin typeface="Consolas"/>
-              </a:rPr>
-              <a:t>    "...\\PADB-Simple\\Tutorial\\MaxPowerTutorial1" }</a:t>
-            </a:r>
-          </a:p>
-          <a:p>
-            <a:pPr algn="l">
-              <a:spcAft>
-                <a:spcPts val="200"/>
-              </a:spcAft>
-            </a:pPr>
-            <a:r>
-              <a:rPr sz="1350">
-                <a:solidFill>
-                  <a:srgbClr val="E6E6E6"/>
-                </a:solidFill>
-                <a:latin typeface="Consolas"/>
-              </a:rPr>
-              <a:t>}</a:t>
+              </a:rPr>
+              <a:t>py webapp\padb_web.py</a:t>
+            </a:r>
+          </a:p>
+          <a:p>
+            <a:pPr>
+              <a:spcAft>
+                <a:spcPts val="1000"/>
+              </a:spcAft>
+            </a:pPr>
+            <a:r>
+              <a:rPr sz="1500" b="0">
+                <a:solidFill>
+                  <a:srgbClr val="555555"/>
+                </a:solidFill>
+              </a:rPr>
+              <a:t>Drag MaxPowerTutorial1.pod onto the page</a:t>
+            </a:r>
+          </a:p>
+          <a:p>
+            <a:pPr>
+              <a:spcAft>
+                <a:spcPts val="1000"/>
+              </a:spcAft>
+            </a:pPr>
+            <a:r>
+              <a:rPr sz="1500" b="0">
+                <a:solidFill>
+                  <a:srgbClr val="555555"/>
+                </a:solidFill>
+              </a:rPr>
+              <a:t>Analytics parse instantly — no extraction needed to preview them</a:t>
+            </a:r>
+          </a:p>
+          <a:p>
+            <a:pPr>
+              <a:spcAft>
+                <a:spcPts val="1000"/>
+              </a:spcAft>
+            </a:pPr>
+            <a:r>
+              <a:rPr sz="1500" b="0">
+                <a:solidFill>
+                  <a:srgbClr val="555555"/>
+                </a:solidFill>
+              </a:rPr>
+              <a:t>Mode: simple, Module: Tutorial</a:t>
+            </a:r>
+          </a:p>
+          <a:p>
+            <a:pPr>
+              <a:spcAft>
+                <a:spcPts val="1000"/>
+              </a:spcAft>
+            </a:pPr>
+            <a:r>
+              <a:rPr sz="1500" b="0">
+                <a:solidFill>
+                  <a:srgbClr val="555555"/>
+                </a:solidFill>
+              </a:rPr>
+              <a:t>Click Generate Job — writes MaxPowerTutorial1_job.json next to the pod</a:t>
             </a:r>
           </a:p>
         </p:txBody>
@@ -8649,7 +8464,7 @@
               </a:defRPr>
             </a:pPr>
             <a:r>
-              <a:t>Step 2 — Run It (Real PADB-R.exe)</a:t>
+              <a:t>Step 2 — Check the Box, Run It</a:t>
             </a:r>
           </a:p>
         </p:txBody>
@@ -8760,67 +8575,35 @@
           </a:p>
         </p:txBody>
       </p:sp>
-      <p:sp>
-        <p:nvSpPr>
-          <p:cNvPr id="8" name="Rounded Rectangle 7"/>
-          <p:cNvSpPr/>
-          <p:nvPr/>
-        </p:nvSpPr>
-        <p:spPr>
-          <a:xfrm>
-            <a:off x="548640" y="1691640"/>
-            <a:ext cx="11064240" cy="502920"/>
-          </a:xfrm>
-          <a:prstGeom prst="roundRect">
-            <a:avLst>
-              <a:gd name="adj" fmla="val 4000"/>
-            </a:avLst>
-          </a:prstGeom>
-          <a:solidFill>
-            <a:srgbClr val="282C34"/>
-          </a:solidFill>
-          <a:ln>
+      <p:pic>
+        <p:nvPicPr>
+          <p:cNvPr id="8" name="Picture 7" descr="t1_step2.png"/>
+          <p:cNvPicPr>
+            <a:picLocks noChangeAspect="1"/>
+          </p:cNvPicPr>
+          <p:nvPr/>
+        </p:nvPicPr>
+        <p:blipFill>
+          <a:blip r:embed="rId2"/>
+          <a:stretch>
+            <a:fillRect/>
+          </a:stretch>
+        </p:blipFill>
+        <p:spPr>
+          <a:xfrm>
+            <a:off x="548640" y="1554480"/>
+            <a:ext cx="7863840" cy="5055326"/>
+          </a:xfrm>
+          <a:prstGeom prst="rect">
+            <a:avLst/>
+          </a:prstGeom>
+          <a:ln w="9525">
             <a:solidFill>
-              <a:srgbClr val="111318"/>
+              <a:srgbClr val="CCCCCC"/>
             </a:solidFill>
           </a:ln>
-          <a:effectLst/>
-        </p:spPr>
-        <p:style>
-          <a:lnRef idx="1">
-            <a:schemeClr val="accent1"/>
-          </a:lnRef>
-          <a:fillRef idx="3">
-            <a:schemeClr val="accent1"/>
-          </a:fillRef>
-          <a:effectRef idx="2">
-            <a:schemeClr val="accent1"/>
-          </a:effectRef>
-          <a:fontRef idx="minor">
-            <a:schemeClr val="lt1"/>
-          </a:fontRef>
-        </p:style>
-        <p:txBody>
-          <a:bodyPr rtlCol="0" anchor="t" wrap="square" lIns="228600" rIns="228600" tIns="164592" bIns="164592"/>
-          <a:lstStyle/>
-          <a:p>
-            <a:pPr algn="l">
-              <a:spcAft>
-                <a:spcPts val="200"/>
-              </a:spcAft>
-            </a:pPr>
-            <a:r>
-              <a:rPr sz="1500">
-                <a:solidFill>
-                  <a:srgbClr val="E6E6E6"/>
-                </a:solidFill>
-                <a:latin typeface="Consolas"/>
-              </a:rPr>
-              <a:t>py padb_run.py MaxPowerTutorial1_job.json</a:t>
-            </a:r>
-          </a:p>
-        </p:txBody>
-      </p:sp>
+        </p:spPr>
+      </p:pic>
       <p:sp>
         <p:nvSpPr>
           <p:cNvPr id="9" name="TextBox 8"/>
@@ -8829,8 +8612,8 @@
         </p:nvSpPr>
         <p:spPr>
           <a:xfrm>
-            <a:off x="548640" y="2377440"/>
-            <a:ext cx="11064240" cy="365760"/>
+            <a:off x="8686800" y="1828800"/>
+            <a:ext cx="3017520" cy="4114800"/>
           </a:xfrm>
           <a:prstGeom prst="rect">
             <a:avLst/>
@@ -8849,202 +8632,57 @@
               </a:spcAft>
             </a:pPr>
             <a:r>
-              <a:rPr sz="1800">
+              <a:rPr sz="1500" b="1">
                 <a:solidFill>
                   <a:srgbClr val="1B2A4A"/>
                 </a:solidFill>
-                <a:latin typeface="Segoe UI"/>
-              </a:rPr>
-              <a:t>•  What actually happened, this run:</a:t>
-            </a:r>
-          </a:p>
-        </p:txBody>
-      </p:sp>
-      <p:sp>
-        <p:nvSpPr>
-          <p:cNvPr id="10" name="Rounded Rectangle 9"/>
-          <p:cNvSpPr/>
-          <p:nvPr/>
-        </p:nvSpPr>
-        <p:spPr>
-          <a:xfrm>
-            <a:off x="548640" y="2743200"/>
-            <a:ext cx="11064240" cy="3063240"/>
-          </a:xfrm>
-          <a:prstGeom prst="roundRect">
-            <a:avLst>
-              <a:gd name="adj" fmla="val 4000"/>
-            </a:avLst>
-          </a:prstGeom>
-          <a:solidFill>
-            <a:srgbClr val="282C34"/>
-          </a:solidFill>
-          <a:ln>
-            <a:solidFill>
-              <a:srgbClr val="111318"/>
-            </a:solidFill>
-          </a:ln>
-          <a:effectLst/>
-        </p:spPr>
-        <p:style>
-          <a:lnRef idx="1">
-            <a:schemeClr val="accent1"/>
-          </a:lnRef>
-          <a:fillRef idx="3">
-            <a:schemeClr val="accent1"/>
-          </a:fillRef>
-          <a:effectRef idx="2">
-            <a:schemeClr val="accent1"/>
-          </a:effectRef>
-          <a:fontRef idx="minor">
-            <a:schemeClr val="lt1"/>
-          </a:fontRef>
-        </p:style>
-        <p:txBody>
-          <a:bodyPr rtlCol="0" anchor="t" wrap="square" lIns="228600" rIns="228600" tIns="164592" bIns="164592"/>
-          <a:lstStyle/>
-          <a:p>
-            <a:pPr algn="l">
-              <a:spcAft>
-                <a:spcPts val="200"/>
-              </a:spcAft>
-            </a:pPr>
-            <a:r>
-              <a:rPr sz="1400">
-                <a:solidFill>
-                  <a:srgbClr val="E6E6E6"/>
-                </a:solidFill>
-                <a:latin typeface="Consolas"/>
-              </a:rPr>
-              <a:t>Analytics found in pod: 6</a:t>
-            </a:r>
-          </a:p>
-          <a:p>
-            <a:pPr algn="l">
-              <a:spcAft>
-                <a:spcPts val="200"/>
-              </a:spcAft>
-            </a:pPr>
-            <a:r>
-              <a:rPr sz="1400">
-                <a:solidFill>
-                  <a:srgbClr val="E6E6E6"/>
-                </a:solidFill>
-                <a:latin typeface="Consolas"/>
-              </a:rPr>
-              <a:t>  [1] Scatter        Unleveled Log</a:t>
-            </a:r>
-          </a:p>
-          <a:p>
-            <a:pPr algn="l">
-              <a:spcAft>
-                <a:spcPts val="200"/>
-              </a:spcAft>
-            </a:pPr>
-            <a:r>
-              <a:rPr sz="1400">
-                <a:solidFill>
-                  <a:srgbClr val="E6E6E6"/>
-                </a:solidFill>
-                <a:latin typeface="Consolas"/>
-              </a:rPr>
-              <a:t>  [2] Scatter        Leveled Log   ...(4 Scatter total)</a:t>
-            </a:r>
-          </a:p>
-          <a:p>
-            <a:pPr algn="l">
-              <a:spcAft>
-                <a:spcPts val="200"/>
-              </a:spcAft>
-            </a:pPr>
-            <a:r>
-              <a:rPr sz="1400">
-                <a:solidFill>
-                  <a:srgbClr val="E6E6E6"/>
-                </a:solidFill>
-                <a:latin typeface="Consolas"/>
-              </a:rPr>
-              <a:t>  [5] SummaryPlot    Summary_Leveled_Linear</a:t>
-            </a:r>
-          </a:p>
-          <a:p>
-            <a:pPr algn="l">
-              <a:spcAft>
-                <a:spcPts val="200"/>
-              </a:spcAft>
-            </a:pPr>
-            <a:r>
-              <a:rPr sz="1400">
-                <a:solidFill>
-                  <a:srgbClr val="E6E6E6"/>
-                </a:solidFill>
-                <a:latin typeface="Consolas"/>
-              </a:rPr>
-              <a:t>  [6] Environmental  Environmental_Leveled_Linear</a:t>
-            </a:r>
-          </a:p>
-          <a:p>
-            <a:pPr algn="l">
-              <a:spcAft>
-                <a:spcPts val="200"/>
-              </a:spcAft>
-            </a:pPr>
-            <a:r>
-              <a:rPr sz="1400">
-                <a:solidFill>
-                  <a:srgbClr val="E6E6E6"/>
-                </a:solidFill>
-                <a:latin typeface="Consolas"/>
-              </a:rPr>
-              <a:t>PADB completed in 107.1s, return code: 0</a:t>
-            </a:r>
-          </a:p>
-          <a:p>
-            <a:pPr algn="l">
-              <a:spcAft>
-                <a:spcPts val="200"/>
-              </a:spcAft>
-            </a:pPr>
-            <a:r>
-              <a:rPr sz="1400">
-                <a:solidFill>
-                  <a:srgbClr val="E6E6E6"/>
-                </a:solidFill>
-                <a:latin typeface="Consolas"/>
-              </a:rPr>
-              <a:t>CSVs found: 6</a:t>
-            </a:r>
-          </a:p>
-          <a:p>
-            <a:pPr algn="l">
-              <a:spcAft>
-                <a:spcPts val="200"/>
-              </a:spcAft>
-            </a:pPr>
-            <a:r>
-              <a:rPr sz="1400">
-                <a:solidFill>
-                  <a:srgbClr val="E6E6E6"/>
-                </a:solidFill>
-                <a:latin typeface="Consolas"/>
-              </a:rPr>
-              <a:t>Publishing to ...\\PADB-Simple\\Tutorial\\MaxPowerTutorial1 ...</a:t>
-            </a:r>
-          </a:p>
-          <a:p>
-            <a:pPr algn="l">
-              <a:spcAft>
-                <a:spcPts val="200"/>
-              </a:spcAft>
-            </a:pPr>
-            <a:r>
-              <a:rPr sz="1400">
-                <a:solidFill>
-                  <a:srgbClr val="E6E6E6"/>
-                </a:solidFill>
-                <a:latin typeface="Consolas"/>
-              </a:rPr>
-              <a:t>Published OK.</a:t>
+              </a:rPr>
+              <a:t>Check the job's row, click Run Selected</a:t>
+            </a:r>
+          </a:p>
+          <a:p>
+            <a:pPr>
+              <a:spcAft>
+                <a:spcPts val="1000"/>
+              </a:spcAft>
+            </a:pPr>
+            <a:r>
+              <a:rPr sz="1400" b="0">
+                <a:solidFill>
+                  <a:srgbClr val="555555"/>
+                </a:solidFill>
+              </a:rPr>
+              <a:t>Real PADB-R.exe runs — the queue serializes it, so it's safe even if others are running jobs too</a:t>
+            </a:r>
+          </a:p>
+          <a:p>
+            <a:pPr>
+              <a:spcAft>
+                <a:spcPts val="1000"/>
+              </a:spcAft>
+            </a:pPr>
+            <a:r>
+              <a:rPr sz="1400" b="0">
+                <a:solidFill>
+                  <a:srgbClr val="555555"/>
+                </a:solidFill>
+              </a:rPr>
+              <a:t>Status panel streams the live log</a:t>
+            </a:r>
+          </a:p>
+          <a:p>
+            <a:pPr>
+              <a:spcAft>
+                <a:spcPts val="1000"/>
+              </a:spcAft>
+            </a:pPr>
+            <a:r>
+              <a:rPr sz="1400" b="0">
+                <a:solidFill>
+                  <a:srgbClr val="555555"/>
+                </a:solidFill>
+              </a:rPr>
+              <a:t>"done" + Open results link when it finishes — 107.1s, this run</a:t>
             </a:r>
           </a:p>
         </p:txBody>
@@ -9920,7 +9558,7 @@
               </a:defRPr>
             </a:pPr>
             <a:r>
-              <a:t>Step 1 — Generate Both Job Files</a:t>
+              <a:t>Step 1 — Drop the Pod, Generate the Job</a:t>
             </a:r>
           </a:p>
         </p:txBody>
@@ -10031,116 +9669,45 @@
           </a:p>
         </p:txBody>
       </p:sp>
-      <p:sp>
-        <p:nvSpPr>
-          <p:cNvPr id="8" name="TextBox 7"/>
-          <p:cNvSpPr txBox="1"/>
-          <p:nvPr/>
-        </p:nvSpPr>
-        <p:spPr>
-          <a:xfrm>
-            <a:off x="548640" y="1691640"/>
-            <a:ext cx="11064240" cy="365760"/>
-          </a:xfrm>
-          <a:prstGeom prst="rect">
-            <a:avLst/>
-          </a:prstGeom>
-          <a:noFill/>
-        </p:spPr>
-        <p:txBody>
-          <a:bodyPr wrap="square">
-            <a:spAutoFit/>
-          </a:bodyPr>
-          <a:lstStyle/>
-          <a:p>
-            <a:pPr>
-              <a:spcAft>
-                <a:spcPts val="1000"/>
-              </a:spcAft>
-            </a:pPr>
-            <a:r>
-              <a:rPr sz="1800">
-                <a:solidFill>
-                  <a:srgbClr val="1B2A4A"/>
-                </a:solidFill>
-                <a:latin typeface="Segoe UI"/>
-              </a:rPr>
-              <a:t>•  One command generates the run job AND one plot job per analytic:</a:t>
-            </a:r>
-          </a:p>
-        </p:txBody>
-      </p:sp>
-      <p:sp>
-        <p:nvSpPr>
-          <p:cNvPr id="9" name="Rounded Rectangle 8"/>
-          <p:cNvSpPr/>
-          <p:nvPr/>
-        </p:nvSpPr>
-        <p:spPr>
-          <a:xfrm>
-            <a:off x="548640" y="2103120"/>
-            <a:ext cx="11064240" cy="502920"/>
-          </a:xfrm>
-          <a:prstGeom prst="roundRect">
-            <a:avLst>
-              <a:gd name="adj" fmla="val 4000"/>
-            </a:avLst>
-          </a:prstGeom>
-          <a:solidFill>
-            <a:srgbClr val="282C34"/>
-          </a:solidFill>
-          <a:ln>
+      <p:pic>
+        <p:nvPicPr>
+          <p:cNvPr id="8" name="Picture 7" descr="t2_step1.png"/>
+          <p:cNvPicPr>
+            <a:picLocks noChangeAspect="1"/>
+          </p:cNvPicPr>
+          <p:nvPr/>
+        </p:nvPicPr>
+        <p:blipFill>
+          <a:blip r:embed="rId2"/>
+          <a:stretch>
+            <a:fillRect/>
+          </a:stretch>
+        </p:blipFill>
+        <p:spPr>
+          <a:xfrm>
+            <a:off x="548640" y="1554480"/>
+            <a:ext cx="6949440" cy="4467497"/>
+          </a:xfrm>
+          <a:prstGeom prst="rect">
+            <a:avLst/>
+          </a:prstGeom>
+          <a:ln w="9525">
             <a:solidFill>
-              <a:srgbClr val="111318"/>
+              <a:srgbClr val="CCCCCC"/>
             </a:solidFill>
           </a:ln>
-          <a:effectLst/>
-        </p:spPr>
-        <p:style>
-          <a:lnRef idx="1">
-            <a:schemeClr val="accent1"/>
-          </a:lnRef>
-          <a:fillRef idx="3">
-            <a:schemeClr val="accent1"/>
-          </a:fillRef>
-          <a:effectRef idx="2">
-            <a:schemeClr val="accent1"/>
-          </a:effectRef>
-          <a:fontRef idx="minor">
-            <a:schemeClr val="lt1"/>
-          </a:fontRef>
-        </p:style>
-        <p:txBody>
-          <a:bodyPr rtlCol="0" anchor="t" wrap="square" lIns="228600" rIns="228600" tIns="164592" bIns="164592"/>
-          <a:lstStyle/>
-          <a:p>
-            <a:pPr algn="l">
-              <a:spcAft>
-                <a:spcPts val="200"/>
-              </a:spcAft>
-            </a:pPr>
-            <a:r>
-              <a:rPr sz="1500">
-                <a:solidFill>
-                  <a:srgbClr val="E6E6E6"/>
-                </a:solidFill>
-                <a:latin typeface="Consolas"/>
-              </a:rPr>
-              <a:t>py padb_make_v2_job.py MaxPowerTutorial2.pod --module Tutorial</a:t>
-            </a:r>
-          </a:p>
-        </p:txBody>
-      </p:sp>
-      <p:sp>
-        <p:nvSpPr>
-          <p:cNvPr id="10" name="TextBox 9"/>
-          <p:cNvSpPr txBox="1"/>
-          <p:nvPr/>
-        </p:nvSpPr>
-        <p:spPr>
-          <a:xfrm>
-            <a:off x="548640" y="2788920"/>
-            <a:ext cx="11064240" cy="365760"/>
+        </p:spPr>
+      </p:pic>
+      <p:sp>
+        <p:nvSpPr>
+          <p:cNvPr id="9" name="TextBox 8"/>
+          <p:cNvSpPr txBox="1"/>
+          <p:nvPr/>
+        </p:nvSpPr>
+        <p:spPr>
+          <a:xfrm>
+            <a:off x="7772400" y="1828800"/>
+            <a:ext cx="3931920" cy="4114800"/>
           </a:xfrm>
           <a:prstGeom prst="rect">
             <a:avLst/>
@@ -10159,163 +9726,14 @@
               </a:spcAft>
             </a:pPr>
             <a:r>
-              <a:rPr sz="1800">
+              <a:rPr sz="1500" b="1">
                 <a:solidFill>
                   <a:srgbClr val="1B2A4A"/>
                 </a:solidFill>
-                <a:latin typeface="Segoe UI"/>
-              </a:rPr>
-              <a:t>•  Output:</a:t>
-            </a:r>
-          </a:p>
-        </p:txBody>
-      </p:sp>
-      <p:sp>
-        <p:nvSpPr>
-          <p:cNvPr id="11" name="Rounded Rectangle 10"/>
-          <p:cNvSpPr/>
-          <p:nvPr/>
-        </p:nvSpPr>
-        <p:spPr>
-          <a:xfrm>
-            <a:off x="548640" y="3200400"/>
-            <a:ext cx="11064240" cy="1737360"/>
-          </a:xfrm>
-          <a:prstGeom prst="roundRect">
-            <a:avLst>
-              <a:gd name="adj" fmla="val 4000"/>
-            </a:avLst>
-          </a:prstGeom>
-          <a:solidFill>
-            <a:srgbClr val="282C34"/>
-          </a:solidFill>
-          <a:ln>
-            <a:solidFill>
-              <a:srgbClr val="111318"/>
-            </a:solidFill>
-          </a:ln>
-          <a:effectLst/>
-        </p:spPr>
-        <p:style>
-          <a:lnRef idx="1">
-            <a:schemeClr val="accent1"/>
-          </a:lnRef>
-          <a:fillRef idx="3">
-            <a:schemeClr val="accent1"/>
-          </a:fillRef>
-          <a:effectRef idx="2">
-            <a:schemeClr val="accent1"/>
-          </a:effectRef>
-          <a:fontRef idx="minor">
-            <a:schemeClr val="lt1"/>
-          </a:fontRef>
-        </p:style>
-        <p:txBody>
-          <a:bodyPr rtlCol="0" anchor="t" wrap="square" lIns="228600" rIns="228600" tIns="164592" bIns="164592"/>
-          <a:lstStyle/>
-          <a:p>
-            <a:pPr algn="l">
-              <a:spcAft>
-                <a:spcPts val="200"/>
-              </a:spcAft>
-            </a:pPr>
-            <a:r>
-              <a:rPr sz="1400">
-                <a:solidFill>
-                  <a:srgbClr val="E6E6E6"/>
-                </a:solidFill>
-                <a:latin typeface="Consolas"/>
-              </a:rPr>
-              <a:t>Wrote MaxPowerTutorial2_run_job.json</a:t>
-            </a:r>
-          </a:p>
-          <a:p>
-            <a:pPr algn="l">
-              <a:spcAft>
-                <a:spcPts val="200"/>
-              </a:spcAft>
-            </a:pPr>
-            <a:r>
-              <a:rPr sz="1400">
-                <a:solidFill>
-                  <a:srgbClr val="E6E6E6"/>
-                </a:solidFill>
-                <a:latin typeface="Consolas"/>
-              </a:rPr>
-              <a:t>Wrote MaxPowerTutorial2_Leveled_Linear_v2_job.json</a:t>
-            </a:r>
-          </a:p>
-          <a:p>
-            <a:pPr algn="l">
-              <a:spcAft>
-                <a:spcPts val="200"/>
-              </a:spcAft>
-            </a:pPr>
-            <a:r>
-              <a:rPr sz="1400">
-                <a:solidFill>
-                  <a:srgbClr val="E6E6E6"/>
-                </a:solidFill>
-                <a:latin typeface="Consolas"/>
-              </a:rPr>
-              <a:t>  (csv_path PREDICTED -- verify after running the extraction job)</a:t>
-            </a:r>
-          </a:p>
-          <a:p>
-            <a:pPr algn="l">
-              <a:spcAft>
-                <a:spcPts val="200"/>
-              </a:spcAft>
-            </a:pPr>
-            <a:r>
-              <a:rPr sz="1400">
-                <a:solidFill>
-                  <a:srgbClr val="E6E6E6"/>
-                </a:solidFill>
-                <a:latin typeface="Consolas"/>
-              </a:rPr>
-              <a:t>Wrote MaxPowerTutorial2_Unleveled_Linear_v2_job.json</a:t>
-            </a:r>
-          </a:p>
-          <a:p>
-            <a:pPr algn="l">
-              <a:spcAft>
-                <a:spcPts val="200"/>
-              </a:spcAft>
-            </a:pPr>
-            <a:r>
-              <a:rPr sz="1400">
-                <a:solidFill>
-                  <a:srgbClr val="E6E6E6"/>
-                </a:solidFill>
-                <a:latin typeface="Consolas"/>
-              </a:rPr>
-              <a:t>  (csv_path PREDICTED -- verify after running the extraction job)</a:t>
-            </a:r>
-          </a:p>
-        </p:txBody>
-      </p:sp>
-      <p:sp>
-        <p:nvSpPr>
-          <p:cNvPr id="12" name="TextBox 11"/>
-          <p:cNvSpPr txBox="1"/>
-          <p:nvPr/>
-        </p:nvSpPr>
-        <p:spPr>
-          <a:xfrm>
-            <a:off x="548640" y="5074920"/>
-            <a:ext cx="11064240" cy="457200"/>
-          </a:xfrm>
-          <a:prstGeom prst="rect">
-            <a:avLst/>
-          </a:prstGeom>
-          <a:noFill/>
-        </p:spPr>
-        <p:txBody>
-          <a:bodyPr wrap="square">
-            <a:spAutoFit/>
-          </a:bodyPr>
-          <a:lstStyle/>
+              </a:rPr>
+              <a:t>Same drop, different mode</a:t>
+            </a:r>
+          </a:p>
           <a:p>
             <a:pPr>
               <a:spcAft>
@@ -10323,13 +9741,42 @@
               </a:spcAft>
             </a:pPr>
             <a:r>
-              <a:rPr sz="1700">
-                <a:solidFill>
-                  <a:srgbClr val="1B2A4A"/>
-                </a:solidFill>
-                <a:latin typeface="Segoe UI"/>
-              </a:rPr>
-              <a:t>•  Three files total: 1 run job (extraction) + 2 plot jobs (one per analytic)</a:t>
+              <a:rPr sz="1400" b="0">
+                <a:solidFill>
+                  <a:srgbClr val="555555"/>
+                </a:solidFill>
+              </a:rPr>
+              <a:t>Mode: interactive (V2), Module: Tutorial</a:t>
+            </a:r>
+          </a:p>
+          <a:p>
+            <a:pPr>
+              <a:spcAft>
+                <a:spcPts val="1000"/>
+              </a:spcAft>
+            </a:pPr>
+            <a:r>
+              <a:rPr sz="1400" b="0">
+                <a:solidFill>
+                  <a:srgbClr val="555555"/>
+                </a:solidFill>
+              </a:rPr>
+              <a:t>One click, three files: 1 run job (extraction) + 1 plot job per analytic</a:t>
+            </a:r>
+          </a:p>
+          <a:p>
+            <a:pPr>
+              <a:spcAft>
+                <a:spcPts val="1000"/>
+              </a:spcAft>
+            </a:pPr>
+            <a:r>
+              <a:rPr sz="1400" b="0">
+                <a:solidFill>
+                  <a:srgbClr val="555555"/>
+                </a:solidFill>
+              </a:rPr>
+              <a:t>csv_path in each plot job is PREDICTED — padb_v2.py verifies it against the real CSV once the run job has actually extracted</a:t>
             </a:r>
           </a:p>
         </p:txBody>
@@ -10463,7 +9910,7 @@
               </a:defRPr>
             </a:pPr>
             <a:r>
-              <a:t>Step 2 — Run the Extraction</a:t>
+              <a:t>Step 2 — Select Just the Run Job</a:t>
             </a:r>
           </a:p>
         </p:txBody>
@@ -10576,75 +10023,82 @@
       </p:sp>
       <p:sp>
         <p:nvSpPr>
-          <p:cNvPr id="8" name="Rounded Rectangle 7"/>
-          <p:cNvSpPr/>
-          <p:nvPr/>
-        </p:nvSpPr>
-        <p:spPr>
-          <a:xfrm>
-            <a:off x="548640" y="1691640"/>
-            <a:ext cx="11064240" cy="502920"/>
-          </a:xfrm>
-          <a:prstGeom prst="roundRect">
-            <a:avLst>
-              <a:gd name="adj" fmla="val 4000"/>
-            </a:avLst>
-          </a:prstGeom>
-          <a:solidFill>
-            <a:srgbClr val="282C34"/>
-          </a:solidFill>
-          <a:ln>
+          <p:cNvPr id="8" name="TextBox 7"/>
+          <p:cNvSpPr txBox="1"/>
+          <p:nvPr/>
+        </p:nvSpPr>
+        <p:spPr>
+          <a:xfrm>
+            <a:off x="548640" y="1600200"/>
+            <a:ext cx="11064240" cy="457200"/>
+          </a:xfrm>
+          <a:prstGeom prst="rect">
+            <a:avLst/>
+          </a:prstGeom>
+          <a:noFill/>
+        </p:spPr>
+        <p:txBody>
+          <a:bodyPr wrap="square">
+            <a:spAutoFit/>
+          </a:bodyPr>
+          <a:lstStyle/>
+          <a:p>
+            <a:pPr>
+              <a:spcAft>
+                <a:spcPts val="1000"/>
+              </a:spcAft>
+            </a:pPr>
+            <a:r>
+              <a:rPr sz="1700">
+                <a:solidFill>
+                  <a:srgbClr val="1B2A4A"/>
+                </a:solidFill>
+                <a:latin typeface="Segoe UI"/>
+              </a:rPr>
+              <a:t>•  Three rows appear — the run job and both plot jobs. Check only the run job:</a:t>
+            </a:r>
+          </a:p>
+        </p:txBody>
+      </p:sp>
+      <p:pic>
+        <p:nvPicPr>
+          <p:cNvPr id="9" name="Picture 8" descr="t2_step2_top.png"/>
+          <p:cNvPicPr>
+            <a:picLocks noChangeAspect="1"/>
+          </p:cNvPicPr>
+          <p:nvPr/>
+        </p:nvPicPr>
+        <p:blipFill>
+          <a:blip r:embed="rId2"/>
+          <a:stretch>
+            <a:fillRect/>
+          </a:stretch>
+        </p:blipFill>
+        <p:spPr>
+          <a:xfrm>
+            <a:off x="548640" y="2148840"/>
+            <a:ext cx="11064240" cy="3240242"/>
+          </a:xfrm>
+          <a:prstGeom prst="rect">
+            <a:avLst/>
+          </a:prstGeom>
+          <a:ln w="9525">
             <a:solidFill>
-              <a:srgbClr val="111318"/>
+              <a:srgbClr val="CCCCCC"/>
             </a:solidFill>
           </a:ln>
-          <a:effectLst/>
-        </p:spPr>
-        <p:style>
-          <a:lnRef idx="1">
-            <a:schemeClr val="accent1"/>
-          </a:lnRef>
-          <a:fillRef idx="3">
-            <a:schemeClr val="accent1"/>
-          </a:fillRef>
-          <a:effectRef idx="2">
-            <a:schemeClr val="accent1"/>
-          </a:effectRef>
-          <a:fontRef idx="minor">
-            <a:schemeClr val="lt1"/>
-          </a:fontRef>
-        </p:style>
-        <p:txBody>
-          <a:bodyPr rtlCol="0" anchor="t" wrap="square" lIns="228600" rIns="228600" tIns="164592" bIns="164592"/>
-          <a:lstStyle/>
-          <a:p>
-            <a:pPr algn="l">
-              <a:spcAft>
-                <a:spcPts val="200"/>
-              </a:spcAft>
-            </a:pPr>
-            <a:r>
-              <a:rPr sz="1500">
-                <a:solidFill>
-                  <a:srgbClr val="E6E6E6"/>
-                </a:solidFill>
-                <a:latin typeface="Consolas"/>
-              </a:rPr>
-              <a:t>py padb_run.py MaxPowerTutorial2_run_job.json</a:t>
-            </a:r>
-          </a:p>
-        </p:txBody>
-      </p:sp>
-      <p:sp>
-        <p:nvSpPr>
-          <p:cNvPr id="9" name="TextBox 8"/>
-          <p:cNvSpPr txBox="1"/>
-          <p:nvPr/>
-        </p:nvSpPr>
-        <p:spPr>
-          <a:xfrm>
-            <a:off x="548640" y="2377440"/>
-            <a:ext cx="11064240" cy="365760"/>
+        </p:spPr>
+      </p:pic>
+      <p:sp>
+        <p:nvSpPr>
+          <p:cNvPr id="10" name="TextBox 9"/>
+          <p:cNvSpPr txBox="1"/>
+          <p:nvPr/>
+        </p:nvSpPr>
+        <p:spPr>
+          <a:xfrm>
+            <a:off x="548640" y="5532120"/>
+            <a:ext cx="11064240" cy="640080"/>
           </a:xfrm>
           <a:prstGeom prst="rect">
             <a:avLst/>
@@ -10663,209 +10117,13 @@
               </a:spcAft>
             </a:pPr>
             <a:r>
-              <a:rPr sz="1800">
+              <a:rPr sz="1550">
                 <a:solidFill>
                   <a:srgbClr val="1B2A4A"/>
                 </a:solidFill>
                 <a:latin typeface="Segoe UI"/>
               </a:rPr>
-              <a:t>•  What actually happened, this run:</a:t>
-            </a:r>
-          </a:p>
-        </p:txBody>
-      </p:sp>
-      <p:sp>
-        <p:nvSpPr>
-          <p:cNvPr id="10" name="Rounded Rectangle 9"/>
-          <p:cNvSpPr/>
-          <p:nvPr/>
-        </p:nvSpPr>
-        <p:spPr>
-          <a:xfrm>
-            <a:off x="548640" y="2743200"/>
-            <a:ext cx="11064240" cy="2514600"/>
-          </a:xfrm>
-          <a:prstGeom prst="roundRect">
-            <a:avLst>
-              <a:gd name="adj" fmla="val 4000"/>
-            </a:avLst>
-          </a:prstGeom>
-          <a:solidFill>
-            <a:srgbClr val="282C34"/>
-          </a:solidFill>
-          <a:ln>
-            <a:solidFill>
-              <a:srgbClr val="111318"/>
-            </a:solidFill>
-          </a:ln>
-          <a:effectLst/>
-        </p:spPr>
-        <p:style>
-          <a:lnRef idx="1">
-            <a:schemeClr val="accent1"/>
-          </a:lnRef>
-          <a:fillRef idx="3">
-            <a:schemeClr val="accent1"/>
-          </a:fillRef>
-          <a:effectRef idx="2">
-            <a:schemeClr val="accent1"/>
-          </a:effectRef>
-          <a:fontRef idx="minor">
-            <a:schemeClr val="lt1"/>
-          </a:fontRef>
-        </p:style>
-        <p:txBody>
-          <a:bodyPr rtlCol="0" anchor="t" wrap="square" lIns="228600" rIns="228600" tIns="164592" bIns="164592"/>
-          <a:lstStyle/>
-          <a:p>
-            <a:pPr algn="l">
-              <a:spcAft>
-                <a:spcPts val="200"/>
-              </a:spcAft>
-            </a:pPr>
-            <a:r>
-              <a:rPr sz="1450">
-                <a:solidFill>
-                  <a:srgbClr val="E6E6E6"/>
-                </a:solidFill>
-                <a:latin typeface="Consolas"/>
-              </a:rPr>
-              <a:t>Analytics found in pod: 2</a:t>
-            </a:r>
-          </a:p>
-          <a:p>
-            <a:pPr algn="l">
-              <a:spcAft>
-                <a:spcPts val="200"/>
-              </a:spcAft>
-            </a:pPr>
-            <a:r>
-              <a:rPr sz="1450">
-                <a:solidFill>
-                  <a:srgbClr val="E6E6E6"/>
-                </a:solidFill>
-                <a:latin typeface="Consolas"/>
-              </a:rPr>
-              <a:t>  [1] Scatter  Leveled Linear</a:t>
-            </a:r>
-          </a:p>
-          <a:p>
-            <a:pPr algn="l">
-              <a:spcAft>
-                <a:spcPts val="200"/>
-              </a:spcAft>
-            </a:pPr>
-            <a:r>
-              <a:rPr sz="1450">
-                <a:solidFill>
-                  <a:srgbClr val="E6E6E6"/>
-                </a:solidFill>
-                <a:latin typeface="Consolas"/>
-              </a:rPr>
-              <a:t>  [2] Scatter  Unleveled Linear</a:t>
-            </a:r>
-          </a:p>
-          <a:p>
-            <a:pPr algn="l">
-              <a:spcAft>
-                <a:spcPts val="200"/>
-              </a:spcAft>
-            </a:pPr>
-            <a:r>
-              <a:rPr sz="1450">
-                <a:solidFill>
-                  <a:srgbClr val="E6E6E6"/>
-                </a:solidFill>
-                <a:latin typeface="Consolas"/>
-              </a:rPr>
-              <a:t>PADB completed in 122.7s, return code: 0</a:t>
-            </a:r>
-          </a:p>
-          <a:p>
-            <a:pPr algn="l">
-              <a:spcAft>
-                <a:spcPts val="200"/>
-              </a:spcAft>
-            </a:pPr>
-            <a:r>
-              <a:rPr sz="1450">
-                <a:solidFill>
-                  <a:srgbClr val="E6E6E6"/>
-                </a:solidFill>
-                <a:latin typeface="Consolas"/>
-              </a:rPr>
-              <a:t>CSVs found: 2</a:t>
-            </a:r>
-          </a:p>
-          <a:p>
-            <a:pPr algn="l">
-              <a:spcAft>
-                <a:spcPts val="200"/>
-              </a:spcAft>
-            </a:pPr>
-            <a:r>
-              <a:rPr sz="1450">
-                <a:solidFill>
-                  <a:srgbClr val="E6E6E6"/>
-                </a:solidFill>
-                <a:latin typeface="Consolas"/>
-              </a:rPr>
-              <a:t>  Scatter_Max_Power_Leveled_Linear.csv</a:t>
-            </a:r>
-          </a:p>
-          <a:p>
-            <a:pPr algn="l">
-              <a:spcAft>
-                <a:spcPts val="200"/>
-              </a:spcAft>
-            </a:pPr>
-            <a:r>
-              <a:rPr sz="1450">
-                <a:solidFill>
-                  <a:srgbClr val="E6E6E6"/>
-                </a:solidFill>
-                <a:latin typeface="Consolas"/>
-              </a:rPr>
-              <a:t>  Scatter_Max_Power_Unleveled_Linear.csv</a:t>
-            </a:r>
-          </a:p>
-        </p:txBody>
-      </p:sp>
-      <p:sp>
-        <p:nvSpPr>
-          <p:cNvPr id="11" name="TextBox 10"/>
-          <p:cNvSpPr txBox="1"/>
-          <p:nvPr/>
-        </p:nvSpPr>
-        <p:spPr>
-          <a:xfrm>
-            <a:off x="548640" y="5394960"/>
-            <a:ext cx="11064240" cy="457200"/>
-          </a:xfrm>
-          <a:prstGeom prst="rect">
-            <a:avLst/>
-          </a:prstGeom>
-          <a:noFill/>
-        </p:spPr>
-        <p:txBody>
-          <a:bodyPr wrap="square">
-            <a:spAutoFit/>
-          </a:bodyPr>
-          <a:lstStyle/>
-          <a:p>
-            <a:pPr>
-              <a:spcAft>
-                <a:spcPts val="1000"/>
-              </a:spcAft>
-            </a:pPr>
-            <a:r>
-              <a:rPr sz="1650">
-                <a:solidFill>
-                  <a:srgbClr val="1B2A4A"/>
-                </a:solidFill>
-                <a:latin typeface="Segoe UI"/>
-              </a:rPr>
-              <a:t>•  CSVs land in MaxPowerTutorial2_run_results\padb\ — padb_v2.py reads from here next</a:t>
+              <a:t>•  You never need to check the plot-job rows yourself for a fresh dataset — the run job finds and runs them automatically once extraction succeeds</a:t>
             </a:r>
           </a:p>
         </p:txBody>
@@ -10999,7 +10257,7 @@
               </a:defRPr>
             </a:pPr>
             <a:r>
-              <a:t>Step 3 — Build the Plots</a:t>
+              <a:t>Step 3 — One Click: Extract AND Build Plots</a:t>
             </a:r>
           </a:p>
         </p:txBody>
@@ -11118,8 +10376,8 @@
         </p:nvSpPr>
         <p:spPr>
           <a:xfrm>
-            <a:off x="548640" y="1691640"/>
-            <a:ext cx="11064240" cy="365760"/>
+            <a:off x="548640" y="1508760"/>
+            <a:ext cx="11064240" cy="457200"/>
           </a:xfrm>
           <a:prstGeom prst="rect">
             <a:avLst/>
@@ -11138,94 +10396,46 @@
               </a:spcAft>
             </a:pPr>
             <a:r>
-              <a:rPr sz="1800">
+              <a:rPr sz="1550">
                 <a:solidFill>
                   <a:srgbClr val="1B2A4A"/>
                 </a:solidFill>
                 <a:latin typeface="Segoe UI"/>
               </a:rPr>
-              <a:t>•  Run padb_v2.py once per plot job (no PADB-R.exe involved — fast):</a:t>
-            </a:r>
-          </a:p>
-        </p:txBody>
-      </p:sp>
-      <p:sp>
-        <p:nvSpPr>
-          <p:cNvPr id="9" name="Rounded Rectangle 8"/>
-          <p:cNvSpPr/>
-          <p:nvPr/>
-        </p:nvSpPr>
-        <p:spPr>
-          <a:xfrm>
-            <a:off x="548640" y="2103120"/>
-            <a:ext cx="11064240" cy="914400"/>
-          </a:xfrm>
-          <a:prstGeom prst="roundRect">
-            <a:avLst>
-              <a:gd name="adj" fmla="val 4000"/>
-            </a:avLst>
-          </a:prstGeom>
-          <a:solidFill>
-            <a:srgbClr val="282C34"/>
-          </a:solidFill>
-          <a:ln>
+              <a:t>•  Click Run Selected once. Real PADB-R.exe extraction, then both plot jobs build automatically — no second step:</a:t>
+            </a:r>
+          </a:p>
+        </p:txBody>
+      </p:sp>
+      <p:pic>
+        <p:nvPicPr>
+          <p:cNvPr id="9" name="Picture 8" descr="t2_step2_bottom.png"/>
+          <p:cNvPicPr>
+            <a:picLocks noChangeAspect="1"/>
+          </p:cNvPicPr>
+          <p:nvPr/>
+        </p:nvPicPr>
+        <p:blipFill>
+          <a:blip r:embed="rId2"/>
+          <a:stretch>
+            <a:fillRect/>
+          </a:stretch>
+        </p:blipFill>
+        <p:spPr>
+          <a:xfrm>
+            <a:off x="1965960" y="2011680"/>
+            <a:ext cx="8229600" cy="3468189"/>
+          </a:xfrm>
+          <a:prstGeom prst="rect">
+            <a:avLst/>
+          </a:prstGeom>
+          <a:ln w="9525">
             <a:solidFill>
-              <a:srgbClr val="111318"/>
+              <a:srgbClr val="CCCCCC"/>
             </a:solidFill>
           </a:ln>
-          <a:effectLst/>
-        </p:spPr>
-        <p:style>
-          <a:lnRef idx="1">
-            <a:schemeClr val="accent1"/>
-          </a:lnRef>
-          <a:fillRef idx="3">
-            <a:schemeClr val="accent1"/>
-          </a:fillRef>
-          <a:effectRef idx="2">
-            <a:schemeClr val="accent1"/>
-          </a:effectRef>
-          <a:fontRef idx="minor">
-            <a:schemeClr val="lt1"/>
-          </a:fontRef>
-        </p:style>
-        <p:txBody>
-          <a:bodyPr rtlCol="0" anchor="t" wrap="square" lIns="228600" rIns="228600" tIns="164592" bIns="164592"/>
-          <a:lstStyle/>
-          <a:p>
-            <a:pPr algn="l">
-              <a:spcAft>
-                <a:spcPts val="200"/>
-              </a:spcAft>
-            </a:pPr>
-            <a:r>
-              <a:rPr sz="1450">
-                <a:solidFill>
-                  <a:srgbClr val="E6E6E6"/>
-                </a:solidFill>
-                <a:latin typeface="Consolas"/>
-              </a:rPr>
-              <a:t>py padb_v2.py MaxPowerTutorial2_Leveled_Linear_v2_job.json</a:t>
-            </a:r>
-          </a:p>
-          <a:p>
-            <a:pPr algn="l">
-              <a:spcAft>
-                <a:spcPts val="200"/>
-              </a:spcAft>
-            </a:pPr>
-            <a:r>
-              <a:rPr sz="1450">
-                <a:solidFill>
-                  <a:srgbClr val="E6E6E6"/>
-                </a:solidFill>
-                <a:latin typeface="Consolas"/>
-              </a:rPr>
-              <a:t>py padb_v2.py MaxPowerTutorial2_Unleveled_Linear_v2_job.json</a:t>
-            </a:r>
-          </a:p>
-        </p:txBody>
-      </p:sp>
+        </p:spPr>
+      </p:pic>
       <p:sp>
         <p:nvSpPr>
           <p:cNvPr id="10" name="TextBox 9"/>
@@ -11234,8 +10444,8 @@
         </p:nvSpPr>
         <p:spPr>
           <a:xfrm>
-            <a:off x="548640" y="3200400"/>
-            <a:ext cx="11064240" cy="365760"/>
+            <a:off x="548640" y="5806440"/>
+            <a:ext cx="11064240" cy="640080"/>
           </a:xfrm>
           <a:prstGeom prst="rect">
             <a:avLst/>
@@ -11254,161 +10464,13 @@
               </a:spcAft>
             </a:pPr>
             <a:r>
-              <a:rPr sz="1800">
+              <a:rPr sz="1350">
                 <a:solidFill>
                   <a:srgbClr val="1B2A4A"/>
                 </a:solidFill>
                 <a:latin typeface="Segoe UI"/>
               </a:rPr>
-              <a:t>•  Each renders all six views and publishes:</a:t>
-            </a:r>
-          </a:p>
-        </p:txBody>
-      </p:sp>
-      <p:sp>
-        <p:nvSpPr>
-          <p:cNvPr id="11" name="Rounded Rectangle 10"/>
-          <p:cNvSpPr/>
-          <p:nvPr/>
-        </p:nvSpPr>
-        <p:spPr>
-          <a:xfrm>
-            <a:off x="548640" y="3611880"/>
-            <a:ext cx="11064240" cy="1737360"/>
-          </a:xfrm>
-          <a:prstGeom prst="roundRect">
-            <a:avLst>
-              <a:gd name="adj" fmla="val 4000"/>
-            </a:avLst>
-          </a:prstGeom>
-          <a:solidFill>
-            <a:srgbClr val="282C34"/>
-          </a:solidFill>
-          <a:ln>
-            <a:solidFill>
-              <a:srgbClr val="111318"/>
-            </a:solidFill>
-          </a:ln>
-          <a:effectLst/>
-        </p:spPr>
-        <p:style>
-          <a:lnRef idx="1">
-            <a:schemeClr val="accent1"/>
-          </a:lnRef>
-          <a:fillRef idx="3">
-            <a:schemeClr val="accent1"/>
-          </a:fillRef>
-          <a:effectRef idx="2">
-            <a:schemeClr val="accent1"/>
-          </a:effectRef>
-          <a:fontRef idx="minor">
-            <a:schemeClr val="lt1"/>
-          </a:fontRef>
-        </p:style>
-        <p:txBody>
-          <a:bodyPr rtlCol="0" anchor="t" wrap="square" lIns="228600" rIns="228600" tIns="164592" bIns="164592"/>
-          <a:lstStyle/>
-          <a:p>
-            <a:pPr algn="l">
-              <a:spcAft>
-                <a:spcPts val="200"/>
-              </a:spcAft>
-            </a:pPr>
-            <a:r>
-              <a:rPr sz="1400">
-                <a:solidFill>
-                  <a:srgbClr val="E6E6E6"/>
-                </a:solidFill>
-                <a:latin typeface="Consolas"/>
-              </a:rPr>
-              <a:t>Rendering Scatter, Statistical Summary, Box Plots,</a:t>
-            </a:r>
-          </a:p>
-          <a:p>
-            <a:pPr algn="l">
-              <a:spcAft>
-                <a:spcPts val="200"/>
-              </a:spcAft>
-            </a:pPr>
-            <a:r>
-              <a:rPr sz="1400">
-                <a:solidFill>
-                  <a:srgbClr val="E6E6E6"/>
-                </a:solidFill>
-                <a:latin typeface="Consolas"/>
-              </a:rPr>
-              <a:t>  Distribution, Environmental Coverage, Summary</a:t>
-            </a:r>
-          </a:p>
-          <a:p>
-            <a:pPr algn="l">
-              <a:spcAft>
-                <a:spcPts val="200"/>
-              </a:spcAft>
-            </a:pPr>
-            <a:r>
-              <a:rPr sz="1400">
-                <a:solidFill>
-                  <a:srgbClr val="E6E6E6"/>
-                </a:solidFill>
-                <a:latin typeface="Consolas"/>
-              </a:rPr>
-              <a:t>Published 7 file(s) -&gt; ...\\PADB-Interactive\\Tutorial\\MaxPowerTutorial2</a:t>
-            </a:r>
-          </a:p>
-          <a:p>
-            <a:pPr algn="l">
-              <a:spcAft>
-                <a:spcPts val="200"/>
-              </a:spcAft>
-            </a:pPr>
-            <a:r>
-              <a:rPr sz="1400">
-                <a:solidFill>
-                  <a:srgbClr val="E6E6E6"/>
-                </a:solidFill>
-                <a:latin typeface="Consolas"/>
-              </a:rPr>
-              <a:t>Published 13 file(s) -&gt; ...\\PADB-Interactive\\Tutorial\\MaxPowerTutorial2</a:t>
-            </a:r>
-          </a:p>
-        </p:txBody>
-      </p:sp>
-      <p:sp>
-        <p:nvSpPr>
-          <p:cNvPr id="12" name="TextBox 11"/>
-          <p:cNvSpPr txBox="1"/>
-          <p:nvPr/>
-        </p:nvSpPr>
-        <p:spPr>
-          <a:xfrm>
-            <a:off x="548640" y="5486400"/>
-            <a:ext cx="11064240" cy="457200"/>
-          </a:xfrm>
-          <a:prstGeom prst="rect">
-            <a:avLst/>
-          </a:prstGeom>
-          <a:noFill/>
-        </p:spPr>
-        <p:txBody>
-          <a:bodyPr wrap="square">
-            <a:spAutoFit/>
-          </a:bodyPr>
-          <a:lstStyle/>
-          <a:p>
-            <a:pPr>
-              <a:spcAft>
-                <a:spcPts val="1000"/>
-              </a:spcAft>
-            </a:pPr>
-            <a:r>
-              <a:rPr sz="1650">
-                <a:solidFill>
-                  <a:srgbClr val="1B2A4A"/>
-                </a:solidFill>
-                <a:latin typeface="Segoe UI"/>
-              </a:rPr>
-              <a:t>•  Both analytics share one results folder and one combined index.html</a:t>
+              <a:t>•  3 temperatures (Room, 20°C, 30°C) — padb_v2.py auto-detects multi-temp data and builds the full six-view suite, no "views" key needed</a:t>
             </a:r>
           </a:p>
         </p:txBody>

--- a/PADB_Simple_and_Interactive.pptx
+++ b/PADB_Simple_and_Interactive.pptx
@@ -42,6 +42,10 @@
     <p:sldId id="290" r:id="rId41"/>
     <p:sldId id="291" r:id="rId42"/>
     <p:sldId id="292" r:id="rId43"/>
+    <p:sldId id="293" r:id="rId44"/>
+    <p:sldId id="294" r:id="rId45"/>
+    <p:sldId id="295" r:id="rId46"/>
+    <p:sldId id="296" r:id="rId47"/>
   </p:sldIdLst>
   <p:sldSz cx="12191695" cy="6858000" type="screen4x3"/>
   <p:notesSz cx="6858000" cy="9144000"/>
@@ -11303,7 +11307,7 @@
               </a:defRPr>
             </a:pPr>
             <a:r>
-              <a:t>Tutorial 3 — /padb-tools</a:t>
+              <a:t>PADB Interactive — Deep Dive</a:t>
             </a:r>
           </a:p>
         </p:txBody>
@@ -11339,7 +11343,7 @@
               </a:defRPr>
             </a:pPr>
             <a:r>
-              <a:t>What It Is, When to Use It</a:t>
+              <a:t>The Six Views at a Glance</a:t>
             </a:r>
           </a:p>
         </p:txBody>
@@ -11450,16 +11454,45 @@
           </a:p>
         </p:txBody>
       </p:sp>
-      <p:sp>
-        <p:nvSpPr>
-          <p:cNvPr id="8" name="TextBox 7"/>
-          <p:cNvSpPr txBox="1"/>
-          <p:nvPr/>
-        </p:nvSpPr>
-        <p:spPr>
-          <a:xfrm>
-            <a:off x="548640" y="1645920"/>
-            <a:ext cx="11064240" cy="4754880"/>
+      <p:pic>
+        <p:nvPicPr>
+          <p:cNvPr id="8" name="Picture 7" descr="t2_view_scatter.png"/>
+          <p:cNvPicPr>
+            <a:picLocks noChangeAspect="1"/>
+          </p:cNvPicPr>
+          <p:nvPr/>
+        </p:nvPicPr>
+        <p:blipFill>
+          <a:blip r:embed="rId2"/>
+          <a:stretch>
+            <a:fillRect/>
+          </a:stretch>
+        </p:blipFill>
+        <p:spPr>
+          <a:xfrm>
+            <a:off x="548640" y="1508760"/>
+            <a:ext cx="3291840" cy="1954530"/>
+          </a:xfrm>
+          <a:prstGeom prst="rect">
+            <a:avLst/>
+          </a:prstGeom>
+          <a:ln w="9525">
+            <a:solidFill>
+              <a:srgbClr val="CCCCCC"/>
+            </a:solidFill>
+          </a:ln>
+        </p:spPr>
+      </p:pic>
+      <p:sp>
+        <p:nvSpPr>
+          <p:cNvPr id="9" name="TextBox 8"/>
+          <p:cNvSpPr txBox="1"/>
+          <p:nvPr/>
+        </p:nvSpPr>
+        <p:spPr>
+          <a:xfrm>
+            <a:off x="548640" y="3509010"/>
+            <a:ext cx="3291840" cy="457200"/>
           </a:xfrm>
           <a:prstGeom prst="rect">
             <a:avLst/>
@@ -11473,114 +11506,334 @@
           <a:lstStyle/>
           <a:p>
             <a:pPr>
-              <a:spcAft>
-                <a:spcPts val="1000"/>
-              </a:spcAft>
-            </a:pPr>
-            <a:r>
-              <a:rPr sz="1800">
-                <a:solidFill>
-                  <a:srgbClr val="1B2A4A"/>
-                </a:solidFill>
-                <a:latin typeface="Segoe UI"/>
-              </a:rPr>
-              <a:t>•  A Claude Code command scoped to this repo (.claude/commands/padb-tools.md)</a:t>
-            </a:r>
-          </a:p>
-          <a:p>
-            <a:pPr>
-              <a:spcAft>
-                <a:spcPts val="1000"/>
-              </a:spcAft>
-            </a:pPr>
-            <a:r>
-              <a:rPr sz="1800">
-                <a:solidFill>
-                  <a:srgbClr val="1B2A4A"/>
-                </a:solidFill>
-                <a:latin typeface="Segoe UI"/>
-              </a:rPr>
-              <a:t>•  Surfaces a condensed index of the tool's architecture, gotchas, and a</a:t>
-            </a:r>
-          </a:p>
-          <a:p>
-            <a:pPr lvl="1">
-              <a:spcAft>
-                <a:spcPts val="600"/>
-              </a:spcAft>
-            </a:pPr>
-            <a:r>
-              <a:rPr sz="1600">
+              <a:defRPr sz="1100">
                 <a:solidFill>
                   <a:srgbClr val="555555"/>
                 </a:solidFill>
-                <a:latin typeface="Segoe UI"/>
-              </a:rPr>
-              <a:t>–  13-point new-pod checklist — without opening all six markdown docs</a:t>
-            </a:r>
-          </a:p>
-          <a:p>
-            <a:pPr>
-              <a:spcAft>
-                <a:spcPts val="1000"/>
-              </a:spcAft>
-            </a:pPr>
-            <a:r>
-              <a:rPr sz="1800">
-                <a:solidFill>
-                  <a:srgbClr val="1B2A4A"/>
-                </a:solidFill>
-                <a:latin typeface="Segoe UI"/>
-              </a:rPr>
-              <a:t>•  Only works when Claude Code's working directory is inside the repo</a:t>
-            </a:r>
-          </a:p>
-          <a:p>
-            <a:pPr lvl="1">
-              <a:spcAft>
-                <a:spcPts val="600"/>
-              </a:spcAft>
-            </a:pPr>
-            <a:r>
-              <a:rPr sz="1600">
+              </a:defRPr>
+            </a:pPr>
+            <a:r>
+              <a:t>Scatter — raw per-measurement, all temps</a:t>
+            </a:r>
+          </a:p>
+        </p:txBody>
+      </p:sp>
+      <p:pic>
+        <p:nvPicPr>
+          <p:cNvPr id="10" name="Picture 9" descr="t2_view_boxplot.png"/>
+          <p:cNvPicPr>
+            <a:picLocks noChangeAspect="1"/>
+          </p:cNvPicPr>
+          <p:nvPr/>
+        </p:nvPicPr>
+        <p:blipFill>
+          <a:blip r:embed="rId3"/>
+          <a:stretch>
+            <a:fillRect/>
+          </a:stretch>
+        </p:blipFill>
+        <p:spPr>
+          <a:xfrm>
+            <a:off x="4023360" y="1508760"/>
+            <a:ext cx="3291840" cy="1954530"/>
+          </a:xfrm>
+          <a:prstGeom prst="rect">
+            <a:avLst/>
+          </a:prstGeom>
+          <a:ln w="9525">
+            <a:solidFill>
+              <a:srgbClr val="CCCCCC"/>
+            </a:solidFill>
+          </a:ln>
+        </p:spPr>
+      </p:pic>
+      <p:sp>
+        <p:nvSpPr>
+          <p:cNvPr id="11" name="TextBox 10"/>
+          <p:cNvSpPr txBox="1"/>
+          <p:nvPr/>
+        </p:nvSpPr>
+        <p:spPr>
+          <a:xfrm>
+            <a:off x="4023360" y="3509010"/>
+            <a:ext cx="3291840" cy="457200"/>
+          </a:xfrm>
+          <a:prstGeom prst="rect">
+            <a:avLst/>
+          </a:prstGeom>
+          <a:noFill/>
+        </p:spPr>
+        <p:txBody>
+          <a:bodyPr wrap="square">
+            <a:spAutoFit/>
+          </a:bodyPr>
+          <a:lstStyle/>
+          <a:p>
+            <a:pPr>
+              <a:defRPr sz="1100">
                 <a:solidFill>
                   <a:srgbClr val="555555"/>
                 </a:solidFill>
-                <a:latin typeface="Segoe UI"/>
-              </a:rPr>
-              <a:t>–  (e.g. C:\apps\padb\tools) — that's what makes it "repo-scoped"</a:t>
-            </a:r>
-          </a:p>
-          <a:p>
-            <a:pPr>
-              <a:spcAft>
-                <a:spcPts val="1000"/>
-              </a:spcAft>
-            </a:pPr>
-            <a:r>
-              <a:rPr sz="1800">
-                <a:solidFill>
-                  <a:srgbClr val="1B2A4A"/>
-                </a:solidFill>
-                <a:latin typeface="Segoe UI"/>
-              </a:rPr>
-              <a:t>•  Use it when you're: onboarding a new pod, debugging a plot feature,</a:t>
-            </a:r>
-          </a:p>
-          <a:p>
-            <a:pPr lvl="1">
-              <a:spcAft>
-                <a:spcPts val="600"/>
-              </a:spcAft>
-            </a:pPr>
-            <a:r>
-              <a:rPr sz="1600">
+              </a:defRPr>
+            </a:pPr>
+            <a:r>
+              <a:t>Boxplot — box stats per condition/temperature</a:t>
+            </a:r>
+          </a:p>
+        </p:txBody>
+      </p:sp>
+      <p:pic>
+        <p:nvPicPr>
+          <p:cNvPr id="12" name="Picture 11" descr="t2_view_stat_summary.png"/>
+          <p:cNvPicPr>
+            <a:picLocks noChangeAspect="1"/>
+          </p:cNvPicPr>
+          <p:nvPr/>
+        </p:nvPicPr>
+        <p:blipFill>
+          <a:blip r:embed="rId4"/>
+          <a:stretch>
+            <a:fillRect/>
+          </a:stretch>
+        </p:blipFill>
+        <p:spPr>
+          <a:xfrm>
+            <a:off x="7498080" y="1508760"/>
+            <a:ext cx="3291840" cy="1954530"/>
+          </a:xfrm>
+          <a:prstGeom prst="rect">
+            <a:avLst/>
+          </a:prstGeom>
+          <a:ln w="9525">
+            <a:solidFill>
+              <a:srgbClr val="CCCCCC"/>
+            </a:solidFill>
+          </a:ln>
+        </p:spPr>
+      </p:pic>
+      <p:sp>
+        <p:nvSpPr>
+          <p:cNvPr id="13" name="TextBox 12"/>
+          <p:cNvSpPr txBox="1"/>
+          <p:nvPr/>
+        </p:nvSpPr>
+        <p:spPr>
+          <a:xfrm>
+            <a:off x="7498080" y="3509010"/>
+            <a:ext cx="3291840" cy="457200"/>
+          </a:xfrm>
+          <a:prstGeom prst="rect">
+            <a:avLst/>
+          </a:prstGeom>
+          <a:noFill/>
+        </p:spPr>
+        <p:txBody>
+          <a:bodyPr wrap="square">
+            <a:spAutoFit/>
+          </a:bodyPr>
+          <a:lstStyle/>
+          <a:p>
+            <a:pPr>
+              <a:defRPr sz="1100">
                 <a:solidFill>
                   <a:srgbClr val="555555"/>
                 </a:solidFill>
-                <a:latin typeface="Segoe UI"/>
-              </a:rPr>
-              <a:t>–  reviewing generated HTML, or just orienting yourself in a new session</a:t>
+              </a:defRPr>
+            </a:pPr>
+            <a:r>
+              <a:t>Stat Summary — room-temp per-DUT population stats</a:t>
+            </a:r>
+          </a:p>
+        </p:txBody>
+      </p:sp>
+      <p:pic>
+        <p:nvPicPr>
+          <p:cNvPr id="14" name="Picture 13" descr="t2_view_summary.png"/>
+          <p:cNvPicPr>
+            <a:picLocks noChangeAspect="1"/>
+          </p:cNvPicPr>
+          <p:nvPr/>
+        </p:nvPicPr>
+        <p:blipFill>
+          <a:blip r:embed="rId5"/>
+          <a:stretch>
+            <a:fillRect/>
+          </a:stretch>
+        </p:blipFill>
+        <p:spPr>
+          <a:xfrm>
+            <a:off x="548640" y="3829050"/>
+            <a:ext cx="3291840" cy="1954530"/>
+          </a:xfrm>
+          <a:prstGeom prst="rect">
+            <a:avLst/>
+          </a:prstGeom>
+          <a:ln w="9525">
+            <a:solidFill>
+              <a:srgbClr val="CCCCCC"/>
+            </a:solidFill>
+          </a:ln>
+        </p:spPr>
+      </p:pic>
+      <p:sp>
+        <p:nvSpPr>
+          <p:cNvPr id="15" name="TextBox 14"/>
+          <p:cNvSpPr txBox="1"/>
+          <p:nvPr/>
+        </p:nvSpPr>
+        <p:spPr>
+          <a:xfrm>
+            <a:off x="548640" y="5829300"/>
+            <a:ext cx="3291840" cy="457200"/>
+          </a:xfrm>
+          <a:prstGeom prst="rect">
+            <a:avLst/>
+          </a:prstGeom>
+          <a:noFill/>
+        </p:spPr>
+        <p:txBody>
+          <a:bodyPr wrap="square">
+            <a:spAutoFit/>
+          </a:bodyPr>
+          <a:lstStyle/>
+          <a:p>
+            <a:pPr>
+              <a:defRPr sz="1100">
+                <a:solidFill>
+                  <a:srgbClr val="555555"/>
+                </a:solidFill>
+              </a:defRPr>
+            </a:pPr>
+            <a:r>
+              <a:t>Summary — all-temp NP-TI summary</a:t>
+            </a:r>
+          </a:p>
+        </p:txBody>
+      </p:sp>
+      <p:pic>
+        <p:nvPicPr>
+          <p:cNvPr id="16" name="Picture 15" descr="t2_view_env_coverage.png"/>
+          <p:cNvPicPr>
+            <a:picLocks noChangeAspect="1"/>
+          </p:cNvPicPr>
+          <p:nvPr/>
+        </p:nvPicPr>
+        <p:blipFill>
+          <a:blip r:embed="rId6"/>
+          <a:stretch>
+            <a:fillRect/>
+          </a:stretch>
+        </p:blipFill>
+        <p:spPr>
+          <a:xfrm>
+            <a:off x="4023360" y="3829050"/>
+            <a:ext cx="3291840" cy="1954530"/>
+          </a:xfrm>
+          <a:prstGeom prst="rect">
+            <a:avLst/>
+          </a:prstGeom>
+          <a:ln w="9525">
+            <a:solidFill>
+              <a:srgbClr val="CCCCCC"/>
+            </a:solidFill>
+          </a:ln>
+        </p:spPr>
+      </p:pic>
+      <p:sp>
+        <p:nvSpPr>
+          <p:cNvPr id="17" name="TextBox 16"/>
+          <p:cNvSpPr txBox="1"/>
+          <p:nvPr/>
+        </p:nvSpPr>
+        <p:spPr>
+          <a:xfrm>
+            <a:off x="4023360" y="5829300"/>
+            <a:ext cx="3291840" cy="457200"/>
+          </a:xfrm>
+          <a:prstGeom prst="rect">
+            <a:avLst/>
+          </a:prstGeom>
+          <a:noFill/>
+        </p:spPr>
+        <p:txBody>
+          <a:bodyPr wrap="square">
+            <a:spAutoFit/>
+          </a:bodyPr>
+          <a:lstStyle/>
+          <a:p>
+            <a:pPr>
+              <a:defRPr sz="1100">
+                <a:solidFill>
+                  <a:srgbClr val="555555"/>
+                </a:solidFill>
+              </a:defRPr>
+            </a:pPr>
+            <a:r>
+              <a:t>Env Coverage — carrier-power stability vs. temperature</a:t>
+            </a:r>
+          </a:p>
+        </p:txBody>
+      </p:sp>
+      <p:pic>
+        <p:nvPicPr>
+          <p:cNvPr id="18" name="Picture 17" descr="t2_view_distribution.png"/>
+          <p:cNvPicPr>
+            <a:picLocks noChangeAspect="1"/>
+          </p:cNvPicPr>
+          <p:nvPr/>
+        </p:nvPicPr>
+        <p:blipFill>
+          <a:blip r:embed="rId7"/>
+          <a:stretch>
+            <a:fillRect/>
+          </a:stretch>
+        </p:blipFill>
+        <p:spPr>
+          <a:xfrm>
+            <a:off x="7498080" y="3829050"/>
+            <a:ext cx="3291840" cy="1954530"/>
+          </a:xfrm>
+          <a:prstGeom prst="rect">
+            <a:avLst/>
+          </a:prstGeom>
+          <a:ln w="9525">
+            <a:solidFill>
+              <a:srgbClr val="CCCCCC"/>
+            </a:solidFill>
+          </a:ln>
+        </p:spPr>
+      </p:pic>
+      <p:sp>
+        <p:nvSpPr>
+          <p:cNvPr id="19" name="TextBox 18"/>
+          <p:cNvSpPr txBox="1"/>
+          <p:nvPr/>
+        </p:nvSpPr>
+        <p:spPr>
+          <a:xfrm>
+            <a:off x="7498080" y="5829300"/>
+            <a:ext cx="3291840" cy="457200"/>
+          </a:xfrm>
+          <a:prstGeom prst="rect">
+            <a:avLst/>
+          </a:prstGeom>
+          <a:noFill/>
+        </p:spPr>
+        <p:txBody>
+          <a:bodyPr wrap="square">
+            <a:spAutoFit/>
+          </a:bodyPr>
+          <a:lstStyle/>
+          <a:p>
+            <a:pPr>
+              <a:defRPr sz="1100">
+                <a:solidFill>
+                  <a:srgbClr val="555555"/>
+                </a:solidFill>
+              </a:defRPr>
+            </a:pPr>
+            <a:r>
+              <a:t>Distribution — multi-temp Delta-Env KDE (Harmonics pod)</a:t>
             </a:r>
           </a:p>
         </p:txBody>
@@ -11678,7 +11931,7 @@
               </a:defRPr>
             </a:pPr>
             <a:r>
-              <a:t>Tutorial 3 — /padb-tools</a:t>
+              <a:t>PADB Interactive — Deep Dive</a:t>
             </a:r>
           </a:p>
         </p:txBody>
@@ -11714,7 +11967,7 @@
               </a:defRPr>
             </a:pPr>
             <a:r>
-              <a:t>What It Actually Tells You</a:t>
+              <a:t>Segment Tab-Through — Jump Between Spec Bands</a:t>
             </a:r>
           </a:p>
         </p:txBody>
@@ -11825,16 +12078,45 @@
           </a:p>
         </p:txBody>
       </p:sp>
-      <p:sp>
-        <p:nvSpPr>
-          <p:cNvPr id="8" name="TextBox 7"/>
-          <p:cNvSpPr txBox="1"/>
-          <p:nvPr/>
-        </p:nvSpPr>
-        <p:spPr>
-          <a:xfrm>
-            <a:off x="548640" y="1645920"/>
-            <a:ext cx="11064240" cy="4754880"/>
+      <p:pic>
+        <p:nvPicPr>
+          <p:cNvPr id="8" name="Picture 7" descr="deepdive_segment_tabs.png"/>
+          <p:cNvPicPr>
+            <a:picLocks noChangeAspect="1"/>
+          </p:cNvPicPr>
+          <p:nvPr/>
+        </p:nvPicPr>
+        <p:blipFill>
+          <a:blip r:embed="rId2"/>
+          <a:stretch>
+            <a:fillRect/>
+          </a:stretch>
+        </p:blipFill>
+        <p:spPr>
+          <a:xfrm>
+            <a:off x="502920" y="1554480"/>
+            <a:ext cx="7315200" cy="4343400"/>
+          </a:xfrm>
+          <a:prstGeom prst="rect">
+            <a:avLst/>
+          </a:prstGeom>
+          <a:ln w="9525">
+            <a:solidFill>
+              <a:srgbClr val="CCCCCC"/>
+            </a:solidFill>
+          </a:ln>
+        </p:spPr>
+      </p:pic>
+      <p:sp>
+        <p:nvSpPr>
+          <p:cNvPr id="9" name="TextBox 8"/>
+          <p:cNvSpPr txBox="1"/>
+          <p:nvPr/>
+        </p:nvSpPr>
+        <p:spPr>
+          <a:xfrm>
+            <a:off x="8092440" y="1828800"/>
+            <a:ext cx="3657600" cy="4389120"/>
           </a:xfrm>
           <a:prstGeom prst="rect">
             <a:avLst/>
@@ -11849,113 +12131,106 @@
           <a:p>
             <a:pPr>
               <a:spcAft>
-                <a:spcPts val="1000"/>
-              </a:spcAft>
-            </a:pPr>
-            <a:r>
-              <a:rPr sz="1700">
+                <a:spcPts val="900"/>
+              </a:spcAft>
+            </a:pPr>
+            <a:r>
+              <a:rPr sz="1500" b="1">
                 <a:solidFill>
                   <a:srgbClr val="1B2A4A"/>
                 </a:solidFill>
-                <a:latin typeface="Segoe UI"/>
-              </a:rPr>
-              <a:t>•  A few of the 13 new-pod checklist items it surfaces immediately:</a:t>
-            </a:r>
-          </a:p>
-          <a:p>
-            <a:pPr lvl="1">
-              <a:spcAft>
-                <a:spcPts val="600"/>
-              </a:spcAft>
-            </a:pPr>
-            <a:r>
-              <a:rPr sz="1500">
+              </a:rPr>
+              <a:t>ClockSpurs_PADBToolTest.pod</a:t>
+            </a:r>
+          </a:p>
+          <a:p>
+            <a:pPr>
+              <a:spcAft>
+                <a:spcPts val="900"/>
+              </a:spcAft>
+            </a:pPr>
+            <a:r>
+              <a:rPr sz="1350" b="0">
                 <a:solidFill>
                   <a:srgbClr val="555555"/>
                 </a:solidFill>
-                <a:latin typeface="Segoe UI"/>
-              </a:rPr>
-              <a:t>–  TestRun_RunStatus — exit 0 but no CSV? Check the pod's default 'P'-only filter</a:t>
-            </a:r>
-          </a:p>
-          <a:p>
-            <a:pPr lvl="1">
-              <a:spcAft>
-                <a:spcPts val="600"/>
-              </a:spcAft>
-            </a:pPr>
-            <a:r>
-              <a:rPr sz="1500">
+              </a:rPr>
+              <a:t>A real 5-level spec staircase per SpurType</a:t>
+            </a:r>
+          </a:p>
+          <a:p>
+            <a:pPr>
+              <a:spcAft>
+                <a:spcPts val="900"/>
+              </a:spcAft>
+            </a:pPr>
+            <a:r>
+              <a:rPr sz="1350" b="0">
                 <a:solidFill>
                   <a:srgbClr val="555555"/>
                 </a:solidFill>
-                <a:latin typeface="Segoe UI"/>
-              </a:rPr>
-              <a:t>–  Environment_TestStep must be {All} or distribution/env_coverage/summary go empty</a:t>
-            </a:r>
-          </a:p>
-          <a:p>
-            <a:pPr lvl="1">
-              <a:spcAft>
-                <a:spcPts val="600"/>
-              </a:spcAft>
-            </a:pPr>
-            <a:r>
-              <a:rPr sz="1500">
+              </a:rPr>
+              <a:t>"Segment by": Spec / Limit / Uncertainty</a:t>
+            </a:r>
+          </a:p>
+          <a:p>
+            <a:pPr>
+              <a:spcAft>
+                <a:spcPts val="900"/>
+              </a:spcAft>
+            </a:pPr>
+            <a:r>
+              <a:rPr sz="1350" b="0">
                 <a:solidFill>
                   <a:srgbClr val="555555"/>
                 </a:solidFill>
-                <a:latin typeface="Segoe UI"/>
-              </a:rPr>
-              <a:t>–  OutputConfig_OutputCSV=False on a Scatter analytic — renders PNG, writes no CSV</a:t>
-            </a:r>
-          </a:p>
-          <a:p>
-            <a:pPr lvl="1">
-              <a:spcAft>
-                <a:spcPts val="600"/>
-              </a:spcAft>
-            </a:pPr>
-            <a:r>
-              <a:rPr sz="1500">
+              </a:rPr>
+              <a:t>Prev / Next jump the freq window to each contiguous spec band</a:t>
+            </a:r>
+          </a:p>
+          <a:p>
+            <a:pPr>
+              <a:spcAft>
+                <a:spcPts val="900"/>
+              </a:spcAft>
+            </a:pPr>
+            <a:r>
+              <a:rPr sz="1350" b="0">
                 <a:solidFill>
                   <a:srgbClr val="555555"/>
                 </a:solidFill>
-                <a:latin typeface="Segoe UI"/>
-              </a:rPr>
-              <a:t>–  Generated job.json path length — warns before Windows' 260-char limit bites</a:t>
-            </a:r>
-          </a:p>
-          <a:p>
-            <a:pPr>
-              <a:spcAft>
-                <a:spcPts val="1000"/>
-              </a:spcAft>
-            </a:pPr>
-            <a:r>
-              <a:rPr sz="1700">
-                <a:solidFill>
-                  <a:srgbClr val="1B2A4A"/>
-                </a:solidFill>
-                <a:latin typeface="Segoe UI"/>
-              </a:rPr>
-              <a:t>•  Plus: the architecture one-liner, common JS gotchas, and pointers to the</a:t>
-            </a:r>
-          </a:p>
-          <a:p>
-            <a:pPr lvl="1">
-              <a:spcAft>
-                <a:spcPts val="600"/>
-              </a:spcAft>
-            </a:pPr>
-            <a:r>
-              <a:rPr sz="1500">
+              </a:rPr>
+              <a:t>Isolate one SpurType first (dropdown, top-left) — segments are per-selection</a:t>
+            </a:r>
+          </a:p>
+          <a:p>
+            <a:pPr>
+              <a:spcAft>
+                <a:spcPts val="900"/>
+              </a:spcAft>
+            </a:pPr>
+            <a:r>
+              <a:rPr sz="1350" b="0">
                 <a:solidFill>
                   <a:srgbClr val="555555"/>
                 </a:solidFill>
-                <a:latin typeface="Segoe UI"/>
-              </a:rPr>
-              <a:t>–  full doc for anything it only summarizes</a:t>
+              </a:rPr>
+              <a:t>Respects the Global Filter and serial/port filters: exclude a DUT and its own spec/limit/uncertainty contribution drops too</a:t>
+            </a:r>
+          </a:p>
+          <a:p>
+            <a:pPr>
+              <a:spcAft>
+                <a:spcPts val="900"/>
+              </a:spcAft>
+            </a:pPr>
+            <a:r>
+              <a:rPr sz="1350" b="0">
+                <a:solidFill>
+                  <a:srgbClr val="555555"/>
+                </a:solidFill>
+              </a:rPr>
+              <a:t>All six views: scatter, boxplot, distribution already had this; stat_summary, summary, env_coverage, and the real Delta-Env distribution view all got it this session</a:t>
             </a:r>
           </a:p>
         </p:txBody>
@@ -12412,7 +12687,7 @@
               </a:defRPr>
             </a:pPr>
             <a:r>
-              <a:t>Tutorial 3 — /padb-tools</a:t>
+              <a:t>PADB Interactive — Deep Dive</a:t>
             </a:r>
           </a:p>
         </p:txBody>
@@ -12448,7 +12723,7 @@
               </a:defRPr>
             </a:pPr>
             <a:r>
-              <a:t>Worked Example: MaxPowerTutorial3.pod</a:t>
+              <a:t>Group By — Collapsing Fragmented Conditions</a:t>
             </a:r>
           </a:p>
         </p:txBody>
@@ -12559,16 +12834,45 @@
           </a:p>
         </p:txBody>
       </p:sp>
-      <p:sp>
-        <p:nvSpPr>
-          <p:cNvPr id="8" name="TextBox 7"/>
-          <p:cNvSpPr txBox="1"/>
-          <p:nvPr/>
-        </p:nvSpPr>
-        <p:spPr>
-          <a:xfrm>
-            <a:off x="548640" y="1645920"/>
-            <a:ext cx="11064240" cy="4754880"/>
+      <p:pic>
+        <p:nvPicPr>
+          <p:cNvPr id="8" name="Picture 7" descr="deepdive_groupby_stat_summary.png"/>
+          <p:cNvPicPr>
+            <a:picLocks noChangeAspect="1"/>
+          </p:cNvPicPr>
+          <p:nvPr/>
+        </p:nvPicPr>
+        <p:blipFill>
+          <a:blip r:embed="rId2"/>
+          <a:stretch>
+            <a:fillRect/>
+          </a:stretch>
+        </p:blipFill>
+        <p:spPr>
+          <a:xfrm>
+            <a:off x="502920" y="1554480"/>
+            <a:ext cx="7680960" cy="4560570"/>
+          </a:xfrm>
+          <a:prstGeom prst="rect">
+            <a:avLst/>
+          </a:prstGeom>
+          <a:ln w="9525">
+            <a:solidFill>
+              <a:srgbClr val="CCCCCC"/>
+            </a:solidFill>
+          </a:ln>
+        </p:spPr>
+      </p:pic>
+      <p:sp>
+        <p:nvSpPr>
+          <p:cNvPr id="9" name="TextBox 8"/>
+          <p:cNvSpPr txBox="1"/>
+          <p:nvPr/>
+        </p:nvSpPr>
+        <p:spPr>
+          <a:xfrm>
+            <a:off x="8412480" y="1828800"/>
+            <a:ext cx="3337560" cy="4389120"/>
           </a:xfrm>
           <a:prstGeom prst="rect">
             <a:avLst/>
@@ -12583,113 +12887,91 @@
           <a:p>
             <a:pPr>
               <a:spcAft>
-                <a:spcPts val="1000"/>
-              </a:spcAft>
-            </a:pPr>
-            <a:r>
-              <a:rPr sz="1800">
+                <a:spcPts val="900"/>
+              </a:spcAft>
+            </a:pPr>
+            <a:r>
+              <a:rPr sz="1500" b="1">
                 <a:solidFill>
                   <a:srgbClr val="1B2A4A"/>
                 </a:solidFill>
-                <a:latin typeface="Segoe UI"/>
-              </a:rPr>
-              <a:t>•  You've just been handed MaxPowerTutorial3.pod — 2 analytics, never run before</a:t>
-            </a:r>
-          </a:p>
-          <a:p>
-            <a:pPr>
-              <a:spcAft>
-                <a:spcPts val="1000"/>
-              </a:spcAft>
-            </a:pPr>
-            <a:r>
-              <a:rPr sz="1800">
-                <a:solidFill>
-                  <a:srgbClr val="1B2A4A"/>
-                </a:solidFill>
-                <a:latin typeface="Segoe UI"/>
-              </a:rPr>
-              <a:t>•  Open Claude Code with your working directory inside the padb-tools repo</a:t>
-            </a:r>
-          </a:p>
-          <a:p>
-            <a:pPr>
-              <a:spcAft>
-                <a:spcPts val="1000"/>
-              </a:spcAft>
-            </a:pPr>
-            <a:r>
-              <a:rPr sz="1800">
-                <a:solidFill>
-                  <a:srgbClr val="1B2A4A"/>
-                </a:solidFill>
-                <a:latin typeface="Segoe UI"/>
-              </a:rPr>
-              <a:t>•  Type: /padb-tools</a:t>
-            </a:r>
-          </a:p>
-          <a:p>
-            <a:pPr>
-              <a:spcAft>
-                <a:spcPts val="1000"/>
-              </a:spcAft>
-            </a:pPr>
-            <a:r>
-              <a:rPr sz="1800">
-                <a:solidFill>
-                  <a:srgbClr val="1B2A4A"/>
-                </a:solidFill>
-                <a:latin typeface="Segoe UI"/>
-              </a:rPr>
-              <a:t>•  Ask directly: "Is MaxPowerTutorial3.pod ready to run in Interactive mode?"</a:t>
-            </a:r>
-          </a:p>
-          <a:p>
-            <a:pPr>
-              <a:spcAft>
-                <a:spcPts val="1000"/>
-              </a:spcAft>
-            </a:pPr>
-            <a:r>
-              <a:rPr sz="1800">
-                <a:solidFill>
-                  <a:srgbClr val="1B2A4A"/>
-                </a:solidFill>
-                <a:latin typeface="Segoe UI"/>
-              </a:rPr>
-              <a:t>•  Claude reads the checklist above, then actually inspects the pod file —</a:t>
-            </a:r>
-          </a:p>
-          <a:p>
-            <a:pPr lvl="1">
-              <a:spcAft>
-                <a:spcPts val="600"/>
-              </a:spcAft>
-            </a:pPr>
-            <a:r>
-              <a:rPr sz="1600">
+              </a:rPr>
+              <a:t>Stat Summary — Group by: SpurType</a:t>
+            </a:r>
+          </a:p>
+          <a:p>
+            <a:pPr>
+              <a:spcAft>
+                <a:spcPts val="900"/>
+              </a:spcAft>
+            </a:pPr>
+            <a:r>
+              <a:rPr sz="1350" b="0">
                 <a:solidFill>
                   <a:srgbClr val="555555"/>
                 </a:solidFill>
-                <a:latin typeface="Segoe UI"/>
-              </a:rPr>
-              <a:t>–  Limits_YLimit, Environment_TestStep, OutputConfig_OutputCSV, Group strings</a:t>
-            </a:r>
-          </a:p>
-          <a:p>
-            <a:pPr>
-              <a:spcAft>
-                <a:spcPts val="1000"/>
-              </a:spcAft>
-            </a:pPr>
-            <a:r>
-              <a:rPr sz="1800">
-                <a:solidFill>
-                  <a:srgbClr val="1B2A4A"/>
-                </a:solidFill>
-                <a:latin typeface="Segoe UI"/>
-              </a:rPr>
-              <a:t>•  You get a direct answer grounded in this pod's real settings, not a guess</a:t>
+              </a:rPr>
+              <a:t>This pod's per-unit Group text fragments into 151 near-duplicate conditions</a:t>
+            </a:r>
+          </a:p>
+          <a:p>
+            <a:pPr>
+              <a:spcAft>
+                <a:spcPts val="900"/>
+              </a:spcAft>
+            </a:pPr>
+            <a:r>
+              <a:rPr sz="1350" b="0">
+                <a:solidFill>
+                  <a:srgbClr val="555555"/>
+                </a:solidFill>
+              </a:rPr>
+              <a:t>Group by collapses them to the 5 real spur types — one legend entry, one spec line each</a:t>
+            </a:r>
+          </a:p>
+          <a:p>
+            <a:pPr>
+              <a:spcAft>
+                <a:spcPts val="900"/>
+              </a:spcAft>
+            </a:pPr>
+            <a:r>
+              <a:rPr sz="1350" b="0">
+                <a:solidFill>
+                  <a:srgbClr val="555555"/>
+                </a:solidFill>
+              </a:rPr>
+              <a:t>Mean/min/max/quantiles pool exactly per DUT — a DUT's data falls under exactly one condition per dimension</a:t>
+            </a:r>
+          </a:p>
+          <a:p>
+            <a:pPr>
+              <a:spcAft>
+                <a:spcPts val="900"/>
+              </a:spcAft>
+            </a:pPr>
+            <a:r>
+              <a:rPr sz="1350" b="0">
+                <a:solidFill>
+                  <a:srgbClr val="555555"/>
+                </a:solidFill>
+              </a:rPr>
+              <a:t>NP-TI / spec take the worst case across the collapsed conditions</a:t>
+            </a:r>
+          </a:p>
+          <a:p>
+            <a:pPr>
+              <a:spcAft>
+                <a:spcPts val="900"/>
+              </a:spcAft>
+            </a:pPr>
+            <a:r>
+              <a:rPr sz="1350" b="0">
+                <a:solidFill>
+                  <a:srgbClr val="555555"/>
+                </a:solidFill>
+              </a:rPr>
+              <a:t>Same dropdown added to Summary and Env Coverage this session</a:t>
             </a:r>
           </a:p>
         </p:txBody>
@@ -12787,7 +13069,7 @@
               </a:defRPr>
             </a:pPr>
             <a:r>
-              <a:t>Multi-Site Testing</a:t>
+              <a:t>PADB Interactive — Deep Dive</a:t>
             </a:r>
           </a:p>
         </p:txBody>
@@ -12823,7 +13105,7 @@
               </a:defRPr>
             </a:pPr>
             <a:r>
-              <a:t>Same Test, Different Database</a:t>
+              <a:t>Environmental Coverage — Group By + Segment Tabs</a:t>
             </a:r>
           </a:p>
         </p:txBody>
@@ -12934,16 +13216,45 @@
           </a:p>
         </p:txBody>
       </p:sp>
-      <p:sp>
-        <p:nvSpPr>
-          <p:cNvPr id="8" name="TextBox 7"/>
-          <p:cNvSpPr txBox="1"/>
-          <p:nvPr/>
-        </p:nvSpPr>
-        <p:spPr>
-          <a:xfrm>
-            <a:off x="548640" y="1645920"/>
-            <a:ext cx="11064240" cy="4754880"/>
+      <p:pic>
+        <p:nvPicPr>
+          <p:cNvPr id="8" name="Picture 7" descr="deepdive_groupby_env_coverage.png"/>
+          <p:cNvPicPr>
+            <a:picLocks noChangeAspect="1"/>
+          </p:cNvPicPr>
+          <p:nvPr/>
+        </p:nvPicPr>
+        <p:blipFill>
+          <a:blip r:embed="rId2"/>
+          <a:stretch>
+            <a:fillRect/>
+          </a:stretch>
+        </p:blipFill>
+        <p:spPr>
+          <a:xfrm>
+            <a:off x="502920" y="1554480"/>
+            <a:ext cx="7680960" cy="4560570"/>
+          </a:xfrm>
+          <a:prstGeom prst="rect">
+            <a:avLst/>
+          </a:prstGeom>
+          <a:ln w="9525">
+            <a:solidFill>
+              <a:srgbClr val="CCCCCC"/>
+            </a:solidFill>
+          </a:ln>
+        </p:spPr>
+      </p:pic>
+      <p:sp>
+        <p:nvSpPr>
+          <p:cNvPr id="9" name="TextBox 8"/>
+          <p:cNvSpPr txBox="1"/>
+          <p:nvPr/>
+        </p:nvSpPr>
+        <p:spPr>
+          <a:xfrm>
+            <a:off x="8412480" y="1828800"/>
+            <a:ext cx="3337560" cy="4389120"/>
           </a:xfrm>
           <a:prstGeom prst="rect">
             <a:avLst/>
@@ -12958,145 +13269,76 @@
           <a:p>
             <a:pPr>
               <a:spcAft>
-                <a:spcPts val="1000"/>
-              </a:spcAft>
-            </a:pPr>
-            <a:r>
-              <a:rPr sz="1700">
+                <a:spcPts val="900"/>
+              </a:spcAft>
+            </a:pPr>
+            <a:r>
+              <a:rPr sz="1500" b="1">
                 <a:solidFill>
                   <a:srgbClr val="1B2A4A"/>
                 </a:solidFill>
-                <a:latin typeface="Segoe UI"/>
-              </a:rPr>
-              <a:t>•  Malaysia (AMC2) production ramp-up: the same test now also pulls from</a:t>
-            </a:r>
-          </a:p>
-          <a:p>
-            <a:pPr lvl="1">
-              <a:spcAft>
-                <a:spcPts val="600"/>
-              </a:spcAft>
-            </a:pPr>
-            <a:r>
-              <a:rPr sz="1500">
+              </a:rPr>
+              <a:t>Env Coverage — Group by: SpurType, Segment by: Spec</a:t>
+            </a:r>
+          </a:p>
+          <a:p>
+            <a:pPr>
+              <a:spcAft>
+                <a:spcPts val="900"/>
+              </a:spcAft>
+            </a:pPr>
+            <a:r>
+              <a:rPr sz="1350" b="0">
                 <a:solidFill>
                   <a:srgbClr val="555555"/>
                 </a:solidFill>
-                <a:latin typeface="Segoe UI"/>
-              </a:rPr>
-              <a:t>–  AMC2's own PADB Oracle database, not just Santa Rosa's</a:t>
-            </a:r>
-          </a:p>
-          <a:p>
-            <a:pPr>
-              <a:spcAft>
-                <a:spcPts val="1000"/>
-              </a:spcAft>
-            </a:pPr>
-            <a:r>
-              <a:rPr sz="1700">
-                <a:solidFill>
-                  <a:srgbClr val="1B2A4A"/>
-                </a:solidFill>
-                <a:latin typeface="Segoe UI"/>
-              </a:rPr>
-              <a:t>•  Comparing a real Santa Rosa pod against its AMC2 counterpart: the only</a:t>
-            </a:r>
-          </a:p>
-          <a:p>
-            <a:pPr lvl="1">
-              <a:spcAft>
-                <a:spcPts val="600"/>
-              </a:spcAft>
-            </a:pPr>
-            <a:r>
-              <a:rPr sz="1500">
+              </a:rPr>
+              <a:t>Before this session: one flat spec value per condition, no per-frequency tracking at all</a:t>
+            </a:r>
+          </a:p>
+          <a:p>
+            <a:pPr>
+              <a:spcAft>
+                <a:spcPts val="900"/>
+              </a:spcAft>
+            </a:pPr>
+            <a:r>
+              <a:rPr sz="1350" b="0">
                 <a:solidFill>
                   <a:srgbClr val="555555"/>
                 </a:solidFill>
-                <a:latin typeface="Segoe UI"/>
-              </a:rPr>
-              <a:t>–  genuine differences are Device_Server and Device_Database in [Extract]</a:t>
-            </a:r>
-          </a:p>
-          <a:p>
-            <a:pPr>
-              <a:spcAft>
-                <a:spcPts val="1000"/>
-              </a:spcAft>
-            </a:pPr>
-            <a:r>
-              <a:rPr sz="1700">
-                <a:solidFill>
-                  <a:srgbClr val="1B2A4A"/>
-                </a:solidFill>
-                <a:latin typeface="Segoe UI"/>
-              </a:rPr>
-              <a:t>•  Every AnalyticName and OutputConfig_OutputFile is otherwise identical —</a:t>
-            </a:r>
-          </a:p>
-          <a:p>
-            <a:pPr lvl="1">
-              <a:spcAft>
-                <a:spcPts val="600"/>
-              </a:spcAft>
-            </a:pPr>
-            <a:r>
-              <a:rPr sz="1500">
+              </a:rPr>
+              <a:t>Now: per-frequency Upper/Lower Limit, Spec, and Uncertainty tracked and segment-tabbable, same as every other view</a:t>
+            </a:r>
+          </a:p>
+          <a:p>
+            <a:pPr>
+              <a:spcAft>
+                <a:spcPts val="900"/>
+              </a:spcAft>
+            </a:pPr>
+            <a:r>
+              <a:rPr sz="1350" b="0">
                 <a:solidFill>
                   <a:srgbClr val="555555"/>
                 </a:solidFill>
-                <a:latin typeface="Segoe UI"/>
-              </a:rPr>
-              <a:t>–  running both site variants writes identically-named CSVs</a:t>
-            </a:r>
-          </a:p>
-          <a:p>
-            <a:pPr>
-              <a:spcAft>
-                <a:spcPts val="1000"/>
-              </a:spcAft>
-            </a:pPr>
-            <a:r>
-              <a:rPr sz="1700">
-                <a:solidFill>
-                  <a:srgbClr val="1B2A4A"/>
-                </a:solidFill>
-                <a:latin typeface="Segoe UI"/>
-              </a:rPr>
-              <a:t>•  Risk: point both at a shared results/publish location and one silently</a:t>
-            </a:r>
-          </a:p>
-          <a:p>
-            <a:pPr lvl="1">
-              <a:spcAft>
-                <a:spcPts val="600"/>
-              </a:spcAft>
-            </a:pPr>
-            <a:r>
-              <a:rPr sz="1500">
+              </a:rPr>
+              <a:t>UDE/LDE/TTU/TTL recompute exactly on every Group By change — already derived from raw per-DUT data on each call</a:t>
+            </a:r>
+          </a:p>
+          <a:p>
+            <a:pPr>
+              <a:spcAft>
+                <a:spcPts val="900"/>
+              </a:spcAft>
+            </a:pPr>
+            <a:r>
+              <a:rPr sz="1350" b="0">
                 <a:solidFill>
                   <a:srgbClr val="555555"/>
                 </a:solidFill>
-                <a:latin typeface="Segoe UI"/>
-              </a:rPr>
-              <a:t>–  overwrites the other — same class of problem unique_output_filenames</a:t>
-            </a:r>
-          </a:p>
-          <a:p>
-            <a:pPr lvl="1">
-              <a:spcAft>
-                <a:spcPts val="600"/>
-              </a:spcAft>
-            </a:pPr>
-            <a:r>
-              <a:rPr sz="1500">
-                <a:solidFill>
-                  <a:srgbClr val="555555"/>
-                </a:solidFill>
-                <a:latin typeface="Segoe UI"/>
-              </a:rPr>
-              <a:t>–  solves within one pod, but across two site-variant pods instead</a:t>
+              </a:rPr>
+              <a:t>GF toggle (top-right) still applies per-DUT exclusions the same way</a:t>
             </a:r>
           </a:p>
         </p:txBody>
@@ -13194,7 +13436,7 @@
               </a:defRPr>
             </a:pPr>
             <a:r>
-              <a:t>Multi-Site Testing</a:t>
+              <a:t>Tutorial 3 — /padb-tools</a:t>
             </a:r>
           </a:p>
         </p:txBody>
@@ -13230,7 +13472,7 @@
               </a:defRPr>
             </a:pPr>
             <a:r>
-              <a:t>padb_convert_site.py — Converting a Pod</a:t>
+              <a:t>What It Is, When to Use It</a:t>
             </a:r>
           </a:p>
         </p:txBody>
@@ -13349,8 +13591,8 @@
         </p:nvSpPr>
         <p:spPr>
           <a:xfrm>
-            <a:off x="548640" y="1600200"/>
-            <a:ext cx="11064240" cy="365760"/>
+            <a:off x="548640" y="1645920"/>
+            <a:ext cx="11064240" cy="4754880"/>
           </a:xfrm>
           <a:prstGeom prst="rect">
             <a:avLst/>
@@ -13369,256 +13611,79 @@
               </a:spcAft>
             </a:pPr>
             <a:r>
+              <a:rPr sz="1800">
+                <a:solidFill>
+                  <a:srgbClr val="1B2A4A"/>
+                </a:solidFill>
+                <a:latin typeface="Segoe UI"/>
+              </a:rPr>
+              <a:t>•  A Claude Code command scoped to this repo (.claude/commands/padb-tools.md)</a:t>
+            </a:r>
+          </a:p>
+          <a:p>
+            <a:pPr>
+              <a:spcAft>
+                <a:spcPts val="1000"/>
+              </a:spcAft>
+            </a:pPr>
+            <a:r>
+              <a:rPr sz="1800">
+                <a:solidFill>
+                  <a:srgbClr val="1B2A4A"/>
+                </a:solidFill>
+                <a:latin typeface="Segoe UI"/>
+              </a:rPr>
+              <a:t>•  Surfaces a condensed index of the tool's architecture, gotchas, and a</a:t>
+            </a:r>
+          </a:p>
+          <a:p>
+            <a:pPr lvl="1">
+              <a:spcAft>
+                <a:spcPts val="600"/>
+              </a:spcAft>
+            </a:pPr>
+            <a:r>
               <a:rPr sz="1600">
                 <a:solidFill>
+                  <a:srgbClr val="555555"/>
+                </a:solidFill>
+                <a:latin typeface="Segoe UI"/>
+              </a:rPr>
+              <a:t>–  13-point new-pod checklist — without opening all six markdown docs</a:t>
+            </a:r>
+          </a:p>
+          <a:p>
+            <a:pPr>
+              <a:spcAft>
+                <a:spcPts val="1000"/>
+              </a:spcAft>
+            </a:pPr>
+            <a:r>
+              <a:rPr sz="1800">
+                <a:solidFill>
                   <a:srgbClr val="1B2A4A"/>
                 </a:solidFill>
                 <a:latin typeface="Segoe UI"/>
               </a:rPr>
-              <a:t>•  Site registry lives in padb_sites.json — add a new site there, no code changes:</a:t>
-            </a:r>
-          </a:p>
-        </p:txBody>
-      </p:sp>
-      <p:sp>
-        <p:nvSpPr>
-          <p:cNvPr id="9" name="Rounded Rectangle 8"/>
-          <p:cNvSpPr/>
-          <p:nvPr/>
-        </p:nvSpPr>
-        <p:spPr>
-          <a:xfrm>
-            <a:off x="548640" y="1965960"/>
-            <a:ext cx="11064240" cy="502920"/>
-          </a:xfrm>
-          <a:prstGeom prst="roundRect">
-            <a:avLst>
-              <a:gd name="adj" fmla="val 4000"/>
-            </a:avLst>
-          </a:prstGeom>
-          <a:solidFill>
-            <a:srgbClr val="282C34"/>
-          </a:solidFill>
-          <a:ln>
-            <a:solidFill>
-              <a:srgbClr val="111318"/>
-            </a:solidFill>
-          </a:ln>
-          <a:effectLst/>
-        </p:spPr>
-        <p:style>
-          <a:lnRef idx="1">
-            <a:schemeClr val="accent1"/>
-          </a:lnRef>
-          <a:fillRef idx="3">
-            <a:schemeClr val="accent1"/>
-          </a:fillRef>
-          <a:effectRef idx="2">
-            <a:schemeClr val="accent1"/>
-          </a:effectRef>
-          <a:fontRef idx="minor">
-            <a:schemeClr val="lt1"/>
-          </a:fontRef>
-        </p:style>
-        <p:txBody>
-          <a:bodyPr rtlCol="0" anchor="t" wrap="square" lIns="228600" rIns="228600" tIns="164592" bIns="164592"/>
-          <a:lstStyle/>
-          <a:p>
-            <a:pPr algn="l">
-              <a:spcAft>
-                <a:spcPts val="200"/>
-              </a:spcAft>
-            </a:pPr>
-            <a:r>
-              <a:rPr sz="1450">
-                <a:solidFill>
-                  <a:srgbClr val="E6E6E6"/>
-                </a:solidFill>
-                <a:latin typeface="Consolas"/>
-              </a:rPr>
-              <a:t>py padb_convert_site.py --pod MyPod.pod --to AMC2</a:t>
-            </a:r>
-          </a:p>
-        </p:txBody>
-      </p:sp>
-      <p:sp>
-        <p:nvSpPr>
-          <p:cNvPr id="10" name="Rounded Rectangle 9"/>
-          <p:cNvSpPr/>
-          <p:nvPr/>
-        </p:nvSpPr>
-        <p:spPr>
-          <a:xfrm>
-            <a:off x="548640" y="2606040"/>
-            <a:ext cx="11064240" cy="2286000"/>
-          </a:xfrm>
-          <a:prstGeom prst="roundRect">
-            <a:avLst>
-              <a:gd name="adj" fmla="val 4000"/>
-            </a:avLst>
-          </a:prstGeom>
-          <a:solidFill>
-            <a:srgbClr val="282C34"/>
-          </a:solidFill>
-          <a:ln>
-            <a:solidFill>
-              <a:srgbClr val="111318"/>
-            </a:solidFill>
-          </a:ln>
-          <a:effectLst/>
-        </p:spPr>
-        <p:style>
-          <a:lnRef idx="1">
-            <a:schemeClr val="accent1"/>
-          </a:lnRef>
-          <a:fillRef idx="3">
-            <a:schemeClr val="accent1"/>
-          </a:fillRef>
-          <a:effectRef idx="2">
-            <a:schemeClr val="accent1"/>
-          </a:effectRef>
-          <a:fontRef idx="minor">
-            <a:schemeClr val="lt1"/>
-          </a:fontRef>
-        </p:style>
-        <p:txBody>
-          <a:bodyPr rtlCol="0" anchor="t" wrap="square" lIns="228600" rIns="228600" tIns="164592" bIns="164592"/>
-          <a:lstStyle/>
-          <a:p>
-            <a:pPr algn="l">
-              <a:spcAft>
-                <a:spcPts val="200"/>
-              </a:spcAft>
-            </a:pPr>
-            <a:r>
-              <a:rPr sz="1350">
-                <a:solidFill>
-                  <a:srgbClr val="E6E6E6"/>
-                </a:solidFill>
-                <a:latin typeface="Consolas"/>
-              </a:rPr>
-              <a:t>Wrote MyPod-AMC2.pod  (SantaRosa -&gt; AMC2)</a:t>
-            </a:r>
-          </a:p>
-          <a:p>
-            <a:pPr algn="l">
-              <a:spcAft>
-                <a:spcPts val="200"/>
-              </a:spcAft>
-            </a:pPr>
-            <a:r>
-              <a:rPr sz="1350">
-                <a:solidFill>
-                  <a:srgbClr val="E6E6E6"/>
-                </a:solidFill>
-                <a:latin typeface="Consolas"/>
-              </a:rPr>
-              <a:t>  Device_Server -&gt; PADB ORACLE AMC2</a:t>
-            </a:r>
-          </a:p>
-          <a:p>
-            <a:pPr algn="l">
-              <a:spcAft>
-                <a:spcPts val="200"/>
-              </a:spcAft>
-            </a:pPr>
-            <a:r>
-              <a:rPr sz="1350">
-                <a:solidFill>
-                  <a:srgbClr val="E6E6E6"/>
-                </a:solidFill>
-                <a:latin typeface="Consolas"/>
-              </a:rPr>
-              <a:t>  Device_Database -&gt; GALLEON_1</a:t>
-            </a:r>
-          </a:p>
-          <a:p>
-            <a:pPr algn="l">
-              <a:spcAft>
-                <a:spcPts val="200"/>
-              </a:spcAft>
-            </a:pPr>
-            <a:r>
-              <a:rPr sz="1350">
-                <a:solidFill>
-                  <a:srgbClr val="E6E6E6"/>
-                </a:solidFill>
-                <a:latin typeface="Consolas"/>
-              </a:rPr>
-              <a:t>  AnalyticName 'Leveled Linear' -&gt; 'Leveled Linear AMC2'</a:t>
-            </a:r>
-          </a:p>
-          <a:p>
-            <a:pPr algn="l">
-              <a:spcAft>
-                <a:spcPts val="200"/>
-              </a:spcAft>
-            </a:pPr>
-            <a:r>
-              <a:rPr sz="1350">
-                <a:solidFill>
-                  <a:srgbClr val="E6E6E6"/>
-                </a:solidFill>
-                <a:latin typeface="Consolas"/>
-              </a:rPr>
-              <a:t>  OutputConfig_OutputFile '..._Linear' -&gt; '..._Linear_AMC2'</a:t>
-            </a:r>
-          </a:p>
-          <a:p>
-            <a:pPr algn="l">
-              <a:spcAft>
-                <a:spcPts val="200"/>
-              </a:spcAft>
-            </a:pPr>
-            <a:r>
-              <a:rPr sz="1350">
-                <a:solidFill>
-                  <a:srgbClr val="E6E6E6"/>
-                </a:solidFill>
-                <a:latin typeface="Consolas"/>
-              </a:rPr>
-              <a:t>  WARNING: SaoFile now points at 'MyPod-AMC2.sao', which does not</a:t>
-            </a:r>
-          </a:p>
-          <a:p>
-            <a:pPr algn="l">
-              <a:spcAft>
-                <a:spcPts val="200"/>
-              </a:spcAft>
-            </a:pPr>
-            <a:r>
-              <a:rPr sz="1350">
-                <a:solidFill>
-                  <a:srgbClr val="E6E6E6"/>
-                </a:solidFill>
-                <a:latin typeface="Consolas"/>
-              </a:rPr>
-              <a:t>  exist yet -- supply a real .sao extracted at AMC2 before running</a:t>
-            </a:r>
-          </a:p>
-        </p:txBody>
-      </p:sp>
-      <p:sp>
-        <p:nvSpPr>
-          <p:cNvPr id="11" name="TextBox 10"/>
-          <p:cNvSpPr txBox="1"/>
-          <p:nvPr/>
-        </p:nvSpPr>
-        <p:spPr>
-          <a:xfrm>
-            <a:off x="548640" y="5074920"/>
-            <a:ext cx="11064240" cy="640080"/>
-          </a:xfrm>
-          <a:prstGeom prst="rect">
-            <a:avLst/>
-          </a:prstGeom>
-          <a:noFill/>
-        </p:spPr>
-        <p:txBody>
-          <a:bodyPr wrap="square">
-            <a:spAutoFit/>
-          </a:bodyPr>
-          <a:lstStyle/>
+              <a:t>•  Only works when Claude Code's working directory is inside the repo</a:t>
+            </a:r>
+          </a:p>
+          <a:p>
+            <a:pPr lvl="1">
+              <a:spcAft>
+                <a:spcPts val="600"/>
+              </a:spcAft>
+            </a:pPr>
+            <a:r>
+              <a:rPr sz="1600">
+                <a:solidFill>
+                  <a:srgbClr val="555555"/>
+                </a:solidFill>
+                <a:latin typeface="Segoe UI"/>
+              </a:rPr>
+              <a:t>–  (e.g. C:\apps\padb\tools) — that's what makes it "repo-scoped"</a:t>
+            </a:r>
+          </a:p>
           <a:p>
             <a:pPr>
               <a:spcAft>
@@ -13626,13 +13691,13 @@
               </a:spcAft>
             </a:pPr>
             <a:r>
-              <a:rPr sz="1500">
+              <a:rPr sz="1800">
                 <a:solidFill>
                   <a:srgbClr val="1B2A4A"/>
                 </a:solidFill>
                 <a:latin typeface="Segoe UI"/>
               </a:rPr>
-              <a:t>•  Source pod is never touched. Round-trip verified byte-identical</a:t>
+              <a:t>•  Use it when you're: onboarding a new pod, debugging a plot feature,</a:t>
             </a:r>
           </a:p>
           <a:p>
@@ -13642,13 +13707,13 @@
               </a:spcAft>
             </a:pPr>
             <a:r>
-              <a:rPr sz="1300">
+              <a:rPr sz="1600">
                 <a:solidFill>
                   <a:srgbClr val="555555"/>
                 </a:solidFill>
                 <a:latin typeface="Segoe UI"/>
               </a:rPr>
-              <a:t>–  (SantaRosa -&gt; AMC2 -&gt; SantaRosa reproduces the original exactly)</a:t>
+              <a:t>–  reviewing generated HTML, or just orienting yourself in a new session</a:t>
             </a:r>
           </a:p>
         </p:txBody>
@@ -13746,7 +13811,7 @@
               </a:defRPr>
             </a:pPr>
             <a:r>
-              <a:t>Multi-Site Testing</a:t>
+              <a:t>Tutorial 3 — /padb-tools</a:t>
             </a:r>
           </a:p>
         </p:txBody>
@@ -13782,7 +13847,7 @@
               </a:defRPr>
             </a:pPr>
             <a:r>
-              <a:t>padb_convert_site.py — Converting a Job</a:t>
+              <a:t>What It Actually Tells You</a:t>
             </a:r>
           </a:p>
         </p:txBody>
@@ -13895,75 +13960,14 @@
       </p:sp>
       <p:sp>
         <p:nvSpPr>
-          <p:cNvPr id="8" name="Rounded Rectangle 7"/>
-          <p:cNvSpPr/>
-          <p:nvPr/>
-        </p:nvSpPr>
-        <p:spPr>
-          <a:xfrm>
-            <a:off x="548640" y="1691640"/>
-            <a:ext cx="11064240" cy="502920"/>
-          </a:xfrm>
-          <a:prstGeom prst="roundRect">
-            <a:avLst>
-              <a:gd name="adj" fmla="val 4000"/>
-            </a:avLst>
-          </a:prstGeom>
-          <a:solidFill>
-            <a:srgbClr val="282C34"/>
-          </a:solidFill>
-          <a:ln>
-            <a:solidFill>
-              <a:srgbClr val="111318"/>
-            </a:solidFill>
-          </a:ln>
-          <a:effectLst/>
-        </p:spPr>
-        <p:style>
-          <a:lnRef idx="1">
-            <a:schemeClr val="accent1"/>
-          </a:lnRef>
-          <a:fillRef idx="3">
-            <a:schemeClr val="accent1"/>
-          </a:fillRef>
-          <a:effectRef idx="2">
-            <a:schemeClr val="accent1"/>
-          </a:effectRef>
-          <a:fontRef idx="minor">
-            <a:schemeClr val="lt1"/>
-          </a:fontRef>
-        </p:style>
-        <p:txBody>
-          <a:bodyPr rtlCol="0" anchor="t" wrap="square" lIns="228600" rIns="228600" tIns="164592" bIns="164592"/>
-          <a:lstStyle/>
-          <a:p>
-            <a:pPr algn="l">
-              <a:spcAft>
-                <a:spcPts val="200"/>
-              </a:spcAft>
-            </a:pPr>
-            <a:r>
-              <a:rPr sz="1450">
-                <a:solidFill>
-                  <a:srgbClr val="E6E6E6"/>
-                </a:solidFill>
-                <a:latin typeface="Consolas"/>
-              </a:rPr>
-              <a:t>py padb_convert_site.py --job my_run_job.json --to AMC2</a:t>
-            </a:r>
-          </a:p>
-        </p:txBody>
-      </p:sp>
-      <p:sp>
-        <p:nvSpPr>
-          <p:cNvPr id="9" name="TextBox 8"/>
-          <p:cNvSpPr txBox="1"/>
-          <p:nvPr/>
-        </p:nvSpPr>
-        <p:spPr>
-          <a:xfrm>
-            <a:off x="548640" y="2377440"/>
-            <a:ext cx="11064240" cy="365760"/>
+          <p:cNvPr id="8" name="TextBox 7"/>
+          <p:cNvSpPr txBox="1"/>
+          <p:nvPr/>
+        </p:nvSpPr>
+        <p:spPr>
+          <a:xfrm>
+            <a:off x="548640" y="1645920"/>
+            <a:ext cx="11064240" cy="4754880"/>
           </a:xfrm>
           <a:prstGeom prst="rect">
             <a:avLst/>
@@ -13988,173 +13992,73 @@
                 </a:solidFill>
                 <a:latin typeface="Segoe UI"/>
               </a:rPr>
-              <a:t>•  Repoints "pod" and swaps the pod stem everywhere it appears:</a:t>
-            </a:r>
-          </a:p>
-        </p:txBody>
-      </p:sp>
-      <p:sp>
-        <p:nvSpPr>
-          <p:cNvPr id="10" name="Rounded Rectangle 9"/>
-          <p:cNvSpPr/>
-          <p:nvPr/>
-        </p:nvSpPr>
-        <p:spPr>
-          <a:xfrm>
-            <a:off x="548640" y="2743200"/>
-            <a:ext cx="11064240" cy="2103120"/>
-          </a:xfrm>
-          <a:prstGeom prst="roundRect">
-            <a:avLst>
-              <a:gd name="adj" fmla="val 4000"/>
-            </a:avLst>
-          </a:prstGeom>
-          <a:solidFill>
-            <a:srgbClr val="282C34"/>
-          </a:solidFill>
-          <a:ln>
-            <a:solidFill>
-              <a:srgbClr val="111318"/>
-            </a:solidFill>
-          </a:ln>
-          <a:effectLst/>
-        </p:spPr>
-        <p:style>
-          <a:lnRef idx="1">
-            <a:schemeClr val="accent1"/>
-          </a:lnRef>
-          <a:fillRef idx="3">
-            <a:schemeClr val="accent1"/>
-          </a:fillRef>
-          <a:effectRef idx="2">
-            <a:schemeClr val="accent1"/>
-          </a:effectRef>
-          <a:fontRef idx="minor">
-            <a:schemeClr val="lt1"/>
-          </a:fontRef>
-        </p:style>
-        <p:txBody>
-          <a:bodyPr rtlCol="0" anchor="t" wrap="square" lIns="228600" rIns="228600" tIns="164592" bIns="164592"/>
-          <a:lstStyle/>
-          <a:p>
-            <a:pPr algn="l">
-              <a:spcAft>
-                <a:spcPts val="200"/>
-              </a:spcAft>
-            </a:pPr>
-            <a:r>
-              <a:rPr sz="1350">
-                <a:solidFill>
-                  <a:srgbClr val="E6E6E6"/>
-                </a:solidFill>
-                <a:latin typeface="Consolas"/>
-              </a:rPr>
-              <a:t>Converted pod not found yet -- creating it first: ...</a:t>
-            </a:r>
-          </a:p>
-          <a:p>
-            <a:pPr algn="l">
-              <a:spcAft>
-                <a:spcPts val="200"/>
-              </a:spcAft>
-            </a:pPr>
-            <a:r>
-              <a:rPr sz="1350">
-                <a:solidFill>
-                  <a:srgbClr val="E6E6E6"/>
-                </a:solidFill>
-                <a:latin typeface="Consolas"/>
-              </a:rPr>
-              <a:t>Wrote MyPod-AMC2_run_job.json  (SantaRosa -&gt; AMC2,</a:t>
-            </a:r>
-          </a:p>
-          <a:p>
-            <a:pPr algn="l">
-              <a:spcAft>
-                <a:spcPts val="200"/>
-              </a:spcAft>
-            </a:pPr>
-            <a:r>
-              <a:rPr sz="1350">
-                <a:solidFill>
-                  <a:srgbClr val="E6E6E6"/>
-                </a:solidFill>
-                <a:latin typeface="Consolas"/>
-              </a:rPr>
-              <a:t>  pod=MyPod-AMC2.pod)</a:t>
-            </a:r>
-          </a:p>
-          <a:p>
-            <a:pPr algn="l">
-              <a:spcAft>
-                <a:spcPts val="200"/>
-              </a:spcAft>
-            </a:pPr>
-            <a:r>
-              <a:rPr sz="1350">
-                <a:solidFill>
-                  <a:srgbClr val="E6E6E6"/>
-                </a:solidFill>
-                <a:latin typeface="Consolas"/>
-              </a:rPr>
-              <a:t>  This is a V2 run job -- also regenerate its plot</a:t>
-            </a:r>
-          </a:p>
-          <a:p>
-            <a:pPr algn="l">
-              <a:spcAft>
-                <a:spcPts val="200"/>
-              </a:spcAft>
-            </a:pPr>
-            <a:r>
-              <a:rPr sz="1350">
-                <a:solidFill>
-                  <a:srgbClr val="E6E6E6"/>
-                </a:solidFill>
-                <a:latin typeface="Consolas"/>
-              </a:rPr>
-              <a:t>  job(s) against the new pod:</a:t>
-            </a:r>
-          </a:p>
-          <a:p>
-            <a:pPr algn="l">
-              <a:spcAft>
-                <a:spcPts val="200"/>
-              </a:spcAft>
-            </a:pPr>
-            <a:r>
-              <a:rPr sz="1350">
-                <a:solidFill>
-                  <a:srgbClr val="E6E6E6"/>
-                </a:solidFill>
-                <a:latin typeface="Consolas"/>
-              </a:rPr>
-              <a:t>    py padb_make_v2_job.py MyPod-AMC2.pod --module &lt;YourModule&gt;</a:t>
-            </a:r>
-          </a:p>
-        </p:txBody>
-      </p:sp>
-      <p:sp>
-        <p:nvSpPr>
-          <p:cNvPr id="11" name="TextBox 10"/>
-          <p:cNvSpPr txBox="1"/>
-          <p:nvPr/>
-        </p:nvSpPr>
-        <p:spPr>
-          <a:xfrm>
-            <a:off x="548640" y="5074920"/>
-            <a:ext cx="11064240" cy="640080"/>
-          </a:xfrm>
-          <a:prstGeom prst="rect">
-            <a:avLst/>
-          </a:prstGeom>
-          <a:noFill/>
-        </p:spPr>
-        <p:txBody>
-          <a:bodyPr wrap="square">
-            <a:spAutoFit/>
-          </a:bodyPr>
-          <a:lstStyle/>
+              <a:t>•  A few of the 13 new-pod checklist items it surfaces immediately:</a:t>
+            </a:r>
+          </a:p>
+          <a:p>
+            <a:pPr lvl="1">
+              <a:spcAft>
+                <a:spcPts val="600"/>
+              </a:spcAft>
+            </a:pPr>
+            <a:r>
+              <a:rPr sz="1500">
+                <a:solidFill>
+                  <a:srgbClr val="555555"/>
+                </a:solidFill>
+                <a:latin typeface="Segoe UI"/>
+              </a:rPr>
+              <a:t>–  TestRun_RunStatus — exit 0 but no CSV? Check the pod's default 'P'-only filter</a:t>
+            </a:r>
+          </a:p>
+          <a:p>
+            <a:pPr lvl="1">
+              <a:spcAft>
+                <a:spcPts val="600"/>
+              </a:spcAft>
+            </a:pPr>
+            <a:r>
+              <a:rPr sz="1500">
+                <a:solidFill>
+                  <a:srgbClr val="555555"/>
+                </a:solidFill>
+                <a:latin typeface="Segoe UI"/>
+              </a:rPr>
+              <a:t>–  Environment_TestStep must be {All} or distribution/env_coverage/summary go empty</a:t>
+            </a:r>
+          </a:p>
+          <a:p>
+            <a:pPr lvl="1">
+              <a:spcAft>
+                <a:spcPts val="600"/>
+              </a:spcAft>
+            </a:pPr>
+            <a:r>
+              <a:rPr sz="1500">
+                <a:solidFill>
+                  <a:srgbClr val="555555"/>
+                </a:solidFill>
+                <a:latin typeface="Segoe UI"/>
+              </a:rPr>
+              <a:t>–  OutputConfig_OutputCSV=False on a Scatter analytic — renders PNG, writes no CSV</a:t>
+            </a:r>
+          </a:p>
+          <a:p>
+            <a:pPr lvl="1">
+              <a:spcAft>
+                <a:spcPts val="600"/>
+              </a:spcAft>
+            </a:pPr>
+            <a:r>
+              <a:rPr sz="1500">
+                <a:solidFill>
+                  <a:srgbClr val="555555"/>
+                </a:solidFill>
+                <a:latin typeface="Segoe UI"/>
+              </a:rPr>
+              <a:t>–  Generated job.json path length — warns before Windows' 260-char limit bites</a:t>
+            </a:r>
+          </a:p>
           <a:p>
             <a:pPr>
               <a:spcAft>
@@ -14162,29 +14066,29 @@
               </a:spcAft>
             </a:pPr>
             <a:r>
+              <a:rPr sz="1700">
+                <a:solidFill>
+                  <a:srgbClr val="1B2A4A"/>
+                </a:solidFill>
+                <a:latin typeface="Segoe UI"/>
+              </a:rPr>
+              <a:t>•  Plus: the architecture one-liner, common JS gotchas, and pointers to the</a:t>
+            </a:r>
+          </a:p>
+          <a:p>
+            <a:pPr lvl="1">
+              <a:spcAft>
+                <a:spcPts val="600"/>
+              </a:spcAft>
+            </a:pPr>
+            <a:r>
               <a:rPr sz="1500">
                 <a:solidFill>
-                  <a:srgbClr val="1B2A4A"/>
-                </a:solidFill>
-                <a:latin typeface="Segoe UI"/>
-              </a:rPr>
-              <a:t>•  Updates results_dir, publish/publish_to, and description too — not just "pod"</a:t>
-            </a:r>
-          </a:p>
-          <a:p>
-            <a:pPr>
-              <a:spcAft>
-                <a:spcPts val="1000"/>
-              </a:spcAft>
-            </a:pPr>
-            <a:r>
-              <a:rPr sz="1500">
-                <a:solidFill>
-                  <a:srgbClr val="1B2A4A"/>
-                </a:solidFill>
-                <a:latin typeface="Segoe UI"/>
-              </a:rPr>
-              <a:t>•  --force overwrites an existing output; --list-sites prints the registry</a:t>
+                  <a:srgbClr val="555555"/>
+                </a:solidFill>
+                <a:latin typeface="Segoe UI"/>
+              </a:rPr>
+              <a:t>–  full doc for anything it only summarizes</a:t>
             </a:r>
           </a:p>
         </p:txBody>
@@ -14222,7 +14126,7 @@
             <a:avLst/>
           </a:prstGeom>
           <a:solidFill>
-            <a:srgbClr val="1B2A4A"/>
+            <a:srgbClr val="FFFFFF"/>
           </a:solidFill>
           <a:ln>
             <a:noFill/>
@@ -14259,8 +14163,8 @@
         </p:nvSpPr>
         <p:spPr>
           <a:xfrm>
-            <a:off x="822960" y="2743200"/>
-            <a:ext cx="10515600" cy="1097280"/>
+            <a:off x="548640" y="320040"/>
+            <a:ext cx="7315200" cy="365760"/>
           </a:xfrm>
           <a:prstGeom prst="rect">
             <a:avLst/>
@@ -14274,14 +14178,15 @@
           <a:lstStyle/>
           <a:p>
             <a:pPr>
-              <a:defRPr sz="4800" b="1">
-                <a:solidFill>
-                  <a:srgbClr val="FFFFFF"/>
-                </a:solidFill>
+              <a:defRPr sz="1600" b="1">
+                <a:solidFill>
+                  <a:srgbClr val="0066CC"/>
+                </a:solidFill>
+                <a:latin typeface="Segoe UI"/>
               </a:defRPr>
             </a:pPr>
             <a:r>
-              <a:t>Questions?</a:t>
+              <a:t>Tutorial 3 — /padb-tools</a:t>
             </a:r>
           </a:p>
         </p:txBody>
@@ -14294,8 +14199,79 @@
         </p:nvSpPr>
         <p:spPr>
           <a:xfrm>
-            <a:off x="822960" y="3749039"/>
-            <a:ext cx="10515600" cy="640080"/>
+            <a:off x="548640" y="658368"/>
+            <a:ext cx="11064240" cy="822960"/>
+          </a:xfrm>
+          <a:prstGeom prst="rect">
+            <a:avLst/>
+          </a:prstGeom>
+          <a:noFill/>
+        </p:spPr>
+        <p:txBody>
+          <a:bodyPr wrap="square">
+            <a:spAutoFit/>
+          </a:bodyPr>
+          <a:lstStyle/>
+          <a:p>
+            <a:pPr>
+              <a:defRPr sz="3200" b="1">
+                <a:solidFill>
+                  <a:srgbClr val="1B2A4A"/>
+                </a:solidFill>
+                <a:latin typeface="Segoe UI"/>
+              </a:defRPr>
+            </a:pPr>
+            <a:r>
+              <a:t>Worked Example: MaxPowerTutorial3.pod</a:t>
+            </a:r>
+          </a:p>
+        </p:txBody>
+      </p:sp>
+      <p:cxnSp>
+        <p:nvCxnSpPr>
+          <p:cNvPr id="5" name="Connector 4"/>
+          <p:cNvCxnSpPr/>
+          <p:nvPr/>
+        </p:nvCxnSpPr>
+        <p:spPr>
+          <a:xfrm>
+            <a:off x="548640" y="1417320"/>
+            <a:ext cx="11091672" cy="0"/>
+          </a:xfrm>
+          <a:prstGeom prst="line">
+            <a:avLst/>
+          </a:prstGeom>
+          <a:ln w="28575">
+            <a:solidFill>
+              <a:srgbClr val="0066CC"/>
+            </a:solidFill>
+          </a:ln>
+        </p:spPr>
+        <p:style>
+          <a:lnRef idx="2">
+            <a:schemeClr val="accent1"/>
+          </a:lnRef>
+          <a:fillRef idx="0">
+            <a:schemeClr val="accent1"/>
+          </a:fillRef>
+          <a:effectRef idx="1">
+            <a:schemeClr val="accent1"/>
+          </a:effectRef>
+          <a:fontRef idx="minor">
+            <a:schemeClr val="tx1"/>
+          </a:fontRef>
+        </p:style>
+      </p:cxnSp>
+      <p:sp>
+        <p:nvSpPr>
+          <p:cNvPr id="6" name="TextBox 5"/>
+          <p:cNvSpPr txBox="1"/>
+          <p:nvPr/>
+        </p:nvSpPr>
+        <p:spPr>
+          <a:xfrm>
+            <a:off x="548640" y="6473952"/>
+            <a:ext cx="8229600" cy="320040"/>
           </a:xfrm>
           <a:prstGeom prst="rect">
             <a:avLst/>
@@ -14309,15 +14285,185 @@
           <a:lstStyle/>
           <a:p>
             <a:pPr>
-              <a:defRPr sz="1800">
-                <a:solidFill>
-                  <a:srgbClr val="9FC5FF"/>
-                </a:solidFill>
-                <a:latin typeface="Consolas"/>
+              <a:defRPr sz="1100">
+                <a:solidFill>
+                  <a:srgbClr val="555555"/>
+                </a:solidFill>
+                <a:latin typeface="Segoe UI"/>
               </a:defRPr>
             </a:pPr>
             <a:r>
-              <a:t>C:\apps\padb\tools   |   /padb-tools</a:t>
+              <a:t>padb-tools</a:t>
+            </a:r>
+          </a:p>
+        </p:txBody>
+      </p:sp>
+      <p:sp>
+        <p:nvSpPr>
+          <p:cNvPr id="7" name="TextBox 6"/>
+          <p:cNvSpPr txBox="1"/>
+          <p:nvPr/>
+        </p:nvSpPr>
+        <p:spPr>
+          <a:xfrm>
+            <a:off x="11338560" y="6473952"/>
+            <a:ext cx="548640" cy="320040"/>
+          </a:xfrm>
+          <a:prstGeom prst="rect">
+            <a:avLst/>
+          </a:prstGeom>
+          <a:noFill/>
+        </p:spPr>
+        <p:txBody>
+          <a:bodyPr wrap="none">
+            <a:spAutoFit/>
+          </a:bodyPr>
+          <a:lstStyle/>
+          <a:p>
+            <a:pPr algn="r">
+              <a:defRPr sz="1100">
+                <a:solidFill>
+                  <a:srgbClr val="555555"/>
+                </a:solidFill>
+              </a:defRPr>
+            </a:pPr>
+            <a:r>
+              <a:t>34</a:t>
+            </a:r>
+          </a:p>
+        </p:txBody>
+      </p:sp>
+      <p:sp>
+        <p:nvSpPr>
+          <p:cNvPr id="8" name="TextBox 7"/>
+          <p:cNvSpPr txBox="1"/>
+          <p:nvPr/>
+        </p:nvSpPr>
+        <p:spPr>
+          <a:xfrm>
+            <a:off x="548640" y="1645920"/>
+            <a:ext cx="11064240" cy="4754880"/>
+          </a:xfrm>
+          <a:prstGeom prst="rect">
+            <a:avLst/>
+          </a:prstGeom>
+          <a:noFill/>
+        </p:spPr>
+        <p:txBody>
+          <a:bodyPr wrap="square">
+            <a:spAutoFit/>
+          </a:bodyPr>
+          <a:lstStyle/>
+          <a:p>
+            <a:pPr>
+              <a:spcAft>
+                <a:spcPts val="1000"/>
+              </a:spcAft>
+            </a:pPr>
+            <a:r>
+              <a:rPr sz="1800">
+                <a:solidFill>
+                  <a:srgbClr val="1B2A4A"/>
+                </a:solidFill>
+                <a:latin typeface="Segoe UI"/>
+              </a:rPr>
+              <a:t>•  You've just been handed MaxPowerTutorial3.pod — 2 analytics, never run before</a:t>
+            </a:r>
+          </a:p>
+          <a:p>
+            <a:pPr>
+              <a:spcAft>
+                <a:spcPts val="1000"/>
+              </a:spcAft>
+            </a:pPr>
+            <a:r>
+              <a:rPr sz="1800">
+                <a:solidFill>
+                  <a:srgbClr val="1B2A4A"/>
+                </a:solidFill>
+                <a:latin typeface="Segoe UI"/>
+              </a:rPr>
+              <a:t>•  Open Claude Code with your working directory inside the padb-tools repo</a:t>
+            </a:r>
+          </a:p>
+          <a:p>
+            <a:pPr>
+              <a:spcAft>
+                <a:spcPts val="1000"/>
+              </a:spcAft>
+            </a:pPr>
+            <a:r>
+              <a:rPr sz="1800">
+                <a:solidFill>
+                  <a:srgbClr val="1B2A4A"/>
+                </a:solidFill>
+                <a:latin typeface="Segoe UI"/>
+              </a:rPr>
+              <a:t>•  Type: /padb-tools</a:t>
+            </a:r>
+          </a:p>
+          <a:p>
+            <a:pPr>
+              <a:spcAft>
+                <a:spcPts val="1000"/>
+              </a:spcAft>
+            </a:pPr>
+            <a:r>
+              <a:rPr sz="1800">
+                <a:solidFill>
+                  <a:srgbClr val="1B2A4A"/>
+                </a:solidFill>
+                <a:latin typeface="Segoe UI"/>
+              </a:rPr>
+              <a:t>•  Ask directly: "Is MaxPowerTutorial3.pod ready to run in Interactive mode?"</a:t>
+            </a:r>
+          </a:p>
+          <a:p>
+            <a:pPr>
+              <a:spcAft>
+                <a:spcPts val="1000"/>
+              </a:spcAft>
+            </a:pPr>
+            <a:r>
+              <a:rPr sz="1800">
+                <a:solidFill>
+                  <a:srgbClr val="1B2A4A"/>
+                </a:solidFill>
+                <a:latin typeface="Segoe UI"/>
+              </a:rPr>
+              <a:t>•  Claude reads the checklist above, then actually inspects the pod file —</a:t>
+            </a:r>
+          </a:p>
+          <a:p>
+            <a:pPr lvl="1">
+              <a:spcAft>
+                <a:spcPts val="600"/>
+              </a:spcAft>
+            </a:pPr>
+            <a:r>
+              <a:rPr sz="1600">
+                <a:solidFill>
+                  <a:srgbClr val="555555"/>
+                </a:solidFill>
+                <a:latin typeface="Segoe UI"/>
+              </a:rPr>
+              <a:t>–  Limits_YLimit, Environment_TestStep, OutputConfig_OutputCSV, Group strings</a:t>
+            </a:r>
+          </a:p>
+          <a:p>
+            <a:pPr>
+              <a:spcAft>
+                <a:spcPts val="1000"/>
+              </a:spcAft>
+            </a:pPr>
+            <a:r>
+              <a:rPr sz="1800">
+                <a:solidFill>
+                  <a:srgbClr val="1B2A4A"/>
+                </a:solidFill>
+                <a:latin typeface="Segoe UI"/>
+              </a:rPr>
+              <a:t>•  You get a direct answer grounded in this pod's real settings, not a guess</a:t>
             </a:r>
           </a:p>
         </p:txBody>
@@ -14355,7 +14501,7 @@
             <a:avLst/>
           </a:prstGeom>
           <a:solidFill>
-            <a:srgbClr val="F2F4F8"/>
+            <a:srgbClr val="FFFFFF"/>
           </a:solidFill>
           <a:ln>
             <a:noFill/>
@@ -14392,8 +14538,8 @@
         </p:nvSpPr>
         <p:spPr>
           <a:xfrm>
-            <a:off x="822960" y="2743200"/>
-            <a:ext cx="10515600" cy="914400"/>
+            <a:off x="548640" y="320040"/>
+            <a:ext cx="7315200" cy="365760"/>
           </a:xfrm>
           <a:prstGeom prst="rect">
             <a:avLst/>
@@ -14407,28 +14553,100 @@
           <a:lstStyle/>
           <a:p>
             <a:pPr>
-              <a:defRPr sz="4400" b="1">
+              <a:defRPr sz="1600" b="1">
+                <a:solidFill>
+                  <a:srgbClr val="0066CC"/>
+                </a:solidFill>
+                <a:latin typeface="Segoe UI"/>
+              </a:defRPr>
+            </a:pPr>
+            <a:r>
+              <a:t>Multi-Site Testing</a:t>
+            </a:r>
+          </a:p>
+        </p:txBody>
+      </p:sp>
+      <p:sp>
+        <p:nvSpPr>
+          <p:cNvPr id="4" name="TextBox 3"/>
+          <p:cNvSpPr txBox="1"/>
+          <p:nvPr/>
+        </p:nvSpPr>
+        <p:spPr>
+          <a:xfrm>
+            <a:off x="548640" y="658368"/>
+            <a:ext cx="11064240" cy="822960"/>
+          </a:xfrm>
+          <a:prstGeom prst="rect">
+            <a:avLst/>
+          </a:prstGeom>
+          <a:noFill/>
+        </p:spPr>
+        <p:txBody>
+          <a:bodyPr wrap="square">
+            <a:spAutoFit/>
+          </a:bodyPr>
+          <a:lstStyle/>
+          <a:p>
+            <a:pPr>
+              <a:defRPr sz="3200" b="1">
                 <a:solidFill>
                   <a:srgbClr val="1B2A4A"/>
                 </a:solidFill>
+                <a:latin typeface="Segoe UI"/>
               </a:defRPr>
             </a:pPr>
             <a:r>
-              <a:t>Appendix</a:t>
-            </a:r>
-          </a:p>
-        </p:txBody>
-      </p:sp>
-      <p:sp>
-        <p:nvSpPr>
-          <p:cNvPr id="4" name="TextBox 3"/>
-          <p:cNvSpPr txBox="1"/>
-          <p:nvPr/>
-        </p:nvSpPr>
-        <p:spPr>
-          <a:xfrm>
-            <a:off x="822960" y="3566160"/>
-            <a:ext cx="10515600" cy="640080"/>
+              <a:t>Same Test, Different Database</a:t>
+            </a:r>
+          </a:p>
+        </p:txBody>
+      </p:sp>
+      <p:cxnSp>
+        <p:nvCxnSpPr>
+          <p:cNvPr id="5" name="Connector 4"/>
+          <p:cNvCxnSpPr/>
+          <p:nvPr/>
+        </p:nvCxnSpPr>
+        <p:spPr>
+          <a:xfrm>
+            <a:off x="548640" y="1417320"/>
+            <a:ext cx="11091672" cy="0"/>
+          </a:xfrm>
+          <a:prstGeom prst="line">
+            <a:avLst/>
+          </a:prstGeom>
+          <a:ln w="28575">
+            <a:solidFill>
+              <a:srgbClr val="0066CC"/>
+            </a:solidFill>
+          </a:ln>
+        </p:spPr>
+        <p:style>
+          <a:lnRef idx="2">
+            <a:schemeClr val="accent1"/>
+          </a:lnRef>
+          <a:fillRef idx="0">
+            <a:schemeClr val="accent1"/>
+          </a:fillRef>
+          <a:effectRef idx="1">
+            <a:schemeClr val="accent1"/>
+          </a:effectRef>
+          <a:fontRef idx="minor">
+            <a:schemeClr val="tx1"/>
+          </a:fontRef>
+        </p:style>
+      </p:cxnSp>
+      <p:sp>
+        <p:nvSpPr>
+          <p:cNvPr id="6" name="TextBox 5"/>
+          <p:cNvSpPr txBox="1"/>
+          <p:nvPr/>
+        </p:nvSpPr>
+        <p:spPr>
+          <a:xfrm>
+            <a:off x="548640" y="6473952"/>
+            <a:ext cx="8229600" cy="320040"/>
           </a:xfrm>
           <a:prstGeom prst="rect">
             <a:avLst/>
@@ -14442,14 +14660,217 @@
           <a:lstStyle/>
           <a:p>
             <a:pPr>
-              <a:defRPr sz="2200">
-                <a:solidFill>
-                  <a:srgbClr val="0066CC"/>
-                </a:solidFill>
+              <a:defRPr sz="1100">
+                <a:solidFill>
+                  <a:srgbClr val="555555"/>
+                </a:solidFill>
+                <a:latin typeface="Segoe UI"/>
               </a:defRPr>
             </a:pPr>
             <a:r>
-              <a:t>Setting Up From Zero — Assumes No Prior Access</a:t>
+              <a:t>padb-tools</a:t>
+            </a:r>
+          </a:p>
+        </p:txBody>
+      </p:sp>
+      <p:sp>
+        <p:nvSpPr>
+          <p:cNvPr id="7" name="TextBox 6"/>
+          <p:cNvSpPr txBox="1"/>
+          <p:nvPr/>
+        </p:nvSpPr>
+        <p:spPr>
+          <a:xfrm>
+            <a:off x="11338560" y="6473952"/>
+            <a:ext cx="548640" cy="320040"/>
+          </a:xfrm>
+          <a:prstGeom prst="rect">
+            <a:avLst/>
+          </a:prstGeom>
+          <a:noFill/>
+        </p:spPr>
+        <p:txBody>
+          <a:bodyPr wrap="none">
+            <a:spAutoFit/>
+          </a:bodyPr>
+          <a:lstStyle/>
+          <a:p>
+            <a:pPr algn="r">
+              <a:defRPr sz="1100">
+                <a:solidFill>
+                  <a:srgbClr val="555555"/>
+                </a:solidFill>
+              </a:defRPr>
+            </a:pPr>
+            <a:r>
+              <a:t>35</a:t>
+            </a:r>
+          </a:p>
+        </p:txBody>
+      </p:sp>
+      <p:sp>
+        <p:nvSpPr>
+          <p:cNvPr id="8" name="TextBox 7"/>
+          <p:cNvSpPr txBox="1"/>
+          <p:nvPr/>
+        </p:nvSpPr>
+        <p:spPr>
+          <a:xfrm>
+            <a:off x="548640" y="1645920"/>
+            <a:ext cx="11064240" cy="4754880"/>
+          </a:xfrm>
+          <a:prstGeom prst="rect">
+            <a:avLst/>
+          </a:prstGeom>
+          <a:noFill/>
+        </p:spPr>
+        <p:txBody>
+          <a:bodyPr wrap="square">
+            <a:spAutoFit/>
+          </a:bodyPr>
+          <a:lstStyle/>
+          <a:p>
+            <a:pPr>
+              <a:spcAft>
+                <a:spcPts val="1000"/>
+              </a:spcAft>
+            </a:pPr>
+            <a:r>
+              <a:rPr sz="1700">
+                <a:solidFill>
+                  <a:srgbClr val="1B2A4A"/>
+                </a:solidFill>
+                <a:latin typeface="Segoe UI"/>
+              </a:rPr>
+              <a:t>•  Malaysia (AMC2) production ramp-up: the same test now also pulls from</a:t>
+            </a:r>
+          </a:p>
+          <a:p>
+            <a:pPr lvl="1">
+              <a:spcAft>
+                <a:spcPts val="600"/>
+              </a:spcAft>
+            </a:pPr>
+            <a:r>
+              <a:rPr sz="1500">
+                <a:solidFill>
+                  <a:srgbClr val="555555"/>
+                </a:solidFill>
+                <a:latin typeface="Segoe UI"/>
+              </a:rPr>
+              <a:t>–  AMC2's own PADB Oracle database, not just Santa Rosa's</a:t>
+            </a:r>
+          </a:p>
+          <a:p>
+            <a:pPr>
+              <a:spcAft>
+                <a:spcPts val="1000"/>
+              </a:spcAft>
+            </a:pPr>
+            <a:r>
+              <a:rPr sz="1700">
+                <a:solidFill>
+                  <a:srgbClr val="1B2A4A"/>
+                </a:solidFill>
+                <a:latin typeface="Segoe UI"/>
+              </a:rPr>
+              <a:t>•  Comparing a real Santa Rosa pod against its AMC2 counterpart: the only</a:t>
+            </a:r>
+          </a:p>
+          <a:p>
+            <a:pPr lvl="1">
+              <a:spcAft>
+                <a:spcPts val="600"/>
+              </a:spcAft>
+            </a:pPr>
+            <a:r>
+              <a:rPr sz="1500">
+                <a:solidFill>
+                  <a:srgbClr val="555555"/>
+                </a:solidFill>
+                <a:latin typeface="Segoe UI"/>
+              </a:rPr>
+              <a:t>–  genuine differences are Device_Server and Device_Database in [Extract]</a:t>
+            </a:r>
+          </a:p>
+          <a:p>
+            <a:pPr>
+              <a:spcAft>
+                <a:spcPts val="1000"/>
+              </a:spcAft>
+            </a:pPr>
+            <a:r>
+              <a:rPr sz="1700">
+                <a:solidFill>
+                  <a:srgbClr val="1B2A4A"/>
+                </a:solidFill>
+                <a:latin typeface="Segoe UI"/>
+              </a:rPr>
+              <a:t>•  Every AnalyticName and OutputConfig_OutputFile is otherwise identical —</a:t>
+            </a:r>
+          </a:p>
+          <a:p>
+            <a:pPr lvl="1">
+              <a:spcAft>
+                <a:spcPts val="600"/>
+              </a:spcAft>
+            </a:pPr>
+            <a:r>
+              <a:rPr sz="1500">
+                <a:solidFill>
+                  <a:srgbClr val="555555"/>
+                </a:solidFill>
+                <a:latin typeface="Segoe UI"/>
+              </a:rPr>
+              <a:t>–  running both site variants writes identically-named CSVs</a:t>
+            </a:r>
+          </a:p>
+          <a:p>
+            <a:pPr>
+              <a:spcAft>
+                <a:spcPts val="1000"/>
+              </a:spcAft>
+            </a:pPr>
+            <a:r>
+              <a:rPr sz="1700">
+                <a:solidFill>
+                  <a:srgbClr val="1B2A4A"/>
+                </a:solidFill>
+                <a:latin typeface="Segoe UI"/>
+              </a:rPr>
+              <a:t>•  Risk: point both at a shared results/publish location and one silently</a:t>
+            </a:r>
+          </a:p>
+          <a:p>
+            <a:pPr lvl="1">
+              <a:spcAft>
+                <a:spcPts val="600"/>
+              </a:spcAft>
+            </a:pPr>
+            <a:r>
+              <a:rPr sz="1500">
+                <a:solidFill>
+                  <a:srgbClr val="555555"/>
+                </a:solidFill>
+                <a:latin typeface="Segoe UI"/>
+              </a:rPr>
+              <a:t>–  overwrites the other — same class of problem unique_output_filenames</a:t>
+            </a:r>
+          </a:p>
+          <a:p>
+            <a:pPr lvl="1">
+              <a:spcAft>
+                <a:spcPts val="600"/>
+              </a:spcAft>
+            </a:pPr>
+            <a:r>
+              <a:rPr sz="1500">
+                <a:solidFill>
+                  <a:srgbClr val="555555"/>
+                </a:solidFill>
+                <a:latin typeface="Segoe UI"/>
+              </a:rPr>
+              <a:t>–  solves within one pod, but across two site-variant pods instead</a:t>
             </a:r>
           </a:p>
         </p:txBody>
@@ -14547,7 +14968,7 @@
               </a:defRPr>
             </a:pPr>
             <a:r>
-              <a:t>Appendix</a:t>
+              <a:t>Multi-Site Testing</a:t>
             </a:r>
           </a:p>
         </p:txBody>
@@ -14583,7 +15004,7 @@
               </a:defRPr>
             </a:pPr>
             <a:r>
-              <a:t>Getting the Code</a:t>
+              <a:t>padb_convert_site.py — Converting a Pod</a:t>
             </a:r>
           </a:p>
         </p:txBody>
@@ -14689,7 +15110,7 @@
               </a:defRPr>
             </a:pPr>
             <a:r>
-              <a:t>35</a:t>
+              <a:t>36</a:t>
             </a:r>
           </a:p>
         </p:txBody>
@@ -14702,7 +15123,7 @@
         </p:nvSpPr>
         <p:spPr>
           <a:xfrm>
-            <a:off x="548640" y="1691640"/>
+            <a:off x="548640" y="1600200"/>
             <a:ext cx="11064240" cy="365760"/>
           </a:xfrm>
           <a:prstGeom prst="rect">
@@ -14722,13 +15143,13 @@
               </a:spcAft>
             </a:pPr>
             <a:r>
-              <a:rPr sz="1900">
+              <a:rPr sz="1600">
                 <a:solidFill>
                   <a:srgbClr val="1B2A4A"/>
                 </a:solidFill>
                 <a:latin typeface="Segoe UI"/>
               </a:rPr>
-              <a:t>•  This repo isn't on a company-wide share by default — copy it from:</a:t>
+              <a:t>•  Site registry lives in padb_sites.json — add a new site there, no code changes:</a:t>
             </a:r>
           </a:p>
         </p:txBody>
@@ -14741,7 +15162,7 @@
         </p:nvSpPr>
         <p:spPr>
           <a:xfrm>
-            <a:off x="548640" y="2103120"/>
+            <a:off x="548640" y="1965960"/>
             <a:ext cx="11064240" cy="502920"/>
           </a:xfrm>
           <a:prstGeom prst="roundRect">
@@ -14783,27 +15204,184 @@
               </a:spcAft>
             </a:pPr>
             <a:r>
+              <a:rPr sz="1450">
+                <a:solidFill>
+                  <a:srgbClr val="E6E6E6"/>
+                </a:solidFill>
+                <a:latin typeface="Consolas"/>
+              </a:rPr>
+              <a:t>py padb_convert_site.py --pod MyPod.pod --to AMC2</a:t>
+            </a:r>
+          </a:p>
+        </p:txBody>
+      </p:sp>
+      <p:sp>
+        <p:nvSpPr>
+          <p:cNvPr id="10" name="Rounded Rectangle 9"/>
+          <p:cNvSpPr/>
+          <p:nvPr/>
+        </p:nvSpPr>
+        <p:spPr>
+          <a:xfrm>
+            <a:off x="548640" y="2606040"/>
+            <a:ext cx="11064240" cy="2286000"/>
+          </a:xfrm>
+          <a:prstGeom prst="roundRect">
+            <a:avLst>
+              <a:gd name="adj" fmla="val 4000"/>
+            </a:avLst>
+          </a:prstGeom>
+          <a:solidFill>
+            <a:srgbClr val="282C34"/>
+          </a:solidFill>
+          <a:ln>
+            <a:solidFill>
+              <a:srgbClr val="111318"/>
+            </a:solidFill>
+          </a:ln>
+          <a:effectLst/>
+        </p:spPr>
+        <p:style>
+          <a:lnRef idx="1">
+            <a:schemeClr val="accent1"/>
+          </a:lnRef>
+          <a:fillRef idx="3">
+            <a:schemeClr val="accent1"/>
+          </a:fillRef>
+          <a:effectRef idx="2">
+            <a:schemeClr val="accent1"/>
+          </a:effectRef>
+          <a:fontRef idx="minor">
+            <a:schemeClr val="lt1"/>
+          </a:fontRef>
+        </p:style>
+        <p:txBody>
+          <a:bodyPr rtlCol="0" anchor="t" wrap="square" lIns="228600" rIns="228600" tIns="164592" bIns="164592"/>
+          <a:lstStyle/>
+          <a:p>
+            <a:pPr algn="l">
+              <a:spcAft>
+                <a:spcPts val="200"/>
+              </a:spcAft>
+            </a:pPr>
+            <a:r>
               <a:rPr sz="1350">
                 <a:solidFill>
                   <a:srgbClr val="E6E6E6"/>
                 </a:solidFill>
                 <a:latin typeface="Consolas"/>
               </a:rPr>
-              <a:t>\\srsnas01.srs.is.keysight.com\prod\MIDRF3\SG6311A\Padb-tools\tools</a:t>
-            </a:r>
-          </a:p>
-        </p:txBody>
-      </p:sp>
-      <p:sp>
-        <p:nvSpPr>
-          <p:cNvPr id="10" name="TextBox 9"/>
-          <p:cNvSpPr txBox="1"/>
-          <p:nvPr/>
-        </p:nvSpPr>
-        <p:spPr>
-          <a:xfrm>
-            <a:off x="548640" y="2788920"/>
-            <a:ext cx="11064240" cy="365760"/>
+              <a:t>Wrote MyPod-AMC2.pod  (SantaRosa -&gt; AMC2)</a:t>
+            </a:r>
+          </a:p>
+          <a:p>
+            <a:pPr algn="l">
+              <a:spcAft>
+                <a:spcPts val="200"/>
+              </a:spcAft>
+            </a:pPr>
+            <a:r>
+              <a:rPr sz="1350">
+                <a:solidFill>
+                  <a:srgbClr val="E6E6E6"/>
+                </a:solidFill>
+                <a:latin typeface="Consolas"/>
+              </a:rPr>
+              <a:t>  Device_Server -&gt; PADB ORACLE AMC2</a:t>
+            </a:r>
+          </a:p>
+          <a:p>
+            <a:pPr algn="l">
+              <a:spcAft>
+                <a:spcPts val="200"/>
+              </a:spcAft>
+            </a:pPr>
+            <a:r>
+              <a:rPr sz="1350">
+                <a:solidFill>
+                  <a:srgbClr val="E6E6E6"/>
+                </a:solidFill>
+                <a:latin typeface="Consolas"/>
+              </a:rPr>
+              <a:t>  Device_Database -&gt; GALLEON_1</a:t>
+            </a:r>
+          </a:p>
+          <a:p>
+            <a:pPr algn="l">
+              <a:spcAft>
+                <a:spcPts val="200"/>
+              </a:spcAft>
+            </a:pPr>
+            <a:r>
+              <a:rPr sz="1350">
+                <a:solidFill>
+                  <a:srgbClr val="E6E6E6"/>
+                </a:solidFill>
+                <a:latin typeface="Consolas"/>
+              </a:rPr>
+              <a:t>  AnalyticName 'Leveled Linear' -&gt; 'Leveled Linear AMC2'</a:t>
+            </a:r>
+          </a:p>
+          <a:p>
+            <a:pPr algn="l">
+              <a:spcAft>
+                <a:spcPts val="200"/>
+              </a:spcAft>
+            </a:pPr>
+            <a:r>
+              <a:rPr sz="1350">
+                <a:solidFill>
+                  <a:srgbClr val="E6E6E6"/>
+                </a:solidFill>
+                <a:latin typeface="Consolas"/>
+              </a:rPr>
+              <a:t>  OutputConfig_OutputFile '..._Linear' -&gt; '..._Linear_AMC2'</a:t>
+            </a:r>
+          </a:p>
+          <a:p>
+            <a:pPr algn="l">
+              <a:spcAft>
+                <a:spcPts val="200"/>
+              </a:spcAft>
+            </a:pPr>
+            <a:r>
+              <a:rPr sz="1350">
+                <a:solidFill>
+                  <a:srgbClr val="E6E6E6"/>
+                </a:solidFill>
+                <a:latin typeface="Consolas"/>
+              </a:rPr>
+              <a:t>  WARNING: SaoFile now points at 'MyPod-AMC2.sao', which does not</a:t>
+            </a:r>
+          </a:p>
+          <a:p>
+            <a:pPr algn="l">
+              <a:spcAft>
+                <a:spcPts val="200"/>
+              </a:spcAft>
+            </a:pPr>
+            <a:r>
+              <a:rPr sz="1350">
+                <a:solidFill>
+                  <a:srgbClr val="E6E6E6"/>
+                </a:solidFill>
+                <a:latin typeface="Consolas"/>
+              </a:rPr>
+              <a:t>  exist yet -- supply a real .sao extracted at AMC2 before running</a:t>
+            </a:r>
+          </a:p>
+        </p:txBody>
+      </p:sp>
+      <p:sp>
+        <p:nvSpPr>
+          <p:cNvPr id="11" name="TextBox 10"/>
+          <p:cNvSpPr txBox="1"/>
+          <p:nvPr/>
+        </p:nvSpPr>
+        <p:spPr>
+          <a:xfrm>
+            <a:off x="548640" y="5074920"/>
+            <a:ext cx="11064240" cy="640080"/>
           </a:xfrm>
           <a:prstGeom prst="rect">
             <a:avLst/>
@@ -14822,52 +15400,13 @@
               </a:spcAft>
             </a:pPr>
             <a:r>
-              <a:rPr sz="1800">
+              <a:rPr sz="1500">
                 <a:solidFill>
                   <a:srgbClr val="1B2A4A"/>
                 </a:solidFill>
                 <a:latin typeface="Segoe UI"/>
               </a:rPr>
-              <a:t>•  Copy that whole "tools" folder to a local path, e.g. C:\apps\padb\tools</a:t>
-            </a:r>
-          </a:p>
-        </p:txBody>
-      </p:sp>
-      <p:sp>
-        <p:nvSpPr>
-          <p:cNvPr id="11" name="TextBox 10"/>
-          <p:cNvSpPr txBox="1"/>
-          <p:nvPr/>
-        </p:nvSpPr>
-        <p:spPr>
-          <a:xfrm>
-            <a:off x="548640" y="3429000"/>
-            <a:ext cx="11064240" cy="914400"/>
-          </a:xfrm>
-          <a:prstGeom prst="rect">
-            <a:avLst/>
-          </a:prstGeom>
-          <a:noFill/>
-        </p:spPr>
-        <p:txBody>
-          <a:bodyPr wrap="square">
-            <a:spAutoFit/>
-          </a:bodyPr>
-          <a:lstStyle/>
-          <a:p>
-            <a:pPr>
-              <a:spcAft>
-                <a:spcPts val="1000"/>
-              </a:spcAft>
-            </a:pPr>
-            <a:r>
-              <a:rPr sz="1700">
-                <a:solidFill>
-                  <a:srgbClr val="1B2A4A"/>
-                </a:solidFill>
-                <a:latin typeface="Segoe UI"/>
-              </a:rPr>
-              <a:t>•  padb_batch.py is bundled directly inside the tools folder (added 2026-08-05) —</a:t>
+              <a:t>•  Source pod is never touched. Round-trip verified byte-identical</a:t>
             </a:r>
           </a:p>
           <a:p>
@@ -14877,52 +15416,13 @@
               </a:spcAft>
             </a:pPr>
             <a:r>
-              <a:rPr sz="1500">
+              <a:rPr sz="1300">
                 <a:solidFill>
                   <a:srgbClr val="555555"/>
                 </a:solidFill>
                 <a:latin typeface="Segoe UI"/>
               </a:rPr>
-              <a:t>–  no separate dependency to track down; the whole repo is self-contained</a:t>
-            </a:r>
-          </a:p>
-        </p:txBody>
-      </p:sp>
-      <p:sp>
-        <p:nvSpPr>
-          <p:cNvPr id="12" name="TextBox 11"/>
-          <p:cNvSpPr txBox="1"/>
-          <p:nvPr/>
-        </p:nvSpPr>
-        <p:spPr>
-          <a:xfrm>
-            <a:off x="548640" y="4480560"/>
-            <a:ext cx="11064240" cy="457200"/>
-          </a:xfrm>
-          <a:prstGeom prst="rect">
-            <a:avLst/>
-          </a:prstGeom>
-          <a:noFill/>
-        </p:spPr>
-        <p:txBody>
-          <a:bodyPr wrap="square">
-            <a:spAutoFit/>
-          </a:bodyPr>
-          <a:lstStyle/>
-          <a:p>
-            <a:pPr>
-              <a:spcAft>
-                <a:spcPts val="1000"/>
-              </a:spcAft>
-            </a:pPr>
-            <a:r>
-              <a:rPr sz="1650">
-                <a:solidFill>
-                  <a:srgbClr val="1B2A4A"/>
-                </a:solidFill>
-                <a:latin typeface="Segoe UI"/>
-              </a:rPr>
-              <a:t>•  Then follow the Prerequisites and Per-User Config slides earlier in this deck</a:t>
+              <a:t>–  (SantaRosa -&gt; AMC2 -&gt; SantaRosa reproduces the original exactly)</a:t>
             </a:r>
           </a:p>
         </p:txBody>
@@ -15020,7 +15520,7 @@
               </a:defRPr>
             </a:pPr>
             <a:r>
-              <a:t>Appendix</a:t>
+              <a:t>Multi-Site Testing</a:t>
             </a:r>
           </a:p>
         </p:txBody>
@@ -15056,7 +15556,7 @@
               </a:defRPr>
             </a:pPr>
             <a:r>
-              <a:t>First Commands to Verify Your Setup</a:t>
+              <a:t>padb_convert_site.py — Converting a Job</a:t>
             </a:r>
           </a:p>
         </p:txBody>
@@ -15162,59 +15662,20 @@
               </a:defRPr>
             </a:pPr>
             <a:r>
-              <a:t>36</a:t>
-            </a:r>
-          </a:p>
-        </p:txBody>
-      </p:sp>
-      <p:sp>
-        <p:nvSpPr>
-          <p:cNvPr id="8" name="TextBox 7"/>
-          <p:cNvSpPr txBox="1"/>
+              <a:t>37</a:t>
+            </a:r>
+          </a:p>
+        </p:txBody>
+      </p:sp>
+      <p:sp>
+        <p:nvSpPr>
+          <p:cNvPr id="8" name="Rounded Rectangle 7"/>
+          <p:cNvSpPr/>
           <p:nvPr/>
         </p:nvSpPr>
         <p:spPr>
           <a:xfrm>
             <a:off x="548640" y="1691640"/>
-            <a:ext cx="11064240" cy="365760"/>
-          </a:xfrm>
-          <a:prstGeom prst="rect">
-            <a:avLst/>
-          </a:prstGeom>
-          <a:noFill/>
-        </p:spPr>
-        <p:txBody>
-          <a:bodyPr wrap="square">
-            <a:spAutoFit/>
-          </a:bodyPr>
-          <a:lstStyle/>
-          <a:p>
-            <a:pPr>
-              <a:spcAft>
-                <a:spcPts val="1000"/>
-              </a:spcAft>
-            </a:pPr>
-            <a:r>
-              <a:rPr sz="1800">
-                <a:solidFill>
-                  <a:srgbClr val="1B2A4A"/>
-                </a:solidFill>
-                <a:latin typeface="Segoe UI"/>
-              </a:rPr>
-              <a:t>•  From inside the tools folder, confirm everything imports cleanly:</a:t>
-            </a:r>
-          </a:p>
-        </p:txBody>
-      </p:sp>
-      <p:sp>
-        <p:nvSpPr>
-          <p:cNvPr id="9" name="Rounded Rectangle 8"/>
-          <p:cNvSpPr/>
-          <p:nvPr/>
-        </p:nvSpPr>
-        <p:spPr>
-          <a:xfrm>
-            <a:off x="548640" y="2103120"/>
             <a:ext cx="11064240" cy="502920"/>
           </a:xfrm>
           <a:prstGeom prst="roundRect">
@@ -15262,99 +15723,60 @@
                 </a:solidFill>
                 <a:latin typeface="Consolas"/>
               </a:rPr>
-              <a:t>py -c "import padb_run, padb_v2, padb_config"</a:t>
-            </a:r>
-          </a:p>
-        </p:txBody>
-      </p:sp>
-      <p:sp>
-        <p:nvSpPr>
-          <p:cNvPr id="10" name="TextBox 9"/>
-          <p:cNvSpPr txBox="1"/>
+              <a:t>py padb_convert_site.py --job my_run_job.json --to AMC2</a:t>
+            </a:r>
+          </a:p>
+        </p:txBody>
+      </p:sp>
+      <p:sp>
+        <p:nvSpPr>
+          <p:cNvPr id="9" name="TextBox 8"/>
+          <p:cNvSpPr txBox="1"/>
+          <p:nvPr/>
+        </p:nvSpPr>
+        <p:spPr>
+          <a:xfrm>
+            <a:off x="548640" y="2377440"/>
+            <a:ext cx="11064240" cy="365760"/>
+          </a:xfrm>
+          <a:prstGeom prst="rect">
+            <a:avLst/>
+          </a:prstGeom>
+          <a:noFill/>
+        </p:spPr>
+        <p:txBody>
+          <a:bodyPr wrap="square">
+            <a:spAutoFit/>
+          </a:bodyPr>
+          <a:lstStyle/>
+          <a:p>
+            <a:pPr>
+              <a:spcAft>
+                <a:spcPts val="1000"/>
+              </a:spcAft>
+            </a:pPr>
+            <a:r>
+              <a:rPr sz="1700">
+                <a:solidFill>
+                  <a:srgbClr val="1B2A4A"/>
+                </a:solidFill>
+                <a:latin typeface="Segoe UI"/>
+              </a:rPr>
+              <a:t>•  Repoints "pod" and swaps the pod stem everywhere it appears:</a:t>
+            </a:r>
+          </a:p>
+        </p:txBody>
+      </p:sp>
+      <p:sp>
+        <p:nvSpPr>
+          <p:cNvPr id="10" name="Rounded Rectangle 9"/>
+          <p:cNvSpPr/>
           <p:nvPr/>
         </p:nvSpPr>
         <p:spPr>
           <a:xfrm>
             <a:off x="548640" y="2743200"/>
-            <a:ext cx="11064240" cy="365760"/>
-          </a:xfrm>
-          <a:prstGeom prst="rect">
-            <a:avLst/>
-          </a:prstGeom>
-          <a:noFill/>
-        </p:spPr>
-        <p:txBody>
-          <a:bodyPr wrap="square">
-            <a:spAutoFit/>
-          </a:bodyPr>
-          <a:lstStyle/>
-          <a:p>
-            <a:pPr>
-              <a:spcAft>
-                <a:spcPts val="1000"/>
-              </a:spcAft>
-            </a:pPr>
-            <a:r>
-              <a:rPr sz="1700">
-                <a:solidFill>
-                  <a:srgbClr val="1B2A4A"/>
-                </a:solidFill>
-                <a:latin typeface="Segoe UI"/>
-              </a:rPr>
-              <a:t>•  No output and no traceback = success</a:t>
-            </a:r>
-          </a:p>
-        </p:txBody>
-      </p:sp>
-      <p:sp>
-        <p:nvSpPr>
-          <p:cNvPr id="11" name="TextBox 10"/>
-          <p:cNvSpPr txBox="1"/>
-          <p:nvPr/>
-        </p:nvSpPr>
-        <p:spPr>
-          <a:xfrm>
-            <a:off x="548640" y="3291840"/>
-            <a:ext cx="11064240" cy="365760"/>
-          </a:xfrm>
-          <a:prstGeom prst="rect">
-            <a:avLst/>
-          </a:prstGeom>
-          <a:noFill/>
-        </p:spPr>
-        <p:txBody>
-          <a:bodyPr wrap="square">
-            <a:spAutoFit/>
-          </a:bodyPr>
-          <a:lstStyle/>
-          <a:p>
-            <a:pPr>
-              <a:spcAft>
-                <a:spcPts val="1000"/>
-              </a:spcAft>
-            </a:pPr>
-            <a:r>
-              <a:rPr sz="1800">
-                <a:solidFill>
-                  <a:srgbClr val="1B2A4A"/>
-                </a:solidFill>
-                <a:latin typeface="Segoe UI"/>
-              </a:rPr>
-              <a:t>•  Then generate your first job.json from any pod you have access to:</a:t>
-            </a:r>
-          </a:p>
-        </p:txBody>
-      </p:sp>
-      <p:sp>
-        <p:nvSpPr>
-          <p:cNvPr id="12" name="Rounded Rectangle 11"/>
-          <p:cNvSpPr/>
-          <p:nvPr/>
-        </p:nvSpPr>
-        <p:spPr>
-          <a:xfrm>
-            <a:off x="548640" y="3703320"/>
-            <a:ext cx="11064240" cy="502920"/>
+            <a:ext cx="11064240" cy="2103120"/>
           </a:xfrm>
           <a:prstGeom prst="roundRect">
             <a:avLst>
@@ -15395,27 +15817,107 @@
               </a:spcAft>
             </a:pPr>
             <a:r>
-              <a:rPr sz="1450">
+              <a:rPr sz="1350">
                 <a:solidFill>
                   <a:srgbClr val="E6E6E6"/>
                 </a:solidFill>
                 <a:latin typeface="Consolas"/>
               </a:rPr>
-              <a:t>py padb_make_job.py YourPod.pod --module YourModule</a:t>
-            </a:r>
-          </a:p>
-        </p:txBody>
-      </p:sp>
-      <p:sp>
-        <p:nvSpPr>
-          <p:cNvPr id="13" name="TextBox 12"/>
-          <p:cNvSpPr txBox="1"/>
-          <p:nvPr/>
-        </p:nvSpPr>
-        <p:spPr>
-          <a:xfrm>
-            <a:off x="548640" y="4343400"/>
-            <a:ext cx="11064240" cy="1463040"/>
+              <a:t>Converted pod not found yet -- creating it first: ...</a:t>
+            </a:r>
+          </a:p>
+          <a:p>
+            <a:pPr algn="l">
+              <a:spcAft>
+                <a:spcPts val="200"/>
+              </a:spcAft>
+            </a:pPr>
+            <a:r>
+              <a:rPr sz="1350">
+                <a:solidFill>
+                  <a:srgbClr val="E6E6E6"/>
+                </a:solidFill>
+                <a:latin typeface="Consolas"/>
+              </a:rPr>
+              <a:t>Wrote MyPod-AMC2_run_job.json  (SantaRosa -&gt; AMC2,</a:t>
+            </a:r>
+          </a:p>
+          <a:p>
+            <a:pPr algn="l">
+              <a:spcAft>
+                <a:spcPts val="200"/>
+              </a:spcAft>
+            </a:pPr>
+            <a:r>
+              <a:rPr sz="1350">
+                <a:solidFill>
+                  <a:srgbClr val="E6E6E6"/>
+                </a:solidFill>
+                <a:latin typeface="Consolas"/>
+              </a:rPr>
+              <a:t>  pod=MyPod-AMC2.pod)</a:t>
+            </a:r>
+          </a:p>
+          <a:p>
+            <a:pPr algn="l">
+              <a:spcAft>
+                <a:spcPts val="200"/>
+              </a:spcAft>
+            </a:pPr>
+            <a:r>
+              <a:rPr sz="1350">
+                <a:solidFill>
+                  <a:srgbClr val="E6E6E6"/>
+                </a:solidFill>
+                <a:latin typeface="Consolas"/>
+              </a:rPr>
+              <a:t>  This is a V2 run job -- also regenerate its plot</a:t>
+            </a:r>
+          </a:p>
+          <a:p>
+            <a:pPr algn="l">
+              <a:spcAft>
+                <a:spcPts val="200"/>
+              </a:spcAft>
+            </a:pPr>
+            <a:r>
+              <a:rPr sz="1350">
+                <a:solidFill>
+                  <a:srgbClr val="E6E6E6"/>
+                </a:solidFill>
+                <a:latin typeface="Consolas"/>
+              </a:rPr>
+              <a:t>  job(s) against the new pod:</a:t>
+            </a:r>
+          </a:p>
+          <a:p>
+            <a:pPr algn="l">
+              <a:spcAft>
+                <a:spcPts val="200"/>
+              </a:spcAft>
+            </a:pPr>
+            <a:r>
+              <a:rPr sz="1350">
+                <a:solidFill>
+                  <a:srgbClr val="E6E6E6"/>
+                </a:solidFill>
+                <a:latin typeface="Consolas"/>
+              </a:rPr>
+              <a:t>    py padb_make_v2_job.py MyPod-AMC2.pod --module &lt;YourModule&gt;</a:t>
+            </a:r>
+          </a:p>
+        </p:txBody>
+      </p:sp>
+      <p:sp>
+        <p:nvSpPr>
+          <p:cNvPr id="11" name="TextBox 10"/>
+          <p:cNvSpPr txBox="1"/>
+          <p:nvPr/>
+        </p:nvSpPr>
+        <p:spPr>
+          <a:xfrm>
+            <a:off x="548640" y="5074920"/>
+            <a:ext cx="11064240" cy="640080"/>
           </a:xfrm>
           <a:prstGeom prst="rect">
             <a:avLst/>
@@ -15434,13 +15936,13 @@
               </a:spcAft>
             </a:pPr>
             <a:r>
-              <a:rPr sz="1700">
+              <a:rPr sz="1500">
                 <a:solidFill>
                   <a:srgbClr val="1B2A4A"/>
                 </a:solidFill>
                 <a:latin typeface="Segoe UI"/>
               </a:rPr>
-              <a:t>•  If PADB-R.exe launches and a real window briefly appears, you're fully set up</a:t>
+              <a:t>•  Updates results_dir, publish/publish_to, and description too — not just "pod"</a:t>
             </a:r>
           </a:p>
           <a:p>
@@ -15450,29 +15952,278 @@
               </a:spcAft>
             </a:pPr>
             <a:r>
-              <a:rPr sz="1700">
+              <a:rPr sz="1500">
                 <a:solidFill>
                   <a:srgbClr val="1B2A4A"/>
                 </a:solidFill>
                 <a:latin typeface="Segoe UI"/>
               </a:rPr>
-              <a:t>•  Stuck? GETTING_STARTED.md → Quick_Start.md, or type /padb-tools once you're</a:t>
-            </a:r>
-          </a:p>
-          <a:p>
-            <a:pPr lvl="1">
-              <a:spcAft>
-                <a:spcPts val="600"/>
-              </a:spcAft>
-            </a:pPr>
-            <a:r>
-              <a:rPr sz="1500">
-                <a:solidFill>
-                  <a:srgbClr val="555555"/>
-                </a:solidFill>
-                <a:latin typeface="Segoe UI"/>
-              </a:rPr>
-              <a:t>–  working inside the repo</a:t>
+              <a:t>•  --force overwrites an existing output; --list-sites prints the registry</a:t>
+            </a:r>
+          </a:p>
+        </p:txBody>
+      </p:sp>
+    </p:spTree>
+  </p:cSld>
+  <p:clrMapOvr>
+    <a:masterClrMapping/>
+  </p:clrMapOvr>
+</p:sld>
+</file>
+
+<file path=ppt/slides/slide38.xml><?xml version="1.0" encoding="utf-8"?>
+<p:sld xmlns:a="http://schemas.openxmlformats.org/drawingml/2006/main" xmlns:p="http://schemas.openxmlformats.org/presentationml/2006/main" xmlns:r="http://schemas.openxmlformats.org/officeDocument/2006/relationships">
+  <p:cSld>
+    <p:spTree>
+      <p:nvGrpSpPr>
+        <p:cNvPr id="1" name=""/>
+        <p:cNvGrpSpPr/>
+        <p:nvPr/>
+      </p:nvGrpSpPr>
+      <p:grpSpPr/>
+      <p:sp>
+        <p:nvSpPr>
+          <p:cNvPr id="2" name="Rectangle 1"/>
+          <p:cNvSpPr/>
+          <p:nvPr/>
+        </p:nvSpPr>
+        <p:spPr>
+          <a:xfrm>
+            <a:off x="0" y="0"/>
+            <a:ext cx="12191695" cy="6858000"/>
+          </a:xfrm>
+          <a:prstGeom prst="rect">
+            <a:avLst/>
+          </a:prstGeom>
+          <a:solidFill>
+            <a:srgbClr val="1B2A4A"/>
+          </a:solidFill>
+          <a:ln>
+            <a:noFill/>
+          </a:ln>
+          <a:effectLst/>
+        </p:spPr>
+        <p:style>
+          <a:lnRef idx="1">
+            <a:schemeClr val="accent1"/>
+          </a:lnRef>
+          <a:fillRef idx="3">
+            <a:schemeClr val="accent1"/>
+          </a:fillRef>
+          <a:effectRef idx="2">
+            <a:schemeClr val="accent1"/>
+          </a:effectRef>
+          <a:fontRef idx="minor">
+            <a:schemeClr val="lt1"/>
+          </a:fontRef>
+        </p:style>
+        <p:txBody>
+          <a:bodyPr rtlCol="0" anchor="ctr"/>
+          <a:lstStyle/>
+          <a:p>
+            <a:pPr algn="ctr"/>
+          </a:p>
+        </p:txBody>
+      </p:sp>
+      <p:sp>
+        <p:nvSpPr>
+          <p:cNvPr id="3" name="TextBox 2"/>
+          <p:cNvSpPr txBox="1"/>
+          <p:nvPr/>
+        </p:nvSpPr>
+        <p:spPr>
+          <a:xfrm>
+            <a:off x="822960" y="2743200"/>
+            <a:ext cx="10515600" cy="1097280"/>
+          </a:xfrm>
+          <a:prstGeom prst="rect">
+            <a:avLst/>
+          </a:prstGeom>
+          <a:noFill/>
+        </p:spPr>
+        <p:txBody>
+          <a:bodyPr wrap="none">
+            <a:spAutoFit/>
+          </a:bodyPr>
+          <a:lstStyle/>
+          <a:p>
+            <a:pPr>
+              <a:defRPr sz="4800" b="1">
+                <a:solidFill>
+                  <a:srgbClr val="FFFFFF"/>
+                </a:solidFill>
+              </a:defRPr>
+            </a:pPr>
+            <a:r>
+              <a:t>Questions?</a:t>
+            </a:r>
+          </a:p>
+        </p:txBody>
+      </p:sp>
+      <p:sp>
+        <p:nvSpPr>
+          <p:cNvPr id="4" name="TextBox 3"/>
+          <p:cNvSpPr txBox="1"/>
+          <p:nvPr/>
+        </p:nvSpPr>
+        <p:spPr>
+          <a:xfrm>
+            <a:off x="822960" y="3749039"/>
+            <a:ext cx="10515600" cy="640080"/>
+          </a:xfrm>
+          <a:prstGeom prst="rect">
+            <a:avLst/>
+          </a:prstGeom>
+          <a:noFill/>
+        </p:spPr>
+        <p:txBody>
+          <a:bodyPr wrap="none">
+            <a:spAutoFit/>
+          </a:bodyPr>
+          <a:lstStyle/>
+          <a:p>
+            <a:pPr>
+              <a:defRPr sz="1800">
+                <a:solidFill>
+                  <a:srgbClr val="9FC5FF"/>
+                </a:solidFill>
+                <a:latin typeface="Consolas"/>
+              </a:defRPr>
+            </a:pPr>
+            <a:r>
+              <a:t>C:\apps\padb\tools   |   /padb-tools</a:t>
+            </a:r>
+          </a:p>
+        </p:txBody>
+      </p:sp>
+    </p:spTree>
+  </p:cSld>
+  <p:clrMapOvr>
+    <a:masterClrMapping/>
+  </p:clrMapOvr>
+</p:sld>
+</file>
+
+<file path=ppt/slides/slide39.xml><?xml version="1.0" encoding="utf-8"?>
+<p:sld xmlns:a="http://schemas.openxmlformats.org/drawingml/2006/main" xmlns:p="http://schemas.openxmlformats.org/presentationml/2006/main" xmlns:r="http://schemas.openxmlformats.org/officeDocument/2006/relationships">
+  <p:cSld>
+    <p:spTree>
+      <p:nvGrpSpPr>
+        <p:cNvPr id="1" name=""/>
+        <p:cNvGrpSpPr/>
+        <p:nvPr/>
+      </p:nvGrpSpPr>
+      <p:grpSpPr/>
+      <p:sp>
+        <p:nvSpPr>
+          <p:cNvPr id="2" name="Rectangle 1"/>
+          <p:cNvSpPr/>
+          <p:nvPr/>
+        </p:nvSpPr>
+        <p:spPr>
+          <a:xfrm>
+            <a:off x="0" y="0"/>
+            <a:ext cx="12191695" cy="6858000"/>
+          </a:xfrm>
+          <a:prstGeom prst="rect">
+            <a:avLst/>
+          </a:prstGeom>
+          <a:solidFill>
+            <a:srgbClr val="F2F4F8"/>
+          </a:solidFill>
+          <a:ln>
+            <a:noFill/>
+          </a:ln>
+          <a:effectLst/>
+        </p:spPr>
+        <p:style>
+          <a:lnRef idx="1">
+            <a:schemeClr val="accent1"/>
+          </a:lnRef>
+          <a:fillRef idx="3">
+            <a:schemeClr val="accent1"/>
+          </a:fillRef>
+          <a:effectRef idx="2">
+            <a:schemeClr val="accent1"/>
+          </a:effectRef>
+          <a:fontRef idx="minor">
+            <a:schemeClr val="lt1"/>
+          </a:fontRef>
+        </p:style>
+        <p:txBody>
+          <a:bodyPr rtlCol="0" anchor="ctr"/>
+          <a:lstStyle/>
+          <a:p>
+            <a:pPr algn="ctr"/>
+          </a:p>
+        </p:txBody>
+      </p:sp>
+      <p:sp>
+        <p:nvSpPr>
+          <p:cNvPr id="3" name="TextBox 2"/>
+          <p:cNvSpPr txBox="1"/>
+          <p:nvPr/>
+        </p:nvSpPr>
+        <p:spPr>
+          <a:xfrm>
+            <a:off x="822960" y="2743200"/>
+            <a:ext cx="10515600" cy="914400"/>
+          </a:xfrm>
+          <a:prstGeom prst="rect">
+            <a:avLst/>
+          </a:prstGeom>
+          <a:noFill/>
+        </p:spPr>
+        <p:txBody>
+          <a:bodyPr wrap="none">
+            <a:spAutoFit/>
+          </a:bodyPr>
+          <a:lstStyle/>
+          <a:p>
+            <a:pPr>
+              <a:defRPr sz="4400" b="1">
+                <a:solidFill>
+                  <a:srgbClr val="1B2A4A"/>
+                </a:solidFill>
+              </a:defRPr>
+            </a:pPr>
+            <a:r>
+              <a:t>Appendix</a:t>
+            </a:r>
+          </a:p>
+        </p:txBody>
+      </p:sp>
+      <p:sp>
+        <p:nvSpPr>
+          <p:cNvPr id="4" name="TextBox 3"/>
+          <p:cNvSpPr txBox="1"/>
+          <p:nvPr/>
+        </p:nvSpPr>
+        <p:spPr>
+          <a:xfrm>
+            <a:off x="822960" y="3566160"/>
+            <a:ext cx="10515600" cy="640080"/>
+          </a:xfrm>
+          <a:prstGeom prst="rect">
+            <a:avLst/>
+          </a:prstGeom>
+          <a:noFill/>
+        </p:spPr>
+        <p:txBody>
+          <a:bodyPr wrap="none">
+            <a:spAutoFit/>
+          </a:bodyPr>
+          <a:lstStyle/>
+          <a:p>
+            <a:pPr>
+              <a:defRPr sz="2200">
+                <a:solidFill>
+                  <a:srgbClr val="0066CC"/>
+                </a:solidFill>
+              </a:defRPr>
+            </a:pPr>
+            <a:r>
+              <a:t>Setting Up From Zero — Assumes No Prior Access</a:t>
             </a:r>
           </a:p>
         </p:txBody>
@@ -16277,6 +17028,1029 @@
                 </a:solidFill>
               </a:rPr>
               <a:t>•  Two files: run job + plot job</a:t>
+            </a:r>
+          </a:p>
+        </p:txBody>
+      </p:sp>
+    </p:spTree>
+  </p:cSld>
+  <p:clrMapOvr>
+    <a:masterClrMapping/>
+  </p:clrMapOvr>
+</p:sld>
+</file>
+
+<file path=ppt/slides/slide40.xml><?xml version="1.0" encoding="utf-8"?>
+<p:sld xmlns:a="http://schemas.openxmlformats.org/drawingml/2006/main" xmlns:p="http://schemas.openxmlformats.org/presentationml/2006/main" xmlns:r="http://schemas.openxmlformats.org/officeDocument/2006/relationships">
+  <p:cSld>
+    <p:spTree>
+      <p:nvGrpSpPr>
+        <p:cNvPr id="1" name=""/>
+        <p:cNvGrpSpPr/>
+        <p:nvPr/>
+      </p:nvGrpSpPr>
+      <p:grpSpPr/>
+      <p:sp>
+        <p:nvSpPr>
+          <p:cNvPr id="2" name="Rectangle 1"/>
+          <p:cNvSpPr/>
+          <p:nvPr/>
+        </p:nvSpPr>
+        <p:spPr>
+          <a:xfrm>
+            <a:off x="0" y="0"/>
+            <a:ext cx="12191695" cy="6858000"/>
+          </a:xfrm>
+          <a:prstGeom prst="rect">
+            <a:avLst/>
+          </a:prstGeom>
+          <a:solidFill>
+            <a:srgbClr val="FFFFFF"/>
+          </a:solidFill>
+          <a:ln>
+            <a:noFill/>
+          </a:ln>
+          <a:effectLst/>
+        </p:spPr>
+        <p:style>
+          <a:lnRef idx="1">
+            <a:schemeClr val="accent1"/>
+          </a:lnRef>
+          <a:fillRef idx="3">
+            <a:schemeClr val="accent1"/>
+          </a:fillRef>
+          <a:effectRef idx="2">
+            <a:schemeClr val="accent1"/>
+          </a:effectRef>
+          <a:fontRef idx="minor">
+            <a:schemeClr val="lt1"/>
+          </a:fontRef>
+        </p:style>
+        <p:txBody>
+          <a:bodyPr rtlCol="0" anchor="ctr"/>
+          <a:lstStyle/>
+          <a:p>
+            <a:pPr algn="ctr"/>
+          </a:p>
+        </p:txBody>
+      </p:sp>
+      <p:sp>
+        <p:nvSpPr>
+          <p:cNvPr id="3" name="TextBox 2"/>
+          <p:cNvSpPr txBox="1"/>
+          <p:nvPr/>
+        </p:nvSpPr>
+        <p:spPr>
+          <a:xfrm>
+            <a:off x="548640" y="320040"/>
+            <a:ext cx="7315200" cy="365760"/>
+          </a:xfrm>
+          <a:prstGeom prst="rect">
+            <a:avLst/>
+          </a:prstGeom>
+          <a:noFill/>
+        </p:spPr>
+        <p:txBody>
+          <a:bodyPr wrap="none">
+            <a:spAutoFit/>
+          </a:bodyPr>
+          <a:lstStyle/>
+          <a:p>
+            <a:pPr>
+              <a:defRPr sz="1600" b="1">
+                <a:solidFill>
+                  <a:srgbClr val="0066CC"/>
+                </a:solidFill>
+                <a:latin typeface="Segoe UI"/>
+              </a:defRPr>
+            </a:pPr>
+            <a:r>
+              <a:t>Appendix</a:t>
+            </a:r>
+          </a:p>
+        </p:txBody>
+      </p:sp>
+      <p:sp>
+        <p:nvSpPr>
+          <p:cNvPr id="4" name="TextBox 3"/>
+          <p:cNvSpPr txBox="1"/>
+          <p:nvPr/>
+        </p:nvSpPr>
+        <p:spPr>
+          <a:xfrm>
+            <a:off x="548640" y="658368"/>
+            <a:ext cx="11064240" cy="822960"/>
+          </a:xfrm>
+          <a:prstGeom prst="rect">
+            <a:avLst/>
+          </a:prstGeom>
+          <a:noFill/>
+        </p:spPr>
+        <p:txBody>
+          <a:bodyPr wrap="square">
+            <a:spAutoFit/>
+          </a:bodyPr>
+          <a:lstStyle/>
+          <a:p>
+            <a:pPr>
+              <a:defRPr sz="3200" b="1">
+                <a:solidFill>
+                  <a:srgbClr val="1B2A4A"/>
+                </a:solidFill>
+                <a:latin typeface="Segoe UI"/>
+              </a:defRPr>
+            </a:pPr>
+            <a:r>
+              <a:t>Getting the Code</a:t>
+            </a:r>
+          </a:p>
+        </p:txBody>
+      </p:sp>
+      <p:cxnSp>
+        <p:nvCxnSpPr>
+          <p:cNvPr id="5" name="Connector 4"/>
+          <p:cNvCxnSpPr/>
+          <p:nvPr/>
+        </p:nvCxnSpPr>
+        <p:spPr>
+          <a:xfrm>
+            <a:off x="548640" y="1417320"/>
+            <a:ext cx="11091672" cy="0"/>
+          </a:xfrm>
+          <a:prstGeom prst="line">
+            <a:avLst/>
+          </a:prstGeom>
+          <a:ln w="28575">
+            <a:solidFill>
+              <a:srgbClr val="0066CC"/>
+            </a:solidFill>
+          </a:ln>
+        </p:spPr>
+        <p:style>
+          <a:lnRef idx="2">
+            <a:schemeClr val="accent1"/>
+          </a:lnRef>
+          <a:fillRef idx="0">
+            <a:schemeClr val="accent1"/>
+          </a:fillRef>
+          <a:effectRef idx="1">
+            <a:schemeClr val="accent1"/>
+          </a:effectRef>
+          <a:fontRef idx="minor">
+            <a:schemeClr val="tx1"/>
+          </a:fontRef>
+        </p:style>
+      </p:cxnSp>
+      <p:sp>
+        <p:nvSpPr>
+          <p:cNvPr id="6" name="TextBox 5"/>
+          <p:cNvSpPr txBox="1"/>
+          <p:nvPr/>
+        </p:nvSpPr>
+        <p:spPr>
+          <a:xfrm>
+            <a:off x="548640" y="6473952"/>
+            <a:ext cx="8229600" cy="320040"/>
+          </a:xfrm>
+          <a:prstGeom prst="rect">
+            <a:avLst/>
+          </a:prstGeom>
+          <a:noFill/>
+        </p:spPr>
+        <p:txBody>
+          <a:bodyPr wrap="none">
+            <a:spAutoFit/>
+          </a:bodyPr>
+          <a:lstStyle/>
+          <a:p>
+            <a:pPr>
+              <a:defRPr sz="1100">
+                <a:solidFill>
+                  <a:srgbClr val="555555"/>
+                </a:solidFill>
+                <a:latin typeface="Segoe UI"/>
+              </a:defRPr>
+            </a:pPr>
+            <a:r>
+              <a:t>padb-tools</a:t>
+            </a:r>
+          </a:p>
+        </p:txBody>
+      </p:sp>
+      <p:sp>
+        <p:nvSpPr>
+          <p:cNvPr id="7" name="TextBox 6"/>
+          <p:cNvSpPr txBox="1"/>
+          <p:nvPr/>
+        </p:nvSpPr>
+        <p:spPr>
+          <a:xfrm>
+            <a:off x="11338560" y="6473952"/>
+            <a:ext cx="548640" cy="320040"/>
+          </a:xfrm>
+          <a:prstGeom prst="rect">
+            <a:avLst/>
+          </a:prstGeom>
+          <a:noFill/>
+        </p:spPr>
+        <p:txBody>
+          <a:bodyPr wrap="none">
+            <a:spAutoFit/>
+          </a:bodyPr>
+          <a:lstStyle/>
+          <a:p>
+            <a:pPr algn="r">
+              <a:defRPr sz="1100">
+                <a:solidFill>
+                  <a:srgbClr val="555555"/>
+                </a:solidFill>
+              </a:defRPr>
+            </a:pPr>
+            <a:r>
+              <a:t>39</a:t>
+            </a:r>
+          </a:p>
+        </p:txBody>
+      </p:sp>
+      <p:sp>
+        <p:nvSpPr>
+          <p:cNvPr id="8" name="TextBox 7"/>
+          <p:cNvSpPr txBox="1"/>
+          <p:nvPr/>
+        </p:nvSpPr>
+        <p:spPr>
+          <a:xfrm>
+            <a:off x="548640" y="1691640"/>
+            <a:ext cx="11064240" cy="365760"/>
+          </a:xfrm>
+          <a:prstGeom prst="rect">
+            <a:avLst/>
+          </a:prstGeom>
+          <a:noFill/>
+        </p:spPr>
+        <p:txBody>
+          <a:bodyPr wrap="square">
+            <a:spAutoFit/>
+          </a:bodyPr>
+          <a:lstStyle/>
+          <a:p>
+            <a:pPr>
+              <a:spcAft>
+                <a:spcPts val="1000"/>
+              </a:spcAft>
+            </a:pPr>
+            <a:r>
+              <a:rPr sz="1900">
+                <a:solidFill>
+                  <a:srgbClr val="1B2A4A"/>
+                </a:solidFill>
+                <a:latin typeface="Segoe UI"/>
+              </a:rPr>
+              <a:t>•  This repo isn't on a company-wide share by default — copy it from:</a:t>
+            </a:r>
+          </a:p>
+        </p:txBody>
+      </p:sp>
+      <p:sp>
+        <p:nvSpPr>
+          <p:cNvPr id="9" name="Rounded Rectangle 8"/>
+          <p:cNvSpPr/>
+          <p:nvPr/>
+        </p:nvSpPr>
+        <p:spPr>
+          <a:xfrm>
+            <a:off x="548640" y="2103120"/>
+            <a:ext cx="11064240" cy="502920"/>
+          </a:xfrm>
+          <a:prstGeom prst="roundRect">
+            <a:avLst>
+              <a:gd name="adj" fmla="val 4000"/>
+            </a:avLst>
+          </a:prstGeom>
+          <a:solidFill>
+            <a:srgbClr val="282C34"/>
+          </a:solidFill>
+          <a:ln>
+            <a:solidFill>
+              <a:srgbClr val="111318"/>
+            </a:solidFill>
+          </a:ln>
+          <a:effectLst/>
+        </p:spPr>
+        <p:style>
+          <a:lnRef idx="1">
+            <a:schemeClr val="accent1"/>
+          </a:lnRef>
+          <a:fillRef idx="3">
+            <a:schemeClr val="accent1"/>
+          </a:fillRef>
+          <a:effectRef idx="2">
+            <a:schemeClr val="accent1"/>
+          </a:effectRef>
+          <a:fontRef idx="minor">
+            <a:schemeClr val="lt1"/>
+          </a:fontRef>
+        </p:style>
+        <p:txBody>
+          <a:bodyPr rtlCol="0" anchor="t" wrap="square" lIns="228600" rIns="228600" tIns="164592" bIns="164592"/>
+          <a:lstStyle/>
+          <a:p>
+            <a:pPr algn="l">
+              <a:spcAft>
+                <a:spcPts val="200"/>
+              </a:spcAft>
+            </a:pPr>
+            <a:r>
+              <a:rPr sz="1350">
+                <a:solidFill>
+                  <a:srgbClr val="E6E6E6"/>
+                </a:solidFill>
+                <a:latin typeface="Consolas"/>
+              </a:rPr>
+              <a:t>\\srsnas01.srs.is.keysight.com\prod\MIDRF3\SG6311A\Padb-tools\tools</a:t>
+            </a:r>
+          </a:p>
+        </p:txBody>
+      </p:sp>
+      <p:sp>
+        <p:nvSpPr>
+          <p:cNvPr id="10" name="TextBox 9"/>
+          <p:cNvSpPr txBox="1"/>
+          <p:nvPr/>
+        </p:nvSpPr>
+        <p:spPr>
+          <a:xfrm>
+            <a:off x="548640" y="2788920"/>
+            <a:ext cx="11064240" cy="365760"/>
+          </a:xfrm>
+          <a:prstGeom prst="rect">
+            <a:avLst/>
+          </a:prstGeom>
+          <a:noFill/>
+        </p:spPr>
+        <p:txBody>
+          <a:bodyPr wrap="square">
+            <a:spAutoFit/>
+          </a:bodyPr>
+          <a:lstStyle/>
+          <a:p>
+            <a:pPr>
+              <a:spcAft>
+                <a:spcPts val="1000"/>
+              </a:spcAft>
+            </a:pPr>
+            <a:r>
+              <a:rPr sz="1800">
+                <a:solidFill>
+                  <a:srgbClr val="1B2A4A"/>
+                </a:solidFill>
+                <a:latin typeface="Segoe UI"/>
+              </a:rPr>
+              <a:t>•  Copy that whole "tools" folder to a local path, e.g. C:\apps\padb\tools</a:t>
+            </a:r>
+          </a:p>
+        </p:txBody>
+      </p:sp>
+      <p:sp>
+        <p:nvSpPr>
+          <p:cNvPr id="11" name="TextBox 10"/>
+          <p:cNvSpPr txBox="1"/>
+          <p:nvPr/>
+        </p:nvSpPr>
+        <p:spPr>
+          <a:xfrm>
+            <a:off x="548640" y="3429000"/>
+            <a:ext cx="11064240" cy="914400"/>
+          </a:xfrm>
+          <a:prstGeom prst="rect">
+            <a:avLst/>
+          </a:prstGeom>
+          <a:noFill/>
+        </p:spPr>
+        <p:txBody>
+          <a:bodyPr wrap="square">
+            <a:spAutoFit/>
+          </a:bodyPr>
+          <a:lstStyle/>
+          <a:p>
+            <a:pPr>
+              <a:spcAft>
+                <a:spcPts val="1000"/>
+              </a:spcAft>
+            </a:pPr>
+            <a:r>
+              <a:rPr sz="1700">
+                <a:solidFill>
+                  <a:srgbClr val="1B2A4A"/>
+                </a:solidFill>
+                <a:latin typeface="Segoe UI"/>
+              </a:rPr>
+              <a:t>•  padb_batch.py is bundled directly inside the tools folder (added 2026-08-05) —</a:t>
+            </a:r>
+          </a:p>
+          <a:p>
+            <a:pPr lvl="1">
+              <a:spcAft>
+                <a:spcPts val="600"/>
+              </a:spcAft>
+            </a:pPr>
+            <a:r>
+              <a:rPr sz="1500">
+                <a:solidFill>
+                  <a:srgbClr val="555555"/>
+                </a:solidFill>
+                <a:latin typeface="Segoe UI"/>
+              </a:rPr>
+              <a:t>–  no separate dependency to track down; the whole repo is self-contained</a:t>
+            </a:r>
+          </a:p>
+        </p:txBody>
+      </p:sp>
+      <p:sp>
+        <p:nvSpPr>
+          <p:cNvPr id="12" name="TextBox 11"/>
+          <p:cNvSpPr txBox="1"/>
+          <p:nvPr/>
+        </p:nvSpPr>
+        <p:spPr>
+          <a:xfrm>
+            <a:off x="548640" y="4480560"/>
+            <a:ext cx="11064240" cy="457200"/>
+          </a:xfrm>
+          <a:prstGeom prst="rect">
+            <a:avLst/>
+          </a:prstGeom>
+          <a:noFill/>
+        </p:spPr>
+        <p:txBody>
+          <a:bodyPr wrap="square">
+            <a:spAutoFit/>
+          </a:bodyPr>
+          <a:lstStyle/>
+          <a:p>
+            <a:pPr>
+              <a:spcAft>
+                <a:spcPts val="1000"/>
+              </a:spcAft>
+            </a:pPr>
+            <a:r>
+              <a:rPr sz="1650">
+                <a:solidFill>
+                  <a:srgbClr val="1B2A4A"/>
+                </a:solidFill>
+                <a:latin typeface="Segoe UI"/>
+              </a:rPr>
+              <a:t>•  Then follow the Prerequisites and Per-User Config slides earlier in this deck</a:t>
+            </a:r>
+          </a:p>
+        </p:txBody>
+      </p:sp>
+    </p:spTree>
+  </p:cSld>
+  <p:clrMapOvr>
+    <a:masterClrMapping/>
+  </p:clrMapOvr>
+</p:sld>
+</file>
+
+<file path=ppt/slides/slide41.xml><?xml version="1.0" encoding="utf-8"?>
+<p:sld xmlns:a="http://schemas.openxmlformats.org/drawingml/2006/main" xmlns:p="http://schemas.openxmlformats.org/presentationml/2006/main" xmlns:r="http://schemas.openxmlformats.org/officeDocument/2006/relationships">
+  <p:cSld>
+    <p:spTree>
+      <p:nvGrpSpPr>
+        <p:cNvPr id="1" name=""/>
+        <p:cNvGrpSpPr/>
+        <p:nvPr/>
+      </p:nvGrpSpPr>
+      <p:grpSpPr/>
+      <p:sp>
+        <p:nvSpPr>
+          <p:cNvPr id="2" name="Rectangle 1"/>
+          <p:cNvSpPr/>
+          <p:nvPr/>
+        </p:nvSpPr>
+        <p:spPr>
+          <a:xfrm>
+            <a:off x="0" y="0"/>
+            <a:ext cx="12191695" cy="6858000"/>
+          </a:xfrm>
+          <a:prstGeom prst="rect">
+            <a:avLst/>
+          </a:prstGeom>
+          <a:solidFill>
+            <a:srgbClr val="FFFFFF"/>
+          </a:solidFill>
+          <a:ln>
+            <a:noFill/>
+          </a:ln>
+          <a:effectLst/>
+        </p:spPr>
+        <p:style>
+          <a:lnRef idx="1">
+            <a:schemeClr val="accent1"/>
+          </a:lnRef>
+          <a:fillRef idx="3">
+            <a:schemeClr val="accent1"/>
+          </a:fillRef>
+          <a:effectRef idx="2">
+            <a:schemeClr val="accent1"/>
+          </a:effectRef>
+          <a:fontRef idx="minor">
+            <a:schemeClr val="lt1"/>
+          </a:fontRef>
+        </p:style>
+        <p:txBody>
+          <a:bodyPr rtlCol="0" anchor="ctr"/>
+          <a:lstStyle/>
+          <a:p>
+            <a:pPr algn="ctr"/>
+          </a:p>
+        </p:txBody>
+      </p:sp>
+      <p:sp>
+        <p:nvSpPr>
+          <p:cNvPr id="3" name="TextBox 2"/>
+          <p:cNvSpPr txBox="1"/>
+          <p:nvPr/>
+        </p:nvSpPr>
+        <p:spPr>
+          <a:xfrm>
+            <a:off x="548640" y="320040"/>
+            <a:ext cx="7315200" cy="365760"/>
+          </a:xfrm>
+          <a:prstGeom prst="rect">
+            <a:avLst/>
+          </a:prstGeom>
+          <a:noFill/>
+        </p:spPr>
+        <p:txBody>
+          <a:bodyPr wrap="none">
+            <a:spAutoFit/>
+          </a:bodyPr>
+          <a:lstStyle/>
+          <a:p>
+            <a:pPr>
+              <a:defRPr sz="1600" b="1">
+                <a:solidFill>
+                  <a:srgbClr val="0066CC"/>
+                </a:solidFill>
+                <a:latin typeface="Segoe UI"/>
+              </a:defRPr>
+            </a:pPr>
+            <a:r>
+              <a:t>Appendix</a:t>
+            </a:r>
+          </a:p>
+        </p:txBody>
+      </p:sp>
+      <p:sp>
+        <p:nvSpPr>
+          <p:cNvPr id="4" name="TextBox 3"/>
+          <p:cNvSpPr txBox="1"/>
+          <p:nvPr/>
+        </p:nvSpPr>
+        <p:spPr>
+          <a:xfrm>
+            <a:off x="548640" y="658368"/>
+            <a:ext cx="11064240" cy="822960"/>
+          </a:xfrm>
+          <a:prstGeom prst="rect">
+            <a:avLst/>
+          </a:prstGeom>
+          <a:noFill/>
+        </p:spPr>
+        <p:txBody>
+          <a:bodyPr wrap="square">
+            <a:spAutoFit/>
+          </a:bodyPr>
+          <a:lstStyle/>
+          <a:p>
+            <a:pPr>
+              <a:defRPr sz="3200" b="1">
+                <a:solidFill>
+                  <a:srgbClr val="1B2A4A"/>
+                </a:solidFill>
+                <a:latin typeface="Segoe UI"/>
+              </a:defRPr>
+            </a:pPr>
+            <a:r>
+              <a:t>First Commands to Verify Your Setup</a:t>
+            </a:r>
+          </a:p>
+        </p:txBody>
+      </p:sp>
+      <p:cxnSp>
+        <p:nvCxnSpPr>
+          <p:cNvPr id="5" name="Connector 4"/>
+          <p:cNvCxnSpPr/>
+          <p:nvPr/>
+        </p:nvCxnSpPr>
+        <p:spPr>
+          <a:xfrm>
+            <a:off x="548640" y="1417320"/>
+            <a:ext cx="11091672" cy="0"/>
+          </a:xfrm>
+          <a:prstGeom prst="line">
+            <a:avLst/>
+          </a:prstGeom>
+          <a:ln w="28575">
+            <a:solidFill>
+              <a:srgbClr val="0066CC"/>
+            </a:solidFill>
+          </a:ln>
+        </p:spPr>
+        <p:style>
+          <a:lnRef idx="2">
+            <a:schemeClr val="accent1"/>
+          </a:lnRef>
+          <a:fillRef idx="0">
+            <a:schemeClr val="accent1"/>
+          </a:fillRef>
+          <a:effectRef idx="1">
+            <a:schemeClr val="accent1"/>
+          </a:effectRef>
+          <a:fontRef idx="minor">
+            <a:schemeClr val="tx1"/>
+          </a:fontRef>
+        </p:style>
+      </p:cxnSp>
+      <p:sp>
+        <p:nvSpPr>
+          <p:cNvPr id="6" name="TextBox 5"/>
+          <p:cNvSpPr txBox="1"/>
+          <p:nvPr/>
+        </p:nvSpPr>
+        <p:spPr>
+          <a:xfrm>
+            <a:off x="548640" y="6473952"/>
+            <a:ext cx="8229600" cy="320040"/>
+          </a:xfrm>
+          <a:prstGeom prst="rect">
+            <a:avLst/>
+          </a:prstGeom>
+          <a:noFill/>
+        </p:spPr>
+        <p:txBody>
+          <a:bodyPr wrap="none">
+            <a:spAutoFit/>
+          </a:bodyPr>
+          <a:lstStyle/>
+          <a:p>
+            <a:pPr>
+              <a:defRPr sz="1100">
+                <a:solidFill>
+                  <a:srgbClr val="555555"/>
+                </a:solidFill>
+                <a:latin typeface="Segoe UI"/>
+              </a:defRPr>
+            </a:pPr>
+            <a:r>
+              <a:t>padb-tools</a:t>
+            </a:r>
+          </a:p>
+        </p:txBody>
+      </p:sp>
+      <p:sp>
+        <p:nvSpPr>
+          <p:cNvPr id="7" name="TextBox 6"/>
+          <p:cNvSpPr txBox="1"/>
+          <p:nvPr/>
+        </p:nvSpPr>
+        <p:spPr>
+          <a:xfrm>
+            <a:off x="11338560" y="6473952"/>
+            <a:ext cx="548640" cy="320040"/>
+          </a:xfrm>
+          <a:prstGeom prst="rect">
+            <a:avLst/>
+          </a:prstGeom>
+          <a:noFill/>
+        </p:spPr>
+        <p:txBody>
+          <a:bodyPr wrap="none">
+            <a:spAutoFit/>
+          </a:bodyPr>
+          <a:lstStyle/>
+          <a:p>
+            <a:pPr algn="r">
+              <a:defRPr sz="1100">
+                <a:solidFill>
+                  <a:srgbClr val="555555"/>
+                </a:solidFill>
+              </a:defRPr>
+            </a:pPr>
+            <a:r>
+              <a:t>40</a:t>
+            </a:r>
+          </a:p>
+        </p:txBody>
+      </p:sp>
+      <p:sp>
+        <p:nvSpPr>
+          <p:cNvPr id="8" name="TextBox 7"/>
+          <p:cNvSpPr txBox="1"/>
+          <p:nvPr/>
+        </p:nvSpPr>
+        <p:spPr>
+          <a:xfrm>
+            <a:off x="548640" y="1691640"/>
+            <a:ext cx="11064240" cy="365760"/>
+          </a:xfrm>
+          <a:prstGeom prst="rect">
+            <a:avLst/>
+          </a:prstGeom>
+          <a:noFill/>
+        </p:spPr>
+        <p:txBody>
+          <a:bodyPr wrap="square">
+            <a:spAutoFit/>
+          </a:bodyPr>
+          <a:lstStyle/>
+          <a:p>
+            <a:pPr>
+              <a:spcAft>
+                <a:spcPts val="1000"/>
+              </a:spcAft>
+            </a:pPr>
+            <a:r>
+              <a:rPr sz="1800">
+                <a:solidFill>
+                  <a:srgbClr val="1B2A4A"/>
+                </a:solidFill>
+                <a:latin typeface="Segoe UI"/>
+              </a:rPr>
+              <a:t>•  From inside the tools folder, confirm everything imports cleanly:</a:t>
+            </a:r>
+          </a:p>
+        </p:txBody>
+      </p:sp>
+      <p:sp>
+        <p:nvSpPr>
+          <p:cNvPr id="9" name="Rounded Rectangle 8"/>
+          <p:cNvSpPr/>
+          <p:nvPr/>
+        </p:nvSpPr>
+        <p:spPr>
+          <a:xfrm>
+            <a:off x="548640" y="2103120"/>
+            <a:ext cx="11064240" cy="502920"/>
+          </a:xfrm>
+          <a:prstGeom prst="roundRect">
+            <a:avLst>
+              <a:gd name="adj" fmla="val 4000"/>
+            </a:avLst>
+          </a:prstGeom>
+          <a:solidFill>
+            <a:srgbClr val="282C34"/>
+          </a:solidFill>
+          <a:ln>
+            <a:solidFill>
+              <a:srgbClr val="111318"/>
+            </a:solidFill>
+          </a:ln>
+          <a:effectLst/>
+        </p:spPr>
+        <p:style>
+          <a:lnRef idx="1">
+            <a:schemeClr val="accent1"/>
+          </a:lnRef>
+          <a:fillRef idx="3">
+            <a:schemeClr val="accent1"/>
+          </a:fillRef>
+          <a:effectRef idx="2">
+            <a:schemeClr val="accent1"/>
+          </a:effectRef>
+          <a:fontRef idx="minor">
+            <a:schemeClr val="lt1"/>
+          </a:fontRef>
+        </p:style>
+        <p:txBody>
+          <a:bodyPr rtlCol="0" anchor="t" wrap="square" lIns="228600" rIns="228600" tIns="164592" bIns="164592"/>
+          <a:lstStyle/>
+          <a:p>
+            <a:pPr algn="l">
+              <a:spcAft>
+                <a:spcPts val="200"/>
+              </a:spcAft>
+            </a:pPr>
+            <a:r>
+              <a:rPr sz="1450">
+                <a:solidFill>
+                  <a:srgbClr val="E6E6E6"/>
+                </a:solidFill>
+                <a:latin typeface="Consolas"/>
+              </a:rPr>
+              <a:t>py -c "import padb_run, padb_v2, padb_config"</a:t>
+            </a:r>
+          </a:p>
+        </p:txBody>
+      </p:sp>
+      <p:sp>
+        <p:nvSpPr>
+          <p:cNvPr id="10" name="TextBox 9"/>
+          <p:cNvSpPr txBox="1"/>
+          <p:nvPr/>
+        </p:nvSpPr>
+        <p:spPr>
+          <a:xfrm>
+            <a:off x="548640" y="2743200"/>
+            <a:ext cx="11064240" cy="365760"/>
+          </a:xfrm>
+          <a:prstGeom prst="rect">
+            <a:avLst/>
+          </a:prstGeom>
+          <a:noFill/>
+        </p:spPr>
+        <p:txBody>
+          <a:bodyPr wrap="square">
+            <a:spAutoFit/>
+          </a:bodyPr>
+          <a:lstStyle/>
+          <a:p>
+            <a:pPr>
+              <a:spcAft>
+                <a:spcPts val="1000"/>
+              </a:spcAft>
+            </a:pPr>
+            <a:r>
+              <a:rPr sz="1700">
+                <a:solidFill>
+                  <a:srgbClr val="1B2A4A"/>
+                </a:solidFill>
+                <a:latin typeface="Segoe UI"/>
+              </a:rPr>
+              <a:t>•  No output and no traceback = success</a:t>
+            </a:r>
+          </a:p>
+        </p:txBody>
+      </p:sp>
+      <p:sp>
+        <p:nvSpPr>
+          <p:cNvPr id="11" name="TextBox 10"/>
+          <p:cNvSpPr txBox="1"/>
+          <p:nvPr/>
+        </p:nvSpPr>
+        <p:spPr>
+          <a:xfrm>
+            <a:off x="548640" y="3291840"/>
+            <a:ext cx="11064240" cy="365760"/>
+          </a:xfrm>
+          <a:prstGeom prst="rect">
+            <a:avLst/>
+          </a:prstGeom>
+          <a:noFill/>
+        </p:spPr>
+        <p:txBody>
+          <a:bodyPr wrap="square">
+            <a:spAutoFit/>
+          </a:bodyPr>
+          <a:lstStyle/>
+          <a:p>
+            <a:pPr>
+              <a:spcAft>
+                <a:spcPts val="1000"/>
+              </a:spcAft>
+            </a:pPr>
+            <a:r>
+              <a:rPr sz="1800">
+                <a:solidFill>
+                  <a:srgbClr val="1B2A4A"/>
+                </a:solidFill>
+                <a:latin typeface="Segoe UI"/>
+              </a:rPr>
+              <a:t>•  Then generate your first job.json from any pod you have access to:</a:t>
+            </a:r>
+          </a:p>
+        </p:txBody>
+      </p:sp>
+      <p:sp>
+        <p:nvSpPr>
+          <p:cNvPr id="12" name="Rounded Rectangle 11"/>
+          <p:cNvSpPr/>
+          <p:nvPr/>
+        </p:nvSpPr>
+        <p:spPr>
+          <a:xfrm>
+            <a:off x="548640" y="3703320"/>
+            <a:ext cx="11064240" cy="502920"/>
+          </a:xfrm>
+          <a:prstGeom prst="roundRect">
+            <a:avLst>
+              <a:gd name="adj" fmla="val 4000"/>
+            </a:avLst>
+          </a:prstGeom>
+          <a:solidFill>
+            <a:srgbClr val="282C34"/>
+          </a:solidFill>
+          <a:ln>
+            <a:solidFill>
+              <a:srgbClr val="111318"/>
+            </a:solidFill>
+          </a:ln>
+          <a:effectLst/>
+        </p:spPr>
+        <p:style>
+          <a:lnRef idx="1">
+            <a:schemeClr val="accent1"/>
+          </a:lnRef>
+          <a:fillRef idx="3">
+            <a:schemeClr val="accent1"/>
+          </a:fillRef>
+          <a:effectRef idx="2">
+            <a:schemeClr val="accent1"/>
+          </a:effectRef>
+          <a:fontRef idx="minor">
+            <a:schemeClr val="lt1"/>
+          </a:fontRef>
+        </p:style>
+        <p:txBody>
+          <a:bodyPr rtlCol="0" anchor="t" wrap="square" lIns="228600" rIns="228600" tIns="164592" bIns="164592"/>
+          <a:lstStyle/>
+          <a:p>
+            <a:pPr algn="l">
+              <a:spcAft>
+                <a:spcPts val="200"/>
+              </a:spcAft>
+            </a:pPr>
+            <a:r>
+              <a:rPr sz="1450">
+                <a:solidFill>
+                  <a:srgbClr val="E6E6E6"/>
+                </a:solidFill>
+                <a:latin typeface="Consolas"/>
+              </a:rPr>
+              <a:t>py padb_make_job.py YourPod.pod --module YourModule</a:t>
+            </a:r>
+          </a:p>
+        </p:txBody>
+      </p:sp>
+      <p:sp>
+        <p:nvSpPr>
+          <p:cNvPr id="13" name="TextBox 12"/>
+          <p:cNvSpPr txBox="1"/>
+          <p:nvPr/>
+        </p:nvSpPr>
+        <p:spPr>
+          <a:xfrm>
+            <a:off x="548640" y="4343400"/>
+            <a:ext cx="11064240" cy="1463040"/>
+          </a:xfrm>
+          <a:prstGeom prst="rect">
+            <a:avLst/>
+          </a:prstGeom>
+          <a:noFill/>
+        </p:spPr>
+        <p:txBody>
+          <a:bodyPr wrap="square">
+            <a:spAutoFit/>
+          </a:bodyPr>
+          <a:lstStyle/>
+          <a:p>
+            <a:pPr>
+              <a:spcAft>
+                <a:spcPts val="1000"/>
+              </a:spcAft>
+            </a:pPr>
+            <a:r>
+              <a:rPr sz="1700">
+                <a:solidFill>
+                  <a:srgbClr val="1B2A4A"/>
+                </a:solidFill>
+                <a:latin typeface="Segoe UI"/>
+              </a:rPr>
+              <a:t>•  If PADB-R.exe launches and a real window briefly appears, you're fully set up</a:t>
+            </a:r>
+          </a:p>
+          <a:p>
+            <a:pPr>
+              <a:spcAft>
+                <a:spcPts val="1000"/>
+              </a:spcAft>
+            </a:pPr>
+            <a:r>
+              <a:rPr sz="1700">
+                <a:solidFill>
+                  <a:srgbClr val="1B2A4A"/>
+                </a:solidFill>
+                <a:latin typeface="Segoe UI"/>
+              </a:rPr>
+              <a:t>•  Stuck? GETTING_STARTED.md → Quick_Start.md, or type /padb-tools once you're</a:t>
+            </a:r>
+          </a:p>
+          <a:p>
+            <a:pPr lvl="1">
+              <a:spcAft>
+                <a:spcPts val="600"/>
+              </a:spcAft>
+            </a:pPr>
+            <a:r>
+              <a:rPr sz="1500">
+                <a:solidFill>
+                  <a:srgbClr val="555555"/>
+                </a:solidFill>
+                <a:latin typeface="Segoe UI"/>
+              </a:rPr>
+              <a:t>–  working inside the repo</a:t>
             </a:r>
           </a:p>
         </p:txBody>

--- a/PADB_Simple_and_Interactive.pptx
+++ b/PADB_Simple_and_Interactive.pptx
@@ -46,6 +46,10 @@
     <p:sldId id="294" r:id="rId45"/>
     <p:sldId id="295" r:id="rId46"/>
     <p:sldId id="296" r:id="rId47"/>
+    <p:sldId id="297" r:id="rId48"/>
+    <p:sldId id="298" r:id="rId49"/>
+    <p:sldId id="299" r:id="rId50"/>
+    <p:sldId id="300" r:id="rId51"/>
   </p:sldIdLst>
   <p:sldSz cx="12191695" cy="6858000" type="screen4x3"/>
   <p:notesSz cx="6858000" cy="9144000"/>
@@ -9008,7 +9012,7 @@
                   <a:srgbClr val="555555"/>
                 </a:solidFill>
               </a:rPr>
-              <a:t>•  One card per native PNG, largest first</a:t>
+              <a:t>•  One card per native PNG, in pod/analytic order</a:t>
             </a:r>
           </a:p>
           <a:p>
@@ -13436,7 +13440,7 @@
               </a:defRPr>
             </a:pPr>
             <a:r>
-              <a:t>Tutorial 3 — /padb-tools</a:t>
+              <a:t>PADB Interactive — Deep Dive</a:t>
             </a:r>
           </a:p>
         </p:txBody>
@@ -13472,7 +13476,7 @@
               </a:defRPr>
             </a:pPr>
             <a:r>
-              <a:t>What It Is, When to Use It</a:t>
+              <a:t>Global Filter — Export/Import CSV, Copy PADB Filter</a:t>
             </a:r>
           </a:p>
         </p:txBody>
@@ -13611,13 +13615,29 @@
               </a:spcAft>
             </a:pPr>
             <a:r>
-              <a:rPr sz="1800">
+              <a:rPr sz="1700">
                 <a:solidFill>
                   <a:srgbClr val="1B2A4A"/>
                 </a:solidFill>
                 <a:latin typeface="Segoe UI"/>
               </a:rPr>
-              <a:t>•  A Claude Code command scoped to this repo (.claude/commands/padb-tools.md)</a:t>
+              <a:t>•  GF buttons (boxplot) are additive, not replacing — "Set filter as GF" / "Set outliers as GF" / "Set delta outliers as GF" all add to the existing filter</a:t>
+            </a:r>
+          </a:p>
+          <a:p>
+            <a:pPr lvl="1">
+              <a:spcAft>
+                <a:spcPts val="600"/>
+              </a:spcAft>
+            </a:pPr>
+            <a:r>
+              <a:rPr sz="1500">
+                <a:solidFill>
+                  <a:srgbClr val="555555"/>
+                </a:solidFill>
+                <a:latin typeface="Segoe UI"/>
+              </a:rPr>
+              <a:t>–  Use "Clear global filter" first if you want to start over from empty</a:t>
             </a:r>
           </a:p>
           <a:p>
@@ -13627,13 +13647,13 @@
               </a:spcAft>
             </a:pPr>
             <a:r>
-              <a:rPr sz="1800">
+              <a:rPr sz="1700">
                 <a:solidFill>
                   <a:srgbClr val="1B2A4A"/>
                 </a:solidFill>
                 <a:latin typeface="Segoe UI"/>
               </a:rPr>
-              <a:t>•  Surfaces a condensed index of the tool's architecture, gotchas, and a</a:t>
+              <a:t>•  Export GF CSV — downloads a human-readable CSV (Serial, Condition, Temperature, Start/Stop Freq, N Points)</a:t>
             </a:r>
           </a:p>
           <a:p>
@@ -13643,13 +13663,13 @@
               </a:spcAft>
             </a:pPr>
             <a:r>
-              <a:rPr sz="1600">
+              <a:rPr sz="1500">
                 <a:solidFill>
                   <a:srgbClr val="555555"/>
                 </a:solidFill>
                 <a:latin typeface="Segoe UI"/>
               </a:rPr>
-              <a:t>–  13-point new-pod checklist — without opening all six markdown docs</a:t>
+              <a:t>–  Frequency columns are display-only context — the runtime match is on serial+condition+temperature only</a:t>
             </a:r>
           </a:p>
           <a:p>
@@ -13659,29 +13679,13 @@
               </a:spcAft>
             </a:pPr>
             <a:r>
-              <a:rPr sz="1800">
+              <a:rPr sz="1700">
                 <a:solidFill>
                   <a:srgbClr val="1B2A4A"/>
                 </a:solidFill>
                 <a:latin typeface="Segoe UI"/>
               </a:rPr>
-              <a:t>•  Only works when Claude Code's working directory is inside the repo</a:t>
-            </a:r>
-          </a:p>
-          <a:p>
-            <a:pPr lvl="1">
-              <a:spcAft>
-                <a:spcPts val="600"/>
-              </a:spcAft>
-            </a:pPr>
-            <a:r>
-              <a:rPr sz="1600">
-                <a:solidFill>
-                  <a:srgbClr val="555555"/>
-                </a:solidFill>
-                <a:latin typeface="Segoe UI"/>
-              </a:rPr>
-              <a:t>–  (e.g. C:\apps\padb\tools) — that's what makes it "repo-scoped"</a:t>
+              <a:t>•  Import GF CSV — re-merges (adds to) the current filter from a previously exported CSV</a:t>
             </a:r>
           </a:p>
           <a:p>
@@ -13691,29 +13695,29 @@
               </a:spcAft>
             </a:pPr>
             <a:r>
-              <a:rPr sz="1800">
+              <a:rPr sz="1700">
                 <a:solidFill>
                   <a:srgbClr val="1B2A4A"/>
                 </a:solidFill>
                 <a:latin typeface="Segoe UI"/>
               </a:rPr>
-              <a:t>•  Use it when you're: onboarding a new pod, debugging a plot feature,</a:t>
-            </a:r>
-          </a:p>
-          <a:p>
-            <a:pPr lvl="1">
-              <a:spcAft>
-                <a:spcPts val="600"/>
-              </a:spcAft>
-            </a:pPr>
-            <a:r>
-              <a:rPr sz="1600">
-                <a:solidFill>
-                  <a:srgbClr val="555555"/>
-                </a:solidFill>
-                <a:latin typeface="Segoe UI"/>
-              </a:rPr>
-              <a:t>–  reviewing generated HTML, or just orienting yourself in a new session</a:t>
+              <a:t>•  Copy PADB Filter — best-effort 'Serial Number' NOT IN {...} expression for pasting into PADB itself (under development)</a:t>
+            </a:r>
+          </a:p>
+          <a:p>
+            <a:pPr>
+              <a:spcAft>
+                <a:spcPts val="1000"/>
+              </a:spcAft>
+            </a:pPr>
+            <a:r>
+              <a:rPr sz="1700">
+                <a:solidFill>
+                  <a:srgbClr val="1B2A4A"/>
+                </a:solidFill>
+                <a:latin typeface="Segoe UI"/>
+              </a:rPr>
+              <a:t>•  Once set, GF propagates automatically to summary and env_coverage — no need to re-select DUTs per view</a:t>
             </a:r>
           </a:p>
         </p:txBody>
@@ -13811,7 +13815,7 @@
               </a:defRPr>
             </a:pPr>
             <a:r>
-              <a:t>Tutorial 3 — /padb-tools</a:t>
+              <a:t>PADB Interactive — Deep Dive</a:t>
             </a:r>
           </a:p>
         </p:txBody>
@@ -13847,7 +13851,7 @@
               </a:defRPr>
             </a:pPr>
             <a:r>
-              <a:t>What It Actually Tells You</a:t>
+              <a:t>In-Page Help Panel — Explains Itself</a:t>
             </a:r>
           </a:p>
         </p:txBody>
@@ -13992,7 +13996,39 @@
                 </a:solidFill>
                 <a:latin typeface="Segoe UI"/>
               </a:rPr>
-              <a:t>•  A few of the 13 new-pod checklist items it surfaces immediately:</a:t>
+              <a:t>•  Every one of the 6 main views now has a collapsible ⓘ Help button</a:t>
+            </a:r>
+          </a:p>
+          <a:p>
+            <a:pPr>
+              <a:spcAft>
+                <a:spcPts val="1000"/>
+              </a:spcAft>
+            </a:pPr>
+            <a:r>
+              <a:rPr sz="1700">
+                <a:solidFill>
+                  <a:srgbClr val="1B2A4A"/>
+                </a:solidFill>
+                <a:latin typeface="Segoe UI"/>
+              </a:rPr>
+              <a:t>•  Static explanation: what Filter / Group by / Segment by actually do, and how an unfiltered dimension can pool into extra segments or legend entries</a:t>
+            </a:r>
+          </a:p>
+          <a:p>
+            <a:pPr>
+              <a:spcAft>
+                <a:spcPts val="1000"/>
+              </a:spcAft>
+            </a:pPr>
+            <a:r>
+              <a:rPr sz="1700">
+                <a:solidFill>
+                  <a:srgbClr val="1B2A4A"/>
+                </a:solidFill>
+                <a:latin typeface="Segoe UI"/>
+              </a:rPr>
+              <a:t>•  Dynamic check: flags rows where Upper_Limit &lt; Lower_Limit or Spec_Hi &lt; Spec_Lo (backwards from the usual convention)</a:t>
             </a:r>
           </a:p>
           <a:p>
@@ -14008,55 +14044,7 @@
                 </a:solidFill>
                 <a:latin typeface="Segoe UI"/>
               </a:rPr>
-              <a:t>–  TestRun_RunStatus — exit 0 but no CSV? Check the pod's default 'P'-only filter</a:t>
-            </a:r>
-          </a:p>
-          <a:p>
-            <a:pPr lvl="1">
-              <a:spcAft>
-                <a:spcPts val="600"/>
-              </a:spcAft>
-            </a:pPr>
-            <a:r>
-              <a:rPr sz="1500">
-                <a:solidFill>
-                  <a:srgbClr val="555555"/>
-                </a:solidFill>
-                <a:latin typeface="Segoe UI"/>
-              </a:rPr>
-              <a:t>–  Environment_TestStep must be {All} or distribution/env_coverage/summary go empty</a:t>
-            </a:r>
-          </a:p>
-          <a:p>
-            <a:pPr lvl="1">
-              <a:spcAft>
-                <a:spcPts val="600"/>
-              </a:spcAft>
-            </a:pPr>
-            <a:r>
-              <a:rPr sz="1500">
-                <a:solidFill>
-                  <a:srgbClr val="555555"/>
-                </a:solidFill>
-                <a:latin typeface="Segoe UI"/>
-              </a:rPr>
-              <a:t>–  OutputConfig_OutputCSV=False on a Scatter analytic — renders PNG, writes no CSV</a:t>
-            </a:r>
-          </a:p>
-          <a:p>
-            <a:pPr lvl="1">
-              <a:spcAft>
-                <a:spcPts val="600"/>
-              </a:spcAft>
-            </a:pPr>
-            <a:r>
-              <a:rPr sz="1500">
-                <a:solidFill>
-                  <a:srgbClr val="555555"/>
-                </a:solidFill>
-                <a:latin typeface="Segoe UI"/>
-              </a:rPr>
-              <a:t>–  Generated job.json path length — warns before Windows' 260-char limit bites</a:t>
+              <a:t>–  Names which filter-dimension value(s) the inverted rows are concentrated in</a:t>
             </a:r>
           </a:p>
           <a:p>
@@ -14072,23 +14060,23 @@
                 </a:solidFill>
                 <a:latin typeface="Segoe UI"/>
               </a:rPr>
-              <a:t>•  Plus: the architecture one-liner, common JS gotchas, and pointers to the</a:t>
-            </a:r>
-          </a:p>
-          <a:p>
-            <a:pPr lvl="1">
-              <a:spcAft>
-                <a:spcPts val="600"/>
-              </a:spcAft>
-            </a:pPr>
-            <a:r>
-              <a:rPr sz="1500">
-                <a:solidFill>
-                  <a:srgbClr val="555555"/>
-                </a:solidFill>
-                <a:latin typeface="Segoe UI"/>
-              </a:rPr>
-              <a:t>–  full doc for anything it only summarizes</a:t>
+              <a:t>•  Real example this caught: "14 segments where ~7 were expected" traced to one Serial Number with inverted spec rows across its whole dataset — a pod data issue, not a tool bug</a:t>
+            </a:r>
+          </a:p>
+          <a:p>
+            <a:pPr>
+              <a:spcAft>
+                <a:spcPts val="1000"/>
+              </a:spcAft>
+            </a:pPr>
+            <a:r>
+              <a:rPr sz="1700">
+                <a:solidFill>
+                  <a:srgbClr val="1B2A4A"/>
+                </a:solidFill>
+                <a:latin typeface="Segoe UI"/>
+              </a:rPr>
+              <a:t>•  Run padb_csv_check.py (next slide) to catch the same class of issue before you even open the HTML</a:t>
             </a:r>
           </a:p>
         </p:txBody>
@@ -14186,7 +14174,7 @@
               </a:defRPr>
             </a:pPr>
             <a:r>
-              <a:t>Tutorial 3 — /padb-tools</a:t>
+              <a:t>PADB Interactive — Deep Dive</a:t>
             </a:r>
           </a:p>
         </p:txBody>
@@ -14222,7 +14210,7 @@
               </a:defRPr>
             </a:pPr>
             <a:r>
-              <a:t>Worked Example: MaxPowerTutorial3.pod</a:t>
+              <a:t>Pre-Flight Check — padb_csv_check.py</a:t>
             </a:r>
           </a:p>
         </p:txBody>
@@ -14341,8 +14329,8 @@
         </p:nvSpPr>
         <p:spPr>
           <a:xfrm>
-            <a:off x="548640" y="1645920"/>
-            <a:ext cx="11064240" cy="4754880"/>
+            <a:off x="548640" y="1691640"/>
+            <a:ext cx="11064240" cy="457200"/>
           </a:xfrm>
           <a:prstGeom prst="rect">
             <a:avLst/>
@@ -14361,15 +14349,99 @@
               </a:spcAft>
             </a:pPr>
             <a:r>
-              <a:rPr sz="1800">
+              <a:rPr sz="1700">
                 <a:solidFill>
                   <a:srgbClr val="1B2A4A"/>
                 </a:solidFill>
                 <a:latin typeface="Segoe UI"/>
               </a:rPr>
-              <a:t>•  You've just been handed MaxPowerTutorial3.pod — 2 analytics, never run before</a:t>
-            </a:r>
-          </a:p>
+              <a:t>•  Run it between Step 2 (extraction) and Step 4 (build views) — before spending time on a build that turns out wrong:</a:t>
+            </a:r>
+          </a:p>
+        </p:txBody>
+      </p:sp>
+      <p:sp>
+        <p:nvSpPr>
+          <p:cNvPr id="9" name="Rounded Rectangle 8"/>
+          <p:cNvSpPr/>
+          <p:nvPr/>
+        </p:nvSpPr>
+        <p:spPr>
+          <a:xfrm>
+            <a:off x="548640" y="2148840"/>
+            <a:ext cx="11064240" cy="502920"/>
+          </a:xfrm>
+          <a:prstGeom prst="roundRect">
+            <a:avLst>
+              <a:gd name="adj" fmla="val 4000"/>
+            </a:avLst>
+          </a:prstGeom>
+          <a:solidFill>
+            <a:srgbClr val="282C34"/>
+          </a:solidFill>
+          <a:ln>
+            <a:solidFill>
+              <a:srgbClr val="111318"/>
+            </a:solidFill>
+          </a:ln>
+          <a:effectLst/>
+        </p:spPr>
+        <p:style>
+          <a:lnRef idx="1">
+            <a:schemeClr val="accent1"/>
+          </a:lnRef>
+          <a:fillRef idx="3">
+            <a:schemeClr val="accent1"/>
+          </a:fillRef>
+          <a:effectRef idx="2">
+            <a:schemeClr val="accent1"/>
+          </a:effectRef>
+          <a:fontRef idx="minor">
+            <a:schemeClr val="lt1"/>
+          </a:fontRef>
+        </p:style>
+        <p:txBody>
+          <a:bodyPr rtlCol="0" anchor="t" wrap="square" lIns="228600" rIns="228600" tIns="164592" bIns="164592"/>
+          <a:lstStyle/>
+          <a:p>
+            <a:pPr algn="l">
+              <a:spcAft>
+                <a:spcPts val="200"/>
+              </a:spcAft>
+            </a:pPr>
+            <a:r>
+              <a:rPr sz="1500">
+                <a:solidFill>
+                  <a:srgbClr val="E6E6E6"/>
+                </a:solidFill>
+                <a:latin typeface="Consolas"/>
+              </a:rPr>
+              <a:t>py padb_csv_check.py path\to\Scatter.csv</a:t>
+            </a:r>
+          </a:p>
+        </p:txBody>
+      </p:sp>
+      <p:sp>
+        <p:nvSpPr>
+          <p:cNvPr id="10" name="TextBox 9"/>
+          <p:cNvSpPr txBox="1"/>
+          <p:nvPr/>
+        </p:nvSpPr>
+        <p:spPr>
+          <a:xfrm>
+            <a:off x="548640" y="2834640"/>
+            <a:ext cx="11064240" cy="2743200"/>
+          </a:xfrm>
+          <a:prstGeom prst="rect">
+            <a:avLst/>
+          </a:prstGeom>
+          <a:noFill/>
+        </p:spPr>
+        <p:txBody>
+          <a:bodyPr wrap="square">
+            <a:spAutoFit/>
+          </a:bodyPr>
+          <a:lstStyle/>
           <a:p>
             <a:pPr>
               <a:spcAft>
@@ -14377,13 +14449,13 @@
               </a:spcAft>
             </a:pPr>
             <a:r>
-              <a:rPr sz="1800">
+              <a:rPr sz="1700">
                 <a:solidFill>
                   <a:srgbClr val="1B2A4A"/>
                 </a:solidFill>
                 <a:latin typeface="Segoe UI"/>
               </a:rPr>
-              <a:t>•  Open Claude Code with your working directory inside the padb-tools repo</a:t>
+              <a:t>•  Calls the exact same CSV-loading function padb_v2.py itself uses — findings can't drift out of sync with what actually gets plotted</a:t>
             </a:r>
           </a:p>
           <a:p>
@@ -14393,13 +14465,13 @@
               </a:spcAft>
             </a:pPr>
             <a:r>
-              <a:rPr sz="1800">
+              <a:rPr sz="1700">
                 <a:solidFill>
                   <a:srgbClr val="1B2A4A"/>
                 </a:solidFill>
                 <a:latin typeface="Segoe UI"/>
               </a:rPr>
-              <a:t>•  Type: /padb-tools</a:t>
+              <a:t>•  Flags orphaned numeric columns (a second swept dimension sitting unused), inverted spec rows, high Group cardinality (&gt;100 crowded, &gt;500 genuinely slow), and missing grouping items (Serial/Port/Spec/Uncertainty)</a:t>
             </a:r>
           </a:p>
           <a:p>
@@ -14409,61 +14481,13 @@
               </a:spcAft>
             </a:pPr>
             <a:r>
-              <a:rPr sz="1800">
+              <a:rPr sz="1700">
                 <a:solidFill>
                   <a:srgbClr val="1B2A4A"/>
                 </a:solidFill>
                 <a:latin typeface="Segoe UI"/>
               </a:rPr>
-              <a:t>•  Ask directly: "Is MaxPowerTutorial3.pod ready to run in Interactive mode?"</a:t>
-            </a:r>
-          </a:p>
-          <a:p>
-            <a:pPr>
-              <a:spcAft>
-                <a:spcPts val="1000"/>
-              </a:spcAft>
-            </a:pPr>
-            <a:r>
-              <a:rPr sz="1800">
-                <a:solidFill>
-                  <a:srgbClr val="1B2A4A"/>
-                </a:solidFill>
-                <a:latin typeface="Segoe UI"/>
-              </a:rPr>
-              <a:t>•  Claude reads the checklist above, then actually inspects the pod file —</a:t>
-            </a:r>
-          </a:p>
-          <a:p>
-            <a:pPr lvl="1">
-              <a:spcAft>
-                <a:spcPts val="600"/>
-              </a:spcAft>
-            </a:pPr>
-            <a:r>
-              <a:rPr sz="1600">
-                <a:solidFill>
-                  <a:srgbClr val="555555"/>
-                </a:solidFill>
-                <a:latin typeface="Segoe UI"/>
-              </a:rPr>
-              <a:t>–  Limits_YLimit, Environment_TestStep, OutputConfig_OutputCSV, Group strings</a:t>
-            </a:r>
-          </a:p>
-          <a:p>
-            <a:pPr>
-              <a:spcAft>
-                <a:spcPts val="1000"/>
-              </a:spcAft>
-            </a:pPr>
-            <a:r>
-              <a:rPr sz="1800">
-                <a:solidFill>
-                  <a:srgbClr val="1B2A4A"/>
-                </a:solidFill>
-                <a:latin typeface="Segoe UI"/>
-              </a:rPr>
-              <a:t>•  You get a direct answer grounded in this pod's real settings, not a guess</a:t>
+              <a:t>•  Exit code 1 on any WARN/FAIL — usable as a pre-flight gate in a script, not just an interactive read</a:t>
             </a:r>
           </a:p>
         </p:txBody>
@@ -14561,7 +14585,7 @@
               </a:defRPr>
             </a:pPr>
             <a:r>
-              <a:t>Multi-Site Testing</a:t>
+              <a:t>Web App Reliability</a:t>
             </a:r>
           </a:p>
         </p:txBody>
@@ -14597,7 +14621,7 @@
               </a:defRPr>
             </a:pPr>
             <a:r>
-              <a:t>Same Test, Different Database</a:t>
+              <a:t>Job Abort &amp; Cross-Process PADB-R.exe Exclusivity</a:t>
             </a:r>
           </a:p>
         </p:txBody>
@@ -14742,7 +14766,39 @@
                 </a:solidFill>
                 <a:latin typeface="Segoe UI"/>
               </a:rPr>
-              <a:t>•  Malaysia (AMC2) production ramp-up: the same test now also pulls from</a:t>
+              <a:t>•  Job abort — a queued or running job in the web app can now be cancelled from the status panel</a:t>
+            </a:r>
+          </a:p>
+          <a:p>
+            <a:pPr>
+              <a:spcAft>
+                <a:spcPts val="1000"/>
+              </a:spcAft>
+            </a:pPr>
+            <a:r>
+              <a:rPr sz="1700">
+                <a:solidFill>
+                  <a:srgbClr val="1B2A4A"/>
+                </a:solidFill>
+                <a:latin typeface="Segoe UI"/>
+              </a:rPr>
+              <a:t>•  Run jobs execute before plot jobs whenever a mixed selection is run</a:t>
+            </a:r>
+          </a:p>
+          <a:p>
+            <a:pPr>
+              <a:spcAft>
+                <a:spcPts val="1000"/>
+              </a:spcAft>
+            </a:pPr>
+            <a:r>
+              <a:rPr sz="1700">
+                <a:solidFill>
+                  <a:srgbClr val="1B2A4A"/>
+                </a:solidFill>
+                <a:latin typeface="Segoe UI"/>
+              </a:rPr>
+              <a:t>•  Cross-process exclusivity guard (padb_batch.py) — two PADB-R.exe instances interfere with and stall each other, even across separate process launches (e.g. a webapp restart mid-run)</a:t>
             </a:r>
           </a:p>
           <a:p>
@@ -14758,23 +14814,7 @@
                 </a:solidFill>
                 <a:latin typeface="Segoe UI"/>
               </a:rPr>
-              <a:t>–  AMC2's own PADB Oracle database, not just Santa Rosa's</a:t>
-            </a:r>
-          </a:p>
-          <a:p>
-            <a:pPr>
-              <a:spcAft>
-                <a:spcPts val="1000"/>
-              </a:spcAft>
-            </a:pPr>
-            <a:r>
-              <a:rPr sz="1700">
-                <a:solidFill>
-                  <a:srgbClr val="1B2A4A"/>
-                </a:solidFill>
-                <a:latin typeface="Segoe UI"/>
-              </a:rPr>
-              <a:t>•  Comparing a real Santa Rosa pod against its AMC2 counterpart: the only</a:t>
+              <a:t>–  Every entry point (CLI and web app alike) now waits on the live OS process table before launching, rather than trusting one process's own in-memory queue</a:t>
             </a:r>
           </a:p>
           <a:p>
@@ -14790,87 +14830,7 @@
                 </a:solidFill>
                 <a:latin typeface="Segoe UI"/>
               </a:rPr>
-              <a:t>–  genuine differences are Device_Server and Device_Database in [Extract]</a:t>
-            </a:r>
-          </a:p>
-          <a:p>
-            <a:pPr>
-              <a:spcAft>
-                <a:spcPts val="1000"/>
-              </a:spcAft>
-            </a:pPr>
-            <a:r>
-              <a:rPr sz="1700">
-                <a:solidFill>
-                  <a:srgbClr val="1B2A4A"/>
-                </a:solidFill>
-                <a:latin typeface="Segoe UI"/>
-              </a:rPr>
-              <a:t>•  Every AnalyticName and OutputConfig_OutputFile is otherwise identical —</a:t>
-            </a:r>
-          </a:p>
-          <a:p>
-            <a:pPr lvl="1">
-              <a:spcAft>
-                <a:spcPts val="600"/>
-              </a:spcAft>
-            </a:pPr>
-            <a:r>
-              <a:rPr sz="1500">
-                <a:solidFill>
-                  <a:srgbClr val="555555"/>
-                </a:solidFill>
-                <a:latin typeface="Segoe UI"/>
-              </a:rPr>
-              <a:t>–  running both site variants writes identically-named CSVs</a:t>
-            </a:r>
-          </a:p>
-          <a:p>
-            <a:pPr>
-              <a:spcAft>
-                <a:spcPts val="1000"/>
-              </a:spcAft>
-            </a:pPr>
-            <a:r>
-              <a:rPr sz="1700">
-                <a:solidFill>
-                  <a:srgbClr val="1B2A4A"/>
-                </a:solidFill>
-                <a:latin typeface="Segoe UI"/>
-              </a:rPr>
-              <a:t>•  Risk: point both at a shared results/publish location and one silently</a:t>
-            </a:r>
-          </a:p>
-          <a:p>
-            <a:pPr lvl="1">
-              <a:spcAft>
-                <a:spcPts val="600"/>
-              </a:spcAft>
-            </a:pPr>
-            <a:r>
-              <a:rPr sz="1500">
-                <a:solidFill>
-                  <a:srgbClr val="555555"/>
-                </a:solidFill>
-                <a:latin typeface="Segoe UI"/>
-              </a:rPr>
-              <a:t>–  overwrites the other — same class of problem unique_output_filenames</a:t>
-            </a:r>
-          </a:p>
-          <a:p>
-            <a:pPr lvl="1">
-              <a:spcAft>
-                <a:spcPts val="600"/>
-              </a:spcAft>
-            </a:pPr>
-            <a:r>
-              <a:rPr sz="1500">
-                <a:solidFill>
-                  <a:srgbClr val="555555"/>
-                </a:solidFill>
-                <a:latin typeface="Segoe UI"/>
-              </a:rPr>
-              <a:t>–  solves within one pod, but across two site-variant pods instead</a:t>
+              <a:t>–  If it never clears, it names the blocking PID(s) with the exact taskkill command to clear a genuinely-stuck instance by hand</a:t>
             </a:r>
           </a:p>
         </p:txBody>
@@ -14968,7 +14928,7 @@
               </a:defRPr>
             </a:pPr>
             <a:r>
-              <a:t>Multi-Site Testing</a:t>
+              <a:t>Tutorial 3 — /padb-tools</a:t>
             </a:r>
           </a:p>
         </p:txBody>
@@ -15004,7 +14964,7 @@
               </a:defRPr>
             </a:pPr>
             <a:r>
-              <a:t>padb_convert_site.py — Converting a Pod</a:t>
+              <a:t>What It Is, When to Use It</a:t>
             </a:r>
           </a:p>
         </p:txBody>
@@ -15123,8 +15083,8 @@
         </p:nvSpPr>
         <p:spPr>
           <a:xfrm>
-            <a:off x="548640" y="1600200"/>
-            <a:ext cx="11064240" cy="365760"/>
+            <a:off x="548640" y="1645920"/>
+            <a:ext cx="11064240" cy="4754880"/>
           </a:xfrm>
           <a:prstGeom prst="rect">
             <a:avLst/>
@@ -15143,256 +15103,79 @@
               </a:spcAft>
             </a:pPr>
             <a:r>
+              <a:rPr sz="1800">
+                <a:solidFill>
+                  <a:srgbClr val="1B2A4A"/>
+                </a:solidFill>
+                <a:latin typeface="Segoe UI"/>
+              </a:rPr>
+              <a:t>•  A Claude Code command scoped to this repo (.claude/commands/padb-tools.md)</a:t>
+            </a:r>
+          </a:p>
+          <a:p>
+            <a:pPr>
+              <a:spcAft>
+                <a:spcPts val="1000"/>
+              </a:spcAft>
+            </a:pPr>
+            <a:r>
+              <a:rPr sz="1800">
+                <a:solidFill>
+                  <a:srgbClr val="1B2A4A"/>
+                </a:solidFill>
+                <a:latin typeface="Segoe UI"/>
+              </a:rPr>
+              <a:t>•  Surfaces a condensed index of the tool's architecture, gotchas, and a</a:t>
+            </a:r>
+          </a:p>
+          <a:p>
+            <a:pPr lvl="1">
+              <a:spcAft>
+                <a:spcPts val="600"/>
+              </a:spcAft>
+            </a:pPr>
+            <a:r>
               <a:rPr sz="1600">
                 <a:solidFill>
+                  <a:srgbClr val="555555"/>
+                </a:solidFill>
+                <a:latin typeface="Segoe UI"/>
+              </a:rPr>
+              <a:t>–  13-point new-pod checklist — without opening all six markdown docs</a:t>
+            </a:r>
+          </a:p>
+          <a:p>
+            <a:pPr>
+              <a:spcAft>
+                <a:spcPts val="1000"/>
+              </a:spcAft>
+            </a:pPr>
+            <a:r>
+              <a:rPr sz="1800">
+                <a:solidFill>
                   <a:srgbClr val="1B2A4A"/>
                 </a:solidFill>
                 <a:latin typeface="Segoe UI"/>
               </a:rPr>
-              <a:t>•  Site registry lives in padb_sites.json — add a new site there, no code changes:</a:t>
-            </a:r>
-          </a:p>
-        </p:txBody>
-      </p:sp>
-      <p:sp>
-        <p:nvSpPr>
-          <p:cNvPr id="9" name="Rounded Rectangle 8"/>
-          <p:cNvSpPr/>
-          <p:nvPr/>
-        </p:nvSpPr>
-        <p:spPr>
-          <a:xfrm>
-            <a:off x="548640" y="1965960"/>
-            <a:ext cx="11064240" cy="502920"/>
-          </a:xfrm>
-          <a:prstGeom prst="roundRect">
-            <a:avLst>
-              <a:gd name="adj" fmla="val 4000"/>
-            </a:avLst>
-          </a:prstGeom>
-          <a:solidFill>
-            <a:srgbClr val="282C34"/>
-          </a:solidFill>
-          <a:ln>
-            <a:solidFill>
-              <a:srgbClr val="111318"/>
-            </a:solidFill>
-          </a:ln>
-          <a:effectLst/>
-        </p:spPr>
-        <p:style>
-          <a:lnRef idx="1">
-            <a:schemeClr val="accent1"/>
-          </a:lnRef>
-          <a:fillRef idx="3">
-            <a:schemeClr val="accent1"/>
-          </a:fillRef>
-          <a:effectRef idx="2">
-            <a:schemeClr val="accent1"/>
-          </a:effectRef>
-          <a:fontRef idx="minor">
-            <a:schemeClr val="lt1"/>
-          </a:fontRef>
-        </p:style>
-        <p:txBody>
-          <a:bodyPr rtlCol="0" anchor="t" wrap="square" lIns="228600" rIns="228600" tIns="164592" bIns="164592"/>
-          <a:lstStyle/>
-          <a:p>
-            <a:pPr algn="l">
-              <a:spcAft>
-                <a:spcPts val="200"/>
-              </a:spcAft>
-            </a:pPr>
-            <a:r>
-              <a:rPr sz="1450">
-                <a:solidFill>
-                  <a:srgbClr val="E6E6E6"/>
-                </a:solidFill>
-                <a:latin typeface="Consolas"/>
-              </a:rPr>
-              <a:t>py padb_convert_site.py --pod MyPod.pod --to AMC2</a:t>
-            </a:r>
-          </a:p>
-        </p:txBody>
-      </p:sp>
-      <p:sp>
-        <p:nvSpPr>
-          <p:cNvPr id="10" name="Rounded Rectangle 9"/>
-          <p:cNvSpPr/>
-          <p:nvPr/>
-        </p:nvSpPr>
-        <p:spPr>
-          <a:xfrm>
-            <a:off x="548640" y="2606040"/>
-            <a:ext cx="11064240" cy="2286000"/>
-          </a:xfrm>
-          <a:prstGeom prst="roundRect">
-            <a:avLst>
-              <a:gd name="adj" fmla="val 4000"/>
-            </a:avLst>
-          </a:prstGeom>
-          <a:solidFill>
-            <a:srgbClr val="282C34"/>
-          </a:solidFill>
-          <a:ln>
-            <a:solidFill>
-              <a:srgbClr val="111318"/>
-            </a:solidFill>
-          </a:ln>
-          <a:effectLst/>
-        </p:spPr>
-        <p:style>
-          <a:lnRef idx="1">
-            <a:schemeClr val="accent1"/>
-          </a:lnRef>
-          <a:fillRef idx="3">
-            <a:schemeClr val="accent1"/>
-          </a:fillRef>
-          <a:effectRef idx="2">
-            <a:schemeClr val="accent1"/>
-          </a:effectRef>
-          <a:fontRef idx="minor">
-            <a:schemeClr val="lt1"/>
-          </a:fontRef>
-        </p:style>
-        <p:txBody>
-          <a:bodyPr rtlCol="0" anchor="t" wrap="square" lIns="228600" rIns="228600" tIns="164592" bIns="164592"/>
-          <a:lstStyle/>
-          <a:p>
-            <a:pPr algn="l">
-              <a:spcAft>
-                <a:spcPts val="200"/>
-              </a:spcAft>
-            </a:pPr>
-            <a:r>
-              <a:rPr sz="1350">
-                <a:solidFill>
-                  <a:srgbClr val="E6E6E6"/>
-                </a:solidFill>
-                <a:latin typeface="Consolas"/>
-              </a:rPr>
-              <a:t>Wrote MyPod-AMC2.pod  (SantaRosa -&gt; AMC2)</a:t>
-            </a:r>
-          </a:p>
-          <a:p>
-            <a:pPr algn="l">
-              <a:spcAft>
-                <a:spcPts val="200"/>
-              </a:spcAft>
-            </a:pPr>
-            <a:r>
-              <a:rPr sz="1350">
-                <a:solidFill>
-                  <a:srgbClr val="E6E6E6"/>
-                </a:solidFill>
-                <a:latin typeface="Consolas"/>
-              </a:rPr>
-              <a:t>  Device_Server -&gt; PADB ORACLE AMC2</a:t>
-            </a:r>
-          </a:p>
-          <a:p>
-            <a:pPr algn="l">
-              <a:spcAft>
-                <a:spcPts val="200"/>
-              </a:spcAft>
-            </a:pPr>
-            <a:r>
-              <a:rPr sz="1350">
-                <a:solidFill>
-                  <a:srgbClr val="E6E6E6"/>
-                </a:solidFill>
-                <a:latin typeface="Consolas"/>
-              </a:rPr>
-              <a:t>  Device_Database -&gt; GALLEON_1</a:t>
-            </a:r>
-          </a:p>
-          <a:p>
-            <a:pPr algn="l">
-              <a:spcAft>
-                <a:spcPts val="200"/>
-              </a:spcAft>
-            </a:pPr>
-            <a:r>
-              <a:rPr sz="1350">
-                <a:solidFill>
-                  <a:srgbClr val="E6E6E6"/>
-                </a:solidFill>
-                <a:latin typeface="Consolas"/>
-              </a:rPr>
-              <a:t>  AnalyticName 'Leveled Linear' -&gt; 'Leveled Linear AMC2'</a:t>
-            </a:r>
-          </a:p>
-          <a:p>
-            <a:pPr algn="l">
-              <a:spcAft>
-                <a:spcPts val="200"/>
-              </a:spcAft>
-            </a:pPr>
-            <a:r>
-              <a:rPr sz="1350">
-                <a:solidFill>
-                  <a:srgbClr val="E6E6E6"/>
-                </a:solidFill>
-                <a:latin typeface="Consolas"/>
-              </a:rPr>
-              <a:t>  OutputConfig_OutputFile '..._Linear' -&gt; '..._Linear_AMC2'</a:t>
-            </a:r>
-          </a:p>
-          <a:p>
-            <a:pPr algn="l">
-              <a:spcAft>
-                <a:spcPts val="200"/>
-              </a:spcAft>
-            </a:pPr>
-            <a:r>
-              <a:rPr sz="1350">
-                <a:solidFill>
-                  <a:srgbClr val="E6E6E6"/>
-                </a:solidFill>
-                <a:latin typeface="Consolas"/>
-              </a:rPr>
-              <a:t>  WARNING: SaoFile now points at 'MyPod-AMC2.sao', which does not</a:t>
-            </a:r>
-          </a:p>
-          <a:p>
-            <a:pPr algn="l">
-              <a:spcAft>
-                <a:spcPts val="200"/>
-              </a:spcAft>
-            </a:pPr>
-            <a:r>
-              <a:rPr sz="1350">
-                <a:solidFill>
-                  <a:srgbClr val="E6E6E6"/>
-                </a:solidFill>
-                <a:latin typeface="Consolas"/>
-              </a:rPr>
-              <a:t>  exist yet -- supply a real .sao extracted at AMC2 before running</a:t>
-            </a:r>
-          </a:p>
-        </p:txBody>
-      </p:sp>
-      <p:sp>
-        <p:nvSpPr>
-          <p:cNvPr id="11" name="TextBox 10"/>
-          <p:cNvSpPr txBox="1"/>
-          <p:nvPr/>
-        </p:nvSpPr>
-        <p:spPr>
-          <a:xfrm>
-            <a:off x="548640" y="5074920"/>
-            <a:ext cx="11064240" cy="640080"/>
-          </a:xfrm>
-          <a:prstGeom prst="rect">
-            <a:avLst/>
-          </a:prstGeom>
-          <a:noFill/>
-        </p:spPr>
-        <p:txBody>
-          <a:bodyPr wrap="square">
-            <a:spAutoFit/>
-          </a:bodyPr>
-          <a:lstStyle/>
+              <a:t>•  Only works when Claude Code's working directory is inside the repo</a:t>
+            </a:r>
+          </a:p>
+          <a:p>
+            <a:pPr lvl="1">
+              <a:spcAft>
+                <a:spcPts val="600"/>
+              </a:spcAft>
+            </a:pPr>
+            <a:r>
+              <a:rPr sz="1600">
+                <a:solidFill>
+                  <a:srgbClr val="555555"/>
+                </a:solidFill>
+                <a:latin typeface="Segoe UI"/>
+              </a:rPr>
+              <a:t>–  (e.g. C:\apps\padb\tools) — that's what makes it "repo-scoped"</a:t>
+            </a:r>
+          </a:p>
           <a:p>
             <a:pPr>
               <a:spcAft>
@@ -15400,13 +15183,13 @@
               </a:spcAft>
             </a:pPr>
             <a:r>
-              <a:rPr sz="1500">
+              <a:rPr sz="1800">
                 <a:solidFill>
                   <a:srgbClr val="1B2A4A"/>
                 </a:solidFill>
                 <a:latin typeface="Segoe UI"/>
               </a:rPr>
-              <a:t>•  Source pod is never touched. Round-trip verified byte-identical</a:t>
+              <a:t>•  Use it when you're: onboarding a new pod, debugging a plot feature,</a:t>
             </a:r>
           </a:p>
           <a:p>
@@ -15416,13 +15199,13 @@
               </a:spcAft>
             </a:pPr>
             <a:r>
-              <a:rPr sz="1300">
+              <a:rPr sz="1600">
                 <a:solidFill>
                   <a:srgbClr val="555555"/>
                 </a:solidFill>
                 <a:latin typeface="Segoe UI"/>
               </a:rPr>
-              <a:t>–  (SantaRosa -&gt; AMC2 -&gt; SantaRosa reproduces the original exactly)</a:t>
+              <a:t>–  reviewing generated HTML, or just orienting yourself in a new session</a:t>
             </a:r>
           </a:p>
         </p:txBody>
@@ -15520,7 +15303,7 @@
               </a:defRPr>
             </a:pPr>
             <a:r>
-              <a:t>Multi-Site Testing</a:t>
+              <a:t>Tutorial 3 — /padb-tools</a:t>
             </a:r>
           </a:p>
         </p:txBody>
@@ -15556,7 +15339,7 @@
               </a:defRPr>
             </a:pPr>
             <a:r>
-              <a:t>padb_convert_site.py — Converting a Job</a:t>
+              <a:t>What It Actually Tells You</a:t>
             </a:r>
           </a:p>
         </p:txBody>
@@ -15669,75 +15452,14 @@
       </p:sp>
       <p:sp>
         <p:nvSpPr>
-          <p:cNvPr id="8" name="Rounded Rectangle 7"/>
-          <p:cNvSpPr/>
-          <p:nvPr/>
-        </p:nvSpPr>
-        <p:spPr>
-          <a:xfrm>
-            <a:off x="548640" y="1691640"/>
-            <a:ext cx="11064240" cy="502920"/>
-          </a:xfrm>
-          <a:prstGeom prst="roundRect">
-            <a:avLst>
-              <a:gd name="adj" fmla="val 4000"/>
-            </a:avLst>
-          </a:prstGeom>
-          <a:solidFill>
-            <a:srgbClr val="282C34"/>
-          </a:solidFill>
-          <a:ln>
-            <a:solidFill>
-              <a:srgbClr val="111318"/>
-            </a:solidFill>
-          </a:ln>
-          <a:effectLst/>
-        </p:spPr>
-        <p:style>
-          <a:lnRef idx="1">
-            <a:schemeClr val="accent1"/>
-          </a:lnRef>
-          <a:fillRef idx="3">
-            <a:schemeClr val="accent1"/>
-          </a:fillRef>
-          <a:effectRef idx="2">
-            <a:schemeClr val="accent1"/>
-          </a:effectRef>
-          <a:fontRef idx="minor">
-            <a:schemeClr val="lt1"/>
-          </a:fontRef>
-        </p:style>
-        <p:txBody>
-          <a:bodyPr rtlCol="0" anchor="t" wrap="square" lIns="228600" rIns="228600" tIns="164592" bIns="164592"/>
-          <a:lstStyle/>
-          <a:p>
-            <a:pPr algn="l">
-              <a:spcAft>
-                <a:spcPts val="200"/>
-              </a:spcAft>
-            </a:pPr>
-            <a:r>
-              <a:rPr sz="1450">
-                <a:solidFill>
-                  <a:srgbClr val="E6E6E6"/>
-                </a:solidFill>
-                <a:latin typeface="Consolas"/>
-              </a:rPr>
-              <a:t>py padb_convert_site.py --job my_run_job.json --to AMC2</a:t>
-            </a:r>
-          </a:p>
-        </p:txBody>
-      </p:sp>
-      <p:sp>
-        <p:nvSpPr>
-          <p:cNvPr id="9" name="TextBox 8"/>
-          <p:cNvSpPr txBox="1"/>
-          <p:nvPr/>
-        </p:nvSpPr>
-        <p:spPr>
-          <a:xfrm>
-            <a:off x="548640" y="2377440"/>
-            <a:ext cx="11064240" cy="365760"/>
+          <p:cNvPr id="8" name="TextBox 7"/>
+          <p:cNvSpPr txBox="1"/>
+          <p:nvPr/>
+        </p:nvSpPr>
+        <p:spPr>
+          <a:xfrm>
+            <a:off x="548640" y="1645920"/>
+            <a:ext cx="11064240" cy="4754880"/>
           </a:xfrm>
           <a:prstGeom prst="rect">
             <a:avLst/>
@@ -15762,173 +15484,73 @@
                 </a:solidFill>
                 <a:latin typeface="Segoe UI"/>
               </a:rPr>
-              <a:t>•  Repoints "pod" and swaps the pod stem everywhere it appears:</a:t>
-            </a:r>
-          </a:p>
-        </p:txBody>
-      </p:sp>
-      <p:sp>
-        <p:nvSpPr>
-          <p:cNvPr id="10" name="Rounded Rectangle 9"/>
-          <p:cNvSpPr/>
-          <p:nvPr/>
-        </p:nvSpPr>
-        <p:spPr>
-          <a:xfrm>
-            <a:off x="548640" y="2743200"/>
-            <a:ext cx="11064240" cy="2103120"/>
-          </a:xfrm>
-          <a:prstGeom prst="roundRect">
-            <a:avLst>
-              <a:gd name="adj" fmla="val 4000"/>
-            </a:avLst>
-          </a:prstGeom>
-          <a:solidFill>
-            <a:srgbClr val="282C34"/>
-          </a:solidFill>
-          <a:ln>
-            <a:solidFill>
-              <a:srgbClr val="111318"/>
-            </a:solidFill>
-          </a:ln>
-          <a:effectLst/>
-        </p:spPr>
-        <p:style>
-          <a:lnRef idx="1">
-            <a:schemeClr val="accent1"/>
-          </a:lnRef>
-          <a:fillRef idx="3">
-            <a:schemeClr val="accent1"/>
-          </a:fillRef>
-          <a:effectRef idx="2">
-            <a:schemeClr val="accent1"/>
-          </a:effectRef>
-          <a:fontRef idx="minor">
-            <a:schemeClr val="lt1"/>
-          </a:fontRef>
-        </p:style>
-        <p:txBody>
-          <a:bodyPr rtlCol="0" anchor="t" wrap="square" lIns="228600" rIns="228600" tIns="164592" bIns="164592"/>
-          <a:lstStyle/>
-          <a:p>
-            <a:pPr algn="l">
-              <a:spcAft>
-                <a:spcPts val="200"/>
-              </a:spcAft>
-            </a:pPr>
-            <a:r>
-              <a:rPr sz="1350">
-                <a:solidFill>
-                  <a:srgbClr val="E6E6E6"/>
-                </a:solidFill>
-                <a:latin typeface="Consolas"/>
-              </a:rPr>
-              <a:t>Converted pod not found yet -- creating it first: ...</a:t>
-            </a:r>
-          </a:p>
-          <a:p>
-            <a:pPr algn="l">
-              <a:spcAft>
-                <a:spcPts val="200"/>
-              </a:spcAft>
-            </a:pPr>
-            <a:r>
-              <a:rPr sz="1350">
-                <a:solidFill>
-                  <a:srgbClr val="E6E6E6"/>
-                </a:solidFill>
-                <a:latin typeface="Consolas"/>
-              </a:rPr>
-              <a:t>Wrote MyPod-AMC2_run_job.json  (SantaRosa -&gt; AMC2,</a:t>
-            </a:r>
-          </a:p>
-          <a:p>
-            <a:pPr algn="l">
-              <a:spcAft>
-                <a:spcPts val="200"/>
-              </a:spcAft>
-            </a:pPr>
-            <a:r>
-              <a:rPr sz="1350">
-                <a:solidFill>
-                  <a:srgbClr val="E6E6E6"/>
-                </a:solidFill>
-                <a:latin typeface="Consolas"/>
-              </a:rPr>
-              <a:t>  pod=MyPod-AMC2.pod)</a:t>
-            </a:r>
-          </a:p>
-          <a:p>
-            <a:pPr algn="l">
-              <a:spcAft>
-                <a:spcPts val="200"/>
-              </a:spcAft>
-            </a:pPr>
-            <a:r>
-              <a:rPr sz="1350">
-                <a:solidFill>
-                  <a:srgbClr val="E6E6E6"/>
-                </a:solidFill>
-                <a:latin typeface="Consolas"/>
-              </a:rPr>
-              <a:t>  This is a V2 run job -- also regenerate its plot</a:t>
-            </a:r>
-          </a:p>
-          <a:p>
-            <a:pPr algn="l">
-              <a:spcAft>
-                <a:spcPts val="200"/>
-              </a:spcAft>
-            </a:pPr>
-            <a:r>
-              <a:rPr sz="1350">
-                <a:solidFill>
-                  <a:srgbClr val="E6E6E6"/>
-                </a:solidFill>
-                <a:latin typeface="Consolas"/>
-              </a:rPr>
-              <a:t>  job(s) against the new pod:</a:t>
-            </a:r>
-          </a:p>
-          <a:p>
-            <a:pPr algn="l">
-              <a:spcAft>
-                <a:spcPts val="200"/>
-              </a:spcAft>
-            </a:pPr>
-            <a:r>
-              <a:rPr sz="1350">
-                <a:solidFill>
-                  <a:srgbClr val="E6E6E6"/>
-                </a:solidFill>
-                <a:latin typeface="Consolas"/>
-              </a:rPr>
-              <a:t>    py padb_make_v2_job.py MyPod-AMC2.pod --module &lt;YourModule&gt;</a:t>
-            </a:r>
-          </a:p>
-        </p:txBody>
-      </p:sp>
-      <p:sp>
-        <p:nvSpPr>
-          <p:cNvPr id="11" name="TextBox 10"/>
-          <p:cNvSpPr txBox="1"/>
-          <p:nvPr/>
-        </p:nvSpPr>
-        <p:spPr>
-          <a:xfrm>
-            <a:off x="548640" y="5074920"/>
-            <a:ext cx="11064240" cy="640080"/>
-          </a:xfrm>
-          <a:prstGeom prst="rect">
-            <a:avLst/>
-          </a:prstGeom>
-          <a:noFill/>
-        </p:spPr>
-        <p:txBody>
-          <a:bodyPr wrap="square">
-            <a:spAutoFit/>
-          </a:bodyPr>
-          <a:lstStyle/>
+              <a:t>•  A few of the 13 new-pod checklist items it surfaces immediately:</a:t>
+            </a:r>
+          </a:p>
+          <a:p>
+            <a:pPr lvl="1">
+              <a:spcAft>
+                <a:spcPts val="600"/>
+              </a:spcAft>
+            </a:pPr>
+            <a:r>
+              <a:rPr sz="1500">
+                <a:solidFill>
+                  <a:srgbClr val="555555"/>
+                </a:solidFill>
+                <a:latin typeface="Segoe UI"/>
+              </a:rPr>
+              <a:t>–  TestRun_RunStatus — exit 0 but no CSV? Check the pod's default 'P'-only filter</a:t>
+            </a:r>
+          </a:p>
+          <a:p>
+            <a:pPr lvl="1">
+              <a:spcAft>
+                <a:spcPts val="600"/>
+              </a:spcAft>
+            </a:pPr>
+            <a:r>
+              <a:rPr sz="1500">
+                <a:solidFill>
+                  <a:srgbClr val="555555"/>
+                </a:solidFill>
+                <a:latin typeface="Segoe UI"/>
+              </a:rPr>
+              <a:t>–  Environment_TestStep must be {All} or distribution/env_coverage/summary go empty</a:t>
+            </a:r>
+          </a:p>
+          <a:p>
+            <a:pPr lvl="1">
+              <a:spcAft>
+                <a:spcPts val="600"/>
+              </a:spcAft>
+            </a:pPr>
+            <a:r>
+              <a:rPr sz="1500">
+                <a:solidFill>
+                  <a:srgbClr val="555555"/>
+                </a:solidFill>
+                <a:latin typeface="Segoe UI"/>
+              </a:rPr>
+              <a:t>–  OutputConfig_OutputCSV=False on a Scatter analytic — renders PNG, writes no CSV</a:t>
+            </a:r>
+          </a:p>
+          <a:p>
+            <a:pPr lvl="1">
+              <a:spcAft>
+                <a:spcPts val="600"/>
+              </a:spcAft>
+            </a:pPr>
+            <a:r>
+              <a:rPr sz="1500">
+                <a:solidFill>
+                  <a:srgbClr val="555555"/>
+                </a:solidFill>
+                <a:latin typeface="Segoe UI"/>
+              </a:rPr>
+              <a:t>–  Generated job.json path length — warns before Windows' 260-char limit bites</a:t>
+            </a:r>
+          </a:p>
           <a:p>
             <a:pPr>
               <a:spcAft>
@@ -15936,29 +15558,29 @@
               </a:spcAft>
             </a:pPr>
             <a:r>
+              <a:rPr sz="1700">
+                <a:solidFill>
+                  <a:srgbClr val="1B2A4A"/>
+                </a:solidFill>
+                <a:latin typeface="Segoe UI"/>
+              </a:rPr>
+              <a:t>•  Plus: the architecture one-liner, common JS gotchas, and pointers to the</a:t>
+            </a:r>
+          </a:p>
+          <a:p>
+            <a:pPr lvl="1">
+              <a:spcAft>
+                <a:spcPts val="600"/>
+              </a:spcAft>
+            </a:pPr>
+            <a:r>
               <a:rPr sz="1500">
                 <a:solidFill>
-                  <a:srgbClr val="1B2A4A"/>
-                </a:solidFill>
-                <a:latin typeface="Segoe UI"/>
-              </a:rPr>
-              <a:t>•  Updates results_dir, publish/publish_to, and description too — not just "pod"</a:t>
-            </a:r>
-          </a:p>
-          <a:p>
-            <a:pPr>
-              <a:spcAft>
-                <a:spcPts val="1000"/>
-              </a:spcAft>
-            </a:pPr>
-            <a:r>
-              <a:rPr sz="1500">
-                <a:solidFill>
-                  <a:srgbClr val="1B2A4A"/>
-                </a:solidFill>
-                <a:latin typeface="Segoe UI"/>
-              </a:rPr>
-              <a:t>•  --force overwrites an existing output; --list-sites prints the registry</a:t>
+                  <a:srgbClr val="555555"/>
+                </a:solidFill>
+                <a:latin typeface="Segoe UI"/>
+              </a:rPr>
+              <a:t>–  full doc for anything it only summarizes</a:t>
             </a:r>
           </a:p>
         </p:txBody>
@@ -15996,7 +15618,7 @@
             <a:avLst/>
           </a:prstGeom>
           <a:solidFill>
-            <a:srgbClr val="1B2A4A"/>
+            <a:srgbClr val="FFFFFF"/>
           </a:solidFill>
           <a:ln>
             <a:noFill/>
@@ -16033,8 +15655,8 @@
         </p:nvSpPr>
         <p:spPr>
           <a:xfrm>
-            <a:off x="822960" y="2743200"/>
-            <a:ext cx="10515600" cy="1097280"/>
+            <a:off x="548640" y="320040"/>
+            <a:ext cx="7315200" cy="365760"/>
           </a:xfrm>
           <a:prstGeom prst="rect">
             <a:avLst/>
@@ -16048,14 +15670,15 @@
           <a:lstStyle/>
           <a:p>
             <a:pPr>
-              <a:defRPr sz="4800" b="1">
-                <a:solidFill>
-                  <a:srgbClr val="FFFFFF"/>
-                </a:solidFill>
+              <a:defRPr sz="1600" b="1">
+                <a:solidFill>
+                  <a:srgbClr val="0066CC"/>
+                </a:solidFill>
+                <a:latin typeface="Segoe UI"/>
               </a:defRPr>
             </a:pPr>
             <a:r>
-              <a:t>Questions?</a:t>
+              <a:t>Tutorial 3 — /padb-tools</a:t>
             </a:r>
           </a:p>
         </p:txBody>
@@ -16068,8 +15691,79 @@
         </p:nvSpPr>
         <p:spPr>
           <a:xfrm>
-            <a:off x="822960" y="3749039"/>
-            <a:ext cx="10515600" cy="640080"/>
+            <a:off x="548640" y="658368"/>
+            <a:ext cx="11064240" cy="822960"/>
+          </a:xfrm>
+          <a:prstGeom prst="rect">
+            <a:avLst/>
+          </a:prstGeom>
+          <a:noFill/>
+        </p:spPr>
+        <p:txBody>
+          <a:bodyPr wrap="square">
+            <a:spAutoFit/>
+          </a:bodyPr>
+          <a:lstStyle/>
+          <a:p>
+            <a:pPr>
+              <a:defRPr sz="3200" b="1">
+                <a:solidFill>
+                  <a:srgbClr val="1B2A4A"/>
+                </a:solidFill>
+                <a:latin typeface="Segoe UI"/>
+              </a:defRPr>
+            </a:pPr>
+            <a:r>
+              <a:t>Worked Example: MaxPowerTutorial3.pod</a:t>
+            </a:r>
+          </a:p>
+        </p:txBody>
+      </p:sp>
+      <p:cxnSp>
+        <p:nvCxnSpPr>
+          <p:cNvPr id="5" name="Connector 4"/>
+          <p:cNvCxnSpPr/>
+          <p:nvPr/>
+        </p:nvCxnSpPr>
+        <p:spPr>
+          <a:xfrm>
+            <a:off x="548640" y="1417320"/>
+            <a:ext cx="11091672" cy="0"/>
+          </a:xfrm>
+          <a:prstGeom prst="line">
+            <a:avLst/>
+          </a:prstGeom>
+          <a:ln w="28575">
+            <a:solidFill>
+              <a:srgbClr val="0066CC"/>
+            </a:solidFill>
+          </a:ln>
+        </p:spPr>
+        <p:style>
+          <a:lnRef idx="2">
+            <a:schemeClr val="accent1"/>
+          </a:lnRef>
+          <a:fillRef idx="0">
+            <a:schemeClr val="accent1"/>
+          </a:fillRef>
+          <a:effectRef idx="1">
+            <a:schemeClr val="accent1"/>
+          </a:effectRef>
+          <a:fontRef idx="minor">
+            <a:schemeClr val="tx1"/>
+          </a:fontRef>
+        </p:style>
+      </p:cxnSp>
+      <p:sp>
+        <p:nvSpPr>
+          <p:cNvPr id="6" name="TextBox 5"/>
+          <p:cNvSpPr txBox="1"/>
+          <p:nvPr/>
+        </p:nvSpPr>
+        <p:spPr>
+          <a:xfrm>
+            <a:off x="548640" y="6473952"/>
+            <a:ext cx="8229600" cy="320040"/>
           </a:xfrm>
           <a:prstGeom prst="rect">
             <a:avLst/>
@@ -16083,15 +15777,185 @@
           <a:lstStyle/>
           <a:p>
             <a:pPr>
-              <a:defRPr sz="1800">
-                <a:solidFill>
-                  <a:srgbClr val="9FC5FF"/>
-                </a:solidFill>
-                <a:latin typeface="Consolas"/>
+              <a:defRPr sz="1100">
+                <a:solidFill>
+                  <a:srgbClr val="555555"/>
+                </a:solidFill>
+                <a:latin typeface="Segoe UI"/>
               </a:defRPr>
             </a:pPr>
             <a:r>
-              <a:t>C:\apps\padb\tools   |   /padb-tools</a:t>
+              <a:t>padb-tools</a:t>
+            </a:r>
+          </a:p>
+        </p:txBody>
+      </p:sp>
+      <p:sp>
+        <p:nvSpPr>
+          <p:cNvPr id="7" name="TextBox 6"/>
+          <p:cNvSpPr txBox="1"/>
+          <p:nvPr/>
+        </p:nvSpPr>
+        <p:spPr>
+          <a:xfrm>
+            <a:off x="11338560" y="6473952"/>
+            <a:ext cx="548640" cy="320040"/>
+          </a:xfrm>
+          <a:prstGeom prst="rect">
+            <a:avLst/>
+          </a:prstGeom>
+          <a:noFill/>
+        </p:spPr>
+        <p:txBody>
+          <a:bodyPr wrap="none">
+            <a:spAutoFit/>
+          </a:bodyPr>
+          <a:lstStyle/>
+          <a:p>
+            <a:pPr algn="r">
+              <a:defRPr sz="1100">
+                <a:solidFill>
+                  <a:srgbClr val="555555"/>
+                </a:solidFill>
+              </a:defRPr>
+            </a:pPr>
+            <a:r>
+              <a:t>38</a:t>
+            </a:r>
+          </a:p>
+        </p:txBody>
+      </p:sp>
+      <p:sp>
+        <p:nvSpPr>
+          <p:cNvPr id="8" name="TextBox 7"/>
+          <p:cNvSpPr txBox="1"/>
+          <p:nvPr/>
+        </p:nvSpPr>
+        <p:spPr>
+          <a:xfrm>
+            <a:off x="548640" y="1645920"/>
+            <a:ext cx="11064240" cy="4754880"/>
+          </a:xfrm>
+          <a:prstGeom prst="rect">
+            <a:avLst/>
+          </a:prstGeom>
+          <a:noFill/>
+        </p:spPr>
+        <p:txBody>
+          <a:bodyPr wrap="square">
+            <a:spAutoFit/>
+          </a:bodyPr>
+          <a:lstStyle/>
+          <a:p>
+            <a:pPr>
+              <a:spcAft>
+                <a:spcPts val="1000"/>
+              </a:spcAft>
+            </a:pPr>
+            <a:r>
+              <a:rPr sz="1800">
+                <a:solidFill>
+                  <a:srgbClr val="1B2A4A"/>
+                </a:solidFill>
+                <a:latin typeface="Segoe UI"/>
+              </a:rPr>
+              <a:t>•  You've just been handed MaxPowerTutorial3.pod — 2 analytics, never run before</a:t>
+            </a:r>
+          </a:p>
+          <a:p>
+            <a:pPr>
+              <a:spcAft>
+                <a:spcPts val="1000"/>
+              </a:spcAft>
+            </a:pPr>
+            <a:r>
+              <a:rPr sz="1800">
+                <a:solidFill>
+                  <a:srgbClr val="1B2A4A"/>
+                </a:solidFill>
+                <a:latin typeface="Segoe UI"/>
+              </a:rPr>
+              <a:t>•  Open Claude Code with your working directory inside the padb-tools repo</a:t>
+            </a:r>
+          </a:p>
+          <a:p>
+            <a:pPr>
+              <a:spcAft>
+                <a:spcPts val="1000"/>
+              </a:spcAft>
+            </a:pPr>
+            <a:r>
+              <a:rPr sz="1800">
+                <a:solidFill>
+                  <a:srgbClr val="1B2A4A"/>
+                </a:solidFill>
+                <a:latin typeface="Segoe UI"/>
+              </a:rPr>
+              <a:t>•  Type: /padb-tools</a:t>
+            </a:r>
+          </a:p>
+          <a:p>
+            <a:pPr>
+              <a:spcAft>
+                <a:spcPts val="1000"/>
+              </a:spcAft>
+            </a:pPr>
+            <a:r>
+              <a:rPr sz="1800">
+                <a:solidFill>
+                  <a:srgbClr val="1B2A4A"/>
+                </a:solidFill>
+                <a:latin typeface="Segoe UI"/>
+              </a:rPr>
+              <a:t>•  Ask directly: "Is MaxPowerTutorial3.pod ready to run in Interactive mode?"</a:t>
+            </a:r>
+          </a:p>
+          <a:p>
+            <a:pPr>
+              <a:spcAft>
+                <a:spcPts val="1000"/>
+              </a:spcAft>
+            </a:pPr>
+            <a:r>
+              <a:rPr sz="1800">
+                <a:solidFill>
+                  <a:srgbClr val="1B2A4A"/>
+                </a:solidFill>
+                <a:latin typeface="Segoe UI"/>
+              </a:rPr>
+              <a:t>•  Claude reads the checklist above, then actually inspects the pod file —</a:t>
+            </a:r>
+          </a:p>
+          <a:p>
+            <a:pPr lvl="1">
+              <a:spcAft>
+                <a:spcPts val="600"/>
+              </a:spcAft>
+            </a:pPr>
+            <a:r>
+              <a:rPr sz="1600">
+                <a:solidFill>
+                  <a:srgbClr val="555555"/>
+                </a:solidFill>
+                <a:latin typeface="Segoe UI"/>
+              </a:rPr>
+              <a:t>–  Limits_YLimit, Environment_TestStep, OutputConfig_OutputCSV, Group strings</a:t>
+            </a:r>
+          </a:p>
+          <a:p>
+            <a:pPr>
+              <a:spcAft>
+                <a:spcPts val="1000"/>
+              </a:spcAft>
+            </a:pPr>
+            <a:r>
+              <a:rPr sz="1800">
+                <a:solidFill>
+                  <a:srgbClr val="1B2A4A"/>
+                </a:solidFill>
+                <a:latin typeface="Segoe UI"/>
+              </a:rPr>
+              <a:t>•  You get a direct answer grounded in this pod's real settings, not a guess</a:t>
             </a:r>
           </a:p>
         </p:txBody>
@@ -16129,7 +15993,7 @@
             <a:avLst/>
           </a:prstGeom>
           <a:solidFill>
-            <a:srgbClr val="F2F4F8"/>
+            <a:srgbClr val="FFFFFF"/>
           </a:solidFill>
           <a:ln>
             <a:noFill/>
@@ -16166,8 +16030,8 @@
         </p:nvSpPr>
         <p:spPr>
           <a:xfrm>
-            <a:off x="822960" y="2743200"/>
-            <a:ext cx="10515600" cy="914400"/>
+            <a:off x="548640" y="320040"/>
+            <a:ext cx="7315200" cy="365760"/>
           </a:xfrm>
           <a:prstGeom prst="rect">
             <a:avLst/>
@@ -16181,28 +16045,100 @@
           <a:lstStyle/>
           <a:p>
             <a:pPr>
-              <a:defRPr sz="4400" b="1">
+              <a:defRPr sz="1600" b="1">
+                <a:solidFill>
+                  <a:srgbClr val="0066CC"/>
+                </a:solidFill>
+                <a:latin typeface="Segoe UI"/>
+              </a:defRPr>
+            </a:pPr>
+            <a:r>
+              <a:t>Multi-Site Testing</a:t>
+            </a:r>
+          </a:p>
+        </p:txBody>
+      </p:sp>
+      <p:sp>
+        <p:nvSpPr>
+          <p:cNvPr id="4" name="TextBox 3"/>
+          <p:cNvSpPr txBox="1"/>
+          <p:nvPr/>
+        </p:nvSpPr>
+        <p:spPr>
+          <a:xfrm>
+            <a:off x="548640" y="658368"/>
+            <a:ext cx="11064240" cy="822960"/>
+          </a:xfrm>
+          <a:prstGeom prst="rect">
+            <a:avLst/>
+          </a:prstGeom>
+          <a:noFill/>
+        </p:spPr>
+        <p:txBody>
+          <a:bodyPr wrap="square">
+            <a:spAutoFit/>
+          </a:bodyPr>
+          <a:lstStyle/>
+          <a:p>
+            <a:pPr>
+              <a:defRPr sz="3200" b="1">
                 <a:solidFill>
                   <a:srgbClr val="1B2A4A"/>
                 </a:solidFill>
+                <a:latin typeface="Segoe UI"/>
               </a:defRPr>
             </a:pPr>
             <a:r>
-              <a:t>Appendix</a:t>
-            </a:r>
-          </a:p>
-        </p:txBody>
-      </p:sp>
-      <p:sp>
-        <p:nvSpPr>
-          <p:cNvPr id="4" name="TextBox 3"/>
-          <p:cNvSpPr txBox="1"/>
-          <p:nvPr/>
-        </p:nvSpPr>
-        <p:spPr>
-          <a:xfrm>
-            <a:off x="822960" y="3566160"/>
-            <a:ext cx="10515600" cy="640080"/>
+              <a:t>Same Test, Different Database</a:t>
+            </a:r>
+          </a:p>
+        </p:txBody>
+      </p:sp>
+      <p:cxnSp>
+        <p:nvCxnSpPr>
+          <p:cNvPr id="5" name="Connector 4"/>
+          <p:cNvCxnSpPr/>
+          <p:nvPr/>
+        </p:nvCxnSpPr>
+        <p:spPr>
+          <a:xfrm>
+            <a:off x="548640" y="1417320"/>
+            <a:ext cx="11091672" cy="0"/>
+          </a:xfrm>
+          <a:prstGeom prst="line">
+            <a:avLst/>
+          </a:prstGeom>
+          <a:ln w="28575">
+            <a:solidFill>
+              <a:srgbClr val="0066CC"/>
+            </a:solidFill>
+          </a:ln>
+        </p:spPr>
+        <p:style>
+          <a:lnRef idx="2">
+            <a:schemeClr val="accent1"/>
+          </a:lnRef>
+          <a:fillRef idx="0">
+            <a:schemeClr val="accent1"/>
+          </a:fillRef>
+          <a:effectRef idx="1">
+            <a:schemeClr val="accent1"/>
+          </a:effectRef>
+          <a:fontRef idx="minor">
+            <a:schemeClr val="tx1"/>
+          </a:fontRef>
+        </p:style>
+      </p:cxnSp>
+      <p:sp>
+        <p:nvSpPr>
+          <p:cNvPr id="6" name="TextBox 5"/>
+          <p:cNvSpPr txBox="1"/>
+          <p:nvPr/>
+        </p:nvSpPr>
+        <p:spPr>
+          <a:xfrm>
+            <a:off x="548640" y="6473952"/>
+            <a:ext cx="8229600" cy="320040"/>
           </a:xfrm>
           <a:prstGeom prst="rect">
             <a:avLst/>
@@ -16216,14 +16152,217 @@
           <a:lstStyle/>
           <a:p>
             <a:pPr>
-              <a:defRPr sz="2200">
-                <a:solidFill>
-                  <a:srgbClr val="0066CC"/>
-                </a:solidFill>
+              <a:defRPr sz="1100">
+                <a:solidFill>
+                  <a:srgbClr val="555555"/>
+                </a:solidFill>
+                <a:latin typeface="Segoe UI"/>
               </a:defRPr>
             </a:pPr>
             <a:r>
-              <a:t>Setting Up From Zero — Assumes No Prior Access</a:t>
+              <a:t>padb-tools</a:t>
+            </a:r>
+          </a:p>
+        </p:txBody>
+      </p:sp>
+      <p:sp>
+        <p:nvSpPr>
+          <p:cNvPr id="7" name="TextBox 6"/>
+          <p:cNvSpPr txBox="1"/>
+          <p:nvPr/>
+        </p:nvSpPr>
+        <p:spPr>
+          <a:xfrm>
+            <a:off x="11338560" y="6473952"/>
+            <a:ext cx="548640" cy="320040"/>
+          </a:xfrm>
+          <a:prstGeom prst="rect">
+            <a:avLst/>
+          </a:prstGeom>
+          <a:noFill/>
+        </p:spPr>
+        <p:txBody>
+          <a:bodyPr wrap="none">
+            <a:spAutoFit/>
+          </a:bodyPr>
+          <a:lstStyle/>
+          <a:p>
+            <a:pPr algn="r">
+              <a:defRPr sz="1100">
+                <a:solidFill>
+                  <a:srgbClr val="555555"/>
+                </a:solidFill>
+              </a:defRPr>
+            </a:pPr>
+            <a:r>
+              <a:t>39</a:t>
+            </a:r>
+          </a:p>
+        </p:txBody>
+      </p:sp>
+      <p:sp>
+        <p:nvSpPr>
+          <p:cNvPr id="8" name="TextBox 7"/>
+          <p:cNvSpPr txBox="1"/>
+          <p:nvPr/>
+        </p:nvSpPr>
+        <p:spPr>
+          <a:xfrm>
+            <a:off x="548640" y="1645920"/>
+            <a:ext cx="11064240" cy="4754880"/>
+          </a:xfrm>
+          <a:prstGeom prst="rect">
+            <a:avLst/>
+          </a:prstGeom>
+          <a:noFill/>
+        </p:spPr>
+        <p:txBody>
+          <a:bodyPr wrap="square">
+            <a:spAutoFit/>
+          </a:bodyPr>
+          <a:lstStyle/>
+          <a:p>
+            <a:pPr>
+              <a:spcAft>
+                <a:spcPts val="1000"/>
+              </a:spcAft>
+            </a:pPr>
+            <a:r>
+              <a:rPr sz="1700">
+                <a:solidFill>
+                  <a:srgbClr val="1B2A4A"/>
+                </a:solidFill>
+                <a:latin typeface="Segoe UI"/>
+              </a:rPr>
+              <a:t>•  Malaysia (AMC2) production ramp-up: the same test now also pulls from</a:t>
+            </a:r>
+          </a:p>
+          <a:p>
+            <a:pPr lvl="1">
+              <a:spcAft>
+                <a:spcPts val="600"/>
+              </a:spcAft>
+            </a:pPr>
+            <a:r>
+              <a:rPr sz="1500">
+                <a:solidFill>
+                  <a:srgbClr val="555555"/>
+                </a:solidFill>
+                <a:latin typeface="Segoe UI"/>
+              </a:rPr>
+              <a:t>–  AMC2's own PADB Oracle database, not just Santa Rosa's</a:t>
+            </a:r>
+          </a:p>
+          <a:p>
+            <a:pPr>
+              <a:spcAft>
+                <a:spcPts val="1000"/>
+              </a:spcAft>
+            </a:pPr>
+            <a:r>
+              <a:rPr sz="1700">
+                <a:solidFill>
+                  <a:srgbClr val="1B2A4A"/>
+                </a:solidFill>
+                <a:latin typeface="Segoe UI"/>
+              </a:rPr>
+              <a:t>•  Comparing a real Santa Rosa pod against its AMC2 counterpart: the only</a:t>
+            </a:r>
+          </a:p>
+          <a:p>
+            <a:pPr lvl="1">
+              <a:spcAft>
+                <a:spcPts val="600"/>
+              </a:spcAft>
+            </a:pPr>
+            <a:r>
+              <a:rPr sz="1500">
+                <a:solidFill>
+                  <a:srgbClr val="555555"/>
+                </a:solidFill>
+                <a:latin typeface="Segoe UI"/>
+              </a:rPr>
+              <a:t>–  genuine differences are Device_Server and Device_Database in [Extract]</a:t>
+            </a:r>
+          </a:p>
+          <a:p>
+            <a:pPr>
+              <a:spcAft>
+                <a:spcPts val="1000"/>
+              </a:spcAft>
+            </a:pPr>
+            <a:r>
+              <a:rPr sz="1700">
+                <a:solidFill>
+                  <a:srgbClr val="1B2A4A"/>
+                </a:solidFill>
+                <a:latin typeface="Segoe UI"/>
+              </a:rPr>
+              <a:t>•  Every AnalyticName and OutputConfig_OutputFile is otherwise identical —</a:t>
+            </a:r>
+          </a:p>
+          <a:p>
+            <a:pPr lvl="1">
+              <a:spcAft>
+                <a:spcPts val="600"/>
+              </a:spcAft>
+            </a:pPr>
+            <a:r>
+              <a:rPr sz="1500">
+                <a:solidFill>
+                  <a:srgbClr val="555555"/>
+                </a:solidFill>
+                <a:latin typeface="Segoe UI"/>
+              </a:rPr>
+              <a:t>–  running both site variants writes identically-named CSVs</a:t>
+            </a:r>
+          </a:p>
+          <a:p>
+            <a:pPr>
+              <a:spcAft>
+                <a:spcPts val="1000"/>
+              </a:spcAft>
+            </a:pPr>
+            <a:r>
+              <a:rPr sz="1700">
+                <a:solidFill>
+                  <a:srgbClr val="1B2A4A"/>
+                </a:solidFill>
+                <a:latin typeface="Segoe UI"/>
+              </a:rPr>
+              <a:t>•  Risk: point both at a shared results/publish location and one silently</a:t>
+            </a:r>
+          </a:p>
+          <a:p>
+            <a:pPr lvl="1">
+              <a:spcAft>
+                <a:spcPts val="600"/>
+              </a:spcAft>
+            </a:pPr>
+            <a:r>
+              <a:rPr sz="1500">
+                <a:solidFill>
+                  <a:srgbClr val="555555"/>
+                </a:solidFill>
+                <a:latin typeface="Segoe UI"/>
+              </a:rPr>
+              <a:t>–  overwrites the other — same class of problem unique_output_filenames</a:t>
+            </a:r>
+          </a:p>
+          <a:p>
+            <a:pPr lvl="1">
+              <a:spcAft>
+                <a:spcPts val="600"/>
+              </a:spcAft>
+            </a:pPr>
+            <a:r>
+              <a:rPr sz="1500">
+                <a:solidFill>
+                  <a:srgbClr val="555555"/>
+                </a:solidFill>
+                <a:latin typeface="Segoe UI"/>
+              </a:rPr>
+              <a:t>–  solves within one pod, but across two site-variant pods instead</a:t>
             </a:r>
           </a:p>
         </p:txBody>
@@ -17125,7 +17264,7 @@
               </a:defRPr>
             </a:pPr>
             <a:r>
-              <a:t>Appendix</a:t>
+              <a:t>Multi-Site Testing</a:t>
             </a:r>
           </a:p>
         </p:txBody>
@@ -17161,7 +17300,7 @@
               </a:defRPr>
             </a:pPr>
             <a:r>
-              <a:t>Getting the Code</a:t>
+              <a:t>padb_convert_site.py — Converting a Pod</a:t>
             </a:r>
           </a:p>
         </p:txBody>
@@ -17267,7 +17406,7 @@
               </a:defRPr>
             </a:pPr>
             <a:r>
-              <a:t>39</a:t>
+              <a:t>40</a:t>
             </a:r>
           </a:p>
         </p:txBody>
@@ -17280,7 +17419,7 @@
         </p:nvSpPr>
         <p:spPr>
           <a:xfrm>
-            <a:off x="548640" y="1691640"/>
+            <a:off x="548640" y="1600200"/>
             <a:ext cx="11064240" cy="365760"/>
           </a:xfrm>
           <a:prstGeom prst="rect">
@@ -17300,13 +17439,13 @@
               </a:spcAft>
             </a:pPr>
             <a:r>
-              <a:rPr sz="1900">
+              <a:rPr sz="1600">
                 <a:solidFill>
                   <a:srgbClr val="1B2A4A"/>
                 </a:solidFill>
                 <a:latin typeface="Segoe UI"/>
               </a:rPr>
-              <a:t>•  This repo isn't on a company-wide share by default — copy it from:</a:t>
+              <a:t>•  Site registry lives in padb_sites.json — add a new site there, no code changes:</a:t>
             </a:r>
           </a:p>
         </p:txBody>
@@ -17319,7 +17458,7 @@
         </p:nvSpPr>
         <p:spPr>
           <a:xfrm>
-            <a:off x="548640" y="2103120"/>
+            <a:off x="548640" y="1965960"/>
             <a:ext cx="11064240" cy="502920"/>
           </a:xfrm>
           <a:prstGeom prst="roundRect">
@@ -17361,27 +17500,184 @@
               </a:spcAft>
             </a:pPr>
             <a:r>
+              <a:rPr sz="1450">
+                <a:solidFill>
+                  <a:srgbClr val="E6E6E6"/>
+                </a:solidFill>
+                <a:latin typeface="Consolas"/>
+              </a:rPr>
+              <a:t>py padb_convert_site.py --pod MyPod.pod --to AMC2</a:t>
+            </a:r>
+          </a:p>
+        </p:txBody>
+      </p:sp>
+      <p:sp>
+        <p:nvSpPr>
+          <p:cNvPr id="10" name="Rounded Rectangle 9"/>
+          <p:cNvSpPr/>
+          <p:nvPr/>
+        </p:nvSpPr>
+        <p:spPr>
+          <a:xfrm>
+            <a:off x="548640" y="2606040"/>
+            <a:ext cx="11064240" cy="2286000"/>
+          </a:xfrm>
+          <a:prstGeom prst="roundRect">
+            <a:avLst>
+              <a:gd name="adj" fmla="val 4000"/>
+            </a:avLst>
+          </a:prstGeom>
+          <a:solidFill>
+            <a:srgbClr val="282C34"/>
+          </a:solidFill>
+          <a:ln>
+            <a:solidFill>
+              <a:srgbClr val="111318"/>
+            </a:solidFill>
+          </a:ln>
+          <a:effectLst/>
+        </p:spPr>
+        <p:style>
+          <a:lnRef idx="1">
+            <a:schemeClr val="accent1"/>
+          </a:lnRef>
+          <a:fillRef idx="3">
+            <a:schemeClr val="accent1"/>
+          </a:fillRef>
+          <a:effectRef idx="2">
+            <a:schemeClr val="accent1"/>
+          </a:effectRef>
+          <a:fontRef idx="minor">
+            <a:schemeClr val="lt1"/>
+          </a:fontRef>
+        </p:style>
+        <p:txBody>
+          <a:bodyPr rtlCol="0" anchor="t" wrap="square" lIns="228600" rIns="228600" tIns="164592" bIns="164592"/>
+          <a:lstStyle/>
+          <a:p>
+            <a:pPr algn="l">
+              <a:spcAft>
+                <a:spcPts val="200"/>
+              </a:spcAft>
+            </a:pPr>
+            <a:r>
               <a:rPr sz="1350">
                 <a:solidFill>
                   <a:srgbClr val="E6E6E6"/>
                 </a:solidFill>
                 <a:latin typeface="Consolas"/>
               </a:rPr>
-              <a:t>\\srsnas01.srs.is.keysight.com\prod\MIDRF3\SG6311A\Padb-tools\tools</a:t>
-            </a:r>
-          </a:p>
-        </p:txBody>
-      </p:sp>
-      <p:sp>
-        <p:nvSpPr>
-          <p:cNvPr id="10" name="TextBox 9"/>
-          <p:cNvSpPr txBox="1"/>
-          <p:nvPr/>
-        </p:nvSpPr>
-        <p:spPr>
-          <a:xfrm>
-            <a:off x="548640" y="2788920"/>
-            <a:ext cx="11064240" cy="365760"/>
+              <a:t>Wrote MyPod-AMC2.pod  (SantaRosa -&gt; AMC2)</a:t>
+            </a:r>
+          </a:p>
+          <a:p>
+            <a:pPr algn="l">
+              <a:spcAft>
+                <a:spcPts val="200"/>
+              </a:spcAft>
+            </a:pPr>
+            <a:r>
+              <a:rPr sz="1350">
+                <a:solidFill>
+                  <a:srgbClr val="E6E6E6"/>
+                </a:solidFill>
+                <a:latin typeface="Consolas"/>
+              </a:rPr>
+              <a:t>  Device_Server -&gt; PADB ORACLE AMC2</a:t>
+            </a:r>
+          </a:p>
+          <a:p>
+            <a:pPr algn="l">
+              <a:spcAft>
+                <a:spcPts val="200"/>
+              </a:spcAft>
+            </a:pPr>
+            <a:r>
+              <a:rPr sz="1350">
+                <a:solidFill>
+                  <a:srgbClr val="E6E6E6"/>
+                </a:solidFill>
+                <a:latin typeface="Consolas"/>
+              </a:rPr>
+              <a:t>  Device_Database -&gt; GALLEON_1</a:t>
+            </a:r>
+          </a:p>
+          <a:p>
+            <a:pPr algn="l">
+              <a:spcAft>
+                <a:spcPts val="200"/>
+              </a:spcAft>
+            </a:pPr>
+            <a:r>
+              <a:rPr sz="1350">
+                <a:solidFill>
+                  <a:srgbClr val="E6E6E6"/>
+                </a:solidFill>
+                <a:latin typeface="Consolas"/>
+              </a:rPr>
+              <a:t>  AnalyticName 'Leveled Linear' -&gt; 'Leveled Linear AMC2'</a:t>
+            </a:r>
+          </a:p>
+          <a:p>
+            <a:pPr algn="l">
+              <a:spcAft>
+                <a:spcPts val="200"/>
+              </a:spcAft>
+            </a:pPr>
+            <a:r>
+              <a:rPr sz="1350">
+                <a:solidFill>
+                  <a:srgbClr val="E6E6E6"/>
+                </a:solidFill>
+                <a:latin typeface="Consolas"/>
+              </a:rPr>
+              <a:t>  OutputConfig_OutputFile '..._Linear' -&gt; '..._Linear_AMC2'</a:t>
+            </a:r>
+          </a:p>
+          <a:p>
+            <a:pPr algn="l">
+              <a:spcAft>
+                <a:spcPts val="200"/>
+              </a:spcAft>
+            </a:pPr>
+            <a:r>
+              <a:rPr sz="1350">
+                <a:solidFill>
+                  <a:srgbClr val="E6E6E6"/>
+                </a:solidFill>
+                <a:latin typeface="Consolas"/>
+              </a:rPr>
+              <a:t>  WARNING: SaoFile now points at 'MyPod-AMC2.sao', which does not</a:t>
+            </a:r>
+          </a:p>
+          <a:p>
+            <a:pPr algn="l">
+              <a:spcAft>
+                <a:spcPts val="200"/>
+              </a:spcAft>
+            </a:pPr>
+            <a:r>
+              <a:rPr sz="1350">
+                <a:solidFill>
+                  <a:srgbClr val="E6E6E6"/>
+                </a:solidFill>
+                <a:latin typeface="Consolas"/>
+              </a:rPr>
+              <a:t>  exist yet -- supply a real .sao extracted at AMC2 before running</a:t>
+            </a:r>
+          </a:p>
+        </p:txBody>
+      </p:sp>
+      <p:sp>
+        <p:nvSpPr>
+          <p:cNvPr id="11" name="TextBox 10"/>
+          <p:cNvSpPr txBox="1"/>
+          <p:nvPr/>
+        </p:nvSpPr>
+        <p:spPr>
+          <a:xfrm>
+            <a:off x="548640" y="5074920"/>
+            <a:ext cx="11064240" cy="640080"/>
           </a:xfrm>
           <a:prstGeom prst="rect">
             <a:avLst/>
@@ -17400,52 +17696,13 @@
               </a:spcAft>
             </a:pPr>
             <a:r>
-              <a:rPr sz="1800">
+              <a:rPr sz="1500">
                 <a:solidFill>
                   <a:srgbClr val="1B2A4A"/>
                 </a:solidFill>
                 <a:latin typeface="Segoe UI"/>
               </a:rPr>
-              <a:t>•  Copy that whole "tools" folder to a local path, e.g. C:\apps\padb\tools</a:t>
-            </a:r>
-          </a:p>
-        </p:txBody>
-      </p:sp>
-      <p:sp>
-        <p:nvSpPr>
-          <p:cNvPr id="11" name="TextBox 10"/>
-          <p:cNvSpPr txBox="1"/>
-          <p:nvPr/>
-        </p:nvSpPr>
-        <p:spPr>
-          <a:xfrm>
-            <a:off x="548640" y="3429000"/>
-            <a:ext cx="11064240" cy="914400"/>
-          </a:xfrm>
-          <a:prstGeom prst="rect">
-            <a:avLst/>
-          </a:prstGeom>
-          <a:noFill/>
-        </p:spPr>
-        <p:txBody>
-          <a:bodyPr wrap="square">
-            <a:spAutoFit/>
-          </a:bodyPr>
-          <a:lstStyle/>
-          <a:p>
-            <a:pPr>
-              <a:spcAft>
-                <a:spcPts val="1000"/>
-              </a:spcAft>
-            </a:pPr>
-            <a:r>
-              <a:rPr sz="1700">
-                <a:solidFill>
-                  <a:srgbClr val="1B2A4A"/>
-                </a:solidFill>
-                <a:latin typeface="Segoe UI"/>
-              </a:rPr>
-              <a:t>•  padb_batch.py is bundled directly inside the tools folder (added 2026-08-05) —</a:t>
+              <a:t>•  Source pod is never touched. Round-trip verified byte-identical</a:t>
             </a:r>
           </a:p>
           <a:p>
@@ -17455,52 +17712,13 @@
               </a:spcAft>
             </a:pPr>
             <a:r>
-              <a:rPr sz="1500">
+              <a:rPr sz="1300">
                 <a:solidFill>
                   <a:srgbClr val="555555"/>
                 </a:solidFill>
                 <a:latin typeface="Segoe UI"/>
               </a:rPr>
-              <a:t>–  no separate dependency to track down; the whole repo is self-contained</a:t>
-            </a:r>
-          </a:p>
-        </p:txBody>
-      </p:sp>
-      <p:sp>
-        <p:nvSpPr>
-          <p:cNvPr id="12" name="TextBox 11"/>
-          <p:cNvSpPr txBox="1"/>
-          <p:nvPr/>
-        </p:nvSpPr>
-        <p:spPr>
-          <a:xfrm>
-            <a:off x="548640" y="4480560"/>
-            <a:ext cx="11064240" cy="457200"/>
-          </a:xfrm>
-          <a:prstGeom prst="rect">
-            <a:avLst/>
-          </a:prstGeom>
-          <a:noFill/>
-        </p:spPr>
-        <p:txBody>
-          <a:bodyPr wrap="square">
-            <a:spAutoFit/>
-          </a:bodyPr>
-          <a:lstStyle/>
-          <a:p>
-            <a:pPr>
-              <a:spcAft>
-                <a:spcPts val="1000"/>
-              </a:spcAft>
-            </a:pPr>
-            <a:r>
-              <a:rPr sz="1650">
-                <a:solidFill>
-                  <a:srgbClr val="1B2A4A"/>
-                </a:solidFill>
-                <a:latin typeface="Segoe UI"/>
-              </a:rPr>
-              <a:t>•  Then follow the Prerequisites and Per-User Config slides earlier in this deck</a:t>
+              <a:t>–  (SantaRosa -&gt; AMC2 -&gt; SantaRosa reproduces the original exactly)</a:t>
             </a:r>
           </a:p>
         </p:txBody>
@@ -17598,7 +17816,7 @@
               </a:defRPr>
             </a:pPr>
             <a:r>
-              <a:t>Appendix</a:t>
+              <a:t>Multi-Site Testing</a:t>
             </a:r>
           </a:p>
         </p:txBody>
@@ -17634,7 +17852,7 @@
               </a:defRPr>
             </a:pPr>
             <a:r>
-              <a:t>First Commands to Verify Your Setup</a:t>
+              <a:t>padb_convert_site.py — Converting a Job</a:t>
             </a:r>
           </a:p>
         </p:txBody>
@@ -17740,7 +17958,1281 @@
               </a:defRPr>
             </a:pPr>
             <a:r>
-              <a:t>40</a:t>
+              <a:t>41</a:t>
+            </a:r>
+          </a:p>
+        </p:txBody>
+      </p:sp>
+      <p:sp>
+        <p:nvSpPr>
+          <p:cNvPr id="8" name="Rounded Rectangle 7"/>
+          <p:cNvSpPr/>
+          <p:nvPr/>
+        </p:nvSpPr>
+        <p:spPr>
+          <a:xfrm>
+            <a:off x="548640" y="1691640"/>
+            <a:ext cx="11064240" cy="502920"/>
+          </a:xfrm>
+          <a:prstGeom prst="roundRect">
+            <a:avLst>
+              <a:gd name="adj" fmla="val 4000"/>
+            </a:avLst>
+          </a:prstGeom>
+          <a:solidFill>
+            <a:srgbClr val="282C34"/>
+          </a:solidFill>
+          <a:ln>
+            <a:solidFill>
+              <a:srgbClr val="111318"/>
+            </a:solidFill>
+          </a:ln>
+          <a:effectLst/>
+        </p:spPr>
+        <p:style>
+          <a:lnRef idx="1">
+            <a:schemeClr val="accent1"/>
+          </a:lnRef>
+          <a:fillRef idx="3">
+            <a:schemeClr val="accent1"/>
+          </a:fillRef>
+          <a:effectRef idx="2">
+            <a:schemeClr val="accent1"/>
+          </a:effectRef>
+          <a:fontRef idx="minor">
+            <a:schemeClr val="lt1"/>
+          </a:fontRef>
+        </p:style>
+        <p:txBody>
+          <a:bodyPr rtlCol="0" anchor="t" wrap="square" lIns="228600" rIns="228600" tIns="164592" bIns="164592"/>
+          <a:lstStyle/>
+          <a:p>
+            <a:pPr algn="l">
+              <a:spcAft>
+                <a:spcPts val="200"/>
+              </a:spcAft>
+            </a:pPr>
+            <a:r>
+              <a:rPr sz="1450">
+                <a:solidFill>
+                  <a:srgbClr val="E6E6E6"/>
+                </a:solidFill>
+                <a:latin typeface="Consolas"/>
+              </a:rPr>
+              <a:t>py padb_convert_site.py --job my_run_job.json --to AMC2</a:t>
+            </a:r>
+          </a:p>
+        </p:txBody>
+      </p:sp>
+      <p:sp>
+        <p:nvSpPr>
+          <p:cNvPr id="9" name="TextBox 8"/>
+          <p:cNvSpPr txBox="1"/>
+          <p:nvPr/>
+        </p:nvSpPr>
+        <p:spPr>
+          <a:xfrm>
+            <a:off x="548640" y="2377440"/>
+            <a:ext cx="11064240" cy="365760"/>
+          </a:xfrm>
+          <a:prstGeom prst="rect">
+            <a:avLst/>
+          </a:prstGeom>
+          <a:noFill/>
+        </p:spPr>
+        <p:txBody>
+          <a:bodyPr wrap="square">
+            <a:spAutoFit/>
+          </a:bodyPr>
+          <a:lstStyle/>
+          <a:p>
+            <a:pPr>
+              <a:spcAft>
+                <a:spcPts val="1000"/>
+              </a:spcAft>
+            </a:pPr>
+            <a:r>
+              <a:rPr sz="1700">
+                <a:solidFill>
+                  <a:srgbClr val="1B2A4A"/>
+                </a:solidFill>
+                <a:latin typeface="Segoe UI"/>
+              </a:rPr>
+              <a:t>•  Repoints "pod" and swaps the pod stem everywhere it appears:</a:t>
+            </a:r>
+          </a:p>
+        </p:txBody>
+      </p:sp>
+      <p:sp>
+        <p:nvSpPr>
+          <p:cNvPr id="10" name="Rounded Rectangle 9"/>
+          <p:cNvSpPr/>
+          <p:nvPr/>
+        </p:nvSpPr>
+        <p:spPr>
+          <a:xfrm>
+            <a:off x="548640" y="2743200"/>
+            <a:ext cx="11064240" cy="2103120"/>
+          </a:xfrm>
+          <a:prstGeom prst="roundRect">
+            <a:avLst>
+              <a:gd name="adj" fmla="val 4000"/>
+            </a:avLst>
+          </a:prstGeom>
+          <a:solidFill>
+            <a:srgbClr val="282C34"/>
+          </a:solidFill>
+          <a:ln>
+            <a:solidFill>
+              <a:srgbClr val="111318"/>
+            </a:solidFill>
+          </a:ln>
+          <a:effectLst/>
+        </p:spPr>
+        <p:style>
+          <a:lnRef idx="1">
+            <a:schemeClr val="accent1"/>
+          </a:lnRef>
+          <a:fillRef idx="3">
+            <a:schemeClr val="accent1"/>
+          </a:fillRef>
+          <a:effectRef idx="2">
+            <a:schemeClr val="accent1"/>
+          </a:effectRef>
+          <a:fontRef idx="minor">
+            <a:schemeClr val="lt1"/>
+          </a:fontRef>
+        </p:style>
+        <p:txBody>
+          <a:bodyPr rtlCol="0" anchor="t" wrap="square" lIns="228600" rIns="228600" tIns="164592" bIns="164592"/>
+          <a:lstStyle/>
+          <a:p>
+            <a:pPr algn="l">
+              <a:spcAft>
+                <a:spcPts val="200"/>
+              </a:spcAft>
+            </a:pPr>
+            <a:r>
+              <a:rPr sz="1350">
+                <a:solidFill>
+                  <a:srgbClr val="E6E6E6"/>
+                </a:solidFill>
+                <a:latin typeface="Consolas"/>
+              </a:rPr>
+              <a:t>Converted pod not found yet -- creating it first: ...</a:t>
+            </a:r>
+          </a:p>
+          <a:p>
+            <a:pPr algn="l">
+              <a:spcAft>
+                <a:spcPts val="200"/>
+              </a:spcAft>
+            </a:pPr>
+            <a:r>
+              <a:rPr sz="1350">
+                <a:solidFill>
+                  <a:srgbClr val="E6E6E6"/>
+                </a:solidFill>
+                <a:latin typeface="Consolas"/>
+              </a:rPr>
+              <a:t>Wrote MyPod-AMC2_run_job.json  (SantaRosa -&gt; AMC2,</a:t>
+            </a:r>
+          </a:p>
+          <a:p>
+            <a:pPr algn="l">
+              <a:spcAft>
+                <a:spcPts val="200"/>
+              </a:spcAft>
+            </a:pPr>
+            <a:r>
+              <a:rPr sz="1350">
+                <a:solidFill>
+                  <a:srgbClr val="E6E6E6"/>
+                </a:solidFill>
+                <a:latin typeface="Consolas"/>
+              </a:rPr>
+              <a:t>  pod=MyPod-AMC2.pod)</a:t>
+            </a:r>
+          </a:p>
+          <a:p>
+            <a:pPr algn="l">
+              <a:spcAft>
+                <a:spcPts val="200"/>
+              </a:spcAft>
+            </a:pPr>
+            <a:r>
+              <a:rPr sz="1350">
+                <a:solidFill>
+                  <a:srgbClr val="E6E6E6"/>
+                </a:solidFill>
+                <a:latin typeface="Consolas"/>
+              </a:rPr>
+              <a:t>  This is a V2 run job -- also regenerate its plot</a:t>
+            </a:r>
+          </a:p>
+          <a:p>
+            <a:pPr algn="l">
+              <a:spcAft>
+                <a:spcPts val="200"/>
+              </a:spcAft>
+            </a:pPr>
+            <a:r>
+              <a:rPr sz="1350">
+                <a:solidFill>
+                  <a:srgbClr val="E6E6E6"/>
+                </a:solidFill>
+                <a:latin typeface="Consolas"/>
+              </a:rPr>
+              <a:t>  job(s) against the new pod:</a:t>
+            </a:r>
+          </a:p>
+          <a:p>
+            <a:pPr algn="l">
+              <a:spcAft>
+                <a:spcPts val="200"/>
+              </a:spcAft>
+            </a:pPr>
+            <a:r>
+              <a:rPr sz="1350">
+                <a:solidFill>
+                  <a:srgbClr val="E6E6E6"/>
+                </a:solidFill>
+                <a:latin typeface="Consolas"/>
+              </a:rPr>
+              <a:t>    py padb_make_v2_job.py MyPod-AMC2.pod --module &lt;YourModule&gt;</a:t>
+            </a:r>
+          </a:p>
+        </p:txBody>
+      </p:sp>
+      <p:sp>
+        <p:nvSpPr>
+          <p:cNvPr id="11" name="TextBox 10"/>
+          <p:cNvSpPr txBox="1"/>
+          <p:nvPr/>
+        </p:nvSpPr>
+        <p:spPr>
+          <a:xfrm>
+            <a:off x="548640" y="5074920"/>
+            <a:ext cx="11064240" cy="640080"/>
+          </a:xfrm>
+          <a:prstGeom prst="rect">
+            <a:avLst/>
+          </a:prstGeom>
+          <a:noFill/>
+        </p:spPr>
+        <p:txBody>
+          <a:bodyPr wrap="square">
+            <a:spAutoFit/>
+          </a:bodyPr>
+          <a:lstStyle/>
+          <a:p>
+            <a:pPr>
+              <a:spcAft>
+                <a:spcPts val="1000"/>
+              </a:spcAft>
+            </a:pPr>
+            <a:r>
+              <a:rPr sz="1500">
+                <a:solidFill>
+                  <a:srgbClr val="1B2A4A"/>
+                </a:solidFill>
+                <a:latin typeface="Segoe UI"/>
+              </a:rPr>
+              <a:t>•  Updates results_dir, publish/publish_to, and description too — not just "pod"</a:t>
+            </a:r>
+          </a:p>
+          <a:p>
+            <a:pPr>
+              <a:spcAft>
+                <a:spcPts val="1000"/>
+              </a:spcAft>
+            </a:pPr>
+            <a:r>
+              <a:rPr sz="1500">
+                <a:solidFill>
+                  <a:srgbClr val="1B2A4A"/>
+                </a:solidFill>
+                <a:latin typeface="Segoe UI"/>
+              </a:rPr>
+              <a:t>•  --force overwrites an existing output; --list-sites prints the registry</a:t>
+            </a:r>
+          </a:p>
+        </p:txBody>
+      </p:sp>
+    </p:spTree>
+  </p:cSld>
+  <p:clrMapOvr>
+    <a:masterClrMapping/>
+  </p:clrMapOvr>
+</p:sld>
+</file>
+
+<file path=ppt/slides/slide42.xml><?xml version="1.0" encoding="utf-8"?>
+<p:sld xmlns:a="http://schemas.openxmlformats.org/drawingml/2006/main" xmlns:p="http://schemas.openxmlformats.org/presentationml/2006/main" xmlns:r="http://schemas.openxmlformats.org/officeDocument/2006/relationships">
+  <p:cSld>
+    <p:spTree>
+      <p:nvGrpSpPr>
+        <p:cNvPr id="1" name=""/>
+        <p:cNvGrpSpPr/>
+        <p:nvPr/>
+      </p:nvGrpSpPr>
+      <p:grpSpPr/>
+      <p:sp>
+        <p:nvSpPr>
+          <p:cNvPr id="2" name="Rectangle 1"/>
+          <p:cNvSpPr/>
+          <p:nvPr/>
+        </p:nvSpPr>
+        <p:spPr>
+          <a:xfrm>
+            <a:off x="0" y="0"/>
+            <a:ext cx="12191695" cy="6858000"/>
+          </a:xfrm>
+          <a:prstGeom prst="rect">
+            <a:avLst/>
+          </a:prstGeom>
+          <a:solidFill>
+            <a:srgbClr val="1B2A4A"/>
+          </a:solidFill>
+          <a:ln>
+            <a:noFill/>
+          </a:ln>
+          <a:effectLst/>
+        </p:spPr>
+        <p:style>
+          <a:lnRef idx="1">
+            <a:schemeClr val="accent1"/>
+          </a:lnRef>
+          <a:fillRef idx="3">
+            <a:schemeClr val="accent1"/>
+          </a:fillRef>
+          <a:effectRef idx="2">
+            <a:schemeClr val="accent1"/>
+          </a:effectRef>
+          <a:fontRef idx="minor">
+            <a:schemeClr val="lt1"/>
+          </a:fontRef>
+        </p:style>
+        <p:txBody>
+          <a:bodyPr rtlCol="0" anchor="ctr"/>
+          <a:lstStyle/>
+          <a:p>
+            <a:pPr algn="ctr"/>
+          </a:p>
+        </p:txBody>
+      </p:sp>
+      <p:sp>
+        <p:nvSpPr>
+          <p:cNvPr id="3" name="TextBox 2"/>
+          <p:cNvSpPr txBox="1"/>
+          <p:nvPr/>
+        </p:nvSpPr>
+        <p:spPr>
+          <a:xfrm>
+            <a:off x="822960" y="2743200"/>
+            <a:ext cx="10515600" cy="1097280"/>
+          </a:xfrm>
+          <a:prstGeom prst="rect">
+            <a:avLst/>
+          </a:prstGeom>
+          <a:noFill/>
+        </p:spPr>
+        <p:txBody>
+          <a:bodyPr wrap="none">
+            <a:spAutoFit/>
+          </a:bodyPr>
+          <a:lstStyle/>
+          <a:p>
+            <a:pPr>
+              <a:defRPr sz="4800" b="1">
+                <a:solidFill>
+                  <a:srgbClr val="FFFFFF"/>
+                </a:solidFill>
+              </a:defRPr>
+            </a:pPr>
+            <a:r>
+              <a:t>Questions?</a:t>
+            </a:r>
+          </a:p>
+        </p:txBody>
+      </p:sp>
+      <p:sp>
+        <p:nvSpPr>
+          <p:cNvPr id="4" name="TextBox 3"/>
+          <p:cNvSpPr txBox="1"/>
+          <p:nvPr/>
+        </p:nvSpPr>
+        <p:spPr>
+          <a:xfrm>
+            <a:off x="822960" y="3749039"/>
+            <a:ext cx="10515600" cy="640080"/>
+          </a:xfrm>
+          <a:prstGeom prst="rect">
+            <a:avLst/>
+          </a:prstGeom>
+          <a:noFill/>
+        </p:spPr>
+        <p:txBody>
+          <a:bodyPr wrap="none">
+            <a:spAutoFit/>
+          </a:bodyPr>
+          <a:lstStyle/>
+          <a:p>
+            <a:pPr>
+              <a:defRPr sz="1800">
+                <a:solidFill>
+                  <a:srgbClr val="9FC5FF"/>
+                </a:solidFill>
+                <a:latin typeface="Consolas"/>
+              </a:defRPr>
+            </a:pPr>
+            <a:r>
+              <a:t>C:\apps\padb\tools   |   /padb-tools</a:t>
+            </a:r>
+          </a:p>
+        </p:txBody>
+      </p:sp>
+    </p:spTree>
+  </p:cSld>
+  <p:clrMapOvr>
+    <a:masterClrMapping/>
+  </p:clrMapOvr>
+</p:sld>
+</file>
+
+<file path=ppt/slides/slide43.xml><?xml version="1.0" encoding="utf-8"?>
+<p:sld xmlns:a="http://schemas.openxmlformats.org/drawingml/2006/main" xmlns:p="http://schemas.openxmlformats.org/presentationml/2006/main" xmlns:r="http://schemas.openxmlformats.org/officeDocument/2006/relationships">
+  <p:cSld>
+    <p:spTree>
+      <p:nvGrpSpPr>
+        <p:cNvPr id="1" name=""/>
+        <p:cNvGrpSpPr/>
+        <p:nvPr/>
+      </p:nvGrpSpPr>
+      <p:grpSpPr/>
+      <p:sp>
+        <p:nvSpPr>
+          <p:cNvPr id="2" name="Rectangle 1"/>
+          <p:cNvSpPr/>
+          <p:nvPr/>
+        </p:nvSpPr>
+        <p:spPr>
+          <a:xfrm>
+            <a:off x="0" y="0"/>
+            <a:ext cx="12191695" cy="6858000"/>
+          </a:xfrm>
+          <a:prstGeom prst="rect">
+            <a:avLst/>
+          </a:prstGeom>
+          <a:solidFill>
+            <a:srgbClr val="F2F4F8"/>
+          </a:solidFill>
+          <a:ln>
+            <a:noFill/>
+          </a:ln>
+          <a:effectLst/>
+        </p:spPr>
+        <p:style>
+          <a:lnRef idx="1">
+            <a:schemeClr val="accent1"/>
+          </a:lnRef>
+          <a:fillRef idx="3">
+            <a:schemeClr val="accent1"/>
+          </a:fillRef>
+          <a:effectRef idx="2">
+            <a:schemeClr val="accent1"/>
+          </a:effectRef>
+          <a:fontRef idx="minor">
+            <a:schemeClr val="lt1"/>
+          </a:fontRef>
+        </p:style>
+        <p:txBody>
+          <a:bodyPr rtlCol="0" anchor="ctr"/>
+          <a:lstStyle/>
+          <a:p>
+            <a:pPr algn="ctr"/>
+          </a:p>
+        </p:txBody>
+      </p:sp>
+      <p:sp>
+        <p:nvSpPr>
+          <p:cNvPr id="3" name="TextBox 2"/>
+          <p:cNvSpPr txBox="1"/>
+          <p:nvPr/>
+        </p:nvSpPr>
+        <p:spPr>
+          <a:xfrm>
+            <a:off x="822960" y="2743200"/>
+            <a:ext cx="10515600" cy="914400"/>
+          </a:xfrm>
+          <a:prstGeom prst="rect">
+            <a:avLst/>
+          </a:prstGeom>
+          <a:noFill/>
+        </p:spPr>
+        <p:txBody>
+          <a:bodyPr wrap="none">
+            <a:spAutoFit/>
+          </a:bodyPr>
+          <a:lstStyle/>
+          <a:p>
+            <a:pPr>
+              <a:defRPr sz="4400" b="1">
+                <a:solidFill>
+                  <a:srgbClr val="1B2A4A"/>
+                </a:solidFill>
+              </a:defRPr>
+            </a:pPr>
+            <a:r>
+              <a:t>Appendix</a:t>
+            </a:r>
+          </a:p>
+        </p:txBody>
+      </p:sp>
+      <p:sp>
+        <p:nvSpPr>
+          <p:cNvPr id="4" name="TextBox 3"/>
+          <p:cNvSpPr txBox="1"/>
+          <p:nvPr/>
+        </p:nvSpPr>
+        <p:spPr>
+          <a:xfrm>
+            <a:off x="822960" y="3566160"/>
+            <a:ext cx="10515600" cy="640080"/>
+          </a:xfrm>
+          <a:prstGeom prst="rect">
+            <a:avLst/>
+          </a:prstGeom>
+          <a:noFill/>
+        </p:spPr>
+        <p:txBody>
+          <a:bodyPr wrap="none">
+            <a:spAutoFit/>
+          </a:bodyPr>
+          <a:lstStyle/>
+          <a:p>
+            <a:pPr>
+              <a:defRPr sz="2200">
+                <a:solidFill>
+                  <a:srgbClr val="0066CC"/>
+                </a:solidFill>
+              </a:defRPr>
+            </a:pPr>
+            <a:r>
+              <a:t>Setting Up From Zero — Assumes No Prior Access</a:t>
+            </a:r>
+          </a:p>
+        </p:txBody>
+      </p:sp>
+    </p:spTree>
+  </p:cSld>
+  <p:clrMapOvr>
+    <a:masterClrMapping/>
+  </p:clrMapOvr>
+</p:sld>
+</file>
+
+<file path=ppt/slides/slide44.xml><?xml version="1.0" encoding="utf-8"?>
+<p:sld xmlns:a="http://schemas.openxmlformats.org/drawingml/2006/main" xmlns:p="http://schemas.openxmlformats.org/presentationml/2006/main" xmlns:r="http://schemas.openxmlformats.org/officeDocument/2006/relationships">
+  <p:cSld>
+    <p:spTree>
+      <p:nvGrpSpPr>
+        <p:cNvPr id="1" name=""/>
+        <p:cNvGrpSpPr/>
+        <p:nvPr/>
+      </p:nvGrpSpPr>
+      <p:grpSpPr/>
+      <p:sp>
+        <p:nvSpPr>
+          <p:cNvPr id="2" name="Rectangle 1"/>
+          <p:cNvSpPr/>
+          <p:nvPr/>
+        </p:nvSpPr>
+        <p:spPr>
+          <a:xfrm>
+            <a:off x="0" y="0"/>
+            <a:ext cx="12191695" cy="6858000"/>
+          </a:xfrm>
+          <a:prstGeom prst="rect">
+            <a:avLst/>
+          </a:prstGeom>
+          <a:solidFill>
+            <a:srgbClr val="FFFFFF"/>
+          </a:solidFill>
+          <a:ln>
+            <a:noFill/>
+          </a:ln>
+          <a:effectLst/>
+        </p:spPr>
+        <p:style>
+          <a:lnRef idx="1">
+            <a:schemeClr val="accent1"/>
+          </a:lnRef>
+          <a:fillRef idx="3">
+            <a:schemeClr val="accent1"/>
+          </a:fillRef>
+          <a:effectRef idx="2">
+            <a:schemeClr val="accent1"/>
+          </a:effectRef>
+          <a:fontRef idx="minor">
+            <a:schemeClr val="lt1"/>
+          </a:fontRef>
+        </p:style>
+        <p:txBody>
+          <a:bodyPr rtlCol="0" anchor="ctr"/>
+          <a:lstStyle/>
+          <a:p>
+            <a:pPr algn="ctr"/>
+          </a:p>
+        </p:txBody>
+      </p:sp>
+      <p:sp>
+        <p:nvSpPr>
+          <p:cNvPr id="3" name="TextBox 2"/>
+          <p:cNvSpPr txBox="1"/>
+          <p:nvPr/>
+        </p:nvSpPr>
+        <p:spPr>
+          <a:xfrm>
+            <a:off x="548640" y="320040"/>
+            <a:ext cx="7315200" cy="365760"/>
+          </a:xfrm>
+          <a:prstGeom prst="rect">
+            <a:avLst/>
+          </a:prstGeom>
+          <a:noFill/>
+        </p:spPr>
+        <p:txBody>
+          <a:bodyPr wrap="none">
+            <a:spAutoFit/>
+          </a:bodyPr>
+          <a:lstStyle/>
+          <a:p>
+            <a:pPr>
+              <a:defRPr sz="1600" b="1">
+                <a:solidFill>
+                  <a:srgbClr val="0066CC"/>
+                </a:solidFill>
+                <a:latin typeface="Segoe UI"/>
+              </a:defRPr>
+            </a:pPr>
+            <a:r>
+              <a:t>Appendix</a:t>
+            </a:r>
+          </a:p>
+        </p:txBody>
+      </p:sp>
+      <p:sp>
+        <p:nvSpPr>
+          <p:cNvPr id="4" name="TextBox 3"/>
+          <p:cNvSpPr txBox="1"/>
+          <p:nvPr/>
+        </p:nvSpPr>
+        <p:spPr>
+          <a:xfrm>
+            <a:off x="548640" y="658368"/>
+            <a:ext cx="11064240" cy="822960"/>
+          </a:xfrm>
+          <a:prstGeom prst="rect">
+            <a:avLst/>
+          </a:prstGeom>
+          <a:noFill/>
+        </p:spPr>
+        <p:txBody>
+          <a:bodyPr wrap="square">
+            <a:spAutoFit/>
+          </a:bodyPr>
+          <a:lstStyle/>
+          <a:p>
+            <a:pPr>
+              <a:defRPr sz="3200" b="1">
+                <a:solidFill>
+                  <a:srgbClr val="1B2A4A"/>
+                </a:solidFill>
+                <a:latin typeface="Segoe UI"/>
+              </a:defRPr>
+            </a:pPr>
+            <a:r>
+              <a:t>Getting the Code</a:t>
+            </a:r>
+          </a:p>
+        </p:txBody>
+      </p:sp>
+      <p:cxnSp>
+        <p:nvCxnSpPr>
+          <p:cNvPr id="5" name="Connector 4"/>
+          <p:cNvCxnSpPr/>
+          <p:nvPr/>
+        </p:nvCxnSpPr>
+        <p:spPr>
+          <a:xfrm>
+            <a:off x="548640" y="1417320"/>
+            <a:ext cx="11091672" cy="0"/>
+          </a:xfrm>
+          <a:prstGeom prst="line">
+            <a:avLst/>
+          </a:prstGeom>
+          <a:ln w="28575">
+            <a:solidFill>
+              <a:srgbClr val="0066CC"/>
+            </a:solidFill>
+          </a:ln>
+        </p:spPr>
+        <p:style>
+          <a:lnRef idx="2">
+            <a:schemeClr val="accent1"/>
+          </a:lnRef>
+          <a:fillRef idx="0">
+            <a:schemeClr val="accent1"/>
+          </a:fillRef>
+          <a:effectRef idx="1">
+            <a:schemeClr val="accent1"/>
+          </a:effectRef>
+          <a:fontRef idx="minor">
+            <a:schemeClr val="tx1"/>
+          </a:fontRef>
+        </p:style>
+      </p:cxnSp>
+      <p:sp>
+        <p:nvSpPr>
+          <p:cNvPr id="6" name="TextBox 5"/>
+          <p:cNvSpPr txBox="1"/>
+          <p:nvPr/>
+        </p:nvSpPr>
+        <p:spPr>
+          <a:xfrm>
+            <a:off x="548640" y="6473952"/>
+            <a:ext cx="8229600" cy="320040"/>
+          </a:xfrm>
+          <a:prstGeom prst="rect">
+            <a:avLst/>
+          </a:prstGeom>
+          <a:noFill/>
+        </p:spPr>
+        <p:txBody>
+          <a:bodyPr wrap="none">
+            <a:spAutoFit/>
+          </a:bodyPr>
+          <a:lstStyle/>
+          <a:p>
+            <a:pPr>
+              <a:defRPr sz="1100">
+                <a:solidFill>
+                  <a:srgbClr val="555555"/>
+                </a:solidFill>
+                <a:latin typeface="Segoe UI"/>
+              </a:defRPr>
+            </a:pPr>
+            <a:r>
+              <a:t>padb-tools</a:t>
+            </a:r>
+          </a:p>
+        </p:txBody>
+      </p:sp>
+      <p:sp>
+        <p:nvSpPr>
+          <p:cNvPr id="7" name="TextBox 6"/>
+          <p:cNvSpPr txBox="1"/>
+          <p:nvPr/>
+        </p:nvSpPr>
+        <p:spPr>
+          <a:xfrm>
+            <a:off x="11338560" y="6473952"/>
+            <a:ext cx="548640" cy="320040"/>
+          </a:xfrm>
+          <a:prstGeom prst="rect">
+            <a:avLst/>
+          </a:prstGeom>
+          <a:noFill/>
+        </p:spPr>
+        <p:txBody>
+          <a:bodyPr wrap="none">
+            <a:spAutoFit/>
+          </a:bodyPr>
+          <a:lstStyle/>
+          <a:p>
+            <a:pPr algn="r">
+              <a:defRPr sz="1100">
+                <a:solidFill>
+                  <a:srgbClr val="555555"/>
+                </a:solidFill>
+              </a:defRPr>
+            </a:pPr>
+            <a:r>
+              <a:t>43</a:t>
+            </a:r>
+          </a:p>
+        </p:txBody>
+      </p:sp>
+      <p:sp>
+        <p:nvSpPr>
+          <p:cNvPr id="8" name="TextBox 7"/>
+          <p:cNvSpPr txBox="1"/>
+          <p:nvPr/>
+        </p:nvSpPr>
+        <p:spPr>
+          <a:xfrm>
+            <a:off x="548640" y="1691640"/>
+            <a:ext cx="11064240" cy="365760"/>
+          </a:xfrm>
+          <a:prstGeom prst="rect">
+            <a:avLst/>
+          </a:prstGeom>
+          <a:noFill/>
+        </p:spPr>
+        <p:txBody>
+          <a:bodyPr wrap="square">
+            <a:spAutoFit/>
+          </a:bodyPr>
+          <a:lstStyle/>
+          <a:p>
+            <a:pPr>
+              <a:spcAft>
+                <a:spcPts val="1000"/>
+              </a:spcAft>
+            </a:pPr>
+            <a:r>
+              <a:rPr sz="1900">
+                <a:solidFill>
+                  <a:srgbClr val="1B2A4A"/>
+                </a:solidFill>
+                <a:latin typeface="Segoe UI"/>
+              </a:rPr>
+              <a:t>•  This repo isn't on a company-wide share by default — copy it from:</a:t>
+            </a:r>
+          </a:p>
+        </p:txBody>
+      </p:sp>
+      <p:sp>
+        <p:nvSpPr>
+          <p:cNvPr id="9" name="Rounded Rectangle 8"/>
+          <p:cNvSpPr/>
+          <p:nvPr/>
+        </p:nvSpPr>
+        <p:spPr>
+          <a:xfrm>
+            <a:off x="548640" y="2103120"/>
+            <a:ext cx="11064240" cy="502920"/>
+          </a:xfrm>
+          <a:prstGeom prst="roundRect">
+            <a:avLst>
+              <a:gd name="adj" fmla="val 4000"/>
+            </a:avLst>
+          </a:prstGeom>
+          <a:solidFill>
+            <a:srgbClr val="282C34"/>
+          </a:solidFill>
+          <a:ln>
+            <a:solidFill>
+              <a:srgbClr val="111318"/>
+            </a:solidFill>
+          </a:ln>
+          <a:effectLst/>
+        </p:spPr>
+        <p:style>
+          <a:lnRef idx="1">
+            <a:schemeClr val="accent1"/>
+          </a:lnRef>
+          <a:fillRef idx="3">
+            <a:schemeClr val="accent1"/>
+          </a:fillRef>
+          <a:effectRef idx="2">
+            <a:schemeClr val="accent1"/>
+          </a:effectRef>
+          <a:fontRef idx="minor">
+            <a:schemeClr val="lt1"/>
+          </a:fontRef>
+        </p:style>
+        <p:txBody>
+          <a:bodyPr rtlCol="0" anchor="t" wrap="square" lIns="228600" rIns="228600" tIns="164592" bIns="164592"/>
+          <a:lstStyle/>
+          <a:p>
+            <a:pPr algn="l">
+              <a:spcAft>
+                <a:spcPts val="200"/>
+              </a:spcAft>
+            </a:pPr>
+            <a:r>
+              <a:rPr sz="1350">
+                <a:solidFill>
+                  <a:srgbClr val="E6E6E6"/>
+                </a:solidFill>
+                <a:latin typeface="Consolas"/>
+              </a:rPr>
+              <a:t>\\srsnas01.srs.is.keysight.com\prod\MIDRF3\SG6311A\Padb-tools\tools</a:t>
+            </a:r>
+          </a:p>
+        </p:txBody>
+      </p:sp>
+      <p:sp>
+        <p:nvSpPr>
+          <p:cNvPr id="10" name="TextBox 9"/>
+          <p:cNvSpPr txBox="1"/>
+          <p:nvPr/>
+        </p:nvSpPr>
+        <p:spPr>
+          <a:xfrm>
+            <a:off x="548640" y="2788920"/>
+            <a:ext cx="11064240" cy="365760"/>
+          </a:xfrm>
+          <a:prstGeom prst="rect">
+            <a:avLst/>
+          </a:prstGeom>
+          <a:noFill/>
+        </p:spPr>
+        <p:txBody>
+          <a:bodyPr wrap="square">
+            <a:spAutoFit/>
+          </a:bodyPr>
+          <a:lstStyle/>
+          <a:p>
+            <a:pPr>
+              <a:spcAft>
+                <a:spcPts val="1000"/>
+              </a:spcAft>
+            </a:pPr>
+            <a:r>
+              <a:rPr sz="1800">
+                <a:solidFill>
+                  <a:srgbClr val="1B2A4A"/>
+                </a:solidFill>
+                <a:latin typeface="Segoe UI"/>
+              </a:rPr>
+              <a:t>•  Copy that whole "tools" folder to a local path, e.g. C:\apps\padb\tools</a:t>
+            </a:r>
+          </a:p>
+        </p:txBody>
+      </p:sp>
+      <p:sp>
+        <p:nvSpPr>
+          <p:cNvPr id="11" name="TextBox 10"/>
+          <p:cNvSpPr txBox="1"/>
+          <p:nvPr/>
+        </p:nvSpPr>
+        <p:spPr>
+          <a:xfrm>
+            <a:off x="548640" y="3429000"/>
+            <a:ext cx="11064240" cy="914400"/>
+          </a:xfrm>
+          <a:prstGeom prst="rect">
+            <a:avLst/>
+          </a:prstGeom>
+          <a:noFill/>
+        </p:spPr>
+        <p:txBody>
+          <a:bodyPr wrap="square">
+            <a:spAutoFit/>
+          </a:bodyPr>
+          <a:lstStyle/>
+          <a:p>
+            <a:pPr>
+              <a:spcAft>
+                <a:spcPts val="1000"/>
+              </a:spcAft>
+            </a:pPr>
+            <a:r>
+              <a:rPr sz="1700">
+                <a:solidFill>
+                  <a:srgbClr val="1B2A4A"/>
+                </a:solidFill>
+                <a:latin typeface="Segoe UI"/>
+              </a:rPr>
+              <a:t>•  padb_batch.py is bundled directly inside the tools folder (added 2026-08-05) —</a:t>
+            </a:r>
+          </a:p>
+          <a:p>
+            <a:pPr lvl="1">
+              <a:spcAft>
+                <a:spcPts val="600"/>
+              </a:spcAft>
+            </a:pPr>
+            <a:r>
+              <a:rPr sz="1500">
+                <a:solidFill>
+                  <a:srgbClr val="555555"/>
+                </a:solidFill>
+                <a:latin typeface="Segoe UI"/>
+              </a:rPr>
+              <a:t>–  no separate dependency to track down; the whole repo is self-contained</a:t>
+            </a:r>
+          </a:p>
+        </p:txBody>
+      </p:sp>
+      <p:sp>
+        <p:nvSpPr>
+          <p:cNvPr id="12" name="TextBox 11"/>
+          <p:cNvSpPr txBox="1"/>
+          <p:nvPr/>
+        </p:nvSpPr>
+        <p:spPr>
+          <a:xfrm>
+            <a:off x="548640" y="4480560"/>
+            <a:ext cx="11064240" cy="457200"/>
+          </a:xfrm>
+          <a:prstGeom prst="rect">
+            <a:avLst/>
+          </a:prstGeom>
+          <a:noFill/>
+        </p:spPr>
+        <p:txBody>
+          <a:bodyPr wrap="square">
+            <a:spAutoFit/>
+          </a:bodyPr>
+          <a:lstStyle/>
+          <a:p>
+            <a:pPr>
+              <a:spcAft>
+                <a:spcPts val="1000"/>
+              </a:spcAft>
+            </a:pPr>
+            <a:r>
+              <a:rPr sz="1650">
+                <a:solidFill>
+                  <a:srgbClr val="1B2A4A"/>
+                </a:solidFill>
+                <a:latin typeface="Segoe UI"/>
+              </a:rPr>
+              <a:t>•  Then follow the Prerequisites and Per-User Config slides earlier in this deck</a:t>
+            </a:r>
+          </a:p>
+        </p:txBody>
+      </p:sp>
+    </p:spTree>
+  </p:cSld>
+  <p:clrMapOvr>
+    <a:masterClrMapping/>
+  </p:clrMapOvr>
+</p:sld>
+</file>
+
+<file path=ppt/slides/slide45.xml><?xml version="1.0" encoding="utf-8"?>
+<p:sld xmlns:a="http://schemas.openxmlformats.org/drawingml/2006/main" xmlns:p="http://schemas.openxmlformats.org/presentationml/2006/main" xmlns:r="http://schemas.openxmlformats.org/officeDocument/2006/relationships">
+  <p:cSld>
+    <p:spTree>
+      <p:nvGrpSpPr>
+        <p:cNvPr id="1" name=""/>
+        <p:cNvGrpSpPr/>
+        <p:nvPr/>
+      </p:nvGrpSpPr>
+      <p:grpSpPr/>
+      <p:sp>
+        <p:nvSpPr>
+          <p:cNvPr id="2" name="Rectangle 1"/>
+          <p:cNvSpPr/>
+          <p:nvPr/>
+        </p:nvSpPr>
+        <p:spPr>
+          <a:xfrm>
+            <a:off x="0" y="0"/>
+            <a:ext cx="12191695" cy="6858000"/>
+          </a:xfrm>
+          <a:prstGeom prst="rect">
+            <a:avLst/>
+          </a:prstGeom>
+          <a:solidFill>
+            <a:srgbClr val="FFFFFF"/>
+          </a:solidFill>
+          <a:ln>
+            <a:noFill/>
+          </a:ln>
+          <a:effectLst/>
+        </p:spPr>
+        <p:style>
+          <a:lnRef idx="1">
+            <a:schemeClr val="accent1"/>
+          </a:lnRef>
+          <a:fillRef idx="3">
+            <a:schemeClr val="accent1"/>
+          </a:fillRef>
+          <a:effectRef idx="2">
+            <a:schemeClr val="accent1"/>
+          </a:effectRef>
+          <a:fontRef idx="minor">
+            <a:schemeClr val="lt1"/>
+          </a:fontRef>
+        </p:style>
+        <p:txBody>
+          <a:bodyPr rtlCol="0" anchor="ctr"/>
+          <a:lstStyle/>
+          <a:p>
+            <a:pPr algn="ctr"/>
+          </a:p>
+        </p:txBody>
+      </p:sp>
+      <p:sp>
+        <p:nvSpPr>
+          <p:cNvPr id="3" name="TextBox 2"/>
+          <p:cNvSpPr txBox="1"/>
+          <p:nvPr/>
+        </p:nvSpPr>
+        <p:spPr>
+          <a:xfrm>
+            <a:off x="548640" y="320040"/>
+            <a:ext cx="7315200" cy="365760"/>
+          </a:xfrm>
+          <a:prstGeom prst="rect">
+            <a:avLst/>
+          </a:prstGeom>
+          <a:noFill/>
+        </p:spPr>
+        <p:txBody>
+          <a:bodyPr wrap="none">
+            <a:spAutoFit/>
+          </a:bodyPr>
+          <a:lstStyle/>
+          <a:p>
+            <a:pPr>
+              <a:defRPr sz="1600" b="1">
+                <a:solidFill>
+                  <a:srgbClr val="0066CC"/>
+                </a:solidFill>
+                <a:latin typeface="Segoe UI"/>
+              </a:defRPr>
+            </a:pPr>
+            <a:r>
+              <a:t>Appendix</a:t>
+            </a:r>
+          </a:p>
+        </p:txBody>
+      </p:sp>
+      <p:sp>
+        <p:nvSpPr>
+          <p:cNvPr id="4" name="TextBox 3"/>
+          <p:cNvSpPr txBox="1"/>
+          <p:nvPr/>
+        </p:nvSpPr>
+        <p:spPr>
+          <a:xfrm>
+            <a:off x="548640" y="658368"/>
+            <a:ext cx="11064240" cy="822960"/>
+          </a:xfrm>
+          <a:prstGeom prst="rect">
+            <a:avLst/>
+          </a:prstGeom>
+          <a:noFill/>
+        </p:spPr>
+        <p:txBody>
+          <a:bodyPr wrap="square">
+            <a:spAutoFit/>
+          </a:bodyPr>
+          <a:lstStyle/>
+          <a:p>
+            <a:pPr>
+              <a:defRPr sz="3200" b="1">
+                <a:solidFill>
+                  <a:srgbClr val="1B2A4A"/>
+                </a:solidFill>
+                <a:latin typeface="Segoe UI"/>
+              </a:defRPr>
+            </a:pPr>
+            <a:r>
+              <a:t>First Commands to Verify Your Setup</a:t>
+            </a:r>
+          </a:p>
+        </p:txBody>
+      </p:sp>
+      <p:cxnSp>
+        <p:nvCxnSpPr>
+          <p:cNvPr id="5" name="Connector 4"/>
+          <p:cNvCxnSpPr/>
+          <p:nvPr/>
+        </p:nvCxnSpPr>
+        <p:spPr>
+          <a:xfrm>
+            <a:off x="548640" y="1417320"/>
+            <a:ext cx="11091672" cy="0"/>
+          </a:xfrm>
+          <a:prstGeom prst="line">
+            <a:avLst/>
+          </a:prstGeom>
+          <a:ln w="28575">
+            <a:solidFill>
+              <a:srgbClr val="0066CC"/>
+            </a:solidFill>
+          </a:ln>
+        </p:spPr>
+        <p:style>
+          <a:lnRef idx="2">
+            <a:schemeClr val="accent1"/>
+          </a:lnRef>
+          <a:fillRef idx="0">
+            <a:schemeClr val="accent1"/>
+          </a:fillRef>
+          <a:effectRef idx="1">
+            <a:schemeClr val="accent1"/>
+          </a:effectRef>
+          <a:fontRef idx="minor">
+            <a:schemeClr val="tx1"/>
+          </a:fontRef>
+        </p:style>
+      </p:cxnSp>
+      <p:sp>
+        <p:nvSpPr>
+          <p:cNvPr id="6" name="TextBox 5"/>
+          <p:cNvSpPr txBox="1"/>
+          <p:nvPr/>
+        </p:nvSpPr>
+        <p:spPr>
+          <a:xfrm>
+            <a:off x="548640" y="6473952"/>
+            <a:ext cx="8229600" cy="320040"/>
+          </a:xfrm>
+          <a:prstGeom prst="rect">
+            <a:avLst/>
+          </a:prstGeom>
+          <a:noFill/>
+        </p:spPr>
+        <p:txBody>
+          <a:bodyPr wrap="none">
+            <a:spAutoFit/>
+          </a:bodyPr>
+          <a:lstStyle/>
+          <a:p>
+            <a:pPr>
+              <a:defRPr sz="1100">
+                <a:solidFill>
+                  <a:srgbClr val="555555"/>
+                </a:solidFill>
+                <a:latin typeface="Segoe UI"/>
+              </a:defRPr>
+            </a:pPr>
+            <a:r>
+              <a:t>padb-tools</a:t>
+            </a:r>
+          </a:p>
+        </p:txBody>
+      </p:sp>
+      <p:sp>
+        <p:nvSpPr>
+          <p:cNvPr id="7" name="TextBox 6"/>
+          <p:cNvSpPr txBox="1"/>
+          <p:nvPr/>
+        </p:nvSpPr>
+        <p:spPr>
+          <a:xfrm>
+            <a:off x="11338560" y="6473952"/>
+            <a:ext cx="548640" cy="320040"/>
+          </a:xfrm>
+          <a:prstGeom prst="rect">
+            <a:avLst/>
+          </a:prstGeom>
+          <a:noFill/>
+        </p:spPr>
+        <p:txBody>
+          <a:bodyPr wrap="none">
+            <a:spAutoFit/>
+          </a:bodyPr>
+          <a:lstStyle/>
+          <a:p>
+            <a:pPr algn="r">
+              <a:defRPr sz="1100">
+                <a:solidFill>
+                  <a:srgbClr val="555555"/>
+                </a:solidFill>
+              </a:defRPr>
+            </a:pPr>
+            <a:r>
+              <a:t>44</a:t>
             </a:r>
           </a:p>
         </p:txBody>

--- a/PADB_Simple_and_Interactive.pptx
+++ b/PADB_Simple_and_Interactive.pptx
@@ -10979,7 +10979,7 @@
               </a:defRPr>
             </a:pPr>
             <a:r>
-              <a:t>The Result — Try the TLL Selector</a:t>
+              <a:t>The Result — Spec Pass/Fail</a:t>
             </a:r>
           </a:p>
         </p:txBody>
@@ -11099,7 +11099,7 @@
         <p:spPr>
           <a:xfrm>
             <a:off x="548640" y="1600200"/>
-            <a:ext cx="11064240" cy="731520"/>
+            <a:ext cx="11064240" cy="1005840"/>
           </a:xfrm>
           <a:prstGeom prst="rect">
             <a:avLst/>
@@ -11124,7 +11124,7 @@
                 </a:solidFill>
                 <a:latin typeface="Segoe UI"/>
               </a:rPr>
-              <a:t>•  This pod has no spec limits, so the live "TLL display" selector appears (circled) —</a:t>
+              <a:t>•  This pod's CSV has real Upper (30 dBm) and Lower (23 dBm) limits, so both are detected</a:t>
             </a:r>
           </a:p>
           <a:p>
@@ -11140,7 +11140,39 @@
                 </a:solidFill>
                 <a:latin typeface="Segoe UI"/>
               </a:rPr>
-              <a:t>•  MaxPower is a guaranteed-minimum-power measurement, so try switching it to "Lower only"</a:t>
+              <a:t>•  automatically -- no manual override needed, and no live selector to switch (data beats config)</a:t>
+            </a:r>
+          </a:p>
+          <a:p>
+            <a:pPr>
+              <a:spcAft>
+                <a:spcPts val="1000"/>
+              </a:spcAft>
+            </a:pPr>
+            <a:r>
+              <a:rPr sz="1500">
+                <a:solidFill>
+                  <a:srgbClr val="1B2A4A"/>
+                </a:solidFill>
+                <a:latin typeface="Segoe UI"/>
+              </a:rPr>
+              <a:t>•  MaxPower is a guaranteed-minimum-power measurement, so the Lower limit is the one that</a:t>
+            </a:r>
+          </a:p>
+          <a:p>
+            <a:pPr>
+              <a:spcAft>
+                <a:spcPts val="1000"/>
+              </a:spcAft>
+            </a:pPr>
+            <a:r>
+              <a:rPr sz="1500">
+                <a:solidFill>
+                  <a:srgbClr val="1B2A4A"/>
+                </a:solidFill>
+                <a:latin typeface="Segoe UI"/>
+              </a:rPr>
+              <a:t>•  actually matters here -- watch the dashed lower spec line against the TTL band as you filter</a:t>
             </a:r>
           </a:p>
         </p:txBody>
@@ -11161,7 +11193,7 @@
         </p:blipFill>
         <p:spPr>
           <a:xfrm>
-            <a:off x="1892807" y="2423160"/>
+            <a:off x="1892807" y="2514600"/>
             <a:ext cx="8412480" cy="3905794"/>
           </a:xfrm>
           <a:prstGeom prst="rect">
@@ -11174,50 +11206,6 @@
           </a:ln>
         </p:spPr>
       </p:pic>
-      <p:sp>
-        <p:nvSpPr>
-          <p:cNvPr id="10" name="Rounded Rectangle 9"/>
-          <p:cNvSpPr/>
-          <p:nvPr/>
-        </p:nvSpPr>
-        <p:spPr>
-          <a:xfrm>
-            <a:off x="5363504" y="2978950"/>
-            <a:ext cx="2219797" cy="224241"/>
-          </a:xfrm>
-          <a:prstGeom prst="roundRect">
-            <a:avLst/>
-          </a:prstGeom>
-          <a:noFill/>
-          <a:ln w="28575">
-            <a:solidFill>
-              <a:srgbClr val="CC0000"/>
-            </a:solidFill>
-          </a:ln>
-          <a:effectLst/>
-        </p:spPr>
-        <p:style>
-          <a:lnRef idx="1">
-            <a:schemeClr val="accent1"/>
-          </a:lnRef>
-          <a:fillRef idx="3">
-            <a:schemeClr val="accent1"/>
-          </a:fillRef>
-          <a:effectRef idx="2">
-            <a:schemeClr val="accent1"/>
-          </a:effectRef>
-          <a:fontRef idx="minor">
-            <a:schemeClr val="lt1"/>
-          </a:fontRef>
-        </p:style>
-        <p:txBody>
-          <a:bodyPr rtlCol="0" anchor="ctr"/>
-          <a:lstStyle/>
-          <a:p>
-            <a:pPr algn="ctr"/>
-          </a:p>
-        </p:txBody>
-      </p:sp>
     </p:spTree>
   </p:cSld>
   <p:clrMapOvr>

--- a/PADB_Simple_and_Interactive.pptx
+++ b/PADB_Simple_and_Interactive.pptx
@@ -46,6 +46,9 @@
     <p:sldId id="294" r:id="rId45"/>
     <p:sldId id="295" r:id="rId46"/>
     <p:sldId id="296" r:id="rId47"/>
+    <p:sldId id="301" r:id="rId52"/>
+    <p:sldId id="302" r:id="rId53"/>
+    <p:sldId id="303" r:id="rId54"/>
     <p:sldId id="297" r:id="rId48"/>
     <p:sldId id="298" r:id="rId49"/>
     <p:sldId id="299" r:id="rId50"/>
@@ -13689,7 +13692,7 @@
                 </a:solidFill>
                 <a:latin typeface="Segoe UI"/>
               </a:rPr>
-              <a:t>•  Copy PADB Filter — best-effort 'Serial Number' NOT IN {...} expression for pasting into PADB itself (under development)</a:t>
+              <a:t>•  Copy PADB Filter — builds a real PADB filter expression matching this view's own active filters (condition/Serial/Port/Frequency/Temperature), ready to paste into PADB itself</a:t>
             </a:r>
           </a:p>
           <a:p>
@@ -19531,6 +19534,1099 @@
                 <a:latin typeface="Segoe UI"/>
               </a:rPr>
               <a:t>–  working inside the repo</a:t>
+            </a:r>
+          </a:p>
+        </p:txBody>
+      </p:sp>
+    </p:spTree>
+  </p:cSld>
+  <p:clrMapOvr>
+    <a:masterClrMapping/>
+  </p:clrMapOvr>
+</p:sld>
+</file>
+
+<file path=ppt/slides/slide46.xml><?xml version="1.0" encoding="utf-8"?>
+<p:sld xmlns:a="http://schemas.openxmlformats.org/drawingml/2006/main" xmlns:p="http://schemas.openxmlformats.org/presentationml/2006/main" xmlns:r="http://schemas.openxmlformats.org/officeDocument/2006/relationships">
+  <p:cSld>
+    <p:spTree>
+      <p:nvGrpSpPr>
+        <p:cNvPr id="1" name=""/>
+        <p:cNvGrpSpPr/>
+        <p:nvPr/>
+      </p:nvGrpSpPr>
+      <p:grpSpPr/>
+      <p:sp>
+        <p:nvSpPr>
+          <p:cNvPr id="2" name="Rectangle 1"/>
+          <p:cNvSpPr/>
+          <p:nvPr/>
+        </p:nvSpPr>
+        <p:spPr>
+          <a:xfrm>
+            <a:off x="0" y="0"/>
+            <a:ext cx="12191695" cy="6858000"/>
+          </a:xfrm>
+          <a:prstGeom prst="rect">
+            <a:avLst/>
+          </a:prstGeom>
+          <a:solidFill>
+            <a:srgbClr val="FFFFFF"/>
+          </a:solidFill>
+          <a:ln>
+            <a:noFill/>
+          </a:ln>
+          <a:effectLst/>
+        </p:spPr>
+        <p:style>
+          <a:lnRef idx="1">
+            <a:schemeClr val="accent1"/>
+          </a:lnRef>
+          <a:fillRef idx="3">
+            <a:schemeClr val="accent1"/>
+          </a:fillRef>
+          <a:effectRef idx="2">
+            <a:schemeClr val="accent1"/>
+          </a:effectRef>
+          <a:fontRef idx="minor">
+            <a:schemeClr val="lt1"/>
+          </a:fontRef>
+        </p:style>
+        <p:txBody>
+          <a:bodyPr rtlCol="0" anchor="ctr"/>
+          <a:lstStyle/>
+          <a:p>
+            <a:pPr algn="ctr"/>
+          </a:p>
+        </p:txBody>
+      </p:sp>
+      <p:sp>
+        <p:nvSpPr>
+          <p:cNvPr id="3" name="TextBox 2"/>
+          <p:cNvSpPr txBox="1"/>
+          <p:nvPr/>
+        </p:nvSpPr>
+        <p:spPr>
+          <a:xfrm>
+            <a:off x="548640" y="320040"/>
+            <a:ext cx="7315200" cy="365760"/>
+          </a:xfrm>
+          <a:prstGeom prst="rect">
+            <a:avLst/>
+          </a:prstGeom>
+          <a:noFill/>
+        </p:spPr>
+        <p:txBody>
+          <a:bodyPr wrap="none">
+            <a:spAutoFit/>
+          </a:bodyPr>
+          <a:lstStyle/>
+          <a:p>
+            <a:pPr>
+              <a:defRPr sz="1600" b="1">
+                <a:solidFill>
+                  <a:srgbClr val="0066CC"/>
+                </a:solidFill>
+                <a:latin typeface="Segoe UI"/>
+              </a:defRPr>
+            </a:pPr>
+            <a:r>
+              <a:t>Multi-Site Testing</a:t>
+            </a:r>
+          </a:p>
+        </p:txBody>
+      </p:sp>
+      <p:sp>
+        <p:nvSpPr>
+          <p:cNvPr id="4" name="TextBox 3"/>
+          <p:cNvSpPr txBox="1"/>
+          <p:nvPr/>
+        </p:nvSpPr>
+        <p:spPr>
+          <a:xfrm>
+            <a:off x="548640" y="658368"/>
+            <a:ext cx="11064240" cy="822960"/>
+          </a:xfrm>
+          <a:prstGeom prst="rect">
+            <a:avLst/>
+          </a:prstGeom>
+          <a:noFill/>
+        </p:spPr>
+        <p:txBody>
+          <a:bodyPr wrap="square">
+            <a:spAutoFit/>
+          </a:bodyPr>
+          <a:lstStyle/>
+          <a:p>
+            <a:pPr>
+              <a:defRPr sz="3200" b="1">
+                <a:solidFill>
+                  <a:srgbClr val="1B2A4A"/>
+                </a:solidFill>
+                <a:latin typeface="Segoe UI"/>
+              </a:defRPr>
+            </a:pPr>
+            <a:r>
+              <a:t>Cross-Site Comparison — compare_csv</a:t>
+            </a:r>
+          </a:p>
+        </p:txBody>
+      </p:sp>
+      <p:cxnSp>
+        <p:nvCxnSpPr>
+          <p:cNvPr id="5" name="Connector 4"/>
+          <p:cNvCxnSpPr/>
+          <p:nvPr/>
+        </p:nvCxnSpPr>
+        <p:spPr>
+          <a:xfrm>
+            <a:off x="548640" y="1417320"/>
+            <a:ext cx="11091672" cy="0"/>
+          </a:xfrm>
+          <a:prstGeom prst="line">
+            <a:avLst/>
+          </a:prstGeom>
+          <a:ln w="28575">
+            <a:solidFill>
+              <a:srgbClr val="0066CC"/>
+            </a:solidFill>
+          </a:ln>
+        </p:spPr>
+        <p:style>
+          <a:lnRef idx="2">
+            <a:schemeClr val="accent1"/>
+          </a:lnRef>
+          <a:fillRef idx="0">
+            <a:schemeClr val="accent1"/>
+          </a:fillRef>
+          <a:effectRef idx="1">
+            <a:schemeClr val="accent1"/>
+          </a:effectRef>
+          <a:fontRef idx="minor">
+            <a:schemeClr val="tx1"/>
+          </a:fontRef>
+        </p:style>
+      </p:cxnSp>
+      <p:sp>
+        <p:nvSpPr>
+          <p:cNvPr id="6" name="TextBox 5"/>
+          <p:cNvSpPr txBox="1"/>
+          <p:nvPr/>
+        </p:nvSpPr>
+        <p:spPr>
+          <a:xfrm>
+            <a:off x="548640" y="6473952"/>
+            <a:ext cx="8229600" cy="320040"/>
+          </a:xfrm>
+          <a:prstGeom prst="rect">
+            <a:avLst/>
+          </a:prstGeom>
+          <a:noFill/>
+        </p:spPr>
+        <p:txBody>
+          <a:bodyPr wrap="none">
+            <a:spAutoFit/>
+          </a:bodyPr>
+          <a:lstStyle/>
+          <a:p>
+            <a:pPr>
+              <a:defRPr sz="1100">
+                <a:solidFill>
+                  <a:srgbClr val="555555"/>
+                </a:solidFill>
+                <a:latin typeface="Segoe UI"/>
+              </a:defRPr>
+            </a:pPr>
+            <a:r>
+              <a:t>padb-tools</a:t>
+            </a:r>
+          </a:p>
+        </p:txBody>
+      </p:sp>
+      <p:sp>
+        <p:nvSpPr>
+          <p:cNvPr id="7" name="TextBox 6"/>
+          <p:cNvSpPr txBox="1"/>
+          <p:nvPr/>
+        </p:nvSpPr>
+        <p:spPr>
+          <a:xfrm>
+            <a:off x="11338560" y="6473952"/>
+            <a:ext cx="548640" cy="320040"/>
+          </a:xfrm>
+          <a:prstGeom prst="rect">
+            <a:avLst/>
+          </a:prstGeom>
+          <a:noFill/>
+        </p:spPr>
+        <p:txBody>
+          <a:bodyPr wrap="none">
+            <a:spAutoFit/>
+          </a:bodyPr>
+          <a:lstStyle/>
+          <a:p>
+            <a:pPr algn="r">
+              <a:defRPr sz="1100">
+                <a:solidFill>
+                  <a:srgbClr val="555555"/>
+                </a:solidFill>
+              </a:defRPr>
+            </a:pPr>
+            <a:r>
+              <a:t>42</a:t>
+            </a:r>
+          </a:p>
+        </p:txBody>
+      </p:sp>
+      <p:sp>
+        <p:nvSpPr>
+          <p:cNvPr id="8" name="TextBox 7"/>
+          <p:cNvSpPr txBox="1"/>
+          <p:nvPr/>
+        </p:nvSpPr>
+        <p:spPr>
+          <a:xfrm>
+            <a:off x="548640" y="1645920"/>
+            <a:ext cx="11064240" cy="4754880"/>
+          </a:xfrm>
+          <a:prstGeom prst="rect">
+            <a:avLst/>
+          </a:prstGeom>
+          <a:noFill/>
+        </p:spPr>
+        <p:txBody>
+          <a:bodyPr wrap="square">
+            <a:spAutoFit/>
+          </a:bodyPr>
+          <a:lstStyle/>
+          <a:p>
+            <a:pPr>
+              <a:spcAft>
+                <a:spcPts val="1000"/>
+              </a:spcAft>
+            </a:pPr>
+            <a:r>
+              <a:rPr sz="1700">
+                <a:solidFill>
+                  <a:srgbClr val="1B2A4A"/>
+                </a:solidFill>
+                <a:latin typeface="Segoe UI"/>
+              </a:rPr>
+              <a:t>•  Compares two sites' data (e.g. an established site vs. a newly-stood-up site) without hand-merging CSVs</a:t>
+            </a:r>
+          </a:p>
+          <a:p>
+            <a:pPr>
+              <a:spcAft>
+                <a:spcPts val="1000"/>
+              </a:spcAft>
+            </a:pPr>
+            <a:r>
+              <a:rPr sz="1700">
+                <a:solidFill>
+                  <a:srgbClr val="1B2A4A"/>
+                </a:solidFill>
+                <a:latin typeface="Segoe UI"/>
+              </a:rPr>
+              <a:t>•  job.json: "compare_csv": {"SR": "path...", "AMC2": "path..."}, "primary_site": "SR"</a:t>
+            </a:r>
+          </a:p>
+          <a:p>
+            <a:pPr lvl="1">
+              <a:spcAft>
+                <a:spcPts val="1000"/>
+              </a:spcAft>
+            </a:pPr>
+            <a:r>
+              <a:rPr sz="1500">
+                <a:solidFill>
+                  <a:srgbClr val="1B2A4A"/>
+                </a:solidFill>
+                <a:latin typeface="Segoe UI"/>
+              </a:rPr>
+              <a:t>–  primary_site is the reference population for the boxplot check below — no effect on other views</a:t>
+            </a:r>
+          </a:p>
+          <a:p>
+            <a:pPr>
+              <a:spcAft>
+                <a:spcPts val="1000"/>
+              </a:spcAft>
+            </a:pPr>
+            <a:r>
+              <a:rPr sz="1700">
+                <a:solidFill>
+                  <a:srgbClr val="1B2A4A"/>
+                </a:solidFill>
+                <a:latin typeface="Segoe UI"/>
+              </a:rPr>
+              <a:t>•  Mechanism: each site's own CSV is tagged "Site: &lt;name&gt;" in its Group text and merged — the normal single-CSV pipeline runs completely unchanged</a:t>
+            </a:r>
+          </a:p>
+          <a:p>
+            <a:pPr lvl="1">
+              <a:spcAft>
+                <a:spcPts val="1000"/>
+              </a:spcAft>
+            </a:pPr>
+            <a:r>
+              <a:rPr sz="1500">
+                <a:solidFill>
+                  <a:srgbClr val="1B2A4A"/>
+                </a:solidFill>
+                <a:latin typeface="Segoe UI"/>
+              </a:rPr>
+              <a:t>–  "Site" becomes a real, filterable/groupable condition dimension for free, same as Port or Serial</a:t>
+            </a:r>
+          </a:p>
+          <a:p>
+            <a:pPr>
+              <a:spcAft>
+                <a:spcPts val="1000"/>
+              </a:spcAft>
+            </a:pPr>
+            <a:r>
+              <a:rPr sz="1700">
+                <a:solidFill>
+                  <a:srgbClr val="1B2A4A"/>
+                </a:solidFill>
+                <a:latin typeface="Segoe UI"/>
+              </a:rPr>
+              <a:t>•  Deliberately tolerant of imperfect data — mismatched columns, one site missing spec limits, narrower temperature/port coverage are all expected, not errors</a:t>
+            </a:r>
+          </a:p>
+          <a:p>
+            <a:pPr>
+              <a:spcAft>
+                <a:spcPts val="1000"/>
+              </a:spcAft>
+            </a:pPr>
+            <a:r>
+              <a:rPr sz="1700">
+                <a:solidFill>
+                  <a:srgbClr val="1B2A4A"/>
+                </a:solidFill>
+                <a:latin typeface="Segoe UI"/>
+              </a:rPr>
+              <a:t>•  An always-visible banner flags real coverage gaps between sites (e.g. missing temperatures/ports) — numeric formatting differences between sites never falsely count as a gap</a:t>
+            </a:r>
+          </a:p>
+        </p:txBody>
+      </p:sp>
+    </p:spTree>
+  </p:cSld>
+  <p:clrMapOvr>
+    <a:masterClrMapping/>
+  </p:clrMapOvr>
+</p:sld>
+</file>
+
+<file path=ppt/slides/slide47.xml><?xml version="1.0" encoding="utf-8"?>
+<p:sld xmlns:a="http://schemas.openxmlformats.org/drawingml/2006/main" xmlns:p="http://schemas.openxmlformats.org/presentationml/2006/main" xmlns:r="http://schemas.openxmlformats.org/officeDocument/2006/relationships">
+  <p:cSld>
+    <p:spTree>
+      <p:nvGrpSpPr>
+        <p:cNvPr id="1" name=""/>
+        <p:cNvGrpSpPr/>
+        <p:nvPr/>
+      </p:nvGrpSpPr>
+      <p:grpSpPr/>
+      <p:sp>
+        <p:nvSpPr>
+          <p:cNvPr id="2" name="Rectangle 1"/>
+          <p:cNvSpPr/>
+          <p:nvPr/>
+        </p:nvSpPr>
+        <p:spPr>
+          <a:xfrm>
+            <a:off x="0" y="0"/>
+            <a:ext cx="12191695" cy="6858000"/>
+          </a:xfrm>
+          <a:prstGeom prst="rect">
+            <a:avLst/>
+          </a:prstGeom>
+          <a:solidFill>
+            <a:srgbClr val="FFFFFF"/>
+          </a:solidFill>
+          <a:ln>
+            <a:noFill/>
+          </a:ln>
+          <a:effectLst/>
+        </p:spPr>
+        <p:style>
+          <a:lnRef idx="1">
+            <a:schemeClr val="accent1"/>
+          </a:lnRef>
+          <a:fillRef idx="3">
+            <a:schemeClr val="accent1"/>
+          </a:fillRef>
+          <a:effectRef idx="2">
+            <a:schemeClr val="accent1"/>
+          </a:effectRef>
+          <a:fontRef idx="minor">
+            <a:schemeClr val="lt1"/>
+          </a:fontRef>
+        </p:style>
+        <p:txBody>
+          <a:bodyPr rtlCol="0" anchor="ctr"/>
+          <a:lstStyle/>
+          <a:p>
+            <a:pPr algn="ctr"/>
+          </a:p>
+        </p:txBody>
+      </p:sp>
+      <p:sp>
+        <p:nvSpPr>
+          <p:cNvPr id="3" name="TextBox 2"/>
+          <p:cNvSpPr txBox="1"/>
+          <p:nvPr/>
+        </p:nvSpPr>
+        <p:spPr>
+          <a:xfrm>
+            <a:off x="548640" y="320040"/>
+            <a:ext cx="7315200" cy="365760"/>
+          </a:xfrm>
+          <a:prstGeom prst="rect">
+            <a:avLst/>
+          </a:prstGeom>
+          <a:noFill/>
+        </p:spPr>
+        <p:txBody>
+          <a:bodyPr wrap="none">
+            <a:spAutoFit/>
+          </a:bodyPr>
+          <a:lstStyle/>
+          <a:p>
+            <a:pPr>
+              <a:defRPr sz="1600" b="1">
+                <a:solidFill>
+                  <a:srgbClr val="0066CC"/>
+                </a:solidFill>
+                <a:latin typeface="Segoe UI"/>
+              </a:defRPr>
+            </a:pPr>
+            <a:r>
+              <a:t>Multi-Site Testing</a:t>
+            </a:r>
+          </a:p>
+        </p:txBody>
+      </p:sp>
+      <p:sp>
+        <p:nvSpPr>
+          <p:cNvPr id="4" name="TextBox 3"/>
+          <p:cNvSpPr txBox="1"/>
+          <p:nvPr/>
+        </p:nvSpPr>
+        <p:spPr>
+          <a:xfrm>
+            <a:off x="548640" y="658368"/>
+            <a:ext cx="11064240" cy="822960"/>
+          </a:xfrm>
+          <a:prstGeom prst="rect">
+            <a:avLst/>
+          </a:prstGeom>
+          <a:noFill/>
+        </p:spPr>
+        <p:txBody>
+          <a:bodyPr wrap="square">
+            <a:spAutoFit/>
+          </a:bodyPr>
+          <a:lstStyle/>
+          <a:p>
+            <a:pPr>
+              <a:defRPr sz="3200" b="1">
+                <a:solidFill>
+                  <a:srgbClr val="1B2A4A"/>
+                </a:solidFill>
+                <a:latin typeface="Segoe UI"/>
+              </a:defRPr>
+            </a:pPr>
+            <a:r>
+              <a:t>Boxplot Site Population Check — Bad DUT or Bad Station?</a:t>
+            </a:r>
+          </a:p>
+        </p:txBody>
+      </p:sp>
+      <p:cxnSp>
+        <p:nvCxnSpPr>
+          <p:cNvPr id="5" name="Connector 4"/>
+          <p:cNvCxnSpPr/>
+          <p:nvPr/>
+        </p:nvCxnSpPr>
+        <p:spPr>
+          <a:xfrm>
+            <a:off x="548640" y="1417320"/>
+            <a:ext cx="11091672" cy="0"/>
+          </a:xfrm>
+          <a:prstGeom prst="line">
+            <a:avLst/>
+          </a:prstGeom>
+          <a:ln w="28575">
+            <a:solidFill>
+              <a:srgbClr val="0066CC"/>
+            </a:solidFill>
+          </a:ln>
+        </p:spPr>
+        <p:style>
+          <a:lnRef idx="2">
+            <a:schemeClr val="accent1"/>
+          </a:lnRef>
+          <a:fillRef idx="0">
+            <a:schemeClr val="accent1"/>
+          </a:fillRef>
+          <a:effectRef idx="1">
+            <a:schemeClr val="accent1"/>
+          </a:effectRef>
+          <a:fontRef idx="minor">
+            <a:schemeClr val="tx1"/>
+          </a:fontRef>
+        </p:style>
+      </p:cxnSp>
+      <p:sp>
+        <p:nvSpPr>
+          <p:cNvPr id="6" name="TextBox 5"/>
+          <p:cNvSpPr txBox="1"/>
+          <p:nvPr/>
+        </p:nvSpPr>
+        <p:spPr>
+          <a:xfrm>
+            <a:off x="548640" y="6473952"/>
+            <a:ext cx="8229600" cy="320040"/>
+          </a:xfrm>
+          <a:prstGeom prst="rect">
+            <a:avLst/>
+          </a:prstGeom>
+          <a:noFill/>
+        </p:spPr>
+        <p:txBody>
+          <a:bodyPr wrap="none">
+            <a:spAutoFit/>
+          </a:bodyPr>
+          <a:lstStyle/>
+          <a:p>
+            <a:pPr>
+              <a:defRPr sz="1100">
+                <a:solidFill>
+                  <a:srgbClr val="555555"/>
+                </a:solidFill>
+                <a:latin typeface="Segoe UI"/>
+              </a:defRPr>
+            </a:pPr>
+            <a:r>
+              <a:t>padb-tools</a:t>
+            </a:r>
+          </a:p>
+        </p:txBody>
+      </p:sp>
+      <p:sp>
+        <p:nvSpPr>
+          <p:cNvPr id="7" name="TextBox 6"/>
+          <p:cNvSpPr txBox="1"/>
+          <p:nvPr/>
+        </p:nvSpPr>
+        <p:spPr>
+          <a:xfrm>
+            <a:off x="11338560" y="6473952"/>
+            <a:ext cx="548640" cy="320040"/>
+          </a:xfrm>
+          <a:prstGeom prst="rect">
+            <a:avLst/>
+          </a:prstGeom>
+          <a:noFill/>
+        </p:spPr>
+        <p:txBody>
+          <a:bodyPr wrap="none">
+            <a:spAutoFit/>
+          </a:bodyPr>
+          <a:lstStyle/>
+          <a:p>
+            <a:pPr algn="r">
+              <a:defRPr sz="1100">
+                <a:solidFill>
+                  <a:srgbClr val="555555"/>
+                </a:solidFill>
+              </a:defRPr>
+            </a:pPr>
+            <a:r>
+              <a:t>43</a:t>
+            </a:r>
+          </a:p>
+        </p:txBody>
+      </p:sp>
+      <p:sp>
+        <p:nvSpPr>
+          <p:cNvPr id="8" name="TextBox 7"/>
+          <p:cNvSpPr txBox="1"/>
+          <p:nvPr/>
+        </p:nvSpPr>
+        <p:spPr>
+          <a:xfrm>
+            <a:off x="548640" y="1645920"/>
+            <a:ext cx="11064240" cy="4754880"/>
+          </a:xfrm>
+          <a:prstGeom prst="rect">
+            <a:avLst/>
+          </a:prstGeom>
+          <a:noFill/>
+        </p:spPr>
+        <p:txBody>
+          <a:bodyPr wrap="square">
+            <a:spAutoFit/>
+          </a:bodyPr>
+          <a:lstStyle/>
+          <a:p>
+            <a:pPr>
+              <a:spcAft>
+                <a:spcPts val="1000"/>
+              </a:spcAft>
+            </a:pPr>
+            <a:r>
+              <a:rPr sz="1700">
+                <a:solidFill>
+                  <a:srgbClr val="1B2A4A"/>
+                </a:solidFill>
+                <a:latin typeface="Segoe UI"/>
+              </a:rPr>
+              <a:t>•  Tests each non-primary-site DUT's value at each frequency/temperature against the k×IQR fence built from the primary site's own population there</a:t>
+            </a:r>
+          </a:p>
+          <a:p>
+            <a:pPr lvl="1">
+              <a:spcAft>
+                <a:spcPts val="1000"/>
+              </a:spcAft>
+            </a:pPr>
+            <a:r>
+              <a:rPr sz="1500">
+                <a:solidFill>
+                  <a:srgbClr val="1B2A4A"/>
+                </a:solidFill>
+                <a:latin typeface="Segoe UI"/>
+              </a:rPr>
+              <a:t>–  Reuses the exact fence and live k×IQR control the page's own outlier detection already uses — no new statistical method</a:t>
+            </a:r>
+          </a:p>
+          <a:p>
+            <a:pPr>
+              <a:spcAft>
+                <a:spcPts val="1000"/>
+              </a:spcAft>
+            </a:pPr>
+            <a:r>
+              <a:rPr sz="1700">
+                <a:solidFill>
+                  <a:srgbClr val="1B2A4A"/>
+                </a:solidFill>
+                <a:latin typeface="Segoe UI"/>
+              </a:rPr>
+              <a:t>•  Per-DUT summary — checked/outside counts, high/low split, and how many of a DUT's outside points are shared with another DUT at the same spot</a:t>
+            </a:r>
+          </a:p>
+          <a:p>
+            <a:pPr>
+              <a:spcAft>
+                <a:spcPts val="1000"/>
+              </a:spcAft>
+            </a:pPr>
+            <a:r>
+              <a:rPr sz="1700">
+                <a:solidFill>
+                  <a:srgbClr val="1B2A4A"/>
+                </a:solidFill>
+                <a:latin typeface="Segoe UI"/>
+              </a:rPr>
+              <a:t>•  Frequency clusters — every (temp, freq) where 2+ distinct DUTs are simultaneously outside — the strongest signal for a station/fixture issue, not one bad DUT</a:t>
+            </a:r>
+          </a:p>
+          <a:p>
+            <a:pPr>
+              <a:spcAft>
+                <a:spcPts val="1000"/>
+              </a:spcAft>
+            </a:pPr>
+            <a:r>
+              <a:rPr sz="1700">
+                <a:solidFill>
+                  <a:srgbClr val="1B2A4A"/>
+                </a:solidFill>
+                <a:latin typeface="Segoe UI"/>
+              </a:rPr>
+              <a:t>•  Suggested triage tag per DUT: station/systemic &gt; bad DUT &gt; isolated &gt; below-population (benign) &gt; ambiguous — a suggestion, not a verdict</a:t>
+            </a:r>
+          </a:p>
+          <a:p>
+            <a:pPr>
+              <a:spcAft>
+                <a:spcPts val="1000"/>
+              </a:spcAft>
+            </a:pPr>
+            <a:r>
+              <a:rPr sz="1700">
+                <a:solidFill>
+                  <a:srgbClr val="1B2A4A"/>
+                </a:solidFill>
+                <a:latin typeface="Segoe UI"/>
+              </a:rPr>
+              <a:t>•  Real finding on ClockSpurs SR-vs-AMC2 data: all 8 AMC2 DUTs came back "Likely station/systemic," reading systematically quieter than SR — a site calibration signature, not 8 bad units</a:t>
+            </a:r>
+          </a:p>
+        </p:txBody>
+      </p:sp>
+    </p:spTree>
+  </p:cSld>
+  <p:clrMapOvr>
+    <a:masterClrMapping/>
+  </p:clrMapOvr>
+</p:sld>
+</file>
+
+<file path=ppt/slides/slide48.xml><?xml version="1.0" encoding="utf-8"?>
+<p:sld xmlns:a="http://schemas.openxmlformats.org/drawingml/2006/main" xmlns:p="http://schemas.openxmlformats.org/presentationml/2006/main" xmlns:r="http://schemas.openxmlformats.org/officeDocument/2006/relationships">
+  <p:cSld>
+    <p:spTree>
+      <p:nvGrpSpPr>
+        <p:cNvPr id="1" name=""/>
+        <p:cNvGrpSpPr/>
+        <p:nvPr/>
+      </p:nvGrpSpPr>
+      <p:grpSpPr/>
+      <p:sp>
+        <p:nvSpPr>
+          <p:cNvPr id="2" name="Rectangle 1"/>
+          <p:cNvSpPr/>
+          <p:nvPr/>
+        </p:nvSpPr>
+        <p:spPr>
+          <a:xfrm>
+            <a:off x="0" y="0"/>
+            <a:ext cx="12191695" cy="6858000"/>
+          </a:xfrm>
+          <a:prstGeom prst="rect">
+            <a:avLst/>
+          </a:prstGeom>
+          <a:solidFill>
+            <a:srgbClr val="FFFFFF"/>
+          </a:solidFill>
+          <a:ln>
+            <a:noFill/>
+          </a:ln>
+          <a:effectLst/>
+        </p:spPr>
+        <p:style>
+          <a:lnRef idx="1">
+            <a:schemeClr val="accent1"/>
+          </a:lnRef>
+          <a:fillRef idx="3">
+            <a:schemeClr val="accent1"/>
+          </a:fillRef>
+          <a:effectRef idx="2">
+            <a:schemeClr val="accent1"/>
+          </a:effectRef>
+          <a:fontRef idx="minor">
+            <a:schemeClr val="lt1"/>
+          </a:fontRef>
+        </p:style>
+        <p:txBody>
+          <a:bodyPr rtlCol="0" anchor="ctr"/>
+          <a:lstStyle/>
+          <a:p>
+            <a:pPr algn="ctr"/>
+          </a:p>
+        </p:txBody>
+      </p:sp>
+      <p:sp>
+        <p:nvSpPr>
+          <p:cNvPr id="3" name="TextBox 2"/>
+          <p:cNvSpPr txBox="1"/>
+          <p:nvPr/>
+        </p:nvSpPr>
+        <p:spPr>
+          <a:xfrm>
+            <a:off x="548640" y="320040"/>
+            <a:ext cx="7315200" cy="365760"/>
+          </a:xfrm>
+          <a:prstGeom prst="rect">
+            <a:avLst/>
+          </a:prstGeom>
+          <a:noFill/>
+        </p:spPr>
+        <p:txBody>
+          <a:bodyPr wrap="none">
+            <a:spAutoFit/>
+          </a:bodyPr>
+          <a:lstStyle/>
+          <a:p>
+            <a:pPr>
+              <a:defRPr sz="1600" b="1">
+                <a:solidFill>
+                  <a:srgbClr val="0066CC"/>
+                </a:solidFill>
+                <a:latin typeface="Segoe UI"/>
+              </a:defRPr>
+            </a:pPr>
+            <a:r>
+              <a:t>Multi-Site Testing</a:t>
+            </a:r>
+          </a:p>
+        </p:txBody>
+      </p:sp>
+      <p:sp>
+        <p:nvSpPr>
+          <p:cNvPr id="4" name="TextBox 3"/>
+          <p:cNvSpPr txBox="1"/>
+          <p:nvPr/>
+        </p:nvSpPr>
+        <p:spPr>
+          <a:xfrm>
+            <a:off x="548640" y="658368"/>
+            <a:ext cx="11064240" cy="822960"/>
+          </a:xfrm>
+          <a:prstGeom prst="rect">
+            <a:avLst/>
+          </a:prstGeom>
+          <a:noFill/>
+        </p:spPr>
+        <p:txBody>
+          <a:bodyPr wrap="square">
+            <a:spAutoFit/>
+          </a:bodyPr>
+          <a:lstStyle/>
+          <a:p>
+            <a:pPr>
+              <a:defRPr sz="3200" b="1">
+                <a:solidFill>
+                  <a:srgbClr val="1B2A4A"/>
+                </a:solidFill>
+                <a:latin typeface="Segoe UI"/>
+              </a:defRPr>
+            </a:pPr>
+            <a:r>
+              <a:t>Webapp: Compare Two Datasets</a:t>
+            </a:r>
+          </a:p>
+        </p:txBody>
+      </p:sp>
+      <p:cxnSp>
+        <p:nvCxnSpPr>
+          <p:cNvPr id="5" name="Connector 4"/>
+          <p:cNvCxnSpPr/>
+          <p:nvPr/>
+        </p:nvCxnSpPr>
+        <p:spPr>
+          <a:xfrm>
+            <a:off x="548640" y="1417320"/>
+            <a:ext cx="11091672" cy="0"/>
+          </a:xfrm>
+          <a:prstGeom prst="line">
+            <a:avLst/>
+          </a:prstGeom>
+          <a:ln w="28575">
+            <a:solidFill>
+              <a:srgbClr val="0066CC"/>
+            </a:solidFill>
+          </a:ln>
+        </p:spPr>
+        <p:style>
+          <a:lnRef idx="2">
+            <a:schemeClr val="accent1"/>
+          </a:lnRef>
+          <a:fillRef idx="0">
+            <a:schemeClr val="accent1"/>
+          </a:fillRef>
+          <a:effectRef idx="1">
+            <a:schemeClr val="accent1"/>
+          </a:effectRef>
+          <a:fontRef idx="minor">
+            <a:schemeClr val="tx1"/>
+          </a:fontRef>
+        </p:style>
+      </p:cxnSp>
+      <p:sp>
+        <p:nvSpPr>
+          <p:cNvPr id="6" name="TextBox 5"/>
+          <p:cNvSpPr txBox="1"/>
+          <p:nvPr/>
+        </p:nvSpPr>
+        <p:spPr>
+          <a:xfrm>
+            <a:off x="548640" y="6473952"/>
+            <a:ext cx="8229600" cy="320040"/>
+          </a:xfrm>
+          <a:prstGeom prst="rect">
+            <a:avLst/>
+          </a:prstGeom>
+          <a:noFill/>
+        </p:spPr>
+        <p:txBody>
+          <a:bodyPr wrap="none">
+            <a:spAutoFit/>
+          </a:bodyPr>
+          <a:lstStyle/>
+          <a:p>
+            <a:pPr>
+              <a:defRPr sz="1100">
+                <a:solidFill>
+                  <a:srgbClr val="555555"/>
+                </a:solidFill>
+                <a:latin typeface="Segoe UI"/>
+              </a:defRPr>
+            </a:pPr>
+            <a:r>
+              <a:t>padb-tools</a:t>
+            </a:r>
+          </a:p>
+        </p:txBody>
+      </p:sp>
+      <p:sp>
+        <p:nvSpPr>
+          <p:cNvPr id="7" name="TextBox 6"/>
+          <p:cNvSpPr txBox="1"/>
+          <p:nvPr/>
+        </p:nvSpPr>
+        <p:spPr>
+          <a:xfrm>
+            <a:off x="11338560" y="6473952"/>
+            <a:ext cx="548640" cy="320040"/>
+          </a:xfrm>
+          <a:prstGeom prst="rect">
+            <a:avLst/>
+          </a:prstGeom>
+          <a:noFill/>
+        </p:spPr>
+        <p:txBody>
+          <a:bodyPr wrap="none">
+            <a:spAutoFit/>
+          </a:bodyPr>
+          <a:lstStyle/>
+          <a:p>
+            <a:pPr algn="r">
+              <a:defRPr sz="1100">
+                <a:solidFill>
+                  <a:srgbClr val="555555"/>
+                </a:solidFill>
+              </a:defRPr>
+            </a:pPr>
+            <a:r>
+              <a:t>44</a:t>
+            </a:r>
+          </a:p>
+        </p:txBody>
+      </p:sp>
+      <p:sp>
+        <p:nvSpPr>
+          <p:cNvPr id="8" name="TextBox 7"/>
+          <p:cNvSpPr txBox="1"/>
+          <p:nvPr/>
+        </p:nvSpPr>
+        <p:spPr>
+          <a:xfrm>
+            <a:off x="548640" y="1645920"/>
+            <a:ext cx="11064240" cy="4754880"/>
+          </a:xfrm>
+          <a:prstGeom prst="rect">
+            <a:avLst/>
+          </a:prstGeom>
+          <a:noFill/>
+        </p:spPr>
+        <p:txBody>
+          <a:bodyPr wrap="square">
+            <a:spAutoFit/>
+          </a:bodyPr>
+          <a:lstStyle/>
+          <a:p>
+            <a:pPr>
+              <a:spcAft>
+                <a:spcPts val="1000"/>
+              </a:spcAft>
+            </a:pPr>
+            <a:r>
+              <a:rPr sz="1700">
+                <a:solidFill>
+                  <a:srgbClr val="1B2A4A"/>
+                </a:solidFill>
+                <a:latin typeface="Segoe UI"/>
+              </a:rPr>
+              <a:t>•  Collapsed-by-default panel in the web app (a corner case — mainly useful the first time a new site comes online)</a:t>
+            </a:r>
+          </a:p>
+          <a:p>
+            <a:pPr>
+              <a:spcAft>
+                <a:spcPts val="1000"/>
+              </a:spcAft>
+            </a:pPr>
+            <a:r>
+              <a:rPr sz="1700">
+                <a:solidFill>
+                  <a:srgbClr val="1B2A4A"/>
+                </a:solidFill>
+                <a:latin typeface="Segoe UI"/>
+              </a:rPr>
+              <a:t>•  Pick two already-extracted CSVs (auto-discovered from disk), name each site, pick the primary, and Create &amp; Run in one step — no hand-written job.json needed</a:t>
+            </a:r>
+          </a:p>
+          <a:p>
+            <a:pPr>
+              <a:spcAft>
+                <a:spcPts val="1000"/>
+              </a:spcAft>
+            </a:pPr>
+            <a:r>
+              <a:rPr sz="1700">
+                <a:solidFill>
+                  <a:srgbClr val="1B2A4A"/>
+                </a:solidFill>
+                <a:latin typeface="Segoe UI"/>
+              </a:rPr>
+              <a:t>•  Validates first: a genuine measurement-unit mismatch (e.g. dBc vs. dBm) blocks with an explanation, with an explicit override to proceed anyway</a:t>
+            </a:r>
+          </a:p>
+          <a:p>
+            <a:pPr lvl="1">
+              <a:spcAft>
+                <a:spcPts val="1000"/>
+              </a:spcAft>
+            </a:pPr>
+            <a:r>
+              <a:rPr sz="1500">
+                <a:solidFill>
+                  <a:srgbClr val="1B2A4A"/>
+                </a:solidFill>
+                <a:latin typeface="Segoe UI"/>
+              </a:rPr>
+              <a:t>–  Softer gaps — missing temperatures/ports, non-overlapping frequency ranges — only warn, never block</a:t>
+            </a:r>
+          </a:p>
+          <a:p>
+            <a:pPr>
+              <a:spcAft>
+                <a:spcPts val="1000"/>
+              </a:spcAft>
+            </a:pPr>
+            <a:r>
+              <a:rPr sz="1700">
+                <a:solidFill>
+                  <a:srgbClr val="1B2A4A"/>
+                </a:solidFill>
+                <a:latin typeface="Segoe UI"/>
+              </a:rPr>
+              <a:t>•  New job defaults to local-only (publish_to left empty) — publishing an ad-hoc comparison test is a deliberate, separate choice</a:t>
+            </a:r>
+          </a:p>
+          <a:p>
+            <a:pPr>
+              <a:spcAft>
+                <a:spcPts val="1000"/>
+              </a:spcAft>
+            </a:pPr>
+            <a:r>
+              <a:rPr sz="1700">
+                <a:solidFill>
+                  <a:srgbClr val="1B2A4A"/>
+                </a:solidFill>
+                <a:latin typeface="Segoe UI"/>
+              </a:rPr>
+              <a:t>•  "Show tooltip help" checkbox (top of every page) toggles hover help across the whole app on/off, remembered across reloads</a:t>
             </a:r>
           </a:p>
         </p:txBody>

--- a/PADB_Simple_and_Interactive.pptx
+++ b/PADB_Simple_and_Interactive.pptx
@@ -18283,7 +18283,7 @@
             <a:avLst/>
           </a:prstGeom>
           <a:solidFill>
-            <a:srgbClr val="1B2A4A"/>
+            <a:srgbClr val="FFFFFF"/>
           </a:solidFill>
           <a:ln>
             <a:noFill/>
@@ -18320,8 +18320,8 @@
         </p:nvSpPr>
         <p:spPr>
           <a:xfrm>
-            <a:off x="822960" y="2743200"/>
-            <a:ext cx="10515600" cy="1097280"/>
+            <a:off x="548640" y="320040"/>
+            <a:ext cx="7315200" cy="365760"/>
           </a:xfrm>
           <a:prstGeom prst="rect">
             <a:avLst/>
@@ -18335,14 +18335,15 @@
           <a:lstStyle/>
           <a:p>
             <a:pPr>
-              <a:defRPr sz="4800" b="1">
-                <a:solidFill>
-                  <a:srgbClr val="FFFFFF"/>
-                </a:solidFill>
+              <a:defRPr sz="1600" b="1">
+                <a:solidFill>
+                  <a:srgbClr val="0066CC"/>
+                </a:solidFill>
+                <a:latin typeface="Segoe UI"/>
               </a:defRPr>
             </a:pPr>
             <a:r>
-              <a:t>Questions?</a:t>
+              <a:t>Multi-Site Testing</a:t>
             </a:r>
           </a:p>
         </p:txBody>
@@ -18355,8 +18356,79 @@
         </p:nvSpPr>
         <p:spPr>
           <a:xfrm>
-            <a:off x="822960" y="3749039"/>
-            <a:ext cx="10515600" cy="640080"/>
+            <a:off x="548640" y="658368"/>
+            <a:ext cx="11064240" cy="822960"/>
+          </a:xfrm>
+          <a:prstGeom prst="rect">
+            <a:avLst/>
+          </a:prstGeom>
+          <a:noFill/>
+        </p:spPr>
+        <p:txBody>
+          <a:bodyPr wrap="square">
+            <a:spAutoFit/>
+          </a:bodyPr>
+          <a:lstStyle/>
+          <a:p>
+            <a:pPr>
+              <a:defRPr sz="3200" b="1">
+                <a:solidFill>
+                  <a:srgbClr val="1B2A4A"/>
+                </a:solidFill>
+                <a:latin typeface="Segoe UI"/>
+              </a:defRPr>
+            </a:pPr>
+            <a:r>
+              <a:t>Cross-Site Comparison — compare_csv</a:t>
+            </a:r>
+          </a:p>
+        </p:txBody>
+      </p:sp>
+      <p:cxnSp>
+        <p:nvCxnSpPr>
+          <p:cNvPr id="5" name="Connector 4"/>
+          <p:cNvCxnSpPr/>
+          <p:nvPr/>
+        </p:nvCxnSpPr>
+        <p:spPr>
+          <a:xfrm>
+            <a:off x="548640" y="1417320"/>
+            <a:ext cx="11091672" cy="0"/>
+          </a:xfrm>
+          <a:prstGeom prst="line">
+            <a:avLst/>
+          </a:prstGeom>
+          <a:ln w="28575">
+            <a:solidFill>
+              <a:srgbClr val="0066CC"/>
+            </a:solidFill>
+          </a:ln>
+        </p:spPr>
+        <p:style>
+          <a:lnRef idx="2">
+            <a:schemeClr val="accent1"/>
+          </a:lnRef>
+          <a:fillRef idx="0">
+            <a:schemeClr val="accent1"/>
+          </a:fillRef>
+          <a:effectRef idx="1">
+            <a:schemeClr val="accent1"/>
+          </a:effectRef>
+          <a:fontRef idx="minor">
+            <a:schemeClr val="tx1"/>
+          </a:fontRef>
+        </p:style>
+      </p:cxnSp>
+      <p:sp>
+        <p:nvSpPr>
+          <p:cNvPr id="6" name="TextBox 5"/>
+          <p:cNvSpPr txBox="1"/>
+          <p:nvPr/>
+        </p:nvSpPr>
+        <p:spPr>
+          <a:xfrm>
+            <a:off x="548640" y="6473952"/>
+            <a:ext cx="8229600" cy="320040"/>
           </a:xfrm>
           <a:prstGeom prst="rect">
             <a:avLst/>
@@ -18370,15 +18442,185 @@
           <a:lstStyle/>
           <a:p>
             <a:pPr>
-              <a:defRPr sz="1800">
-                <a:solidFill>
-                  <a:srgbClr val="9FC5FF"/>
-                </a:solidFill>
-                <a:latin typeface="Consolas"/>
+              <a:defRPr sz="1100">
+                <a:solidFill>
+                  <a:srgbClr val="555555"/>
+                </a:solidFill>
+                <a:latin typeface="Segoe UI"/>
               </a:defRPr>
             </a:pPr>
             <a:r>
-              <a:t>C:\apps\padb\tools   |   /padb-tools</a:t>
+              <a:t>padb-tools</a:t>
+            </a:r>
+          </a:p>
+        </p:txBody>
+      </p:sp>
+      <p:sp>
+        <p:nvSpPr>
+          <p:cNvPr id="7" name="TextBox 6"/>
+          <p:cNvSpPr txBox="1"/>
+          <p:nvPr/>
+        </p:nvSpPr>
+        <p:spPr>
+          <a:xfrm>
+            <a:off x="11338560" y="6473952"/>
+            <a:ext cx="548640" cy="320040"/>
+          </a:xfrm>
+          <a:prstGeom prst="rect">
+            <a:avLst/>
+          </a:prstGeom>
+          <a:noFill/>
+        </p:spPr>
+        <p:txBody>
+          <a:bodyPr wrap="none">
+            <a:spAutoFit/>
+          </a:bodyPr>
+          <a:lstStyle/>
+          <a:p>
+            <a:pPr algn="r">
+              <a:defRPr sz="1100">
+                <a:solidFill>
+                  <a:srgbClr val="555555"/>
+                </a:solidFill>
+              </a:defRPr>
+            </a:pPr>
+            <a:r>
+              <a:t>42</a:t>
+            </a:r>
+          </a:p>
+        </p:txBody>
+      </p:sp>
+      <p:sp>
+        <p:nvSpPr>
+          <p:cNvPr id="8" name="TextBox 7"/>
+          <p:cNvSpPr txBox="1"/>
+          <p:nvPr/>
+        </p:nvSpPr>
+        <p:spPr>
+          <a:xfrm>
+            <a:off x="548640" y="1645920"/>
+            <a:ext cx="11064240" cy="4754880"/>
+          </a:xfrm>
+          <a:prstGeom prst="rect">
+            <a:avLst/>
+          </a:prstGeom>
+          <a:noFill/>
+        </p:spPr>
+        <p:txBody>
+          <a:bodyPr wrap="square">
+            <a:spAutoFit/>
+          </a:bodyPr>
+          <a:lstStyle/>
+          <a:p>
+            <a:pPr>
+              <a:spcAft>
+                <a:spcPts val="1000"/>
+              </a:spcAft>
+            </a:pPr>
+            <a:r>
+              <a:rPr sz="1700">
+                <a:solidFill>
+                  <a:srgbClr val="1B2A4A"/>
+                </a:solidFill>
+                <a:latin typeface="Segoe UI"/>
+              </a:rPr>
+              <a:t>•  Compares two sites' data (e.g. an established site vs. a newly-stood-up site) without hand-merging CSVs</a:t>
+            </a:r>
+          </a:p>
+          <a:p>
+            <a:pPr>
+              <a:spcAft>
+                <a:spcPts val="1000"/>
+              </a:spcAft>
+            </a:pPr>
+            <a:r>
+              <a:rPr sz="1700">
+                <a:solidFill>
+                  <a:srgbClr val="1B2A4A"/>
+                </a:solidFill>
+                <a:latin typeface="Segoe UI"/>
+              </a:rPr>
+              <a:t>•  job.json: "compare_csv": {"SR": "path...", "AMC2": "path..."}, "primary_site": "SR"</a:t>
+            </a:r>
+          </a:p>
+          <a:p>
+            <a:pPr lvl="1">
+              <a:spcAft>
+                <a:spcPts val="1000"/>
+              </a:spcAft>
+            </a:pPr>
+            <a:r>
+              <a:rPr sz="1500">
+                <a:solidFill>
+                  <a:srgbClr val="1B2A4A"/>
+                </a:solidFill>
+                <a:latin typeface="Segoe UI"/>
+              </a:rPr>
+              <a:t>–  primary_site is the reference population for the boxplot check below — no effect on other views</a:t>
+            </a:r>
+          </a:p>
+          <a:p>
+            <a:pPr>
+              <a:spcAft>
+                <a:spcPts val="1000"/>
+              </a:spcAft>
+            </a:pPr>
+            <a:r>
+              <a:rPr sz="1700">
+                <a:solidFill>
+                  <a:srgbClr val="1B2A4A"/>
+                </a:solidFill>
+                <a:latin typeface="Segoe UI"/>
+              </a:rPr>
+              <a:t>•  Mechanism: each site's own CSV is tagged "Site: &lt;name&gt;" in its Group text and merged — the normal single-CSV pipeline runs completely unchanged</a:t>
+            </a:r>
+          </a:p>
+          <a:p>
+            <a:pPr lvl="1">
+              <a:spcAft>
+                <a:spcPts val="1000"/>
+              </a:spcAft>
+            </a:pPr>
+            <a:r>
+              <a:rPr sz="1500">
+                <a:solidFill>
+                  <a:srgbClr val="1B2A4A"/>
+                </a:solidFill>
+                <a:latin typeface="Segoe UI"/>
+              </a:rPr>
+              <a:t>–  "Site" becomes a real, filterable/groupable condition dimension for free, same as Port or Serial</a:t>
+            </a:r>
+          </a:p>
+          <a:p>
+            <a:pPr>
+              <a:spcAft>
+                <a:spcPts val="1000"/>
+              </a:spcAft>
+            </a:pPr>
+            <a:r>
+              <a:rPr sz="1700">
+                <a:solidFill>
+                  <a:srgbClr val="1B2A4A"/>
+                </a:solidFill>
+                <a:latin typeface="Segoe UI"/>
+              </a:rPr>
+              <a:t>•  Deliberately tolerant of imperfect data — mismatched columns, one site missing spec limits, narrower temperature/port coverage are all expected, not errors</a:t>
+            </a:r>
+          </a:p>
+          <a:p>
+            <a:pPr>
+              <a:spcAft>
+                <a:spcPts val="1000"/>
+              </a:spcAft>
+            </a:pPr>
+            <a:r>
+              <a:rPr sz="1700">
+                <a:solidFill>
+                  <a:srgbClr val="1B2A4A"/>
+                </a:solidFill>
+                <a:latin typeface="Segoe UI"/>
+              </a:rPr>
+              <a:t>•  An always-visible banner flags real coverage gaps between sites (e.g. missing temperatures/ports) — numeric formatting differences between sites never falsely count as a gap</a:t>
             </a:r>
           </a:p>
         </p:txBody>
@@ -18416,7 +18658,7 @@
             <a:avLst/>
           </a:prstGeom>
           <a:solidFill>
-            <a:srgbClr val="F2F4F8"/>
+            <a:srgbClr val="FFFFFF"/>
           </a:solidFill>
           <a:ln>
             <a:noFill/>
@@ -18453,8 +18695,8 @@
         </p:nvSpPr>
         <p:spPr>
           <a:xfrm>
-            <a:off x="822960" y="2743200"/>
-            <a:ext cx="10515600" cy="914400"/>
+            <a:off x="548640" y="320040"/>
+            <a:ext cx="7315200" cy="365760"/>
           </a:xfrm>
           <a:prstGeom prst="rect">
             <a:avLst/>
@@ -18468,28 +18710,100 @@
           <a:lstStyle/>
           <a:p>
             <a:pPr>
-              <a:defRPr sz="4400" b="1">
+              <a:defRPr sz="1600" b="1">
+                <a:solidFill>
+                  <a:srgbClr val="0066CC"/>
+                </a:solidFill>
+                <a:latin typeface="Segoe UI"/>
+              </a:defRPr>
+            </a:pPr>
+            <a:r>
+              <a:t>Multi-Site Testing</a:t>
+            </a:r>
+          </a:p>
+        </p:txBody>
+      </p:sp>
+      <p:sp>
+        <p:nvSpPr>
+          <p:cNvPr id="4" name="TextBox 3"/>
+          <p:cNvSpPr txBox="1"/>
+          <p:nvPr/>
+        </p:nvSpPr>
+        <p:spPr>
+          <a:xfrm>
+            <a:off x="548640" y="658368"/>
+            <a:ext cx="11064240" cy="822960"/>
+          </a:xfrm>
+          <a:prstGeom prst="rect">
+            <a:avLst/>
+          </a:prstGeom>
+          <a:noFill/>
+        </p:spPr>
+        <p:txBody>
+          <a:bodyPr wrap="square">
+            <a:spAutoFit/>
+          </a:bodyPr>
+          <a:lstStyle/>
+          <a:p>
+            <a:pPr>
+              <a:defRPr sz="3200" b="1">
                 <a:solidFill>
                   <a:srgbClr val="1B2A4A"/>
                 </a:solidFill>
+                <a:latin typeface="Segoe UI"/>
               </a:defRPr>
             </a:pPr>
             <a:r>
-              <a:t>Appendix</a:t>
-            </a:r>
-          </a:p>
-        </p:txBody>
-      </p:sp>
-      <p:sp>
-        <p:nvSpPr>
-          <p:cNvPr id="4" name="TextBox 3"/>
-          <p:cNvSpPr txBox="1"/>
-          <p:nvPr/>
-        </p:nvSpPr>
-        <p:spPr>
-          <a:xfrm>
-            <a:off x="822960" y="3566160"/>
-            <a:ext cx="10515600" cy="640080"/>
+              <a:t>Site Population Check — DUT or Station?</a:t>
+            </a:r>
+          </a:p>
+        </p:txBody>
+      </p:sp>
+      <p:cxnSp>
+        <p:nvCxnSpPr>
+          <p:cNvPr id="5" name="Connector 4"/>
+          <p:cNvCxnSpPr/>
+          <p:nvPr/>
+        </p:nvCxnSpPr>
+        <p:spPr>
+          <a:xfrm>
+            <a:off x="548640" y="1417320"/>
+            <a:ext cx="11091672" cy="0"/>
+          </a:xfrm>
+          <a:prstGeom prst="line">
+            <a:avLst/>
+          </a:prstGeom>
+          <a:ln w="28575">
+            <a:solidFill>
+              <a:srgbClr val="0066CC"/>
+            </a:solidFill>
+          </a:ln>
+        </p:spPr>
+        <p:style>
+          <a:lnRef idx="2">
+            <a:schemeClr val="accent1"/>
+          </a:lnRef>
+          <a:fillRef idx="0">
+            <a:schemeClr val="accent1"/>
+          </a:fillRef>
+          <a:effectRef idx="1">
+            <a:schemeClr val="accent1"/>
+          </a:effectRef>
+          <a:fontRef idx="minor">
+            <a:schemeClr val="tx1"/>
+          </a:fontRef>
+        </p:style>
+      </p:cxnSp>
+      <p:sp>
+        <p:nvSpPr>
+          <p:cNvPr id="6" name="TextBox 5"/>
+          <p:cNvSpPr txBox="1"/>
+          <p:nvPr/>
+        </p:nvSpPr>
+        <p:spPr>
+          <a:xfrm>
+            <a:off x="548640" y="6473952"/>
+            <a:ext cx="8229600" cy="320040"/>
           </a:xfrm>
           <a:prstGeom prst="rect">
             <a:avLst/>
@@ -18503,14 +18817,169 @@
           <a:lstStyle/>
           <a:p>
             <a:pPr>
-              <a:defRPr sz="2200">
-                <a:solidFill>
-                  <a:srgbClr val="0066CC"/>
-                </a:solidFill>
+              <a:defRPr sz="1100">
+                <a:solidFill>
+                  <a:srgbClr val="555555"/>
+                </a:solidFill>
+                <a:latin typeface="Segoe UI"/>
               </a:defRPr>
             </a:pPr>
             <a:r>
-              <a:t>Setting Up From Zero — Assumes No Prior Access</a:t>
+              <a:t>padb-tools</a:t>
+            </a:r>
+          </a:p>
+        </p:txBody>
+      </p:sp>
+      <p:sp>
+        <p:nvSpPr>
+          <p:cNvPr id="7" name="TextBox 6"/>
+          <p:cNvSpPr txBox="1"/>
+          <p:nvPr/>
+        </p:nvSpPr>
+        <p:spPr>
+          <a:xfrm>
+            <a:off x="11338560" y="6473952"/>
+            <a:ext cx="548640" cy="320040"/>
+          </a:xfrm>
+          <a:prstGeom prst="rect">
+            <a:avLst/>
+          </a:prstGeom>
+          <a:noFill/>
+        </p:spPr>
+        <p:txBody>
+          <a:bodyPr wrap="none">
+            <a:spAutoFit/>
+          </a:bodyPr>
+          <a:lstStyle/>
+          <a:p>
+            <a:pPr algn="r">
+              <a:defRPr sz="1100">
+                <a:solidFill>
+                  <a:srgbClr val="555555"/>
+                </a:solidFill>
+              </a:defRPr>
+            </a:pPr>
+            <a:r>
+              <a:t>43</a:t>
+            </a:r>
+          </a:p>
+        </p:txBody>
+      </p:sp>
+      <p:sp>
+        <p:nvSpPr>
+          <p:cNvPr id="8" name="TextBox 7"/>
+          <p:cNvSpPr txBox="1"/>
+          <p:nvPr/>
+        </p:nvSpPr>
+        <p:spPr>
+          <a:xfrm>
+            <a:off x="548640" y="1645920"/>
+            <a:ext cx="11064240" cy="4754880"/>
+          </a:xfrm>
+          <a:prstGeom prst="rect">
+            <a:avLst/>
+          </a:prstGeom>
+          <a:noFill/>
+        </p:spPr>
+        <p:txBody>
+          <a:bodyPr wrap="square">
+            <a:spAutoFit/>
+          </a:bodyPr>
+          <a:lstStyle/>
+          <a:p>
+            <a:pPr>
+              <a:spcAft>
+                <a:spcPts val="1000"/>
+              </a:spcAft>
+            </a:pPr>
+            <a:r>
+              <a:rPr sz="1700">
+                <a:solidFill>
+                  <a:srgbClr val="1B2A4A"/>
+                </a:solidFill>
+                <a:latin typeface="Segoe UI"/>
+              </a:rPr>
+              <a:t>•  Tests each non-primary-site DUT's value at each frequency/temperature against the k×IQR fence built from the primary site's own population there</a:t>
+            </a:r>
+          </a:p>
+          <a:p>
+            <a:pPr lvl="1">
+              <a:spcAft>
+                <a:spcPts val="1000"/>
+              </a:spcAft>
+            </a:pPr>
+            <a:r>
+              <a:rPr sz="1500">
+                <a:solidFill>
+                  <a:srgbClr val="1B2A4A"/>
+                </a:solidFill>
+                <a:latin typeface="Segoe UI"/>
+              </a:rPr>
+              <a:t>–  Reuses the exact fence and live k×IQR control the page's own outlier detection already uses — no new statistical method</a:t>
+            </a:r>
+          </a:p>
+          <a:p>
+            <a:pPr>
+              <a:spcAft>
+                <a:spcPts val="1000"/>
+              </a:spcAft>
+            </a:pPr>
+            <a:r>
+              <a:rPr sz="1700">
+                <a:solidFill>
+                  <a:srgbClr val="1B2A4A"/>
+                </a:solidFill>
+                <a:latin typeface="Segoe UI"/>
+              </a:rPr>
+              <a:t>•  Per-DUT summary — checked/outside counts, high/low split, and how many of a DUT's outside points are shared with another DUT at the same spot</a:t>
+            </a:r>
+          </a:p>
+          <a:p>
+            <a:pPr>
+              <a:spcAft>
+                <a:spcPts val="1000"/>
+              </a:spcAft>
+            </a:pPr>
+            <a:r>
+              <a:rPr sz="1700">
+                <a:solidFill>
+                  <a:srgbClr val="1B2A4A"/>
+                </a:solidFill>
+                <a:latin typeface="Segoe UI"/>
+              </a:rPr>
+              <a:t>•  Frequency clusters — every (temp, freq) where 2+ distinct DUTs are simultaneously outside — the strongest signal for a station/fixture issue, not one bad DUT</a:t>
+            </a:r>
+          </a:p>
+          <a:p>
+            <a:pPr>
+              <a:spcAft>
+                <a:spcPts val="1000"/>
+              </a:spcAft>
+            </a:pPr>
+            <a:r>
+              <a:rPr sz="1700">
+                <a:solidFill>
+                  <a:srgbClr val="1B2A4A"/>
+                </a:solidFill>
+                <a:latin typeface="Segoe UI"/>
+              </a:rPr>
+              <a:t>•  Suggested triage tag per DUT: station/systemic &gt; bad DUT &gt; isolated &gt; below-population (benign) &gt; ambiguous — a suggestion, not a verdict</a:t>
+            </a:r>
+          </a:p>
+          <a:p>
+            <a:pPr>
+              <a:spcAft>
+                <a:spcPts val="1000"/>
+              </a:spcAft>
+            </a:pPr>
+            <a:r>
+              <a:rPr sz="1700">
+                <a:solidFill>
+                  <a:srgbClr val="1B2A4A"/>
+                </a:solidFill>
+                <a:latin typeface="Segoe UI"/>
+              </a:rPr>
+              <a:t>•  Real finding on ClockSpurs SR-vs-AMC2 data: all 8 AMC2 DUTs came back "Likely station/systemic," reading systematically quieter than SR — a site calibration signature, not 8 bad units</a:t>
             </a:r>
           </a:p>
         </p:txBody>
@@ -18608,7 +19077,7 @@
               </a:defRPr>
             </a:pPr>
             <a:r>
-              <a:t>Appendix</a:t>
+              <a:t>Multi-Site Testing</a:t>
             </a:r>
           </a:p>
         </p:txBody>
@@ -18644,7 +19113,7 @@
               </a:defRPr>
             </a:pPr>
             <a:r>
-              <a:t>Getting the Code</a:t>
+              <a:t>Webapp: Compare Two Datasets</a:t>
             </a:r>
           </a:p>
         </p:txBody>
@@ -18750,7 +19219,7 @@
               </a:defRPr>
             </a:pPr>
             <a:r>
-              <a:t>43</a:t>
+              <a:t>44</a:t>
             </a:r>
           </a:p>
         </p:txBody>
@@ -18763,8 +19232,8 @@
         </p:nvSpPr>
         <p:spPr>
           <a:xfrm>
-            <a:off x="548640" y="1691640"/>
-            <a:ext cx="11064240" cy="365760"/>
+            <a:off x="548640" y="1645920"/>
+            <a:ext cx="11064240" cy="4754880"/>
           </a:xfrm>
           <a:prstGeom prst="rect">
             <a:avLst/>
@@ -18783,99 +19252,15 @@
               </a:spcAft>
             </a:pPr>
             <a:r>
-              <a:rPr sz="1900">
+              <a:rPr sz="1700">
                 <a:solidFill>
                   <a:srgbClr val="1B2A4A"/>
                 </a:solidFill>
                 <a:latin typeface="Segoe UI"/>
               </a:rPr>
-              <a:t>•  This repo isn't on a company-wide share by default — copy it from:</a:t>
-            </a:r>
-          </a:p>
-        </p:txBody>
-      </p:sp>
-      <p:sp>
-        <p:nvSpPr>
-          <p:cNvPr id="9" name="Rounded Rectangle 8"/>
-          <p:cNvSpPr/>
-          <p:nvPr/>
-        </p:nvSpPr>
-        <p:spPr>
-          <a:xfrm>
-            <a:off x="548640" y="2103120"/>
-            <a:ext cx="11064240" cy="502920"/>
-          </a:xfrm>
-          <a:prstGeom prst="roundRect">
-            <a:avLst>
-              <a:gd name="adj" fmla="val 4000"/>
-            </a:avLst>
-          </a:prstGeom>
-          <a:solidFill>
-            <a:srgbClr val="282C34"/>
-          </a:solidFill>
-          <a:ln>
-            <a:solidFill>
-              <a:srgbClr val="111318"/>
-            </a:solidFill>
-          </a:ln>
-          <a:effectLst/>
-        </p:spPr>
-        <p:style>
-          <a:lnRef idx="1">
-            <a:schemeClr val="accent1"/>
-          </a:lnRef>
-          <a:fillRef idx="3">
-            <a:schemeClr val="accent1"/>
-          </a:fillRef>
-          <a:effectRef idx="2">
-            <a:schemeClr val="accent1"/>
-          </a:effectRef>
-          <a:fontRef idx="minor">
-            <a:schemeClr val="lt1"/>
-          </a:fontRef>
-        </p:style>
-        <p:txBody>
-          <a:bodyPr rtlCol="0" anchor="t" wrap="square" lIns="228600" rIns="228600" tIns="164592" bIns="164592"/>
-          <a:lstStyle/>
-          <a:p>
-            <a:pPr algn="l">
-              <a:spcAft>
-                <a:spcPts val="200"/>
-              </a:spcAft>
-            </a:pPr>
-            <a:r>
-              <a:rPr sz="1350">
-                <a:solidFill>
-                  <a:srgbClr val="E6E6E6"/>
-                </a:solidFill>
-                <a:latin typeface="Consolas"/>
-              </a:rPr>
-              <a:t>\\srsnas01.srs.is.keysight.com\prod\MIDRF3\SG6311A\Padb-tools\tools</a:t>
-            </a:r>
-          </a:p>
-        </p:txBody>
-      </p:sp>
-      <p:sp>
-        <p:nvSpPr>
-          <p:cNvPr id="10" name="TextBox 9"/>
-          <p:cNvSpPr txBox="1"/>
-          <p:nvPr/>
-        </p:nvSpPr>
-        <p:spPr>
-          <a:xfrm>
-            <a:off x="548640" y="2788920"/>
-            <a:ext cx="11064240" cy="365760"/>
-          </a:xfrm>
-          <a:prstGeom prst="rect">
-            <a:avLst/>
-          </a:prstGeom>
-          <a:noFill/>
-        </p:spPr>
-        <p:txBody>
-          <a:bodyPr wrap="square">
-            <a:spAutoFit/>
-          </a:bodyPr>
-          <a:lstStyle/>
+              <a:t>•  Collapsed-by-default panel in the web app (a corner case — mainly useful the first time a new site comes online)</a:t>
+            </a:r>
+          </a:p>
           <a:p>
             <a:pPr>
               <a:spcAft>
@@ -18883,38 +19268,15 @@
               </a:spcAft>
             </a:pPr>
             <a:r>
-              <a:rPr sz="1800">
+              <a:rPr sz="1700">
                 <a:solidFill>
                   <a:srgbClr val="1B2A4A"/>
                 </a:solidFill>
                 <a:latin typeface="Segoe UI"/>
               </a:rPr>
-              <a:t>•  Copy that whole "tools" folder to a local path, e.g. C:\apps\padb\tools</a:t>
-            </a:r>
-          </a:p>
-        </p:txBody>
-      </p:sp>
-      <p:sp>
-        <p:nvSpPr>
-          <p:cNvPr id="11" name="TextBox 10"/>
-          <p:cNvSpPr txBox="1"/>
-          <p:nvPr/>
-        </p:nvSpPr>
-        <p:spPr>
-          <a:xfrm>
-            <a:off x="548640" y="3429000"/>
-            <a:ext cx="11064240" cy="914400"/>
-          </a:xfrm>
-          <a:prstGeom prst="rect">
-            <a:avLst/>
-          </a:prstGeom>
-          <a:noFill/>
-        </p:spPr>
-        <p:txBody>
-          <a:bodyPr wrap="square">
-            <a:spAutoFit/>
-          </a:bodyPr>
-          <a:lstStyle/>
+              <a:t>•  Pick two already-extracted CSVs (auto-discovered from disk), name each site, pick the primary, and Create &amp; Run in one step — no hand-written job.json needed</a:t>
+            </a:r>
+          </a:p>
           <a:p>
             <a:pPr>
               <a:spcAft>
@@ -18928,48 +19290,25 @@
                 </a:solidFill>
                 <a:latin typeface="Segoe UI"/>
               </a:rPr>
-              <a:t>•  padb_batch.py is bundled directly inside the tools folder (added 2026-08-05) —</a:t>
+              <a:t>•  Validates first: a genuine measurement-unit mismatch (e.g. dBc vs. dBm) blocks with an explanation, with an explicit override to proceed anyway</a:t>
             </a:r>
           </a:p>
           <a:p>
             <a:pPr lvl="1">
               <a:spcAft>
-                <a:spcPts val="600"/>
+                <a:spcPts val="1000"/>
               </a:spcAft>
             </a:pPr>
             <a:r>
               <a:rPr sz="1500">
                 <a:solidFill>
-                  <a:srgbClr val="555555"/>
-                </a:solidFill>
-                <a:latin typeface="Segoe UI"/>
-              </a:rPr>
-              <a:t>–  no separate dependency to track down; the whole repo is self-contained</a:t>
-            </a:r>
-          </a:p>
-        </p:txBody>
-      </p:sp>
-      <p:sp>
-        <p:nvSpPr>
-          <p:cNvPr id="12" name="TextBox 11"/>
-          <p:cNvSpPr txBox="1"/>
-          <p:nvPr/>
-        </p:nvSpPr>
-        <p:spPr>
-          <a:xfrm>
-            <a:off x="548640" y="4480560"/>
-            <a:ext cx="11064240" cy="457200"/>
-          </a:xfrm>
-          <a:prstGeom prst="rect">
-            <a:avLst/>
-          </a:prstGeom>
-          <a:noFill/>
-        </p:spPr>
-        <p:txBody>
-          <a:bodyPr wrap="square">
-            <a:spAutoFit/>
-          </a:bodyPr>
-          <a:lstStyle/>
+                  <a:srgbClr val="1B2A4A"/>
+                </a:solidFill>
+                <a:latin typeface="Segoe UI"/>
+              </a:rPr>
+              <a:t>–  Softer gaps — missing temperatures/ports, non-overlapping frequency ranges — only warn, never block</a:t>
+            </a:r>
+          </a:p>
           <a:p>
             <a:pPr>
               <a:spcAft>
@@ -18977,13 +19316,29 @@
               </a:spcAft>
             </a:pPr>
             <a:r>
-              <a:rPr sz="1650">
+              <a:rPr sz="1700">
                 <a:solidFill>
                   <a:srgbClr val="1B2A4A"/>
                 </a:solidFill>
                 <a:latin typeface="Segoe UI"/>
               </a:rPr>
-              <a:t>•  Then follow the Prerequisites and Per-User Config slides earlier in this deck</a:t>
+              <a:t>•  New job defaults to local-only (publish_to left empty) — publishing an ad-hoc comparison test is a deliberate, separate choice</a:t>
+            </a:r>
+          </a:p>
+          <a:p>
+            <a:pPr>
+              <a:spcAft>
+                <a:spcPts val="1000"/>
+              </a:spcAft>
+            </a:pPr>
+            <a:r>
+              <a:rPr sz="1700">
+                <a:solidFill>
+                  <a:srgbClr val="1B2A4A"/>
+                </a:solidFill>
+                <a:latin typeface="Segoe UI"/>
+              </a:rPr>
+              <a:t>•  "Show tooltip help" checkbox (top of every page) toggles hover help across the whole app on/off, remembered across reloads</a:t>
             </a:r>
           </a:p>
         </p:txBody>
@@ -19021,7 +19376,7 @@
             <a:avLst/>
           </a:prstGeom>
           <a:solidFill>
-            <a:srgbClr val="FFFFFF"/>
+            <a:srgbClr val="1B2A4A"/>
           </a:solidFill>
           <a:ln>
             <a:noFill/>
@@ -19058,8 +19413,8 @@
         </p:nvSpPr>
         <p:spPr>
           <a:xfrm>
-            <a:off x="548640" y="320040"/>
-            <a:ext cx="7315200" cy="365760"/>
+            <a:off x="822960" y="2743200"/>
+            <a:ext cx="10515600" cy="1097280"/>
           </a:xfrm>
           <a:prstGeom prst="rect">
             <a:avLst/>
@@ -19073,15 +19428,14 @@
           <a:lstStyle/>
           <a:p>
             <a:pPr>
-              <a:defRPr sz="1600" b="1">
-                <a:solidFill>
-                  <a:srgbClr val="0066CC"/>
-                </a:solidFill>
-                <a:latin typeface="Segoe UI"/>
+              <a:defRPr sz="4800" b="1">
+                <a:solidFill>
+                  <a:srgbClr val="FFFFFF"/>
+                </a:solidFill>
               </a:defRPr>
             </a:pPr>
             <a:r>
-              <a:t>Appendix</a:t>
+              <a:t>Questions?</a:t>
             </a:r>
           </a:p>
         </p:txBody>
@@ -19094,446 +19448,30 @@
         </p:nvSpPr>
         <p:spPr>
           <a:xfrm>
-            <a:off x="548640" y="658368"/>
-            <a:ext cx="11064240" cy="822960"/>
-          </a:xfrm>
-          <a:prstGeom prst="rect">
-            <a:avLst/>
-          </a:prstGeom>
-          <a:noFill/>
-        </p:spPr>
-        <p:txBody>
-          <a:bodyPr wrap="square">
-            <a:spAutoFit/>
-          </a:bodyPr>
-          <a:lstStyle/>
-          <a:p>
-            <a:pPr>
-              <a:defRPr sz="3200" b="1">
-                <a:solidFill>
-                  <a:srgbClr val="1B2A4A"/>
-                </a:solidFill>
-                <a:latin typeface="Segoe UI"/>
+            <a:off x="822960" y="3749039"/>
+            <a:ext cx="10515600" cy="640080"/>
+          </a:xfrm>
+          <a:prstGeom prst="rect">
+            <a:avLst/>
+          </a:prstGeom>
+          <a:noFill/>
+        </p:spPr>
+        <p:txBody>
+          <a:bodyPr wrap="none">
+            <a:spAutoFit/>
+          </a:bodyPr>
+          <a:lstStyle/>
+          <a:p>
+            <a:pPr>
+              <a:defRPr sz="1800">
+                <a:solidFill>
+                  <a:srgbClr val="9FC5FF"/>
+                </a:solidFill>
+                <a:latin typeface="Consolas"/>
               </a:defRPr>
             </a:pPr>
             <a:r>
-              <a:t>First Commands to Verify Your Setup</a:t>
-            </a:r>
-          </a:p>
-        </p:txBody>
-      </p:sp>
-      <p:cxnSp>
-        <p:nvCxnSpPr>
-          <p:cNvPr id="5" name="Connector 4"/>
-          <p:cNvCxnSpPr/>
-          <p:nvPr/>
-        </p:nvCxnSpPr>
-        <p:spPr>
-          <a:xfrm>
-            <a:off x="548640" y="1417320"/>
-            <a:ext cx="11091672" cy="0"/>
-          </a:xfrm>
-          <a:prstGeom prst="line">
-            <a:avLst/>
-          </a:prstGeom>
-          <a:ln w="28575">
-            <a:solidFill>
-              <a:srgbClr val="0066CC"/>
-            </a:solidFill>
-          </a:ln>
-        </p:spPr>
-        <p:style>
-          <a:lnRef idx="2">
-            <a:schemeClr val="accent1"/>
-          </a:lnRef>
-          <a:fillRef idx="0">
-            <a:schemeClr val="accent1"/>
-          </a:fillRef>
-          <a:effectRef idx="1">
-            <a:schemeClr val="accent1"/>
-          </a:effectRef>
-          <a:fontRef idx="minor">
-            <a:schemeClr val="tx1"/>
-          </a:fontRef>
-        </p:style>
-      </p:cxnSp>
-      <p:sp>
-        <p:nvSpPr>
-          <p:cNvPr id="6" name="TextBox 5"/>
-          <p:cNvSpPr txBox="1"/>
-          <p:nvPr/>
-        </p:nvSpPr>
-        <p:spPr>
-          <a:xfrm>
-            <a:off x="548640" y="6473952"/>
-            <a:ext cx="8229600" cy="320040"/>
-          </a:xfrm>
-          <a:prstGeom prst="rect">
-            <a:avLst/>
-          </a:prstGeom>
-          <a:noFill/>
-        </p:spPr>
-        <p:txBody>
-          <a:bodyPr wrap="none">
-            <a:spAutoFit/>
-          </a:bodyPr>
-          <a:lstStyle/>
-          <a:p>
-            <a:pPr>
-              <a:defRPr sz="1100">
-                <a:solidFill>
-                  <a:srgbClr val="555555"/>
-                </a:solidFill>
-                <a:latin typeface="Segoe UI"/>
-              </a:defRPr>
-            </a:pPr>
-            <a:r>
-              <a:t>padb-tools</a:t>
-            </a:r>
-          </a:p>
-        </p:txBody>
-      </p:sp>
-      <p:sp>
-        <p:nvSpPr>
-          <p:cNvPr id="7" name="TextBox 6"/>
-          <p:cNvSpPr txBox="1"/>
-          <p:nvPr/>
-        </p:nvSpPr>
-        <p:spPr>
-          <a:xfrm>
-            <a:off x="11338560" y="6473952"/>
-            <a:ext cx="548640" cy="320040"/>
-          </a:xfrm>
-          <a:prstGeom prst="rect">
-            <a:avLst/>
-          </a:prstGeom>
-          <a:noFill/>
-        </p:spPr>
-        <p:txBody>
-          <a:bodyPr wrap="none">
-            <a:spAutoFit/>
-          </a:bodyPr>
-          <a:lstStyle/>
-          <a:p>
-            <a:pPr algn="r">
-              <a:defRPr sz="1100">
-                <a:solidFill>
-                  <a:srgbClr val="555555"/>
-                </a:solidFill>
-              </a:defRPr>
-            </a:pPr>
-            <a:r>
-              <a:t>44</a:t>
-            </a:r>
-          </a:p>
-        </p:txBody>
-      </p:sp>
-      <p:sp>
-        <p:nvSpPr>
-          <p:cNvPr id="8" name="TextBox 7"/>
-          <p:cNvSpPr txBox="1"/>
-          <p:nvPr/>
-        </p:nvSpPr>
-        <p:spPr>
-          <a:xfrm>
-            <a:off x="548640" y="1691640"/>
-            <a:ext cx="11064240" cy="365760"/>
-          </a:xfrm>
-          <a:prstGeom prst="rect">
-            <a:avLst/>
-          </a:prstGeom>
-          <a:noFill/>
-        </p:spPr>
-        <p:txBody>
-          <a:bodyPr wrap="square">
-            <a:spAutoFit/>
-          </a:bodyPr>
-          <a:lstStyle/>
-          <a:p>
-            <a:pPr>
-              <a:spcAft>
-                <a:spcPts val="1000"/>
-              </a:spcAft>
-            </a:pPr>
-            <a:r>
-              <a:rPr sz="1800">
-                <a:solidFill>
-                  <a:srgbClr val="1B2A4A"/>
-                </a:solidFill>
-                <a:latin typeface="Segoe UI"/>
-              </a:rPr>
-              <a:t>•  From inside the tools folder, confirm everything imports cleanly:</a:t>
-            </a:r>
-          </a:p>
-        </p:txBody>
-      </p:sp>
-      <p:sp>
-        <p:nvSpPr>
-          <p:cNvPr id="9" name="Rounded Rectangle 8"/>
-          <p:cNvSpPr/>
-          <p:nvPr/>
-        </p:nvSpPr>
-        <p:spPr>
-          <a:xfrm>
-            <a:off x="548640" y="2103120"/>
-            <a:ext cx="11064240" cy="502920"/>
-          </a:xfrm>
-          <a:prstGeom prst="roundRect">
-            <a:avLst>
-              <a:gd name="adj" fmla="val 4000"/>
-            </a:avLst>
-          </a:prstGeom>
-          <a:solidFill>
-            <a:srgbClr val="282C34"/>
-          </a:solidFill>
-          <a:ln>
-            <a:solidFill>
-              <a:srgbClr val="111318"/>
-            </a:solidFill>
-          </a:ln>
-          <a:effectLst/>
-        </p:spPr>
-        <p:style>
-          <a:lnRef idx="1">
-            <a:schemeClr val="accent1"/>
-          </a:lnRef>
-          <a:fillRef idx="3">
-            <a:schemeClr val="accent1"/>
-          </a:fillRef>
-          <a:effectRef idx="2">
-            <a:schemeClr val="accent1"/>
-          </a:effectRef>
-          <a:fontRef idx="minor">
-            <a:schemeClr val="lt1"/>
-          </a:fontRef>
-        </p:style>
-        <p:txBody>
-          <a:bodyPr rtlCol="0" anchor="t" wrap="square" lIns="228600" rIns="228600" tIns="164592" bIns="164592"/>
-          <a:lstStyle/>
-          <a:p>
-            <a:pPr algn="l">
-              <a:spcAft>
-                <a:spcPts val="200"/>
-              </a:spcAft>
-            </a:pPr>
-            <a:r>
-              <a:rPr sz="1450">
-                <a:solidFill>
-                  <a:srgbClr val="E6E6E6"/>
-                </a:solidFill>
-                <a:latin typeface="Consolas"/>
-              </a:rPr>
-              <a:t>py -c "import padb_run, padb_v2, padb_config"</a:t>
-            </a:r>
-          </a:p>
-        </p:txBody>
-      </p:sp>
-      <p:sp>
-        <p:nvSpPr>
-          <p:cNvPr id="10" name="TextBox 9"/>
-          <p:cNvSpPr txBox="1"/>
-          <p:nvPr/>
-        </p:nvSpPr>
-        <p:spPr>
-          <a:xfrm>
-            <a:off x="548640" y="2743200"/>
-            <a:ext cx="11064240" cy="365760"/>
-          </a:xfrm>
-          <a:prstGeom prst="rect">
-            <a:avLst/>
-          </a:prstGeom>
-          <a:noFill/>
-        </p:spPr>
-        <p:txBody>
-          <a:bodyPr wrap="square">
-            <a:spAutoFit/>
-          </a:bodyPr>
-          <a:lstStyle/>
-          <a:p>
-            <a:pPr>
-              <a:spcAft>
-                <a:spcPts val="1000"/>
-              </a:spcAft>
-            </a:pPr>
-            <a:r>
-              <a:rPr sz="1700">
-                <a:solidFill>
-                  <a:srgbClr val="1B2A4A"/>
-                </a:solidFill>
-                <a:latin typeface="Segoe UI"/>
-              </a:rPr>
-              <a:t>•  No output and no traceback = success</a:t>
-            </a:r>
-          </a:p>
-        </p:txBody>
-      </p:sp>
-      <p:sp>
-        <p:nvSpPr>
-          <p:cNvPr id="11" name="TextBox 10"/>
-          <p:cNvSpPr txBox="1"/>
-          <p:nvPr/>
-        </p:nvSpPr>
-        <p:spPr>
-          <a:xfrm>
-            <a:off x="548640" y="3291840"/>
-            <a:ext cx="11064240" cy="365760"/>
-          </a:xfrm>
-          <a:prstGeom prst="rect">
-            <a:avLst/>
-          </a:prstGeom>
-          <a:noFill/>
-        </p:spPr>
-        <p:txBody>
-          <a:bodyPr wrap="square">
-            <a:spAutoFit/>
-          </a:bodyPr>
-          <a:lstStyle/>
-          <a:p>
-            <a:pPr>
-              <a:spcAft>
-                <a:spcPts val="1000"/>
-              </a:spcAft>
-            </a:pPr>
-            <a:r>
-              <a:rPr sz="1800">
-                <a:solidFill>
-                  <a:srgbClr val="1B2A4A"/>
-                </a:solidFill>
-                <a:latin typeface="Segoe UI"/>
-              </a:rPr>
-              <a:t>•  Then generate your first job.json from any pod you have access to:</a:t>
-            </a:r>
-          </a:p>
-        </p:txBody>
-      </p:sp>
-      <p:sp>
-        <p:nvSpPr>
-          <p:cNvPr id="12" name="Rounded Rectangle 11"/>
-          <p:cNvSpPr/>
-          <p:nvPr/>
-        </p:nvSpPr>
-        <p:spPr>
-          <a:xfrm>
-            <a:off x="548640" y="3703320"/>
-            <a:ext cx="11064240" cy="502920"/>
-          </a:xfrm>
-          <a:prstGeom prst="roundRect">
-            <a:avLst>
-              <a:gd name="adj" fmla="val 4000"/>
-            </a:avLst>
-          </a:prstGeom>
-          <a:solidFill>
-            <a:srgbClr val="282C34"/>
-          </a:solidFill>
-          <a:ln>
-            <a:solidFill>
-              <a:srgbClr val="111318"/>
-            </a:solidFill>
-          </a:ln>
-          <a:effectLst/>
-        </p:spPr>
-        <p:style>
-          <a:lnRef idx="1">
-            <a:schemeClr val="accent1"/>
-          </a:lnRef>
-          <a:fillRef idx="3">
-            <a:schemeClr val="accent1"/>
-          </a:fillRef>
-          <a:effectRef idx="2">
-            <a:schemeClr val="accent1"/>
-          </a:effectRef>
-          <a:fontRef idx="minor">
-            <a:schemeClr val="lt1"/>
-          </a:fontRef>
-        </p:style>
-        <p:txBody>
-          <a:bodyPr rtlCol="0" anchor="t" wrap="square" lIns="228600" rIns="228600" tIns="164592" bIns="164592"/>
-          <a:lstStyle/>
-          <a:p>
-            <a:pPr algn="l">
-              <a:spcAft>
-                <a:spcPts val="200"/>
-              </a:spcAft>
-            </a:pPr>
-            <a:r>
-              <a:rPr sz="1450">
-                <a:solidFill>
-                  <a:srgbClr val="E6E6E6"/>
-                </a:solidFill>
-                <a:latin typeface="Consolas"/>
-              </a:rPr>
-              <a:t>py padb_make_job.py YourPod.pod --module YourModule</a:t>
-            </a:r>
-          </a:p>
-        </p:txBody>
-      </p:sp>
-      <p:sp>
-        <p:nvSpPr>
-          <p:cNvPr id="13" name="TextBox 12"/>
-          <p:cNvSpPr txBox="1"/>
-          <p:nvPr/>
-        </p:nvSpPr>
-        <p:spPr>
-          <a:xfrm>
-            <a:off x="548640" y="4343400"/>
-            <a:ext cx="11064240" cy="1463040"/>
-          </a:xfrm>
-          <a:prstGeom prst="rect">
-            <a:avLst/>
-          </a:prstGeom>
-          <a:noFill/>
-        </p:spPr>
-        <p:txBody>
-          <a:bodyPr wrap="square">
-            <a:spAutoFit/>
-          </a:bodyPr>
-          <a:lstStyle/>
-          <a:p>
-            <a:pPr>
-              <a:spcAft>
-                <a:spcPts val="1000"/>
-              </a:spcAft>
-            </a:pPr>
-            <a:r>
-              <a:rPr sz="1700">
-                <a:solidFill>
-                  <a:srgbClr val="1B2A4A"/>
-                </a:solidFill>
-                <a:latin typeface="Segoe UI"/>
-              </a:rPr>
-              <a:t>•  If PADB-R.exe launches and a real window briefly appears, you're fully set up</a:t>
-            </a:r>
-          </a:p>
-          <a:p>
-            <a:pPr>
-              <a:spcAft>
-                <a:spcPts val="1000"/>
-              </a:spcAft>
-            </a:pPr>
-            <a:r>
-              <a:rPr sz="1700">
-                <a:solidFill>
-                  <a:srgbClr val="1B2A4A"/>
-                </a:solidFill>
-                <a:latin typeface="Segoe UI"/>
-              </a:rPr>
-              <a:t>•  Stuck? GETTING_STARTED.md → Quick_Start.md, or type /padb-tools once you're</a:t>
-            </a:r>
-          </a:p>
-          <a:p>
-            <a:pPr lvl="1">
-              <a:spcAft>
-                <a:spcPts val="600"/>
-              </a:spcAft>
-            </a:pPr>
-            <a:r>
-              <a:rPr sz="1500">
-                <a:solidFill>
-                  <a:srgbClr val="555555"/>
-                </a:solidFill>
-                <a:latin typeface="Segoe UI"/>
-              </a:rPr>
-              <a:t>–  working inside the repo</a:t>
+              <a:t>C:\apps\padb\tools   |   /padb-tools</a:t>
             </a:r>
           </a:p>
         </p:txBody>
@@ -19571,7 +19509,7 @@
             <a:avLst/>
           </a:prstGeom>
           <a:solidFill>
-            <a:srgbClr val="FFFFFF"/>
+            <a:srgbClr val="F2F4F8"/>
           </a:solidFill>
           <a:ln>
             <a:noFill/>
@@ -19608,8 +19546,8 @@
         </p:nvSpPr>
         <p:spPr>
           <a:xfrm>
-            <a:off x="548640" y="320040"/>
-            <a:ext cx="7315200" cy="365760"/>
+            <a:off x="822960" y="2743200"/>
+            <a:ext cx="10515600" cy="914400"/>
           </a:xfrm>
           <a:prstGeom prst="rect">
             <a:avLst/>
@@ -19623,292 +19561,49 @@
           <a:lstStyle/>
           <a:p>
             <a:pPr>
-              <a:defRPr sz="1600" b="1">
+              <a:defRPr sz="4400" b="1">
+                <a:solidFill>
+                  <a:srgbClr val="1B2A4A"/>
+                </a:solidFill>
+              </a:defRPr>
+            </a:pPr>
+            <a:r>
+              <a:t>Appendix</a:t>
+            </a:r>
+          </a:p>
+        </p:txBody>
+      </p:sp>
+      <p:sp>
+        <p:nvSpPr>
+          <p:cNvPr id="4" name="TextBox 3"/>
+          <p:cNvSpPr txBox="1"/>
+          <p:nvPr/>
+        </p:nvSpPr>
+        <p:spPr>
+          <a:xfrm>
+            <a:off x="822960" y="3566160"/>
+            <a:ext cx="10515600" cy="640080"/>
+          </a:xfrm>
+          <a:prstGeom prst="rect">
+            <a:avLst/>
+          </a:prstGeom>
+          <a:noFill/>
+        </p:spPr>
+        <p:txBody>
+          <a:bodyPr wrap="none">
+            <a:spAutoFit/>
+          </a:bodyPr>
+          <a:lstStyle/>
+          <a:p>
+            <a:pPr>
+              <a:defRPr sz="2200">
                 <a:solidFill>
                   <a:srgbClr val="0066CC"/>
                 </a:solidFill>
-                <a:latin typeface="Segoe UI"/>
               </a:defRPr>
             </a:pPr>
             <a:r>
-              <a:t>Multi-Site Testing</a:t>
-            </a:r>
-          </a:p>
-        </p:txBody>
-      </p:sp>
-      <p:sp>
-        <p:nvSpPr>
-          <p:cNvPr id="4" name="TextBox 3"/>
-          <p:cNvSpPr txBox="1"/>
-          <p:nvPr/>
-        </p:nvSpPr>
-        <p:spPr>
-          <a:xfrm>
-            <a:off x="548640" y="658368"/>
-            <a:ext cx="11064240" cy="822960"/>
-          </a:xfrm>
-          <a:prstGeom prst="rect">
-            <a:avLst/>
-          </a:prstGeom>
-          <a:noFill/>
-        </p:spPr>
-        <p:txBody>
-          <a:bodyPr wrap="square">
-            <a:spAutoFit/>
-          </a:bodyPr>
-          <a:lstStyle/>
-          <a:p>
-            <a:pPr>
-              <a:defRPr sz="3200" b="1">
-                <a:solidFill>
-                  <a:srgbClr val="1B2A4A"/>
-                </a:solidFill>
-                <a:latin typeface="Segoe UI"/>
-              </a:defRPr>
-            </a:pPr>
-            <a:r>
-              <a:t>Cross-Site Comparison — compare_csv</a:t>
-            </a:r>
-          </a:p>
-        </p:txBody>
-      </p:sp>
-      <p:cxnSp>
-        <p:nvCxnSpPr>
-          <p:cNvPr id="5" name="Connector 4"/>
-          <p:cNvCxnSpPr/>
-          <p:nvPr/>
-        </p:nvCxnSpPr>
-        <p:spPr>
-          <a:xfrm>
-            <a:off x="548640" y="1417320"/>
-            <a:ext cx="11091672" cy="0"/>
-          </a:xfrm>
-          <a:prstGeom prst="line">
-            <a:avLst/>
-          </a:prstGeom>
-          <a:ln w="28575">
-            <a:solidFill>
-              <a:srgbClr val="0066CC"/>
-            </a:solidFill>
-          </a:ln>
-        </p:spPr>
-        <p:style>
-          <a:lnRef idx="2">
-            <a:schemeClr val="accent1"/>
-          </a:lnRef>
-          <a:fillRef idx="0">
-            <a:schemeClr val="accent1"/>
-          </a:fillRef>
-          <a:effectRef idx="1">
-            <a:schemeClr val="accent1"/>
-          </a:effectRef>
-          <a:fontRef idx="minor">
-            <a:schemeClr val="tx1"/>
-          </a:fontRef>
-        </p:style>
-      </p:cxnSp>
-      <p:sp>
-        <p:nvSpPr>
-          <p:cNvPr id="6" name="TextBox 5"/>
-          <p:cNvSpPr txBox="1"/>
-          <p:nvPr/>
-        </p:nvSpPr>
-        <p:spPr>
-          <a:xfrm>
-            <a:off x="548640" y="6473952"/>
-            <a:ext cx="8229600" cy="320040"/>
-          </a:xfrm>
-          <a:prstGeom prst="rect">
-            <a:avLst/>
-          </a:prstGeom>
-          <a:noFill/>
-        </p:spPr>
-        <p:txBody>
-          <a:bodyPr wrap="none">
-            <a:spAutoFit/>
-          </a:bodyPr>
-          <a:lstStyle/>
-          <a:p>
-            <a:pPr>
-              <a:defRPr sz="1100">
-                <a:solidFill>
-                  <a:srgbClr val="555555"/>
-                </a:solidFill>
-                <a:latin typeface="Segoe UI"/>
-              </a:defRPr>
-            </a:pPr>
-            <a:r>
-              <a:t>padb-tools</a:t>
-            </a:r>
-          </a:p>
-        </p:txBody>
-      </p:sp>
-      <p:sp>
-        <p:nvSpPr>
-          <p:cNvPr id="7" name="TextBox 6"/>
-          <p:cNvSpPr txBox="1"/>
-          <p:nvPr/>
-        </p:nvSpPr>
-        <p:spPr>
-          <a:xfrm>
-            <a:off x="11338560" y="6473952"/>
-            <a:ext cx="548640" cy="320040"/>
-          </a:xfrm>
-          <a:prstGeom prst="rect">
-            <a:avLst/>
-          </a:prstGeom>
-          <a:noFill/>
-        </p:spPr>
-        <p:txBody>
-          <a:bodyPr wrap="none">
-            <a:spAutoFit/>
-          </a:bodyPr>
-          <a:lstStyle/>
-          <a:p>
-            <a:pPr algn="r">
-              <a:defRPr sz="1100">
-                <a:solidFill>
-                  <a:srgbClr val="555555"/>
-                </a:solidFill>
-              </a:defRPr>
-            </a:pPr>
-            <a:r>
-              <a:t>42</a:t>
-            </a:r>
-          </a:p>
-        </p:txBody>
-      </p:sp>
-      <p:sp>
-        <p:nvSpPr>
-          <p:cNvPr id="8" name="TextBox 7"/>
-          <p:cNvSpPr txBox="1"/>
-          <p:nvPr/>
-        </p:nvSpPr>
-        <p:spPr>
-          <a:xfrm>
-            <a:off x="548640" y="1645920"/>
-            <a:ext cx="11064240" cy="4754880"/>
-          </a:xfrm>
-          <a:prstGeom prst="rect">
-            <a:avLst/>
-          </a:prstGeom>
-          <a:noFill/>
-        </p:spPr>
-        <p:txBody>
-          <a:bodyPr wrap="square">
-            <a:spAutoFit/>
-          </a:bodyPr>
-          <a:lstStyle/>
-          <a:p>
-            <a:pPr>
-              <a:spcAft>
-                <a:spcPts val="1000"/>
-              </a:spcAft>
-            </a:pPr>
-            <a:r>
-              <a:rPr sz="1700">
-                <a:solidFill>
-                  <a:srgbClr val="1B2A4A"/>
-                </a:solidFill>
-                <a:latin typeface="Segoe UI"/>
-              </a:rPr>
-              <a:t>•  Compares two sites' data (e.g. an established site vs. a newly-stood-up site) without hand-merging CSVs</a:t>
-            </a:r>
-          </a:p>
-          <a:p>
-            <a:pPr>
-              <a:spcAft>
-                <a:spcPts val="1000"/>
-              </a:spcAft>
-            </a:pPr>
-            <a:r>
-              <a:rPr sz="1700">
-                <a:solidFill>
-                  <a:srgbClr val="1B2A4A"/>
-                </a:solidFill>
-                <a:latin typeface="Segoe UI"/>
-              </a:rPr>
-              <a:t>•  job.json: "compare_csv": {"SR": "path...", "AMC2": "path..."}, "primary_site": "SR"</a:t>
-            </a:r>
-          </a:p>
-          <a:p>
-            <a:pPr lvl="1">
-              <a:spcAft>
-                <a:spcPts val="1000"/>
-              </a:spcAft>
-            </a:pPr>
-            <a:r>
-              <a:rPr sz="1500">
-                <a:solidFill>
-                  <a:srgbClr val="1B2A4A"/>
-                </a:solidFill>
-                <a:latin typeface="Segoe UI"/>
-              </a:rPr>
-              <a:t>–  primary_site is the reference population for the boxplot check below — no effect on other views</a:t>
-            </a:r>
-          </a:p>
-          <a:p>
-            <a:pPr>
-              <a:spcAft>
-                <a:spcPts val="1000"/>
-              </a:spcAft>
-            </a:pPr>
-            <a:r>
-              <a:rPr sz="1700">
-                <a:solidFill>
-                  <a:srgbClr val="1B2A4A"/>
-                </a:solidFill>
-                <a:latin typeface="Segoe UI"/>
-              </a:rPr>
-              <a:t>•  Mechanism: each site's own CSV is tagged "Site: &lt;name&gt;" in its Group text and merged — the normal single-CSV pipeline runs completely unchanged</a:t>
-            </a:r>
-          </a:p>
-          <a:p>
-            <a:pPr lvl="1">
-              <a:spcAft>
-                <a:spcPts val="1000"/>
-              </a:spcAft>
-            </a:pPr>
-            <a:r>
-              <a:rPr sz="1500">
-                <a:solidFill>
-                  <a:srgbClr val="1B2A4A"/>
-                </a:solidFill>
-                <a:latin typeface="Segoe UI"/>
-              </a:rPr>
-              <a:t>–  "Site" becomes a real, filterable/groupable condition dimension for free, same as Port or Serial</a:t>
-            </a:r>
-          </a:p>
-          <a:p>
-            <a:pPr>
-              <a:spcAft>
-                <a:spcPts val="1000"/>
-              </a:spcAft>
-            </a:pPr>
-            <a:r>
-              <a:rPr sz="1700">
-                <a:solidFill>
-                  <a:srgbClr val="1B2A4A"/>
-                </a:solidFill>
-                <a:latin typeface="Segoe UI"/>
-              </a:rPr>
-              <a:t>•  Deliberately tolerant of imperfect data — mismatched columns, one site missing spec limits, narrower temperature/port coverage are all expected, not errors</a:t>
-            </a:r>
-          </a:p>
-          <a:p>
-            <a:pPr>
-              <a:spcAft>
-                <a:spcPts val="1000"/>
-              </a:spcAft>
-            </a:pPr>
-            <a:r>
-              <a:rPr sz="1700">
-                <a:solidFill>
-                  <a:srgbClr val="1B2A4A"/>
-                </a:solidFill>
-                <a:latin typeface="Segoe UI"/>
-              </a:rPr>
-              <a:t>•  An always-visible banner flags real coverage gaps between sites (e.g. missing temperatures/ports) — numeric formatting differences between sites never falsely count as a gap</a:t>
+              <a:t>Setting Up From Zero — Assumes No Prior Access</a:t>
             </a:r>
           </a:p>
         </p:txBody>
@@ -20006,7 +19701,7 @@
               </a:defRPr>
             </a:pPr>
             <a:r>
-              <a:t>Multi-Site Testing</a:t>
+              <a:t>Appendix</a:t>
             </a:r>
           </a:p>
         </p:txBody>
@@ -20042,7 +19737,7 @@
               </a:defRPr>
             </a:pPr>
             <a:r>
-              <a:t>Boxplot Site Population Check — Bad DUT or Bad Station?</a:t>
+              <a:t>Getting the Code</a:t>
             </a:r>
           </a:p>
         </p:txBody>
@@ -20161,8 +19856,8 @@
         </p:nvSpPr>
         <p:spPr>
           <a:xfrm>
-            <a:off x="548640" y="1645920"/>
-            <a:ext cx="11064240" cy="4754880"/>
+            <a:off x="548640" y="1691640"/>
+            <a:ext cx="11064240" cy="365760"/>
           </a:xfrm>
           <a:prstGeom prst="rect">
             <a:avLst/>
@@ -20181,93 +19876,207 @@
               </a:spcAft>
             </a:pPr>
             <a:r>
+              <a:rPr sz="1900">
+                <a:solidFill>
+                  <a:srgbClr val="1B2A4A"/>
+                </a:solidFill>
+                <a:latin typeface="Segoe UI"/>
+              </a:rPr>
+              <a:t>•  This repo isn't on a company-wide share by default — copy it from:</a:t>
+            </a:r>
+          </a:p>
+        </p:txBody>
+      </p:sp>
+      <p:sp>
+        <p:nvSpPr>
+          <p:cNvPr id="9" name="Rounded Rectangle 8"/>
+          <p:cNvSpPr/>
+          <p:nvPr/>
+        </p:nvSpPr>
+        <p:spPr>
+          <a:xfrm>
+            <a:off x="548640" y="2103120"/>
+            <a:ext cx="11064240" cy="502920"/>
+          </a:xfrm>
+          <a:prstGeom prst="roundRect">
+            <a:avLst>
+              <a:gd name="adj" fmla="val 4000"/>
+            </a:avLst>
+          </a:prstGeom>
+          <a:solidFill>
+            <a:srgbClr val="282C34"/>
+          </a:solidFill>
+          <a:ln>
+            <a:solidFill>
+              <a:srgbClr val="111318"/>
+            </a:solidFill>
+          </a:ln>
+          <a:effectLst/>
+        </p:spPr>
+        <p:style>
+          <a:lnRef idx="1">
+            <a:schemeClr val="accent1"/>
+          </a:lnRef>
+          <a:fillRef idx="3">
+            <a:schemeClr val="accent1"/>
+          </a:fillRef>
+          <a:effectRef idx="2">
+            <a:schemeClr val="accent1"/>
+          </a:effectRef>
+          <a:fontRef idx="minor">
+            <a:schemeClr val="lt1"/>
+          </a:fontRef>
+        </p:style>
+        <p:txBody>
+          <a:bodyPr rtlCol="0" anchor="t" wrap="square" lIns="228600" rIns="228600" tIns="164592" bIns="164592"/>
+          <a:lstStyle/>
+          <a:p>
+            <a:pPr algn="l">
+              <a:spcAft>
+                <a:spcPts val="200"/>
+              </a:spcAft>
+            </a:pPr>
+            <a:r>
+              <a:rPr sz="1350">
+                <a:solidFill>
+                  <a:srgbClr val="E6E6E6"/>
+                </a:solidFill>
+                <a:latin typeface="Consolas"/>
+              </a:rPr>
+              <a:t>\\srsnas01.srs.is.keysight.com\prod\MIDRF3\SG6311A\Padb-tools\tools</a:t>
+            </a:r>
+          </a:p>
+        </p:txBody>
+      </p:sp>
+      <p:sp>
+        <p:nvSpPr>
+          <p:cNvPr id="10" name="TextBox 9"/>
+          <p:cNvSpPr txBox="1"/>
+          <p:nvPr/>
+        </p:nvSpPr>
+        <p:spPr>
+          <a:xfrm>
+            <a:off x="548640" y="2788920"/>
+            <a:ext cx="11064240" cy="365760"/>
+          </a:xfrm>
+          <a:prstGeom prst="rect">
+            <a:avLst/>
+          </a:prstGeom>
+          <a:noFill/>
+        </p:spPr>
+        <p:txBody>
+          <a:bodyPr wrap="square">
+            <a:spAutoFit/>
+          </a:bodyPr>
+          <a:lstStyle/>
+          <a:p>
+            <a:pPr>
+              <a:spcAft>
+                <a:spcPts val="1000"/>
+              </a:spcAft>
+            </a:pPr>
+            <a:r>
+              <a:rPr sz="1800">
+                <a:solidFill>
+                  <a:srgbClr val="1B2A4A"/>
+                </a:solidFill>
+                <a:latin typeface="Segoe UI"/>
+              </a:rPr>
+              <a:t>•  Copy that whole "tools" folder to a local path, e.g. C:\apps\padb\tools</a:t>
+            </a:r>
+          </a:p>
+        </p:txBody>
+      </p:sp>
+      <p:sp>
+        <p:nvSpPr>
+          <p:cNvPr id="11" name="TextBox 10"/>
+          <p:cNvSpPr txBox="1"/>
+          <p:nvPr/>
+        </p:nvSpPr>
+        <p:spPr>
+          <a:xfrm>
+            <a:off x="548640" y="3429000"/>
+            <a:ext cx="11064240" cy="914400"/>
+          </a:xfrm>
+          <a:prstGeom prst="rect">
+            <a:avLst/>
+          </a:prstGeom>
+          <a:noFill/>
+        </p:spPr>
+        <p:txBody>
+          <a:bodyPr wrap="square">
+            <a:spAutoFit/>
+          </a:bodyPr>
+          <a:lstStyle/>
+          <a:p>
+            <a:pPr>
+              <a:spcAft>
+                <a:spcPts val="1000"/>
+              </a:spcAft>
+            </a:pPr>
+            <a:r>
               <a:rPr sz="1700">
                 <a:solidFill>
                   <a:srgbClr val="1B2A4A"/>
                 </a:solidFill>
                 <a:latin typeface="Segoe UI"/>
               </a:rPr>
-              <a:t>•  Tests each non-primary-site DUT's value at each frequency/temperature against the k×IQR fence built from the primary site's own population there</a:t>
+              <a:t>•  padb_batch.py is bundled directly inside the tools folder (added 2026-08-05) —</a:t>
             </a:r>
           </a:p>
           <a:p>
             <a:pPr lvl="1">
               <a:spcAft>
+                <a:spcPts val="600"/>
+              </a:spcAft>
+            </a:pPr>
+            <a:r>
+              <a:rPr sz="1500">
+                <a:solidFill>
+                  <a:srgbClr val="555555"/>
+                </a:solidFill>
+                <a:latin typeface="Segoe UI"/>
+              </a:rPr>
+              <a:t>–  no separate dependency to track down; the whole repo is self-contained</a:t>
+            </a:r>
+          </a:p>
+        </p:txBody>
+      </p:sp>
+      <p:sp>
+        <p:nvSpPr>
+          <p:cNvPr id="12" name="TextBox 11"/>
+          <p:cNvSpPr txBox="1"/>
+          <p:nvPr/>
+        </p:nvSpPr>
+        <p:spPr>
+          <a:xfrm>
+            <a:off x="548640" y="4480560"/>
+            <a:ext cx="11064240" cy="457200"/>
+          </a:xfrm>
+          <a:prstGeom prst="rect">
+            <a:avLst/>
+          </a:prstGeom>
+          <a:noFill/>
+        </p:spPr>
+        <p:txBody>
+          <a:bodyPr wrap="square">
+            <a:spAutoFit/>
+          </a:bodyPr>
+          <a:lstStyle/>
+          <a:p>
+            <a:pPr>
+              <a:spcAft>
                 <a:spcPts val="1000"/>
               </a:spcAft>
             </a:pPr>
             <a:r>
-              <a:rPr sz="1500">
+              <a:rPr sz="1650">
                 <a:solidFill>
                   <a:srgbClr val="1B2A4A"/>
                 </a:solidFill>
                 <a:latin typeface="Segoe UI"/>
               </a:rPr>
-              <a:t>–  Reuses the exact fence and live k×IQR control the page's own outlier detection already uses — no new statistical method</a:t>
-            </a:r>
-          </a:p>
-          <a:p>
-            <a:pPr>
-              <a:spcAft>
-                <a:spcPts val="1000"/>
-              </a:spcAft>
-            </a:pPr>
-            <a:r>
-              <a:rPr sz="1700">
-                <a:solidFill>
-                  <a:srgbClr val="1B2A4A"/>
-                </a:solidFill>
-                <a:latin typeface="Segoe UI"/>
-              </a:rPr>
-              <a:t>•  Per-DUT summary — checked/outside counts, high/low split, and how many of a DUT's outside points are shared with another DUT at the same spot</a:t>
-            </a:r>
-          </a:p>
-          <a:p>
-            <a:pPr>
-              <a:spcAft>
-                <a:spcPts val="1000"/>
-              </a:spcAft>
-            </a:pPr>
-            <a:r>
-              <a:rPr sz="1700">
-                <a:solidFill>
-                  <a:srgbClr val="1B2A4A"/>
-                </a:solidFill>
-                <a:latin typeface="Segoe UI"/>
-              </a:rPr>
-              <a:t>•  Frequency clusters — every (temp, freq) where 2+ distinct DUTs are simultaneously outside — the strongest signal for a station/fixture issue, not one bad DUT</a:t>
-            </a:r>
-          </a:p>
-          <a:p>
-            <a:pPr>
-              <a:spcAft>
-                <a:spcPts val="1000"/>
-              </a:spcAft>
-            </a:pPr>
-            <a:r>
-              <a:rPr sz="1700">
-                <a:solidFill>
-                  <a:srgbClr val="1B2A4A"/>
-                </a:solidFill>
-                <a:latin typeface="Segoe UI"/>
-              </a:rPr>
-              <a:t>•  Suggested triage tag per DUT: station/systemic &gt; bad DUT &gt; isolated &gt; below-population (benign) &gt; ambiguous — a suggestion, not a verdict</a:t>
-            </a:r>
-          </a:p>
-          <a:p>
-            <a:pPr>
-              <a:spcAft>
-                <a:spcPts val="1000"/>
-              </a:spcAft>
-            </a:pPr>
-            <a:r>
-              <a:rPr sz="1700">
-                <a:solidFill>
-                  <a:srgbClr val="1B2A4A"/>
-                </a:solidFill>
-                <a:latin typeface="Segoe UI"/>
-              </a:rPr>
-              <a:t>•  Real finding on ClockSpurs SR-vs-AMC2 data: all 8 AMC2 DUTs came back "Likely station/systemic," reading systematically quieter than SR — a site calibration signature, not 8 bad units</a:t>
+              <a:t>•  Then follow the Prerequisites and Per-User Config slides earlier in this deck</a:t>
             </a:r>
           </a:p>
         </p:txBody>
@@ -20365,7 +20174,7 @@
               </a:defRPr>
             </a:pPr>
             <a:r>
-              <a:t>Multi-Site Testing</a:t>
+              <a:t>Appendix</a:t>
             </a:r>
           </a:p>
         </p:txBody>
@@ -20401,7 +20210,7 @@
               </a:defRPr>
             </a:pPr>
             <a:r>
-              <a:t>Webapp: Compare Two Datasets</a:t>
+              <a:t>First Commands to Verify Your Setup</a:t>
             </a:r>
           </a:p>
         </p:txBody>
@@ -20520,8 +20329,8 @@
         </p:nvSpPr>
         <p:spPr>
           <a:xfrm>
-            <a:off x="548640" y="1645920"/>
-            <a:ext cx="11064240" cy="4754880"/>
+            <a:off x="548640" y="1691640"/>
+            <a:ext cx="11064240" cy="365760"/>
           </a:xfrm>
           <a:prstGeom prst="rect">
             <a:avLst/>
@@ -20540,15 +20349,138 @@
               </a:spcAft>
             </a:pPr>
             <a:r>
+              <a:rPr sz="1800">
+                <a:solidFill>
+                  <a:srgbClr val="1B2A4A"/>
+                </a:solidFill>
+                <a:latin typeface="Segoe UI"/>
+              </a:rPr>
+              <a:t>•  From inside the tools folder, confirm everything imports cleanly:</a:t>
+            </a:r>
+          </a:p>
+        </p:txBody>
+      </p:sp>
+      <p:sp>
+        <p:nvSpPr>
+          <p:cNvPr id="9" name="Rounded Rectangle 8"/>
+          <p:cNvSpPr/>
+          <p:nvPr/>
+        </p:nvSpPr>
+        <p:spPr>
+          <a:xfrm>
+            <a:off x="548640" y="2103120"/>
+            <a:ext cx="11064240" cy="502920"/>
+          </a:xfrm>
+          <a:prstGeom prst="roundRect">
+            <a:avLst>
+              <a:gd name="adj" fmla="val 4000"/>
+            </a:avLst>
+          </a:prstGeom>
+          <a:solidFill>
+            <a:srgbClr val="282C34"/>
+          </a:solidFill>
+          <a:ln>
+            <a:solidFill>
+              <a:srgbClr val="111318"/>
+            </a:solidFill>
+          </a:ln>
+          <a:effectLst/>
+        </p:spPr>
+        <p:style>
+          <a:lnRef idx="1">
+            <a:schemeClr val="accent1"/>
+          </a:lnRef>
+          <a:fillRef idx="3">
+            <a:schemeClr val="accent1"/>
+          </a:fillRef>
+          <a:effectRef idx="2">
+            <a:schemeClr val="accent1"/>
+          </a:effectRef>
+          <a:fontRef idx="minor">
+            <a:schemeClr val="lt1"/>
+          </a:fontRef>
+        </p:style>
+        <p:txBody>
+          <a:bodyPr rtlCol="0" anchor="t" wrap="square" lIns="228600" rIns="228600" tIns="164592" bIns="164592"/>
+          <a:lstStyle/>
+          <a:p>
+            <a:pPr algn="l">
+              <a:spcAft>
+                <a:spcPts val="200"/>
+              </a:spcAft>
+            </a:pPr>
+            <a:r>
+              <a:rPr sz="1450">
+                <a:solidFill>
+                  <a:srgbClr val="E6E6E6"/>
+                </a:solidFill>
+                <a:latin typeface="Consolas"/>
+              </a:rPr>
+              <a:t>py -c "import padb_run, padb_v2, padb_config"</a:t>
+            </a:r>
+          </a:p>
+        </p:txBody>
+      </p:sp>
+      <p:sp>
+        <p:nvSpPr>
+          <p:cNvPr id="10" name="TextBox 9"/>
+          <p:cNvSpPr txBox="1"/>
+          <p:nvPr/>
+        </p:nvSpPr>
+        <p:spPr>
+          <a:xfrm>
+            <a:off x="548640" y="2743200"/>
+            <a:ext cx="11064240" cy="365760"/>
+          </a:xfrm>
+          <a:prstGeom prst="rect">
+            <a:avLst/>
+          </a:prstGeom>
+          <a:noFill/>
+        </p:spPr>
+        <p:txBody>
+          <a:bodyPr wrap="square">
+            <a:spAutoFit/>
+          </a:bodyPr>
+          <a:lstStyle/>
+          <a:p>
+            <a:pPr>
+              <a:spcAft>
+                <a:spcPts val="1000"/>
+              </a:spcAft>
+            </a:pPr>
+            <a:r>
               <a:rPr sz="1700">
                 <a:solidFill>
                   <a:srgbClr val="1B2A4A"/>
                 </a:solidFill>
                 <a:latin typeface="Segoe UI"/>
               </a:rPr>
-              <a:t>•  Collapsed-by-default panel in the web app (a corner case — mainly useful the first time a new site comes online)</a:t>
-            </a:r>
-          </a:p>
+              <a:t>•  No output and no traceback = success</a:t>
+            </a:r>
+          </a:p>
+        </p:txBody>
+      </p:sp>
+      <p:sp>
+        <p:nvSpPr>
+          <p:cNvPr id="11" name="TextBox 10"/>
+          <p:cNvSpPr txBox="1"/>
+          <p:nvPr/>
+        </p:nvSpPr>
+        <p:spPr>
+          <a:xfrm>
+            <a:off x="548640" y="3291840"/>
+            <a:ext cx="11064240" cy="365760"/>
+          </a:xfrm>
+          <a:prstGeom prst="rect">
+            <a:avLst/>
+          </a:prstGeom>
+          <a:noFill/>
+        </p:spPr>
+        <p:txBody>
+          <a:bodyPr wrap="square">
+            <a:spAutoFit/>
+          </a:bodyPr>
+          <a:lstStyle/>
           <a:p>
             <a:pPr>
               <a:spcAft>
@@ -20556,13 +20488,113 @@
               </a:spcAft>
             </a:pPr>
             <a:r>
+              <a:rPr sz="1800">
+                <a:solidFill>
+                  <a:srgbClr val="1B2A4A"/>
+                </a:solidFill>
+                <a:latin typeface="Segoe UI"/>
+              </a:rPr>
+              <a:t>•  Then generate your first job.json from any pod you have access to:</a:t>
+            </a:r>
+          </a:p>
+        </p:txBody>
+      </p:sp>
+      <p:sp>
+        <p:nvSpPr>
+          <p:cNvPr id="12" name="Rounded Rectangle 11"/>
+          <p:cNvSpPr/>
+          <p:nvPr/>
+        </p:nvSpPr>
+        <p:spPr>
+          <a:xfrm>
+            <a:off x="548640" y="3703320"/>
+            <a:ext cx="11064240" cy="502920"/>
+          </a:xfrm>
+          <a:prstGeom prst="roundRect">
+            <a:avLst>
+              <a:gd name="adj" fmla="val 4000"/>
+            </a:avLst>
+          </a:prstGeom>
+          <a:solidFill>
+            <a:srgbClr val="282C34"/>
+          </a:solidFill>
+          <a:ln>
+            <a:solidFill>
+              <a:srgbClr val="111318"/>
+            </a:solidFill>
+          </a:ln>
+          <a:effectLst/>
+        </p:spPr>
+        <p:style>
+          <a:lnRef idx="1">
+            <a:schemeClr val="accent1"/>
+          </a:lnRef>
+          <a:fillRef idx="3">
+            <a:schemeClr val="accent1"/>
+          </a:fillRef>
+          <a:effectRef idx="2">
+            <a:schemeClr val="accent1"/>
+          </a:effectRef>
+          <a:fontRef idx="minor">
+            <a:schemeClr val="lt1"/>
+          </a:fontRef>
+        </p:style>
+        <p:txBody>
+          <a:bodyPr rtlCol="0" anchor="t" wrap="square" lIns="228600" rIns="228600" tIns="164592" bIns="164592"/>
+          <a:lstStyle/>
+          <a:p>
+            <a:pPr algn="l">
+              <a:spcAft>
+                <a:spcPts val="200"/>
+              </a:spcAft>
+            </a:pPr>
+            <a:r>
+              <a:rPr sz="1450">
+                <a:solidFill>
+                  <a:srgbClr val="E6E6E6"/>
+                </a:solidFill>
+                <a:latin typeface="Consolas"/>
+              </a:rPr>
+              <a:t>py padb_make_job.py YourPod.pod --module YourModule</a:t>
+            </a:r>
+          </a:p>
+        </p:txBody>
+      </p:sp>
+      <p:sp>
+        <p:nvSpPr>
+          <p:cNvPr id="13" name="TextBox 12"/>
+          <p:cNvSpPr txBox="1"/>
+          <p:nvPr/>
+        </p:nvSpPr>
+        <p:spPr>
+          <a:xfrm>
+            <a:off x="548640" y="4343400"/>
+            <a:ext cx="11064240" cy="1463040"/>
+          </a:xfrm>
+          <a:prstGeom prst="rect">
+            <a:avLst/>
+          </a:prstGeom>
+          <a:noFill/>
+        </p:spPr>
+        <p:txBody>
+          <a:bodyPr wrap="square">
+            <a:spAutoFit/>
+          </a:bodyPr>
+          <a:lstStyle/>
+          <a:p>
+            <a:pPr>
+              <a:spcAft>
+                <a:spcPts val="1000"/>
+              </a:spcAft>
+            </a:pPr>
+            <a:r>
               <a:rPr sz="1700">
                 <a:solidFill>
                   <a:srgbClr val="1B2A4A"/>
                 </a:solidFill>
                 <a:latin typeface="Segoe UI"/>
               </a:rPr>
-              <a:t>•  Pick two already-extracted CSVs (auto-discovered from disk), name each site, pick the primary, and Create &amp; Run in one step — no hand-written job.json needed</a:t>
+              <a:t>•  If PADB-R.exe launches and a real window briefly appears, you're fully set up</a:t>
             </a:r>
           </a:p>
           <a:p>
@@ -20578,55 +20610,23 @@
                 </a:solidFill>
                 <a:latin typeface="Segoe UI"/>
               </a:rPr>
-              <a:t>•  Validates first: a genuine measurement-unit mismatch (e.g. dBc vs. dBm) blocks with an explanation, with an explicit override to proceed anyway</a:t>
+              <a:t>•  Stuck? GETTING_STARTED.md → Quick_Start.md, or type /padb-tools once you're</a:t>
             </a:r>
           </a:p>
           <a:p>
             <a:pPr lvl="1">
               <a:spcAft>
-                <a:spcPts val="1000"/>
+                <a:spcPts val="600"/>
               </a:spcAft>
             </a:pPr>
             <a:r>
               <a:rPr sz="1500">
                 <a:solidFill>
-                  <a:srgbClr val="1B2A4A"/>
-                </a:solidFill>
-                <a:latin typeface="Segoe UI"/>
-              </a:rPr>
-              <a:t>–  Softer gaps — missing temperatures/ports, non-overlapping frequency ranges — only warn, never block</a:t>
-            </a:r>
-          </a:p>
-          <a:p>
-            <a:pPr>
-              <a:spcAft>
-                <a:spcPts val="1000"/>
-              </a:spcAft>
-            </a:pPr>
-            <a:r>
-              <a:rPr sz="1700">
-                <a:solidFill>
-                  <a:srgbClr val="1B2A4A"/>
-                </a:solidFill>
-                <a:latin typeface="Segoe UI"/>
-              </a:rPr>
-              <a:t>•  New job defaults to local-only (publish_to left empty) — publishing an ad-hoc comparison test is a deliberate, separate choice</a:t>
-            </a:r>
-          </a:p>
-          <a:p>
-            <a:pPr>
-              <a:spcAft>
-                <a:spcPts val="1000"/>
-              </a:spcAft>
-            </a:pPr>
-            <a:r>
-              <a:rPr sz="1700">
-                <a:solidFill>
-                  <a:srgbClr val="1B2A4A"/>
-                </a:solidFill>
-                <a:latin typeface="Segoe UI"/>
-              </a:rPr>
-              <a:t>•  "Show tooltip help" checkbox (top of every page) toggles hover help across the whole app on/off, remembered across reloads</a:t>
+                  <a:srgbClr val="555555"/>
+                </a:solidFill>
+                <a:latin typeface="Segoe UI"/>
+              </a:rPr>
+              <a:t>–  working inside the repo</a:t>
             </a:r>
           </a:p>
         </p:txBody>

--- a/PADB_Simple_and_Interactive.pptx
+++ b/PADB_Simple_and_Interactive.pptx
@@ -48,6 +48,7 @@
     <p:sldId id="296" r:id="rId47"/>
     <p:sldId id="301" r:id="rId52"/>
     <p:sldId id="302" r:id="rId53"/>
+    <p:sldId id="304" r:id="rId55"/>
     <p:sldId id="303" r:id="rId54"/>
     <p:sldId id="297" r:id="rId48"/>
     <p:sldId id="298" r:id="rId49"/>
@@ -14070,6 +14071,22 @@
               <a:t>•  Run padb_csv_check.py (next slide) to catch the same class of issue before you even open the HTML</a:t>
             </a:r>
           </a:p>
+          <a:p>
+            <a:pPr>
+              <a:spcAft>
+                <a:spcPts val="1000"/>
+              </a:spcAft>
+            </a:pPr>
+            <a:r>
+              <a:rPr sz="1700">
+                <a:solidFill>
+                  <a:srgbClr val="1B2A4A"/>
+                </a:solidFill>
+                <a:latin typeface="Segoe UI"/>
+              </a:rPr>
+              <a:t>•  env_coverage, distribution, stat_summary, and summary now also show a static noise-sensitivity disclaimer — TI/KDE/normality math assumes reasonably well-behaved, low-noise data</a:t>
+            </a:r>
+          </a:p>
         </p:txBody>
       </p:sp>
     </p:spTree>
@@ -18899,7 +18916,7 @@
                 </a:solidFill>
                 <a:latin typeface="Segoe UI"/>
               </a:rPr>
-              <a:t>•  Tests each non-primary-site DUT's value at each frequency/temperature against the k×IQR fence built from the primary site's own population there</a:t>
+              <a:t>•  Tests each non-primary-site DUT's value at each frequency/temperature against the k×IQR fence built from the primary site's own population there — available on boxplot, stat_summary, and summary</a:t>
             </a:r>
           </a:p>
           <a:p>
@@ -18964,6 +18981,22 @@
                 <a:latin typeface="Segoe UI"/>
               </a:rPr>
               <a:t>•  Suggested triage tag per DUT: station/systemic &gt; bad DUT &gt; isolated &gt; below-population (benign) &gt; ambiguous — a suggestion, not a verdict</a:t>
+            </a:r>
+          </a:p>
+          <a:p>
+            <a:pPr>
+              <a:spcAft>
+                <a:spcPts val="1000"/>
+              </a:spcAft>
+            </a:pPr>
+            <a:r>
+              <a:rPr sz="1700">
+                <a:solidFill>
+                  <a:srgbClr val="1B2A4A"/>
+                </a:solidFill>
+                <a:latin typeface="Segoe UI"/>
+              </a:rPr>
+              <a:t>•  Export CSV (All) / (Outside only) — downloads the per-point detail table with a metadata header (timestamp, primary site, frequency window)</a:t>
             </a:r>
           </a:p>
           <a:p>
@@ -19219,7 +19252,7 @@
               </a:defRPr>
             </a:pPr>
             <a:r>
-              <a:t>44</a:t>
+              <a:t>45</a:t>
             </a:r>
           </a:p>
         </p:txBody>
@@ -19843,7 +19876,7 @@
               </a:defRPr>
             </a:pPr>
             <a:r>
-              <a:t>43</a:t>
+              <a:t>48</a:t>
             </a:r>
           </a:p>
         </p:txBody>
@@ -20316,7 +20349,7 @@
               </a:defRPr>
             </a:pPr>
             <a:r>
-              <a:t>44</a:t>
+              <a:t>49</a:t>
             </a:r>
           </a:p>
         </p:txBody>
@@ -20627,6 +20660,381 @@
                 <a:latin typeface="Segoe UI"/>
               </a:rPr>
               <a:t>–  working inside the repo</a:t>
+            </a:r>
+          </a:p>
+        </p:txBody>
+      </p:sp>
+    </p:spTree>
+  </p:cSld>
+  <p:clrMapOvr>
+    <a:masterClrMapping/>
+  </p:clrMapOvr>
+</p:sld>
+</file>
+
+<file path=ppt/slides/slide49.xml><?xml version="1.0" encoding="utf-8"?>
+<p:sld xmlns:a="http://schemas.openxmlformats.org/drawingml/2006/main" xmlns:p="http://schemas.openxmlformats.org/presentationml/2006/main" xmlns:r="http://schemas.openxmlformats.org/officeDocument/2006/relationships">
+  <p:cSld>
+    <p:spTree>
+      <p:nvGrpSpPr>
+        <p:cNvPr id="1" name=""/>
+        <p:cNvGrpSpPr/>
+        <p:nvPr/>
+      </p:nvGrpSpPr>
+      <p:grpSpPr/>
+      <p:sp>
+        <p:nvSpPr>
+          <p:cNvPr id="2" name="Rectangle 1"/>
+          <p:cNvSpPr/>
+          <p:nvPr/>
+        </p:nvSpPr>
+        <p:spPr>
+          <a:xfrm>
+            <a:off x="0" y="0"/>
+            <a:ext cx="12191695" cy="6858000"/>
+          </a:xfrm>
+          <a:prstGeom prst="rect">
+            <a:avLst/>
+          </a:prstGeom>
+          <a:solidFill>
+            <a:srgbClr val="FFFFFF"/>
+          </a:solidFill>
+          <a:ln>
+            <a:noFill/>
+          </a:ln>
+          <a:effectLst/>
+        </p:spPr>
+        <p:style>
+          <a:lnRef idx="1">
+            <a:schemeClr val="accent1"/>
+          </a:lnRef>
+          <a:fillRef idx="3">
+            <a:schemeClr val="accent1"/>
+          </a:fillRef>
+          <a:effectRef idx="2">
+            <a:schemeClr val="accent1"/>
+          </a:effectRef>
+          <a:fontRef idx="minor">
+            <a:schemeClr val="lt1"/>
+          </a:fontRef>
+        </p:style>
+        <p:txBody>
+          <a:bodyPr rtlCol="0" anchor="ctr"/>
+          <a:lstStyle/>
+          <a:p>
+            <a:pPr algn="ctr"/>
+          </a:p>
+        </p:txBody>
+      </p:sp>
+      <p:sp>
+        <p:nvSpPr>
+          <p:cNvPr id="3" name="TextBox 2"/>
+          <p:cNvSpPr txBox="1"/>
+          <p:nvPr/>
+        </p:nvSpPr>
+        <p:spPr>
+          <a:xfrm>
+            <a:off x="548640" y="320040"/>
+            <a:ext cx="7315200" cy="365760"/>
+          </a:xfrm>
+          <a:prstGeom prst="rect">
+            <a:avLst/>
+          </a:prstGeom>
+          <a:noFill/>
+        </p:spPr>
+        <p:txBody>
+          <a:bodyPr wrap="none">
+            <a:spAutoFit/>
+          </a:bodyPr>
+          <a:lstStyle/>
+          <a:p>
+            <a:pPr>
+              <a:defRPr sz="1600" b="1">
+                <a:solidFill>
+                  <a:srgbClr val="0066CC"/>
+                </a:solidFill>
+                <a:latin typeface="Segoe UI"/>
+              </a:defRPr>
+            </a:pPr>
+            <a:r>
+              <a:t>Multi-Site Testing</a:t>
+            </a:r>
+          </a:p>
+        </p:txBody>
+      </p:sp>
+      <p:sp>
+        <p:nvSpPr>
+          <p:cNvPr id="4" name="TextBox 3"/>
+          <p:cNvSpPr txBox="1"/>
+          <p:nvPr/>
+        </p:nvSpPr>
+        <p:spPr>
+          <a:xfrm>
+            <a:off x="548640" y="658368"/>
+            <a:ext cx="11064240" cy="822960"/>
+          </a:xfrm>
+          <a:prstGeom prst="rect">
+            <a:avLst/>
+          </a:prstGeom>
+          <a:noFill/>
+        </p:spPr>
+        <p:txBody>
+          <a:bodyPr wrap="square">
+            <a:spAutoFit/>
+          </a:bodyPr>
+          <a:lstStyle/>
+          <a:p>
+            <a:pPr>
+              <a:defRPr sz="3200" b="1">
+                <a:solidFill>
+                  <a:srgbClr val="1B2A4A"/>
+                </a:solidFill>
+                <a:latin typeface="Segoe UI"/>
+              </a:defRPr>
+            </a:pPr>
+            <a:r>
+              <a:t>Duplicate Test Runs — Why "n DUTs" Isn't Always DUT Count</a:t>
+            </a:r>
+          </a:p>
+        </p:txBody>
+      </p:sp>
+      <p:cxnSp>
+        <p:nvCxnSpPr>
+          <p:cNvPr id="5" name="Connector 4"/>
+          <p:cNvCxnSpPr/>
+          <p:nvPr/>
+        </p:nvCxnSpPr>
+        <p:spPr>
+          <a:xfrm>
+            <a:off x="548640" y="1417320"/>
+            <a:ext cx="11091672" cy="0"/>
+          </a:xfrm>
+          <a:prstGeom prst="line">
+            <a:avLst/>
+          </a:prstGeom>
+          <a:ln w="28575">
+            <a:solidFill>
+              <a:srgbClr val="0066CC"/>
+            </a:solidFill>
+          </a:ln>
+        </p:spPr>
+        <p:style>
+          <a:lnRef idx="2">
+            <a:schemeClr val="accent1"/>
+          </a:lnRef>
+          <a:fillRef idx="0">
+            <a:schemeClr val="accent1"/>
+          </a:fillRef>
+          <a:effectRef idx="1">
+            <a:schemeClr val="accent1"/>
+          </a:effectRef>
+          <a:fontRef idx="minor">
+            <a:schemeClr val="tx1"/>
+          </a:fontRef>
+        </p:style>
+      </p:cxnSp>
+      <p:sp>
+        <p:nvSpPr>
+          <p:cNvPr id="6" name="TextBox 5"/>
+          <p:cNvSpPr txBox="1"/>
+          <p:nvPr/>
+        </p:nvSpPr>
+        <p:spPr>
+          <a:xfrm>
+            <a:off x="548640" y="6473952"/>
+            <a:ext cx="8229600" cy="320040"/>
+          </a:xfrm>
+          <a:prstGeom prst="rect">
+            <a:avLst/>
+          </a:prstGeom>
+          <a:noFill/>
+        </p:spPr>
+        <p:txBody>
+          <a:bodyPr wrap="none">
+            <a:spAutoFit/>
+          </a:bodyPr>
+          <a:lstStyle/>
+          <a:p>
+            <a:pPr>
+              <a:defRPr sz="1100">
+                <a:solidFill>
+                  <a:srgbClr val="555555"/>
+                </a:solidFill>
+                <a:latin typeface="Segoe UI"/>
+              </a:defRPr>
+            </a:pPr>
+            <a:r>
+              <a:t>padb-tools</a:t>
+            </a:r>
+          </a:p>
+        </p:txBody>
+      </p:sp>
+      <p:sp>
+        <p:nvSpPr>
+          <p:cNvPr id="7" name="TextBox 6"/>
+          <p:cNvSpPr txBox="1"/>
+          <p:nvPr/>
+        </p:nvSpPr>
+        <p:spPr>
+          <a:xfrm>
+            <a:off x="11338560" y="6473952"/>
+            <a:ext cx="548640" cy="320040"/>
+          </a:xfrm>
+          <a:prstGeom prst="rect">
+            <a:avLst/>
+          </a:prstGeom>
+          <a:noFill/>
+        </p:spPr>
+        <p:txBody>
+          <a:bodyPr wrap="none">
+            <a:spAutoFit/>
+          </a:bodyPr>
+          <a:lstStyle/>
+          <a:p>
+            <a:pPr algn="r">
+              <a:defRPr sz="1100">
+                <a:solidFill>
+                  <a:srgbClr val="555555"/>
+                </a:solidFill>
+              </a:defRPr>
+            </a:pPr>
+            <a:r>
+              <a:t>44</a:t>
+            </a:r>
+          </a:p>
+        </p:txBody>
+      </p:sp>
+      <p:sp>
+        <p:nvSpPr>
+          <p:cNvPr id="8" name="TextBox 7"/>
+          <p:cNvSpPr txBox="1"/>
+          <p:nvPr/>
+        </p:nvSpPr>
+        <p:spPr>
+          <a:xfrm>
+            <a:off x="548640" y="1645920"/>
+            <a:ext cx="11064240" cy="4754880"/>
+          </a:xfrm>
+          <a:prstGeom prst="rect">
+            <a:avLst/>
+          </a:prstGeom>
+          <a:noFill/>
+        </p:spPr>
+        <p:txBody>
+          <a:bodyPr wrap="square">
+            <a:spAutoFit/>
+          </a:bodyPr>
+          <a:lstStyle/>
+          <a:p>
+            <a:pPr>
+              <a:spcAft>
+                <a:spcPts val="1000"/>
+              </a:spcAft>
+            </a:pPr>
+            <a:r>
+              <a:rPr sz="1700">
+                <a:solidFill>
+                  <a:srgbClr val="1B2A4A"/>
+                </a:solidFill>
+                <a:latin typeface="Segoe UI"/>
+              </a:rPr>
+              <a:t>•  Statistics Table's n counts raw CSV rows, not distinct DUTs — a DUT measured twice at the same point is counted twice</a:t>
+            </a:r>
+          </a:p>
+          <a:p>
+            <a:pPr>
+              <a:spcAft>
+                <a:spcPts val="1000"/>
+              </a:spcAft>
+            </a:pPr>
+            <a:r>
+              <a:rPr sz="1700">
+                <a:solidFill>
+                  <a:srgbClr val="1B2A4A"/>
+                </a:solidFill>
+                <a:latin typeface="Segoe UI"/>
+              </a:rPr>
+              <a:t>•  "Dup runs" column sums the extras across every duplicated DUT — 3 DUTs with 1 dup each is not the same as 1 DUT with 3 dups</a:t>
+            </a:r>
+          </a:p>
+          <a:p>
+            <a:pPr>
+              <a:spcAft>
+                <a:spcPts val="1000"/>
+              </a:spcAft>
+            </a:pPr>
+            <a:r>
+              <a:rPr sz="1700">
+                <a:solidFill>
+                  <a:srgbClr val="1B2A4A"/>
+                </a:solidFill>
+                <a:latin typeface="Segoe UI"/>
+              </a:rPr>
+              <a:t>•  Site Population Check's "Genuinely repeated freqs" / "SR dup pts" break duplicates down per-DUT instead of one ambiguous total</a:t>
+            </a:r>
+          </a:p>
+          <a:p>
+            <a:pPr>
+              <a:spcAft>
+                <a:spcPts val="1000"/>
+              </a:spcAft>
+            </a:pPr>
+            <a:r>
+              <a:rPr sz="1700">
+                <a:solidFill>
+                  <a:srgbClr val="1B2A4A"/>
+                </a:solidFill>
+                <a:latin typeface="Segoe UI"/>
+              </a:rPr>
+              <a:t>•  Port is part of the duplicate identity — a DUT's RF1 and RF2 rows are two real measurements, never counted as duplicates of each other</a:t>
+            </a:r>
+          </a:p>
+          <a:p>
+            <a:pPr lvl="1">
+              <a:spcAft>
+                <a:spcPts val="1000"/>
+              </a:spcAft>
+            </a:pPr>
+            <a:r>
+              <a:rPr sz="1500">
+                <a:solidFill>
+                  <a:srgbClr val="1B2A4A"/>
+                </a:solidFill>
+                <a:latin typeface="Segoe UI"/>
+              </a:rPr>
+              <a:t>–  Real bug fixed this session: an earlier version of this check missed that distinction</a:t>
+            </a:r>
+          </a:p>
+          <a:p>
+            <a:pPr>
+              <a:spcAft>
+                <a:spcPts val="1000"/>
+              </a:spcAft>
+            </a:pPr>
+            <a:r>
+              <a:rPr sz="1700">
+                <a:solidFill>
+                  <a:srgbClr val="1B2A4A"/>
+                </a:solidFill>
+                <a:latin typeface="Segoe UI"/>
+              </a:rPr>
+              <a:t>•  Condition pooling (e.g. Group by: Serial Number) is not a duplicate either — same DUT under different SpurTypes/conditions is real coverage, not a repeat</a:t>
+            </a:r>
+          </a:p>
+          <a:p>
+            <a:pPr>
+              <a:spcAft>
+                <a:spcPts val="1000"/>
+              </a:spcAft>
+            </a:pPr>
+            <a:r>
+              <a:rPr sz="1700">
+                <a:solidFill>
+                  <a:srgbClr val="1B2A4A"/>
+                </a:solidFill>
+                <a:latin typeface="Segoe UI"/>
+              </a:rPr>
+              <a:t>•  "Collapse dup runs" checkbox (boxplot) averages true duplicates before computing box stats — stat_summary/summary don't need it, their per-DUT data is already pre-averaged server-side</a:t>
             </a:r>
           </a:p>
         </p:txBody>

--- a/PADB_Simple_and_Interactive.pptx
+++ b/PADB_Simple_and_Interactive.pptx
@@ -19146,7 +19146,7 @@
               </a:defRPr>
             </a:pPr>
             <a:r>
-              <a:t>Webapp: Compare Two Datasets</a:t>
+              <a:t>Duplicate Test Runs vs. DUT Count</a:t>
             </a:r>
           </a:p>
         </p:txBody>
@@ -19252,7 +19252,7 @@
               </a:defRPr>
             </a:pPr>
             <a:r>
-              <a:t>45</a:t>
+              <a:t>44</a:t>
             </a:r>
           </a:p>
         </p:txBody>
@@ -19291,7 +19291,7 @@
                 </a:solidFill>
                 <a:latin typeface="Segoe UI"/>
               </a:rPr>
-              <a:t>•  Collapsed-by-default panel in the web app (a corner case — mainly useful the first time a new site comes online)</a:t>
+              <a:t>•  Statistics Table's n counts raw CSV rows, not distinct DUTs — a DUT measured twice at the same point is counted twice</a:t>
             </a:r>
           </a:p>
           <a:p>
@@ -19307,7 +19307,7 @@
                 </a:solidFill>
                 <a:latin typeface="Segoe UI"/>
               </a:rPr>
-              <a:t>•  Pick two already-extracted CSVs (auto-discovered from disk), name each site, pick the primary, and Create &amp; Run in one step — no hand-written job.json needed</a:t>
+              <a:t>•  "Dup runs" column sums the extras across every duplicated DUT — 3 DUTs with 1 dup each is not the same as 1 DUT with 3 dups</a:t>
             </a:r>
           </a:p>
           <a:p>
@@ -19323,7 +19323,23 @@
                 </a:solidFill>
                 <a:latin typeface="Segoe UI"/>
               </a:rPr>
-              <a:t>•  Validates first: a genuine measurement-unit mismatch (e.g. dBc vs. dBm) blocks with an explanation, with an explicit override to proceed anyway</a:t>
+              <a:t>•  Site Population Check's "Genuinely repeated freqs" / "SR dup pts" break duplicates down per-DUT instead of one ambiguous total</a:t>
+            </a:r>
+          </a:p>
+          <a:p>
+            <a:pPr>
+              <a:spcAft>
+                <a:spcPts val="1000"/>
+              </a:spcAft>
+            </a:pPr>
+            <a:r>
+              <a:rPr sz="1700">
+                <a:solidFill>
+                  <a:srgbClr val="1B2A4A"/>
+                </a:solidFill>
+                <a:latin typeface="Segoe UI"/>
+              </a:rPr>
+              <a:t>•  Port is part of the duplicate identity — a DUT's RF1 and RF2 rows are two real measurements, never counted as duplicates of each other</a:t>
             </a:r>
           </a:p>
           <a:p>
@@ -19339,7 +19355,7 @@
                 </a:solidFill>
                 <a:latin typeface="Segoe UI"/>
               </a:rPr>
-              <a:t>–  Softer gaps — missing temperatures/ports, non-overlapping frequency ranges — only warn, never block</a:t>
+              <a:t>–  Real bug fixed this session: an earlier version of this check missed that distinction</a:t>
             </a:r>
           </a:p>
           <a:p>
@@ -19355,7 +19371,7 @@
                 </a:solidFill>
                 <a:latin typeface="Segoe UI"/>
               </a:rPr>
-              <a:t>•  New job defaults to local-only (publish_to left empty) — publishing an ad-hoc comparison test is a deliberate, separate choice</a:t>
+              <a:t>•  Condition pooling (e.g. Group by: Serial Number) is not a duplicate either — same DUT under different SpurTypes/conditions is real coverage, not a repeat</a:t>
             </a:r>
           </a:p>
           <a:p>
@@ -19371,7 +19387,7 @@
                 </a:solidFill>
                 <a:latin typeface="Segoe UI"/>
               </a:rPr>
-              <a:t>•  "Show tooltip help" checkbox (top of every page) toggles hover help across the whole app on/off, remembered across reloads</a:t>
+              <a:t>•  "Collapse dup runs" checkbox (boxplot) averages true duplicates before computing box stats — stat_summary/summary don't need it, their per-DUT data is already pre-averaged server-side</a:t>
             </a:r>
           </a:p>
         </p:txBody>
@@ -19409,7 +19425,7 @@
             <a:avLst/>
           </a:prstGeom>
           <a:solidFill>
-            <a:srgbClr val="1B2A4A"/>
+            <a:srgbClr val="FFFFFF"/>
           </a:solidFill>
           <a:ln>
             <a:noFill/>
@@ -19446,8 +19462,8 @@
         </p:nvSpPr>
         <p:spPr>
           <a:xfrm>
-            <a:off x="822960" y="2743200"/>
-            <a:ext cx="10515600" cy="1097280"/>
+            <a:off x="548640" y="320040"/>
+            <a:ext cx="7315200" cy="365760"/>
           </a:xfrm>
           <a:prstGeom prst="rect">
             <a:avLst/>
@@ -19461,14 +19477,15 @@
           <a:lstStyle/>
           <a:p>
             <a:pPr>
-              <a:defRPr sz="4800" b="1">
-                <a:solidFill>
-                  <a:srgbClr val="FFFFFF"/>
-                </a:solidFill>
+              <a:defRPr sz="1600" b="1">
+                <a:solidFill>
+                  <a:srgbClr val="0066CC"/>
+                </a:solidFill>
+                <a:latin typeface="Segoe UI"/>
               </a:defRPr>
             </a:pPr>
             <a:r>
-              <a:t>Questions?</a:t>
+              <a:t>Multi-Site Testing</a:t>
             </a:r>
           </a:p>
         </p:txBody>
@@ -19481,8 +19498,79 @@
         </p:nvSpPr>
         <p:spPr>
           <a:xfrm>
-            <a:off x="822960" y="3749039"/>
-            <a:ext cx="10515600" cy="640080"/>
+            <a:off x="548640" y="658368"/>
+            <a:ext cx="11064240" cy="822960"/>
+          </a:xfrm>
+          <a:prstGeom prst="rect">
+            <a:avLst/>
+          </a:prstGeom>
+          <a:noFill/>
+        </p:spPr>
+        <p:txBody>
+          <a:bodyPr wrap="square">
+            <a:spAutoFit/>
+          </a:bodyPr>
+          <a:lstStyle/>
+          <a:p>
+            <a:pPr>
+              <a:defRPr sz="3200" b="1">
+                <a:solidFill>
+                  <a:srgbClr val="1B2A4A"/>
+                </a:solidFill>
+                <a:latin typeface="Segoe UI"/>
+              </a:defRPr>
+            </a:pPr>
+            <a:r>
+              <a:t>Webapp: Compare Two Datasets</a:t>
+            </a:r>
+          </a:p>
+        </p:txBody>
+      </p:sp>
+      <p:cxnSp>
+        <p:nvCxnSpPr>
+          <p:cNvPr id="5" name="Connector 4"/>
+          <p:cNvCxnSpPr/>
+          <p:nvPr/>
+        </p:nvCxnSpPr>
+        <p:spPr>
+          <a:xfrm>
+            <a:off x="548640" y="1417320"/>
+            <a:ext cx="11091672" cy="0"/>
+          </a:xfrm>
+          <a:prstGeom prst="line">
+            <a:avLst/>
+          </a:prstGeom>
+          <a:ln w="28575">
+            <a:solidFill>
+              <a:srgbClr val="0066CC"/>
+            </a:solidFill>
+          </a:ln>
+        </p:spPr>
+        <p:style>
+          <a:lnRef idx="2">
+            <a:schemeClr val="accent1"/>
+          </a:lnRef>
+          <a:fillRef idx="0">
+            <a:schemeClr val="accent1"/>
+          </a:fillRef>
+          <a:effectRef idx="1">
+            <a:schemeClr val="accent1"/>
+          </a:effectRef>
+          <a:fontRef idx="minor">
+            <a:schemeClr val="tx1"/>
+          </a:fontRef>
+        </p:style>
+      </p:cxnSp>
+      <p:sp>
+        <p:nvSpPr>
+          <p:cNvPr id="6" name="TextBox 5"/>
+          <p:cNvSpPr txBox="1"/>
+          <p:nvPr/>
+        </p:nvSpPr>
+        <p:spPr>
+          <a:xfrm>
+            <a:off x="548640" y="6473952"/>
+            <a:ext cx="8229600" cy="320040"/>
           </a:xfrm>
           <a:prstGeom prst="rect">
             <a:avLst/>
@@ -19496,15 +19584,169 @@
           <a:lstStyle/>
           <a:p>
             <a:pPr>
-              <a:defRPr sz="1800">
-                <a:solidFill>
-                  <a:srgbClr val="9FC5FF"/>
-                </a:solidFill>
-                <a:latin typeface="Consolas"/>
+              <a:defRPr sz="1100">
+                <a:solidFill>
+                  <a:srgbClr val="555555"/>
+                </a:solidFill>
+                <a:latin typeface="Segoe UI"/>
               </a:defRPr>
             </a:pPr>
             <a:r>
-              <a:t>C:\apps\padb\tools   |   /padb-tools</a:t>
+              <a:t>padb-tools</a:t>
+            </a:r>
+          </a:p>
+        </p:txBody>
+      </p:sp>
+      <p:sp>
+        <p:nvSpPr>
+          <p:cNvPr id="7" name="TextBox 6"/>
+          <p:cNvSpPr txBox="1"/>
+          <p:nvPr/>
+        </p:nvSpPr>
+        <p:spPr>
+          <a:xfrm>
+            <a:off x="11338560" y="6473952"/>
+            <a:ext cx="548640" cy="320040"/>
+          </a:xfrm>
+          <a:prstGeom prst="rect">
+            <a:avLst/>
+          </a:prstGeom>
+          <a:noFill/>
+        </p:spPr>
+        <p:txBody>
+          <a:bodyPr wrap="none">
+            <a:spAutoFit/>
+          </a:bodyPr>
+          <a:lstStyle/>
+          <a:p>
+            <a:pPr algn="r">
+              <a:defRPr sz="1100">
+                <a:solidFill>
+                  <a:srgbClr val="555555"/>
+                </a:solidFill>
+              </a:defRPr>
+            </a:pPr>
+            <a:r>
+              <a:t>45</a:t>
+            </a:r>
+          </a:p>
+        </p:txBody>
+      </p:sp>
+      <p:sp>
+        <p:nvSpPr>
+          <p:cNvPr id="8" name="TextBox 7"/>
+          <p:cNvSpPr txBox="1"/>
+          <p:nvPr/>
+        </p:nvSpPr>
+        <p:spPr>
+          <a:xfrm>
+            <a:off x="548640" y="1645920"/>
+            <a:ext cx="11064240" cy="4754880"/>
+          </a:xfrm>
+          <a:prstGeom prst="rect">
+            <a:avLst/>
+          </a:prstGeom>
+          <a:noFill/>
+        </p:spPr>
+        <p:txBody>
+          <a:bodyPr wrap="square">
+            <a:spAutoFit/>
+          </a:bodyPr>
+          <a:lstStyle/>
+          <a:p>
+            <a:pPr>
+              <a:spcAft>
+                <a:spcPts val="1000"/>
+              </a:spcAft>
+            </a:pPr>
+            <a:r>
+              <a:rPr sz="1700">
+                <a:solidFill>
+                  <a:srgbClr val="1B2A4A"/>
+                </a:solidFill>
+                <a:latin typeface="Segoe UI"/>
+              </a:rPr>
+              <a:t>•  Collapsed-by-default panel in the web app (a corner case — mainly useful the first time a new site comes online)</a:t>
+            </a:r>
+          </a:p>
+          <a:p>
+            <a:pPr>
+              <a:spcAft>
+                <a:spcPts val="1000"/>
+              </a:spcAft>
+            </a:pPr>
+            <a:r>
+              <a:rPr sz="1700">
+                <a:solidFill>
+                  <a:srgbClr val="1B2A4A"/>
+                </a:solidFill>
+                <a:latin typeface="Segoe UI"/>
+              </a:rPr>
+              <a:t>•  Pick two already-extracted CSVs (auto-discovered from disk), name each site, pick the primary, and Create &amp; Run in one step — no hand-written job.json needed</a:t>
+            </a:r>
+          </a:p>
+          <a:p>
+            <a:pPr>
+              <a:spcAft>
+                <a:spcPts val="1000"/>
+              </a:spcAft>
+            </a:pPr>
+            <a:r>
+              <a:rPr sz="1700">
+                <a:solidFill>
+                  <a:srgbClr val="1B2A4A"/>
+                </a:solidFill>
+                <a:latin typeface="Segoe UI"/>
+              </a:rPr>
+              <a:t>•  Validates first: a genuine measurement-unit mismatch (e.g. dBc vs. dBm) blocks with an explanation, with an explicit override to proceed anyway</a:t>
+            </a:r>
+          </a:p>
+          <a:p>
+            <a:pPr lvl="1">
+              <a:spcAft>
+                <a:spcPts val="1000"/>
+              </a:spcAft>
+            </a:pPr>
+            <a:r>
+              <a:rPr sz="1500">
+                <a:solidFill>
+                  <a:srgbClr val="1B2A4A"/>
+                </a:solidFill>
+                <a:latin typeface="Segoe UI"/>
+              </a:rPr>
+              <a:t>–  Softer gaps — missing temperatures/ports, non-overlapping frequency ranges — only warn, never block</a:t>
+            </a:r>
+          </a:p>
+          <a:p>
+            <a:pPr>
+              <a:spcAft>
+                <a:spcPts val="1000"/>
+              </a:spcAft>
+            </a:pPr>
+            <a:r>
+              <a:rPr sz="1700">
+                <a:solidFill>
+                  <a:srgbClr val="1B2A4A"/>
+                </a:solidFill>
+                <a:latin typeface="Segoe UI"/>
+              </a:rPr>
+              <a:t>•  New job defaults to local-only (publish_to left empty) — publishing an ad-hoc comparison test is a deliberate, separate choice</a:t>
+            </a:r>
+          </a:p>
+          <a:p>
+            <a:pPr>
+              <a:spcAft>
+                <a:spcPts val="1000"/>
+              </a:spcAft>
+            </a:pPr>
+            <a:r>
+              <a:rPr sz="1700">
+                <a:solidFill>
+                  <a:srgbClr val="1B2A4A"/>
+                </a:solidFill>
+                <a:latin typeface="Segoe UI"/>
+              </a:rPr>
+              <a:t>•  "Show tooltip help" checkbox (top of every page) toggles hover help across the whole app on/off, remembered across reloads</a:t>
             </a:r>
           </a:p>
         </p:txBody>
@@ -19542,7 +19784,7 @@
             <a:avLst/>
           </a:prstGeom>
           <a:solidFill>
-            <a:srgbClr val="F2F4F8"/>
+            <a:srgbClr val="1B2A4A"/>
           </a:solidFill>
           <a:ln>
             <a:noFill/>
@@ -19580,7 +19822,7 @@
         <p:spPr>
           <a:xfrm>
             <a:off x="822960" y="2743200"/>
-            <a:ext cx="10515600" cy="914400"/>
+            <a:ext cx="10515600" cy="1097280"/>
           </a:xfrm>
           <a:prstGeom prst="rect">
             <a:avLst/>
@@ -19594,14 +19836,14 @@
           <a:lstStyle/>
           <a:p>
             <a:pPr>
-              <a:defRPr sz="4400" b="1">
-                <a:solidFill>
-                  <a:srgbClr val="1B2A4A"/>
+              <a:defRPr sz="4800" b="1">
+                <a:solidFill>
+                  <a:srgbClr val="FFFFFF"/>
                 </a:solidFill>
               </a:defRPr>
             </a:pPr>
             <a:r>
-              <a:t>Appendix</a:t>
+              <a:t>Questions?</a:t>
             </a:r>
           </a:p>
         </p:txBody>
@@ -19614,7 +19856,7 @@
         </p:nvSpPr>
         <p:spPr>
           <a:xfrm>
-            <a:off x="822960" y="3566160"/>
+            <a:off x="822960" y="3749039"/>
             <a:ext cx="10515600" cy="640080"/>
           </a:xfrm>
           <a:prstGeom prst="rect">
@@ -19629,14 +19871,15 @@
           <a:lstStyle/>
           <a:p>
             <a:pPr>
-              <a:defRPr sz="2200">
-                <a:solidFill>
-                  <a:srgbClr val="0066CC"/>
-                </a:solidFill>
+              <a:defRPr sz="1800">
+                <a:solidFill>
+                  <a:srgbClr val="9FC5FF"/>
+                </a:solidFill>
+                <a:latin typeface="Consolas"/>
               </a:defRPr>
             </a:pPr>
             <a:r>
-              <a:t>Setting Up From Zero — Assumes No Prior Access</a:t>
+              <a:t>C:\apps\padb\tools   |   /padb-tools</a:t>
             </a:r>
           </a:p>
         </p:txBody>
@@ -19674,7 +19917,7 @@
             <a:avLst/>
           </a:prstGeom>
           <a:solidFill>
-            <a:srgbClr val="FFFFFF"/>
+            <a:srgbClr val="F2F4F8"/>
           </a:solidFill>
           <a:ln>
             <a:noFill/>
@@ -19711,8 +19954,8 @@
         </p:nvSpPr>
         <p:spPr>
           <a:xfrm>
-            <a:off x="548640" y="320040"/>
-            <a:ext cx="7315200" cy="365760"/>
+            <a:off x="822960" y="2743200"/>
+            <a:ext cx="10515600" cy="914400"/>
           </a:xfrm>
           <a:prstGeom prst="rect">
             <a:avLst/>
@@ -19726,390 +19969,49 @@
           <a:lstStyle/>
           <a:p>
             <a:pPr>
-              <a:defRPr sz="1600" b="1">
+              <a:defRPr sz="4400" b="1">
+                <a:solidFill>
+                  <a:srgbClr val="1B2A4A"/>
+                </a:solidFill>
+              </a:defRPr>
+            </a:pPr>
+            <a:r>
+              <a:t>Appendix</a:t>
+            </a:r>
+          </a:p>
+        </p:txBody>
+      </p:sp>
+      <p:sp>
+        <p:nvSpPr>
+          <p:cNvPr id="4" name="TextBox 3"/>
+          <p:cNvSpPr txBox="1"/>
+          <p:nvPr/>
+        </p:nvSpPr>
+        <p:spPr>
+          <a:xfrm>
+            <a:off x="822960" y="3566160"/>
+            <a:ext cx="10515600" cy="640080"/>
+          </a:xfrm>
+          <a:prstGeom prst="rect">
+            <a:avLst/>
+          </a:prstGeom>
+          <a:noFill/>
+        </p:spPr>
+        <p:txBody>
+          <a:bodyPr wrap="none">
+            <a:spAutoFit/>
+          </a:bodyPr>
+          <a:lstStyle/>
+          <a:p>
+            <a:pPr>
+              <a:defRPr sz="2200">
                 <a:solidFill>
                   <a:srgbClr val="0066CC"/>
                 </a:solidFill>
-                <a:latin typeface="Segoe UI"/>
               </a:defRPr>
             </a:pPr>
             <a:r>
-              <a:t>Appendix</a:t>
-            </a:r>
-          </a:p>
-        </p:txBody>
-      </p:sp>
-      <p:sp>
-        <p:nvSpPr>
-          <p:cNvPr id="4" name="TextBox 3"/>
-          <p:cNvSpPr txBox="1"/>
-          <p:nvPr/>
-        </p:nvSpPr>
-        <p:spPr>
-          <a:xfrm>
-            <a:off x="548640" y="658368"/>
-            <a:ext cx="11064240" cy="822960"/>
-          </a:xfrm>
-          <a:prstGeom prst="rect">
-            <a:avLst/>
-          </a:prstGeom>
-          <a:noFill/>
-        </p:spPr>
-        <p:txBody>
-          <a:bodyPr wrap="square">
-            <a:spAutoFit/>
-          </a:bodyPr>
-          <a:lstStyle/>
-          <a:p>
-            <a:pPr>
-              <a:defRPr sz="3200" b="1">
-                <a:solidFill>
-                  <a:srgbClr val="1B2A4A"/>
-                </a:solidFill>
-                <a:latin typeface="Segoe UI"/>
-              </a:defRPr>
-            </a:pPr>
-            <a:r>
-              <a:t>Getting the Code</a:t>
-            </a:r>
-          </a:p>
-        </p:txBody>
-      </p:sp>
-      <p:cxnSp>
-        <p:nvCxnSpPr>
-          <p:cNvPr id="5" name="Connector 4"/>
-          <p:cNvCxnSpPr/>
-          <p:nvPr/>
-        </p:nvCxnSpPr>
-        <p:spPr>
-          <a:xfrm>
-            <a:off x="548640" y="1417320"/>
-            <a:ext cx="11091672" cy="0"/>
-          </a:xfrm>
-          <a:prstGeom prst="line">
-            <a:avLst/>
-          </a:prstGeom>
-          <a:ln w="28575">
-            <a:solidFill>
-              <a:srgbClr val="0066CC"/>
-            </a:solidFill>
-          </a:ln>
-        </p:spPr>
-        <p:style>
-          <a:lnRef idx="2">
-            <a:schemeClr val="accent1"/>
-          </a:lnRef>
-          <a:fillRef idx="0">
-            <a:schemeClr val="accent1"/>
-          </a:fillRef>
-          <a:effectRef idx="1">
-            <a:schemeClr val="accent1"/>
-          </a:effectRef>
-          <a:fontRef idx="minor">
-            <a:schemeClr val="tx1"/>
-          </a:fontRef>
-        </p:style>
-      </p:cxnSp>
-      <p:sp>
-        <p:nvSpPr>
-          <p:cNvPr id="6" name="TextBox 5"/>
-          <p:cNvSpPr txBox="1"/>
-          <p:nvPr/>
-        </p:nvSpPr>
-        <p:spPr>
-          <a:xfrm>
-            <a:off x="548640" y="6473952"/>
-            <a:ext cx="8229600" cy="320040"/>
-          </a:xfrm>
-          <a:prstGeom prst="rect">
-            <a:avLst/>
-          </a:prstGeom>
-          <a:noFill/>
-        </p:spPr>
-        <p:txBody>
-          <a:bodyPr wrap="none">
-            <a:spAutoFit/>
-          </a:bodyPr>
-          <a:lstStyle/>
-          <a:p>
-            <a:pPr>
-              <a:defRPr sz="1100">
-                <a:solidFill>
-                  <a:srgbClr val="555555"/>
-                </a:solidFill>
-                <a:latin typeface="Segoe UI"/>
-              </a:defRPr>
-            </a:pPr>
-            <a:r>
-              <a:t>padb-tools</a:t>
-            </a:r>
-          </a:p>
-        </p:txBody>
-      </p:sp>
-      <p:sp>
-        <p:nvSpPr>
-          <p:cNvPr id="7" name="TextBox 6"/>
-          <p:cNvSpPr txBox="1"/>
-          <p:nvPr/>
-        </p:nvSpPr>
-        <p:spPr>
-          <a:xfrm>
-            <a:off x="11338560" y="6473952"/>
-            <a:ext cx="548640" cy="320040"/>
-          </a:xfrm>
-          <a:prstGeom prst="rect">
-            <a:avLst/>
-          </a:prstGeom>
-          <a:noFill/>
-        </p:spPr>
-        <p:txBody>
-          <a:bodyPr wrap="none">
-            <a:spAutoFit/>
-          </a:bodyPr>
-          <a:lstStyle/>
-          <a:p>
-            <a:pPr algn="r">
-              <a:defRPr sz="1100">
-                <a:solidFill>
-                  <a:srgbClr val="555555"/>
-                </a:solidFill>
-              </a:defRPr>
-            </a:pPr>
-            <a:r>
-              <a:t>48</a:t>
-            </a:r>
-          </a:p>
-        </p:txBody>
-      </p:sp>
-      <p:sp>
-        <p:nvSpPr>
-          <p:cNvPr id="8" name="TextBox 7"/>
-          <p:cNvSpPr txBox="1"/>
-          <p:nvPr/>
-        </p:nvSpPr>
-        <p:spPr>
-          <a:xfrm>
-            <a:off x="548640" y="1691640"/>
-            <a:ext cx="11064240" cy="365760"/>
-          </a:xfrm>
-          <a:prstGeom prst="rect">
-            <a:avLst/>
-          </a:prstGeom>
-          <a:noFill/>
-        </p:spPr>
-        <p:txBody>
-          <a:bodyPr wrap="square">
-            <a:spAutoFit/>
-          </a:bodyPr>
-          <a:lstStyle/>
-          <a:p>
-            <a:pPr>
-              <a:spcAft>
-                <a:spcPts val="1000"/>
-              </a:spcAft>
-            </a:pPr>
-            <a:r>
-              <a:rPr sz="1900">
-                <a:solidFill>
-                  <a:srgbClr val="1B2A4A"/>
-                </a:solidFill>
-                <a:latin typeface="Segoe UI"/>
-              </a:rPr>
-              <a:t>•  This repo isn't on a company-wide share by default — copy it from:</a:t>
-            </a:r>
-          </a:p>
-        </p:txBody>
-      </p:sp>
-      <p:sp>
-        <p:nvSpPr>
-          <p:cNvPr id="9" name="Rounded Rectangle 8"/>
-          <p:cNvSpPr/>
-          <p:nvPr/>
-        </p:nvSpPr>
-        <p:spPr>
-          <a:xfrm>
-            <a:off x="548640" y="2103120"/>
-            <a:ext cx="11064240" cy="502920"/>
-          </a:xfrm>
-          <a:prstGeom prst="roundRect">
-            <a:avLst>
-              <a:gd name="adj" fmla="val 4000"/>
-            </a:avLst>
-          </a:prstGeom>
-          <a:solidFill>
-            <a:srgbClr val="282C34"/>
-          </a:solidFill>
-          <a:ln>
-            <a:solidFill>
-              <a:srgbClr val="111318"/>
-            </a:solidFill>
-          </a:ln>
-          <a:effectLst/>
-        </p:spPr>
-        <p:style>
-          <a:lnRef idx="1">
-            <a:schemeClr val="accent1"/>
-          </a:lnRef>
-          <a:fillRef idx="3">
-            <a:schemeClr val="accent1"/>
-          </a:fillRef>
-          <a:effectRef idx="2">
-            <a:schemeClr val="accent1"/>
-          </a:effectRef>
-          <a:fontRef idx="minor">
-            <a:schemeClr val="lt1"/>
-          </a:fontRef>
-        </p:style>
-        <p:txBody>
-          <a:bodyPr rtlCol="0" anchor="t" wrap="square" lIns="228600" rIns="228600" tIns="164592" bIns="164592"/>
-          <a:lstStyle/>
-          <a:p>
-            <a:pPr algn="l">
-              <a:spcAft>
-                <a:spcPts val="200"/>
-              </a:spcAft>
-            </a:pPr>
-            <a:r>
-              <a:rPr sz="1350">
-                <a:solidFill>
-                  <a:srgbClr val="E6E6E6"/>
-                </a:solidFill>
-                <a:latin typeface="Consolas"/>
-              </a:rPr>
-              <a:t>\\srsnas01.srs.is.keysight.com\prod\MIDRF3\SG6311A\Padb-tools\tools</a:t>
-            </a:r>
-          </a:p>
-        </p:txBody>
-      </p:sp>
-      <p:sp>
-        <p:nvSpPr>
-          <p:cNvPr id="10" name="TextBox 9"/>
-          <p:cNvSpPr txBox="1"/>
-          <p:nvPr/>
-        </p:nvSpPr>
-        <p:spPr>
-          <a:xfrm>
-            <a:off x="548640" y="2788920"/>
-            <a:ext cx="11064240" cy="365760"/>
-          </a:xfrm>
-          <a:prstGeom prst="rect">
-            <a:avLst/>
-          </a:prstGeom>
-          <a:noFill/>
-        </p:spPr>
-        <p:txBody>
-          <a:bodyPr wrap="square">
-            <a:spAutoFit/>
-          </a:bodyPr>
-          <a:lstStyle/>
-          <a:p>
-            <a:pPr>
-              <a:spcAft>
-                <a:spcPts val="1000"/>
-              </a:spcAft>
-            </a:pPr>
-            <a:r>
-              <a:rPr sz="1800">
-                <a:solidFill>
-                  <a:srgbClr val="1B2A4A"/>
-                </a:solidFill>
-                <a:latin typeface="Segoe UI"/>
-              </a:rPr>
-              <a:t>•  Copy that whole "tools" folder to a local path, e.g. C:\apps\padb\tools</a:t>
-            </a:r>
-          </a:p>
-        </p:txBody>
-      </p:sp>
-      <p:sp>
-        <p:nvSpPr>
-          <p:cNvPr id="11" name="TextBox 10"/>
-          <p:cNvSpPr txBox="1"/>
-          <p:nvPr/>
-        </p:nvSpPr>
-        <p:spPr>
-          <a:xfrm>
-            <a:off x="548640" y="3429000"/>
-            <a:ext cx="11064240" cy="914400"/>
-          </a:xfrm>
-          <a:prstGeom prst="rect">
-            <a:avLst/>
-          </a:prstGeom>
-          <a:noFill/>
-        </p:spPr>
-        <p:txBody>
-          <a:bodyPr wrap="square">
-            <a:spAutoFit/>
-          </a:bodyPr>
-          <a:lstStyle/>
-          <a:p>
-            <a:pPr>
-              <a:spcAft>
-                <a:spcPts val="1000"/>
-              </a:spcAft>
-            </a:pPr>
-            <a:r>
-              <a:rPr sz="1700">
-                <a:solidFill>
-                  <a:srgbClr val="1B2A4A"/>
-                </a:solidFill>
-                <a:latin typeface="Segoe UI"/>
-              </a:rPr>
-              <a:t>•  padb_batch.py is bundled directly inside the tools folder (added 2026-08-05) —</a:t>
-            </a:r>
-          </a:p>
-          <a:p>
-            <a:pPr lvl="1">
-              <a:spcAft>
-                <a:spcPts val="600"/>
-              </a:spcAft>
-            </a:pPr>
-            <a:r>
-              <a:rPr sz="1500">
-                <a:solidFill>
-                  <a:srgbClr val="555555"/>
-                </a:solidFill>
-                <a:latin typeface="Segoe UI"/>
-              </a:rPr>
-              <a:t>–  no separate dependency to track down; the whole repo is self-contained</a:t>
-            </a:r>
-          </a:p>
-        </p:txBody>
-      </p:sp>
-      <p:sp>
-        <p:nvSpPr>
-          <p:cNvPr id="12" name="TextBox 11"/>
-          <p:cNvSpPr txBox="1"/>
-          <p:nvPr/>
-        </p:nvSpPr>
-        <p:spPr>
-          <a:xfrm>
-            <a:off x="548640" y="4480560"/>
-            <a:ext cx="11064240" cy="457200"/>
-          </a:xfrm>
-          <a:prstGeom prst="rect">
-            <a:avLst/>
-          </a:prstGeom>
-          <a:noFill/>
-        </p:spPr>
-        <p:txBody>
-          <a:bodyPr wrap="square">
-            <a:spAutoFit/>
-          </a:bodyPr>
-          <a:lstStyle/>
-          <a:p>
-            <a:pPr>
-              <a:spcAft>
-                <a:spcPts val="1000"/>
-              </a:spcAft>
-            </a:pPr>
-            <a:r>
-              <a:rPr sz="1650">
-                <a:solidFill>
-                  <a:srgbClr val="1B2A4A"/>
-                </a:solidFill>
-                <a:latin typeface="Segoe UI"/>
-              </a:rPr>
-              <a:t>•  Then follow the Prerequisites and Per-User Config slides earlier in this deck</a:t>
+              <a:t>Setting Up From Zero — Assumes No Prior Access</a:t>
             </a:r>
           </a:p>
         </p:txBody>
@@ -20243,7 +20145,7 @@
               </a:defRPr>
             </a:pPr>
             <a:r>
-              <a:t>First Commands to Verify Your Setup</a:t>
+              <a:t>Getting the Code</a:t>
             </a:r>
           </a:p>
         </p:txBody>
@@ -20349,7 +20251,7 @@
               </a:defRPr>
             </a:pPr>
             <a:r>
-              <a:t>49</a:t>
+              <a:t>48</a:t>
             </a:r>
           </a:p>
         </p:txBody>
@@ -20382,13 +20284,13 @@
               </a:spcAft>
             </a:pPr>
             <a:r>
-              <a:rPr sz="1800">
+              <a:rPr sz="1900">
                 <a:solidFill>
                   <a:srgbClr val="1B2A4A"/>
                 </a:solidFill>
                 <a:latin typeface="Segoe UI"/>
               </a:rPr>
-              <a:t>•  From inside the tools folder, confirm everything imports cleanly:</a:t>
+              <a:t>•  This repo isn't on a company-wide share by default — copy it from:</a:t>
             </a:r>
           </a:p>
         </p:txBody>
@@ -20443,13 +20345,13 @@
               </a:spcAft>
             </a:pPr>
             <a:r>
-              <a:rPr sz="1450">
+              <a:rPr sz="1350">
                 <a:solidFill>
                   <a:srgbClr val="E6E6E6"/>
                 </a:solidFill>
                 <a:latin typeface="Consolas"/>
               </a:rPr>
-              <a:t>py -c "import padb_run, padb_v2, padb_config"</a:t>
+              <a:t>\\srsnas01.srs.is.keysight.com\prod\MIDRF3\SG6311A\Padb-tools\tools</a:t>
             </a:r>
           </a:p>
         </p:txBody>
@@ -20462,7 +20364,7 @@
         </p:nvSpPr>
         <p:spPr>
           <a:xfrm>
-            <a:off x="548640" y="2743200"/>
+            <a:off x="548640" y="2788920"/>
             <a:ext cx="11064240" cy="365760"/>
           </a:xfrm>
           <a:prstGeom prst="rect">
@@ -20482,27 +20384,82 @@
               </a:spcAft>
             </a:pPr>
             <a:r>
+              <a:rPr sz="1800">
+                <a:solidFill>
+                  <a:srgbClr val="1B2A4A"/>
+                </a:solidFill>
+                <a:latin typeface="Segoe UI"/>
+              </a:rPr>
+              <a:t>•  Copy that whole "tools" folder to a local path, e.g. C:\apps\padb\tools</a:t>
+            </a:r>
+          </a:p>
+        </p:txBody>
+      </p:sp>
+      <p:sp>
+        <p:nvSpPr>
+          <p:cNvPr id="11" name="TextBox 10"/>
+          <p:cNvSpPr txBox="1"/>
+          <p:nvPr/>
+        </p:nvSpPr>
+        <p:spPr>
+          <a:xfrm>
+            <a:off x="548640" y="3429000"/>
+            <a:ext cx="11064240" cy="914400"/>
+          </a:xfrm>
+          <a:prstGeom prst="rect">
+            <a:avLst/>
+          </a:prstGeom>
+          <a:noFill/>
+        </p:spPr>
+        <p:txBody>
+          <a:bodyPr wrap="square">
+            <a:spAutoFit/>
+          </a:bodyPr>
+          <a:lstStyle/>
+          <a:p>
+            <a:pPr>
+              <a:spcAft>
+                <a:spcPts val="1000"/>
+              </a:spcAft>
+            </a:pPr>
+            <a:r>
               <a:rPr sz="1700">
                 <a:solidFill>
                   <a:srgbClr val="1B2A4A"/>
                 </a:solidFill>
                 <a:latin typeface="Segoe UI"/>
               </a:rPr>
-              <a:t>•  No output and no traceback = success</a:t>
-            </a:r>
-          </a:p>
-        </p:txBody>
-      </p:sp>
-      <p:sp>
-        <p:nvSpPr>
-          <p:cNvPr id="11" name="TextBox 10"/>
-          <p:cNvSpPr txBox="1"/>
-          <p:nvPr/>
-        </p:nvSpPr>
-        <p:spPr>
-          <a:xfrm>
-            <a:off x="548640" y="3291840"/>
-            <a:ext cx="11064240" cy="365760"/>
+              <a:t>•  padb_batch.py is bundled directly inside the tools folder (added 2026-08-05) —</a:t>
+            </a:r>
+          </a:p>
+          <a:p>
+            <a:pPr lvl="1">
+              <a:spcAft>
+                <a:spcPts val="600"/>
+              </a:spcAft>
+            </a:pPr>
+            <a:r>
+              <a:rPr sz="1500">
+                <a:solidFill>
+                  <a:srgbClr val="555555"/>
+                </a:solidFill>
+                <a:latin typeface="Segoe UI"/>
+              </a:rPr>
+              <a:t>–  no separate dependency to track down; the whole repo is self-contained</a:t>
+            </a:r>
+          </a:p>
+        </p:txBody>
+      </p:sp>
+      <p:sp>
+        <p:nvSpPr>
+          <p:cNvPr id="12" name="TextBox 11"/>
+          <p:cNvSpPr txBox="1"/>
+          <p:nvPr/>
+        </p:nvSpPr>
+        <p:spPr>
+          <a:xfrm>
+            <a:off x="548640" y="4480560"/>
+            <a:ext cx="11064240" cy="457200"/>
           </a:xfrm>
           <a:prstGeom prst="rect">
             <a:avLst/>
@@ -20521,145 +20478,13 @@
               </a:spcAft>
             </a:pPr>
             <a:r>
-              <a:rPr sz="1800">
+              <a:rPr sz="1650">
                 <a:solidFill>
                   <a:srgbClr val="1B2A4A"/>
                 </a:solidFill>
                 <a:latin typeface="Segoe UI"/>
               </a:rPr>
-              <a:t>•  Then generate your first job.json from any pod you have access to:</a:t>
-            </a:r>
-          </a:p>
-        </p:txBody>
-      </p:sp>
-      <p:sp>
-        <p:nvSpPr>
-          <p:cNvPr id="12" name="Rounded Rectangle 11"/>
-          <p:cNvSpPr/>
-          <p:nvPr/>
-        </p:nvSpPr>
-        <p:spPr>
-          <a:xfrm>
-            <a:off x="548640" y="3703320"/>
-            <a:ext cx="11064240" cy="502920"/>
-          </a:xfrm>
-          <a:prstGeom prst="roundRect">
-            <a:avLst>
-              <a:gd name="adj" fmla="val 4000"/>
-            </a:avLst>
-          </a:prstGeom>
-          <a:solidFill>
-            <a:srgbClr val="282C34"/>
-          </a:solidFill>
-          <a:ln>
-            <a:solidFill>
-              <a:srgbClr val="111318"/>
-            </a:solidFill>
-          </a:ln>
-          <a:effectLst/>
-        </p:spPr>
-        <p:style>
-          <a:lnRef idx="1">
-            <a:schemeClr val="accent1"/>
-          </a:lnRef>
-          <a:fillRef idx="3">
-            <a:schemeClr val="accent1"/>
-          </a:fillRef>
-          <a:effectRef idx="2">
-            <a:schemeClr val="accent1"/>
-          </a:effectRef>
-          <a:fontRef idx="minor">
-            <a:schemeClr val="lt1"/>
-          </a:fontRef>
-        </p:style>
-        <p:txBody>
-          <a:bodyPr rtlCol="0" anchor="t" wrap="square" lIns="228600" rIns="228600" tIns="164592" bIns="164592"/>
-          <a:lstStyle/>
-          <a:p>
-            <a:pPr algn="l">
-              <a:spcAft>
-                <a:spcPts val="200"/>
-              </a:spcAft>
-            </a:pPr>
-            <a:r>
-              <a:rPr sz="1450">
-                <a:solidFill>
-                  <a:srgbClr val="E6E6E6"/>
-                </a:solidFill>
-                <a:latin typeface="Consolas"/>
-              </a:rPr>
-              <a:t>py padb_make_job.py YourPod.pod --module YourModule</a:t>
-            </a:r>
-          </a:p>
-        </p:txBody>
-      </p:sp>
-      <p:sp>
-        <p:nvSpPr>
-          <p:cNvPr id="13" name="TextBox 12"/>
-          <p:cNvSpPr txBox="1"/>
-          <p:nvPr/>
-        </p:nvSpPr>
-        <p:spPr>
-          <a:xfrm>
-            <a:off x="548640" y="4343400"/>
-            <a:ext cx="11064240" cy="1463040"/>
-          </a:xfrm>
-          <a:prstGeom prst="rect">
-            <a:avLst/>
-          </a:prstGeom>
-          <a:noFill/>
-        </p:spPr>
-        <p:txBody>
-          <a:bodyPr wrap="square">
-            <a:spAutoFit/>
-          </a:bodyPr>
-          <a:lstStyle/>
-          <a:p>
-            <a:pPr>
-              <a:spcAft>
-                <a:spcPts val="1000"/>
-              </a:spcAft>
-            </a:pPr>
-            <a:r>
-              <a:rPr sz="1700">
-                <a:solidFill>
-                  <a:srgbClr val="1B2A4A"/>
-                </a:solidFill>
-                <a:latin typeface="Segoe UI"/>
-              </a:rPr>
-              <a:t>•  If PADB-R.exe launches and a real window briefly appears, you're fully set up</a:t>
-            </a:r>
-          </a:p>
-          <a:p>
-            <a:pPr>
-              <a:spcAft>
-                <a:spcPts val="1000"/>
-              </a:spcAft>
-            </a:pPr>
-            <a:r>
-              <a:rPr sz="1700">
-                <a:solidFill>
-                  <a:srgbClr val="1B2A4A"/>
-                </a:solidFill>
-                <a:latin typeface="Segoe UI"/>
-              </a:rPr>
-              <a:t>•  Stuck? GETTING_STARTED.md → Quick_Start.md, or type /padb-tools once you're</a:t>
-            </a:r>
-          </a:p>
-          <a:p>
-            <a:pPr lvl="1">
-              <a:spcAft>
-                <a:spcPts val="600"/>
-              </a:spcAft>
-            </a:pPr>
-            <a:r>
-              <a:rPr sz="1500">
-                <a:solidFill>
-                  <a:srgbClr val="555555"/>
-                </a:solidFill>
-                <a:latin typeface="Segoe UI"/>
-              </a:rPr>
-              <a:t>–  working inside the repo</a:t>
+              <a:t>•  Then follow the Prerequisites and Per-User Config slides earlier in this deck</a:t>
             </a:r>
           </a:p>
         </p:txBody>
@@ -20757,7 +20582,7 @@
               </a:defRPr>
             </a:pPr>
             <a:r>
-              <a:t>Multi-Site Testing</a:t>
+              <a:t>Appendix</a:t>
             </a:r>
           </a:p>
         </p:txBody>
@@ -20793,7 +20618,7 @@
               </a:defRPr>
             </a:pPr>
             <a:r>
-              <a:t>Duplicate Test Runs — Why "n DUTs" Isn't Always DUT Count</a:t>
+              <a:t>First Commands to Verify Your Setup</a:t>
             </a:r>
           </a:p>
         </p:txBody>
@@ -20899,7 +20724,7 @@
               </a:defRPr>
             </a:pPr>
             <a:r>
-              <a:t>44</a:t>
+              <a:t>49</a:t>
             </a:r>
           </a:p>
         </p:txBody>
@@ -20912,8 +20737,8 @@
         </p:nvSpPr>
         <p:spPr>
           <a:xfrm>
-            <a:off x="548640" y="1645920"/>
-            <a:ext cx="11064240" cy="4754880"/>
+            <a:off x="548640" y="1691640"/>
+            <a:ext cx="11064240" cy="365760"/>
           </a:xfrm>
           <a:prstGeom prst="rect">
             <a:avLst/>
@@ -20932,15 +20757,138 @@
               </a:spcAft>
             </a:pPr>
             <a:r>
+              <a:rPr sz="1800">
+                <a:solidFill>
+                  <a:srgbClr val="1B2A4A"/>
+                </a:solidFill>
+                <a:latin typeface="Segoe UI"/>
+              </a:rPr>
+              <a:t>•  From inside the tools folder, confirm everything imports cleanly:</a:t>
+            </a:r>
+          </a:p>
+        </p:txBody>
+      </p:sp>
+      <p:sp>
+        <p:nvSpPr>
+          <p:cNvPr id="9" name="Rounded Rectangle 8"/>
+          <p:cNvSpPr/>
+          <p:nvPr/>
+        </p:nvSpPr>
+        <p:spPr>
+          <a:xfrm>
+            <a:off x="548640" y="2103120"/>
+            <a:ext cx="11064240" cy="502920"/>
+          </a:xfrm>
+          <a:prstGeom prst="roundRect">
+            <a:avLst>
+              <a:gd name="adj" fmla="val 4000"/>
+            </a:avLst>
+          </a:prstGeom>
+          <a:solidFill>
+            <a:srgbClr val="282C34"/>
+          </a:solidFill>
+          <a:ln>
+            <a:solidFill>
+              <a:srgbClr val="111318"/>
+            </a:solidFill>
+          </a:ln>
+          <a:effectLst/>
+        </p:spPr>
+        <p:style>
+          <a:lnRef idx="1">
+            <a:schemeClr val="accent1"/>
+          </a:lnRef>
+          <a:fillRef idx="3">
+            <a:schemeClr val="accent1"/>
+          </a:fillRef>
+          <a:effectRef idx="2">
+            <a:schemeClr val="accent1"/>
+          </a:effectRef>
+          <a:fontRef idx="minor">
+            <a:schemeClr val="lt1"/>
+          </a:fontRef>
+        </p:style>
+        <p:txBody>
+          <a:bodyPr rtlCol="0" anchor="t" wrap="square" lIns="228600" rIns="228600" tIns="164592" bIns="164592"/>
+          <a:lstStyle/>
+          <a:p>
+            <a:pPr algn="l">
+              <a:spcAft>
+                <a:spcPts val="200"/>
+              </a:spcAft>
+            </a:pPr>
+            <a:r>
+              <a:rPr sz="1450">
+                <a:solidFill>
+                  <a:srgbClr val="E6E6E6"/>
+                </a:solidFill>
+                <a:latin typeface="Consolas"/>
+              </a:rPr>
+              <a:t>py -c "import padb_run, padb_v2, padb_config"</a:t>
+            </a:r>
+          </a:p>
+        </p:txBody>
+      </p:sp>
+      <p:sp>
+        <p:nvSpPr>
+          <p:cNvPr id="10" name="TextBox 9"/>
+          <p:cNvSpPr txBox="1"/>
+          <p:nvPr/>
+        </p:nvSpPr>
+        <p:spPr>
+          <a:xfrm>
+            <a:off x="548640" y="2743200"/>
+            <a:ext cx="11064240" cy="365760"/>
+          </a:xfrm>
+          <a:prstGeom prst="rect">
+            <a:avLst/>
+          </a:prstGeom>
+          <a:noFill/>
+        </p:spPr>
+        <p:txBody>
+          <a:bodyPr wrap="square">
+            <a:spAutoFit/>
+          </a:bodyPr>
+          <a:lstStyle/>
+          <a:p>
+            <a:pPr>
+              <a:spcAft>
+                <a:spcPts val="1000"/>
+              </a:spcAft>
+            </a:pPr>
+            <a:r>
               <a:rPr sz="1700">
                 <a:solidFill>
                   <a:srgbClr val="1B2A4A"/>
                 </a:solidFill>
                 <a:latin typeface="Segoe UI"/>
               </a:rPr>
-              <a:t>•  Statistics Table's n counts raw CSV rows, not distinct DUTs — a DUT measured twice at the same point is counted twice</a:t>
-            </a:r>
-          </a:p>
+              <a:t>•  No output and no traceback = success</a:t>
+            </a:r>
+          </a:p>
+        </p:txBody>
+      </p:sp>
+      <p:sp>
+        <p:nvSpPr>
+          <p:cNvPr id="11" name="TextBox 10"/>
+          <p:cNvSpPr txBox="1"/>
+          <p:nvPr/>
+        </p:nvSpPr>
+        <p:spPr>
+          <a:xfrm>
+            <a:off x="548640" y="3291840"/>
+            <a:ext cx="11064240" cy="365760"/>
+          </a:xfrm>
+          <a:prstGeom prst="rect">
+            <a:avLst/>
+          </a:prstGeom>
+          <a:noFill/>
+        </p:spPr>
+        <p:txBody>
+          <a:bodyPr wrap="square">
+            <a:spAutoFit/>
+          </a:bodyPr>
+          <a:lstStyle/>
           <a:p>
             <a:pPr>
               <a:spcAft>
@@ -20948,13 +20896,113 @@
               </a:spcAft>
             </a:pPr>
             <a:r>
+              <a:rPr sz="1800">
+                <a:solidFill>
+                  <a:srgbClr val="1B2A4A"/>
+                </a:solidFill>
+                <a:latin typeface="Segoe UI"/>
+              </a:rPr>
+              <a:t>•  Then generate your first job.json from any pod you have access to:</a:t>
+            </a:r>
+          </a:p>
+        </p:txBody>
+      </p:sp>
+      <p:sp>
+        <p:nvSpPr>
+          <p:cNvPr id="12" name="Rounded Rectangle 11"/>
+          <p:cNvSpPr/>
+          <p:nvPr/>
+        </p:nvSpPr>
+        <p:spPr>
+          <a:xfrm>
+            <a:off x="548640" y="3703320"/>
+            <a:ext cx="11064240" cy="502920"/>
+          </a:xfrm>
+          <a:prstGeom prst="roundRect">
+            <a:avLst>
+              <a:gd name="adj" fmla="val 4000"/>
+            </a:avLst>
+          </a:prstGeom>
+          <a:solidFill>
+            <a:srgbClr val="282C34"/>
+          </a:solidFill>
+          <a:ln>
+            <a:solidFill>
+              <a:srgbClr val="111318"/>
+            </a:solidFill>
+          </a:ln>
+          <a:effectLst/>
+        </p:spPr>
+        <p:style>
+          <a:lnRef idx="1">
+            <a:schemeClr val="accent1"/>
+          </a:lnRef>
+          <a:fillRef idx="3">
+            <a:schemeClr val="accent1"/>
+          </a:fillRef>
+          <a:effectRef idx="2">
+            <a:schemeClr val="accent1"/>
+          </a:effectRef>
+          <a:fontRef idx="minor">
+            <a:schemeClr val="lt1"/>
+          </a:fontRef>
+        </p:style>
+        <p:txBody>
+          <a:bodyPr rtlCol="0" anchor="t" wrap="square" lIns="228600" rIns="228600" tIns="164592" bIns="164592"/>
+          <a:lstStyle/>
+          <a:p>
+            <a:pPr algn="l">
+              <a:spcAft>
+                <a:spcPts val="200"/>
+              </a:spcAft>
+            </a:pPr>
+            <a:r>
+              <a:rPr sz="1450">
+                <a:solidFill>
+                  <a:srgbClr val="E6E6E6"/>
+                </a:solidFill>
+                <a:latin typeface="Consolas"/>
+              </a:rPr>
+              <a:t>py padb_make_job.py YourPod.pod --module YourModule</a:t>
+            </a:r>
+          </a:p>
+        </p:txBody>
+      </p:sp>
+      <p:sp>
+        <p:nvSpPr>
+          <p:cNvPr id="13" name="TextBox 12"/>
+          <p:cNvSpPr txBox="1"/>
+          <p:nvPr/>
+        </p:nvSpPr>
+        <p:spPr>
+          <a:xfrm>
+            <a:off x="548640" y="4343400"/>
+            <a:ext cx="11064240" cy="1463040"/>
+          </a:xfrm>
+          <a:prstGeom prst="rect">
+            <a:avLst/>
+          </a:prstGeom>
+          <a:noFill/>
+        </p:spPr>
+        <p:txBody>
+          <a:bodyPr wrap="square">
+            <a:spAutoFit/>
+          </a:bodyPr>
+          <a:lstStyle/>
+          <a:p>
+            <a:pPr>
+              <a:spcAft>
+                <a:spcPts val="1000"/>
+              </a:spcAft>
+            </a:pPr>
+            <a:r>
               <a:rPr sz="1700">
                 <a:solidFill>
                   <a:srgbClr val="1B2A4A"/>
                 </a:solidFill>
                 <a:latin typeface="Segoe UI"/>
               </a:rPr>
-              <a:t>•  "Dup runs" column sums the extras across every duplicated DUT — 3 DUTs with 1 dup each is not the same as 1 DUT with 3 dups</a:t>
+              <a:t>•  If PADB-R.exe launches and a real window briefly appears, you're fully set up</a:t>
             </a:r>
           </a:p>
           <a:p>
@@ -20970,71 +21018,23 @@
                 </a:solidFill>
                 <a:latin typeface="Segoe UI"/>
               </a:rPr>
-              <a:t>•  Site Population Check's "Genuinely repeated freqs" / "SR dup pts" break duplicates down per-DUT instead of one ambiguous total</a:t>
-            </a:r>
-          </a:p>
-          <a:p>
-            <a:pPr>
-              <a:spcAft>
-                <a:spcPts val="1000"/>
-              </a:spcAft>
-            </a:pPr>
-            <a:r>
-              <a:rPr sz="1700">
-                <a:solidFill>
-                  <a:srgbClr val="1B2A4A"/>
-                </a:solidFill>
-                <a:latin typeface="Segoe UI"/>
-              </a:rPr>
-              <a:t>•  Port is part of the duplicate identity — a DUT's RF1 and RF2 rows are two real measurements, never counted as duplicates of each other</a:t>
+              <a:t>•  Stuck? GETTING_STARTED.md → Quick_Start.md, or type /padb-tools once you're</a:t>
             </a:r>
           </a:p>
           <a:p>
             <a:pPr lvl="1">
               <a:spcAft>
-                <a:spcPts val="1000"/>
+                <a:spcPts val="600"/>
               </a:spcAft>
             </a:pPr>
             <a:r>
               <a:rPr sz="1500">
                 <a:solidFill>
-                  <a:srgbClr val="1B2A4A"/>
-                </a:solidFill>
-                <a:latin typeface="Segoe UI"/>
-              </a:rPr>
-              <a:t>–  Real bug fixed this session: an earlier version of this check missed that distinction</a:t>
-            </a:r>
-          </a:p>
-          <a:p>
-            <a:pPr>
-              <a:spcAft>
-                <a:spcPts val="1000"/>
-              </a:spcAft>
-            </a:pPr>
-            <a:r>
-              <a:rPr sz="1700">
-                <a:solidFill>
-                  <a:srgbClr val="1B2A4A"/>
-                </a:solidFill>
-                <a:latin typeface="Segoe UI"/>
-              </a:rPr>
-              <a:t>•  Condition pooling (e.g. Group by: Serial Number) is not a duplicate either — same DUT under different SpurTypes/conditions is real coverage, not a repeat</a:t>
-            </a:r>
-          </a:p>
-          <a:p>
-            <a:pPr>
-              <a:spcAft>
-                <a:spcPts val="1000"/>
-              </a:spcAft>
-            </a:pPr>
-            <a:r>
-              <a:rPr sz="1700">
-                <a:solidFill>
-                  <a:srgbClr val="1B2A4A"/>
-                </a:solidFill>
-                <a:latin typeface="Segoe UI"/>
-              </a:rPr>
-              <a:t>•  "Collapse dup runs" checkbox (boxplot) averages true duplicates before computing box stats — stat_summary/summary don't need it, their per-DUT data is already pre-averaged server-side</a:t>
+                  <a:srgbClr val="555555"/>
+                </a:solidFill>
+                <a:latin typeface="Segoe UI"/>
+              </a:rPr>
+              <a:t>–  working inside the repo</a:t>
             </a:r>
           </a:p>
         </p:txBody>

--- a/PADB_Simple_and_Interactive.pptx
+++ b/PADB_Simple_and_Interactive.pptx
@@ -11128,7 +11128,7 @@
                 </a:solidFill>
                 <a:latin typeface="Segoe UI"/>
               </a:rPr>
-              <a:t>•  This pod's CSV has real Upper (30 dBm) and Lower (23 dBm) limits, so both are detected</a:t>
+              <a:t>•  This pod's CSV has real Upper (30 dBm) and Lower (23 dBm) limits, so both are detected automatically — no manual override needed (data beats config)</a:t>
             </a:r>
           </a:p>
           <a:p>
@@ -11144,39 +11144,7 @@
                 </a:solidFill>
                 <a:latin typeface="Segoe UI"/>
               </a:rPr>
-              <a:t>•  automatically -- no manual override needed, and no live selector to switch (data beats config)</a:t>
-            </a:r>
-          </a:p>
-          <a:p>
-            <a:pPr>
-              <a:spcAft>
-                <a:spcPts val="1000"/>
-              </a:spcAft>
-            </a:pPr>
-            <a:r>
-              <a:rPr sz="1500">
-                <a:solidFill>
-                  <a:srgbClr val="1B2A4A"/>
-                </a:solidFill>
-                <a:latin typeface="Segoe UI"/>
-              </a:rPr>
-              <a:t>•  MaxPower is a guaranteed-minimum-power measurement, so the Lower limit is the one that</a:t>
-            </a:r>
-          </a:p>
-          <a:p>
-            <a:pPr>
-              <a:spcAft>
-                <a:spcPts val="1000"/>
-              </a:spcAft>
-            </a:pPr>
-            <a:r>
-              <a:rPr sz="1500">
-                <a:solidFill>
-                  <a:srgbClr val="1B2A4A"/>
-                </a:solidFill>
-                <a:latin typeface="Segoe UI"/>
-              </a:rPr>
-              <a:t>•  actually matters here -- watch the dashed lower spec line against the TTL band as you filter</a:t>
+              <a:t>•  MaxPower's guaranteed minimum means the Lower limit is what matters — watch it against the TTL band below</a:t>
             </a:r>
           </a:p>
         </p:txBody>
@@ -14363,7 +14331,7 @@
                 </a:solidFill>
                 <a:latin typeface="Segoe UI"/>
               </a:rPr>
-              <a:t>•  Run it between Step 2 (extraction) and Step 4 (build views) — before spending time on a build that turns out wrong:</a:t>
+              <a:t>•  Run it between Step 2 (extraction) and Step 4 (build views):</a:t>
             </a:r>
           </a:p>
         </p:txBody>

--- a/PADB_Simple_and_Interactive.pptx
+++ b/PADB_Simple_and_Interactive.pptx
@@ -5,57 +5,54 @@
     <p:sldMasterId id="2147483648" r:id="rId1"/>
   </p:sldMasterIdLst>
   <p:sldIdLst>
-    <p:sldId id="256" r:id="rId7"/>
-    <p:sldId id="257" r:id="rId8"/>
-    <p:sldId id="258" r:id="rId9"/>
-    <p:sldId id="259" r:id="rId10"/>
-    <p:sldId id="260" r:id="rId11"/>
-    <p:sldId id="261" r:id="rId12"/>
-    <p:sldId id="262" r:id="rId13"/>
-    <p:sldId id="263" r:id="rId14"/>
-    <p:sldId id="264" r:id="rId15"/>
-    <p:sldId id="265" r:id="rId16"/>
-    <p:sldId id="266" r:id="rId17"/>
-    <p:sldId id="267" r:id="rId18"/>
-    <p:sldId id="268" r:id="rId19"/>
-    <p:sldId id="269" r:id="rId20"/>
-    <p:sldId id="270" r:id="rId21"/>
-    <p:sldId id="271" r:id="rId22"/>
-    <p:sldId id="272" r:id="rId23"/>
-    <p:sldId id="273" r:id="rId24"/>
-    <p:sldId id="274" r:id="rId25"/>
-    <p:sldId id="275" r:id="rId26"/>
-    <p:sldId id="276" r:id="rId27"/>
-    <p:sldId id="277" r:id="rId28"/>
-    <p:sldId id="278" r:id="rId29"/>
-    <p:sldId id="279" r:id="rId30"/>
-    <p:sldId id="280" r:id="rId31"/>
-    <p:sldId id="281" r:id="rId32"/>
-    <p:sldId id="282" r:id="rId33"/>
-    <p:sldId id="283" r:id="rId34"/>
-    <p:sldId id="284" r:id="rId35"/>
-    <p:sldId id="285" r:id="rId36"/>
-    <p:sldId id="286" r:id="rId37"/>
-    <p:sldId id="287" r:id="rId38"/>
-    <p:sldId id="288" r:id="rId39"/>
-    <p:sldId id="289" r:id="rId40"/>
-    <p:sldId id="290" r:id="rId41"/>
-    <p:sldId id="291" r:id="rId42"/>
-    <p:sldId id="292" r:id="rId43"/>
-    <p:sldId id="293" r:id="rId44"/>
-    <p:sldId id="294" r:id="rId45"/>
-    <p:sldId id="295" r:id="rId46"/>
-    <p:sldId id="296" r:id="rId47"/>
-    <p:sldId id="301" r:id="rId52"/>
-    <p:sldId id="302" r:id="rId53"/>
-    <p:sldId id="304" r:id="rId55"/>
-    <p:sldId id="303" r:id="rId54"/>
-    <p:sldId id="297" r:id="rId48"/>
-    <p:sldId id="298" r:id="rId49"/>
-    <p:sldId id="299" r:id="rId50"/>
-    <p:sldId id="300" r:id="rId51"/>
+    <p:sldId id="256" r:id="rId2"/>
+    <p:sldId id="257" r:id="rId3"/>
+    <p:sldId id="258" r:id="rId4"/>
+    <p:sldId id="259" r:id="rId5"/>
+    <p:sldId id="260" r:id="rId6"/>
+    <p:sldId id="261" r:id="rId7"/>
+    <p:sldId id="262" r:id="rId8"/>
+    <p:sldId id="263" r:id="rId9"/>
+    <p:sldId id="264" r:id="rId10"/>
+    <p:sldId id="265" r:id="rId11"/>
+    <p:sldId id="266" r:id="rId12"/>
+    <p:sldId id="267" r:id="rId13"/>
+    <p:sldId id="268" r:id="rId14"/>
+    <p:sldId id="269" r:id="rId15"/>
+    <p:sldId id="270" r:id="rId16"/>
+    <p:sldId id="271" r:id="rId17"/>
+    <p:sldId id="272" r:id="rId18"/>
+    <p:sldId id="273" r:id="rId19"/>
+    <p:sldId id="274" r:id="rId20"/>
+    <p:sldId id="275" r:id="rId21"/>
+    <p:sldId id="276" r:id="rId22"/>
+    <p:sldId id="277" r:id="rId23"/>
+    <p:sldId id="278" r:id="rId24"/>
+    <p:sldId id="279" r:id="rId25"/>
+    <p:sldId id="280" r:id="rId26"/>
+    <p:sldId id="281" r:id="rId27"/>
+    <p:sldId id="282" r:id="rId28"/>
+    <p:sldId id="283" r:id="rId29"/>
+    <p:sldId id="284" r:id="rId30"/>
+    <p:sldId id="285" r:id="rId31"/>
+    <p:sldId id="286" r:id="rId32"/>
+    <p:sldId id="287" r:id="rId33"/>
+    <p:sldId id="288" r:id="rId34"/>
+    <p:sldId id="289" r:id="rId35"/>
+    <p:sldId id="290" r:id="rId36"/>
+    <p:sldId id="291" r:id="rId37"/>
+    <p:sldId id="292" r:id="rId38"/>
+    <p:sldId id="293" r:id="rId39"/>
+    <p:sldId id="294" r:id="rId40"/>
+    <p:sldId id="295" r:id="rId41"/>
+    <p:sldId id="296" r:id="rId42"/>
+    <p:sldId id="297" r:id="rId43"/>
+    <p:sldId id="298" r:id="rId44"/>
+    <p:sldId id="299" r:id="rId45"/>
+    <p:sldId id="300" r:id="rId46"/>
+    <p:sldId id="301" r:id="rId47"/>
   </p:sldIdLst>
-  <p:sldSz cx="12191695" cy="6858000" type="screen4x3"/>
+  <p:sldSz cx="12192000" cy="6858000"/>
   <p:notesSz cx="6858000" cy="9144000"/>
   <p:defaultTextStyle>
     <a:defPPr>
@@ -152,6 +149,22 @@
       </a:defRPr>
     </a:lvl9pPr>
   </p:defaultTextStyle>
+  <p:extLst>
+    <p:ext uri="{EFAFB233-063F-42B5-8137-9DF3F51BA10A}">
+      <p15:sldGuideLst xmlns:p15="http://schemas.microsoft.com/office/powerpoint/2012/main">
+        <p15:guide id="1" orient="horz" pos="2160">
+          <p15:clr>
+            <a:srgbClr val="A4A3A4"/>
+          </p15:clr>
+        </p15:guide>
+        <p15:guide id="2" pos="2880">
+          <p15:clr>
+            <a:srgbClr val="A4A3A4"/>
+          </p15:clr>
+        </p15:guide>
+      </p15:sldGuideLst>
+    </p:ext>
+  </p:extLst>
 </p:presentation>
 </file>
 
@@ -193,10 +206,9 @@
           <a:lstStyle/>
           <a:p>
             <a:r>
-              <a:rPr lang="en-US" smtClean="0"/>
+              <a:rPr lang="en-US"/>
               <a:t>Click to edit Master title style</a:t>
             </a:r>
-            <a:endParaRPr lang="en-US"/>
           </a:p>
         </p:txBody>
       </p:sp>
@@ -312,10 +324,9 @@
           </a:lstStyle>
           <a:p>
             <a:r>
-              <a:rPr lang="en-US" smtClean="0"/>
+              <a:rPr lang="en-US"/>
               <a:t>Click to edit Master subtitle style</a:t>
             </a:r>
-            <a:endParaRPr lang="en-US"/>
           </a:p>
         </p:txBody>
       </p:sp>
@@ -336,7 +347,7 @@
           <a:p>
             <a:fld id="{5BCAD085-E8A6-8845-BD4E-CB4CCA059FC4}" type="datetimeFigureOut">
               <a:rPr lang="en-US" smtClean="0"/>
-              <a:t>1/27/13</a:t>
+              <a:t>8/31/2026</a:t>
             </a:fld>
             <a:endParaRPr lang="en-US"/>
           </a:p>
@@ -430,10 +441,9 @@
           <a:lstStyle/>
           <a:p>
             <a:r>
-              <a:rPr lang="en-US" smtClean="0"/>
+              <a:rPr lang="en-US"/>
               <a:t>Click to edit Master title style</a:t>
             </a:r>
-            <a:endParaRPr lang="en-US"/>
           </a:p>
         </p:txBody>
       </p:sp>
@@ -454,38 +464,37 @@
           <a:p>
             <a:pPr lvl="0"/>
             <a:r>
-              <a:rPr lang="en-US" smtClean="0"/>
+              <a:rPr lang="en-US"/>
               <a:t>Click to edit Master text styles</a:t>
             </a:r>
           </a:p>
           <a:p>
             <a:pPr lvl="1"/>
             <a:r>
-              <a:rPr lang="en-US" smtClean="0"/>
+              <a:rPr lang="en-US"/>
               <a:t>Second level</a:t>
             </a:r>
           </a:p>
           <a:p>
             <a:pPr lvl="2"/>
             <a:r>
-              <a:rPr lang="en-US" smtClean="0"/>
+              <a:rPr lang="en-US"/>
               <a:t>Third level</a:t>
             </a:r>
           </a:p>
           <a:p>
             <a:pPr lvl="3"/>
             <a:r>
-              <a:rPr lang="en-US" smtClean="0"/>
+              <a:rPr lang="en-US"/>
               <a:t>Fourth level</a:t>
             </a:r>
           </a:p>
           <a:p>
             <a:pPr lvl="4"/>
             <a:r>
-              <a:rPr lang="en-US" smtClean="0"/>
+              <a:rPr lang="en-US"/>
               <a:t>Fifth level</a:t>
             </a:r>
-            <a:endParaRPr lang="en-US"/>
           </a:p>
         </p:txBody>
       </p:sp>
@@ -506,7 +515,7 @@
           <a:p>
             <a:fld id="{5BCAD085-E8A6-8845-BD4E-CB4CCA059FC4}" type="datetimeFigureOut">
               <a:rPr lang="en-US" smtClean="0"/>
-              <a:t>1/27/13</a:t>
+              <a:t>8/31/2026</a:t>
             </a:fld>
             <a:endParaRPr lang="en-US"/>
           </a:p>
@@ -605,10 +614,9 @@
           <a:lstStyle/>
           <a:p>
             <a:r>
-              <a:rPr lang="en-US" smtClean="0"/>
+              <a:rPr lang="en-US"/>
               <a:t>Click to edit Master title style</a:t>
             </a:r>
-            <a:endParaRPr lang="en-US"/>
           </a:p>
         </p:txBody>
       </p:sp>
@@ -634,38 +642,37 @@
           <a:p>
             <a:pPr lvl="0"/>
             <a:r>
-              <a:rPr lang="en-US" smtClean="0"/>
+              <a:rPr lang="en-US"/>
               <a:t>Click to edit Master text styles</a:t>
             </a:r>
           </a:p>
           <a:p>
             <a:pPr lvl="1"/>
             <a:r>
-              <a:rPr lang="en-US" smtClean="0"/>
+              <a:rPr lang="en-US"/>
               <a:t>Second level</a:t>
             </a:r>
           </a:p>
           <a:p>
             <a:pPr lvl="2"/>
             <a:r>
-              <a:rPr lang="en-US" smtClean="0"/>
+              <a:rPr lang="en-US"/>
               <a:t>Third level</a:t>
             </a:r>
           </a:p>
           <a:p>
             <a:pPr lvl="3"/>
             <a:r>
-              <a:rPr lang="en-US" smtClean="0"/>
+              <a:rPr lang="en-US"/>
               <a:t>Fourth level</a:t>
             </a:r>
           </a:p>
           <a:p>
             <a:pPr lvl="4"/>
             <a:r>
-              <a:rPr lang="en-US" smtClean="0"/>
+              <a:rPr lang="en-US"/>
               <a:t>Fifth level</a:t>
             </a:r>
-            <a:endParaRPr lang="en-US"/>
           </a:p>
         </p:txBody>
       </p:sp>
@@ -686,7 +693,7 @@
           <a:p>
             <a:fld id="{5BCAD085-E8A6-8845-BD4E-CB4CCA059FC4}" type="datetimeFigureOut">
               <a:rPr lang="en-US" smtClean="0"/>
-              <a:t>1/27/13</a:t>
+              <a:t>8/31/2026</a:t>
             </a:fld>
             <a:endParaRPr lang="en-US"/>
           </a:p>
@@ -780,10 +787,9 @@
           <a:lstStyle/>
           <a:p>
             <a:r>
-              <a:rPr lang="en-US" smtClean="0"/>
+              <a:rPr lang="en-US"/>
               <a:t>Click to edit Master title style</a:t>
             </a:r>
-            <a:endParaRPr lang="en-US"/>
           </a:p>
         </p:txBody>
       </p:sp>
@@ -804,38 +810,37 @@
           <a:p>
             <a:pPr lvl="0"/>
             <a:r>
-              <a:rPr lang="en-US" smtClean="0"/>
+              <a:rPr lang="en-US"/>
               <a:t>Click to edit Master text styles</a:t>
             </a:r>
           </a:p>
           <a:p>
             <a:pPr lvl="1"/>
             <a:r>
-              <a:rPr lang="en-US" smtClean="0"/>
+              <a:rPr lang="en-US"/>
               <a:t>Second level</a:t>
             </a:r>
           </a:p>
           <a:p>
             <a:pPr lvl="2"/>
             <a:r>
-              <a:rPr lang="en-US" smtClean="0"/>
+              <a:rPr lang="en-US"/>
               <a:t>Third level</a:t>
             </a:r>
           </a:p>
           <a:p>
             <a:pPr lvl="3"/>
             <a:r>
-              <a:rPr lang="en-US" smtClean="0"/>
+              <a:rPr lang="en-US"/>
               <a:t>Fourth level</a:t>
             </a:r>
           </a:p>
           <a:p>
             <a:pPr lvl="4"/>
             <a:r>
-              <a:rPr lang="en-US" smtClean="0"/>
+              <a:rPr lang="en-US"/>
               <a:t>Fifth level</a:t>
             </a:r>
-            <a:endParaRPr lang="en-US"/>
           </a:p>
         </p:txBody>
       </p:sp>
@@ -856,7 +861,7 @@
           <a:p>
             <a:fld id="{5BCAD085-E8A6-8845-BD4E-CB4CCA059FC4}" type="datetimeFigureOut">
               <a:rPr lang="en-US" smtClean="0"/>
-              <a:t>1/27/13</a:t>
+              <a:t>8/31/2026</a:t>
             </a:fld>
             <a:endParaRPr lang="en-US"/>
           </a:p>
@@ -959,10 +964,9 @@
           </a:lstStyle>
           <a:p>
             <a:r>
-              <a:rPr lang="en-US" smtClean="0"/>
+              <a:rPr lang="en-US"/>
               <a:t>Click to edit Master title style</a:t>
             </a:r>
-            <a:endParaRPr lang="en-US"/>
           </a:p>
         </p:txBody>
       </p:sp>
@@ -1079,7 +1083,7 @@
           <a:p>
             <a:pPr lvl="0"/>
             <a:r>
-              <a:rPr lang="en-US" smtClean="0"/>
+              <a:rPr lang="en-US"/>
               <a:t>Click to edit Master text styles</a:t>
             </a:r>
           </a:p>
@@ -1102,7 +1106,7 @@
           <a:p>
             <a:fld id="{5BCAD085-E8A6-8845-BD4E-CB4CCA059FC4}" type="datetimeFigureOut">
               <a:rPr lang="en-US" smtClean="0"/>
-              <a:t>1/27/13</a:t>
+              <a:t>8/31/2026</a:t>
             </a:fld>
             <a:endParaRPr lang="en-US"/>
           </a:p>
@@ -1196,10 +1200,9 @@
           <a:lstStyle/>
           <a:p>
             <a:r>
-              <a:rPr lang="en-US" smtClean="0"/>
+              <a:rPr lang="en-US"/>
               <a:t>Click to edit Master title style</a:t>
             </a:r>
-            <a:endParaRPr lang="en-US"/>
           </a:p>
         </p:txBody>
       </p:sp>
@@ -1253,38 +1256,37 @@
           <a:p>
             <a:pPr lvl="0"/>
             <a:r>
-              <a:rPr lang="en-US" smtClean="0"/>
+              <a:rPr lang="en-US"/>
               <a:t>Click to edit Master text styles</a:t>
             </a:r>
           </a:p>
           <a:p>
             <a:pPr lvl="1"/>
             <a:r>
-              <a:rPr lang="en-US" smtClean="0"/>
+              <a:rPr lang="en-US"/>
               <a:t>Second level</a:t>
             </a:r>
           </a:p>
           <a:p>
             <a:pPr lvl="2"/>
             <a:r>
-              <a:rPr lang="en-US" smtClean="0"/>
+              <a:rPr lang="en-US"/>
               <a:t>Third level</a:t>
             </a:r>
           </a:p>
           <a:p>
             <a:pPr lvl="3"/>
             <a:r>
-              <a:rPr lang="en-US" smtClean="0"/>
+              <a:rPr lang="en-US"/>
               <a:t>Fourth level</a:t>
             </a:r>
           </a:p>
           <a:p>
             <a:pPr lvl="4"/>
             <a:r>
-              <a:rPr lang="en-US" smtClean="0"/>
+              <a:rPr lang="en-US"/>
               <a:t>Fifth level</a:t>
             </a:r>
-            <a:endParaRPr lang="en-US"/>
           </a:p>
         </p:txBody>
       </p:sp>
@@ -1338,38 +1340,37 @@
           <a:p>
             <a:pPr lvl="0"/>
             <a:r>
-              <a:rPr lang="en-US" smtClean="0"/>
+              <a:rPr lang="en-US"/>
               <a:t>Click to edit Master text styles</a:t>
             </a:r>
           </a:p>
           <a:p>
             <a:pPr lvl="1"/>
             <a:r>
-              <a:rPr lang="en-US" smtClean="0"/>
+              <a:rPr lang="en-US"/>
               <a:t>Second level</a:t>
             </a:r>
           </a:p>
           <a:p>
             <a:pPr lvl="2"/>
             <a:r>
-              <a:rPr lang="en-US" smtClean="0"/>
+              <a:rPr lang="en-US"/>
               <a:t>Third level</a:t>
             </a:r>
           </a:p>
           <a:p>
             <a:pPr lvl="3"/>
             <a:r>
-              <a:rPr lang="en-US" smtClean="0"/>
+              <a:rPr lang="en-US"/>
               <a:t>Fourth level</a:t>
             </a:r>
           </a:p>
           <a:p>
             <a:pPr lvl="4"/>
             <a:r>
-              <a:rPr lang="en-US" smtClean="0"/>
+              <a:rPr lang="en-US"/>
               <a:t>Fifth level</a:t>
             </a:r>
-            <a:endParaRPr lang="en-US"/>
           </a:p>
         </p:txBody>
       </p:sp>
@@ -1390,7 +1391,7 @@
           <a:p>
             <a:fld id="{5BCAD085-E8A6-8845-BD4E-CB4CCA059FC4}" type="datetimeFigureOut">
               <a:rPr lang="en-US" smtClean="0"/>
-              <a:t>1/27/13</a:t>
+              <a:t>8/31/2026</a:t>
             </a:fld>
             <a:endParaRPr lang="en-US"/>
           </a:p>
@@ -1488,10 +1489,9 @@
           </a:lstStyle>
           <a:p>
             <a:r>
-              <a:rPr lang="en-US" smtClean="0"/>
+              <a:rPr lang="en-US"/>
               <a:t>Click to edit Master title style</a:t>
             </a:r>
-            <a:endParaRPr lang="en-US"/>
           </a:p>
         </p:txBody>
       </p:sp>
@@ -1554,7 +1554,7 @@
           <a:p>
             <a:pPr lvl="0"/>
             <a:r>
-              <a:rPr lang="en-US" smtClean="0"/>
+              <a:rPr lang="en-US"/>
               <a:t>Click to edit Master text styles</a:t>
             </a:r>
           </a:p>
@@ -1610,38 +1610,37 @@
           <a:p>
             <a:pPr lvl="0"/>
             <a:r>
-              <a:rPr lang="en-US" smtClean="0"/>
+              <a:rPr lang="en-US"/>
               <a:t>Click to edit Master text styles</a:t>
             </a:r>
           </a:p>
           <a:p>
             <a:pPr lvl="1"/>
             <a:r>
-              <a:rPr lang="en-US" smtClean="0"/>
+              <a:rPr lang="en-US"/>
               <a:t>Second level</a:t>
             </a:r>
           </a:p>
           <a:p>
             <a:pPr lvl="2"/>
             <a:r>
-              <a:rPr lang="en-US" smtClean="0"/>
+              <a:rPr lang="en-US"/>
               <a:t>Third level</a:t>
             </a:r>
           </a:p>
           <a:p>
             <a:pPr lvl="3"/>
             <a:r>
-              <a:rPr lang="en-US" smtClean="0"/>
+              <a:rPr lang="en-US"/>
               <a:t>Fourth level</a:t>
             </a:r>
           </a:p>
           <a:p>
             <a:pPr lvl="4"/>
             <a:r>
-              <a:rPr lang="en-US" smtClean="0"/>
+              <a:rPr lang="en-US"/>
               <a:t>Fifth level</a:t>
             </a:r>
-            <a:endParaRPr lang="en-US"/>
           </a:p>
         </p:txBody>
       </p:sp>
@@ -1704,7 +1703,7 @@
           <a:p>
             <a:pPr lvl="0"/>
             <a:r>
-              <a:rPr lang="en-US" smtClean="0"/>
+              <a:rPr lang="en-US"/>
               <a:t>Click to edit Master text styles</a:t>
             </a:r>
           </a:p>
@@ -1760,38 +1759,37 @@
           <a:p>
             <a:pPr lvl="0"/>
             <a:r>
-              <a:rPr lang="en-US" smtClean="0"/>
+              <a:rPr lang="en-US"/>
               <a:t>Click to edit Master text styles</a:t>
             </a:r>
           </a:p>
           <a:p>
             <a:pPr lvl="1"/>
             <a:r>
-              <a:rPr lang="en-US" smtClean="0"/>
+              <a:rPr lang="en-US"/>
               <a:t>Second level</a:t>
             </a:r>
           </a:p>
           <a:p>
             <a:pPr lvl="2"/>
             <a:r>
-              <a:rPr lang="en-US" smtClean="0"/>
+              <a:rPr lang="en-US"/>
               <a:t>Third level</a:t>
             </a:r>
           </a:p>
           <a:p>
             <a:pPr lvl="3"/>
             <a:r>
-              <a:rPr lang="en-US" smtClean="0"/>
+              <a:rPr lang="en-US"/>
               <a:t>Fourth level</a:t>
             </a:r>
           </a:p>
           <a:p>
             <a:pPr lvl="4"/>
             <a:r>
-              <a:rPr lang="en-US" smtClean="0"/>
+              <a:rPr lang="en-US"/>
               <a:t>Fifth level</a:t>
             </a:r>
-            <a:endParaRPr lang="en-US"/>
           </a:p>
         </p:txBody>
       </p:sp>
@@ -1812,7 +1810,7 @@
           <a:p>
             <a:fld id="{5BCAD085-E8A6-8845-BD4E-CB4CCA059FC4}" type="datetimeFigureOut">
               <a:rPr lang="en-US" smtClean="0"/>
-              <a:t>1/27/13</a:t>
+              <a:t>8/31/2026</a:t>
             </a:fld>
             <a:endParaRPr lang="en-US"/>
           </a:p>
@@ -1906,10 +1904,9 @@
           <a:lstStyle/>
           <a:p>
             <a:r>
-              <a:rPr lang="en-US" smtClean="0"/>
+              <a:rPr lang="en-US"/>
               <a:t>Click to edit Master title style</a:t>
             </a:r>
-            <a:endParaRPr lang="en-US"/>
           </a:p>
         </p:txBody>
       </p:sp>
@@ -1930,7 +1927,7 @@
           <a:p>
             <a:fld id="{5BCAD085-E8A6-8845-BD4E-CB4CCA059FC4}" type="datetimeFigureOut">
               <a:rPr lang="en-US" smtClean="0"/>
-              <a:t>1/27/13</a:t>
+              <a:t>8/31/2026</a:t>
             </a:fld>
             <a:endParaRPr lang="en-US"/>
           </a:p>
@@ -2025,7 +2022,7 @@
           <a:p>
             <a:fld id="{5BCAD085-E8A6-8845-BD4E-CB4CCA059FC4}" type="datetimeFigureOut">
               <a:rPr lang="en-US" smtClean="0"/>
-              <a:t>1/27/13</a:t>
+              <a:t>8/31/2026</a:t>
             </a:fld>
             <a:endParaRPr lang="en-US"/>
           </a:p>
@@ -2128,10 +2125,9 @@
           </a:lstStyle>
           <a:p>
             <a:r>
-              <a:rPr lang="en-US" smtClean="0"/>
+              <a:rPr lang="en-US"/>
               <a:t>Click to edit Master title style</a:t>
             </a:r>
-            <a:endParaRPr lang="en-US"/>
           </a:p>
         </p:txBody>
       </p:sp>
@@ -2185,38 +2181,37 @@
           <a:p>
             <a:pPr lvl="0"/>
             <a:r>
-              <a:rPr lang="en-US" smtClean="0"/>
+              <a:rPr lang="en-US"/>
               <a:t>Click to edit Master text styles</a:t>
             </a:r>
           </a:p>
           <a:p>
             <a:pPr lvl="1"/>
             <a:r>
-              <a:rPr lang="en-US" smtClean="0"/>
+              <a:rPr lang="en-US"/>
               <a:t>Second level</a:t>
             </a:r>
           </a:p>
           <a:p>
             <a:pPr lvl="2"/>
             <a:r>
-              <a:rPr lang="en-US" smtClean="0"/>
+              <a:rPr lang="en-US"/>
               <a:t>Third level</a:t>
             </a:r>
           </a:p>
           <a:p>
             <a:pPr lvl="3"/>
             <a:r>
-              <a:rPr lang="en-US" smtClean="0"/>
+              <a:rPr lang="en-US"/>
               <a:t>Fourth level</a:t>
             </a:r>
           </a:p>
           <a:p>
             <a:pPr lvl="4"/>
             <a:r>
-              <a:rPr lang="en-US" smtClean="0"/>
+              <a:rPr lang="en-US"/>
               <a:t>Fifth level</a:t>
             </a:r>
-            <a:endParaRPr lang="en-US"/>
           </a:p>
         </p:txBody>
       </p:sp>
@@ -2279,7 +2274,7 @@
           <a:p>
             <a:pPr lvl="0"/>
             <a:r>
-              <a:rPr lang="en-US" smtClean="0"/>
+              <a:rPr lang="en-US"/>
               <a:t>Click to edit Master text styles</a:t>
             </a:r>
           </a:p>
@@ -2302,7 +2297,7 @@
           <a:p>
             <a:fld id="{5BCAD085-E8A6-8845-BD4E-CB4CCA059FC4}" type="datetimeFigureOut">
               <a:rPr lang="en-US" smtClean="0"/>
-              <a:t>1/27/13</a:t>
+              <a:t>8/31/2026</a:t>
             </a:fld>
             <a:endParaRPr lang="en-US"/>
           </a:p>
@@ -2405,10 +2400,9 @@
           </a:lstStyle>
           <a:p>
             <a:r>
-              <a:rPr lang="en-US" smtClean="0"/>
+              <a:rPr lang="en-US"/>
               <a:t>Click to edit Master title style</a:t>
             </a:r>
-            <a:endParaRPr lang="en-US"/>
           </a:p>
         </p:txBody>
       </p:sp>
@@ -2532,7 +2526,7 @@
           <a:p>
             <a:pPr lvl="0"/>
             <a:r>
-              <a:rPr lang="en-US" smtClean="0"/>
+              <a:rPr lang="en-US"/>
               <a:t>Click to edit Master text styles</a:t>
             </a:r>
           </a:p>
@@ -2555,7 +2549,7 @@
           <a:p>
             <a:fld id="{5BCAD085-E8A6-8845-BD4E-CB4CCA059FC4}" type="datetimeFigureOut">
               <a:rPr lang="en-US" smtClean="0"/>
-              <a:t>1/27/13</a:t>
+              <a:t>8/31/2026</a:t>
             </a:fld>
             <a:endParaRPr lang="en-US"/>
           </a:p>
@@ -2664,10 +2658,9 @@
           <a:lstStyle/>
           <a:p>
             <a:r>
-              <a:rPr lang="en-US" smtClean="0"/>
+              <a:rPr lang="en-US"/>
               <a:t>Click to edit Master title style</a:t>
             </a:r>
-            <a:endParaRPr lang="en-US"/>
           </a:p>
         </p:txBody>
       </p:sp>
@@ -2698,38 +2691,37 @@
           <a:p>
             <a:pPr lvl="0"/>
             <a:r>
-              <a:rPr lang="en-US" smtClean="0"/>
+              <a:rPr lang="en-US"/>
               <a:t>Click to edit Master text styles</a:t>
             </a:r>
           </a:p>
           <a:p>
             <a:pPr lvl="1"/>
             <a:r>
-              <a:rPr lang="en-US" smtClean="0"/>
+              <a:rPr lang="en-US"/>
               <a:t>Second level</a:t>
             </a:r>
           </a:p>
           <a:p>
             <a:pPr lvl="2"/>
             <a:r>
-              <a:rPr lang="en-US" smtClean="0"/>
+              <a:rPr lang="en-US"/>
               <a:t>Third level</a:t>
             </a:r>
           </a:p>
           <a:p>
             <a:pPr lvl="3"/>
             <a:r>
-              <a:rPr lang="en-US" smtClean="0"/>
+              <a:rPr lang="en-US"/>
               <a:t>Fourth level</a:t>
             </a:r>
           </a:p>
           <a:p>
             <a:pPr lvl="4"/>
             <a:r>
-              <a:rPr lang="en-US" smtClean="0"/>
+              <a:rPr lang="en-US"/>
               <a:t>Fifth level</a:t>
             </a:r>
-            <a:endParaRPr lang="en-US"/>
           </a:p>
         </p:txBody>
       </p:sp>
@@ -2768,7 +2760,7 @@
           <a:p>
             <a:fld id="{5BCAD085-E8A6-8845-BD4E-CB4CCA059FC4}" type="datetimeFigureOut">
               <a:rPr lang="en-US" smtClean="0"/>
-              <a:t>1/27/13</a:t>
+              <a:t>8/31/2026</a:t>
             </a:fld>
             <a:endParaRPr lang="en-US"/>
           </a:p>
@@ -3127,7 +3119,7 @@
 </file>
 
 <file path=ppt/slides/slide1.xml><?xml version="1.0" encoding="utf-8"?>
-<p:sld xmlns:a="http://schemas.openxmlformats.org/drawingml/2006/main" xmlns:p="http://schemas.openxmlformats.org/presentationml/2006/main" xmlns:r="http://schemas.openxmlformats.org/officeDocument/2006/relationships">
+<p:sld xmlns:a="http://schemas.openxmlformats.org/drawingml/2006/main" xmlns:r="http://schemas.openxmlformats.org/officeDocument/2006/relationships" xmlns:p="http://schemas.openxmlformats.org/presentationml/2006/main">
   <p:cSld>
     <p:spTree>
       <p:nvGrpSpPr>
@@ -3135,7 +3127,14 @@
         <p:cNvGrpSpPr/>
         <p:nvPr/>
       </p:nvGrpSpPr>
-      <p:grpSpPr/>
+      <p:grpSpPr>
+        <a:xfrm>
+          <a:off x="0" y="0"/>
+          <a:ext cx="0" cy="0"/>
+          <a:chOff x="0" y="0"/>
+          <a:chExt cx="0" cy="0"/>
+        </a:xfrm>
+      </p:grpSpPr>
       <p:sp>
         <p:nvSpPr>
           <p:cNvPr id="2" name="Rectangle 1"/>
@@ -3177,6 +3176,7 @@
           <a:lstStyle/>
           <a:p>
             <a:pPr algn="ctr"/>
+            <a:endParaRPr/>
           </a:p>
         </p:txBody>
       </p:sp>
@@ -3332,7 +3332,7 @@
 </file>
 
 <file path=ppt/slides/slide10.xml><?xml version="1.0" encoding="utf-8"?>
-<p:sld xmlns:a="http://schemas.openxmlformats.org/drawingml/2006/main" xmlns:p="http://schemas.openxmlformats.org/presentationml/2006/main" xmlns:r="http://schemas.openxmlformats.org/officeDocument/2006/relationships">
+<p:sld xmlns:a="http://schemas.openxmlformats.org/drawingml/2006/main" xmlns:r="http://schemas.openxmlformats.org/officeDocument/2006/relationships" xmlns:p="http://schemas.openxmlformats.org/presentationml/2006/main">
   <p:cSld>
     <p:spTree>
       <p:nvGrpSpPr>
@@ -3340,7 +3340,14 @@
         <p:cNvGrpSpPr/>
         <p:nvPr/>
       </p:nvGrpSpPr>
-      <p:grpSpPr/>
+      <p:grpSpPr>
+        <a:xfrm>
+          <a:off x="0" y="0"/>
+          <a:ext cx="0" cy="0"/>
+          <a:chOff x="0" y="0"/>
+          <a:chExt cx="0" cy="0"/>
+        </a:xfrm>
+      </p:grpSpPr>
       <p:sp>
         <p:nvSpPr>
           <p:cNvPr id="2" name="Rectangle 1"/>
@@ -3382,6 +3389,7 @@
           <a:lstStyle/>
           <a:p>
             <a:pPr algn="ctr"/>
+            <a:endParaRPr/>
           </a:p>
         </p:txBody>
       </p:sp>
@@ -3643,7 +3651,7 @@
           </a:fontRef>
         </p:style>
         <p:txBody>
-          <a:bodyPr rtlCol="0" anchor="t" wrap="square" lIns="228600" rIns="228600" tIns="164592" bIns="164592"/>
+          <a:bodyPr wrap="square" lIns="228600" tIns="164592" rIns="228600" bIns="164592" rtlCol="0" anchor="t"/>
           <a:lstStyle/>
           <a:p>
             <a:pPr algn="l">
@@ -3775,7 +3783,7 @@
           </a:fontRef>
         </p:style>
         <p:txBody>
-          <a:bodyPr rtlCol="0" anchor="t" wrap="square" lIns="228600" rIns="228600" tIns="164592" bIns="164592"/>
+          <a:bodyPr wrap="square" lIns="228600" tIns="164592" rIns="228600" bIns="164592" rtlCol="0" anchor="t"/>
           <a:lstStyle/>
           <a:p>
             <a:pPr algn="l">
@@ -3923,7 +3931,7 @@
           </a:fontRef>
         </p:style>
         <p:txBody>
-          <a:bodyPr rtlCol="0" anchor="t" wrap="square" lIns="228600" rIns="228600" tIns="164592" bIns="164592"/>
+          <a:bodyPr wrap="square" lIns="228600" tIns="164592" rIns="228600" bIns="164592" rtlCol="0" anchor="t"/>
           <a:lstStyle/>
           <a:p>
             <a:pPr algn="l">
@@ -3952,7 +3960,7 @@
 </file>
 
 <file path=ppt/slides/slide11.xml><?xml version="1.0" encoding="utf-8"?>
-<p:sld xmlns:a="http://schemas.openxmlformats.org/drawingml/2006/main" xmlns:p="http://schemas.openxmlformats.org/presentationml/2006/main" xmlns:r="http://schemas.openxmlformats.org/officeDocument/2006/relationships">
+<p:sld xmlns:a="http://schemas.openxmlformats.org/drawingml/2006/main" xmlns:r="http://schemas.openxmlformats.org/officeDocument/2006/relationships" xmlns:p="http://schemas.openxmlformats.org/presentationml/2006/main">
   <p:cSld>
     <p:spTree>
       <p:nvGrpSpPr>
@@ -3960,7 +3968,14 @@
         <p:cNvGrpSpPr/>
         <p:nvPr/>
       </p:nvGrpSpPr>
-      <p:grpSpPr/>
+      <p:grpSpPr>
+        <a:xfrm>
+          <a:off x="0" y="0"/>
+          <a:ext cx="0" cy="0"/>
+          <a:chOff x="0" y="0"/>
+          <a:chExt cx="0" cy="0"/>
+        </a:xfrm>
+      </p:grpSpPr>
       <p:sp>
         <p:nvSpPr>
           <p:cNvPr id="2" name="Rectangle 1"/>
@@ -4002,6 +4017,7 @@
           <a:lstStyle/>
           <a:p>
             <a:pPr algn="ctr"/>
+            <a:endParaRPr/>
           </a:p>
         </p:txBody>
       </p:sp>
@@ -4327,7 +4343,7 @@
 </file>
 
 <file path=ppt/slides/slide12.xml><?xml version="1.0" encoding="utf-8"?>
-<p:sld xmlns:a="http://schemas.openxmlformats.org/drawingml/2006/main" xmlns:p="http://schemas.openxmlformats.org/presentationml/2006/main" xmlns:r="http://schemas.openxmlformats.org/officeDocument/2006/relationships">
+<p:sld xmlns:a="http://schemas.openxmlformats.org/drawingml/2006/main" xmlns:r="http://schemas.openxmlformats.org/officeDocument/2006/relationships" xmlns:p="http://schemas.openxmlformats.org/presentationml/2006/main">
   <p:cSld>
     <p:spTree>
       <p:nvGrpSpPr>
@@ -4335,7 +4351,14 @@
         <p:cNvGrpSpPr/>
         <p:nvPr/>
       </p:nvGrpSpPr>
-      <p:grpSpPr/>
+      <p:grpSpPr>
+        <a:xfrm>
+          <a:off x="0" y="0"/>
+          <a:ext cx="0" cy="0"/>
+          <a:chOff x="0" y="0"/>
+          <a:chExt cx="0" cy="0"/>
+        </a:xfrm>
+      </p:grpSpPr>
       <p:sp>
         <p:nvSpPr>
           <p:cNvPr id="2" name="Rectangle 1"/>
@@ -4377,6 +4400,7 @@
           <a:lstStyle/>
           <a:p>
             <a:pPr algn="ctr"/>
+            <a:endParaRPr/>
           </a:p>
         </p:txBody>
       </p:sp>
@@ -4638,7 +4662,7 @@
           </a:fontRef>
         </p:style>
         <p:txBody>
-          <a:bodyPr rtlCol="0" anchor="t" wrap="square" lIns="228600" rIns="228600" tIns="164592" bIns="164592"/>
+          <a:bodyPr wrap="square" lIns="228600" tIns="164592" rIns="228600" bIns="164592" rtlCol="0" anchor="t"/>
           <a:lstStyle/>
           <a:p>
             <a:pPr algn="l">
@@ -4738,7 +4762,7 @@
           </a:fontRef>
         </p:style>
         <p:txBody>
-          <a:bodyPr rtlCol="0" anchor="t" wrap="square" lIns="228600" rIns="228600" tIns="164592" bIns="164592"/>
+          <a:bodyPr wrap="square" lIns="228600" tIns="164592" rIns="228600" bIns="164592" rtlCol="0" anchor="t"/>
           <a:lstStyle/>
           <a:p>
             <a:pPr algn="l">
@@ -4854,7 +4878,7 @@
 </file>
 
 <file path=ppt/slides/slide13.xml><?xml version="1.0" encoding="utf-8"?>
-<p:sld xmlns:a="http://schemas.openxmlformats.org/drawingml/2006/main" xmlns:p="http://schemas.openxmlformats.org/presentationml/2006/main" xmlns:r="http://schemas.openxmlformats.org/officeDocument/2006/relationships">
+<p:sld xmlns:a="http://schemas.openxmlformats.org/drawingml/2006/main" xmlns:r="http://schemas.openxmlformats.org/officeDocument/2006/relationships" xmlns:p="http://schemas.openxmlformats.org/presentationml/2006/main">
   <p:cSld>
     <p:spTree>
       <p:nvGrpSpPr>
@@ -4862,7 +4886,14 @@
         <p:cNvGrpSpPr/>
         <p:nvPr/>
       </p:nvGrpSpPr>
-      <p:grpSpPr/>
+      <p:grpSpPr>
+        <a:xfrm>
+          <a:off x="0" y="0"/>
+          <a:ext cx="0" cy="0"/>
+          <a:chOff x="0" y="0"/>
+          <a:chExt cx="0" cy="0"/>
+        </a:xfrm>
+      </p:grpSpPr>
       <p:sp>
         <p:nvSpPr>
           <p:cNvPr id="2" name="Rectangle 1"/>
@@ -4904,6 +4935,7 @@
           <a:lstStyle/>
           <a:p>
             <a:pPr algn="ctr"/>
+            <a:endParaRPr/>
           </a:p>
         </p:txBody>
       </p:sp>
@@ -5165,7 +5197,7 @@
           </a:fontRef>
         </p:style>
         <p:txBody>
-          <a:bodyPr rtlCol="0" anchor="t" wrap="square" lIns="228600" rIns="228600" tIns="164592" bIns="164592"/>
+          <a:bodyPr wrap="square" lIns="228600" tIns="164592" rIns="228600" bIns="164592" rtlCol="0" anchor="t"/>
           <a:lstStyle/>
           <a:p>
             <a:pPr algn="l">
@@ -5329,7 +5361,7 @@
 </file>
 
 <file path=ppt/slides/slide14.xml><?xml version="1.0" encoding="utf-8"?>
-<p:sld xmlns:a="http://schemas.openxmlformats.org/drawingml/2006/main" xmlns:p="http://schemas.openxmlformats.org/presentationml/2006/main" xmlns:r="http://schemas.openxmlformats.org/officeDocument/2006/relationships">
+<p:sld xmlns:a="http://schemas.openxmlformats.org/drawingml/2006/main" xmlns:r="http://schemas.openxmlformats.org/officeDocument/2006/relationships" xmlns:p="http://schemas.openxmlformats.org/presentationml/2006/main">
   <p:cSld>
     <p:spTree>
       <p:nvGrpSpPr>
@@ -5337,7 +5369,14 @@
         <p:cNvGrpSpPr/>
         <p:nvPr/>
       </p:nvGrpSpPr>
-      <p:grpSpPr/>
+      <p:grpSpPr>
+        <a:xfrm>
+          <a:off x="0" y="0"/>
+          <a:ext cx="0" cy="0"/>
+          <a:chOff x="0" y="0"/>
+          <a:chExt cx="0" cy="0"/>
+        </a:xfrm>
+      </p:grpSpPr>
       <p:sp>
         <p:nvSpPr>
           <p:cNvPr id="2" name="Rectangle 1"/>
@@ -5379,6 +5418,7 @@
           <a:lstStyle/>
           <a:p>
             <a:pPr algn="ctr"/>
+            <a:endParaRPr/>
           </a:p>
         </p:txBody>
       </p:sp>
@@ -5656,7 +5696,7 @@
           </a:fontRef>
         </p:style>
         <p:txBody>
-          <a:bodyPr rtlCol="0" anchor="t" wrap="square" lIns="228600" rIns="228600" tIns="164592" bIns="164592"/>
+          <a:bodyPr wrap="square" lIns="228600" tIns="164592" rIns="228600" bIns="164592" rtlCol="0" anchor="t"/>
           <a:lstStyle/>
           <a:p>
             <a:pPr algn="l">
@@ -5836,7 +5876,7 @@
 </file>
 
 <file path=ppt/slides/slide15.xml><?xml version="1.0" encoding="utf-8"?>
-<p:sld xmlns:a="http://schemas.openxmlformats.org/drawingml/2006/main" xmlns:p="http://schemas.openxmlformats.org/presentationml/2006/main" xmlns:r="http://schemas.openxmlformats.org/officeDocument/2006/relationships">
+<p:sld xmlns:a="http://schemas.openxmlformats.org/drawingml/2006/main" xmlns:r="http://schemas.openxmlformats.org/officeDocument/2006/relationships" xmlns:p="http://schemas.openxmlformats.org/presentationml/2006/main">
   <p:cSld>
     <p:spTree>
       <p:nvGrpSpPr>
@@ -5844,7 +5884,14 @@
         <p:cNvGrpSpPr/>
         <p:nvPr/>
       </p:nvGrpSpPr>
-      <p:grpSpPr/>
+      <p:grpSpPr>
+        <a:xfrm>
+          <a:off x="0" y="0"/>
+          <a:ext cx="0" cy="0"/>
+          <a:chOff x="0" y="0"/>
+          <a:chExt cx="0" cy="0"/>
+        </a:xfrm>
+      </p:grpSpPr>
       <p:sp>
         <p:nvSpPr>
           <p:cNvPr id="2" name="Rectangle 1"/>
@@ -5886,6 +5933,7 @@
           <a:lstStyle/>
           <a:p>
             <a:pPr algn="ctr"/>
+            <a:endParaRPr/>
           </a:p>
         </p:txBody>
       </p:sp>
@@ -6227,7 +6275,7 @@
 </file>
 
 <file path=ppt/slides/slide16.xml><?xml version="1.0" encoding="utf-8"?>
-<p:sld xmlns:a="http://schemas.openxmlformats.org/drawingml/2006/main" xmlns:p="http://schemas.openxmlformats.org/presentationml/2006/main" xmlns:r="http://schemas.openxmlformats.org/officeDocument/2006/relationships">
+<p:sld xmlns:a="http://schemas.openxmlformats.org/drawingml/2006/main" xmlns:r="http://schemas.openxmlformats.org/officeDocument/2006/relationships" xmlns:p="http://schemas.openxmlformats.org/presentationml/2006/main">
   <p:cSld>
     <p:spTree>
       <p:nvGrpSpPr>
@@ -6235,7 +6283,14 @@
         <p:cNvGrpSpPr/>
         <p:nvPr/>
       </p:nvGrpSpPr>
-      <p:grpSpPr/>
+      <p:grpSpPr>
+        <a:xfrm>
+          <a:off x="0" y="0"/>
+          <a:ext cx="0" cy="0"/>
+          <a:chOff x="0" y="0"/>
+          <a:chExt cx="0" cy="0"/>
+        </a:xfrm>
+      </p:grpSpPr>
       <p:sp>
         <p:nvSpPr>
           <p:cNvPr id="2" name="Rectangle 1"/>
@@ -6277,6 +6332,7 @@
           <a:lstStyle/>
           <a:p>
             <a:pPr algn="ctr"/>
+            <a:endParaRPr/>
           </a:p>
         </p:txBody>
       </p:sp>
@@ -6650,7 +6706,7 @@
 </file>
 
 <file path=ppt/slides/slide17.xml><?xml version="1.0" encoding="utf-8"?>
-<p:sld xmlns:a="http://schemas.openxmlformats.org/drawingml/2006/main" xmlns:p="http://schemas.openxmlformats.org/presentationml/2006/main" xmlns:r="http://schemas.openxmlformats.org/officeDocument/2006/relationships">
+<p:sld xmlns:a="http://schemas.openxmlformats.org/drawingml/2006/main" xmlns:r="http://schemas.openxmlformats.org/officeDocument/2006/relationships" xmlns:p="http://schemas.openxmlformats.org/presentationml/2006/main">
   <p:cSld>
     <p:spTree>
       <p:nvGrpSpPr>
@@ -6658,7 +6714,14 @@
         <p:cNvGrpSpPr/>
         <p:nvPr/>
       </p:nvGrpSpPr>
-      <p:grpSpPr/>
+      <p:grpSpPr>
+        <a:xfrm>
+          <a:off x="0" y="0"/>
+          <a:ext cx="0" cy="0"/>
+          <a:chOff x="0" y="0"/>
+          <a:chExt cx="0" cy="0"/>
+        </a:xfrm>
+      </p:grpSpPr>
       <p:sp>
         <p:nvSpPr>
           <p:cNvPr id="2" name="Rectangle 1"/>
@@ -6700,6 +6763,7 @@
           <a:lstStyle/>
           <a:p>
             <a:pPr algn="ctr"/>
+            <a:endParaRPr/>
           </a:p>
         </p:txBody>
       </p:sp>
@@ -7000,7 +7064,7 @@
           </a:fontRef>
         </p:style>
         <p:txBody>
-          <a:bodyPr rtlCol="0" anchor="t" wrap="square" lIns="228600" rIns="228600" tIns="164592" bIns="164592"/>
+          <a:bodyPr wrap="square" lIns="228600" tIns="164592" rIns="228600" bIns="164592" rtlCol="0" anchor="t"/>
           <a:lstStyle/>
           <a:p>
             <a:pPr algn="l">
@@ -7171,7 +7235,7 @@
           </a:fontRef>
         </p:style>
         <p:txBody>
-          <a:bodyPr rtlCol="0" anchor="t" wrap="square" lIns="228600" rIns="228600" tIns="164592" bIns="164592"/>
+          <a:bodyPr wrap="square" lIns="228600" tIns="164592" rIns="228600" bIns="164592" rtlCol="0" anchor="t"/>
           <a:lstStyle/>
           <a:p>
             <a:pPr algn="l">
@@ -7255,7 +7319,7 @@
 </file>
 
 <file path=ppt/slides/slide18.xml><?xml version="1.0" encoding="utf-8"?>
-<p:sld xmlns:a="http://schemas.openxmlformats.org/drawingml/2006/main" xmlns:p="http://schemas.openxmlformats.org/presentationml/2006/main" xmlns:r="http://schemas.openxmlformats.org/officeDocument/2006/relationships">
+<p:sld xmlns:a="http://schemas.openxmlformats.org/drawingml/2006/main" xmlns:r="http://schemas.openxmlformats.org/officeDocument/2006/relationships" xmlns:p="http://schemas.openxmlformats.org/presentationml/2006/main">
   <p:cSld>
     <p:spTree>
       <p:nvGrpSpPr>
@@ -7263,7 +7327,14 @@
         <p:cNvGrpSpPr/>
         <p:nvPr/>
       </p:nvGrpSpPr>
-      <p:grpSpPr/>
+      <p:grpSpPr>
+        <a:xfrm>
+          <a:off x="0" y="0"/>
+          <a:ext cx="0" cy="0"/>
+          <a:chOff x="0" y="0"/>
+          <a:chExt cx="0" cy="0"/>
+        </a:xfrm>
+      </p:grpSpPr>
       <p:sp>
         <p:nvSpPr>
           <p:cNvPr id="2" name="Rectangle 1"/>
@@ -7305,6 +7376,7 @@
           <a:lstStyle/>
           <a:p>
             <a:pPr algn="ctr"/>
+            <a:endParaRPr/>
           </a:p>
         </p:txBody>
       </p:sp>
@@ -7630,7 +7702,7 @@
 </file>
 
 <file path=ppt/slides/slide19.xml><?xml version="1.0" encoding="utf-8"?>
-<p:sld xmlns:a="http://schemas.openxmlformats.org/drawingml/2006/main" xmlns:p="http://schemas.openxmlformats.org/presentationml/2006/main" xmlns:r="http://schemas.openxmlformats.org/officeDocument/2006/relationships">
+<p:sld xmlns:a="http://schemas.openxmlformats.org/drawingml/2006/main" xmlns:r="http://schemas.openxmlformats.org/officeDocument/2006/relationships" xmlns:p="http://schemas.openxmlformats.org/presentationml/2006/main">
   <p:cSld>
     <p:spTree>
       <p:nvGrpSpPr>
@@ -7638,7 +7710,14 @@
         <p:cNvGrpSpPr/>
         <p:nvPr/>
       </p:nvGrpSpPr>
-      <p:grpSpPr/>
+      <p:grpSpPr>
+        <a:xfrm>
+          <a:off x="0" y="0"/>
+          <a:ext cx="0" cy="0"/>
+          <a:chOff x="0" y="0"/>
+          <a:chExt cx="0" cy="0"/>
+        </a:xfrm>
+      </p:grpSpPr>
       <p:sp>
         <p:nvSpPr>
           <p:cNvPr id="2" name="Rectangle 1"/>
@@ -7680,6 +7759,7 @@
           <a:lstStyle/>
           <a:p>
             <a:pPr algn="ctr"/>
+            <a:endParaRPr/>
           </a:p>
         </p:txBody>
       </p:sp>
@@ -7997,7 +8077,7 @@
 </file>
 
 <file path=ppt/slides/slide2.xml><?xml version="1.0" encoding="utf-8"?>
-<p:sld xmlns:a="http://schemas.openxmlformats.org/drawingml/2006/main" xmlns:p="http://schemas.openxmlformats.org/presentationml/2006/main" xmlns:r="http://schemas.openxmlformats.org/officeDocument/2006/relationships">
+<p:sld xmlns:a="http://schemas.openxmlformats.org/drawingml/2006/main" xmlns:r="http://schemas.openxmlformats.org/officeDocument/2006/relationships" xmlns:p="http://schemas.openxmlformats.org/presentationml/2006/main">
   <p:cSld>
     <p:spTree>
       <p:nvGrpSpPr>
@@ -8005,7 +8085,14 @@
         <p:cNvGrpSpPr/>
         <p:nvPr/>
       </p:nvGrpSpPr>
-      <p:grpSpPr/>
+      <p:grpSpPr>
+        <a:xfrm>
+          <a:off x="0" y="0"/>
+          <a:ext cx="0" cy="0"/>
+          <a:chOff x="0" y="0"/>
+          <a:chExt cx="0" cy="0"/>
+        </a:xfrm>
+      </p:grpSpPr>
       <p:sp>
         <p:nvSpPr>
           <p:cNvPr id="2" name="Rectangle 1"/>
@@ -8047,6 +8134,7 @@
           <a:lstStyle/>
           <a:p>
             <a:pPr algn="ctr"/>
+            <a:endParaRPr/>
           </a:p>
         </p:txBody>
       </p:sp>
@@ -8356,7 +8444,7 @@
 </file>
 
 <file path=ppt/slides/slide20.xml><?xml version="1.0" encoding="utf-8"?>
-<p:sld xmlns:a="http://schemas.openxmlformats.org/drawingml/2006/main" xmlns:p="http://schemas.openxmlformats.org/presentationml/2006/main" xmlns:r="http://schemas.openxmlformats.org/officeDocument/2006/relationships">
+<p:sld xmlns:a="http://schemas.openxmlformats.org/drawingml/2006/main" xmlns:r="http://schemas.openxmlformats.org/officeDocument/2006/relationships" xmlns:p="http://schemas.openxmlformats.org/presentationml/2006/main">
   <p:cSld>
     <p:spTree>
       <p:nvGrpSpPr>
@@ -8364,7 +8452,14 @@
         <p:cNvGrpSpPr/>
         <p:nvPr/>
       </p:nvGrpSpPr>
-      <p:grpSpPr/>
+      <p:grpSpPr>
+        <a:xfrm>
+          <a:off x="0" y="0"/>
+          <a:ext cx="0" cy="0"/>
+          <a:chOff x="0" y="0"/>
+          <a:chExt cx="0" cy="0"/>
+        </a:xfrm>
+      </p:grpSpPr>
       <p:sp>
         <p:nvSpPr>
           <p:cNvPr id="2" name="Rectangle 1"/>
@@ -8406,6 +8501,7 @@
           <a:lstStyle/>
           <a:p>
             <a:pPr algn="ctr"/>
+            <a:endParaRPr/>
           </a:p>
         </p:txBody>
       </p:sp>
@@ -8708,7 +8804,7 @@
 </file>
 
 <file path=ppt/slides/slide21.xml><?xml version="1.0" encoding="utf-8"?>
-<p:sld xmlns:a="http://schemas.openxmlformats.org/drawingml/2006/main" xmlns:p="http://schemas.openxmlformats.org/presentationml/2006/main" xmlns:r="http://schemas.openxmlformats.org/officeDocument/2006/relationships">
+<p:sld xmlns:a="http://schemas.openxmlformats.org/drawingml/2006/main" xmlns:r="http://schemas.openxmlformats.org/officeDocument/2006/relationships" xmlns:p="http://schemas.openxmlformats.org/presentationml/2006/main">
   <p:cSld>
     <p:spTree>
       <p:nvGrpSpPr>
@@ -8716,7 +8812,14 @@
         <p:cNvGrpSpPr/>
         <p:nvPr/>
       </p:nvGrpSpPr>
-      <p:grpSpPr/>
+      <p:grpSpPr>
+        <a:xfrm>
+          <a:off x="0" y="0"/>
+          <a:ext cx="0" cy="0"/>
+          <a:chOff x="0" y="0"/>
+          <a:chExt cx="0" cy="0"/>
+        </a:xfrm>
+      </p:grpSpPr>
       <p:sp>
         <p:nvSpPr>
           <p:cNvPr id="2" name="Rectangle 1"/>
@@ -8758,6 +8861,7 @@
           <a:lstStyle/>
           <a:p>
             <a:pPr algn="ctr"/>
+            <a:endParaRPr/>
           </a:p>
         </p:txBody>
       </p:sp>
@@ -9075,7 +9179,7 @@
 </file>
 
 <file path=ppt/slides/slide22.xml><?xml version="1.0" encoding="utf-8"?>
-<p:sld xmlns:a="http://schemas.openxmlformats.org/drawingml/2006/main" xmlns:p="http://schemas.openxmlformats.org/presentationml/2006/main" xmlns:r="http://schemas.openxmlformats.org/officeDocument/2006/relationships">
+<p:sld xmlns:a="http://schemas.openxmlformats.org/drawingml/2006/main" xmlns:r="http://schemas.openxmlformats.org/officeDocument/2006/relationships" xmlns:p="http://schemas.openxmlformats.org/presentationml/2006/main">
   <p:cSld>
     <p:spTree>
       <p:nvGrpSpPr>
@@ -9083,7 +9187,14 @@
         <p:cNvGrpSpPr/>
         <p:nvPr/>
       </p:nvGrpSpPr>
-      <p:grpSpPr/>
+      <p:grpSpPr>
+        <a:xfrm>
+          <a:off x="0" y="0"/>
+          <a:ext cx="0" cy="0"/>
+          <a:chOff x="0" y="0"/>
+          <a:chExt cx="0" cy="0"/>
+        </a:xfrm>
+      </p:grpSpPr>
       <p:sp>
         <p:nvSpPr>
           <p:cNvPr id="2" name="Rectangle 1"/>
@@ -9125,6 +9236,7 @@
           <a:lstStyle/>
           <a:p>
             <a:pPr algn="ctr"/>
+            <a:endParaRPr/>
           </a:p>
         </p:txBody>
       </p:sp>
@@ -9450,7 +9562,7 @@
 </file>
 
 <file path=ppt/slides/slide23.xml><?xml version="1.0" encoding="utf-8"?>
-<p:sld xmlns:a="http://schemas.openxmlformats.org/drawingml/2006/main" xmlns:p="http://schemas.openxmlformats.org/presentationml/2006/main" xmlns:r="http://schemas.openxmlformats.org/officeDocument/2006/relationships">
+<p:sld xmlns:a="http://schemas.openxmlformats.org/drawingml/2006/main" xmlns:r="http://schemas.openxmlformats.org/officeDocument/2006/relationships" xmlns:p="http://schemas.openxmlformats.org/presentationml/2006/main">
   <p:cSld>
     <p:spTree>
       <p:nvGrpSpPr>
@@ -9458,7 +9570,14 @@
         <p:cNvGrpSpPr/>
         <p:nvPr/>
       </p:nvGrpSpPr>
-      <p:grpSpPr/>
+      <p:grpSpPr>
+        <a:xfrm>
+          <a:off x="0" y="0"/>
+          <a:ext cx="0" cy="0"/>
+          <a:chOff x="0" y="0"/>
+          <a:chExt cx="0" cy="0"/>
+        </a:xfrm>
+      </p:grpSpPr>
       <p:sp>
         <p:nvSpPr>
           <p:cNvPr id="2" name="Rectangle 1"/>
@@ -9500,6 +9619,7 @@
           <a:lstStyle/>
           <a:p>
             <a:pPr algn="ctr"/>
+            <a:endParaRPr/>
           </a:p>
         </p:txBody>
       </p:sp>
@@ -9802,7 +9922,7 @@
 </file>
 
 <file path=ppt/slides/slide24.xml><?xml version="1.0" encoding="utf-8"?>
-<p:sld xmlns:a="http://schemas.openxmlformats.org/drawingml/2006/main" xmlns:p="http://schemas.openxmlformats.org/presentationml/2006/main" xmlns:r="http://schemas.openxmlformats.org/officeDocument/2006/relationships">
+<p:sld xmlns:a="http://schemas.openxmlformats.org/drawingml/2006/main" xmlns:r="http://schemas.openxmlformats.org/officeDocument/2006/relationships" xmlns:p="http://schemas.openxmlformats.org/presentationml/2006/main">
   <p:cSld>
     <p:spTree>
       <p:nvGrpSpPr>
@@ -9810,7 +9930,14 @@
         <p:cNvGrpSpPr/>
         <p:nvPr/>
       </p:nvGrpSpPr>
-      <p:grpSpPr/>
+      <p:grpSpPr>
+        <a:xfrm>
+          <a:off x="0" y="0"/>
+          <a:ext cx="0" cy="0"/>
+          <a:chOff x="0" y="0"/>
+          <a:chExt cx="0" cy="0"/>
+        </a:xfrm>
+      </p:grpSpPr>
       <p:sp>
         <p:nvSpPr>
           <p:cNvPr id="2" name="Rectangle 1"/>
@@ -9852,6 +9979,7 @@
           <a:lstStyle/>
           <a:p>
             <a:pPr algn="ctr"/>
+            <a:endParaRPr/>
           </a:p>
         </p:txBody>
       </p:sp>
@@ -10149,7 +10277,7 @@
 </file>
 
 <file path=ppt/slides/slide25.xml><?xml version="1.0" encoding="utf-8"?>
-<p:sld xmlns:a="http://schemas.openxmlformats.org/drawingml/2006/main" xmlns:p="http://schemas.openxmlformats.org/presentationml/2006/main" xmlns:r="http://schemas.openxmlformats.org/officeDocument/2006/relationships">
+<p:sld xmlns:a="http://schemas.openxmlformats.org/drawingml/2006/main" xmlns:r="http://schemas.openxmlformats.org/officeDocument/2006/relationships" xmlns:p="http://schemas.openxmlformats.org/presentationml/2006/main">
   <p:cSld>
     <p:spTree>
       <p:nvGrpSpPr>
@@ -10157,7 +10285,14 @@
         <p:cNvGrpSpPr/>
         <p:nvPr/>
       </p:nvGrpSpPr>
-      <p:grpSpPr/>
+      <p:grpSpPr>
+        <a:xfrm>
+          <a:off x="0" y="0"/>
+          <a:ext cx="0" cy="0"/>
+          <a:chOff x="0" y="0"/>
+          <a:chExt cx="0" cy="0"/>
+        </a:xfrm>
+      </p:grpSpPr>
       <p:sp>
         <p:nvSpPr>
           <p:cNvPr id="2" name="Rectangle 1"/>
@@ -10199,6 +10334,7 @@
           <a:lstStyle/>
           <a:p>
             <a:pPr algn="ctr"/>
+            <a:endParaRPr/>
           </a:p>
         </p:txBody>
       </p:sp>
@@ -10496,7 +10632,7 @@
 </file>
 
 <file path=ppt/slides/slide26.xml><?xml version="1.0" encoding="utf-8"?>
-<p:sld xmlns:a="http://schemas.openxmlformats.org/drawingml/2006/main" xmlns:p="http://schemas.openxmlformats.org/presentationml/2006/main" xmlns:r="http://schemas.openxmlformats.org/officeDocument/2006/relationships">
+<p:sld xmlns:a="http://schemas.openxmlformats.org/drawingml/2006/main" xmlns:r="http://schemas.openxmlformats.org/officeDocument/2006/relationships" xmlns:p="http://schemas.openxmlformats.org/presentationml/2006/main">
   <p:cSld>
     <p:spTree>
       <p:nvGrpSpPr>
@@ -10504,7 +10640,14 @@
         <p:cNvGrpSpPr/>
         <p:nvPr/>
       </p:nvGrpSpPr>
-      <p:grpSpPr/>
+      <p:grpSpPr>
+        <a:xfrm>
+          <a:off x="0" y="0"/>
+          <a:ext cx="0" cy="0"/>
+          <a:chOff x="0" y="0"/>
+          <a:chExt cx="0" cy="0"/>
+        </a:xfrm>
+      </p:grpSpPr>
       <p:sp>
         <p:nvSpPr>
           <p:cNvPr id="2" name="Rectangle 1"/>
@@ -10546,6 +10689,7 @@
           <a:lstStyle/>
           <a:p>
             <a:pPr algn="ctr"/>
+            <a:endParaRPr/>
           </a:p>
         </p:txBody>
       </p:sp>
@@ -10863,7 +11007,7 @@
 </file>
 
 <file path=ppt/slides/slide27.xml><?xml version="1.0" encoding="utf-8"?>
-<p:sld xmlns:a="http://schemas.openxmlformats.org/drawingml/2006/main" xmlns:p="http://schemas.openxmlformats.org/presentationml/2006/main" xmlns:r="http://schemas.openxmlformats.org/officeDocument/2006/relationships">
+<p:sld xmlns:a="http://schemas.openxmlformats.org/drawingml/2006/main" xmlns:r="http://schemas.openxmlformats.org/officeDocument/2006/relationships" xmlns:p="http://schemas.openxmlformats.org/presentationml/2006/main">
   <p:cSld>
     <p:spTree>
       <p:nvGrpSpPr>
@@ -10871,7 +11015,14 @@
         <p:cNvGrpSpPr/>
         <p:nvPr/>
       </p:nvGrpSpPr>
-      <p:grpSpPr/>
+      <p:grpSpPr>
+        <a:xfrm>
+          <a:off x="0" y="0"/>
+          <a:ext cx="0" cy="0"/>
+          <a:chOff x="0" y="0"/>
+          <a:chExt cx="0" cy="0"/>
+        </a:xfrm>
+      </p:grpSpPr>
       <p:sp>
         <p:nvSpPr>
           <p:cNvPr id="2" name="Rectangle 1"/>
@@ -10913,6 +11064,7 @@
           <a:lstStyle/>
           <a:p>
             <a:pPr algn="ctr"/>
+            <a:endParaRPr/>
           </a:p>
         </p:txBody>
       </p:sp>
@@ -11128,7 +11280,7 @@
                 </a:solidFill>
                 <a:latin typeface="Segoe UI"/>
               </a:rPr>
-              <a:t>•  This pod's CSV has real Upper (30 dBm) and Lower (23 dBm) limits, so both are detected automatically — no manual override needed (data beats config)</a:t>
+              <a:t>•  This pod's CSV has real Upper (30 dBm) and Lower (23 dBm) limits, so both are detected</a:t>
             </a:r>
           </a:p>
           <a:p>
@@ -11144,7 +11296,39 @@
                 </a:solidFill>
                 <a:latin typeface="Segoe UI"/>
               </a:rPr>
-              <a:t>•  MaxPower's guaranteed minimum means the Lower limit is what matters — watch it against the TTL band below</a:t>
+              <a:t>•  automatically -- no manual override needed, and no live selector to switch (data beats config)</a:t>
+            </a:r>
+          </a:p>
+          <a:p>
+            <a:pPr>
+              <a:spcAft>
+                <a:spcPts val="1000"/>
+              </a:spcAft>
+            </a:pPr>
+            <a:r>
+              <a:rPr sz="1500">
+                <a:solidFill>
+                  <a:srgbClr val="1B2A4A"/>
+                </a:solidFill>
+                <a:latin typeface="Segoe UI"/>
+              </a:rPr>
+              <a:t>•  MaxPower is a guaranteed-minimum-power measurement, so the Lower limit is the one that</a:t>
+            </a:r>
+          </a:p>
+          <a:p>
+            <a:pPr>
+              <a:spcAft>
+                <a:spcPts val="1000"/>
+              </a:spcAft>
+            </a:pPr>
+            <a:r>
+              <a:rPr sz="1500">
+                <a:solidFill>
+                  <a:srgbClr val="1B2A4A"/>
+                </a:solidFill>
+                <a:latin typeface="Segoe UI"/>
+              </a:rPr>
+              <a:t>•  actually matters here -- watch the dashed lower spec line against the TTL band as you filter</a:t>
             </a:r>
           </a:p>
         </p:txBody>
@@ -11187,7 +11371,7 @@
 </file>
 
 <file path=ppt/slides/slide28.xml><?xml version="1.0" encoding="utf-8"?>
-<p:sld xmlns:a="http://schemas.openxmlformats.org/drawingml/2006/main" xmlns:p="http://schemas.openxmlformats.org/presentationml/2006/main" xmlns:r="http://schemas.openxmlformats.org/officeDocument/2006/relationships">
+<p:sld xmlns:a="http://schemas.openxmlformats.org/drawingml/2006/main" xmlns:r="http://schemas.openxmlformats.org/officeDocument/2006/relationships" xmlns:p="http://schemas.openxmlformats.org/presentationml/2006/main">
   <p:cSld>
     <p:spTree>
       <p:nvGrpSpPr>
@@ -11195,7 +11379,14 @@
         <p:cNvGrpSpPr/>
         <p:nvPr/>
       </p:nvGrpSpPr>
-      <p:grpSpPr/>
+      <p:grpSpPr>
+        <a:xfrm>
+          <a:off x="0" y="0"/>
+          <a:ext cx="0" cy="0"/>
+          <a:chOff x="0" y="0"/>
+          <a:chExt cx="0" cy="0"/>
+        </a:xfrm>
+      </p:grpSpPr>
       <p:sp>
         <p:nvSpPr>
           <p:cNvPr id="2" name="Rectangle 1"/>
@@ -11237,6 +11428,7 @@
           <a:lstStyle/>
           <a:p>
             <a:pPr algn="ctr"/>
+            <a:endParaRPr/>
           </a:p>
         </p:txBody>
       </p:sp>
@@ -11811,7 +12003,7 @@
 </file>
 
 <file path=ppt/slides/slide29.xml><?xml version="1.0" encoding="utf-8"?>
-<p:sld xmlns:a="http://schemas.openxmlformats.org/drawingml/2006/main" xmlns:p="http://schemas.openxmlformats.org/presentationml/2006/main" xmlns:r="http://schemas.openxmlformats.org/officeDocument/2006/relationships">
+<p:sld xmlns:a="http://schemas.openxmlformats.org/drawingml/2006/main" xmlns:r="http://schemas.openxmlformats.org/officeDocument/2006/relationships" xmlns:p="http://schemas.openxmlformats.org/presentationml/2006/main">
   <p:cSld>
     <p:spTree>
       <p:nvGrpSpPr>
@@ -11819,7 +12011,14 @@
         <p:cNvGrpSpPr/>
         <p:nvPr/>
       </p:nvGrpSpPr>
-      <p:grpSpPr/>
+      <p:grpSpPr>
+        <a:xfrm>
+          <a:off x="0" y="0"/>
+          <a:ext cx="0" cy="0"/>
+          <a:chOff x="0" y="0"/>
+          <a:chExt cx="0" cy="0"/>
+        </a:xfrm>
+      </p:grpSpPr>
       <p:sp>
         <p:nvSpPr>
           <p:cNvPr id="2" name="Rectangle 1"/>
@@ -11861,6 +12060,7 @@
           <a:lstStyle/>
           <a:p>
             <a:pPr algn="ctr"/>
+            <a:endParaRPr/>
           </a:p>
         </p:txBody>
       </p:sp>
@@ -12208,7 +12408,7 @@
 </file>
 
 <file path=ppt/slides/slide3.xml><?xml version="1.0" encoding="utf-8"?>
-<p:sld xmlns:a="http://schemas.openxmlformats.org/drawingml/2006/main" xmlns:p="http://schemas.openxmlformats.org/presentationml/2006/main" xmlns:r="http://schemas.openxmlformats.org/officeDocument/2006/relationships">
+<p:sld xmlns:a="http://schemas.openxmlformats.org/drawingml/2006/main" xmlns:r="http://schemas.openxmlformats.org/officeDocument/2006/relationships" xmlns:p="http://schemas.openxmlformats.org/presentationml/2006/main">
   <p:cSld>
     <p:spTree>
       <p:nvGrpSpPr>
@@ -12216,7 +12416,14 @@
         <p:cNvGrpSpPr/>
         <p:nvPr/>
       </p:nvGrpSpPr>
-      <p:grpSpPr/>
+      <p:grpSpPr>
+        <a:xfrm>
+          <a:off x="0" y="0"/>
+          <a:ext cx="0" cy="0"/>
+          <a:chOff x="0" y="0"/>
+          <a:chExt cx="0" cy="0"/>
+        </a:xfrm>
+      </p:grpSpPr>
       <p:sp>
         <p:nvSpPr>
           <p:cNvPr id="2" name="Rectangle 1"/>
@@ -12258,6 +12465,7 @@
           <a:lstStyle/>
           <a:p>
             <a:pPr algn="ctr"/>
+            <a:endParaRPr/>
           </a:p>
         </p:txBody>
       </p:sp>
@@ -12567,7 +12775,7 @@
 </file>
 
 <file path=ppt/slides/slide30.xml><?xml version="1.0" encoding="utf-8"?>
-<p:sld xmlns:a="http://schemas.openxmlformats.org/drawingml/2006/main" xmlns:p="http://schemas.openxmlformats.org/presentationml/2006/main" xmlns:r="http://schemas.openxmlformats.org/officeDocument/2006/relationships">
+<p:sld xmlns:a="http://schemas.openxmlformats.org/drawingml/2006/main" xmlns:r="http://schemas.openxmlformats.org/officeDocument/2006/relationships" xmlns:p="http://schemas.openxmlformats.org/presentationml/2006/main">
   <p:cSld>
     <p:spTree>
       <p:nvGrpSpPr>
@@ -12575,7 +12783,14 @@
         <p:cNvGrpSpPr/>
         <p:nvPr/>
       </p:nvGrpSpPr>
-      <p:grpSpPr/>
+      <p:grpSpPr>
+        <a:xfrm>
+          <a:off x="0" y="0"/>
+          <a:ext cx="0" cy="0"/>
+          <a:chOff x="0" y="0"/>
+          <a:chExt cx="0" cy="0"/>
+        </a:xfrm>
+      </p:grpSpPr>
       <p:sp>
         <p:nvSpPr>
           <p:cNvPr id="2" name="Rectangle 1"/>
@@ -12617,6 +12832,7 @@
           <a:lstStyle/>
           <a:p>
             <a:pPr algn="ctr"/>
+            <a:endParaRPr/>
           </a:p>
         </p:txBody>
       </p:sp>
@@ -12949,7 +13165,7 @@
 </file>
 
 <file path=ppt/slides/slide31.xml><?xml version="1.0" encoding="utf-8"?>
-<p:sld xmlns:a="http://schemas.openxmlformats.org/drawingml/2006/main" xmlns:p="http://schemas.openxmlformats.org/presentationml/2006/main" xmlns:r="http://schemas.openxmlformats.org/officeDocument/2006/relationships">
+<p:sld xmlns:a="http://schemas.openxmlformats.org/drawingml/2006/main" xmlns:r="http://schemas.openxmlformats.org/officeDocument/2006/relationships" xmlns:p="http://schemas.openxmlformats.org/presentationml/2006/main">
   <p:cSld>
     <p:spTree>
       <p:nvGrpSpPr>
@@ -12957,7 +13173,14 @@
         <p:cNvGrpSpPr/>
         <p:nvPr/>
       </p:nvGrpSpPr>
-      <p:grpSpPr/>
+      <p:grpSpPr>
+        <a:xfrm>
+          <a:off x="0" y="0"/>
+          <a:ext cx="0" cy="0"/>
+          <a:chOff x="0" y="0"/>
+          <a:chExt cx="0" cy="0"/>
+        </a:xfrm>
+      </p:grpSpPr>
       <p:sp>
         <p:nvSpPr>
           <p:cNvPr id="2" name="Rectangle 1"/>
@@ -12999,6 +13222,7 @@
           <a:lstStyle/>
           <a:p>
             <a:pPr algn="ctr"/>
+            <a:endParaRPr/>
           </a:p>
         </p:txBody>
       </p:sp>
@@ -13316,7 +13540,7 @@
 </file>
 
 <file path=ppt/slides/slide32.xml><?xml version="1.0" encoding="utf-8"?>
-<p:sld xmlns:a="http://schemas.openxmlformats.org/drawingml/2006/main" xmlns:p="http://schemas.openxmlformats.org/presentationml/2006/main" xmlns:r="http://schemas.openxmlformats.org/officeDocument/2006/relationships">
+<p:sld xmlns:a="http://schemas.openxmlformats.org/drawingml/2006/main" xmlns:r="http://schemas.openxmlformats.org/officeDocument/2006/relationships" xmlns:p="http://schemas.openxmlformats.org/presentationml/2006/main">
   <p:cSld>
     <p:spTree>
       <p:nvGrpSpPr>
@@ -13324,7 +13548,14 @@
         <p:cNvGrpSpPr/>
         <p:nvPr/>
       </p:nvGrpSpPr>
-      <p:grpSpPr/>
+      <p:grpSpPr>
+        <a:xfrm>
+          <a:off x="0" y="0"/>
+          <a:ext cx="0" cy="0"/>
+          <a:chOff x="0" y="0"/>
+          <a:chExt cx="0" cy="0"/>
+        </a:xfrm>
+      </p:grpSpPr>
       <p:sp>
         <p:nvSpPr>
           <p:cNvPr id="2" name="Rectangle 1"/>
@@ -13366,6 +13597,7 @@
           <a:lstStyle/>
           <a:p>
             <a:pPr algn="ctr"/>
+            <a:endParaRPr/>
           </a:p>
         </p:txBody>
       </p:sp>
@@ -13661,7 +13893,7 @@
                 </a:solidFill>
                 <a:latin typeface="Segoe UI"/>
               </a:rPr>
-              <a:t>•  Copy PADB Filter — builds a real PADB filter expression matching this view's own active filters (condition/Serial/Port/Frequency/Temperature), ready to paste into PADB itself</a:t>
+              <a:t>•  Copy PADB Filter — best-effort 'Serial Number' NOT IN {...} expression for pasting into PADB itself (under development)</a:t>
             </a:r>
           </a:p>
           <a:p>
@@ -13691,7 +13923,7 @@
 </file>
 
 <file path=ppt/slides/slide33.xml><?xml version="1.0" encoding="utf-8"?>
-<p:sld xmlns:a="http://schemas.openxmlformats.org/drawingml/2006/main" xmlns:p="http://schemas.openxmlformats.org/presentationml/2006/main" xmlns:r="http://schemas.openxmlformats.org/officeDocument/2006/relationships">
+<p:sld xmlns:a="http://schemas.openxmlformats.org/drawingml/2006/main" xmlns:r="http://schemas.openxmlformats.org/officeDocument/2006/relationships" xmlns:p="http://schemas.openxmlformats.org/presentationml/2006/main">
   <p:cSld>
     <p:spTree>
       <p:nvGrpSpPr>
@@ -13699,7 +13931,14 @@
         <p:cNvGrpSpPr/>
         <p:nvPr/>
       </p:nvGrpSpPr>
-      <p:grpSpPr/>
+      <p:grpSpPr>
+        <a:xfrm>
+          <a:off x="0" y="0"/>
+          <a:ext cx="0" cy="0"/>
+          <a:chOff x="0" y="0"/>
+          <a:chExt cx="0" cy="0"/>
+        </a:xfrm>
+      </p:grpSpPr>
       <p:sp>
         <p:nvSpPr>
           <p:cNvPr id="2" name="Rectangle 1"/>
@@ -13741,6 +13980,7 @@
           <a:lstStyle/>
           <a:p>
             <a:pPr algn="ctr"/>
+            <a:endParaRPr/>
           </a:p>
         </p:txBody>
       </p:sp>
@@ -14037,22 +14277,6 @@
                 <a:latin typeface="Segoe UI"/>
               </a:rPr>
               <a:t>•  Run padb_csv_check.py (next slide) to catch the same class of issue before you even open the HTML</a:t>
-            </a:r>
-          </a:p>
-          <a:p>
-            <a:pPr>
-              <a:spcAft>
-                <a:spcPts val="1000"/>
-              </a:spcAft>
-            </a:pPr>
-            <a:r>
-              <a:rPr sz="1700">
-                <a:solidFill>
-                  <a:srgbClr val="1B2A4A"/>
-                </a:solidFill>
-                <a:latin typeface="Segoe UI"/>
-              </a:rPr>
-              <a:t>•  env_coverage, distribution, stat_summary, and summary now also show a static noise-sensitivity disclaimer — TI/KDE/normality math assumes reasonably well-behaved, low-noise data</a:t>
             </a:r>
           </a:p>
         </p:txBody>
@@ -14066,7 +14290,7 @@
 </file>
 
 <file path=ppt/slides/slide34.xml><?xml version="1.0" encoding="utf-8"?>
-<p:sld xmlns:a="http://schemas.openxmlformats.org/drawingml/2006/main" xmlns:p="http://schemas.openxmlformats.org/presentationml/2006/main" xmlns:r="http://schemas.openxmlformats.org/officeDocument/2006/relationships">
+<p:sld xmlns:a="http://schemas.openxmlformats.org/drawingml/2006/main" xmlns:r="http://schemas.openxmlformats.org/officeDocument/2006/relationships" xmlns:p="http://schemas.openxmlformats.org/presentationml/2006/main">
   <p:cSld>
     <p:spTree>
       <p:nvGrpSpPr>
@@ -14074,7 +14298,14 @@
         <p:cNvGrpSpPr/>
         <p:nvPr/>
       </p:nvGrpSpPr>
-      <p:grpSpPr/>
+      <p:grpSpPr>
+        <a:xfrm>
+          <a:off x="0" y="0"/>
+          <a:ext cx="0" cy="0"/>
+          <a:chOff x="0" y="0"/>
+          <a:chExt cx="0" cy="0"/>
+        </a:xfrm>
+      </p:grpSpPr>
       <p:sp>
         <p:nvSpPr>
           <p:cNvPr id="2" name="Rectangle 1"/>
@@ -14116,6 +14347,7 @@
           <a:lstStyle/>
           <a:p>
             <a:pPr algn="ctr"/>
+            <a:endParaRPr/>
           </a:p>
         </p:txBody>
       </p:sp>
@@ -14331,7 +14563,7 @@
                 </a:solidFill>
                 <a:latin typeface="Segoe UI"/>
               </a:rPr>
-              <a:t>•  Run it between Step 2 (extraction) and Step 4 (build views):</a:t>
+              <a:t>•  Run it between Step 2 (extraction) and Step 4 (build views) — before spending time on a build that turns out wrong:</a:t>
             </a:r>
           </a:p>
         </p:txBody>
@@ -14377,7 +14609,7 @@
           </a:fontRef>
         </p:style>
         <p:txBody>
-          <a:bodyPr rtlCol="0" anchor="t" wrap="square" lIns="228600" rIns="228600" tIns="164592" bIns="164592"/>
+          <a:bodyPr wrap="square" lIns="228600" tIns="164592" rIns="228600" bIns="164592" rtlCol="0" anchor="t"/>
           <a:lstStyle/>
           <a:p>
             <a:pPr algn="l">
@@ -14477,7 +14709,7 @@
 </file>
 
 <file path=ppt/slides/slide35.xml><?xml version="1.0" encoding="utf-8"?>
-<p:sld xmlns:a="http://schemas.openxmlformats.org/drawingml/2006/main" xmlns:p="http://schemas.openxmlformats.org/presentationml/2006/main" xmlns:r="http://schemas.openxmlformats.org/officeDocument/2006/relationships">
+<p:sld xmlns:a="http://schemas.openxmlformats.org/drawingml/2006/main" xmlns:r="http://schemas.openxmlformats.org/officeDocument/2006/relationships" xmlns:p="http://schemas.openxmlformats.org/presentationml/2006/main">
   <p:cSld>
     <p:spTree>
       <p:nvGrpSpPr>
@@ -14485,7 +14717,14 @@
         <p:cNvGrpSpPr/>
         <p:nvPr/>
       </p:nvGrpSpPr>
-      <p:grpSpPr/>
+      <p:grpSpPr>
+        <a:xfrm>
+          <a:off x="0" y="0"/>
+          <a:ext cx="0" cy="0"/>
+          <a:chOff x="0" y="0"/>
+          <a:chExt cx="0" cy="0"/>
+        </a:xfrm>
+      </p:grpSpPr>
       <p:sp>
         <p:nvSpPr>
           <p:cNvPr id="2" name="Rectangle 1"/>
@@ -14527,6 +14766,7 @@
           <a:lstStyle/>
           <a:p>
             <a:pPr algn="ctr"/>
+            <a:endParaRPr/>
           </a:p>
         </p:txBody>
       </p:sp>
@@ -14820,7 +15060,7 @@
 </file>
 
 <file path=ppt/slides/slide36.xml><?xml version="1.0" encoding="utf-8"?>
-<p:sld xmlns:a="http://schemas.openxmlformats.org/drawingml/2006/main" xmlns:p="http://schemas.openxmlformats.org/presentationml/2006/main" xmlns:r="http://schemas.openxmlformats.org/officeDocument/2006/relationships">
+<p:sld xmlns:a="http://schemas.openxmlformats.org/drawingml/2006/main" xmlns:r="http://schemas.openxmlformats.org/officeDocument/2006/relationships" xmlns:p="http://schemas.openxmlformats.org/presentationml/2006/main">
   <p:cSld>
     <p:spTree>
       <p:nvGrpSpPr>
@@ -14828,7 +15068,14 @@
         <p:cNvGrpSpPr/>
         <p:nvPr/>
       </p:nvGrpSpPr>
-      <p:grpSpPr/>
+      <p:grpSpPr>
+        <a:xfrm>
+          <a:off x="0" y="0"/>
+          <a:ext cx="0" cy="0"/>
+          <a:chOff x="0" y="0"/>
+          <a:chExt cx="0" cy="0"/>
+        </a:xfrm>
+      </p:grpSpPr>
       <p:sp>
         <p:nvSpPr>
           <p:cNvPr id="2" name="Rectangle 1"/>
@@ -14870,6 +15117,7 @@
           <a:lstStyle/>
           <a:p>
             <a:pPr algn="ctr"/>
+            <a:endParaRPr/>
           </a:p>
         </p:txBody>
       </p:sp>
@@ -15195,7 +15443,7 @@
 </file>
 
 <file path=ppt/slides/slide37.xml><?xml version="1.0" encoding="utf-8"?>
-<p:sld xmlns:a="http://schemas.openxmlformats.org/drawingml/2006/main" xmlns:p="http://schemas.openxmlformats.org/presentationml/2006/main" xmlns:r="http://schemas.openxmlformats.org/officeDocument/2006/relationships">
+<p:sld xmlns:a="http://schemas.openxmlformats.org/drawingml/2006/main" xmlns:r="http://schemas.openxmlformats.org/officeDocument/2006/relationships" xmlns:p="http://schemas.openxmlformats.org/presentationml/2006/main">
   <p:cSld>
     <p:spTree>
       <p:nvGrpSpPr>
@@ -15203,7 +15451,14 @@
         <p:cNvGrpSpPr/>
         <p:nvPr/>
       </p:nvGrpSpPr>
-      <p:grpSpPr/>
+      <p:grpSpPr>
+        <a:xfrm>
+          <a:off x="0" y="0"/>
+          <a:ext cx="0" cy="0"/>
+          <a:chOff x="0" y="0"/>
+          <a:chExt cx="0" cy="0"/>
+        </a:xfrm>
+      </p:grpSpPr>
       <p:sp>
         <p:nvSpPr>
           <p:cNvPr id="2" name="Rectangle 1"/>
@@ -15245,6 +15500,7 @@
           <a:lstStyle/>
           <a:p>
             <a:pPr algn="ctr"/>
+            <a:endParaRPr/>
           </a:p>
         </p:txBody>
       </p:sp>
@@ -15570,7 +15826,7 @@
 </file>
 
 <file path=ppt/slides/slide38.xml><?xml version="1.0" encoding="utf-8"?>
-<p:sld xmlns:a="http://schemas.openxmlformats.org/drawingml/2006/main" xmlns:p="http://schemas.openxmlformats.org/presentationml/2006/main" xmlns:r="http://schemas.openxmlformats.org/officeDocument/2006/relationships">
+<p:sld xmlns:a="http://schemas.openxmlformats.org/drawingml/2006/main" xmlns:r="http://schemas.openxmlformats.org/officeDocument/2006/relationships" xmlns:p="http://schemas.openxmlformats.org/presentationml/2006/main">
   <p:cSld>
     <p:spTree>
       <p:nvGrpSpPr>
@@ -15578,7 +15834,14 @@
         <p:cNvGrpSpPr/>
         <p:nvPr/>
       </p:nvGrpSpPr>
-      <p:grpSpPr/>
+      <p:grpSpPr>
+        <a:xfrm>
+          <a:off x="0" y="0"/>
+          <a:ext cx="0" cy="0"/>
+          <a:chOff x="0" y="0"/>
+          <a:chExt cx="0" cy="0"/>
+        </a:xfrm>
+      </p:grpSpPr>
       <p:sp>
         <p:nvSpPr>
           <p:cNvPr id="2" name="Rectangle 1"/>
@@ -15620,6 +15883,7 @@
           <a:lstStyle/>
           <a:p>
             <a:pPr algn="ctr"/>
+            <a:endParaRPr/>
           </a:p>
         </p:txBody>
       </p:sp>
@@ -15945,7 +16209,7 @@
 </file>
 
 <file path=ppt/slides/slide39.xml><?xml version="1.0" encoding="utf-8"?>
-<p:sld xmlns:a="http://schemas.openxmlformats.org/drawingml/2006/main" xmlns:p="http://schemas.openxmlformats.org/presentationml/2006/main" xmlns:r="http://schemas.openxmlformats.org/officeDocument/2006/relationships">
+<p:sld xmlns:a="http://schemas.openxmlformats.org/drawingml/2006/main" xmlns:r="http://schemas.openxmlformats.org/officeDocument/2006/relationships" xmlns:p="http://schemas.openxmlformats.org/presentationml/2006/main">
   <p:cSld>
     <p:spTree>
       <p:nvGrpSpPr>
@@ -15953,7 +16217,14 @@
         <p:cNvGrpSpPr/>
         <p:nvPr/>
       </p:nvGrpSpPr>
-      <p:grpSpPr/>
+      <p:grpSpPr>
+        <a:xfrm>
+          <a:off x="0" y="0"/>
+          <a:ext cx="0" cy="0"/>
+          <a:chOff x="0" y="0"/>
+          <a:chExt cx="0" cy="0"/>
+        </a:xfrm>
+      </p:grpSpPr>
       <p:sp>
         <p:nvSpPr>
           <p:cNvPr id="2" name="Rectangle 1"/>
@@ -15995,6 +16266,7 @@
           <a:lstStyle/>
           <a:p>
             <a:pPr algn="ctr"/>
+            <a:endParaRPr/>
           </a:p>
         </p:txBody>
       </p:sp>
@@ -16352,7 +16624,7 @@
 </file>
 
 <file path=ppt/slides/slide4.xml><?xml version="1.0" encoding="utf-8"?>
-<p:sld xmlns:a="http://schemas.openxmlformats.org/drawingml/2006/main" xmlns:p="http://schemas.openxmlformats.org/presentationml/2006/main" xmlns:r="http://schemas.openxmlformats.org/officeDocument/2006/relationships">
+<p:sld xmlns:a="http://schemas.openxmlformats.org/drawingml/2006/main" xmlns:r="http://schemas.openxmlformats.org/officeDocument/2006/relationships" xmlns:p="http://schemas.openxmlformats.org/presentationml/2006/main">
   <p:cSld>
     <p:spTree>
       <p:nvGrpSpPr>
@@ -16360,7 +16632,14 @@
         <p:cNvGrpSpPr/>
         <p:nvPr/>
       </p:nvGrpSpPr>
-      <p:grpSpPr/>
+      <p:grpSpPr>
+        <a:xfrm>
+          <a:off x="0" y="0"/>
+          <a:ext cx="0" cy="0"/>
+          <a:chOff x="0" y="0"/>
+          <a:chExt cx="0" cy="0"/>
+        </a:xfrm>
+      </p:grpSpPr>
       <p:sp>
         <p:nvSpPr>
           <p:cNvPr id="2" name="Rectangle 1"/>
@@ -16402,6 +16681,7 @@
           <a:lstStyle/>
           <a:p>
             <a:pPr algn="ctr"/>
+            <a:endParaRPr/>
           </a:p>
         </p:txBody>
       </p:sp>
@@ -16628,6 +16908,7 @@
           <a:lstStyle/>
           <a:p>
             <a:pPr algn="ctr"/>
+            <a:endParaRPr/>
           </a:p>
         </p:txBody>
       </p:sp>
@@ -16640,7 +16921,7 @@
         <p:spPr>
           <a:xfrm>
             <a:off x="777240" y="1874519"/>
-            <a:ext cx="3108960" cy="548640"/>
+            <a:ext cx="1037015" cy="461665"/>
           </a:xfrm>
           <a:prstGeom prst="rect">
             <a:avLst/>
@@ -16661,6 +16942,13 @@
               </a:defRPr>
             </a:pPr>
             <a:r>
+              <a:rPr dirty="0">
+                <a:solidFill>
+                  <a:srgbClr val="1B2A4A">
+                    <a:alpha val="29000"/>
+                  </a:srgbClr>
+                </a:solidFill>
+              </a:rPr>
               <a:t>Legacy</a:t>
             </a:r>
           </a:p>
@@ -16675,7 +16963,7 @@
         <p:spPr>
           <a:xfrm>
             <a:off x="777240" y="2377440"/>
-            <a:ext cx="3108960" cy="365760"/>
+            <a:ext cx="2286203" cy="292388"/>
           </a:xfrm>
           <a:prstGeom prst="rect">
             <a:avLst/>
@@ -16697,6 +16985,13 @@
               </a:defRPr>
             </a:pPr>
             <a:r>
+              <a:rPr dirty="0">
+                <a:solidFill>
+                  <a:srgbClr val="0066CC">
+                    <a:alpha val="30000"/>
+                  </a:srgbClr>
+                </a:solidFill>
+              </a:rPr>
               <a:t>mode omitted / "legacy"</a:t>
             </a:r>
           </a:p>
@@ -16711,7 +17006,7 @@
         <p:spPr>
           <a:xfrm>
             <a:off x="777240" y="2926080"/>
-            <a:ext cx="3108960" cy="3017520"/>
+            <a:ext cx="3108960" cy="1492716"/>
           </a:xfrm>
           <a:prstGeom prst="rect">
             <a:avLst/>
@@ -16730,9 +17025,11 @@
               </a:spcAft>
             </a:pPr>
             <a:r>
-              <a:rPr sz="1400">
-                <a:solidFill>
-                  <a:srgbClr val="555555"/>
+              <a:rPr sz="1400" dirty="0">
+                <a:solidFill>
+                  <a:srgbClr val="555555">
+                    <a:alpha val="45000"/>
+                  </a:srgbClr>
                 </a:solidFill>
               </a:rPr>
               <a:t>•  Older per-analytic plot types</a:t>
@@ -16745,13 +17042,55 @@
               </a:spcAft>
             </a:pPr>
             <a:r>
-              <a:rPr sz="1400">
-                <a:solidFill>
-                  <a:srgbClr val="555555"/>
-                </a:solidFill>
-              </a:rPr>
-              <a:t>•  accuracy_vs_freq, distribution,
-de_summary, etc.</a:t>
+              <a:rPr sz="1400" dirty="0">
+                <a:solidFill>
+                  <a:srgbClr val="555555">
+                    <a:alpha val="45000"/>
+                  </a:srgbClr>
+                </a:solidFill>
+              </a:rPr>
+              <a:t>•  </a:t>
+            </a:r>
+            <a:r>
+              <a:rPr sz="1400" dirty="0" err="1">
+                <a:solidFill>
+                  <a:srgbClr val="555555">
+                    <a:alpha val="45000"/>
+                  </a:srgbClr>
+                </a:solidFill>
+              </a:rPr>
+              <a:t>accuracy_vs_freq</a:t>
+            </a:r>
+            <a:r>
+              <a:rPr sz="1400" dirty="0">
+                <a:solidFill>
+                  <a:srgbClr val="555555">
+                    <a:alpha val="45000"/>
+                  </a:srgbClr>
+                </a:solidFill>
+              </a:rPr>
+              <a:t>, distribution,
+</a:t>
+            </a:r>
+            <a:r>
+              <a:rPr sz="1400" dirty="0" err="1">
+                <a:solidFill>
+                  <a:srgbClr val="555555">
+                    <a:alpha val="45000"/>
+                  </a:srgbClr>
+                </a:solidFill>
+              </a:rPr>
+              <a:t>de_summary</a:t>
+            </a:r>
+            <a:r>
+              <a:rPr sz="1400" dirty="0">
+                <a:solidFill>
+                  <a:srgbClr val="555555">
+                    <a:alpha val="45000"/>
+                  </a:srgbClr>
+                </a:solidFill>
+              </a:rPr>
+              <a:t>, etc.</a:t>
             </a:r>
           </a:p>
           <a:p>
@@ -16761,12 +17100,34 @@
               </a:spcAft>
             </a:pPr>
             <a:r>
-              <a:rPr sz="1400">
-                <a:solidFill>
-                  <a:srgbClr val="555555"/>
-                </a:solidFill>
-              </a:rPr>
-              <a:t>•  One job.json drives everything</a:t>
+              <a:rPr sz="1400" dirty="0">
+                <a:solidFill>
+                  <a:srgbClr val="555555">
+                    <a:alpha val="45000"/>
+                  </a:srgbClr>
+                </a:solidFill>
+              </a:rPr>
+              <a:t>•  One </a:t>
+            </a:r>
+            <a:r>
+              <a:rPr sz="1400" dirty="0" err="1">
+                <a:solidFill>
+                  <a:srgbClr val="555555">
+                    <a:alpha val="45000"/>
+                  </a:srgbClr>
+                </a:solidFill>
+              </a:rPr>
+              <a:t>job.json</a:t>
+            </a:r>
+            <a:r>
+              <a:rPr sz="1400" dirty="0">
+                <a:solidFill>
+                  <a:srgbClr val="555555">
+                    <a:alpha val="45000"/>
+                  </a:srgbClr>
+                </a:solidFill>
+              </a:rPr>
+              <a:t> drives everything</a:t>
             </a:r>
           </a:p>
         </p:txBody>
@@ -16816,6 +17177,7 @@
           <a:lstStyle/>
           <a:p>
             <a:pPr algn="ctr"/>
+            <a:endParaRPr/>
           </a:p>
         </p:txBody>
       </p:sp>
@@ -17004,6 +17366,7 @@
           <a:lstStyle/>
           <a:p>
             <a:pPr algn="ctr"/>
+            <a:endParaRPr/>
           </a:p>
         </p:txBody>
       </p:sp>
@@ -17156,7 +17519,7 @@
 </file>
 
 <file path=ppt/slides/slide40.xml><?xml version="1.0" encoding="utf-8"?>
-<p:sld xmlns:a="http://schemas.openxmlformats.org/drawingml/2006/main" xmlns:p="http://schemas.openxmlformats.org/presentationml/2006/main" xmlns:r="http://schemas.openxmlformats.org/officeDocument/2006/relationships">
+<p:sld xmlns:a="http://schemas.openxmlformats.org/drawingml/2006/main" xmlns:r="http://schemas.openxmlformats.org/officeDocument/2006/relationships" xmlns:p="http://schemas.openxmlformats.org/presentationml/2006/main">
   <p:cSld>
     <p:spTree>
       <p:nvGrpSpPr>
@@ -17164,7 +17527,14 @@
         <p:cNvGrpSpPr/>
         <p:nvPr/>
       </p:nvGrpSpPr>
-      <p:grpSpPr/>
+      <p:grpSpPr>
+        <a:xfrm>
+          <a:off x="0" y="0"/>
+          <a:ext cx="0" cy="0"/>
+          <a:chOff x="0" y="0"/>
+          <a:chExt cx="0" cy="0"/>
+        </a:xfrm>
+      </p:grpSpPr>
       <p:sp>
         <p:nvSpPr>
           <p:cNvPr id="2" name="Rectangle 1"/>
@@ -17206,6 +17576,7 @@
           <a:lstStyle/>
           <a:p>
             <a:pPr algn="ctr"/>
+            <a:endParaRPr/>
           </a:p>
         </p:txBody>
       </p:sp>
@@ -17467,7 +17838,7 @@
           </a:fontRef>
         </p:style>
         <p:txBody>
-          <a:bodyPr rtlCol="0" anchor="t" wrap="square" lIns="228600" rIns="228600" tIns="164592" bIns="164592"/>
+          <a:bodyPr wrap="square" lIns="228600" tIns="164592" rIns="228600" bIns="164592" rtlCol="0" anchor="t"/>
           <a:lstStyle/>
           <a:p>
             <a:pPr algn="l">
@@ -17528,7 +17899,7 @@
           </a:fontRef>
         </p:style>
         <p:txBody>
-          <a:bodyPr rtlCol="0" anchor="t" wrap="square" lIns="228600" rIns="228600" tIns="164592" bIns="164592"/>
+          <a:bodyPr wrap="square" lIns="228600" tIns="164592" rIns="228600" bIns="164592" rtlCol="0" anchor="t"/>
           <a:lstStyle/>
           <a:p>
             <a:pPr algn="l">
@@ -17708,7 +18079,7 @@
 </file>
 
 <file path=ppt/slides/slide41.xml><?xml version="1.0" encoding="utf-8"?>
-<p:sld xmlns:a="http://schemas.openxmlformats.org/drawingml/2006/main" xmlns:p="http://schemas.openxmlformats.org/presentationml/2006/main" xmlns:r="http://schemas.openxmlformats.org/officeDocument/2006/relationships">
+<p:sld xmlns:a="http://schemas.openxmlformats.org/drawingml/2006/main" xmlns:r="http://schemas.openxmlformats.org/officeDocument/2006/relationships" xmlns:p="http://schemas.openxmlformats.org/presentationml/2006/main">
   <p:cSld>
     <p:spTree>
       <p:nvGrpSpPr>
@@ -17716,7 +18087,14 @@
         <p:cNvGrpSpPr/>
         <p:nvPr/>
       </p:nvGrpSpPr>
-      <p:grpSpPr/>
+      <p:grpSpPr>
+        <a:xfrm>
+          <a:off x="0" y="0"/>
+          <a:ext cx="0" cy="0"/>
+          <a:chOff x="0" y="0"/>
+          <a:chExt cx="0" cy="0"/>
+        </a:xfrm>
+      </p:grpSpPr>
       <p:sp>
         <p:nvSpPr>
           <p:cNvPr id="2" name="Rectangle 1"/>
@@ -17758,6 +18136,7 @@
           <a:lstStyle/>
           <a:p>
             <a:pPr algn="ctr"/>
+            <a:endParaRPr/>
           </a:p>
         </p:txBody>
       </p:sp>
@@ -17980,7 +18359,7 @@
           </a:fontRef>
         </p:style>
         <p:txBody>
-          <a:bodyPr rtlCol="0" anchor="t" wrap="square" lIns="228600" rIns="228600" tIns="164592" bIns="164592"/>
+          <a:bodyPr wrap="square" lIns="228600" tIns="164592" rIns="228600" bIns="164592" rtlCol="0" anchor="t"/>
           <a:lstStyle/>
           <a:p>
             <a:pPr algn="l">
@@ -18080,7 +18459,7 @@
           </a:fontRef>
         </p:style>
         <p:txBody>
-          <a:bodyPr rtlCol="0" anchor="t" wrap="square" lIns="228600" rIns="228600" tIns="164592" bIns="164592"/>
+          <a:bodyPr wrap="square" lIns="228600" tIns="164592" rIns="228600" bIns="164592" rtlCol="0" anchor="t"/>
           <a:lstStyle/>
           <a:p>
             <a:pPr algn="l">
@@ -18244,7 +18623,7 @@
 </file>
 
 <file path=ppt/slides/slide42.xml><?xml version="1.0" encoding="utf-8"?>
-<p:sld xmlns:a="http://schemas.openxmlformats.org/drawingml/2006/main" xmlns:p="http://schemas.openxmlformats.org/presentationml/2006/main" xmlns:r="http://schemas.openxmlformats.org/officeDocument/2006/relationships">
+<p:sld xmlns:a="http://schemas.openxmlformats.org/drawingml/2006/main" xmlns:r="http://schemas.openxmlformats.org/officeDocument/2006/relationships" xmlns:p="http://schemas.openxmlformats.org/presentationml/2006/main">
   <p:cSld>
     <p:spTree>
       <p:nvGrpSpPr>
@@ -18252,7 +18631,14 @@
         <p:cNvGrpSpPr/>
         <p:nvPr/>
       </p:nvGrpSpPr>
-      <p:grpSpPr/>
+      <p:grpSpPr>
+        <a:xfrm>
+          <a:off x="0" y="0"/>
+          <a:ext cx="0" cy="0"/>
+          <a:chOff x="0" y="0"/>
+          <a:chExt cx="0" cy="0"/>
+        </a:xfrm>
+      </p:grpSpPr>
       <p:sp>
         <p:nvSpPr>
           <p:cNvPr id="2" name="Rectangle 1"/>
@@ -18294,6 +18680,7 @@
           <a:lstStyle/>
           <a:p>
             <a:pPr algn="ctr"/>
+            <a:endParaRPr/>
           </a:p>
         </p:txBody>
       </p:sp>
@@ -18328,7 +18715,7 @@
               </a:defRPr>
             </a:pPr>
             <a:r>
-              <a:t>Multi-Site Testing</a:t>
+              <a:t>Wrap-Up</a:t>
             </a:r>
           </a:p>
         </p:txBody>
@@ -18364,7 +18751,7 @@
               </a:defRPr>
             </a:pPr>
             <a:r>
-              <a:t>Cross-Site Comparison — compare_csv</a:t>
+              <a:t>Recent Updates</a:t>
             </a:r>
           </a:p>
         </p:txBody>
@@ -18484,7 +18871,7 @@
         <p:spPr>
           <a:xfrm>
             <a:off x="548640" y="1645920"/>
-            <a:ext cx="11064240" cy="4754880"/>
+            <a:ext cx="11064240" cy="4572000"/>
           </a:xfrm>
           <a:prstGeom prst="rect">
             <a:avLst/>
@@ -18503,13 +18890,13 @@
               </a:spcAft>
             </a:pPr>
             <a:r>
-              <a:rPr sz="1700">
+              <a:rPr sz="1800">
                 <a:solidFill>
                   <a:srgbClr val="1B2A4A"/>
                 </a:solidFill>
                 <a:latin typeface="Segoe UI"/>
               </a:rPr>
-              <a:t>•  Compares two sites' data (e.g. an established site vs. a newly-stood-up site) without hand-merging CSVs</a:t>
+              <a:t>•  Stat Summary &amp; Boxplot: spec/margin columns now show both sides when direction is undetermined (was silently upper-only)</a:t>
             </a:r>
           </a:p>
           <a:p>
@@ -18519,29 +18906,29 @@
               </a:spcAft>
             </a:pPr>
             <a:r>
-              <a:rPr sz="1700">
+              <a:rPr sz="1800">
                 <a:solidFill>
                   <a:srgbClr val="1B2A4A"/>
                 </a:solidFill>
                 <a:latin typeface="Segoe UI"/>
               </a:rPr>
-              <a:t>•  job.json: "compare_csv": {"SR": "path...", "AMC2": "path..."}, "primary_site": "SR"</a:t>
-            </a:r>
-          </a:p>
-          <a:p>
-            <a:pPr lvl="1">
+              <a:t>•  Boxplot: "Passing only" now warns when there's nothing to compare against, instead of quietly doing nothing</a:t>
+            </a:r>
+          </a:p>
+          <a:p>
+            <a:pPr>
               <a:spcAft>
                 <a:spcPts val="1000"/>
               </a:spcAft>
             </a:pPr>
             <a:r>
-              <a:rPr sz="1500">
+              <a:rPr sz="1800">
                 <a:solidFill>
                   <a:srgbClr val="1B2A4A"/>
                 </a:solidFill>
                 <a:latin typeface="Segoe UI"/>
               </a:rPr>
-              <a:t>–  primary_site is the reference population for the boxplot check below — no effect on other views</a:t>
+              <a:t>•  Env Coverage: drag-zoom now narrows the Statistics Table too — same behavior Stat Summary and Boxplot already had</a:t>
             </a:r>
           </a:p>
           <a:p>
@@ -18551,29 +18938,29 @@
               </a:spcAft>
             </a:pPr>
             <a:r>
-              <a:rPr sz="1700">
+              <a:rPr sz="1800">
                 <a:solidFill>
                   <a:srgbClr val="1B2A4A"/>
                 </a:solidFill>
                 <a:latin typeface="Segoe UI"/>
               </a:rPr>
-              <a:t>•  Mechanism: each site's own CSV is tagged "Site: &lt;name&gt;" in its Group text and merged — the normal single-CSV pipeline runs completely unchanged</a:t>
-            </a:r>
-          </a:p>
-          <a:p>
-            <a:pPr lvl="1">
+              <a:t>•  Large datasets: opt-in decimation + binary encoding cut file size dramatically (one real case: 400MB → 99MB)</a:t>
+            </a:r>
+          </a:p>
+          <a:p>
+            <a:pPr>
               <a:spcAft>
                 <a:spcPts val="1000"/>
               </a:spcAft>
             </a:pPr>
             <a:r>
-              <a:rPr sz="1500">
+              <a:rPr sz="1800">
                 <a:solidFill>
                   <a:srgbClr val="1B2A4A"/>
                 </a:solidFill>
                 <a:latin typeface="Segoe UI"/>
               </a:rPr>
-              <a:t>–  "Site" becomes a real, filterable/groupable condition dimension for free, same as Port or Serial</a:t>
+              <a:t>•  Compare Mode: x-axis units auto-detected and cross-checked between sites; new default PADB-Compare publish location</a:t>
             </a:r>
           </a:p>
           <a:p>
@@ -18583,13 +18970,13 @@
               </a:spcAft>
             </a:pPr>
             <a:r>
-              <a:rPr sz="1700">
+              <a:rPr sz="1800">
                 <a:solidFill>
                   <a:srgbClr val="1B2A4A"/>
                 </a:solidFill>
                 <a:latin typeface="Segoe UI"/>
               </a:rPr>
-              <a:t>•  Deliberately tolerant of imperfect data — mismatched columns, one site missing spec limits, narrower temperature/port coverage are all expected, not errors</a:t>
+              <a:t>•  Data integrity: results_padb is now the only trusted CSV source — no more silent R-Plots fallback substitution</a:t>
             </a:r>
           </a:p>
           <a:p>
@@ -18599,13 +18986,13 @@
               </a:spcAft>
             </a:pPr>
             <a:r>
-              <a:rPr sz="1700">
+              <a:rPr sz="1800">
                 <a:solidFill>
                   <a:srgbClr val="1B2A4A"/>
                 </a:solidFill>
                 <a:latin typeface="Segoe UI"/>
               </a:rPr>
-              <a:t>•  An always-visible banner flags real coverage gaps between sites (e.g. missing temperatures/ports) — numeric formatting differences between sites never falsely count as a gap</a:t>
+              <a:t>•  Web app: survives a restart mid-run, cleans up orphaned R-Host.exe processes, and the Running Jobs panel survives a browser refresh</a:t>
             </a:r>
           </a:p>
         </p:txBody>
@@ -18619,7 +19006,7 @@
 </file>
 
 <file path=ppt/slides/slide43.xml><?xml version="1.0" encoding="utf-8"?>
-<p:sld xmlns:a="http://schemas.openxmlformats.org/drawingml/2006/main" xmlns:p="http://schemas.openxmlformats.org/presentationml/2006/main" xmlns:r="http://schemas.openxmlformats.org/officeDocument/2006/relationships">
+<p:sld xmlns:a="http://schemas.openxmlformats.org/drawingml/2006/main" xmlns:r="http://schemas.openxmlformats.org/officeDocument/2006/relationships" xmlns:p="http://schemas.openxmlformats.org/presentationml/2006/main">
   <p:cSld>
     <p:spTree>
       <p:nvGrpSpPr>
@@ -18627,7 +19014,14 @@
         <p:cNvGrpSpPr/>
         <p:nvPr/>
       </p:nvGrpSpPr>
-      <p:grpSpPr/>
+      <p:grpSpPr>
+        <a:xfrm>
+          <a:off x="0" y="0"/>
+          <a:ext cx="0" cy="0"/>
+          <a:chOff x="0" y="0"/>
+          <a:chExt cx="0" cy="0"/>
+        </a:xfrm>
+      </p:grpSpPr>
       <p:sp>
         <p:nvSpPr>
           <p:cNvPr id="2" name="Rectangle 1"/>
@@ -18643,7 +19037,7 @@
             <a:avLst/>
           </a:prstGeom>
           <a:solidFill>
-            <a:srgbClr val="FFFFFF"/>
+            <a:srgbClr val="1B2A4A"/>
           </a:solidFill>
           <a:ln>
             <a:noFill/>
@@ -18669,6 +19063,7 @@
           <a:lstStyle/>
           <a:p>
             <a:pPr algn="ctr"/>
+            <a:endParaRPr/>
           </a:p>
         </p:txBody>
       </p:sp>
@@ -18680,8 +19075,8 @@
         </p:nvSpPr>
         <p:spPr>
           <a:xfrm>
-            <a:off x="548640" y="320040"/>
-            <a:ext cx="7315200" cy="365760"/>
+            <a:off x="822960" y="2743200"/>
+            <a:ext cx="10515600" cy="1097280"/>
           </a:xfrm>
           <a:prstGeom prst="rect">
             <a:avLst/>
@@ -18695,15 +19090,14 @@
           <a:lstStyle/>
           <a:p>
             <a:pPr>
-              <a:defRPr sz="1600" b="1">
-                <a:solidFill>
-                  <a:srgbClr val="0066CC"/>
-                </a:solidFill>
-                <a:latin typeface="Segoe UI"/>
+              <a:defRPr sz="4800" b="1">
+                <a:solidFill>
+                  <a:srgbClr val="FFFFFF"/>
+                </a:solidFill>
               </a:defRPr>
             </a:pPr>
             <a:r>
-              <a:t>Multi-Site Testing</a:t>
+              <a:t>Questions?</a:t>
             </a:r>
           </a:p>
         </p:txBody>
@@ -18716,271 +19110,30 @@
         </p:nvSpPr>
         <p:spPr>
           <a:xfrm>
-            <a:off x="548640" y="658368"/>
-            <a:ext cx="11064240" cy="822960"/>
-          </a:xfrm>
-          <a:prstGeom prst="rect">
-            <a:avLst/>
-          </a:prstGeom>
-          <a:noFill/>
-        </p:spPr>
-        <p:txBody>
-          <a:bodyPr wrap="square">
-            <a:spAutoFit/>
-          </a:bodyPr>
-          <a:lstStyle/>
-          <a:p>
-            <a:pPr>
-              <a:defRPr sz="3200" b="1">
-                <a:solidFill>
-                  <a:srgbClr val="1B2A4A"/>
-                </a:solidFill>
-                <a:latin typeface="Segoe UI"/>
+            <a:off x="822960" y="3749039"/>
+            <a:ext cx="10515600" cy="640080"/>
+          </a:xfrm>
+          <a:prstGeom prst="rect">
+            <a:avLst/>
+          </a:prstGeom>
+          <a:noFill/>
+        </p:spPr>
+        <p:txBody>
+          <a:bodyPr wrap="none">
+            <a:spAutoFit/>
+          </a:bodyPr>
+          <a:lstStyle/>
+          <a:p>
+            <a:pPr>
+              <a:defRPr sz="1800">
+                <a:solidFill>
+                  <a:srgbClr val="9FC5FF"/>
+                </a:solidFill>
+                <a:latin typeface="Consolas"/>
               </a:defRPr>
             </a:pPr>
             <a:r>
-              <a:t>Site Population Check — DUT or Station?</a:t>
-            </a:r>
-          </a:p>
-        </p:txBody>
-      </p:sp>
-      <p:cxnSp>
-        <p:nvCxnSpPr>
-          <p:cNvPr id="5" name="Connector 4"/>
-          <p:cNvCxnSpPr/>
-          <p:nvPr/>
-        </p:nvCxnSpPr>
-        <p:spPr>
-          <a:xfrm>
-            <a:off x="548640" y="1417320"/>
-            <a:ext cx="11091672" cy="0"/>
-          </a:xfrm>
-          <a:prstGeom prst="line">
-            <a:avLst/>
-          </a:prstGeom>
-          <a:ln w="28575">
-            <a:solidFill>
-              <a:srgbClr val="0066CC"/>
-            </a:solidFill>
-          </a:ln>
-        </p:spPr>
-        <p:style>
-          <a:lnRef idx="2">
-            <a:schemeClr val="accent1"/>
-          </a:lnRef>
-          <a:fillRef idx="0">
-            <a:schemeClr val="accent1"/>
-          </a:fillRef>
-          <a:effectRef idx="1">
-            <a:schemeClr val="accent1"/>
-          </a:effectRef>
-          <a:fontRef idx="minor">
-            <a:schemeClr val="tx1"/>
-          </a:fontRef>
-        </p:style>
-      </p:cxnSp>
-      <p:sp>
-        <p:nvSpPr>
-          <p:cNvPr id="6" name="TextBox 5"/>
-          <p:cNvSpPr txBox="1"/>
-          <p:nvPr/>
-        </p:nvSpPr>
-        <p:spPr>
-          <a:xfrm>
-            <a:off x="548640" y="6473952"/>
-            <a:ext cx="8229600" cy="320040"/>
-          </a:xfrm>
-          <a:prstGeom prst="rect">
-            <a:avLst/>
-          </a:prstGeom>
-          <a:noFill/>
-        </p:spPr>
-        <p:txBody>
-          <a:bodyPr wrap="none">
-            <a:spAutoFit/>
-          </a:bodyPr>
-          <a:lstStyle/>
-          <a:p>
-            <a:pPr>
-              <a:defRPr sz="1100">
-                <a:solidFill>
-                  <a:srgbClr val="555555"/>
-                </a:solidFill>
-                <a:latin typeface="Segoe UI"/>
-              </a:defRPr>
-            </a:pPr>
-            <a:r>
-              <a:t>padb-tools</a:t>
-            </a:r>
-          </a:p>
-        </p:txBody>
-      </p:sp>
-      <p:sp>
-        <p:nvSpPr>
-          <p:cNvPr id="7" name="TextBox 6"/>
-          <p:cNvSpPr txBox="1"/>
-          <p:nvPr/>
-        </p:nvSpPr>
-        <p:spPr>
-          <a:xfrm>
-            <a:off x="11338560" y="6473952"/>
-            <a:ext cx="548640" cy="320040"/>
-          </a:xfrm>
-          <a:prstGeom prst="rect">
-            <a:avLst/>
-          </a:prstGeom>
-          <a:noFill/>
-        </p:spPr>
-        <p:txBody>
-          <a:bodyPr wrap="none">
-            <a:spAutoFit/>
-          </a:bodyPr>
-          <a:lstStyle/>
-          <a:p>
-            <a:pPr algn="r">
-              <a:defRPr sz="1100">
-                <a:solidFill>
-                  <a:srgbClr val="555555"/>
-                </a:solidFill>
-              </a:defRPr>
-            </a:pPr>
-            <a:r>
-              <a:t>43</a:t>
-            </a:r>
-          </a:p>
-        </p:txBody>
-      </p:sp>
-      <p:sp>
-        <p:nvSpPr>
-          <p:cNvPr id="8" name="TextBox 7"/>
-          <p:cNvSpPr txBox="1"/>
-          <p:nvPr/>
-        </p:nvSpPr>
-        <p:spPr>
-          <a:xfrm>
-            <a:off x="548640" y="1645920"/>
-            <a:ext cx="11064240" cy="4754880"/>
-          </a:xfrm>
-          <a:prstGeom prst="rect">
-            <a:avLst/>
-          </a:prstGeom>
-          <a:noFill/>
-        </p:spPr>
-        <p:txBody>
-          <a:bodyPr wrap="square">
-            <a:spAutoFit/>
-          </a:bodyPr>
-          <a:lstStyle/>
-          <a:p>
-            <a:pPr>
-              <a:spcAft>
-                <a:spcPts val="1000"/>
-              </a:spcAft>
-            </a:pPr>
-            <a:r>
-              <a:rPr sz="1700">
-                <a:solidFill>
-                  <a:srgbClr val="1B2A4A"/>
-                </a:solidFill>
-                <a:latin typeface="Segoe UI"/>
-              </a:rPr>
-              <a:t>•  Tests each non-primary-site DUT's value at each frequency/temperature against the k×IQR fence built from the primary site's own population there — available on boxplot, stat_summary, and summary</a:t>
-            </a:r>
-          </a:p>
-          <a:p>
-            <a:pPr lvl="1">
-              <a:spcAft>
-                <a:spcPts val="1000"/>
-              </a:spcAft>
-            </a:pPr>
-            <a:r>
-              <a:rPr sz="1500">
-                <a:solidFill>
-                  <a:srgbClr val="1B2A4A"/>
-                </a:solidFill>
-                <a:latin typeface="Segoe UI"/>
-              </a:rPr>
-              <a:t>–  Reuses the exact fence and live k×IQR control the page's own outlier detection already uses — no new statistical method</a:t>
-            </a:r>
-          </a:p>
-          <a:p>
-            <a:pPr>
-              <a:spcAft>
-                <a:spcPts val="1000"/>
-              </a:spcAft>
-            </a:pPr>
-            <a:r>
-              <a:rPr sz="1700">
-                <a:solidFill>
-                  <a:srgbClr val="1B2A4A"/>
-                </a:solidFill>
-                <a:latin typeface="Segoe UI"/>
-              </a:rPr>
-              <a:t>•  Per-DUT summary — checked/outside counts, high/low split, and how many of a DUT's outside points are shared with another DUT at the same spot</a:t>
-            </a:r>
-          </a:p>
-          <a:p>
-            <a:pPr>
-              <a:spcAft>
-                <a:spcPts val="1000"/>
-              </a:spcAft>
-            </a:pPr>
-            <a:r>
-              <a:rPr sz="1700">
-                <a:solidFill>
-                  <a:srgbClr val="1B2A4A"/>
-                </a:solidFill>
-                <a:latin typeface="Segoe UI"/>
-              </a:rPr>
-              <a:t>•  Frequency clusters — every (temp, freq) where 2+ distinct DUTs are simultaneously outside — the strongest signal for a station/fixture issue, not one bad DUT</a:t>
-            </a:r>
-          </a:p>
-          <a:p>
-            <a:pPr>
-              <a:spcAft>
-                <a:spcPts val="1000"/>
-              </a:spcAft>
-            </a:pPr>
-            <a:r>
-              <a:rPr sz="1700">
-                <a:solidFill>
-                  <a:srgbClr val="1B2A4A"/>
-                </a:solidFill>
-                <a:latin typeface="Segoe UI"/>
-              </a:rPr>
-              <a:t>•  Suggested triage tag per DUT: station/systemic &gt; bad DUT &gt; isolated &gt; below-population (benign) &gt; ambiguous — a suggestion, not a verdict</a:t>
-            </a:r>
-          </a:p>
-          <a:p>
-            <a:pPr>
-              <a:spcAft>
-                <a:spcPts val="1000"/>
-              </a:spcAft>
-            </a:pPr>
-            <a:r>
-              <a:rPr sz="1700">
-                <a:solidFill>
-                  <a:srgbClr val="1B2A4A"/>
-                </a:solidFill>
-                <a:latin typeface="Segoe UI"/>
-              </a:rPr>
-              <a:t>•  Export CSV (All) / (Outside only) — downloads the per-point detail table with a metadata header (timestamp, primary site, frequency window)</a:t>
-            </a:r>
-          </a:p>
-          <a:p>
-            <a:pPr>
-              <a:spcAft>
-                <a:spcPts val="1000"/>
-              </a:spcAft>
-            </a:pPr>
-            <a:r>
-              <a:rPr sz="1700">
-                <a:solidFill>
-                  <a:srgbClr val="1B2A4A"/>
-                </a:solidFill>
-                <a:latin typeface="Segoe UI"/>
-              </a:rPr>
-              <a:t>•  Real finding on ClockSpurs SR-vs-AMC2 data: all 8 AMC2 DUTs came back "Likely station/systemic," reading systematically quieter than SR — a site calibration signature, not 8 bad units</a:t>
+              <a:t>C:\apps\padb\tools   |   /padb-tools</a:t>
             </a:r>
           </a:p>
         </p:txBody>
@@ -18994,7 +19147,7 @@
 </file>
 
 <file path=ppt/slides/slide44.xml><?xml version="1.0" encoding="utf-8"?>
-<p:sld xmlns:a="http://schemas.openxmlformats.org/drawingml/2006/main" xmlns:p="http://schemas.openxmlformats.org/presentationml/2006/main" xmlns:r="http://schemas.openxmlformats.org/officeDocument/2006/relationships">
+<p:sld xmlns:a="http://schemas.openxmlformats.org/drawingml/2006/main" xmlns:r="http://schemas.openxmlformats.org/officeDocument/2006/relationships" xmlns:p="http://schemas.openxmlformats.org/presentationml/2006/main">
   <p:cSld>
     <p:spTree>
       <p:nvGrpSpPr>
@@ -19002,7 +19155,14 @@
         <p:cNvGrpSpPr/>
         <p:nvPr/>
       </p:nvGrpSpPr>
-      <p:grpSpPr/>
+      <p:grpSpPr>
+        <a:xfrm>
+          <a:off x="0" y="0"/>
+          <a:ext cx="0" cy="0"/>
+          <a:chOff x="0" y="0"/>
+          <a:chExt cx="0" cy="0"/>
+        </a:xfrm>
+      </p:grpSpPr>
       <p:sp>
         <p:nvSpPr>
           <p:cNvPr id="2" name="Rectangle 1"/>
@@ -19018,7 +19178,7 @@
             <a:avLst/>
           </a:prstGeom>
           <a:solidFill>
-            <a:srgbClr val="FFFFFF"/>
+            <a:srgbClr val="F2F4F8"/>
           </a:solidFill>
           <a:ln>
             <a:noFill/>
@@ -19044,6 +19204,7 @@
           <a:lstStyle/>
           <a:p>
             <a:pPr algn="ctr"/>
+            <a:endParaRPr/>
           </a:p>
         </p:txBody>
       </p:sp>
@@ -19055,8 +19216,8 @@
         </p:nvSpPr>
         <p:spPr>
           <a:xfrm>
-            <a:off x="548640" y="320040"/>
-            <a:ext cx="7315200" cy="365760"/>
+            <a:off x="822960" y="2743200"/>
+            <a:ext cx="10515600" cy="914400"/>
           </a:xfrm>
           <a:prstGeom prst="rect">
             <a:avLst/>
@@ -19070,292 +19231,49 @@
           <a:lstStyle/>
           <a:p>
             <a:pPr>
-              <a:defRPr sz="1600" b="1">
+              <a:defRPr sz="4400" b="1">
+                <a:solidFill>
+                  <a:srgbClr val="1B2A4A"/>
+                </a:solidFill>
+              </a:defRPr>
+            </a:pPr>
+            <a:r>
+              <a:t>Appendix</a:t>
+            </a:r>
+          </a:p>
+        </p:txBody>
+      </p:sp>
+      <p:sp>
+        <p:nvSpPr>
+          <p:cNvPr id="4" name="TextBox 3"/>
+          <p:cNvSpPr txBox="1"/>
+          <p:nvPr/>
+        </p:nvSpPr>
+        <p:spPr>
+          <a:xfrm>
+            <a:off x="822960" y="3566160"/>
+            <a:ext cx="10515600" cy="640080"/>
+          </a:xfrm>
+          <a:prstGeom prst="rect">
+            <a:avLst/>
+          </a:prstGeom>
+          <a:noFill/>
+        </p:spPr>
+        <p:txBody>
+          <a:bodyPr wrap="none">
+            <a:spAutoFit/>
+          </a:bodyPr>
+          <a:lstStyle/>
+          <a:p>
+            <a:pPr>
+              <a:defRPr sz="2200">
                 <a:solidFill>
                   <a:srgbClr val="0066CC"/>
                 </a:solidFill>
-                <a:latin typeface="Segoe UI"/>
               </a:defRPr>
             </a:pPr>
             <a:r>
-              <a:t>Multi-Site Testing</a:t>
-            </a:r>
-          </a:p>
-        </p:txBody>
-      </p:sp>
-      <p:sp>
-        <p:nvSpPr>
-          <p:cNvPr id="4" name="TextBox 3"/>
-          <p:cNvSpPr txBox="1"/>
-          <p:nvPr/>
-        </p:nvSpPr>
-        <p:spPr>
-          <a:xfrm>
-            <a:off x="548640" y="658368"/>
-            <a:ext cx="11064240" cy="822960"/>
-          </a:xfrm>
-          <a:prstGeom prst="rect">
-            <a:avLst/>
-          </a:prstGeom>
-          <a:noFill/>
-        </p:spPr>
-        <p:txBody>
-          <a:bodyPr wrap="square">
-            <a:spAutoFit/>
-          </a:bodyPr>
-          <a:lstStyle/>
-          <a:p>
-            <a:pPr>
-              <a:defRPr sz="3200" b="1">
-                <a:solidFill>
-                  <a:srgbClr val="1B2A4A"/>
-                </a:solidFill>
-                <a:latin typeface="Segoe UI"/>
-              </a:defRPr>
-            </a:pPr>
-            <a:r>
-              <a:t>Duplicate Test Runs vs. DUT Count</a:t>
-            </a:r>
-          </a:p>
-        </p:txBody>
-      </p:sp>
-      <p:cxnSp>
-        <p:nvCxnSpPr>
-          <p:cNvPr id="5" name="Connector 4"/>
-          <p:cNvCxnSpPr/>
-          <p:nvPr/>
-        </p:nvCxnSpPr>
-        <p:spPr>
-          <a:xfrm>
-            <a:off x="548640" y="1417320"/>
-            <a:ext cx="11091672" cy="0"/>
-          </a:xfrm>
-          <a:prstGeom prst="line">
-            <a:avLst/>
-          </a:prstGeom>
-          <a:ln w="28575">
-            <a:solidFill>
-              <a:srgbClr val="0066CC"/>
-            </a:solidFill>
-          </a:ln>
-        </p:spPr>
-        <p:style>
-          <a:lnRef idx="2">
-            <a:schemeClr val="accent1"/>
-          </a:lnRef>
-          <a:fillRef idx="0">
-            <a:schemeClr val="accent1"/>
-          </a:fillRef>
-          <a:effectRef idx="1">
-            <a:schemeClr val="accent1"/>
-          </a:effectRef>
-          <a:fontRef idx="minor">
-            <a:schemeClr val="tx1"/>
-          </a:fontRef>
-        </p:style>
-      </p:cxnSp>
-      <p:sp>
-        <p:nvSpPr>
-          <p:cNvPr id="6" name="TextBox 5"/>
-          <p:cNvSpPr txBox="1"/>
-          <p:nvPr/>
-        </p:nvSpPr>
-        <p:spPr>
-          <a:xfrm>
-            <a:off x="548640" y="6473952"/>
-            <a:ext cx="8229600" cy="320040"/>
-          </a:xfrm>
-          <a:prstGeom prst="rect">
-            <a:avLst/>
-          </a:prstGeom>
-          <a:noFill/>
-        </p:spPr>
-        <p:txBody>
-          <a:bodyPr wrap="none">
-            <a:spAutoFit/>
-          </a:bodyPr>
-          <a:lstStyle/>
-          <a:p>
-            <a:pPr>
-              <a:defRPr sz="1100">
-                <a:solidFill>
-                  <a:srgbClr val="555555"/>
-                </a:solidFill>
-                <a:latin typeface="Segoe UI"/>
-              </a:defRPr>
-            </a:pPr>
-            <a:r>
-              <a:t>padb-tools</a:t>
-            </a:r>
-          </a:p>
-        </p:txBody>
-      </p:sp>
-      <p:sp>
-        <p:nvSpPr>
-          <p:cNvPr id="7" name="TextBox 6"/>
-          <p:cNvSpPr txBox="1"/>
-          <p:nvPr/>
-        </p:nvSpPr>
-        <p:spPr>
-          <a:xfrm>
-            <a:off x="11338560" y="6473952"/>
-            <a:ext cx="548640" cy="320040"/>
-          </a:xfrm>
-          <a:prstGeom prst="rect">
-            <a:avLst/>
-          </a:prstGeom>
-          <a:noFill/>
-        </p:spPr>
-        <p:txBody>
-          <a:bodyPr wrap="none">
-            <a:spAutoFit/>
-          </a:bodyPr>
-          <a:lstStyle/>
-          <a:p>
-            <a:pPr algn="r">
-              <a:defRPr sz="1100">
-                <a:solidFill>
-                  <a:srgbClr val="555555"/>
-                </a:solidFill>
-              </a:defRPr>
-            </a:pPr>
-            <a:r>
-              <a:t>44</a:t>
-            </a:r>
-          </a:p>
-        </p:txBody>
-      </p:sp>
-      <p:sp>
-        <p:nvSpPr>
-          <p:cNvPr id="8" name="TextBox 7"/>
-          <p:cNvSpPr txBox="1"/>
-          <p:nvPr/>
-        </p:nvSpPr>
-        <p:spPr>
-          <a:xfrm>
-            <a:off x="548640" y="1645920"/>
-            <a:ext cx="11064240" cy="4754880"/>
-          </a:xfrm>
-          <a:prstGeom prst="rect">
-            <a:avLst/>
-          </a:prstGeom>
-          <a:noFill/>
-        </p:spPr>
-        <p:txBody>
-          <a:bodyPr wrap="square">
-            <a:spAutoFit/>
-          </a:bodyPr>
-          <a:lstStyle/>
-          <a:p>
-            <a:pPr>
-              <a:spcAft>
-                <a:spcPts val="1000"/>
-              </a:spcAft>
-            </a:pPr>
-            <a:r>
-              <a:rPr sz="1700">
-                <a:solidFill>
-                  <a:srgbClr val="1B2A4A"/>
-                </a:solidFill>
-                <a:latin typeface="Segoe UI"/>
-              </a:rPr>
-              <a:t>•  Statistics Table's n counts raw CSV rows, not distinct DUTs — a DUT measured twice at the same point is counted twice</a:t>
-            </a:r>
-          </a:p>
-          <a:p>
-            <a:pPr>
-              <a:spcAft>
-                <a:spcPts val="1000"/>
-              </a:spcAft>
-            </a:pPr>
-            <a:r>
-              <a:rPr sz="1700">
-                <a:solidFill>
-                  <a:srgbClr val="1B2A4A"/>
-                </a:solidFill>
-                <a:latin typeface="Segoe UI"/>
-              </a:rPr>
-              <a:t>•  "Dup runs" column sums the extras across every duplicated DUT — 3 DUTs with 1 dup each is not the same as 1 DUT with 3 dups</a:t>
-            </a:r>
-          </a:p>
-          <a:p>
-            <a:pPr>
-              <a:spcAft>
-                <a:spcPts val="1000"/>
-              </a:spcAft>
-            </a:pPr>
-            <a:r>
-              <a:rPr sz="1700">
-                <a:solidFill>
-                  <a:srgbClr val="1B2A4A"/>
-                </a:solidFill>
-                <a:latin typeface="Segoe UI"/>
-              </a:rPr>
-              <a:t>•  Site Population Check's "Genuinely repeated freqs" / "SR dup pts" break duplicates down per-DUT instead of one ambiguous total</a:t>
-            </a:r>
-          </a:p>
-          <a:p>
-            <a:pPr>
-              <a:spcAft>
-                <a:spcPts val="1000"/>
-              </a:spcAft>
-            </a:pPr>
-            <a:r>
-              <a:rPr sz="1700">
-                <a:solidFill>
-                  <a:srgbClr val="1B2A4A"/>
-                </a:solidFill>
-                <a:latin typeface="Segoe UI"/>
-              </a:rPr>
-              <a:t>•  Port is part of the duplicate identity — a DUT's RF1 and RF2 rows are two real measurements, never counted as duplicates of each other</a:t>
-            </a:r>
-          </a:p>
-          <a:p>
-            <a:pPr lvl="1">
-              <a:spcAft>
-                <a:spcPts val="1000"/>
-              </a:spcAft>
-            </a:pPr>
-            <a:r>
-              <a:rPr sz="1500">
-                <a:solidFill>
-                  <a:srgbClr val="1B2A4A"/>
-                </a:solidFill>
-                <a:latin typeface="Segoe UI"/>
-              </a:rPr>
-              <a:t>–  Real bug fixed this session: an earlier version of this check missed that distinction</a:t>
-            </a:r>
-          </a:p>
-          <a:p>
-            <a:pPr>
-              <a:spcAft>
-                <a:spcPts val="1000"/>
-              </a:spcAft>
-            </a:pPr>
-            <a:r>
-              <a:rPr sz="1700">
-                <a:solidFill>
-                  <a:srgbClr val="1B2A4A"/>
-                </a:solidFill>
-                <a:latin typeface="Segoe UI"/>
-              </a:rPr>
-              <a:t>•  Condition pooling (e.g. Group by: Serial Number) is not a duplicate either — same DUT under different SpurTypes/conditions is real coverage, not a repeat</a:t>
-            </a:r>
-          </a:p>
-          <a:p>
-            <a:pPr>
-              <a:spcAft>
-                <a:spcPts val="1000"/>
-              </a:spcAft>
-            </a:pPr>
-            <a:r>
-              <a:rPr sz="1700">
-                <a:solidFill>
-                  <a:srgbClr val="1B2A4A"/>
-                </a:solidFill>
-                <a:latin typeface="Segoe UI"/>
-              </a:rPr>
-              <a:t>•  "Collapse dup runs" checkbox (boxplot) averages true duplicates before computing box stats — stat_summary/summary don't need it, their per-DUT data is already pre-averaged server-side</a:t>
+              <a:t>Setting Up From Zero — Assumes No Prior Access</a:t>
             </a:r>
           </a:p>
         </p:txBody>
@@ -19369,7 +19287,7 @@
 </file>
 
 <file path=ppt/slides/slide45.xml><?xml version="1.0" encoding="utf-8"?>
-<p:sld xmlns:a="http://schemas.openxmlformats.org/drawingml/2006/main" xmlns:p="http://schemas.openxmlformats.org/presentationml/2006/main" xmlns:r="http://schemas.openxmlformats.org/officeDocument/2006/relationships">
+<p:sld xmlns:a="http://schemas.openxmlformats.org/drawingml/2006/main" xmlns:r="http://schemas.openxmlformats.org/officeDocument/2006/relationships" xmlns:p="http://schemas.openxmlformats.org/presentationml/2006/main">
   <p:cSld>
     <p:spTree>
       <p:nvGrpSpPr>
@@ -19377,7 +19295,14 @@
         <p:cNvGrpSpPr/>
         <p:nvPr/>
       </p:nvGrpSpPr>
-      <p:grpSpPr/>
+      <p:grpSpPr>
+        <a:xfrm>
+          <a:off x="0" y="0"/>
+          <a:ext cx="0" cy="0"/>
+          <a:chOff x="0" y="0"/>
+          <a:chExt cx="0" cy="0"/>
+        </a:xfrm>
+      </p:grpSpPr>
       <p:sp>
         <p:nvSpPr>
           <p:cNvPr id="2" name="Rectangle 1"/>
@@ -19419,6 +19344,7 @@
           <a:lstStyle/>
           <a:p>
             <a:pPr algn="ctr"/>
+            <a:endParaRPr/>
           </a:p>
         </p:txBody>
       </p:sp>
@@ -19453,7 +19379,7 @@
               </a:defRPr>
             </a:pPr>
             <a:r>
-              <a:t>Multi-Site Testing</a:t>
+              <a:t>Appendix</a:t>
             </a:r>
           </a:p>
         </p:txBody>
@@ -19489,7 +19415,7 @@
               </a:defRPr>
             </a:pPr>
             <a:r>
-              <a:t>Webapp: Compare Two Datasets</a:t>
+              <a:t>Getting the Code</a:t>
             </a:r>
           </a:p>
         </p:txBody>
@@ -19595,7 +19521,7 @@
               </a:defRPr>
             </a:pPr>
             <a:r>
-              <a:t>45</a:t>
+              <a:t>44</a:t>
             </a:r>
           </a:p>
         </p:txBody>
@@ -19608,8 +19534,8 @@
         </p:nvSpPr>
         <p:spPr>
           <a:xfrm>
-            <a:off x="548640" y="1645920"/>
-            <a:ext cx="11064240" cy="4754880"/>
+            <a:off x="548640" y="1691640"/>
+            <a:ext cx="11064240" cy="365760"/>
           </a:xfrm>
           <a:prstGeom prst="rect">
             <a:avLst/>
@@ -19628,15 +19554,193 @@
               </a:spcAft>
             </a:pPr>
             <a:r>
+              <a:rPr sz="1900">
+                <a:solidFill>
+                  <a:srgbClr val="1B2A4A"/>
+                </a:solidFill>
+                <a:latin typeface="Segoe UI"/>
+              </a:rPr>
+              <a:t>•  This repo isn't on a company-wide share by default — copy it from:</a:t>
+            </a:r>
+          </a:p>
+        </p:txBody>
+      </p:sp>
+      <p:sp>
+        <p:nvSpPr>
+          <p:cNvPr id="9" name="Rounded Rectangle 8"/>
+          <p:cNvSpPr/>
+          <p:nvPr/>
+        </p:nvSpPr>
+        <p:spPr>
+          <a:xfrm>
+            <a:off x="548640" y="2103120"/>
+            <a:ext cx="11064240" cy="502920"/>
+          </a:xfrm>
+          <a:prstGeom prst="roundRect">
+            <a:avLst>
+              <a:gd name="adj" fmla="val 4000"/>
+            </a:avLst>
+          </a:prstGeom>
+          <a:solidFill>
+            <a:srgbClr val="282C34"/>
+          </a:solidFill>
+          <a:ln>
+            <a:solidFill>
+              <a:srgbClr val="111318"/>
+            </a:solidFill>
+          </a:ln>
+          <a:effectLst/>
+        </p:spPr>
+        <p:style>
+          <a:lnRef idx="1">
+            <a:schemeClr val="accent1"/>
+          </a:lnRef>
+          <a:fillRef idx="3">
+            <a:schemeClr val="accent1"/>
+          </a:fillRef>
+          <a:effectRef idx="2">
+            <a:schemeClr val="accent1"/>
+          </a:effectRef>
+          <a:fontRef idx="minor">
+            <a:schemeClr val="lt1"/>
+          </a:fontRef>
+        </p:style>
+        <p:txBody>
+          <a:bodyPr wrap="square" lIns="228600" tIns="164592" rIns="228600" bIns="164592" rtlCol="0" anchor="t"/>
+          <a:lstStyle/>
+          <a:p>
+            <a:pPr algn="l">
+              <a:spcAft>
+                <a:spcPts val="200"/>
+              </a:spcAft>
+            </a:pPr>
+            <a:r>
+              <a:rPr sz="1350">
+                <a:solidFill>
+                  <a:srgbClr val="E6E6E6"/>
+                </a:solidFill>
+                <a:latin typeface="Consolas"/>
+              </a:rPr>
+              <a:t>\\srsnas01.srs.is.keysight.com\prod\MIDRF3\SG6311A\Padb-tools\tools</a:t>
+            </a:r>
+          </a:p>
+        </p:txBody>
+      </p:sp>
+      <p:sp>
+        <p:nvSpPr>
+          <p:cNvPr id="10" name="TextBox 9"/>
+          <p:cNvSpPr txBox="1"/>
+          <p:nvPr/>
+        </p:nvSpPr>
+        <p:spPr>
+          <a:xfrm>
+            <a:off x="548640" y="2788920"/>
+            <a:ext cx="11064240" cy="365760"/>
+          </a:xfrm>
+          <a:prstGeom prst="rect">
+            <a:avLst/>
+          </a:prstGeom>
+          <a:noFill/>
+        </p:spPr>
+        <p:txBody>
+          <a:bodyPr wrap="square">
+            <a:spAutoFit/>
+          </a:bodyPr>
+          <a:lstStyle/>
+          <a:p>
+            <a:pPr>
+              <a:spcAft>
+                <a:spcPts val="1000"/>
+              </a:spcAft>
+            </a:pPr>
+            <a:r>
+              <a:rPr sz="1800">
+                <a:solidFill>
+                  <a:srgbClr val="1B2A4A"/>
+                </a:solidFill>
+                <a:latin typeface="Segoe UI"/>
+              </a:rPr>
+              <a:t>•  Copy that whole "tools" folder to a local path, e.g. C:\apps\padb\tools</a:t>
+            </a:r>
+          </a:p>
+        </p:txBody>
+      </p:sp>
+      <p:sp>
+        <p:nvSpPr>
+          <p:cNvPr id="11" name="TextBox 10"/>
+          <p:cNvSpPr txBox="1"/>
+          <p:nvPr/>
+        </p:nvSpPr>
+        <p:spPr>
+          <a:xfrm>
+            <a:off x="548640" y="3429000"/>
+            <a:ext cx="11064240" cy="914400"/>
+          </a:xfrm>
+          <a:prstGeom prst="rect">
+            <a:avLst/>
+          </a:prstGeom>
+          <a:noFill/>
+        </p:spPr>
+        <p:txBody>
+          <a:bodyPr wrap="square">
+            <a:spAutoFit/>
+          </a:bodyPr>
+          <a:lstStyle/>
+          <a:p>
+            <a:pPr>
+              <a:spcAft>
+                <a:spcPts val="1000"/>
+              </a:spcAft>
+            </a:pPr>
+            <a:r>
               <a:rPr sz="1700">
                 <a:solidFill>
                   <a:srgbClr val="1B2A4A"/>
                 </a:solidFill>
                 <a:latin typeface="Segoe UI"/>
               </a:rPr>
-              <a:t>•  Collapsed-by-default panel in the web app (a corner case — mainly useful the first time a new site comes online)</a:t>
-            </a:r>
-          </a:p>
+              <a:t>•  padb_batch.py is bundled directly inside the tools folder (added 2026-08-05) —</a:t>
+            </a:r>
+          </a:p>
+          <a:p>
+            <a:pPr lvl="1">
+              <a:spcAft>
+                <a:spcPts val="600"/>
+              </a:spcAft>
+            </a:pPr>
+            <a:r>
+              <a:rPr sz="1500">
+                <a:solidFill>
+                  <a:srgbClr val="555555"/>
+                </a:solidFill>
+                <a:latin typeface="Segoe UI"/>
+              </a:rPr>
+              <a:t>–  no separate dependency to track down; the whole repo is self-contained</a:t>
+            </a:r>
+          </a:p>
+        </p:txBody>
+      </p:sp>
+      <p:sp>
+        <p:nvSpPr>
+          <p:cNvPr id="12" name="TextBox 11"/>
+          <p:cNvSpPr txBox="1"/>
+          <p:nvPr/>
+        </p:nvSpPr>
+        <p:spPr>
+          <a:xfrm>
+            <a:off x="548640" y="4480560"/>
+            <a:ext cx="11064240" cy="457200"/>
+          </a:xfrm>
+          <a:prstGeom prst="rect">
+            <a:avLst/>
+          </a:prstGeom>
+          <a:noFill/>
+        </p:spPr>
+        <p:txBody>
+          <a:bodyPr wrap="square">
+            <a:spAutoFit/>
+          </a:bodyPr>
+          <a:lstStyle/>
           <a:p>
             <a:pPr>
               <a:spcAft>
@@ -19644,77 +19748,13 @@
               </a:spcAft>
             </a:pPr>
             <a:r>
-              <a:rPr sz="1700">
+              <a:rPr sz="1650">
                 <a:solidFill>
                   <a:srgbClr val="1B2A4A"/>
                 </a:solidFill>
                 <a:latin typeface="Segoe UI"/>
               </a:rPr>
-              <a:t>•  Pick two already-extracted CSVs (auto-discovered from disk), name each site, pick the primary, and Create &amp; Run in one step — no hand-written job.json needed</a:t>
-            </a:r>
-          </a:p>
-          <a:p>
-            <a:pPr>
-              <a:spcAft>
-                <a:spcPts val="1000"/>
-              </a:spcAft>
-            </a:pPr>
-            <a:r>
-              <a:rPr sz="1700">
-                <a:solidFill>
-                  <a:srgbClr val="1B2A4A"/>
-                </a:solidFill>
-                <a:latin typeface="Segoe UI"/>
-              </a:rPr>
-              <a:t>•  Validates first: a genuine measurement-unit mismatch (e.g. dBc vs. dBm) blocks with an explanation, with an explicit override to proceed anyway</a:t>
-            </a:r>
-          </a:p>
-          <a:p>
-            <a:pPr lvl="1">
-              <a:spcAft>
-                <a:spcPts val="1000"/>
-              </a:spcAft>
-            </a:pPr>
-            <a:r>
-              <a:rPr sz="1500">
-                <a:solidFill>
-                  <a:srgbClr val="1B2A4A"/>
-                </a:solidFill>
-                <a:latin typeface="Segoe UI"/>
-              </a:rPr>
-              <a:t>–  Softer gaps — missing temperatures/ports, non-overlapping frequency ranges — only warn, never block</a:t>
-            </a:r>
-          </a:p>
-          <a:p>
-            <a:pPr>
-              <a:spcAft>
-                <a:spcPts val="1000"/>
-              </a:spcAft>
-            </a:pPr>
-            <a:r>
-              <a:rPr sz="1700">
-                <a:solidFill>
-                  <a:srgbClr val="1B2A4A"/>
-                </a:solidFill>
-                <a:latin typeface="Segoe UI"/>
-              </a:rPr>
-              <a:t>•  New job defaults to local-only (publish_to left empty) — publishing an ad-hoc comparison test is a deliberate, separate choice</a:t>
-            </a:r>
-          </a:p>
-          <a:p>
-            <a:pPr>
-              <a:spcAft>
-                <a:spcPts val="1000"/>
-              </a:spcAft>
-            </a:pPr>
-            <a:r>
-              <a:rPr sz="1700">
-                <a:solidFill>
-                  <a:srgbClr val="1B2A4A"/>
-                </a:solidFill>
-                <a:latin typeface="Segoe UI"/>
-              </a:rPr>
-              <a:t>•  "Show tooltip help" checkbox (top of every page) toggles hover help across the whole app on/off, remembered across reloads</a:t>
+              <a:t>•  Then follow the Prerequisites and Per-User Config slides earlier in this deck</a:t>
             </a:r>
           </a:p>
         </p:txBody>
@@ -19728,7 +19768,7 @@
 </file>
 
 <file path=ppt/slides/slide46.xml><?xml version="1.0" encoding="utf-8"?>
-<p:sld xmlns:a="http://schemas.openxmlformats.org/drawingml/2006/main" xmlns:p="http://schemas.openxmlformats.org/presentationml/2006/main" xmlns:r="http://schemas.openxmlformats.org/officeDocument/2006/relationships">
+<p:sld xmlns:a="http://schemas.openxmlformats.org/drawingml/2006/main" xmlns:r="http://schemas.openxmlformats.org/officeDocument/2006/relationships" xmlns:p="http://schemas.openxmlformats.org/presentationml/2006/main">
   <p:cSld>
     <p:spTree>
       <p:nvGrpSpPr>
@@ -19736,272 +19776,14 @@
         <p:cNvGrpSpPr/>
         <p:nvPr/>
       </p:nvGrpSpPr>
-      <p:grpSpPr/>
-      <p:sp>
-        <p:nvSpPr>
-          <p:cNvPr id="2" name="Rectangle 1"/>
-          <p:cNvSpPr/>
-          <p:nvPr/>
-        </p:nvSpPr>
-        <p:spPr>
-          <a:xfrm>
-            <a:off x="0" y="0"/>
-            <a:ext cx="12191695" cy="6858000"/>
-          </a:xfrm>
-          <a:prstGeom prst="rect">
-            <a:avLst/>
-          </a:prstGeom>
-          <a:solidFill>
-            <a:srgbClr val="1B2A4A"/>
-          </a:solidFill>
-          <a:ln>
-            <a:noFill/>
-          </a:ln>
-          <a:effectLst/>
-        </p:spPr>
-        <p:style>
-          <a:lnRef idx="1">
-            <a:schemeClr val="accent1"/>
-          </a:lnRef>
-          <a:fillRef idx="3">
-            <a:schemeClr val="accent1"/>
-          </a:fillRef>
-          <a:effectRef idx="2">
-            <a:schemeClr val="accent1"/>
-          </a:effectRef>
-          <a:fontRef idx="minor">
-            <a:schemeClr val="lt1"/>
-          </a:fontRef>
-        </p:style>
-        <p:txBody>
-          <a:bodyPr rtlCol="0" anchor="ctr"/>
-          <a:lstStyle/>
-          <a:p>
-            <a:pPr algn="ctr"/>
-          </a:p>
-        </p:txBody>
-      </p:sp>
-      <p:sp>
-        <p:nvSpPr>
-          <p:cNvPr id="3" name="TextBox 2"/>
-          <p:cNvSpPr txBox="1"/>
-          <p:nvPr/>
-        </p:nvSpPr>
-        <p:spPr>
-          <a:xfrm>
-            <a:off x="822960" y="2743200"/>
-            <a:ext cx="10515600" cy="1097280"/>
-          </a:xfrm>
-          <a:prstGeom prst="rect">
-            <a:avLst/>
-          </a:prstGeom>
-          <a:noFill/>
-        </p:spPr>
-        <p:txBody>
-          <a:bodyPr wrap="none">
-            <a:spAutoFit/>
-          </a:bodyPr>
-          <a:lstStyle/>
-          <a:p>
-            <a:pPr>
-              <a:defRPr sz="4800" b="1">
-                <a:solidFill>
-                  <a:srgbClr val="FFFFFF"/>
-                </a:solidFill>
-              </a:defRPr>
-            </a:pPr>
-            <a:r>
-              <a:t>Questions?</a:t>
-            </a:r>
-          </a:p>
-        </p:txBody>
-      </p:sp>
-      <p:sp>
-        <p:nvSpPr>
-          <p:cNvPr id="4" name="TextBox 3"/>
-          <p:cNvSpPr txBox="1"/>
-          <p:nvPr/>
-        </p:nvSpPr>
-        <p:spPr>
-          <a:xfrm>
-            <a:off x="822960" y="3749039"/>
-            <a:ext cx="10515600" cy="640080"/>
-          </a:xfrm>
-          <a:prstGeom prst="rect">
-            <a:avLst/>
-          </a:prstGeom>
-          <a:noFill/>
-        </p:spPr>
-        <p:txBody>
-          <a:bodyPr wrap="none">
-            <a:spAutoFit/>
-          </a:bodyPr>
-          <a:lstStyle/>
-          <a:p>
-            <a:pPr>
-              <a:defRPr sz="1800">
-                <a:solidFill>
-                  <a:srgbClr val="9FC5FF"/>
-                </a:solidFill>
-                <a:latin typeface="Consolas"/>
-              </a:defRPr>
-            </a:pPr>
-            <a:r>
-              <a:t>C:\apps\padb\tools   |   /padb-tools</a:t>
-            </a:r>
-          </a:p>
-        </p:txBody>
-      </p:sp>
-    </p:spTree>
-  </p:cSld>
-  <p:clrMapOvr>
-    <a:masterClrMapping/>
-  </p:clrMapOvr>
-</p:sld>
-</file>
-
-<file path=ppt/slides/slide47.xml><?xml version="1.0" encoding="utf-8"?>
-<p:sld xmlns:a="http://schemas.openxmlformats.org/drawingml/2006/main" xmlns:p="http://schemas.openxmlformats.org/presentationml/2006/main" xmlns:r="http://schemas.openxmlformats.org/officeDocument/2006/relationships">
-  <p:cSld>
-    <p:spTree>
-      <p:nvGrpSpPr>
-        <p:cNvPr id="1" name=""/>
-        <p:cNvGrpSpPr/>
-        <p:nvPr/>
-      </p:nvGrpSpPr>
-      <p:grpSpPr/>
-      <p:sp>
-        <p:nvSpPr>
-          <p:cNvPr id="2" name="Rectangle 1"/>
-          <p:cNvSpPr/>
-          <p:nvPr/>
-        </p:nvSpPr>
-        <p:spPr>
-          <a:xfrm>
-            <a:off x="0" y="0"/>
-            <a:ext cx="12191695" cy="6858000"/>
-          </a:xfrm>
-          <a:prstGeom prst="rect">
-            <a:avLst/>
-          </a:prstGeom>
-          <a:solidFill>
-            <a:srgbClr val="F2F4F8"/>
-          </a:solidFill>
-          <a:ln>
-            <a:noFill/>
-          </a:ln>
-          <a:effectLst/>
-        </p:spPr>
-        <p:style>
-          <a:lnRef idx="1">
-            <a:schemeClr val="accent1"/>
-          </a:lnRef>
-          <a:fillRef idx="3">
-            <a:schemeClr val="accent1"/>
-          </a:fillRef>
-          <a:effectRef idx="2">
-            <a:schemeClr val="accent1"/>
-          </a:effectRef>
-          <a:fontRef idx="minor">
-            <a:schemeClr val="lt1"/>
-          </a:fontRef>
-        </p:style>
-        <p:txBody>
-          <a:bodyPr rtlCol="0" anchor="ctr"/>
-          <a:lstStyle/>
-          <a:p>
-            <a:pPr algn="ctr"/>
-          </a:p>
-        </p:txBody>
-      </p:sp>
-      <p:sp>
-        <p:nvSpPr>
-          <p:cNvPr id="3" name="TextBox 2"/>
-          <p:cNvSpPr txBox="1"/>
-          <p:nvPr/>
-        </p:nvSpPr>
-        <p:spPr>
-          <a:xfrm>
-            <a:off x="822960" y="2743200"/>
-            <a:ext cx="10515600" cy="914400"/>
-          </a:xfrm>
-          <a:prstGeom prst="rect">
-            <a:avLst/>
-          </a:prstGeom>
-          <a:noFill/>
-        </p:spPr>
-        <p:txBody>
-          <a:bodyPr wrap="none">
-            <a:spAutoFit/>
-          </a:bodyPr>
-          <a:lstStyle/>
-          <a:p>
-            <a:pPr>
-              <a:defRPr sz="4400" b="1">
-                <a:solidFill>
-                  <a:srgbClr val="1B2A4A"/>
-                </a:solidFill>
-              </a:defRPr>
-            </a:pPr>
-            <a:r>
-              <a:t>Appendix</a:t>
-            </a:r>
-          </a:p>
-        </p:txBody>
-      </p:sp>
-      <p:sp>
-        <p:nvSpPr>
-          <p:cNvPr id="4" name="TextBox 3"/>
-          <p:cNvSpPr txBox="1"/>
-          <p:nvPr/>
-        </p:nvSpPr>
-        <p:spPr>
-          <a:xfrm>
-            <a:off x="822960" y="3566160"/>
-            <a:ext cx="10515600" cy="640080"/>
-          </a:xfrm>
-          <a:prstGeom prst="rect">
-            <a:avLst/>
-          </a:prstGeom>
-          <a:noFill/>
-        </p:spPr>
-        <p:txBody>
-          <a:bodyPr wrap="none">
-            <a:spAutoFit/>
-          </a:bodyPr>
-          <a:lstStyle/>
-          <a:p>
-            <a:pPr>
-              <a:defRPr sz="2200">
-                <a:solidFill>
-                  <a:srgbClr val="0066CC"/>
-                </a:solidFill>
-              </a:defRPr>
-            </a:pPr>
-            <a:r>
-              <a:t>Setting Up From Zero — Assumes No Prior Access</a:t>
-            </a:r>
-          </a:p>
-        </p:txBody>
-      </p:sp>
-    </p:spTree>
-  </p:cSld>
-  <p:clrMapOvr>
-    <a:masterClrMapping/>
-  </p:clrMapOvr>
-</p:sld>
-</file>
-
-<file path=ppt/slides/slide48.xml><?xml version="1.0" encoding="utf-8"?>
-<p:sld xmlns:a="http://schemas.openxmlformats.org/drawingml/2006/main" xmlns:p="http://schemas.openxmlformats.org/presentationml/2006/main" xmlns:r="http://schemas.openxmlformats.org/officeDocument/2006/relationships">
-  <p:cSld>
-    <p:spTree>
-      <p:nvGrpSpPr>
-        <p:cNvPr id="1" name=""/>
-        <p:cNvGrpSpPr/>
-        <p:nvPr/>
-      </p:nvGrpSpPr>
-      <p:grpSpPr/>
+      <p:grpSpPr>
+        <a:xfrm>
+          <a:off x="0" y="0"/>
+          <a:ext cx="0" cy="0"/>
+          <a:chOff x="0" y="0"/>
+          <a:chExt cx="0" cy="0"/>
+        </a:xfrm>
+      </p:grpSpPr>
       <p:sp>
         <p:nvSpPr>
           <p:cNvPr id="2" name="Rectangle 1"/>
@@ -20043,6 +19825,7 @@
           <a:lstStyle/>
           <a:p>
             <a:pPr algn="ctr"/>
+            <a:endParaRPr/>
           </a:p>
         </p:txBody>
       </p:sp>
@@ -20113,7 +19896,7 @@
               </a:defRPr>
             </a:pPr>
             <a:r>
-              <a:t>Getting the Code</a:t>
+              <a:t>First Commands to Verify Your Setup</a:t>
             </a:r>
           </a:p>
         </p:txBody>
@@ -20219,7 +20002,7 @@
               </a:defRPr>
             </a:pPr>
             <a:r>
-              <a:t>48</a:t>
+              <a:t>45</a:t>
             </a:r>
           </a:p>
         </p:txBody>
@@ -20252,13 +20035,13 @@
               </a:spcAft>
             </a:pPr>
             <a:r>
-              <a:rPr sz="1900">
+              <a:rPr sz="1800">
                 <a:solidFill>
                   <a:srgbClr val="1B2A4A"/>
                 </a:solidFill>
                 <a:latin typeface="Segoe UI"/>
               </a:rPr>
-              <a:t>•  This repo isn't on a company-wide share by default — copy it from:</a:t>
+              <a:t>•  From inside the tools folder, confirm everything imports cleanly:</a:t>
             </a:r>
           </a:p>
         </p:txBody>
@@ -20304,7 +20087,7 @@
           </a:fontRef>
         </p:style>
         <p:txBody>
-          <a:bodyPr rtlCol="0" anchor="t" wrap="square" lIns="228600" rIns="228600" tIns="164592" bIns="164592"/>
+          <a:bodyPr wrap="square" lIns="228600" tIns="164592" rIns="228600" bIns="164592" rtlCol="0" anchor="t"/>
           <a:lstStyle/>
           <a:p>
             <a:pPr algn="l">
@@ -20313,13 +20096,13 @@
               </a:spcAft>
             </a:pPr>
             <a:r>
-              <a:rPr sz="1350">
+              <a:rPr sz="1450">
                 <a:solidFill>
                   <a:srgbClr val="E6E6E6"/>
                 </a:solidFill>
                 <a:latin typeface="Consolas"/>
               </a:rPr>
-              <a:t>\\srsnas01.srs.is.keysight.com\prod\MIDRF3\SG6311A\Padb-tools\tools</a:t>
+              <a:t>py -c "import padb_run, padb_v2, padb_config"</a:t>
             </a:r>
           </a:p>
         </p:txBody>
@@ -20332,7 +20115,7 @@
         </p:nvSpPr>
         <p:spPr>
           <a:xfrm>
-            <a:off x="548640" y="2788920"/>
+            <a:off x="548640" y="2743200"/>
             <a:ext cx="11064240" cy="365760"/>
           </a:xfrm>
           <a:prstGeom prst="rect">
@@ -20352,399 +20135,65 @@
               </a:spcAft>
             </a:pPr>
             <a:r>
+              <a:rPr sz="1700">
+                <a:solidFill>
+                  <a:srgbClr val="1B2A4A"/>
+                </a:solidFill>
+                <a:latin typeface="Segoe UI"/>
+              </a:rPr>
+              <a:t>•  No output and no traceback = success</a:t>
+            </a:r>
+          </a:p>
+        </p:txBody>
+      </p:sp>
+      <p:sp>
+        <p:nvSpPr>
+          <p:cNvPr id="11" name="TextBox 10"/>
+          <p:cNvSpPr txBox="1"/>
+          <p:nvPr/>
+        </p:nvSpPr>
+        <p:spPr>
+          <a:xfrm>
+            <a:off x="548640" y="3291840"/>
+            <a:ext cx="11064240" cy="365760"/>
+          </a:xfrm>
+          <a:prstGeom prst="rect">
+            <a:avLst/>
+          </a:prstGeom>
+          <a:noFill/>
+        </p:spPr>
+        <p:txBody>
+          <a:bodyPr wrap="square">
+            <a:spAutoFit/>
+          </a:bodyPr>
+          <a:lstStyle/>
+          <a:p>
+            <a:pPr>
+              <a:spcAft>
+                <a:spcPts val="1000"/>
+              </a:spcAft>
+            </a:pPr>
+            <a:r>
               <a:rPr sz="1800">
                 <a:solidFill>
                   <a:srgbClr val="1B2A4A"/>
                 </a:solidFill>
                 <a:latin typeface="Segoe UI"/>
               </a:rPr>
-              <a:t>•  Copy that whole "tools" folder to a local path, e.g. C:\apps\padb\tools</a:t>
-            </a:r>
-          </a:p>
-        </p:txBody>
-      </p:sp>
-      <p:sp>
-        <p:nvSpPr>
-          <p:cNvPr id="11" name="TextBox 10"/>
-          <p:cNvSpPr txBox="1"/>
-          <p:nvPr/>
-        </p:nvSpPr>
-        <p:spPr>
-          <a:xfrm>
-            <a:off x="548640" y="3429000"/>
-            <a:ext cx="11064240" cy="914400"/>
-          </a:xfrm>
-          <a:prstGeom prst="rect">
-            <a:avLst/>
-          </a:prstGeom>
-          <a:noFill/>
-        </p:spPr>
-        <p:txBody>
-          <a:bodyPr wrap="square">
-            <a:spAutoFit/>
-          </a:bodyPr>
-          <a:lstStyle/>
-          <a:p>
-            <a:pPr>
-              <a:spcAft>
-                <a:spcPts val="1000"/>
-              </a:spcAft>
-            </a:pPr>
-            <a:r>
-              <a:rPr sz="1700">
-                <a:solidFill>
-                  <a:srgbClr val="1B2A4A"/>
-                </a:solidFill>
-                <a:latin typeface="Segoe UI"/>
-              </a:rPr>
-              <a:t>•  padb_batch.py is bundled directly inside the tools folder (added 2026-08-05) —</a:t>
-            </a:r>
-          </a:p>
-          <a:p>
-            <a:pPr lvl="1">
-              <a:spcAft>
-                <a:spcPts val="600"/>
-              </a:spcAft>
-            </a:pPr>
-            <a:r>
-              <a:rPr sz="1500">
-                <a:solidFill>
-                  <a:srgbClr val="555555"/>
-                </a:solidFill>
-                <a:latin typeface="Segoe UI"/>
-              </a:rPr>
-              <a:t>–  no separate dependency to track down; the whole repo is self-contained</a:t>
-            </a:r>
-          </a:p>
-        </p:txBody>
-      </p:sp>
-      <p:sp>
-        <p:nvSpPr>
-          <p:cNvPr id="12" name="TextBox 11"/>
-          <p:cNvSpPr txBox="1"/>
-          <p:nvPr/>
-        </p:nvSpPr>
-        <p:spPr>
-          <a:xfrm>
-            <a:off x="548640" y="4480560"/>
-            <a:ext cx="11064240" cy="457200"/>
-          </a:xfrm>
-          <a:prstGeom prst="rect">
-            <a:avLst/>
-          </a:prstGeom>
-          <a:noFill/>
-        </p:spPr>
-        <p:txBody>
-          <a:bodyPr wrap="square">
-            <a:spAutoFit/>
-          </a:bodyPr>
-          <a:lstStyle/>
-          <a:p>
-            <a:pPr>
-              <a:spcAft>
-                <a:spcPts val="1000"/>
-              </a:spcAft>
-            </a:pPr>
-            <a:r>
-              <a:rPr sz="1650">
-                <a:solidFill>
-                  <a:srgbClr val="1B2A4A"/>
-                </a:solidFill>
-                <a:latin typeface="Segoe UI"/>
-              </a:rPr>
-              <a:t>•  Then follow the Prerequisites and Per-User Config slides earlier in this deck</a:t>
-            </a:r>
-          </a:p>
-        </p:txBody>
-      </p:sp>
-    </p:spTree>
-  </p:cSld>
-  <p:clrMapOvr>
-    <a:masterClrMapping/>
-  </p:clrMapOvr>
-</p:sld>
-</file>
-
-<file path=ppt/slides/slide49.xml><?xml version="1.0" encoding="utf-8"?>
-<p:sld xmlns:a="http://schemas.openxmlformats.org/drawingml/2006/main" xmlns:p="http://schemas.openxmlformats.org/presentationml/2006/main" xmlns:r="http://schemas.openxmlformats.org/officeDocument/2006/relationships">
-  <p:cSld>
-    <p:spTree>
-      <p:nvGrpSpPr>
-        <p:cNvPr id="1" name=""/>
-        <p:cNvGrpSpPr/>
-        <p:nvPr/>
-      </p:nvGrpSpPr>
-      <p:grpSpPr/>
-      <p:sp>
-        <p:nvSpPr>
-          <p:cNvPr id="2" name="Rectangle 1"/>
+              <a:t>•  Then generate your first job.json from any pod you have access to:</a:t>
+            </a:r>
+          </a:p>
+        </p:txBody>
+      </p:sp>
+      <p:sp>
+        <p:nvSpPr>
+          <p:cNvPr id="12" name="Rounded Rectangle 11"/>
           <p:cNvSpPr/>
           <p:nvPr/>
         </p:nvSpPr>
         <p:spPr>
           <a:xfrm>
-            <a:off x="0" y="0"/>
-            <a:ext cx="12191695" cy="6858000"/>
-          </a:xfrm>
-          <a:prstGeom prst="rect">
-            <a:avLst/>
-          </a:prstGeom>
-          <a:solidFill>
-            <a:srgbClr val="FFFFFF"/>
-          </a:solidFill>
-          <a:ln>
-            <a:noFill/>
-          </a:ln>
-          <a:effectLst/>
-        </p:spPr>
-        <p:style>
-          <a:lnRef idx="1">
-            <a:schemeClr val="accent1"/>
-          </a:lnRef>
-          <a:fillRef idx="3">
-            <a:schemeClr val="accent1"/>
-          </a:fillRef>
-          <a:effectRef idx="2">
-            <a:schemeClr val="accent1"/>
-          </a:effectRef>
-          <a:fontRef idx="minor">
-            <a:schemeClr val="lt1"/>
-          </a:fontRef>
-        </p:style>
-        <p:txBody>
-          <a:bodyPr rtlCol="0" anchor="ctr"/>
-          <a:lstStyle/>
-          <a:p>
-            <a:pPr algn="ctr"/>
-          </a:p>
-        </p:txBody>
-      </p:sp>
-      <p:sp>
-        <p:nvSpPr>
-          <p:cNvPr id="3" name="TextBox 2"/>
-          <p:cNvSpPr txBox="1"/>
-          <p:nvPr/>
-        </p:nvSpPr>
-        <p:spPr>
-          <a:xfrm>
-            <a:off x="548640" y="320040"/>
-            <a:ext cx="7315200" cy="365760"/>
-          </a:xfrm>
-          <a:prstGeom prst="rect">
-            <a:avLst/>
-          </a:prstGeom>
-          <a:noFill/>
-        </p:spPr>
-        <p:txBody>
-          <a:bodyPr wrap="none">
-            <a:spAutoFit/>
-          </a:bodyPr>
-          <a:lstStyle/>
-          <a:p>
-            <a:pPr>
-              <a:defRPr sz="1600" b="1">
-                <a:solidFill>
-                  <a:srgbClr val="0066CC"/>
-                </a:solidFill>
-                <a:latin typeface="Segoe UI"/>
-              </a:defRPr>
-            </a:pPr>
-            <a:r>
-              <a:t>Appendix</a:t>
-            </a:r>
-          </a:p>
-        </p:txBody>
-      </p:sp>
-      <p:sp>
-        <p:nvSpPr>
-          <p:cNvPr id="4" name="TextBox 3"/>
-          <p:cNvSpPr txBox="1"/>
-          <p:nvPr/>
-        </p:nvSpPr>
-        <p:spPr>
-          <a:xfrm>
-            <a:off x="548640" y="658368"/>
-            <a:ext cx="11064240" cy="822960"/>
-          </a:xfrm>
-          <a:prstGeom prst="rect">
-            <a:avLst/>
-          </a:prstGeom>
-          <a:noFill/>
-        </p:spPr>
-        <p:txBody>
-          <a:bodyPr wrap="square">
-            <a:spAutoFit/>
-          </a:bodyPr>
-          <a:lstStyle/>
-          <a:p>
-            <a:pPr>
-              <a:defRPr sz="3200" b="1">
-                <a:solidFill>
-                  <a:srgbClr val="1B2A4A"/>
-                </a:solidFill>
-                <a:latin typeface="Segoe UI"/>
-              </a:defRPr>
-            </a:pPr>
-            <a:r>
-              <a:t>First Commands to Verify Your Setup</a:t>
-            </a:r>
-          </a:p>
-        </p:txBody>
-      </p:sp>
-      <p:cxnSp>
-        <p:nvCxnSpPr>
-          <p:cNvPr id="5" name="Connector 4"/>
-          <p:cNvCxnSpPr/>
-          <p:nvPr/>
-        </p:nvCxnSpPr>
-        <p:spPr>
-          <a:xfrm>
-            <a:off x="548640" y="1417320"/>
-            <a:ext cx="11091672" cy="0"/>
-          </a:xfrm>
-          <a:prstGeom prst="line">
-            <a:avLst/>
-          </a:prstGeom>
-          <a:ln w="28575">
-            <a:solidFill>
-              <a:srgbClr val="0066CC"/>
-            </a:solidFill>
-          </a:ln>
-        </p:spPr>
-        <p:style>
-          <a:lnRef idx="2">
-            <a:schemeClr val="accent1"/>
-          </a:lnRef>
-          <a:fillRef idx="0">
-            <a:schemeClr val="accent1"/>
-          </a:fillRef>
-          <a:effectRef idx="1">
-            <a:schemeClr val="accent1"/>
-          </a:effectRef>
-          <a:fontRef idx="minor">
-            <a:schemeClr val="tx1"/>
-          </a:fontRef>
-        </p:style>
-      </p:cxnSp>
-      <p:sp>
-        <p:nvSpPr>
-          <p:cNvPr id="6" name="TextBox 5"/>
-          <p:cNvSpPr txBox="1"/>
-          <p:nvPr/>
-        </p:nvSpPr>
-        <p:spPr>
-          <a:xfrm>
-            <a:off x="548640" y="6473952"/>
-            <a:ext cx="8229600" cy="320040"/>
-          </a:xfrm>
-          <a:prstGeom prst="rect">
-            <a:avLst/>
-          </a:prstGeom>
-          <a:noFill/>
-        </p:spPr>
-        <p:txBody>
-          <a:bodyPr wrap="none">
-            <a:spAutoFit/>
-          </a:bodyPr>
-          <a:lstStyle/>
-          <a:p>
-            <a:pPr>
-              <a:defRPr sz="1100">
-                <a:solidFill>
-                  <a:srgbClr val="555555"/>
-                </a:solidFill>
-                <a:latin typeface="Segoe UI"/>
-              </a:defRPr>
-            </a:pPr>
-            <a:r>
-              <a:t>padb-tools</a:t>
-            </a:r>
-          </a:p>
-        </p:txBody>
-      </p:sp>
-      <p:sp>
-        <p:nvSpPr>
-          <p:cNvPr id="7" name="TextBox 6"/>
-          <p:cNvSpPr txBox="1"/>
-          <p:nvPr/>
-        </p:nvSpPr>
-        <p:spPr>
-          <a:xfrm>
-            <a:off x="11338560" y="6473952"/>
-            <a:ext cx="548640" cy="320040"/>
-          </a:xfrm>
-          <a:prstGeom prst="rect">
-            <a:avLst/>
-          </a:prstGeom>
-          <a:noFill/>
-        </p:spPr>
-        <p:txBody>
-          <a:bodyPr wrap="none">
-            <a:spAutoFit/>
-          </a:bodyPr>
-          <a:lstStyle/>
-          <a:p>
-            <a:pPr algn="r">
-              <a:defRPr sz="1100">
-                <a:solidFill>
-                  <a:srgbClr val="555555"/>
-                </a:solidFill>
-              </a:defRPr>
-            </a:pPr>
-            <a:r>
-              <a:t>49</a:t>
-            </a:r>
-          </a:p>
-        </p:txBody>
-      </p:sp>
-      <p:sp>
-        <p:nvSpPr>
-          <p:cNvPr id="8" name="TextBox 7"/>
-          <p:cNvSpPr txBox="1"/>
-          <p:nvPr/>
-        </p:nvSpPr>
-        <p:spPr>
-          <a:xfrm>
-            <a:off x="548640" y="1691640"/>
-            <a:ext cx="11064240" cy="365760"/>
-          </a:xfrm>
-          <a:prstGeom prst="rect">
-            <a:avLst/>
-          </a:prstGeom>
-          <a:noFill/>
-        </p:spPr>
-        <p:txBody>
-          <a:bodyPr wrap="square">
-            <a:spAutoFit/>
-          </a:bodyPr>
-          <a:lstStyle/>
-          <a:p>
-            <a:pPr>
-              <a:spcAft>
-                <a:spcPts val="1000"/>
-              </a:spcAft>
-            </a:pPr>
-            <a:r>
-              <a:rPr sz="1800">
-                <a:solidFill>
-                  <a:srgbClr val="1B2A4A"/>
-                </a:solidFill>
-                <a:latin typeface="Segoe UI"/>
-              </a:rPr>
-              <a:t>•  From inside the tools folder, confirm everything imports cleanly:</a:t>
-            </a:r>
-          </a:p>
-        </p:txBody>
-      </p:sp>
-      <p:sp>
-        <p:nvSpPr>
-          <p:cNvPr id="9" name="Rounded Rectangle 8"/>
-          <p:cNvSpPr/>
-          <p:nvPr/>
-        </p:nvSpPr>
-        <p:spPr>
-          <a:xfrm>
-            <a:off x="548640" y="2103120"/>
+            <a:off x="548640" y="3703320"/>
             <a:ext cx="11064240" cy="502920"/>
           </a:xfrm>
           <a:prstGeom prst="roundRect">
@@ -20777,7 +20226,7 @@
           </a:fontRef>
         </p:style>
         <p:txBody>
-          <a:bodyPr rtlCol="0" anchor="t" wrap="square" lIns="228600" rIns="228600" tIns="164592" bIns="164592"/>
+          <a:bodyPr wrap="square" lIns="228600" tIns="164592" rIns="228600" bIns="164592" rtlCol="0" anchor="t"/>
           <a:lstStyle/>
           <a:p>
             <a:pPr algn="l">
@@ -20792,21 +20241,21 @@
                 </a:solidFill>
                 <a:latin typeface="Consolas"/>
               </a:rPr>
-              <a:t>py -c "import padb_run, padb_v2, padb_config"</a:t>
-            </a:r>
-          </a:p>
-        </p:txBody>
-      </p:sp>
-      <p:sp>
-        <p:nvSpPr>
-          <p:cNvPr id="10" name="TextBox 9"/>
-          <p:cNvSpPr txBox="1"/>
-          <p:nvPr/>
-        </p:nvSpPr>
-        <p:spPr>
-          <a:xfrm>
-            <a:off x="548640" y="2743200"/>
-            <a:ext cx="11064240" cy="365760"/>
+              <a:t>py padb_make_job.py YourPod.pod --module YourModule</a:t>
+            </a:r>
+          </a:p>
+        </p:txBody>
+      </p:sp>
+      <p:sp>
+        <p:nvSpPr>
+          <p:cNvPr id="13" name="TextBox 12"/>
+          <p:cNvSpPr txBox="1"/>
+          <p:nvPr/>
+        </p:nvSpPr>
+        <p:spPr>
+          <a:xfrm>
+            <a:off x="548640" y="4343400"/>
+            <a:ext cx="11064240" cy="1463040"/>
           </a:xfrm>
           <a:prstGeom prst="rect">
             <a:avLst/>
@@ -20831,21 +20280,159 @@
                 </a:solidFill>
                 <a:latin typeface="Segoe UI"/>
               </a:rPr>
-              <a:t>•  No output and no traceback = success</a:t>
-            </a:r>
-          </a:p>
-        </p:txBody>
-      </p:sp>
-      <p:sp>
-        <p:nvSpPr>
-          <p:cNvPr id="11" name="TextBox 10"/>
-          <p:cNvSpPr txBox="1"/>
-          <p:nvPr/>
-        </p:nvSpPr>
-        <p:spPr>
-          <a:xfrm>
-            <a:off x="548640" y="3291840"/>
-            <a:ext cx="11064240" cy="365760"/>
+              <a:t>•  If PADB-R.exe launches and a real window briefly appears, you're fully set up</a:t>
+            </a:r>
+          </a:p>
+          <a:p>
+            <a:pPr>
+              <a:spcAft>
+                <a:spcPts val="1000"/>
+              </a:spcAft>
+            </a:pPr>
+            <a:r>
+              <a:rPr sz="1700">
+                <a:solidFill>
+                  <a:srgbClr val="1B2A4A"/>
+                </a:solidFill>
+                <a:latin typeface="Segoe UI"/>
+              </a:rPr>
+              <a:t>•  Stuck? GETTING_STARTED.md → Quick_Start.md, or type /padb-tools once you're</a:t>
+            </a:r>
+          </a:p>
+          <a:p>
+            <a:pPr lvl="1">
+              <a:spcAft>
+                <a:spcPts val="600"/>
+              </a:spcAft>
+            </a:pPr>
+            <a:r>
+              <a:rPr sz="1500">
+                <a:solidFill>
+                  <a:srgbClr val="555555"/>
+                </a:solidFill>
+                <a:latin typeface="Segoe UI"/>
+              </a:rPr>
+              <a:t>–  working inside the repo</a:t>
+            </a:r>
+          </a:p>
+        </p:txBody>
+      </p:sp>
+    </p:spTree>
+  </p:cSld>
+  <p:clrMapOvr>
+    <a:masterClrMapping/>
+  </p:clrMapOvr>
+</p:sld>
+</file>
+
+<file path=ppt/slides/slide5.xml><?xml version="1.0" encoding="utf-8"?>
+<p:sld xmlns:a="http://schemas.openxmlformats.org/drawingml/2006/main" xmlns:r="http://schemas.openxmlformats.org/officeDocument/2006/relationships" xmlns:p="http://schemas.openxmlformats.org/presentationml/2006/main">
+  <p:cSld>
+    <p:spTree>
+      <p:nvGrpSpPr>
+        <p:cNvPr id="1" name=""/>
+        <p:cNvGrpSpPr/>
+        <p:nvPr/>
+      </p:nvGrpSpPr>
+      <p:grpSpPr>
+        <a:xfrm>
+          <a:off x="0" y="0"/>
+          <a:ext cx="0" cy="0"/>
+          <a:chOff x="0" y="0"/>
+          <a:chExt cx="0" cy="0"/>
+        </a:xfrm>
+      </p:grpSpPr>
+      <p:sp>
+        <p:nvSpPr>
+          <p:cNvPr id="2" name="Rectangle 1"/>
+          <p:cNvSpPr/>
+          <p:nvPr/>
+        </p:nvSpPr>
+        <p:spPr>
+          <a:xfrm>
+            <a:off x="0" y="0"/>
+            <a:ext cx="12191695" cy="6858000"/>
+          </a:xfrm>
+          <a:prstGeom prst="rect">
+            <a:avLst/>
+          </a:prstGeom>
+          <a:solidFill>
+            <a:srgbClr val="FFFFFF"/>
+          </a:solidFill>
+          <a:ln>
+            <a:noFill/>
+          </a:ln>
+          <a:effectLst/>
+        </p:spPr>
+        <p:style>
+          <a:lnRef idx="1">
+            <a:schemeClr val="accent1"/>
+          </a:lnRef>
+          <a:fillRef idx="3">
+            <a:schemeClr val="accent1"/>
+          </a:fillRef>
+          <a:effectRef idx="2">
+            <a:schemeClr val="accent1"/>
+          </a:effectRef>
+          <a:fontRef idx="minor">
+            <a:schemeClr val="lt1"/>
+          </a:fontRef>
+        </p:style>
+        <p:txBody>
+          <a:bodyPr rtlCol="0" anchor="ctr"/>
+          <a:lstStyle/>
+          <a:p>
+            <a:pPr algn="ctr"/>
+            <a:endParaRPr/>
+          </a:p>
+        </p:txBody>
+      </p:sp>
+      <p:sp>
+        <p:nvSpPr>
+          <p:cNvPr id="3" name="TextBox 2"/>
+          <p:cNvSpPr txBox="1"/>
+          <p:nvPr/>
+        </p:nvSpPr>
+        <p:spPr>
+          <a:xfrm>
+            <a:off x="548640" y="320040"/>
+            <a:ext cx="7315200" cy="365760"/>
+          </a:xfrm>
+          <a:prstGeom prst="rect">
+            <a:avLst/>
+          </a:prstGeom>
+          <a:noFill/>
+        </p:spPr>
+        <p:txBody>
+          <a:bodyPr wrap="none">
+            <a:spAutoFit/>
+          </a:bodyPr>
+          <a:lstStyle/>
+          <a:p>
+            <a:pPr>
+              <a:defRPr sz="1600" b="1">
+                <a:solidFill>
+                  <a:srgbClr val="0066CC"/>
+                </a:solidFill>
+                <a:latin typeface="Segoe UI"/>
+              </a:defRPr>
+            </a:pPr>
+            <a:r>
+              <a:t>PADB Simple</a:t>
+            </a:r>
+          </a:p>
+        </p:txBody>
+      </p:sp>
+      <p:sp>
+        <p:nvSpPr>
+          <p:cNvPr id="4" name="TextBox 3"/>
+          <p:cNvSpPr txBox="1"/>
+          <p:nvPr/>
+        </p:nvSpPr>
+        <p:spPr>
+          <a:xfrm>
+            <a:off x="548640" y="658368"/>
+            <a:ext cx="11064240" cy="822960"/>
           </a:xfrm>
           <a:prstGeom prst="rect">
             <a:avLst/>
@@ -20859,32 +20446,518 @@
           <a:lstStyle/>
           <a:p>
             <a:pPr>
+              <a:defRPr sz="3200" b="1">
+                <a:solidFill>
+                  <a:srgbClr val="1B2A4A"/>
+                </a:solidFill>
+                <a:latin typeface="Segoe UI"/>
+              </a:defRPr>
+            </a:pPr>
+            <a:r>
+              <a:t>What It Is</a:t>
+            </a:r>
+          </a:p>
+        </p:txBody>
+      </p:sp>
+      <p:cxnSp>
+        <p:nvCxnSpPr>
+          <p:cNvPr id="5" name="Connector 4"/>
+          <p:cNvCxnSpPr/>
+          <p:nvPr/>
+        </p:nvCxnSpPr>
+        <p:spPr>
+          <a:xfrm>
+            <a:off x="548640" y="1417320"/>
+            <a:ext cx="11091672" cy="0"/>
+          </a:xfrm>
+          <a:prstGeom prst="line">
+            <a:avLst/>
+          </a:prstGeom>
+          <a:ln w="28575">
+            <a:solidFill>
+              <a:srgbClr val="0066CC"/>
+            </a:solidFill>
+          </a:ln>
+        </p:spPr>
+        <p:style>
+          <a:lnRef idx="2">
+            <a:schemeClr val="accent1"/>
+          </a:lnRef>
+          <a:fillRef idx="0">
+            <a:schemeClr val="accent1"/>
+          </a:fillRef>
+          <a:effectRef idx="1">
+            <a:schemeClr val="accent1"/>
+          </a:effectRef>
+          <a:fontRef idx="minor">
+            <a:schemeClr val="tx1"/>
+          </a:fontRef>
+        </p:style>
+      </p:cxnSp>
+      <p:sp>
+        <p:nvSpPr>
+          <p:cNvPr id="6" name="TextBox 5"/>
+          <p:cNvSpPr txBox="1"/>
+          <p:nvPr/>
+        </p:nvSpPr>
+        <p:spPr>
+          <a:xfrm>
+            <a:off x="548640" y="6473952"/>
+            <a:ext cx="8229600" cy="320040"/>
+          </a:xfrm>
+          <a:prstGeom prst="rect">
+            <a:avLst/>
+          </a:prstGeom>
+          <a:noFill/>
+        </p:spPr>
+        <p:txBody>
+          <a:bodyPr wrap="none">
+            <a:spAutoFit/>
+          </a:bodyPr>
+          <a:lstStyle/>
+          <a:p>
+            <a:pPr>
+              <a:defRPr sz="1100">
+                <a:solidFill>
+                  <a:srgbClr val="555555"/>
+                </a:solidFill>
+                <a:latin typeface="Segoe UI"/>
+              </a:defRPr>
+            </a:pPr>
+            <a:r>
+              <a:t>padb-tools</a:t>
+            </a:r>
+          </a:p>
+        </p:txBody>
+      </p:sp>
+      <p:sp>
+        <p:nvSpPr>
+          <p:cNvPr id="7" name="TextBox 6"/>
+          <p:cNvSpPr txBox="1"/>
+          <p:nvPr/>
+        </p:nvSpPr>
+        <p:spPr>
+          <a:xfrm>
+            <a:off x="11338560" y="6473952"/>
+            <a:ext cx="548640" cy="320040"/>
+          </a:xfrm>
+          <a:prstGeom prst="rect">
+            <a:avLst/>
+          </a:prstGeom>
+          <a:noFill/>
+        </p:spPr>
+        <p:txBody>
+          <a:bodyPr wrap="none">
+            <a:spAutoFit/>
+          </a:bodyPr>
+          <a:lstStyle/>
+          <a:p>
+            <a:pPr algn="r">
+              <a:defRPr sz="1100">
+                <a:solidFill>
+                  <a:srgbClr val="555555"/>
+                </a:solidFill>
+              </a:defRPr>
+            </a:pPr>
+            <a:r>
+              <a:t>5</a:t>
+            </a:r>
+          </a:p>
+        </p:txBody>
+      </p:sp>
+      <p:sp>
+        <p:nvSpPr>
+          <p:cNvPr id="8" name="TextBox 7"/>
+          <p:cNvSpPr txBox="1"/>
+          <p:nvPr/>
+        </p:nvSpPr>
+        <p:spPr>
+          <a:xfrm>
+            <a:off x="548640" y="1645920"/>
+            <a:ext cx="11064240" cy="4754880"/>
+          </a:xfrm>
+          <a:prstGeom prst="rect">
+            <a:avLst/>
+          </a:prstGeom>
+          <a:noFill/>
+        </p:spPr>
+        <p:txBody>
+          <a:bodyPr wrap="square">
+            <a:spAutoFit/>
+          </a:bodyPr>
+          <a:lstStyle/>
+          <a:p>
+            <a:pPr>
               <a:spcAft>
                 <a:spcPts val="1000"/>
               </a:spcAft>
             </a:pPr>
             <a:r>
-              <a:rPr sz="1800">
+              <a:rPr sz="1900">
                 <a:solidFill>
                   <a:srgbClr val="1B2A4A"/>
                 </a:solidFill>
                 <a:latin typeface="Segoe UI"/>
               </a:rPr>
-              <a:t>•  Then generate your first job.json from any pod you have access to:</a:t>
-            </a:r>
-          </a:p>
-        </p:txBody>
-      </p:sp>
-      <p:sp>
-        <p:nvSpPr>
-          <p:cNvPr id="12" name="Rounded Rectangle 11"/>
+              <a:t>•  A direct, static replacement for the old Perl PADB::Simple tool</a:t>
+            </a:r>
+          </a:p>
+          <a:p>
+            <a:pPr>
+              <a:spcAft>
+                <a:spcPts val="1000"/>
+              </a:spcAft>
+            </a:pPr>
+            <a:r>
+              <a:rPr sz="1900">
+                <a:solidFill>
+                  <a:srgbClr val="1B2A4A"/>
+                </a:solidFill>
+                <a:latin typeface="Segoe UI"/>
+              </a:rPr>
+              <a:t>•  Zero custom plotting or statistics — no scatter, no tolerance intervals, no filters</a:t>
+            </a:r>
+          </a:p>
+          <a:p>
+            <a:pPr>
+              <a:spcAft>
+                <a:spcPts val="1000"/>
+              </a:spcAft>
+            </a:pPr>
+            <a:r>
+              <a:rPr sz="1900">
+                <a:solidFill>
+                  <a:srgbClr val="1B2A4A"/>
+                </a:solidFill>
+                <a:latin typeface="Segoe UI"/>
+              </a:rPr>
+              <a:t>•  Drives PADB-R's own native rendering: OutputConfig_OutputGraph=1, GraphFormat=png,pdf</a:t>
+            </a:r>
+          </a:p>
+          <a:p>
+            <a:pPr>
+              <a:spcAft>
+                <a:spcPts val="1000"/>
+              </a:spcAft>
+            </a:pPr>
+            <a:r>
+              <a:rPr sz="1900">
+                <a:solidFill>
+                  <a:srgbClr val="1B2A4A"/>
+                </a:solidFill>
+                <a:latin typeface="Segoe UI"/>
+              </a:rPr>
+              <a:t>•  Wraps the native PNG/PDF output in a bare gallery page, one card per image</a:t>
+            </a:r>
+          </a:p>
+          <a:p>
+            <a:pPr>
+              <a:spcAft>
+                <a:spcPts val="1000"/>
+              </a:spcAft>
+            </a:pPr>
+            <a:r>
+              <a:rPr sz="1900">
+                <a:solidFill>
+                  <a:srgbClr val="1B2A4A"/>
+                </a:solidFill>
+                <a:latin typeface="Segoe UI"/>
+              </a:rPr>
+              <a:t>•  Metadata table dumped from the pod's own extraction settings</a:t>
+            </a:r>
+          </a:p>
+          <a:p>
+            <a:pPr>
+              <a:spcAft>
+                <a:spcPts val="1000"/>
+              </a:spcAft>
+            </a:pPr>
+            <a:r>
+              <a:rPr sz="1900">
+                <a:solidFill>
+                  <a:srgbClr val="1B2A4A"/>
+                </a:solidFill>
+                <a:latin typeface="Segoe UI"/>
+              </a:rPr>
+              <a:t>•  Download links for the original .sao / .pod / .txt / .csv files</a:t>
+            </a:r>
+          </a:p>
+          <a:p>
+            <a:pPr>
+              <a:spcAft>
+                <a:spcPts val="1000"/>
+              </a:spcAft>
+            </a:pPr>
+            <a:r>
+              <a:rPr sz="1900">
+                <a:solidFill>
+                  <a:srgbClr val="1B2A4A"/>
+                </a:solidFill>
+                <a:latin typeface="Segoe UI"/>
+              </a:rPr>
+              <a:t>•  Best for: a quick static report, or matching exactly what the legacy tool produced</a:t>
+            </a:r>
+          </a:p>
+        </p:txBody>
+      </p:sp>
+    </p:spTree>
+  </p:cSld>
+  <p:clrMapOvr>
+    <a:masterClrMapping/>
+  </p:clrMapOvr>
+</p:sld>
+</file>
+
+<file path=ppt/slides/slide6.xml><?xml version="1.0" encoding="utf-8"?>
+<p:sld xmlns:a="http://schemas.openxmlformats.org/drawingml/2006/main" xmlns:r="http://schemas.openxmlformats.org/officeDocument/2006/relationships" xmlns:p="http://schemas.openxmlformats.org/presentationml/2006/main">
+  <p:cSld>
+    <p:spTree>
+      <p:nvGrpSpPr>
+        <p:cNvPr id="1" name=""/>
+        <p:cNvGrpSpPr/>
+        <p:nvPr/>
+      </p:nvGrpSpPr>
+      <p:grpSpPr>
+        <a:xfrm>
+          <a:off x="0" y="0"/>
+          <a:ext cx="0" cy="0"/>
+          <a:chOff x="0" y="0"/>
+          <a:chExt cx="0" cy="0"/>
+        </a:xfrm>
+      </p:grpSpPr>
+      <p:sp>
+        <p:nvSpPr>
+          <p:cNvPr id="2" name="Rectangle 1"/>
           <p:cNvSpPr/>
           <p:nvPr/>
         </p:nvSpPr>
         <p:spPr>
           <a:xfrm>
-            <a:off x="548640" y="3703320"/>
-            <a:ext cx="11064240" cy="502920"/>
+            <a:off x="0" y="0"/>
+            <a:ext cx="12191695" cy="6858000"/>
+          </a:xfrm>
+          <a:prstGeom prst="rect">
+            <a:avLst/>
+          </a:prstGeom>
+          <a:solidFill>
+            <a:srgbClr val="FFFFFF"/>
+          </a:solidFill>
+          <a:ln>
+            <a:noFill/>
+          </a:ln>
+          <a:effectLst/>
+        </p:spPr>
+        <p:style>
+          <a:lnRef idx="1">
+            <a:schemeClr val="accent1"/>
+          </a:lnRef>
+          <a:fillRef idx="3">
+            <a:schemeClr val="accent1"/>
+          </a:fillRef>
+          <a:effectRef idx="2">
+            <a:schemeClr val="accent1"/>
+          </a:effectRef>
+          <a:fontRef idx="minor">
+            <a:schemeClr val="lt1"/>
+          </a:fontRef>
+        </p:style>
+        <p:txBody>
+          <a:bodyPr rtlCol="0" anchor="ctr"/>
+          <a:lstStyle/>
+          <a:p>
+            <a:pPr algn="ctr"/>
+            <a:endParaRPr/>
+          </a:p>
+        </p:txBody>
+      </p:sp>
+      <p:sp>
+        <p:nvSpPr>
+          <p:cNvPr id="3" name="TextBox 2"/>
+          <p:cNvSpPr txBox="1"/>
+          <p:nvPr/>
+        </p:nvSpPr>
+        <p:spPr>
+          <a:xfrm>
+            <a:off x="548640" y="320040"/>
+            <a:ext cx="7315200" cy="365760"/>
+          </a:xfrm>
+          <a:prstGeom prst="rect">
+            <a:avLst/>
+          </a:prstGeom>
+          <a:noFill/>
+        </p:spPr>
+        <p:txBody>
+          <a:bodyPr wrap="none">
+            <a:spAutoFit/>
+          </a:bodyPr>
+          <a:lstStyle/>
+          <a:p>
+            <a:pPr>
+              <a:defRPr sz="1600" b="1">
+                <a:solidFill>
+                  <a:srgbClr val="0066CC"/>
+                </a:solidFill>
+                <a:latin typeface="Segoe UI"/>
+              </a:defRPr>
+            </a:pPr>
+            <a:r>
+              <a:t>PADB Simple</a:t>
+            </a:r>
+          </a:p>
+        </p:txBody>
+      </p:sp>
+      <p:sp>
+        <p:nvSpPr>
+          <p:cNvPr id="4" name="TextBox 3"/>
+          <p:cNvSpPr txBox="1"/>
+          <p:nvPr/>
+        </p:nvSpPr>
+        <p:spPr>
+          <a:xfrm>
+            <a:off x="548640" y="658368"/>
+            <a:ext cx="11064240" cy="822960"/>
+          </a:xfrm>
+          <a:prstGeom prst="rect">
+            <a:avLst/>
+          </a:prstGeom>
+          <a:noFill/>
+        </p:spPr>
+        <p:txBody>
+          <a:bodyPr wrap="square">
+            <a:spAutoFit/>
+          </a:bodyPr>
+          <a:lstStyle/>
+          <a:p>
+            <a:pPr>
+              <a:defRPr sz="3200" b="1">
+                <a:solidFill>
+                  <a:srgbClr val="1B2A4A"/>
+                </a:solidFill>
+                <a:latin typeface="Segoe UI"/>
+              </a:defRPr>
+            </a:pPr>
+            <a:r>
+              <a:t>job.json</a:t>
+            </a:r>
+          </a:p>
+        </p:txBody>
+      </p:sp>
+      <p:cxnSp>
+        <p:nvCxnSpPr>
+          <p:cNvPr id="5" name="Connector 4"/>
+          <p:cNvCxnSpPr/>
+          <p:nvPr/>
+        </p:nvCxnSpPr>
+        <p:spPr>
+          <a:xfrm>
+            <a:off x="548640" y="1417320"/>
+            <a:ext cx="11091672" cy="0"/>
+          </a:xfrm>
+          <a:prstGeom prst="line">
+            <a:avLst/>
+          </a:prstGeom>
+          <a:ln w="28575">
+            <a:solidFill>
+              <a:srgbClr val="0066CC"/>
+            </a:solidFill>
+          </a:ln>
+        </p:spPr>
+        <p:style>
+          <a:lnRef idx="2">
+            <a:schemeClr val="accent1"/>
+          </a:lnRef>
+          <a:fillRef idx="0">
+            <a:schemeClr val="accent1"/>
+          </a:fillRef>
+          <a:effectRef idx="1">
+            <a:schemeClr val="accent1"/>
+          </a:effectRef>
+          <a:fontRef idx="minor">
+            <a:schemeClr val="tx1"/>
+          </a:fontRef>
+        </p:style>
+      </p:cxnSp>
+      <p:sp>
+        <p:nvSpPr>
+          <p:cNvPr id="6" name="TextBox 5"/>
+          <p:cNvSpPr txBox="1"/>
+          <p:nvPr/>
+        </p:nvSpPr>
+        <p:spPr>
+          <a:xfrm>
+            <a:off x="548640" y="6473952"/>
+            <a:ext cx="8229600" cy="320040"/>
+          </a:xfrm>
+          <a:prstGeom prst="rect">
+            <a:avLst/>
+          </a:prstGeom>
+          <a:noFill/>
+        </p:spPr>
+        <p:txBody>
+          <a:bodyPr wrap="none">
+            <a:spAutoFit/>
+          </a:bodyPr>
+          <a:lstStyle/>
+          <a:p>
+            <a:pPr>
+              <a:defRPr sz="1100">
+                <a:solidFill>
+                  <a:srgbClr val="555555"/>
+                </a:solidFill>
+                <a:latin typeface="Segoe UI"/>
+              </a:defRPr>
+            </a:pPr>
+            <a:r>
+              <a:t>padb-tools</a:t>
+            </a:r>
+          </a:p>
+        </p:txBody>
+      </p:sp>
+      <p:sp>
+        <p:nvSpPr>
+          <p:cNvPr id="7" name="TextBox 6"/>
+          <p:cNvSpPr txBox="1"/>
+          <p:nvPr/>
+        </p:nvSpPr>
+        <p:spPr>
+          <a:xfrm>
+            <a:off x="11338560" y="6473952"/>
+            <a:ext cx="548640" cy="320040"/>
+          </a:xfrm>
+          <a:prstGeom prst="rect">
+            <a:avLst/>
+          </a:prstGeom>
+          <a:noFill/>
+        </p:spPr>
+        <p:txBody>
+          <a:bodyPr wrap="none">
+            <a:spAutoFit/>
+          </a:bodyPr>
+          <a:lstStyle/>
+          <a:p>
+            <a:pPr algn="r">
+              <a:defRPr sz="1100">
+                <a:solidFill>
+                  <a:srgbClr val="555555"/>
+                </a:solidFill>
+              </a:defRPr>
+            </a:pPr>
+            <a:r>
+              <a:t>6</a:t>
+            </a:r>
+          </a:p>
+        </p:txBody>
+      </p:sp>
+      <p:sp>
+        <p:nvSpPr>
+          <p:cNvPr id="8" name="Rounded Rectangle 7"/>
+          <p:cNvSpPr/>
+          <p:nvPr/>
+        </p:nvSpPr>
+        <p:spPr>
+          <a:xfrm>
+            <a:off x="548640" y="1737360"/>
+            <a:ext cx="11064240" cy="4114800"/>
           </a:xfrm>
           <a:prstGeom prst="roundRect">
             <a:avLst>
@@ -20916,7 +20989,7 @@
           </a:fontRef>
         </p:style>
         <p:txBody>
-          <a:bodyPr rtlCol="0" anchor="t" wrap="square" lIns="228600" rIns="228600" tIns="164592" bIns="164592"/>
+          <a:bodyPr wrap="square" lIns="228600" tIns="164592" rIns="228600" bIns="164592" rtlCol="0" anchor="t"/>
           <a:lstStyle/>
           <a:p>
             <a:pPr algn="l">
@@ -20931,78 +21004,183 @@
                 </a:solidFill>
                 <a:latin typeface="Consolas"/>
               </a:rPr>
-              <a:t>py padb_make_job.py YourPod.pod --module YourModule</a:t>
-            </a:r>
-          </a:p>
-        </p:txBody>
-      </p:sp>
-      <p:sp>
-        <p:nvSpPr>
-          <p:cNvPr id="13" name="TextBox 12"/>
-          <p:cNvSpPr txBox="1"/>
-          <p:nvPr/>
-        </p:nvSpPr>
-        <p:spPr>
-          <a:xfrm>
-            <a:off x="548640" y="4343400"/>
-            <a:ext cx="11064240" cy="1463040"/>
-          </a:xfrm>
-          <a:prstGeom prst="rect">
-            <a:avLst/>
-          </a:prstGeom>
-          <a:noFill/>
-        </p:spPr>
-        <p:txBody>
-          <a:bodyPr wrap="square">
-            <a:spAutoFit/>
-          </a:bodyPr>
-          <a:lstStyle/>
-          <a:p>
-            <a:pPr>
-              <a:spcAft>
-                <a:spcPts val="1000"/>
-              </a:spcAft>
-            </a:pPr>
-            <a:r>
-              <a:rPr sz="1700">
-                <a:solidFill>
-                  <a:srgbClr val="1B2A4A"/>
-                </a:solidFill>
-                <a:latin typeface="Segoe UI"/>
-              </a:rPr>
-              <a:t>•  If PADB-R.exe launches and a real window briefly appears, you're fully set up</a:t>
-            </a:r>
-          </a:p>
-          <a:p>
-            <a:pPr>
-              <a:spcAft>
-                <a:spcPts val="1000"/>
-              </a:spcAft>
-            </a:pPr>
-            <a:r>
-              <a:rPr sz="1700">
-                <a:solidFill>
-                  <a:srgbClr val="1B2A4A"/>
-                </a:solidFill>
-                <a:latin typeface="Segoe UI"/>
-              </a:rPr>
-              <a:t>•  Stuck? GETTING_STARTED.md → Quick_Start.md, or type /padb-tools once you're</a:t>
-            </a:r>
-          </a:p>
-          <a:p>
-            <a:pPr lvl="1">
-              <a:spcAft>
-                <a:spcPts val="600"/>
-              </a:spcAft>
-            </a:pPr>
-            <a:r>
-              <a:rPr sz="1500">
-                <a:solidFill>
-                  <a:srgbClr val="555555"/>
-                </a:solidFill>
-                <a:latin typeface="Segoe UI"/>
-              </a:rPr>
-              <a:t>–  working inside the repo</a:t>
+              <a:t>{</a:t>
+            </a:r>
+          </a:p>
+          <a:p>
+            <a:pPr algn="l">
+              <a:spcAft>
+                <a:spcPts val="200"/>
+              </a:spcAft>
+            </a:pPr>
+            <a:r>
+              <a:rPr sz="1450">
+                <a:solidFill>
+                  <a:srgbClr val="E6E6E6"/>
+                </a:solidFill>
+                <a:latin typeface="Consolas"/>
+              </a:rPr>
+              <a:t>  "description": "SG6311A MiniMoab Self-Test",</a:t>
+            </a:r>
+          </a:p>
+          <a:p>
+            <a:pPr algn="l">
+              <a:spcAft>
+                <a:spcPts val="200"/>
+              </a:spcAft>
+            </a:pPr>
+            <a:r>
+              <a:rPr sz="1450">
+                <a:solidFill>
+                  <a:srgbClr val="E6E6E6"/>
+                </a:solidFill>
+                <a:latin typeface="Consolas"/>
+              </a:rPr>
+              <a:t>  "pod": "SelfTestMiniMoab_000.pod",</a:t>
+            </a:r>
+          </a:p>
+          <a:p>
+            <a:pPr algn="l">
+              <a:spcAft>
+                <a:spcPts val="200"/>
+              </a:spcAft>
+            </a:pPr>
+            <a:r>
+              <a:rPr sz="1450">
+                <a:solidFill>
+                  <a:srgbClr val="E6E6E6"/>
+                </a:solidFill>
+                <a:latin typeface="Consolas"/>
+              </a:rPr>
+              <a:t>  "mode": "simple",</a:t>
+            </a:r>
+          </a:p>
+          <a:p>
+            <a:pPr algn="l">
+              <a:spcAft>
+                <a:spcPts val="200"/>
+              </a:spcAft>
+            </a:pPr>
+            <a:r>
+              <a:rPr sz="1450">
+                <a:solidFill>
+                  <a:srgbClr val="E6E6E6"/>
+                </a:solidFill>
+                <a:latin typeface="Consolas"/>
+              </a:rPr>
+              <a:t>  "padb_exe": "C:\\Program Files\\KEYSIGHT\\PADB-R.NET\\PADB-R.exe",</a:t>
+            </a:r>
+          </a:p>
+          <a:p>
+            <a:pPr algn="l">
+              <a:spcAft>
+                <a:spcPts val="200"/>
+              </a:spcAft>
+            </a:pPr>
+            <a:r>
+              <a:rPr sz="1450">
+                <a:solidFill>
+                  <a:srgbClr val="E6E6E6"/>
+                </a:solidFill>
+                <a:latin typeface="Consolas"/>
+              </a:rPr>
+              <a:t>  "results_dir": "SelfTestMiniMoab_000_simple_results",</a:t>
+            </a:r>
+          </a:p>
+          <a:p>
+            <a:pPr algn="l">
+              <a:spcAft>
+                <a:spcPts val="200"/>
+              </a:spcAft>
+            </a:pPr>
+            <a:r>
+              <a:rPr sz="1450">
+                <a:solidFill>
+                  <a:srgbClr val="E6E6E6"/>
+                </a:solidFill>
+                <a:latin typeface="Consolas"/>
+              </a:rPr>
+              <a:t>  "padb_timeout": 7200,</a:t>
+            </a:r>
+          </a:p>
+          <a:p>
+            <a:pPr algn="l">
+              <a:spcAft>
+                <a:spcPts val="200"/>
+              </a:spcAft>
+            </a:pPr>
+            <a:r>
+              <a:rPr sz="1450">
+                <a:solidFill>
+                  <a:srgbClr val="E6E6E6"/>
+                </a:solidFill>
+                <a:latin typeface="Consolas"/>
+              </a:rPr>
+              <a:t>  "run_analytics": true,</a:t>
+            </a:r>
+          </a:p>
+          <a:p>
+            <a:pPr algn="l">
+              <a:spcAft>
+                <a:spcPts val="200"/>
+              </a:spcAft>
+            </a:pPr>
+            <a:r>
+              <a:rPr sz="1450">
+                <a:solidFill>
+                  <a:srgbClr val="E6E6E6"/>
+                </a:solidFill>
+                <a:latin typeface="Consolas"/>
+              </a:rPr>
+              <a:t>  "publish": {</a:t>
+            </a:r>
+          </a:p>
+          <a:p>
+            <a:pPr algn="l">
+              <a:spcAft>
+                <a:spcPts val="200"/>
+              </a:spcAft>
+            </a:pPr>
+            <a:r>
+              <a:rPr sz="1450">
+                <a:solidFill>
+                  <a:srgbClr val="E6E6E6"/>
+                </a:solidFill>
+                <a:latin typeface="Consolas"/>
+              </a:rPr>
+              <a:t>    "destination": "\\\\srsnas01...\\SG6311A\\PADB-Simple\\MiniMoab\\SelfTestMiniMoab_000"</a:t>
+            </a:r>
+          </a:p>
+          <a:p>
+            <a:pPr algn="l">
+              <a:spcAft>
+                <a:spcPts val="200"/>
+              </a:spcAft>
+            </a:pPr>
+            <a:r>
+              <a:rPr sz="1450">
+                <a:solidFill>
+                  <a:srgbClr val="E6E6E6"/>
+                </a:solidFill>
+                <a:latin typeface="Consolas"/>
+              </a:rPr>
+              <a:t>  }</a:t>
+            </a:r>
+          </a:p>
+          <a:p>
+            <a:pPr algn="l">
+              <a:spcAft>
+                <a:spcPts val="200"/>
+              </a:spcAft>
+            </a:pPr>
+            <a:r>
+              <a:rPr sz="1450">
+                <a:solidFill>
+                  <a:srgbClr val="E6E6E6"/>
+                </a:solidFill>
+                <a:latin typeface="Consolas"/>
+              </a:rPr>
+              <a:t>}</a:t>
             </a:r>
           </a:p>
         </p:txBody>
@@ -21015,8 +21193,8 @@
 </p:sld>
 </file>
 
-<file path=ppt/slides/slide5.xml><?xml version="1.0" encoding="utf-8"?>
-<p:sld xmlns:a="http://schemas.openxmlformats.org/drawingml/2006/main" xmlns:p="http://schemas.openxmlformats.org/presentationml/2006/main" xmlns:r="http://schemas.openxmlformats.org/officeDocument/2006/relationships">
+<file path=ppt/slides/slide7.xml><?xml version="1.0" encoding="utf-8"?>
+<p:sld xmlns:a="http://schemas.openxmlformats.org/drawingml/2006/main" xmlns:r="http://schemas.openxmlformats.org/officeDocument/2006/relationships" xmlns:p="http://schemas.openxmlformats.org/presentationml/2006/main">
   <p:cSld>
     <p:spTree>
       <p:nvGrpSpPr>
@@ -21024,7 +21202,14 @@
         <p:cNvGrpSpPr/>
         <p:nvPr/>
       </p:nvGrpSpPr>
-      <p:grpSpPr/>
+      <p:grpSpPr>
+        <a:xfrm>
+          <a:off x="0" y="0"/>
+          <a:ext cx="0" cy="0"/>
+          <a:chOff x="0" y="0"/>
+          <a:chExt cx="0" cy="0"/>
+        </a:xfrm>
+      </p:grpSpPr>
       <p:sp>
         <p:nvSpPr>
           <p:cNvPr id="2" name="Rectangle 1"/>
@@ -21066,6 +21251,7 @@
           <a:lstStyle/>
           <a:p>
             <a:pPr algn="ctr"/>
+            <a:endParaRPr/>
           </a:p>
         </p:txBody>
       </p:sp>
@@ -21136,7 +21322,7 @@
               </a:defRPr>
             </a:pPr>
             <a:r>
-              <a:t>What It Is</a:t>
+              <a:t>Running It</a:t>
             </a:r>
           </a:p>
         </p:txBody>
@@ -21242,7 +21428,7 @@
               </a:defRPr>
             </a:pPr>
             <a:r>
-              <a:t>5</a:t>
+              <a:t>7</a:t>
             </a:r>
           </a:p>
         </p:txBody>
@@ -21255,8 +21441,8 @@
         </p:nvSpPr>
         <p:spPr>
           <a:xfrm>
-            <a:off x="548640" y="1645920"/>
-            <a:ext cx="11064240" cy="4754880"/>
+            <a:off x="548640" y="1691640"/>
+            <a:ext cx="11064240" cy="457200"/>
           </a:xfrm>
           <a:prstGeom prst="rect">
             <a:avLst/>
@@ -21281,357 +21467,21 @@
                 </a:solidFill>
                 <a:latin typeface="Segoe UI"/>
               </a:rPr>
-              <a:t>•  A direct, static replacement for the old Perl PADB::Simple tool</a:t>
-            </a:r>
-          </a:p>
-          <a:p>
-            <a:pPr>
-              <a:spcAft>
-                <a:spcPts val="1000"/>
-              </a:spcAft>
-            </a:pPr>
-            <a:r>
-              <a:rPr sz="1900">
-                <a:solidFill>
-                  <a:srgbClr val="1B2A4A"/>
-                </a:solidFill>
-                <a:latin typeface="Segoe UI"/>
-              </a:rPr>
-              <a:t>•  Zero custom plotting or statistics — no scatter, no tolerance intervals, no filters</a:t>
-            </a:r>
-          </a:p>
-          <a:p>
-            <a:pPr>
-              <a:spcAft>
-                <a:spcPts val="1000"/>
-              </a:spcAft>
-            </a:pPr>
-            <a:r>
-              <a:rPr sz="1900">
-                <a:solidFill>
-                  <a:srgbClr val="1B2A4A"/>
-                </a:solidFill>
-                <a:latin typeface="Segoe UI"/>
-              </a:rPr>
-              <a:t>•  Drives PADB-R's own native rendering: OutputConfig_OutputGraph=1, GraphFormat=png,pdf</a:t>
-            </a:r>
-          </a:p>
-          <a:p>
-            <a:pPr>
-              <a:spcAft>
-                <a:spcPts val="1000"/>
-              </a:spcAft>
-            </a:pPr>
-            <a:r>
-              <a:rPr sz="1900">
-                <a:solidFill>
-                  <a:srgbClr val="1B2A4A"/>
-                </a:solidFill>
-                <a:latin typeface="Segoe UI"/>
-              </a:rPr>
-              <a:t>•  Wraps the native PNG/PDF output in a bare gallery page, one card per image</a:t>
-            </a:r>
-          </a:p>
-          <a:p>
-            <a:pPr>
-              <a:spcAft>
-                <a:spcPts val="1000"/>
-              </a:spcAft>
-            </a:pPr>
-            <a:r>
-              <a:rPr sz="1900">
-                <a:solidFill>
-                  <a:srgbClr val="1B2A4A"/>
-                </a:solidFill>
-                <a:latin typeface="Segoe UI"/>
-              </a:rPr>
-              <a:t>•  Metadata table dumped from the pod's own extraction settings</a:t>
-            </a:r>
-          </a:p>
-          <a:p>
-            <a:pPr>
-              <a:spcAft>
-                <a:spcPts val="1000"/>
-              </a:spcAft>
-            </a:pPr>
-            <a:r>
-              <a:rPr sz="1900">
-                <a:solidFill>
-                  <a:srgbClr val="1B2A4A"/>
-                </a:solidFill>
-                <a:latin typeface="Segoe UI"/>
-              </a:rPr>
-              <a:t>•  Download links for the original .sao / .pod / .txt / .csv files</a:t>
-            </a:r>
-          </a:p>
-          <a:p>
-            <a:pPr>
-              <a:spcAft>
-                <a:spcPts val="1000"/>
-              </a:spcAft>
-            </a:pPr>
-            <a:r>
-              <a:rPr sz="1900">
-                <a:solidFill>
-                  <a:srgbClr val="1B2A4A"/>
-                </a:solidFill>
-                <a:latin typeface="Segoe UI"/>
-              </a:rPr>
-              <a:t>•  Best for: a quick static report, or matching exactly what the legacy tool produced</a:t>
-            </a:r>
-          </a:p>
-        </p:txBody>
-      </p:sp>
-    </p:spTree>
-  </p:cSld>
-  <p:clrMapOvr>
-    <a:masterClrMapping/>
-  </p:clrMapOvr>
-</p:sld>
-</file>
-
-<file path=ppt/slides/slide6.xml><?xml version="1.0" encoding="utf-8"?>
-<p:sld xmlns:a="http://schemas.openxmlformats.org/drawingml/2006/main" xmlns:p="http://schemas.openxmlformats.org/presentationml/2006/main" xmlns:r="http://schemas.openxmlformats.org/officeDocument/2006/relationships">
-  <p:cSld>
-    <p:spTree>
-      <p:nvGrpSpPr>
-        <p:cNvPr id="1" name=""/>
-        <p:cNvGrpSpPr/>
-        <p:nvPr/>
-      </p:nvGrpSpPr>
-      <p:grpSpPr/>
-      <p:sp>
-        <p:nvSpPr>
-          <p:cNvPr id="2" name="Rectangle 1"/>
+              <a:t>•  Fastest path — generate the job.json straight from the pod:</a:t>
+            </a:r>
+          </a:p>
+        </p:txBody>
+      </p:sp>
+      <p:sp>
+        <p:nvSpPr>
+          <p:cNvPr id="9" name="Rounded Rectangle 8"/>
           <p:cNvSpPr/>
           <p:nvPr/>
         </p:nvSpPr>
         <p:spPr>
           <a:xfrm>
-            <a:off x="0" y="0"/>
-            <a:ext cx="12191695" cy="6858000"/>
-          </a:xfrm>
-          <a:prstGeom prst="rect">
-            <a:avLst/>
-          </a:prstGeom>
-          <a:solidFill>
-            <a:srgbClr val="FFFFFF"/>
-          </a:solidFill>
-          <a:ln>
-            <a:noFill/>
-          </a:ln>
-          <a:effectLst/>
-        </p:spPr>
-        <p:style>
-          <a:lnRef idx="1">
-            <a:schemeClr val="accent1"/>
-          </a:lnRef>
-          <a:fillRef idx="3">
-            <a:schemeClr val="accent1"/>
-          </a:fillRef>
-          <a:effectRef idx="2">
-            <a:schemeClr val="accent1"/>
-          </a:effectRef>
-          <a:fontRef idx="minor">
-            <a:schemeClr val="lt1"/>
-          </a:fontRef>
-        </p:style>
-        <p:txBody>
-          <a:bodyPr rtlCol="0" anchor="ctr"/>
-          <a:lstStyle/>
-          <a:p>
-            <a:pPr algn="ctr"/>
-          </a:p>
-        </p:txBody>
-      </p:sp>
-      <p:sp>
-        <p:nvSpPr>
-          <p:cNvPr id="3" name="TextBox 2"/>
-          <p:cNvSpPr txBox="1"/>
-          <p:nvPr/>
-        </p:nvSpPr>
-        <p:spPr>
-          <a:xfrm>
-            <a:off x="548640" y="320040"/>
-            <a:ext cx="7315200" cy="365760"/>
-          </a:xfrm>
-          <a:prstGeom prst="rect">
-            <a:avLst/>
-          </a:prstGeom>
-          <a:noFill/>
-        </p:spPr>
-        <p:txBody>
-          <a:bodyPr wrap="none">
-            <a:spAutoFit/>
-          </a:bodyPr>
-          <a:lstStyle/>
-          <a:p>
-            <a:pPr>
-              <a:defRPr sz="1600" b="1">
-                <a:solidFill>
-                  <a:srgbClr val="0066CC"/>
-                </a:solidFill>
-                <a:latin typeface="Segoe UI"/>
-              </a:defRPr>
-            </a:pPr>
-            <a:r>
-              <a:t>PADB Simple</a:t>
-            </a:r>
-          </a:p>
-        </p:txBody>
-      </p:sp>
-      <p:sp>
-        <p:nvSpPr>
-          <p:cNvPr id="4" name="TextBox 3"/>
-          <p:cNvSpPr txBox="1"/>
-          <p:nvPr/>
-        </p:nvSpPr>
-        <p:spPr>
-          <a:xfrm>
-            <a:off x="548640" y="658368"/>
-            <a:ext cx="11064240" cy="822960"/>
-          </a:xfrm>
-          <a:prstGeom prst="rect">
-            <a:avLst/>
-          </a:prstGeom>
-          <a:noFill/>
-        </p:spPr>
-        <p:txBody>
-          <a:bodyPr wrap="square">
-            <a:spAutoFit/>
-          </a:bodyPr>
-          <a:lstStyle/>
-          <a:p>
-            <a:pPr>
-              <a:defRPr sz="3200" b="1">
-                <a:solidFill>
-                  <a:srgbClr val="1B2A4A"/>
-                </a:solidFill>
-                <a:latin typeface="Segoe UI"/>
-              </a:defRPr>
-            </a:pPr>
-            <a:r>
-              <a:t>job.json</a:t>
-            </a:r>
-          </a:p>
-        </p:txBody>
-      </p:sp>
-      <p:cxnSp>
-        <p:nvCxnSpPr>
-          <p:cNvPr id="5" name="Connector 4"/>
-          <p:cNvCxnSpPr/>
-          <p:nvPr/>
-        </p:nvCxnSpPr>
-        <p:spPr>
-          <a:xfrm>
-            <a:off x="548640" y="1417320"/>
-            <a:ext cx="11091672" cy="0"/>
-          </a:xfrm>
-          <a:prstGeom prst="line">
-            <a:avLst/>
-          </a:prstGeom>
-          <a:ln w="28575">
-            <a:solidFill>
-              <a:srgbClr val="0066CC"/>
-            </a:solidFill>
-          </a:ln>
-        </p:spPr>
-        <p:style>
-          <a:lnRef idx="2">
-            <a:schemeClr val="accent1"/>
-          </a:lnRef>
-          <a:fillRef idx="0">
-            <a:schemeClr val="accent1"/>
-          </a:fillRef>
-          <a:effectRef idx="1">
-            <a:schemeClr val="accent1"/>
-          </a:effectRef>
-          <a:fontRef idx="minor">
-            <a:schemeClr val="tx1"/>
-          </a:fontRef>
-        </p:style>
-      </p:cxnSp>
-      <p:sp>
-        <p:nvSpPr>
-          <p:cNvPr id="6" name="TextBox 5"/>
-          <p:cNvSpPr txBox="1"/>
-          <p:nvPr/>
-        </p:nvSpPr>
-        <p:spPr>
-          <a:xfrm>
-            <a:off x="548640" y="6473952"/>
-            <a:ext cx="8229600" cy="320040"/>
-          </a:xfrm>
-          <a:prstGeom prst="rect">
-            <a:avLst/>
-          </a:prstGeom>
-          <a:noFill/>
-        </p:spPr>
-        <p:txBody>
-          <a:bodyPr wrap="none">
-            <a:spAutoFit/>
-          </a:bodyPr>
-          <a:lstStyle/>
-          <a:p>
-            <a:pPr>
-              <a:defRPr sz="1100">
-                <a:solidFill>
-                  <a:srgbClr val="555555"/>
-                </a:solidFill>
-                <a:latin typeface="Segoe UI"/>
-              </a:defRPr>
-            </a:pPr>
-            <a:r>
-              <a:t>padb-tools</a:t>
-            </a:r>
-          </a:p>
-        </p:txBody>
-      </p:sp>
-      <p:sp>
-        <p:nvSpPr>
-          <p:cNvPr id="7" name="TextBox 6"/>
-          <p:cNvSpPr txBox="1"/>
-          <p:nvPr/>
-        </p:nvSpPr>
-        <p:spPr>
-          <a:xfrm>
-            <a:off x="11338560" y="6473952"/>
-            <a:ext cx="548640" cy="320040"/>
-          </a:xfrm>
-          <a:prstGeom prst="rect">
-            <a:avLst/>
-          </a:prstGeom>
-          <a:noFill/>
-        </p:spPr>
-        <p:txBody>
-          <a:bodyPr wrap="none">
-            <a:spAutoFit/>
-          </a:bodyPr>
-          <a:lstStyle/>
-          <a:p>
-            <a:pPr algn="r">
-              <a:defRPr sz="1100">
-                <a:solidFill>
-                  <a:srgbClr val="555555"/>
-                </a:solidFill>
-              </a:defRPr>
-            </a:pPr>
-            <a:r>
-              <a:t>6</a:t>
-            </a:r>
-          </a:p>
-        </p:txBody>
-      </p:sp>
-      <p:sp>
-        <p:nvSpPr>
-          <p:cNvPr id="8" name="Rounded Rectangle 7"/>
-          <p:cNvSpPr/>
-          <p:nvPr/>
-        </p:nvSpPr>
-        <p:spPr>
-          <a:xfrm>
-            <a:off x="548640" y="1737360"/>
-            <a:ext cx="11064240" cy="4114800"/>
+            <a:off x="548640" y="2148840"/>
+            <a:ext cx="11064240" cy="502920"/>
           </a:xfrm>
           <a:prstGeom prst="roundRect">
             <a:avLst>
@@ -21663,7 +21513,7 @@
           </a:fontRef>
         </p:style>
         <p:txBody>
-          <a:bodyPr rtlCol="0" anchor="t" wrap="square" lIns="228600" rIns="228600" tIns="164592" bIns="164592"/>
+          <a:bodyPr wrap="square" lIns="228600" tIns="164592" rIns="228600" bIns="164592" rtlCol="0" anchor="t"/>
           <a:lstStyle/>
           <a:p>
             <a:pPr algn="l">
@@ -21672,481 +21522,65 @@
               </a:spcAft>
             </a:pPr>
             <a:r>
-              <a:rPr sz="1450">
+              <a:rPr sz="1500">
                 <a:solidFill>
                   <a:srgbClr val="E6E6E6"/>
                 </a:solidFill>
                 <a:latin typeface="Consolas"/>
               </a:rPr>
-              <a:t>{</a:t>
-            </a:r>
-          </a:p>
-          <a:p>
-            <a:pPr algn="l">
-              <a:spcAft>
-                <a:spcPts val="200"/>
-              </a:spcAft>
-            </a:pPr>
-            <a:r>
-              <a:rPr sz="1450">
-                <a:solidFill>
-                  <a:srgbClr val="E6E6E6"/>
-                </a:solidFill>
-                <a:latin typeface="Consolas"/>
-              </a:rPr>
-              <a:t>  "description": "SG6311A MiniMoab Self-Test",</a:t>
-            </a:r>
-          </a:p>
-          <a:p>
-            <a:pPr algn="l">
-              <a:spcAft>
-                <a:spcPts val="200"/>
-              </a:spcAft>
-            </a:pPr>
-            <a:r>
-              <a:rPr sz="1450">
-                <a:solidFill>
-                  <a:srgbClr val="E6E6E6"/>
-                </a:solidFill>
-                <a:latin typeface="Consolas"/>
-              </a:rPr>
-              <a:t>  "pod": "SelfTestMiniMoab_000.pod",</a:t>
-            </a:r>
-          </a:p>
-          <a:p>
-            <a:pPr algn="l">
-              <a:spcAft>
-                <a:spcPts val="200"/>
-              </a:spcAft>
-            </a:pPr>
-            <a:r>
-              <a:rPr sz="1450">
-                <a:solidFill>
-                  <a:srgbClr val="E6E6E6"/>
-                </a:solidFill>
-                <a:latin typeface="Consolas"/>
-              </a:rPr>
-              <a:t>  "mode": "simple",</a:t>
-            </a:r>
-          </a:p>
-          <a:p>
-            <a:pPr algn="l">
-              <a:spcAft>
-                <a:spcPts val="200"/>
-              </a:spcAft>
-            </a:pPr>
-            <a:r>
-              <a:rPr sz="1450">
-                <a:solidFill>
-                  <a:srgbClr val="E6E6E6"/>
-                </a:solidFill>
-                <a:latin typeface="Consolas"/>
-              </a:rPr>
-              <a:t>  "padb_exe": "C:\\Program Files\\KEYSIGHT\\PADB-R.NET\\PADB-R.exe",</a:t>
-            </a:r>
-          </a:p>
-          <a:p>
-            <a:pPr algn="l">
-              <a:spcAft>
-                <a:spcPts val="200"/>
-              </a:spcAft>
-            </a:pPr>
-            <a:r>
-              <a:rPr sz="1450">
-                <a:solidFill>
-                  <a:srgbClr val="E6E6E6"/>
-                </a:solidFill>
-                <a:latin typeface="Consolas"/>
-              </a:rPr>
-              <a:t>  "results_dir": "SelfTestMiniMoab_000_simple_results",</a:t>
-            </a:r>
-          </a:p>
-          <a:p>
-            <a:pPr algn="l">
-              <a:spcAft>
-                <a:spcPts val="200"/>
-              </a:spcAft>
-            </a:pPr>
-            <a:r>
-              <a:rPr sz="1450">
-                <a:solidFill>
-                  <a:srgbClr val="E6E6E6"/>
-                </a:solidFill>
-                <a:latin typeface="Consolas"/>
-              </a:rPr>
-              <a:t>  "padb_timeout": 7200,</a:t>
-            </a:r>
-          </a:p>
-          <a:p>
-            <a:pPr algn="l">
-              <a:spcAft>
-                <a:spcPts val="200"/>
-              </a:spcAft>
-            </a:pPr>
-            <a:r>
-              <a:rPr sz="1450">
-                <a:solidFill>
-                  <a:srgbClr val="E6E6E6"/>
-                </a:solidFill>
-                <a:latin typeface="Consolas"/>
-              </a:rPr>
-              <a:t>  "run_analytics": true,</a:t>
-            </a:r>
-          </a:p>
-          <a:p>
-            <a:pPr algn="l">
-              <a:spcAft>
-                <a:spcPts val="200"/>
-              </a:spcAft>
-            </a:pPr>
-            <a:r>
-              <a:rPr sz="1450">
-                <a:solidFill>
-                  <a:srgbClr val="E6E6E6"/>
-                </a:solidFill>
-                <a:latin typeface="Consolas"/>
-              </a:rPr>
-              <a:t>  "publish": {</a:t>
-            </a:r>
-          </a:p>
-          <a:p>
-            <a:pPr algn="l">
-              <a:spcAft>
-                <a:spcPts val="200"/>
-              </a:spcAft>
-            </a:pPr>
-            <a:r>
-              <a:rPr sz="1450">
-                <a:solidFill>
-                  <a:srgbClr val="E6E6E6"/>
-                </a:solidFill>
-                <a:latin typeface="Consolas"/>
-              </a:rPr>
-              <a:t>    "destination": "\\\\srsnas01...\\SG6311A\\PADB-Simple\\MiniMoab\\SelfTestMiniMoab_000"</a:t>
-            </a:r>
-          </a:p>
-          <a:p>
-            <a:pPr algn="l">
-              <a:spcAft>
-                <a:spcPts val="200"/>
-              </a:spcAft>
-            </a:pPr>
-            <a:r>
-              <a:rPr sz="1450">
-                <a:solidFill>
-                  <a:srgbClr val="E6E6E6"/>
-                </a:solidFill>
-                <a:latin typeface="Consolas"/>
-              </a:rPr>
-              <a:t>  }</a:t>
-            </a:r>
-          </a:p>
-          <a:p>
-            <a:pPr algn="l">
-              <a:spcAft>
-                <a:spcPts val="200"/>
-              </a:spcAft>
-            </a:pPr>
-            <a:r>
-              <a:rPr sz="1450">
-                <a:solidFill>
-                  <a:srgbClr val="E6E6E6"/>
-                </a:solidFill>
-                <a:latin typeface="Consolas"/>
-              </a:rPr>
-              <a:t>}</a:t>
-            </a:r>
-          </a:p>
-        </p:txBody>
-      </p:sp>
-    </p:spTree>
-  </p:cSld>
-  <p:clrMapOvr>
-    <a:masterClrMapping/>
-  </p:clrMapOvr>
-</p:sld>
-</file>
-
-<file path=ppt/slides/slide7.xml><?xml version="1.0" encoding="utf-8"?>
-<p:sld xmlns:a="http://schemas.openxmlformats.org/drawingml/2006/main" xmlns:p="http://schemas.openxmlformats.org/presentationml/2006/main" xmlns:r="http://schemas.openxmlformats.org/officeDocument/2006/relationships">
-  <p:cSld>
-    <p:spTree>
-      <p:nvGrpSpPr>
-        <p:cNvPr id="1" name=""/>
-        <p:cNvGrpSpPr/>
-        <p:nvPr/>
-      </p:nvGrpSpPr>
-      <p:grpSpPr/>
-      <p:sp>
-        <p:nvSpPr>
-          <p:cNvPr id="2" name="Rectangle 1"/>
+              <a:t>py padb_make_job.py MyPod.pod --module MyModule</a:t>
+            </a:r>
+          </a:p>
+        </p:txBody>
+      </p:sp>
+      <p:sp>
+        <p:nvSpPr>
+          <p:cNvPr id="10" name="TextBox 9"/>
+          <p:cNvSpPr txBox="1"/>
+          <p:nvPr/>
+        </p:nvSpPr>
+        <p:spPr>
+          <a:xfrm>
+            <a:off x="548640" y="2880360"/>
+            <a:ext cx="11064240" cy="457200"/>
+          </a:xfrm>
+          <a:prstGeom prst="rect">
+            <a:avLst/>
+          </a:prstGeom>
+          <a:noFill/>
+        </p:spPr>
+        <p:txBody>
+          <a:bodyPr wrap="square">
+            <a:spAutoFit/>
+          </a:bodyPr>
+          <a:lstStyle/>
+          <a:p>
+            <a:pPr>
+              <a:spcAft>
+                <a:spcPts val="1000"/>
+              </a:spcAft>
+            </a:pPr>
+            <a:r>
+              <a:rPr sz="1900">
+                <a:solidFill>
+                  <a:srgbClr val="1B2A4A"/>
+                </a:solidFill>
+                <a:latin typeface="Segoe UI"/>
+              </a:rPr>
+              <a:t>•  Then run it — real PADB-R.exe execution, needs a desktop session:</a:t>
+            </a:r>
+          </a:p>
+        </p:txBody>
+      </p:sp>
+      <p:sp>
+        <p:nvSpPr>
+          <p:cNvPr id="11" name="Rounded Rectangle 10"/>
           <p:cNvSpPr/>
           <p:nvPr/>
         </p:nvSpPr>
         <p:spPr>
           <a:xfrm>
-            <a:off x="0" y="0"/>
-            <a:ext cx="12191695" cy="6858000"/>
-          </a:xfrm>
-          <a:prstGeom prst="rect">
-            <a:avLst/>
-          </a:prstGeom>
-          <a:solidFill>
-            <a:srgbClr val="FFFFFF"/>
-          </a:solidFill>
-          <a:ln>
-            <a:noFill/>
-          </a:ln>
-          <a:effectLst/>
-        </p:spPr>
-        <p:style>
-          <a:lnRef idx="1">
-            <a:schemeClr val="accent1"/>
-          </a:lnRef>
-          <a:fillRef idx="3">
-            <a:schemeClr val="accent1"/>
-          </a:fillRef>
-          <a:effectRef idx="2">
-            <a:schemeClr val="accent1"/>
-          </a:effectRef>
-          <a:fontRef idx="minor">
-            <a:schemeClr val="lt1"/>
-          </a:fontRef>
-        </p:style>
-        <p:txBody>
-          <a:bodyPr rtlCol="0" anchor="ctr"/>
-          <a:lstStyle/>
-          <a:p>
-            <a:pPr algn="ctr"/>
-          </a:p>
-        </p:txBody>
-      </p:sp>
-      <p:sp>
-        <p:nvSpPr>
-          <p:cNvPr id="3" name="TextBox 2"/>
-          <p:cNvSpPr txBox="1"/>
-          <p:nvPr/>
-        </p:nvSpPr>
-        <p:spPr>
-          <a:xfrm>
-            <a:off x="548640" y="320040"/>
-            <a:ext cx="7315200" cy="365760"/>
-          </a:xfrm>
-          <a:prstGeom prst="rect">
-            <a:avLst/>
-          </a:prstGeom>
-          <a:noFill/>
-        </p:spPr>
-        <p:txBody>
-          <a:bodyPr wrap="none">
-            <a:spAutoFit/>
-          </a:bodyPr>
-          <a:lstStyle/>
-          <a:p>
-            <a:pPr>
-              <a:defRPr sz="1600" b="1">
-                <a:solidFill>
-                  <a:srgbClr val="0066CC"/>
-                </a:solidFill>
-                <a:latin typeface="Segoe UI"/>
-              </a:defRPr>
-            </a:pPr>
-            <a:r>
-              <a:t>PADB Simple</a:t>
-            </a:r>
-          </a:p>
-        </p:txBody>
-      </p:sp>
-      <p:sp>
-        <p:nvSpPr>
-          <p:cNvPr id="4" name="TextBox 3"/>
-          <p:cNvSpPr txBox="1"/>
-          <p:nvPr/>
-        </p:nvSpPr>
-        <p:spPr>
-          <a:xfrm>
-            <a:off x="548640" y="658368"/>
-            <a:ext cx="11064240" cy="822960"/>
-          </a:xfrm>
-          <a:prstGeom prst="rect">
-            <a:avLst/>
-          </a:prstGeom>
-          <a:noFill/>
-        </p:spPr>
-        <p:txBody>
-          <a:bodyPr wrap="square">
-            <a:spAutoFit/>
-          </a:bodyPr>
-          <a:lstStyle/>
-          <a:p>
-            <a:pPr>
-              <a:defRPr sz="3200" b="1">
-                <a:solidFill>
-                  <a:srgbClr val="1B2A4A"/>
-                </a:solidFill>
-                <a:latin typeface="Segoe UI"/>
-              </a:defRPr>
-            </a:pPr>
-            <a:r>
-              <a:t>Running It</a:t>
-            </a:r>
-          </a:p>
-        </p:txBody>
-      </p:sp>
-      <p:cxnSp>
-        <p:nvCxnSpPr>
-          <p:cNvPr id="5" name="Connector 4"/>
-          <p:cNvCxnSpPr/>
-          <p:nvPr/>
-        </p:nvCxnSpPr>
-        <p:spPr>
-          <a:xfrm>
-            <a:off x="548640" y="1417320"/>
-            <a:ext cx="11091672" cy="0"/>
-          </a:xfrm>
-          <a:prstGeom prst="line">
-            <a:avLst/>
-          </a:prstGeom>
-          <a:ln w="28575">
-            <a:solidFill>
-              <a:srgbClr val="0066CC"/>
-            </a:solidFill>
-          </a:ln>
-        </p:spPr>
-        <p:style>
-          <a:lnRef idx="2">
-            <a:schemeClr val="accent1"/>
-          </a:lnRef>
-          <a:fillRef idx="0">
-            <a:schemeClr val="accent1"/>
-          </a:fillRef>
-          <a:effectRef idx="1">
-            <a:schemeClr val="accent1"/>
-          </a:effectRef>
-          <a:fontRef idx="minor">
-            <a:schemeClr val="tx1"/>
-          </a:fontRef>
-        </p:style>
-      </p:cxnSp>
-      <p:sp>
-        <p:nvSpPr>
-          <p:cNvPr id="6" name="TextBox 5"/>
-          <p:cNvSpPr txBox="1"/>
-          <p:nvPr/>
-        </p:nvSpPr>
-        <p:spPr>
-          <a:xfrm>
-            <a:off x="548640" y="6473952"/>
-            <a:ext cx="8229600" cy="320040"/>
-          </a:xfrm>
-          <a:prstGeom prst="rect">
-            <a:avLst/>
-          </a:prstGeom>
-          <a:noFill/>
-        </p:spPr>
-        <p:txBody>
-          <a:bodyPr wrap="none">
-            <a:spAutoFit/>
-          </a:bodyPr>
-          <a:lstStyle/>
-          <a:p>
-            <a:pPr>
-              <a:defRPr sz="1100">
-                <a:solidFill>
-                  <a:srgbClr val="555555"/>
-                </a:solidFill>
-                <a:latin typeface="Segoe UI"/>
-              </a:defRPr>
-            </a:pPr>
-            <a:r>
-              <a:t>padb-tools</a:t>
-            </a:r>
-          </a:p>
-        </p:txBody>
-      </p:sp>
-      <p:sp>
-        <p:nvSpPr>
-          <p:cNvPr id="7" name="TextBox 6"/>
-          <p:cNvSpPr txBox="1"/>
-          <p:nvPr/>
-        </p:nvSpPr>
-        <p:spPr>
-          <a:xfrm>
-            <a:off x="11338560" y="6473952"/>
-            <a:ext cx="548640" cy="320040"/>
-          </a:xfrm>
-          <a:prstGeom prst="rect">
-            <a:avLst/>
-          </a:prstGeom>
-          <a:noFill/>
-        </p:spPr>
-        <p:txBody>
-          <a:bodyPr wrap="none">
-            <a:spAutoFit/>
-          </a:bodyPr>
-          <a:lstStyle/>
-          <a:p>
-            <a:pPr algn="r">
-              <a:defRPr sz="1100">
-                <a:solidFill>
-                  <a:srgbClr val="555555"/>
-                </a:solidFill>
-              </a:defRPr>
-            </a:pPr>
-            <a:r>
-              <a:t>7</a:t>
-            </a:r>
-          </a:p>
-        </p:txBody>
-      </p:sp>
-      <p:sp>
-        <p:nvSpPr>
-          <p:cNvPr id="8" name="TextBox 7"/>
-          <p:cNvSpPr txBox="1"/>
-          <p:nvPr/>
-        </p:nvSpPr>
-        <p:spPr>
-          <a:xfrm>
-            <a:off x="548640" y="1691640"/>
-            <a:ext cx="11064240" cy="457200"/>
-          </a:xfrm>
-          <a:prstGeom prst="rect">
-            <a:avLst/>
-          </a:prstGeom>
-          <a:noFill/>
-        </p:spPr>
-        <p:txBody>
-          <a:bodyPr wrap="square">
-            <a:spAutoFit/>
-          </a:bodyPr>
-          <a:lstStyle/>
-          <a:p>
-            <a:pPr>
-              <a:spcAft>
-                <a:spcPts val="1000"/>
-              </a:spcAft>
-            </a:pPr>
-            <a:r>
-              <a:rPr sz="1900">
-                <a:solidFill>
-                  <a:srgbClr val="1B2A4A"/>
-                </a:solidFill>
-                <a:latin typeface="Segoe UI"/>
-              </a:rPr>
-              <a:t>•  Fastest path — generate the job.json straight from the pod:</a:t>
-            </a:r>
-          </a:p>
-        </p:txBody>
-      </p:sp>
-      <p:sp>
-        <p:nvSpPr>
-          <p:cNvPr id="9" name="Rounded Rectangle 8"/>
-          <p:cNvSpPr/>
-          <p:nvPr/>
-        </p:nvSpPr>
-        <p:spPr>
-          <a:xfrm>
-            <a:off x="548640" y="2148840"/>
+            <a:off x="548640" y="3337560"/>
             <a:ext cx="11064240" cy="502920"/>
           </a:xfrm>
           <a:prstGeom prst="roundRect">
@@ -22179,7 +21613,7 @@
           </a:fontRef>
         </p:style>
         <p:txBody>
-          <a:bodyPr rtlCol="0" anchor="t" wrap="square" lIns="228600" rIns="228600" tIns="164592" bIns="164592"/>
+          <a:bodyPr wrap="square" lIns="228600" tIns="164592" rIns="228600" bIns="164592" rtlCol="0" anchor="t"/>
           <a:lstStyle/>
           <a:p>
             <a:pPr algn="l">
@@ -22194,21 +21628,21 @@
                 </a:solidFill>
                 <a:latin typeface="Consolas"/>
               </a:rPr>
-              <a:t>py padb_make_job.py MyPod.pod --module MyModule</a:t>
-            </a:r>
-          </a:p>
-        </p:txBody>
-      </p:sp>
-      <p:sp>
-        <p:nvSpPr>
-          <p:cNvPr id="10" name="TextBox 9"/>
-          <p:cNvSpPr txBox="1"/>
-          <p:nvPr/>
-        </p:nvSpPr>
-        <p:spPr>
-          <a:xfrm>
-            <a:off x="548640" y="2880360"/>
-            <a:ext cx="11064240" cy="457200"/>
+              <a:t>py padb_run.py MyPod_job.json</a:t>
+            </a:r>
+          </a:p>
+        </p:txBody>
+      </p:sp>
+      <p:sp>
+        <p:nvSpPr>
+          <p:cNvPr id="12" name="TextBox 11"/>
+          <p:cNvSpPr txBox="1"/>
+          <p:nvPr/>
+        </p:nvSpPr>
+        <p:spPr>
+          <a:xfrm>
+            <a:off x="548640" y="3977639"/>
+            <a:ext cx="11064240" cy="2103120"/>
           </a:xfrm>
           <a:prstGeom prst="rect">
             <a:avLst/>
@@ -22227,27 +21661,809 @@
               </a:spcAft>
             </a:pPr>
             <a:r>
+              <a:rPr sz="1800">
+                <a:solidFill>
+                  <a:srgbClr val="1B2A4A"/>
+                </a:solidFill>
+                <a:latin typeface="Segoe UI"/>
+              </a:rPr>
+              <a:t>•  --module MyModule names the publish subfolder — always explicit, never guessed (more on slide 12)</a:t>
+            </a:r>
+          </a:p>
+          <a:p>
+            <a:pPr>
+              <a:spcAft>
+                <a:spcPts val="1000"/>
+              </a:spcAft>
+            </a:pPr>
+            <a:r>
+              <a:rPr sz="1800">
+                <a:solidFill>
+                  <a:srgbClr val="1B2A4A"/>
+                </a:solidFill>
+                <a:latin typeface="Segoe UI"/>
+              </a:rPr>
+              <a:t>•  Output: results_dir\index.html — one card per native PNG (linked to its PDF)</a:t>
+            </a:r>
+          </a:p>
+          <a:p>
+            <a:pPr>
+              <a:spcAft>
+                <a:spcPts val="1000"/>
+              </a:spcAft>
+            </a:pPr>
+            <a:r>
+              <a:rPr sz="1800">
+                <a:solidFill>
+                  <a:srgbClr val="1B2A4A"/>
+                </a:solidFill>
+                <a:latin typeface="Segoe UI"/>
+              </a:rPr>
+              <a:t>•  HOW_TO_USE.txt is written alongside it, explaining what this tier does and doesn't do</a:t>
+            </a:r>
+          </a:p>
+          <a:p>
+            <a:pPr>
+              <a:spcAft>
+                <a:spcPts val="1000"/>
+              </a:spcAft>
+            </a:pPr>
+            <a:r>
+              <a:rPr sz="1800">
+                <a:solidFill>
+                  <a:srgbClr val="1B2A4A"/>
+                </a:solidFill>
+                <a:latin typeface="Segoe UI"/>
+              </a:rPr>
+              <a:t>•  Re-plot without re-extracting: py padb_run.py MyPod_job.json --plots-only</a:t>
+            </a:r>
+          </a:p>
+        </p:txBody>
+      </p:sp>
+    </p:spTree>
+  </p:cSld>
+  <p:clrMapOvr>
+    <a:masterClrMapping/>
+  </p:clrMapOvr>
+</p:sld>
+</file>
+
+<file path=ppt/slides/slide8.xml><?xml version="1.0" encoding="utf-8"?>
+<p:sld xmlns:a="http://schemas.openxmlformats.org/drawingml/2006/main" xmlns:r="http://schemas.openxmlformats.org/officeDocument/2006/relationships" xmlns:p="http://schemas.openxmlformats.org/presentationml/2006/main">
+  <p:cSld>
+    <p:spTree>
+      <p:nvGrpSpPr>
+        <p:cNvPr id="1" name=""/>
+        <p:cNvGrpSpPr/>
+        <p:nvPr/>
+      </p:nvGrpSpPr>
+      <p:grpSpPr>
+        <a:xfrm>
+          <a:off x="0" y="0"/>
+          <a:ext cx="0" cy="0"/>
+          <a:chOff x="0" y="0"/>
+          <a:chExt cx="0" cy="0"/>
+        </a:xfrm>
+      </p:grpSpPr>
+      <p:sp>
+        <p:nvSpPr>
+          <p:cNvPr id="2" name="Rectangle 1"/>
+          <p:cNvSpPr/>
+          <p:nvPr/>
+        </p:nvSpPr>
+        <p:spPr>
+          <a:xfrm>
+            <a:off x="0" y="0"/>
+            <a:ext cx="12191695" cy="6858000"/>
+          </a:xfrm>
+          <a:prstGeom prst="rect">
+            <a:avLst/>
+          </a:prstGeom>
+          <a:solidFill>
+            <a:srgbClr val="FFFFFF"/>
+          </a:solidFill>
+          <a:ln>
+            <a:noFill/>
+          </a:ln>
+          <a:effectLst/>
+        </p:spPr>
+        <p:style>
+          <a:lnRef idx="1">
+            <a:schemeClr val="accent1"/>
+          </a:lnRef>
+          <a:fillRef idx="3">
+            <a:schemeClr val="accent1"/>
+          </a:fillRef>
+          <a:effectRef idx="2">
+            <a:schemeClr val="accent1"/>
+          </a:effectRef>
+          <a:fontRef idx="minor">
+            <a:schemeClr val="lt1"/>
+          </a:fontRef>
+        </p:style>
+        <p:txBody>
+          <a:bodyPr rtlCol="0" anchor="ctr"/>
+          <a:lstStyle/>
+          <a:p>
+            <a:pPr algn="ctr"/>
+            <a:endParaRPr/>
+          </a:p>
+        </p:txBody>
+      </p:sp>
+      <p:sp>
+        <p:nvSpPr>
+          <p:cNvPr id="3" name="TextBox 2"/>
+          <p:cNvSpPr txBox="1"/>
+          <p:nvPr/>
+        </p:nvSpPr>
+        <p:spPr>
+          <a:xfrm>
+            <a:off x="548640" y="320040"/>
+            <a:ext cx="7315200" cy="365760"/>
+          </a:xfrm>
+          <a:prstGeom prst="rect">
+            <a:avLst/>
+          </a:prstGeom>
+          <a:noFill/>
+        </p:spPr>
+        <p:txBody>
+          <a:bodyPr wrap="none">
+            <a:spAutoFit/>
+          </a:bodyPr>
+          <a:lstStyle/>
+          <a:p>
+            <a:pPr>
+              <a:defRPr sz="1600" b="1">
+                <a:solidFill>
+                  <a:srgbClr val="0066CC"/>
+                </a:solidFill>
+                <a:latin typeface="Segoe UI"/>
+              </a:defRPr>
+            </a:pPr>
+            <a:r>
+              <a:t>PADB Interactive</a:t>
+            </a:r>
+          </a:p>
+        </p:txBody>
+      </p:sp>
+      <p:sp>
+        <p:nvSpPr>
+          <p:cNvPr id="4" name="TextBox 3"/>
+          <p:cNvSpPr txBox="1"/>
+          <p:nvPr/>
+        </p:nvSpPr>
+        <p:spPr>
+          <a:xfrm>
+            <a:off x="548640" y="658368"/>
+            <a:ext cx="11064240" cy="822960"/>
+          </a:xfrm>
+          <a:prstGeom prst="rect">
+            <a:avLst/>
+          </a:prstGeom>
+          <a:noFill/>
+        </p:spPr>
+        <p:txBody>
+          <a:bodyPr wrap="square">
+            <a:spAutoFit/>
+          </a:bodyPr>
+          <a:lstStyle/>
+          <a:p>
+            <a:pPr>
+              <a:defRPr sz="3200" b="1">
+                <a:solidFill>
+                  <a:srgbClr val="1B2A4A"/>
+                </a:solidFill>
+                <a:latin typeface="Segoe UI"/>
+              </a:defRPr>
+            </a:pPr>
+            <a:r>
+              <a:t>What It Is</a:t>
+            </a:r>
+          </a:p>
+        </p:txBody>
+      </p:sp>
+      <p:cxnSp>
+        <p:nvCxnSpPr>
+          <p:cNvPr id="5" name="Connector 4"/>
+          <p:cNvCxnSpPr/>
+          <p:nvPr/>
+        </p:nvCxnSpPr>
+        <p:spPr>
+          <a:xfrm>
+            <a:off x="548640" y="1417320"/>
+            <a:ext cx="11091672" cy="0"/>
+          </a:xfrm>
+          <a:prstGeom prst="line">
+            <a:avLst/>
+          </a:prstGeom>
+          <a:ln w="28575">
+            <a:solidFill>
+              <a:srgbClr val="0066CC"/>
+            </a:solidFill>
+          </a:ln>
+        </p:spPr>
+        <p:style>
+          <a:lnRef idx="2">
+            <a:schemeClr val="accent1"/>
+          </a:lnRef>
+          <a:fillRef idx="0">
+            <a:schemeClr val="accent1"/>
+          </a:fillRef>
+          <a:effectRef idx="1">
+            <a:schemeClr val="accent1"/>
+          </a:effectRef>
+          <a:fontRef idx="minor">
+            <a:schemeClr val="tx1"/>
+          </a:fontRef>
+        </p:style>
+      </p:cxnSp>
+      <p:sp>
+        <p:nvSpPr>
+          <p:cNvPr id="6" name="TextBox 5"/>
+          <p:cNvSpPr txBox="1"/>
+          <p:nvPr/>
+        </p:nvSpPr>
+        <p:spPr>
+          <a:xfrm>
+            <a:off x="548640" y="6473952"/>
+            <a:ext cx="8229600" cy="320040"/>
+          </a:xfrm>
+          <a:prstGeom prst="rect">
+            <a:avLst/>
+          </a:prstGeom>
+          <a:noFill/>
+        </p:spPr>
+        <p:txBody>
+          <a:bodyPr wrap="none">
+            <a:spAutoFit/>
+          </a:bodyPr>
+          <a:lstStyle/>
+          <a:p>
+            <a:pPr>
+              <a:defRPr sz="1100">
+                <a:solidFill>
+                  <a:srgbClr val="555555"/>
+                </a:solidFill>
+                <a:latin typeface="Segoe UI"/>
+              </a:defRPr>
+            </a:pPr>
+            <a:r>
+              <a:t>padb-tools</a:t>
+            </a:r>
+          </a:p>
+        </p:txBody>
+      </p:sp>
+      <p:sp>
+        <p:nvSpPr>
+          <p:cNvPr id="7" name="TextBox 6"/>
+          <p:cNvSpPr txBox="1"/>
+          <p:nvPr/>
+        </p:nvSpPr>
+        <p:spPr>
+          <a:xfrm>
+            <a:off x="11338560" y="6473952"/>
+            <a:ext cx="548640" cy="320040"/>
+          </a:xfrm>
+          <a:prstGeom prst="rect">
+            <a:avLst/>
+          </a:prstGeom>
+          <a:noFill/>
+        </p:spPr>
+        <p:txBody>
+          <a:bodyPr wrap="none">
+            <a:spAutoFit/>
+          </a:bodyPr>
+          <a:lstStyle/>
+          <a:p>
+            <a:pPr algn="r">
+              <a:defRPr sz="1100">
+                <a:solidFill>
+                  <a:srgbClr val="555555"/>
+                </a:solidFill>
+              </a:defRPr>
+            </a:pPr>
+            <a:r>
+              <a:t>8</a:t>
+            </a:r>
+          </a:p>
+        </p:txBody>
+      </p:sp>
+      <p:sp>
+        <p:nvSpPr>
+          <p:cNvPr id="8" name="TextBox 7"/>
+          <p:cNvSpPr txBox="1"/>
+          <p:nvPr/>
+        </p:nvSpPr>
+        <p:spPr>
+          <a:xfrm>
+            <a:off x="548640" y="1645920"/>
+            <a:ext cx="11064240" cy="4754880"/>
+          </a:xfrm>
+          <a:prstGeom prst="rect">
+            <a:avLst/>
+          </a:prstGeom>
+          <a:noFill/>
+        </p:spPr>
+        <p:txBody>
+          <a:bodyPr wrap="square">
+            <a:spAutoFit/>
+          </a:bodyPr>
+          <a:lstStyle/>
+          <a:p>
+            <a:pPr>
+              <a:spcAft>
+                <a:spcPts val="1000"/>
+              </a:spcAft>
+            </a:pPr>
+            <a:r>
               <a:rPr sz="1900">
                 <a:solidFill>
                   <a:srgbClr val="1B2A4A"/>
                 </a:solidFill>
                 <a:latin typeface="Segoe UI"/>
               </a:rPr>
-              <a:t>•  Then run it — real PADB-R.exe execution, needs a desktop session:</a:t>
-            </a:r>
-          </a:p>
-        </p:txBody>
-      </p:sp>
-      <p:sp>
-        <p:nvSpPr>
-          <p:cNvPr id="11" name="Rounded Rectangle 10"/>
+              <a:t>•  The full modern interactive suite — six views from one Type=80 Scatter CSV</a:t>
+            </a:r>
+          </a:p>
+          <a:p>
+            <a:pPr>
+              <a:spcAft>
+                <a:spcPts val="1000"/>
+              </a:spcAft>
+            </a:pPr>
+            <a:r>
+              <a:rPr sz="1900">
+                <a:solidFill>
+                  <a:srgbClr val="1B2A4A"/>
+                </a:solidFill>
+                <a:latin typeface="Segoe UI"/>
+              </a:rPr>
+              <a:t>•  scatter, stat_summary, boxplot, distribution, env_coverage, summary</a:t>
+            </a:r>
+          </a:p>
+          <a:p>
+            <a:pPr>
+              <a:spcAft>
+                <a:spcPts val="1000"/>
+              </a:spcAft>
+            </a:pPr>
+            <a:r>
+              <a:rPr sz="1900">
+                <a:solidFill>
+                  <a:srgbClr val="1B2A4A"/>
+                </a:solidFill>
+                <a:latin typeface="Segoe UI"/>
+              </a:rPr>
+              <a:t>•  Auto-selects the right view set from the data itself:</a:t>
+            </a:r>
+          </a:p>
+          <a:p>
+            <a:pPr lvl="1">
+              <a:spcAft>
+                <a:spcPts val="600"/>
+              </a:spcAft>
+            </a:pPr>
+            <a:r>
+              <a:rPr sz="1700">
+                <a:solidFill>
+                  <a:srgbClr val="555555"/>
+                </a:solidFill>
+                <a:latin typeface="Segoe UI"/>
+              </a:rPr>
+              <a:t>–  Room-only data → scatter + boxplot</a:t>
+            </a:r>
+          </a:p>
+          <a:p>
+            <a:pPr lvl="1">
+              <a:spcAft>
+                <a:spcPts val="600"/>
+              </a:spcAft>
+            </a:pPr>
+            <a:r>
+              <a:rPr sz="1700">
+                <a:solidFill>
+                  <a:srgbClr val="555555"/>
+                </a:solidFill>
+                <a:latin typeface="Segoe UI"/>
+              </a:rPr>
+              <a:t>–  Multi-temperature data → all six views</a:t>
+            </a:r>
+          </a:p>
+          <a:p>
+            <a:pPr>
+              <a:spcAft>
+                <a:spcPts val="1000"/>
+              </a:spcAft>
+            </a:pPr>
+            <a:r>
+              <a:rPr sz="1900">
+                <a:solidFill>
+                  <a:srgbClr val="1B2A4A"/>
+                </a:solidFill>
+                <a:latin typeface="Segoe UI"/>
+              </a:rPr>
+              <a:t>•  Live filters: condition, serial, port, frequency range, temperature</a:t>
+            </a:r>
+          </a:p>
+          <a:p>
+            <a:pPr>
+              <a:spcAft>
+                <a:spcPts val="1000"/>
+              </a:spcAft>
+            </a:pPr>
+            <a:r>
+              <a:rPr sz="1900">
+                <a:solidFill>
+                  <a:srgbClr val="1B2A4A"/>
+                </a:solidFill>
+                <a:latin typeface="Segoe UI"/>
+              </a:rPr>
+              <a:t>•  Tolerance intervals (parametric TI, non-parametric TI), spec pass/fail</a:t>
+            </a:r>
+          </a:p>
+          <a:p>
+            <a:pPr>
+              <a:spcAft>
+                <a:spcPts val="1000"/>
+              </a:spcAft>
+            </a:pPr>
+            <a:r>
+              <a:rPr sz="1900">
+                <a:solidFill>
+                  <a:srgbClr val="1B2A4A"/>
+                </a:solidFill>
+                <a:latin typeface="Segoe UI"/>
+              </a:rPr>
+              <a:t>•  Best for: any new pod — richer feature set, no regenerating to explore the data</a:t>
+            </a:r>
+          </a:p>
+        </p:txBody>
+      </p:sp>
+    </p:spTree>
+  </p:cSld>
+  <p:clrMapOvr>
+    <a:masterClrMapping/>
+  </p:clrMapOvr>
+</p:sld>
+</file>
+
+<file path=ppt/slides/slide9.xml><?xml version="1.0" encoding="utf-8"?>
+<p:sld xmlns:a="http://schemas.openxmlformats.org/drawingml/2006/main" xmlns:r="http://schemas.openxmlformats.org/officeDocument/2006/relationships" xmlns:p="http://schemas.openxmlformats.org/presentationml/2006/main">
+  <p:cSld>
+    <p:spTree>
+      <p:nvGrpSpPr>
+        <p:cNvPr id="1" name=""/>
+        <p:cNvGrpSpPr/>
+        <p:nvPr/>
+      </p:nvGrpSpPr>
+      <p:grpSpPr>
+        <a:xfrm>
+          <a:off x="0" y="0"/>
+          <a:ext cx="0" cy="0"/>
+          <a:chOff x="0" y="0"/>
+          <a:chExt cx="0" cy="0"/>
+        </a:xfrm>
+      </p:grpSpPr>
+      <p:sp>
+        <p:nvSpPr>
+          <p:cNvPr id="2" name="Rectangle 1"/>
           <p:cNvSpPr/>
           <p:nvPr/>
         </p:nvSpPr>
         <p:spPr>
           <a:xfrm>
-            <a:off x="548640" y="3337560"/>
-            <a:ext cx="11064240" cy="502920"/>
+            <a:off x="0" y="0"/>
+            <a:ext cx="12191695" cy="6858000"/>
+          </a:xfrm>
+          <a:prstGeom prst="rect">
+            <a:avLst/>
+          </a:prstGeom>
+          <a:solidFill>
+            <a:srgbClr val="FFFFFF"/>
+          </a:solidFill>
+          <a:ln>
+            <a:noFill/>
+          </a:ln>
+          <a:effectLst/>
+        </p:spPr>
+        <p:style>
+          <a:lnRef idx="1">
+            <a:schemeClr val="accent1"/>
+          </a:lnRef>
+          <a:fillRef idx="3">
+            <a:schemeClr val="accent1"/>
+          </a:fillRef>
+          <a:effectRef idx="2">
+            <a:schemeClr val="accent1"/>
+          </a:effectRef>
+          <a:fontRef idx="minor">
+            <a:schemeClr val="lt1"/>
+          </a:fontRef>
+        </p:style>
+        <p:txBody>
+          <a:bodyPr rtlCol="0" anchor="ctr"/>
+          <a:lstStyle/>
+          <a:p>
+            <a:pPr algn="ctr"/>
+            <a:endParaRPr/>
+          </a:p>
+        </p:txBody>
+      </p:sp>
+      <p:sp>
+        <p:nvSpPr>
+          <p:cNvPr id="3" name="TextBox 2"/>
+          <p:cNvSpPr txBox="1"/>
+          <p:nvPr/>
+        </p:nvSpPr>
+        <p:spPr>
+          <a:xfrm>
+            <a:off x="548640" y="320040"/>
+            <a:ext cx="7315200" cy="365760"/>
+          </a:xfrm>
+          <a:prstGeom prst="rect">
+            <a:avLst/>
+          </a:prstGeom>
+          <a:noFill/>
+        </p:spPr>
+        <p:txBody>
+          <a:bodyPr wrap="none">
+            <a:spAutoFit/>
+          </a:bodyPr>
+          <a:lstStyle/>
+          <a:p>
+            <a:pPr>
+              <a:defRPr sz="1600" b="1">
+                <a:solidFill>
+                  <a:srgbClr val="0066CC"/>
+                </a:solidFill>
+                <a:latin typeface="Segoe UI"/>
+              </a:defRPr>
+            </a:pPr>
+            <a:r>
+              <a:t>PADB Interactive</a:t>
+            </a:r>
+          </a:p>
+        </p:txBody>
+      </p:sp>
+      <p:sp>
+        <p:nvSpPr>
+          <p:cNvPr id="4" name="TextBox 3"/>
+          <p:cNvSpPr txBox="1"/>
+          <p:nvPr/>
+        </p:nvSpPr>
+        <p:spPr>
+          <a:xfrm>
+            <a:off x="548640" y="658368"/>
+            <a:ext cx="11064240" cy="822960"/>
+          </a:xfrm>
+          <a:prstGeom prst="rect">
+            <a:avLst/>
+          </a:prstGeom>
+          <a:noFill/>
+        </p:spPr>
+        <p:txBody>
+          <a:bodyPr wrap="square">
+            <a:spAutoFit/>
+          </a:bodyPr>
+          <a:lstStyle/>
+          <a:p>
+            <a:pPr>
+              <a:defRPr sz="3200" b="1">
+                <a:solidFill>
+                  <a:srgbClr val="1B2A4A"/>
+                </a:solidFill>
+                <a:latin typeface="Segoe UI"/>
+              </a:defRPr>
+            </a:pPr>
+            <a:r>
+              <a:t>Two-Step Workflow</a:t>
+            </a:r>
+          </a:p>
+        </p:txBody>
+      </p:sp>
+      <p:cxnSp>
+        <p:nvCxnSpPr>
+          <p:cNvPr id="5" name="Connector 4"/>
+          <p:cNvCxnSpPr/>
+          <p:nvPr/>
+        </p:nvCxnSpPr>
+        <p:spPr>
+          <a:xfrm>
+            <a:off x="548640" y="1417320"/>
+            <a:ext cx="11091672" cy="0"/>
+          </a:xfrm>
+          <a:prstGeom prst="line">
+            <a:avLst/>
+          </a:prstGeom>
+          <a:ln w="28575">
+            <a:solidFill>
+              <a:srgbClr val="0066CC"/>
+            </a:solidFill>
+          </a:ln>
+        </p:spPr>
+        <p:style>
+          <a:lnRef idx="2">
+            <a:schemeClr val="accent1"/>
+          </a:lnRef>
+          <a:fillRef idx="0">
+            <a:schemeClr val="accent1"/>
+          </a:fillRef>
+          <a:effectRef idx="1">
+            <a:schemeClr val="accent1"/>
+          </a:effectRef>
+          <a:fontRef idx="minor">
+            <a:schemeClr val="tx1"/>
+          </a:fontRef>
+        </p:style>
+      </p:cxnSp>
+      <p:sp>
+        <p:nvSpPr>
+          <p:cNvPr id="6" name="TextBox 5"/>
+          <p:cNvSpPr txBox="1"/>
+          <p:nvPr/>
+        </p:nvSpPr>
+        <p:spPr>
+          <a:xfrm>
+            <a:off x="548640" y="6473952"/>
+            <a:ext cx="8229600" cy="320040"/>
+          </a:xfrm>
+          <a:prstGeom prst="rect">
+            <a:avLst/>
+          </a:prstGeom>
+          <a:noFill/>
+        </p:spPr>
+        <p:txBody>
+          <a:bodyPr wrap="none">
+            <a:spAutoFit/>
+          </a:bodyPr>
+          <a:lstStyle/>
+          <a:p>
+            <a:pPr>
+              <a:defRPr sz="1100">
+                <a:solidFill>
+                  <a:srgbClr val="555555"/>
+                </a:solidFill>
+                <a:latin typeface="Segoe UI"/>
+              </a:defRPr>
+            </a:pPr>
+            <a:r>
+              <a:t>padb-tools</a:t>
+            </a:r>
+          </a:p>
+        </p:txBody>
+      </p:sp>
+      <p:sp>
+        <p:nvSpPr>
+          <p:cNvPr id="7" name="TextBox 6"/>
+          <p:cNvSpPr txBox="1"/>
+          <p:nvPr/>
+        </p:nvSpPr>
+        <p:spPr>
+          <a:xfrm>
+            <a:off x="11338560" y="6473952"/>
+            <a:ext cx="548640" cy="320040"/>
+          </a:xfrm>
+          <a:prstGeom prst="rect">
+            <a:avLst/>
+          </a:prstGeom>
+          <a:noFill/>
+        </p:spPr>
+        <p:txBody>
+          <a:bodyPr wrap="none">
+            <a:spAutoFit/>
+          </a:bodyPr>
+          <a:lstStyle/>
+          <a:p>
+            <a:pPr algn="r">
+              <a:defRPr sz="1100">
+                <a:solidFill>
+                  <a:srgbClr val="555555"/>
+                </a:solidFill>
+              </a:defRPr>
+            </a:pPr>
+            <a:r>
+              <a:t>9</a:t>
+            </a:r>
+          </a:p>
+        </p:txBody>
+      </p:sp>
+      <p:sp>
+        <p:nvSpPr>
+          <p:cNvPr id="8" name="Oval 7"/>
+          <p:cNvSpPr/>
+          <p:nvPr/>
+        </p:nvSpPr>
+        <p:spPr>
+          <a:xfrm>
+            <a:off x="822960" y="1828800"/>
+            <a:ext cx="822960" cy="822960"/>
+          </a:xfrm>
+          <a:prstGeom prst="ellipse">
+            <a:avLst/>
+          </a:prstGeom>
+          <a:solidFill>
+            <a:srgbClr val="0066CC"/>
+          </a:solidFill>
+          <a:ln>
+            <a:noFill/>
+          </a:ln>
+        </p:spPr>
+        <p:style>
+          <a:lnRef idx="1">
+            <a:schemeClr val="accent1"/>
+          </a:lnRef>
+          <a:fillRef idx="3">
+            <a:schemeClr val="accent1"/>
+          </a:fillRef>
+          <a:effectRef idx="2">
+            <a:schemeClr val="accent1"/>
+          </a:effectRef>
+          <a:fontRef idx="minor">
+            <a:schemeClr val="lt1"/>
+          </a:fontRef>
+        </p:style>
+        <p:txBody>
+          <a:bodyPr rtlCol="0" anchor="ctr"/>
+          <a:lstStyle/>
+          <a:p>
+            <a:pPr algn="ctr">
+              <a:defRPr sz="3000" b="1">
+                <a:solidFill>
+                  <a:srgbClr val="FFFFFF"/>
+                </a:solidFill>
+              </a:defRPr>
+            </a:pPr>
+            <a:r>
+              <a:t>1</a:t>
+            </a:r>
+          </a:p>
+        </p:txBody>
+      </p:sp>
+      <p:sp>
+        <p:nvSpPr>
+          <p:cNvPr id="9" name="TextBox 8"/>
+          <p:cNvSpPr txBox="1"/>
+          <p:nvPr/>
+        </p:nvSpPr>
+        <p:spPr>
+          <a:xfrm>
+            <a:off x="1828800" y="1828800"/>
+            <a:ext cx="4114800" cy="548640"/>
+          </a:xfrm>
+          <a:prstGeom prst="rect">
+            <a:avLst/>
+          </a:prstGeom>
+          <a:noFill/>
+        </p:spPr>
+        <p:txBody>
+          <a:bodyPr wrap="none">
+            <a:spAutoFit/>
+          </a:bodyPr>
+          <a:lstStyle/>
+          <a:p>
+            <a:pPr>
+              <a:defRPr sz="2600" b="1">
+                <a:solidFill>
+                  <a:srgbClr val="1B2A4A"/>
+                </a:solidFill>
+              </a:defRPr>
+            </a:pPr>
+            <a:r>
+              <a:t>Extract</a:t>
+            </a:r>
+          </a:p>
+        </p:txBody>
+      </p:sp>
+      <p:sp>
+        <p:nvSpPr>
+          <p:cNvPr id="10" name="Rounded Rectangle 9"/>
+          <p:cNvSpPr/>
+          <p:nvPr/>
+        </p:nvSpPr>
+        <p:spPr>
+          <a:xfrm>
+            <a:off x="822960" y="2834640"/>
+            <a:ext cx="4937760" cy="502920"/>
           </a:xfrm>
           <a:prstGeom prst="roundRect">
             <a:avLst>
@@ -22279,7 +22495,7 @@
           </a:fontRef>
         </p:style>
         <p:txBody>
-          <a:bodyPr rtlCol="0" anchor="t" wrap="square" lIns="228600" rIns="228600" tIns="164592" bIns="164592"/>
+          <a:bodyPr wrap="square" lIns="228600" tIns="164592" rIns="228600" bIns="164592" rtlCol="0" anchor="t"/>
           <a:lstStyle/>
           <a:p>
             <a:pPr algn="l">
@@ -22294,21 +22510,21 @@
                 </a:solidFill>
                 <a:latin typeface="Consolas"/>
               </a:rPr>
-              <a:t>py padb_run.py MyPod_job.json</a:t>
-            </a:r>
-          </a:p>
-        </p:txBody>
-      </p:sp>
-      <p:sp>
-        <p:nvSpPr>
-          <p:cNvPr id="12" name="TextBox 11"/>
-          <p:cNvSpPr txBox="1"/>
-          <p:nvPr/>
-        </p:nvSpPr>
-        <p:spPr>
-          <a:xfrm>
-            <a:off x="548640" y="3977639"/>
-            <a:ext cx="11064240" cy="2103120"/>
+              <a:t>py padb_run.py ...</a:t>
+            </a:r>
+          </a:p>
+        </p:txBody>
+      </p:sp>
+      <p:sp>
+        <p:nvSpPr>
+          <p:cNvPr id="11" name="TextBox 10"/>
+          <p:cNvSpPr txBox="1"/>
+          <p:nvPr/>
+        </p:nvSpPr>
+        <p:spPr>
+          <a:xfrm>
+            <a:off x="822960" y="3520440"/>
+            <a:ext cx="4937760" cy="1097280"/>
           </a:xfrm>
           <a:prstGeom prst="rect">
             <a:avLst/>
@@ -22322,710 +22538,31 @@
           <a:lstStyle/>
           <a:p>
             <a:pPr>
-              <a:spcAft>
-                <a:spcPts val="1000"/>
-              </a:spcAft>
-            </a:pPr>
-            <a:r>
-              <a:rPr sz="1800">
-                <a:solidFill>
-                  <a:srgbClr val="1B2A4A"/>
-                </a:solidFill>
-                <a:latin typeface="Segoe UI"/>
-              </a:rPr>
-              <a:t>•  --module MyModule names the publish subfolder — always explicit, never guessed (more on slide 12)</a:t>
-            </a:r>
-          </a:p>
-          <a:p>
-            <a:pPr>
-              <a:spcAft>
-                <a:spcPts val="1000"/>
-              </a:spcAft>
-            </a:pPr>
-            <a:r>
-              <a:rPr sz="1800">
-                <a:solidFill>
-                  <a:srgbClr val="1B2A4A"/>
-                </a:solidFill>
-                <a:latin typeface="Segoe UI"/>
-              </a:rPr>
-              <a:t>•  Output: results_dir\index.html — one card per native PNG (linked to its PDF)</a:t>
-            </a:r>
-          </a:p>
-          <a:p>
-            <a:pPr>
-              <a:spcAft>
-                <a:spcPts val="1000"/>
-              </a:spcAft>
-            </a:pPr>
-            <a:r>
-              <a:rPr sz="1800">
-                <a:solidFill>
-                  <a:srgbClr val="1B2A4A"/>
-                </a:solidFill>
-                <a:latin typeface="Segoe UI"/>
-              </a:rPr>
-              <a:t>•  HOW_TO_USE.txt is written alongside it, explaining what this tier does and doesn't do</a:t>
-            </a:r>
-          </a:p>
-          <a:p>
-            <a:pPr>
-              <a:spcAft>
-                <a:spcPts val="1000"/>
-              </a:spcAft>
-            </a:pPr>
-            <a:r>
-              <a:rPr sz="1800">
-                <a:solidFill>
-                  <a:srgbClr val="1B2A4A"/>
-                </a:solidFill>
-                <a:latin typeface="Segoe UI"/>
-              </a:rPr>
-              <a:t>•  Re-plot without re-extracting: py padb_run.py MyPod_job.json --plots-only</a:t>
-            </a:r>
-          </a:p>
-        </p:txBody>
-      </p:sp>
-    </p:spTree>
-  </p:cSld>
-  <p:clrMapOvr>
-    <a:masterClrMapping/>
-  </p:clrMapOvr>
-</p:sld>
-</file>
-
-<file path=ppt/slides/slide8.xml><?xml version="1.0" encoding="utf-8"?>
-<p:sld xmlns:a="http://schemas.openxmlformats.org/drawingml/2006/main" xmlns:p="http://schemas.openxmlformats.org/presentationml/2006/main" xmlns:r="http://schemas.openxmlformats.org/officeDocument/2006/relationships">
-  <p:cSld>
-    <p:spTree>
-      <p:nvGrpSpPr>
-        <p:cNvPr id="1" name=""/>
-        <p:cNvGrpSpPr/>
-        <p:nvPr/>
-      </p:nvGrpSpPr>
-      <p:grpSpPr/>
-      <p:sp>
-        <p:nvSpPr>
-          <p:cNvPr id="2" name="Rectangle 1"/>
+              <a:defRPr sz="1500">
+                <a:solidFill>
+                  <a:srgbClr val="555555"/>
+                </a:solidFill>
+              </a:defRPr>
+            </a:pPr>
+            <a:r>
+              <a:t>Runs PADB-R.exe, writes a</a:t>
+            </a:r>
+            <a:br/>
+            <a:r>
+              <a:t>fresh CSV from the DB</a:t>
+            </a:r>
+          </a:p>
+        </p:txBody>
+      </p:sp>
+      <p:sp>
+        <p:nvSpPr>
+          <p:cNvPr id="12" name="Oval 11"/>
           <p:cNvSpPr/>
           <p:nvPr/>
         </p:nvSpPr>
         <p:spPr>
           <a:xfrm>
-            <a:off x="0" y="0"/>
-            <a:ext cx="12191695" cy="6858000"/>
-          </a:xfrm>
-          <a:prstGeom prst="rect">
-            <a:avLst/>
-          </a:prstGeom>
-          <a:solidFill>
-            <a:srgbClr val="FFFFFF"/>
-          </a:solidFill>
-          <a:ln>
-            <a:noFill/>
-          </a:ln>
-          <a:effectLst/>
-        </p:spPr>
-        <p:style>
-          <a:lnRef idx="1">
-            <a:schemeClr val="accent1"/>
-          </a:lnRef>
-          <a:fillRef idx="3">
-            <a:schemeClr val="accent1"/>
-          </a:fillRef>
-          <a:effectRef idx="2">
-            <a:schemeClr val="accent1"/>
-          </a:effectRef>
-          <a:fontRef idx="minor">
-            <a:schemeClr val="lt1"/>
-          </a:fontRef>
-        </p:style>
-        <p:txBody>
-          <a:bodyPr rtlCol="0" anchor="ctr"/>
-          <a:lstStyle/>
-          <a:p>
-            <a:pPr algn="ctr"/>
-          </a:p>
-        </p:txBody>
-      </p:sp>
-      <p:sp>
-        <p:nvSpPr>
-          <p:cNvPr id="3" name="TextBox 2"/>
-          <p:cNvSpPr txBox="1"/>
-          <p:nvPr/>
-        </p:nvSpPr>
-        <p:spPr>
-          <a:xfrm>
-            <a:off x="548640" y="320040"/>
-            <a:ext cx="7315200" cy="365760"/>
-          </a:xfrm>
-          <a:prstGeom prst="rect">
-            <a:avLst/>
-          </a:prstGeom>
-          <a:noFill/>
-        </p:spPr>
-        <p:txBody>
-          <a:bodyPr wrap="none">
-            <a:spAutoFit/>
-          </a:bodyPr>
-          <a:lstStyle/>
-          <a:p>
-            <a:pPr>
-              <a:defRPr sz="1600" b="1">
-                <a:solidFill>
-                  <a:srgbClr val="0066CC"/>
-                </a:solidFill>
-                <a:latin typeface="Segoe UI"/>
-              </a:defRPr>
-            </a:pPr>
-            <a:r>
-              <a:t>PADB Interactive</a:t>
-            </a:r>
-          </a:p>
-        </p:txBody>
-      </p:sp>
-      <p:sp>
-        <p:nvSpPr>
-          <p:cNvPr id="4" name="TextBox 3"/>
-          <p:cNvSpPr txBox="1"/>
-          <p:nvPr/>
-        </p:nvSpPr>
-        <p:spPr>
-          <a:xfrm>
-            <a:off x="548640" y="658368"/>
-            <a:ext cx="11064240" cy="822960"/>
-          </a:xfrm>
-          <a:prstGeom prst="rect">
-            <a:avLst/>
-          </a:prstGeom>
-          <a:noFill/>
-        </p:spPr>
-        <p:txBody>
-          <a:bodyPr wrap="square">
-            <a:spAutoFit/>
-          </a:bodyPr>
-          <a:lstStyle/>
-          <a:p>
-            <a:pPr>
-              <a:defRPr sz="3200" b="1">
-                <a:solidFill>
-                  <a:srgbClr val="1B2A4A"/>
-                </a:solidFill>
-                <a:latin typeface="Segoe UI"/>
-              </a:defRPr>
-            </a:pPr>
-            <a:r>
-              <a:t>What It Is</a:t>
-            </a:r>
-          </a:p>
-        </p:txBody>
-      </p:sp>
-      <p:cxnSp>
-        <p:nvCxnSpPr>
-          <p:cNvPr id="5" name="Connector 4"/>
-          <p:cNvCxnSpPr/>
-          <p:nvPr/>
-        </p:nvCxnSpPr>
-        <p:spPr>
-          <a:xfrm>
-            <a:off x="548640" y="1417320"/>
-            <a:ext cx="11091672" cy="0"/>
-          </a:xfrm>
-          <a:prstGeom prst="line">
-            <a:avLst/>
-          </a:prstGeom>
-          <a:ln w="28575">
-            <a:solidFill>
-              <a:srgbClr val="0066CC"/>
-            </a:solidFill>
-          </a:ln>
-        </p:spPr>
-        <p:style>
-          <a:lnRef idx="2">
-            <a:schemeClr val="accent1"/>
-          </a:lnRef>
-          <a:fillRef idx="0">
-            <a:schemeClr val="accent1"/>
-          </a:fillRef>
-          <a:effectRef idx="1">
-            <a:schemeClr val="accent1"/>
-          </a:effectRef>
-          <a:fontRef idx="minor">
-            <a:schemeClr val="tx1"/>
-          </a:fontRef>
-        </p:style>
-      </p:cxnSp>
-      <p:sp>
-        <p:nvSpPr>
-          <p:cNvPr id="6" name="TextBox 5"/>
-          <p:cNvSpPr txBox="1"/>
-          <p:nvPr/>
-        </p:nvSpPr>
-        <p:spPr>
-          <a:xfrm>
-            <a:off x="548640" y="6473952"/>
-            <a:ext cx="8229600" cy="320040"/>
-          </a:xfrm>
-          <a:prstGeom prst="rect">
-            <a:avLst/>
-          </a:prstGeom>
-          <a:noFill/>
-        </p:spPr>
-        <p:txBody>
-          <a:bodyPr wrap="none">
-            <a:spAutoFit/>
-          </a:bodyPr>
-          <a:lstStyle/>
-          <a:p>
-            <a:pPr>
-              <a:defRPr sz="1100">
-                <a:solidFill>
-                  <a:srgbClr val="555555"/>
-                </a:solidFill>
-                <a:latin typeface="Segoe UI"/>
-              </a:defRPr>
-            </a:pPr>
-            <a:r>
-              <a:t>padb-tools</a:t>
-            </a:r>
-          </a:p>
-        </p:txBody>
-      </p:sp>
-      <p:sp>
-        <p:nvSpPr>
-          <p:cNvPr id="7" name="TextBox 6"/>
-          <p:cNvSpPr txBox="1"/>
-          <p:nvPr/>
-        </p:nvSpPr>
-        <p:spPr>
-          <a:xfrm>
-            <a:off x="11338560" y="6473952"/>
-            <a:ext cx="548640" cy="320040"/>
-          </a:xfrm>
-          <a:prstGeom prst="rect">
-            <a:avLst/>
-          </a:prstGeom>
-          <a:noFill/>
-        </p:spPr>
-        <p:txBody>
-          <a:bodyPr wrap="none">
-            <a:spAutoFit/>
-          </a:bodyPr>
-          <a:lstStyle/>
-          <a:p>
-            <a:pPr algn="r">
-              <a:defRPr sz="1100">
-                <a:solidFill>
-                  <a:srgbClr val="555555"/>
-                </a:solidFill>
-              </a:defRPr>
-            </a:pPr>
-            <a:r>
-              <a:t>8</a:t>
-            </a:r>
-          </a:p>
-        </p:txBody>
-      </p:sp>
-      <p:sp>
-        <p:nvSpPr>
-          <p:cNvPr id="8" name="TextBox 7"/>
-          <p:cNvSpPr txBox="1"/>
-          <p:nvPr/>
-        </p:nvSpPr>
-        <p:spPr>
-          <a:xfrm>
-            <a:off x="548640" y="1645920"/>
-            <a:ext cx="11064240" cy="4754880"/>
-          </a:xfrm>
-          <a:prstGeom prst="rect">
-            <a:avLst/>
-          </a:prstGeom>
-          <a:noFill/>
-        </p:spPr>
-        <p:txBody>
-          <a:bodyPr wrap="square">
-            <a:spAutoFit/>
-          </a:bodyPr>
-          <a:lstStyle/>
-          <a:p>
-            <a:pPr>
-              <a:spcAft>
-                <a:spcPts val="1000"/>
-              </a:spcAft>
-            </a:pPr>
-            <a:r>
-              <a:rPr sz="1900">
-                <a:solidFill>
-                  <a:srgbClr val="1B2A4A"/>
-                </a:solidFill>
-                <a:latin typeface="Segoe UI"/>
-              </a:rPr>
-              <a:t>•  The full modern interactive suite — six views from one Type=80 Scatter CSV</a:t>
-            </a:r>
-          </a:p>
-          <a:p>
-            <a:pPr>
-              <a:spcAft>
-                <a:spcPts val="1000"/>
-              </a:spcAft>
-            </a:pPr>
-            <a:r>
-              <a:rPr sz="1900">
-                <a:solidFill>
-                  <a:srgbClr val="1B2A4A"/>
-                </a:solidFill>
-                <a:latin typeface="Segoe UI"/>
-              </a:rPr>
-              <a:t>•  scatter, stat_summary, boxplot, distribution, env_coverage, summary</a:t>
-            </a:r>
-          </a:p>
-          <a:p>
-            <a:pPr>
-              <a:spcAft>
-                <a:spcPts val="1000"/>
-              </a:spcAft>
-            </a:pPr>
-            <a:r>
-              <a:rPr sz="1900">
-                <a:solidFill>
-                  <a:srgbClr val="1B2A4A"/>
-                </a:solidFill>
-                <a:latin typeface="Segoe UI"/>
-              </a:rPr>
-              <a:t>•  Auto-selects the right view set from the data itself:</a:t>
-            </a:r>
-          </a:p>
-          <a:p>
-            <a:pPr lvl="1">
-              <a:spcAft>
-                <a:spcPts val="600"/>
-              </a:spcAft>
-            </a:pPr>
-            <a:r>
-              <a:rPr sz="1700">
-                <a:solidFill>
-                  <a:srgbClr val="555555"/>
-                </a:solidFill>
-                <a:latin typeface="Segoe UI"/>
-              </a:rPr>
-              <a:t>–  Room-only data → scatter + boxplot</a:t>
-            </a:r>
-          </a:p>
-          <a:p>
-            <a:pPr lvl="1">
-              <a:spcAft>
-                <a:spcPts val="600"/>
-              </a:spcAft>
-            </a:pPr>
-            <a:r>
-              <a:rPr sz="1700">
-                <a:solidFill>
-                  <a:srgbClr val="555555"/>
-                </a:solidFill>
-                <a:latin typeface="Segoe UI"/>
-              </a:rPr>
-              <a:t>–  Multi-temperature data → all six views</a:t>
-            </a:r>
-          </a:p>
-          <a:p>
-            <a:pPr>
-              <a:spcAft>
-                <a:spcPts val="1000"/>
-              </a:spcAft>
-            </a:pPr>
-            <a:r>
-              <a:rPr sz="1900">
-                <a:solidFill>
-                  <a:srgbClr val="1B2A4A"/>
-                </a:solidFill>
-                <a:latin typeface="Segoe UI"/>
-              </a:rPr>
-              <a:t>•  Live filters: condition, serial, port, frequency range, temperature</a:t>
-            </a:r>
-          </a:p>
-          <a:p>
-            <a:pPr>
-              <a:spcAft>
-                <a:spcPts val="1000"/>
-              </a:spcAft>
-            </a:pPr>
-            <a:r>
-              <a:rPr sz="1900">
-                <a:solidFill>
-                  <a:srgbClr val="1B2A4A"/>
-                </a:solidFill>
-                <a:latin typeface="Segoe UI"/>
-              </a:rPr>
-              <a:t>•  Tolerance intervals (parametric TI, non-parametric TI), spec pass/fail</a:t>
-            </a:r>
-          </a:p>
-          <a:p>
-            <a:pPr>
-              <a:spcAft>
-                <a:spcPts val="1000"/>
-              </a:spcAft>
-            </a:pPr>
-            <a:r>
-              <a:rPr sz="1900">
-                <a:solidFill>
-                  <a:srgbClr val="1B2A4A"/>
-                </a:solidFill>
-                <a:latin typeface="Segoe UI"/>
-              </a:rPr>
-              <a:t>•  Best for: any new pod — richer feature set, no regenerating to explore the data</a:t>
-            </a:r>
-          </a:p>
-        </p:txBody>
-      </p:sp>
-    </p:spTree>
-  </p:cSld>
-  <p:clrMapOvr>
-    <a:masterClrMapping/>
-  </p:clrMapOvr>
-</p:sld>
-</file>
-
-<file path=ppt/slides/slide9.xml><?xml version="1.0" encoding="utf-8"?>
-<p:sld xmlns:a="http://schemas.openxmlformats.org/drawingml/2006/main" xmlns:p="http://schemas.openxmlformats.org/presentationml/2006/main" xmlns:r="http://schemas.openxmlformats.org/officeDocument/2006/relationships">
-  <p:cSld>
-    <p:spTree>
-      <p:nvGrpSpPr>
-        <p:cNvPr id="1" name=""/>
-        <p:cNvGrpSpPr/>
-        <p:nvPr/>
-      </p:nvGrpSpPr>
-      <p:grpSpPr/>
-      <p:sp>
-        <p:nvSpPr>
-          <p:cNvPr id="2" name="Rectangle 1"/>
-          <p:cNvSpPr/>
-          <p:nvPr/>
-        </p:nvSpPr>
-        <p:spPr>
-          <a:xfrm>
-            <a:off x="0" y="0"/>
-            <a:ext cx="12191695" cy="6858000"/>
-          </a:xfrm>
-          <a:prstGeom prst="rect">
-            <a:avLst/>
-          </a:prstGeom>
-          <a:solidFill>
-            <a:srgbClr val="FFFFFF"/>
-          </a:solidFill>
-          <a:ln>
-            <a:noFill/>
-          </a:ln>
-          <a:effectLst/>
-        </p:spPr>
-        <p:style>
-          <a:lnRef idx="1">
-            <a:schemeClr val="accent1"/>
-          </a:lnRef>
-          <a:fillRef idx="3">
-            <a:schemeClr val="accent1"/>
-          </a:fillRef>
-          <a:effectRef idx="2">
-            <a:schemeClr val="accent1"/>
-          </a:effectRef>
-          <a:fontRef idx="minor">
-            <a:schemeClr val="lt1"/>
-          </a:fontRef>
-        </p:style>
-        <p:txBody>
-          <a:bodyPr rtlCol="0" anchor="ctr"/>
-          <a:lstStyle/>
-          <a:p>
-            <a:pPr algn="ctr"/>
-          </a:p>
-        </p:txBody>
-      </p:sp>
-      <p:sp>
-        <p:nvSpPr>
-          <p:cNvPr id="3" name="TextBox 2"/>
-          <p:cNvSpPr txBox="1"/>
-          <p:nvPr/>
-        </p:nvSpPr>
-        <p:spPr>
-          <a:xfrm>
-            <a:off x="548640" y="320040"/>
-            <a:ext cx="7315200" cy="365760"/>
-          </a:xfrm>
-          <a:prstGeom prst="rect">
-            <a:avLst/>
-          </a:prstGeom>
-          <a:noFill/>
-        </p:spPr>
-        <p:txBody>
-          <a:bodyPr wrap="none">
-            <a:spAutoFit/>
-          </a:bodyPr>
-          <a:lstStyle/>
-          <a:p>
-            <a:pPr>
-              <a:defRPr sz="1600" b="1">
-                <a:solidFill>
-                  <a:srgbClr val="0066CC"/>
-                </a:solidFill>
-                <a:latin typeface="Segoe UI"/>
-              </a:defRPr>
-            </a:pPr>
-            <a:r>
-              <a:t>PADB Interactive</a:t>
-            </a:r>
-          </a:p>
-        </p:txBody>
-      </p:sp>
-      <p:sp>
-        <p:nvSpPr>
-          <p:cNvPr id="4" name="TextBox 3"/>
-          <p:cNvSpPr txBox="1"/>
-          <p:nvPr/>
-        </p:nvSpPr>
-        <p:spPr>
-          <a:xfrm>
-            <a:off x="548640" y="658368"/>
-            <a:ext cx="11064240" cy="822960"/>
-          </a:xfrm>
-          <a:prstGeom prst="rect">
-            <a:avLst/>
-          </a:prstGeom>
-          <a:noFill/>
-        </p:spPr>
-        <p:txBody>
-          <a:bodyPr wrap="square">
-            <a:spAutoFit/>
-          </a:bodyPr>
-          <a:lstStyle/>
-          <a:p>
-            <a:pPr>
-              <a:defRPr sz="3200" b="1">
-                <a:solidFill>
-                  <a:srgbClr val="1B2A4A"/>
-                </a:solidFill>
-                <a:latin typeface="Segoe UI"/>
-              </a:defRPr>
-            </a:pPr>
-            <a:r>
-              <a:t>Two-Step Workflow</a:t>
-            </a:r>
-          </a:p>
-        </p:txBody>
-      </p:sp>
-      <p:cxnSp>
-        <p:nvCxnSpPr>
-          <p:cNvPr id="5" name="Connector 4"/>
-          <p:cNvCxnSpPr/>
-          <p:nvPr/>
-        </p:nvCxnSpPr>
-        <p:spPr>
-          <a:xfrm>
-            <a:off x="548640" y="1417320"/>
-            <a:ext cx="11091672" cy="0"/>
-          </a:xfrm>
-          <a:prstGeom prst="line">
-            <a:avLst/>
-          </a:prstGeom>
-          <a:ln w="28575">
-            <a:solidFill>
-              <a:srgbClr val="0066CC"/>
-            </a:solidFill>
-          </a:ln>
-        </p:spPr>
-        <p:style>
-          <a:lnRef idx="2">
-            <a:schemeClr val="accent1"/>
-          </a:lnRef>
-          <a:fillRef idx="0">
-            <a:schemeClr val="accent1"/>
-          </a:fillRef>
-          <a:effectRef idx="1">
-            <a:schemeClr val="accent1"/>
-          </a:effectRef>
-          <a:fontRef idx="minor">
-            <a:schemeClr val="tx1"/>
-          </a:fontRef>
-        </p:style>
-      </p:cxnSp>
-      <p:sp>
-        <p:nvSpPr>
-          <p:cNvPr id="6" name="TextBox 5"/>
-          <p:cNvSpPr txBox="1"/>
-          <p:nvPr/>
-        </p:nvSpPr>
-        <p:spPr>
-          <a:xfrm>
-            <a:off x="548640" y="6473952"/>
-            <a:ext cx="8229600" cy="320040"/>
-          </a:xfrm>
-          <a:prstGeom prst="rect">
-            <a:avLst/>
-          </a:prstGeom>
-          <a:noFill/>
-        </p:spPr>
-        <p:txBody>
-          <a:bodyPr wrap="none">
-            <a:spAutoFit/>
-          </a:bodyPr>
-          <a:lstStyle/>
-          <a:p>
-            <a:pPr>
-              <a:defRPr sz="1100">
-                <a:solidFill>
-                  <a:srgbClr val="555555"/>
-                </a:solidFill>
-                <a:latin typeface="Segoe UI"/>
-              </a:defRPr>
-            </a:pPr>
-            <a:r>
-              <a:t>padb-tools</a:t>
-            </a:r>
-          </a:p>
-        </p:txBody>
-      </p:sp>
-      <p:sp>
-        <p:nvSpPr>
-          <p:cNvPr id="7" name="TextBox 6"/>
-          <p:cNvSpPr txBox="1"/>
-          <p:nvPr/>
-        </p:nvSpPr>
-        <p:spPr>
-          <a:xfrm>
-            <a:off x="11338560" y="6473952"/>
-            <a:ext cx="548640" cy="320040"/>
-          </a:xfrm>
-          <a:prstGeom prst="rect">
-            <a:avLst/>
-          </a:prstGeom>
-          <a:noFill/>
-        </p:spPr>
-        <p:txBody>
-          <a:bodyPr wrap="none">
-            <a:spAutoFit/>
-          </a:bodyPr>
-          <a:lstStyle/>
-          <a:p>
-            <a:pPr algn="r">
-              <a:defRPr sz="1100">
-                <a:solidFill>
-                  <a:srgbClr val="555555"/>
-                </a:solidFill>
-              </a:defRPr>
-            </a:pPr>
-            <a:r>
-              <a:t>9</a:t>
-            </a:r>
-          </a:p>
-        </p:txBody>
-      </p:sp>
-      <p:sp>
-        <p:nvSpPr>
-          <p:cNvPr id="8" name="Oval 7"/>
-          <p:cNvSpPr/>
-          <p:nvPr/>
-        </p:nvSpPr>
-        <p:spPr>
-          <a:xfrm>
-            <a:off x="822960" y="1828800"/>
+            <a:off x="6309360" y="1828800"/>
             <a:ext cx="822960" cy="822960"/>
           </a:xfrm>
           <a:prstGeom prst="ellipse">
@@ -23064,20 +22601,20 @@
               </a:defRPr>
             </a:pPr>
             <a:r>
-              <a:t>1</a:t>
-            </a:r>
-          </a:p>
-        </p:txBody>
-      </p:sp>
-      <p:sp>
-        <p:nvSpPr>
-          <p:cNvPr id="9" name="TextBox 8"/>
-          <p:cNvSpPr txBox="1"/>
-          <p:nvPr/>
-        </p:nvSpPr>
-        <p:spPr>
-          <a:xfrm>
-            <a:off x="1828800" y="1828800"/>
+              <a:t>2</a:t>
+            </a:r>
+          </a:p>
+        </p:txBody>
+      </p:sp>
+      <p:sp>
+        <p:nvSpPr>
+          <p:cNvPr id="13" name="TextBox 12"/>
+          <p:cNvSpPr txBox="1"/>
+          <p:nvPr/>
+        </p:nvSpPr>
+        <p:spPr>
+          <a:xfrm>
+            <a:off x="7315200" y="1828800"/>
             <a:ext cx="4114800" cy="548640"/>
           </a:xfrm>
           <a:prstGeom prst="rect">
@@ -23099,20 +22636,20 @@
               </a:defRPr>
             </a:pPr>
             <a:r>
-              <a:t>Extract</a:t>
-            </a:r>
-          </a:p>
-        </p:txBody>
-      </p:sp>
-      <p:sp>
-        <p:nvSpPr>
-          <p:cNvPr id="10" name="Rounded Rectangle 9"/>
+              <a:t>Plot</a:t>
+            </a:r>
+          </a:p>
+        </p:txBody>
+      </p:sp>
+      <p:sp>
+        <p:nvSpPr>
+          <p:cNvPr id="14" name="Rounded Rectangle 13"/>
           <p:cNvSpPr/>
           <p:nvPr/>
         </p:nvSpPr>
         <p:spPr>
           <a:xfrm>
-            <a:off x="822960" y="2834640"/>
+            <a:off x="6309360" y="2834640"/>
             <a:ext cx="4937760" cy="502920"/>
           </a:xfrm>
           <a:prstGeom prst="roundRect">
@@ -23145,194 +22682,7 @@
           </a:fontRef>
         </p:style>
         <p:txBody>
-          <a:bodyPr rtlCol="0" anchor="t" wrap="square" lIns="228600" rIns="228600" tIns="164592" bIns="164592"/>
-          <a:lstStyle/>
-          <a:p>
-            <a:pPr algn="l">
-              <a:spcAft>
-                <a:spcPts val="200"/>
-              </a:spcAft>
-            </a:pPr>
-            <a:r>
-              <a:rPr sz="1500">
-                <a:solidFill>
-                  <a:srgbClr val="E6E6E6"/>
-                </a:solidFill>
-                <a:latin typeface="Consolas"/>
-              </a:rPr>
-              <a:t>py padb_run.py ...</a:t>
-            </a:r>
-          </a:p>
-        </p:txBody>
-      </p:sp>
-      <p:sp>
-        <p:nvSpPr>
-          <p:cNvPr id="11" name="TextBox 10"/>
-          <p:cNvSpPr txBox="1"/>
-          <p:nvPr/>
-        </p:nvSpPr>
-        <p:spPr>
-          <a:xfrm>
-            <a:off x="822960" y="3520440"/>
-            <a:ext cx="4937760" cy="1097280"/>
-          </a:xfrm>
-          <a:prstGeom prst="rect">
-            <a:avLst/>
-          </a:prstGeom>
-          <a:noFill/>
-        </p:spPr>
-        <p:txBody>
-          <a:bodyPr wrap="square">
-            <a:spAutoFit/>
-          </a:bodyPr>
-          <a:lstStyle/>
-          <a:p>
-            <a:pPr>
-              <a:defRPr sz="1500">
-                <a:solidFill>
-                  <a:srgbClr val="555555"/>
-                </a:solidFill>
-              </a:defRPr>
-            </a:pPr>
-            <a:r>
-              <a:t>Runs PADB-R.exe, writes a</a:t>
-            </a:r>
-            <a:br/>
-            <a:r>
-              <a:t>fresh CSV from the DB</a:t>
-            </a:r>
-          </a:p>
-        </p:txBody>
-      </p:sp>
-      <p:sp>
-        <p:nvSpPr>
-          <p:cNvPr id="12" name="Oval 11"/>
-          <p:cNvSpPr/>
-          <p:nvPr/>
-        </p:nvSpPr>
-        <p:spPr>
-          <a:xfrm>
-            <a:off x="6309360" y="1828800"/>
-            <a:ext cx="822960" cy="822960"/>
-          </a:xfrm>
-          <a:prstGeom prst="ellipse">
-            <a:avLst/>
-          </a:prstGeom>
-          <a:solidFill>
-            <a:srgbClr val="0066CC"/>
-          </a:solidFill>
-          <a:ln>
-            <a:noFill/>
-          </a:ln>
-        </p:spPr>
-        <p:style>
-          <a:lnRef idx="1">
-            <a:schemeClr val="accent1"/>
-          </a:lnRef>
-          <a:fillRef idx="3">
-            <a:schemeClr val="accent1"/>
-          </a:fillRef>
-          <a:effectRef idx="2">
-            <a:schemeClr val="accent1"/>
-          </a:effectRef>
-          <a:fontRef idx="minor">
-            <a:schemeClr val="lt1"/>
-          </a:fontRef>
-        </p:style>
-        <p:txBody>
-          <a:bodyPr rtlCol="0" anchor="ctr"/>
-          <a:lstStyle/>
-          <a:p>
-            <a:pPr algn="ctr">
-              <a:defRPr sz="3000" b="1">
-                <a:solidFill>
-                  <a:srgbClr val="FFFFFF"/>
-                </a:solidFill>
-              </a:defRPr>
-            </a:pPr>
-            <a:r>
-              <a:t>2</a:t>
-            </a:r>
-          </a:p>
-        </p:txBody>
-      </p:sp>
-      <p:sp>
-        <p:nvSpPr>
-          <p:cNvPr id="13" name="TextBox 12"/>
-          <p:cNvSpPr txBox="1"/>
-          <p:nvPr/>
-        </p:nvSpPr>
-        <p:spPr>
-          <a:xfrm>
-            <a:off x="7315200" y="1828800"/>
-            <a:ext cx="4114800" cy="548640"/>
-          </a:xfrm>
-          <a:prstGeom prst="rect">
-            <a:avLst/>
-          </a:prstGeom>
-          <a:noFill/>
-        </p:spPr>
-        <p:txBody>
-          <a:bodyPr wrap="none">
-            <a:spAutoFit/>
-          </a:bodyPr>
-          <a:lstStyle/>
-          <a:p>
-            <a:pPr>
-              <a:defRPr sz="2600" b="1">
-                <a:solidFill>
-                  <a:srgbClr val="1B2A4A"/>
-                </a:solidFill>
-              </a:defRPr>
-            </a:pPr>
-            <a:r>
-              <a:t>Plot</a:t>
-            </a:r>
-          </a:p>
-        </p:txBody>
-      </p:sp>
-      <p:sp>
-        <p:nvSpPr>
-          <p:cNvPr id="14" name="Rounded Rectangle 13"/>
-          <p:cNvSpPr/>
-          <p:nvPr/>
-        </p:nvSpPr>
-        <p:spPr>
-          <a:xfrm>
-            <a:off x="6309360" y="2834640"/>
-            <a:ext cx="4937760" cy="502920"/>
-          </a:xfrm>
-          <a:prstGeom prst="roundRect">
-            <a:avLst>
-              <a:gd name="adj" fmla="val 4000"/>
-            </a:avLst>
-          </a:prstGeom>
-          <a:solidFill>
-            <a:srgbClr val="282C34"/>
-          </a:solidFill>
-          <a:ln>
-            <a:solidFill>
-              <a:srgbClr val="111318"/>
-            </a:solidFill>
-          </a:ln>
-          <a:effectLst/>
-        </p:spPr>
-        <p:style>
-          <a:lnRef idx="1">
-            <a:schemeClr val="accent1"/>
-          </a:lnRef>
-          <a:fillRef idx="3">
-            <a:schemeClr val="accent1"/>
-          </a:fillRef>
-          <a:effectRef idx="2">
-            <a:schemeClr val="accent1"/>
-          </a:effectRef>
-          <a:fontRef idx="minor">
-            <a:schemeClr val="lt1"/>
-          </a:fontRef>
-        </p:style>
-        <p:txBody>
-          <a:bodyPr rtlCol="0" anchor="t" wrap="square" lIns="228600" rIns="228600" tIns="164592" bIns="164592"/>
+          <a:bodyPr wrap="square" lIns="228600" tIns="164592" rIns="228600" bIns="164592" rtlCol="0" anchor="t"/>
           <a:lstStyle/>
           <a:p>
             <a:pPr algn="l">
@@ -23431,6 +22781,7 @@
           <a:lstStyle/>
           <a:p>
             <a:pPr algn="ctr"/>
+            <a:endParaRPr/>
           </a:p>
         </p:txBody>
       </p:sp>
